--- a/uganda-p7-mvp/p7_t1_english_1205/p7_t1_english_1205.pptx
+++ b/uganda-p7-mvp/p7_t1_english_1205/p7_t1_english_1205.pptx
@@ -11,6 +11,8 @@
     <p:sldId id="259" r:id="rId10"/>
     <p:sldId id="260" r:id="rId11"/>
     <p:sldId id="261" r:id="rId12"/>
+    <p:sldId id="262" r:id="rId13"/>
+    <p:sldId id="263" r:id="rId14"/>
   </p:sldIdLst>
   <p:sldSz cx="12191695" cy="6858000" type="screen4x3"/>
   <p:notesSz cx="6858000" cy="9144000"/>
@@ -3209,7 +3211,7 @@
           <a:p>
             <a:r>
               <a:rPr sz="3000" b="1"/>
-              <a:t>Looking Back at Term 1</a:t>
+              <a:t>Learning goal</a:t>
             </a:r>
           </a:p>
         </p:txBody>
@@ -3243,7 +3245,7 @@
               <a:defRPr sz="2200"/>
             </a:pPr>
             <a:r>
-              <a:t>Review the topics we covered</a:t>
+              <a:t>The learner reflects on personal progress in English during Term 1 and identifies</a:t>
             </a:r>
           </a:p>
           <a:p>
@@ -3254,7 +3256,7 @@
               <a:defRPr sz="2200"/>
             </a:pPr>
             <a:r>
-              <a:t>Share our favorite English activities</a:t>
+              <a:t>areas of strength.</a:t>
             </a:r>
           </a:p>
           <a:p>
@@ -3265,18 +3267,7 @@
               <a:defRPr sz="2200"/>
             </a:pPr>
             <a:r>
-              <a:t>Discuss how our writing has improved</a:t>
-            </a:r>
-          </a:p>
-          <a:p>
-            <a:pPr>
-              <a:spcAft>
-                <a:spcPts val="800"/>
-              </a:spcAft>
-              <a:defRPr sz="2200"/>
-            </a:pPr>
-            <a:r>
-              <a:t>Prepare for our final portfolio</a:t>
+              <a:t>Lesson focus: 3.4 Final Review and Assessment</a:t>
             </a:r>
           </a:p>
         </p:txBody>
@@ -3323,7 +3314,7 @@
           <a:p>
             <a:r>
               <a:rPr sz="3000" b="1"/>
-              <a:t>What is a Portfolio?</a:t>
+              <a:t>Looking Back at Term 1</a:t>
             </a:r>
           </a:p>
         </p:txBody>
@@ -3357,7 +3348,7 @@
               <a:defRPr sz="2200"/>
             </a:pPr>
             <a:r>
-              <a:t>A collection of your best work</a:t>
+              <a:t>Review the topics we covered</a:t>
             </a:r>
           </a:p>
           <a:p>
@@ -3368,7 +3359,7 @@
               <a:defRPr sz="2200"/>
             </a:pPr>
             <a:r>
-              <a:t>Evidence of your learning</a:t>
+              <a:t>Share our favorite English activities</a:t>
             </a:r>
           </a:p>
           <a:p>
@@ -3379,7 +3370,7 @@
               <a:defRPr sz="2200"/>
             </a:pPr>
             <a:r>
-              <a:t>Criteria for selection: Neatness, Accuracy, Interest</a:t>
+              <a:t>Discuss how our writing has improved</a:t>
             </a:r>
           </a:p>
           <a:p>
@@ -3390,7 +3381,7 @@
               <a:defRPr sz="2200"/>
             </a:pPr>
             <a:r>
-              <a:t>Organized from start to finish</a:t>
+              <a:t>Prepare for our final portfolio</a:t>
             </a:r>
           </a:p>
         </p:txBody>
@@ -3437,7 +3428,7 @@
           <a:p>
             <a:r>
               <a:rPr sz="3000" b="1"/>
-              <a:t>Selecting Your Best Work</a:t>
+              <a:t>What is a Portfolio?</a:t>
             </a:r>
           </a:p>
         </p:txBody>
@@ -3471,7 +3462,7 @@
               <a:defRPr sz="2200"/>
             </a:pPr>
             <a:r>
-              <a:t>Read your compositions from Week 1 to Week 11</a:t>
+              <a:t>A collection of your best work</a:t>
             </a:r>
           </a:p>
           <a:p>
@@ -3482,7 +3473,7 @@
               <a:defRPr sz="2200"/>
             </a:pPr>
             <a:r>
-              <a:t>Compare your early work to your recent work</a:t>
+              <a:t>Evidence of your learning</a:t>
             </a:r>
           </a:p>
           <a:p>
@@ -3493,7 +3484,7 @@
               <a:defRPr sz="2200"/>
             </a:pPr>
             <a:r>
-              <a:t>Check for teacher's comments and marks</a:t>
+              <a:t>Criteria for selection: Neatness, Accuracy, Interest</a:t>
             </a:r>
           </a:p>
           <a:p>
@@ -3504,7 +3495,7 @@
               <a:defRPr sz="2200"/>
             </a:pPr>
             <a:r>
-              <a:t>Pick 3 pieces that show your best English</a:t>
+              <a:t>Organized from start to finish</a:t>
             </a:r>
           </a:p>
         </p:txBody>
@@ -3551,7 +3542,7 @@
           <a:p>
             <a:r>
               <a:rPr sz="3000" b="1"/>
-              <a:t>Creating the Portfolio Structure</a:t>
+              <a:t>Selecting Your Best Work</a:t>
             </a:r>
           </a:p>
         </p:txBody>
@@ -3585,7 +3576,7 @@
               <a:defRPr sz="2200"/>
             </a:pPr>
             <a:r>
-              <a:t>Title Page: Name, Class, Subject, Term</a:t>
+              <a:t>Read your compositions from Week 1 to Week 11</a:t>
             </a:r>
           </a:p>
           <a:p>
@@ -3596,7 +3587,7 @@
               <a:defRPr sz="2200"/>
             </a:pPr>
             <a:r>
-              <a:t>Table of Contents: List of selected work</a:t>
+              <a:t>Compare your early work to your recent work</a:t>
             </a:r>
           </a:p>
           <a:p>
@@ -3607,7 +3598,7 @@
               <a:defRPr sz="2200"/>
             </a:pPr>
             <a:r>
-              <a:t>Introduction: A short sentence about the portfolio</a:t>
+              <a:t>Check for teacher's comments and marks</a:t>
             </a:r>
           </a:p>
           <a:p>
@@ -3618,7 +3609,7 @@
               <a:defRPr sz="2200"/>
             </a:pPr>
             <a:r>
-              <a:t>Order: Chronological or by topic</a:t>
+              <a:t>Pick 3 pieces that show your best English</a:t>
             </a:r>
           </a:p>
         </p:txBody>
@@ -3665,7 +3656,7 @@
           <a:p>
             <a:r>
               <a:rPr sz="3000" b="1"/>
-              <a:t>Share Your Success!</a:t>
+              <a:t>Creating the Portfolio Structure</a:t>
             </a:r>
           </a:p>
         </p:txBody>
@@ -3699,7 +3690,7 @@
               <a:defRPr sz="2200"/>
             </a:pPr>
             <a:r>
-              <a:t>Present your portfolio to your group</a:t>
+              <a:t>Title Page: Name, Class, Subject, Term</a:t>
             </a:r>
           </a:p>
           <a:p>
@@ -3710,7 +3701,7 @@
               <a:defRPr sz="2200"/>
             </a:pPr>
             <a:r>
-              <a:t>Explain why you chose these pieces</a:t>
+              <a:t>Table of Contents: List of selected work</a:t>
             </a:r>
           </a:p>
           <a:p>
@@ -3721,7 +3712,7 @@
               <a:defRPr sz="2200"/>
             </a:pPr>
             <a:r>
-              <a:t>Listen to your friends' work</a:t>
+              <a:t>Introduction: A short sentence about the portfolio</a:t>
             </a:r>
           </a:p>
           <a:p>
@@ -3732,7 +3723,246 @@
               <a:defRPr sz="2200"/>
             </a:pPr>
             <a:r>
+              <a:t>Order: Chronological or by topic</a:t>
+            </a:r>
+          </a:p>
+        </p:txBody>
+      </p:sp>
+    </p:spTree>
+  </p:cSld>
+  <p:clrMapOvr>
+    <a:masterClrMapping/>
+  </p:clrMapOvr>
+</p:sld>
+</file>
+
+<file path=ppt/slides/slide7.xml><?xml version="1.0" encoding="utf-8"?>
+<p:sld xmlns:a="http://schemas.openxmlformats.org/drawingml/2006/main" xmlns:p="http://schemas.openxmlformats.org/presentationml/2006/main" xmlns:r="http://schemas.openxmlformats.org/officeDocument/2006/relationships">
+  <p:cSld>
+    <p:spTree>
+      <p:nvGrpSpPr>
+        <p:cNvPr id="1" name=""/>
+        <p:cNvGrpSpPr/>
+        <p:nvPr/>
+      </p:nvGrpSpPr>
+      <p:grpSpPr/>
+      <p:sp>
+        <p:nvSpPr>
+          <p:cNvPr id="2" name="TextBox 1"/>
+          <p:cNvSpPr txBox="1"/>
+          <p:nvPr/>
+        </p:nvSpPr>
+        <p:spPr>
+          <a:xfrm>
+            <a:off x="548640" y="320040"/>
+            <a:ext cx="11064240" cy="777240"/>
+          </a:xfrm>
+          <a:prstGeom prst="rect">
+            <a:avLst/>
+          </a:prstGeom>
+          <a:noFill/>
+        </p:spPr>
+        <p:txBody>
+          <a:bodyPr wrap="none">
+            <a:spAutoFit/>
+          </a:bodyPr>
+          <a:lstStyle/>
+          <a:p>
+            <a:r>
+              <a:rPr sz="3000" b="1"/>
+              <a:t>Share Your Success!</a:t>
+            </a:r>
+          </a:p>
+        </p:txBody>
+      </p:sp>
+      <p:sp>
+        <p:nvSpPr>
+          <p:cNvPr id="3" name="TextBox 2"/>
+          <p:cNvSpPr txBox="1"/>
+          <p:nvPr/>
+        </p:nvSpPr>
+        <p:spPr>
+          <a:xfrm>
+            <a:off x="868680" y="1417320"/>
+            <a:ext cx="10424160" cy="4892040"/>
+          </a:xfrm>
+          <a:prstGeom prst="rect">
+            <a:avLst/>
+          </a:prstGeom>
+          <a:noFill/>
+        </p:spPr>
+        <p:txBody>
+          <a:bodyPr wrap="square">
+            <a:spAutoFit/>
+          </a:bodyPr>
+          <a:lstStyle/>
+          <a:p>
+            <a:pPr>
+              <a:spcAft>
+                <a:spcPts val="800"/>
+              </a:spcAft>
+              <a:defRPr sz="2200"/>
+            </a:pPr>
+            <a:r>
+              <a:t>Present your portfolio to your group</a:t>
+            </a:r>
+          </a:p>
+          <a:p>
+            <a:pPr>
+              <a:spcAft>
+                <a:spcPts val="800"/>
+              </a:spcAft>
+              <a:defRPr sz="2200"/>
+            </a:pPr>
+            <a:r>
+              <a:t>Explain why you chose these pieces</a:t>
+            </a:r>
+          </a:p>
+          <a:p>
+            <a:pPr>
+              <a:spcAft>
+                <a:spcPts val="800"/>
+              </a:spcAft>
+              <a:defRPr sz="2200"/>
+            </a:pPr>
+            <a:r>
+              <a:t>Listen to your friends' work</a:t>
+            </a:r>
+          </a:p>
+          <a:p>
+            <a:pPr>
+              <a:spcAft>
+                <a:spcPts val="800"/>
+              </a:spcAft>
+              <a:defRPr sz="2200"/>
+            </a:pPr>
+            <a:r>
               <a:t>Give positive feedback</a:t>
+            </a:r>
+          </a:p>
+        </p:txBody>
+      </p:sp>
+    </p:spTree>
+  </p:cSld>
+  <p:clrMapOvr>
+    <a:masterClrMapping/>
+  </p:clrMapOvr>
+</p:sld>
+</file>
+
+<file path=ppt/slides/slide8.xml><?xml version="1.0" encoding="utf-8"?>
+<p:sld xmlns:a="http://schemas.openxmlformats.org/drawingml/2006/main" xmlns:p="http://schemas.openxmlformats.org/presentationml/2006/main" xmlns:r="http://schemas.openxmlformats.org/officeDocument/2006/relationships">
+  <p:cSld>
+    <p:spTree>
+      <p:nvGrpSpPr>
+        <p:cNvPr id="1" name=""/>
+        <p:cNvGrpSpPr/>
+        <p:nvPr/>
+      </p:nvGrpSpPr>
+      <p:grpSpPr/>
+      <p:sp>
+        <p:nvSpPr>
+          <p:cNvPr id="2" name="TextBox 1"/>
+          <p:cNvSpPr txBox="1"/>
+          <p:nvPr/>
+        </p:nvSpPr>
+        <p:spPr>
+          <a:xfrm>
+            <a:off x="548640" y="320040"/>
+            <a:ext cx="11064240" cy="777240"/>
+          </a:xfrm>
+          <a:prstGeom prst="rect">
+            <a:avLst/>
+          </a:prstGeom>
+          <a:noFill/>
+        </p:spPr>
+        <p:txBody>
+          <a:bodyPr wrap="none">
+            <a:spAutoFit/>
+          </a:bodyPr>
+          <a:lstStyle/>
+          <a:p>
+            <a:r>
+              <a:rPr sz="3000" b="1"/>
+              <a:t>Check your understanding</a:t>
+            </a:r>
+          </a:p>
+        </p:txBody>
+      </p:sp>
+      <p:sp>
+        <p:nvSpPr>
+          <p:cNvPr id="3" name="TextBox 2"/>
+          <p:cNvSpPr txBox="1"/>
+          <p:nvPr/>
+        </p:nvSpPr>
+        <p:spPr>
+          <a:xfrm>
+            <a:off x="868680" y="1417320"/>
+            <a:ext cx="10424160" cy="4892040"/>
+          </a:xfrm>
+          <a:prstGeom prst="rect">
+            <a:avLst/>
+          </a:prstGeom>
+          <a:noFill/>
+        </p:spPr>
+        <p:txBody>
+          <a:bodyPr wrap="square">
+            <a:spAutoFit/>
+          </a:bodyPr>
+          <a:lstStyle/>
+          <a:p>
+            <a:pPr>
+              <a:spcAft>
+                <a:spcPts val="800"/>
+              </a:spcAft>
+              <a:defRPr sz="2200"/>
+            </a:pPr>
+            <a:r>
+              <a:t>Which activity helped you improve your English most?</a:t>
+            </a:r>
+          </a:p>
+          <a:p>
+            <a:pPr>
+              <a:spcAft>
+                <a:spcPts val="800"/>
+              </a:spcAft>
+              <a:defRPr sz="2200"/>
+            </a:pPr>
+            <a:r>
+              <a:t>Why is it important to review our work?</a:t>
+            </a:r>
+          </a:p>
+          <a:p>
+            <a:pPr>
+              <a:spcAft>
+                <a:spcPts val="800"/>
+              </a:spcAft>
+              <a:defRPr sz="2200"/>
+            </a:pPr>
+            <a:r>
+              <a:t>What is a portfolio?</a:t>
+            </a:r>
+          </a:p>
+          <a:p>
+            <a:pPr>
+              <a:spcAft>
+                <a:spcPts val="800"/>
+              </a:spcAft>
+              <a:defRPr sz="2200"/>
+            </a:pPr>
+            <a:r>
+              <a:t>What does 'criteria' mean?</a:t>
+            </a:r>
+          </a:p>
+          <a:p>
+            <a:pPr>
+              <a:spcAft>
+                <a:spcPts val="800"/>
+              </a:spcAft>
+              <a:defRPr sz="2200"/>
+            </a:pPr>
+            <a:r>
+              <a:t>Write one answer clearly in your notebook.</a:t>
             </a:r>
           </a:p>
         </p:txBody>

--- a/uganda-p7-mvp/p7_t1_english_1205/p7_t1_english_1205.pptx
+++ b/uganda-p7-mvp/p7_t1_english_1205/p7_t1_english_1205.pptx
@@ -3097,14 +3097,100 @@
       <p:grpSpPr/>
       <p:sp>
         <p:nvSpPr>
-          <p:cNvPr id="2" name="TextBox 1"/>
+          <p:cNvPr id="2" name="Rectangle 1"/>
+          <p:cNvSpPr/>
+          <p:nvPr/>
+        </p:nvSpPr>
+        <p:spPr>
+          <a:xfrm>
+            <a:off x="0" y="0"/>
+            <a:ext cx="12191695" cy="914400"/>
+          </a:xfrm>
+          <a:prstGeom prst="rect">
+            <a:avLst/>
+          </a:prstGeom>
+          <a:solidFill>
+            <a:srgbClr val="2563EB"/>
+          </a:solidFill>
+          <a:ln>
+            <a:noFill/>
+          </a:ln>
+        </p:spPr>
+        <p:style>
+          <a:lnRef idx="1">
+            <a:schemeClr val="accent1"/>
+          </a:lnRef>
+          <a:fillRef idx="3">
+            <a:schemeClr val="accent1"/>
+          </a:fillRef>
+          <a:effectRef idx="2">
+            <a:schemeClr val="accent1"/>
+          </a:effectRef>
+          <a:fontRef idx="minor">
+            <a:schemeClr val="lt1"/>
+          </a:fontRef>
+        </p:style>
+        <p:txBody>
+          <a:bodyPr rtlCol="0" anchor="ctr"/>
+          <a:lstStyle/>
+          <a:p>
+            <a:pPr algn="ctr"/>
+          </a:p>
+        </p:txBody>
+      </p:sp>
+      <p:sp>
+        <p:nvSpPr>
+          <p:cNvPr id="3" name="Rectangle 2"/>
+          <p:cNvSpPr/>
+          <p:nvPr/>
+        </p:nvSpPr>
+        <p:spPr>
+          <a:xfrm>
+            <a:off x="0" y="914400"/>
+            <a:ext cx="164592" cy="5943600"/>
+          </a:xfrm>
+          <a:prstGeom prst="rect">
+            <a:avLst/>
+          </a:prstGeom>
+          <a:solidFill>
+            <a:srgbClr val="2563EB"/>
+          </a:solidFill>
+          <a:ln>
+            <a:noFill/>
+          </a:ln>
+        </p:spPr>
+        <p:style>
+          <a:lnRef idx="1">
+            <a:schemeClr val="accent1"/>
+          </a:lnRef>
+          <a:fillRef idx="3">
+            <a:schemeClr val="accent1"/>
+          </a:fillRef>
+          <a:effectRef idx="2">
+            <a:schemeClr val="accent1"/>
+          </a:effectRef>
+          <a:fontRef idx="minor">
+            <a:schemeClr val="lt1"/>
+          </a:fontRef>
+        </p:style>
+        <p:txBody>
+          <a:bodyPr rtlCol="0" anchor="ctr"/>
+          <a:lstStyle/>
+          <a:p>
+            <a:pPr algn="ctr"/>
+          </a:p>
+        </p:txBody>
+      </p:sp>
+      <p:sp>
+        <p:nvSpPr>
+          <p:cNvPr id="4" name="TextBox 3"/>
           <p:cNvSpPr txBox="1"/>
           <p:nvPr/>
         </p:nvSpPr>
         <p:spPr>
           <a:xfrm>
-            <a:off x="731520" y="1097280"/>
-            <a:ext cx="10698480" cy="1280160"/>
+            <a:off x="594360" y="246888"/>
+            <a:ext cx="2743200" cy="320040"/>
           </a:xfrm>
           <a:prstGeom prst="rect">
             <a:avLst/>
@@ -3112,29 +3198,32 @@
           <a:noFill/>
         </p:spPr>
         <p:txBody>
-          <a:bodyPr wrap="none">
+          <a:bodyPr wrap="square">
             <a:spAutoFit/>
           </a:bodyPr>
           <a:lstStyle/>
           <a:p>
-            <a:pPr algn="ctr"/>
-            <a:r>
-              <a:rPr sz="3400" b="1"/>
-              <a:t>3.4 Final Review and Assessment</a:t>
-            </a:r>
-          </a:p>
-        </p:txBody>
-      </p:sp>
-      <p:sp>
-        <p:nvSpPr>
-          <p:cNvPr id="3" name="TextBox 2"/>
+            <a:r>
+              <a:rPr sz="1300" b="1">
+                <a:solidFill>
+                  <a:srgbClr val="FFFFFF"/>
+                </a:solidFill>
+              </a:rPr>
+              <a:t>LESSON START</a:t>
+            </a:r>
+          </a:p>
+        </p:txBody>
+      </p:sp>
+      <p:sp>
+        <p:nvSpPr>
+          <p:cNvPr id="5" name="TextBox 4"/>
           <p:cNvSpPr txBox="1"/>
           <p:nvPr/>
         </p:nvSpPr>
         <p:spPr>
           <a:xfrm>
-            <a:off x="1463040" y="2743200"/>
-            <a:ext cx="9326880" cy="1828800"/>
+            <a:off x="8412480" y="246888"/>
+            <a:ext cx="3200400" cy="320040"/>
           </a:xfrm>
           <a:prstGeom prst="rect">
             <a:avLst/>
@@ -3142,29 +3231,200 @@
           <a:noFill/>
         </p:spPr>
         <p:txBody>
-          <a:bodyPr wrap="none">
+          <a:bodyPr wrap="square">
             <a:spAutoFit/>
           </a:bodyPr>
           <a:lstStyle/>
           <a:p>
+            <a:pPr algn="r"/>
+            <a:r>
+              <a:rPr sz="1100" b="0">
+                <a:solidFill>
+                  <a:srgbClr val="FFFFFF"/>
+                </a:solidFill>
+              </a:rPr>
+              <a:t>p7_t1_english_1205</a:t>
+            </a:r>
+          </a:p>
+        </p:txBody>
+      </p:sp>
+      <p:sp>
+        <p:nvSpPr>
+          <p:cNvPr id="6" name="TextBox 5"/>
+          <p:cNvSpPr txBox="1"/>
+          <p:nvPr/>
+        </p:nvSpPr>
+        <p:spPr>
+          <a:xfrm>
+            <a:off x="822960" y="1325880"/>
+            <a:ext cx="10698480" cy="1005840"/>
+          </a:xfrm>
+          <a:prstGeom prst="rect">
+            <a:avLst/>
+          </a:prstGeom>
+          <a:noFill/>
+        </p:spPr>
+        <p:txBody>
+          <a:bodyPr wrap="square">
+            <a:spAutoFit/>
+          </a:bodyPr>
+          <a:lstStyle/>
+          <a:p>
             <a:pPr algn="ctr"/>
             <a:r>
-              <a:rPr sz="2200"/>
+              <a:rPr sz="3400" b="1">
+                <a:solidFill>
+                  <a:srgbClr val="1A202C"/>
+                </a:solidFill>
+              </a:rPr>
+              <a:t>3.4 Final Review and Assessment</a:t>
+            </a:r>
+          </a:p>
+        </p:txBody>
+      </p:sp>
+      <p:sp>
+        <p:nvSpPr>
+          <p:cNvPr id="7" name="Rounded Rectangle 6"/>
+          <p:cNvSpPr/>
+          <p:nvPr/>
+        </p:nvSpPr>
+        <p:spPr>
+          <a:xfrm>
+            <a:off x="1143000" y="2743200"/>
+            <a:ext cx="9921240" cy="2194560"/>
+          </a:xfrm>
+          <a:prstGeom prst="roundRect">
+            <a:avLst/>
+          </a:prstGeom>
+          <a:solidFill>
+            <a:srgbClr val="EFF6FF"/>
+          </a:solidFill>
+          <a:ln w="15240">
+            <a:solidFill>
+              <a:srgbClr val="2563EB"/>
+            </a:solidFill>
+          </a:ln>
+        </p:spPr>
+        <p:style>
+          <a:lnRef idx="1">
+            <a:schemeClr val="accent1"/>
+          </a:lnRef>
+          <a:fillRef idx="3">
+            <a:schemeClr val="accent1"/>
+          </a:fillRef>
+          <a:effectRef idx="2">
+            <a:schemeClr val="accent1"/>
+          </a:effectRef>
+          <a:fontRef idx="minor">
+            <a:schemeClr val="lt1"/>
+          </a:fontRef>
+        </p:style>
+        <p:txBody>
+          <a:bodyPr rtlCol="0" anchor="ctr"/>
+          <a:lstStyle/>
+          <a:p>
+            <a:pPr algn="ctr"/>
+          </a:p>
+        </p:txBody>
+      </p:sp>
+      <p:sp>
+        <p:nvSpPr>
+          <p:cNvPr id="8" name="TextBox 7"/>
+          <p:cNvSpPr txBox="1"/>
+          <p:nvPr/>
+        </p:nvSpPr>
+        <p:spPr>
+          <a:xfrm>
+            <a:off x="1508760" y="2999232"/>
+            <a:ext cx="9189720" cy="411480"/>
+          </a:xfrm>
+          <a:prstGeom prst="rect">
+            <a:avLst/>
+          </a:prstGeom>
+          <a:noFill/>
+        </p:spPr>
+        <p:txBody>
+          <a:bodyPr wrap="square">
+            <a:spAutoFit/>
+          </a:bodyPr>
+          <a:lstStyle/>
+          <a:p>
+            <a:pPr algn="ctr"/>
+            <a:r>
+              <a:rPr sz="1800" b="1">
+                <a:solidFill>
+                  <a:srgbClr val="2563EB"/>
+                </a:solidFill>
+              </a:rPr>
               <a:t>English</a:t>
             </a:r>
           </a:p>
+        </p:txBody>
+      </p:sp>
+      <p:sp>
+        <p:nvSpPr>
+          <p:cNvPr id="9" name="TextBox 8"/>
+          <p:cNvSpPr txBox="1"/>
+          <p:nvPr/>
+        </p:nvSpPr>
+        <p:spPr>
+          <a:xfrm>
+            <a:off x="1508760" y="3611880"/>
+            <a:ext cx="9189720" cy="914400"/>
+          </a:xfrm>
+          <a:prstGeom prst="rect">
+            <a:avLst/>
+          </a:prstGeom>
+          <a:noFill/>
+        </p:spPr>
+        <p:txBody>
+          <a:bodyPr wrap="square">
+            <a:spAutoFit/>
+          </a:bodyPr>
+          <a:lstStyle/>
           <a:p>
             <a:pPr algn="ctr"/>
             <a:r>
-              <a:rPr sz="2200"/>
-              <a:t>The learner reflects on personal progress in English during Term 1 and identifies</a:t>
-            </a:r>
-          </a:p>
+              <a:rPr sz="2500" b="1">
+                <a:solidFill>
+                  <a:srgbClr val="1A202C"/>
+                </a:solidFill>
+              </a:rPr>
+              <a:t>Big question: What are the three main topics we studied this term?</a:t>
+            </a:r>
+          </a:p>
+        </p:txBody>
+      </p:sp>
+      <p:sp>
+        <p:nvSpPr>
+          <p:cNvPr id="10" name="TextBox 9"/>
+          <p:cNvSpPr txBox="1"/>
+          <p:nvPr/>
+        </p:nvSpPr>
+        <p:spPr>
+          <a:xfrm>
+            <a:off x="1508760" y="4617720"/>
+            <a:ext cx="9189720" cy="320040"/>
+          </a:xfrm>
+          <a:prstGeom prst="rect">
+            <a:avLst/>
+          </a:prstGeom>
+          <a:noFill/>
+        </p:spPr>
+        <p:txBody>
+          <a:bodyPr wrap="square">
+            <a:spAutoFit/>
+          </a:bodyPr>
+          <a:lstStyle/>
           <a:p>
             <a:pPr algn="ctr"/>
             <a:r>
-              <a:rPr sz="2200"/>
-              <a:t>areas of strength.</a:t>
+              <a:rPr sz="1500" b="0">
+                <a:solidFill>
+                  <a:srgbClr val="5B677D"/>
+                </a:solidFill>
+              </a:rPr>
+              <a:t>Think silently first. Then be ready to explain one idea.</a:t>
             </a:r>
           </a:p>
         </p:txBody>
@@ -3189,43 +3449,100 @@
       <p:grpSpPr/>
       <p:sp>
         <p:nvSpPr>
-          <p:cNvPr id="2" name="TextBox 1"/>
+          <p:cNvPr id="2" name="Rectangle 1"/>
+          <p:cNvSpPr/>
+          <p:nvPr/>
+        </p:nvSpPr>
+        <p:spPr>
+          <a:xfrm>
+            <a:off x="0" y="0"/>
+            <a:ext cx="12191695" cy="914400"/>
+          </a:xfrm>
+          <a:prstGeom prst="rect">
+            <a:avLst/>
+          </a:prstGeom>
+          <a:solidFill>
+            <a:srgbClr val="059669"/>
+          </a:solidFill>
+          <a:ln>
+            <a:noFill/>
+          </a:ln>
+        </p:spPr>
+        <p:style>
+          <a:lnRef idx="1">
+            <a:schemeClr val="accent1"/>
+          </a:lnRef>
+          <a:fillRef idx="3">
+            <a:schemeClr val="accent1"/>
+          </a:fillRef>
+          <a:effectRef idx="2">
+            <a:schemeClr val="accent1"/>
+          </a:effectRef>
+          <a:fontRef idx="minor">
+            <a:schemeClr val="lt1"/>
+          </a:fontRef>
+        </p:style>
+        <p:txBody>
+          <a:bodyPr rtlCol="0" anchor="ctr"/>
+          <a:lstStyle/>
+          <a:p>
+            <a:pPr algn="ctr"/>
+          </a:p>
+        </p:txBody>
+      </p:sp>
+      <p:sp>
+        <p:nvSpPr>
+          <p:cNvPr id="3" name="Rectangle 2"/>
+          <p:cNvSpPr/>
+          <p:nvPr/>
+        </p:nvSpPr>
+        <p:spPr>
+          <a:xfrm>
+            <a:off x="0" y="914400"/>
+            <a:ext cx="164592" cy="5943600"/>
+          </a:xfrm>
+          <a:prstGeom prst="rect">
+            <a:avLst/>
+          </a:prstGeom>
+          <a:solidFill>
+            <a:srgbClr val="059669"/>
+          </a:solidFill>
+          <a:ln>
+            <a:noFill/>
+          </a:ln>
+        </p:spPr>
+        <p:style>
+          <a:lnRef idx="1">
+            <a:schemeClr val="accent1"/>
+          </a:lnRef>
+          <a:fillRef idx="3">
+            <a:schemeClr val="accent1"/>
+          </a:fillRef>
+          <a:effectRef idx="2">
+            <a:schemeClr val="accent1"/>
+          </a:effectRef>
+          <a:fontRef idx="minor">
+            <a:schemeClr val="lt1"/>
+          </a:fontRef>
+        </p:style>
+        <p:txBody>
+          <a:bodyPr rtlCol="0" anchor="ctr"/>
+          <a:lstStyle/>
+          <a:p>
+            <a:pPr algn="ctr"/>
+          </a:p>
+        </p:txBody>
+      </p:sp>
+      <p:sp>
+        <p:nvSpPr>
+          <p:cNvPr id="4" name="TextBox 3"/>
           <p:cNvSpPr txBox="1"/>
           <p:nvPr/>
         </p:nvSpPr>
         <p:spPr>
           <a:xfrm>
-            <a:off x="548640" y="320040"/>
-            <a:ext cx="11064240" cy="777240"/>
-          </a:xfrm>
-          <a:prstGeom prst="rect">
-            <a:avLst/>
-          </a:prstGeom>
-          <a:noFill/>
-        </p:spPr>
-        <p:txBody>
-          <a:bodyPr wrap="none">
-            <a:spAutoFit/>
-          </a:bodyPr>
-          <a:lstStyle/>
-          <a:p>
-            <a:r>
-              <a:rPr sz="3000" b="1"/>
-              <a:t>Learning goal</a:t>
-            </a:r>
-          </a:p>
-        </p:txBody>
-      </p:sp>
-      <p:sp>
-        <p:nvSpPr>
-          <p:cNvPr id="3" name="TextBox 2"/>
-          <p:cNvSpPr txBox="1"/>
-          <p:nvPr/>
-        </p:nvSpPr>
-        <p:spPr>
-          <a:xfrm>
-            <a:off x="868680" y="1417320"/>
-            <a:ext cx="10424160" cy="4892040"/>
+            <a:off x="594360" y="246888"/>
+            <a:ext cx="2926080" cy="320040"/>
           </a:xfrm>
           <a:prstGeom prst="rect">
             <a:avLst/>
@@ -3238,36 +3555,657 @@
           </a:bodyPr>
           <a:lstStyle/>
           <a:p>
-            <a:pPr>
-              <a:spcAft>
-                <a:spcPts val="800"/>
-              </a:spcAft>
-              <a:defRPr sz="2200"/>
-            </a:pPr>
-            <a:r>
-              <a:t>The learner reflects on personal progress in English during Term 1 and identifies</a:t>
-            </a:r>
-          </a:p>
-          <a:p>
-            <a:pPr>
-              <a:spcAft>
-                <a:spcPts val="800"/>
-              </a:spcAft>
-              <a:defRPr sz="2200"/>
-            </a:pPr>
-            <a:r>
+            <a:r>
+              <a:rPr sz="1300" b="1">
+                <a:solidFill>
+                  <a:srgbClr val="FFFFFF"/>
+                </a:solidFill>
+              </a:rPr>
+              <a:t>2. MISSION</a:t>
+            </a:r>
+          </a:p>
+        </p:txBody>
+      </p:sp>
+      <p:sp>
+        <p:nvSpPr>
+          <p:cNvPr id="5" name="TextBox 4"/>
+          <p:cNvSpPr txBox="1"/>
+          <p:nvPr/>
+        </p:nvSpPr>
+        <p:spPr>
+          <a:xfrm>
+            <a:off x="7772400" y="246888"/>
+            <a:ext cx="3840480" cy="320040"/>
+          </a:xfrm>
+          <a:prstGeom prst="rect">
+            <a:avLst/>
+          </a:prstGeom>
+          <a:noFill/>
+        </p:spPr>
+        <p:txBody>
+          <a:bodyPr wrap="square">
+            <a:spAutoFit/>
+          </a:bodyPr>
+          <a:lstStyle/>
+          <a:p>
+            <a:pPr algn="r"/>
+            <a:r>
+              <a:rPr sz="1100" b="0">
+                <a:solidFill>
+                  <a:srgbClr val="FFFFFF"/>
+                </a:solidFill>
+              </a:rPr>
+              <a:t>p7_t1_english_1205</a:t>
+            </a:r>
+          </a:p>
+        </p:txBody>
+      </p:sp>
+      <p:sp>
+        <p:nvSpPr>
+          <p:cNvPr id="6" name="TextBox 5"/>
+          <p:cNvSpPr txBox="1"/>
+          <p:nvPr/>
+        </p:nvSpPr>
+        <p:spPr>
+          <a:xfrm>
+            <a:off x="640080" y="1143000"/>
+            <a:ext cx="10972800" cy="685800"/>
+          </a:xfrm>
+          <a:prstGeom prst="rect">
+            <a:avLst/>
+          </a:prstGeom>
+          <a:noFill/>
+        </p:spPr>
+        <p:txBody>
+          <a:bodyPr wrap="square">
+            <a:spAutoFit/>
+          </a:bodyPr>
+          <a:lstStyle/>
+          <a:p>
+            <a:r>
+              <a:rPr sz="2800" b="1">
+                <a:solidFill>
+                  <a:srgbClr val="1A202C"/>
+                </a:solidFill>
+              </a:rPr>
+              <a:t>Today's mission</a:t>
+            </a:r>
+          </a:p>
+        </p:txBody>
+      </p:sp>
+      <p:sp>
+        <p:nvSpPr>
+          <p:cNvPr id="7" name="Rounded Rectangle 6"/>
+          <p:cNvSpPr/>
+          <p:nvPr/>
+        </p:nvSpPr>
+        <p:spPr>
+          <a:xfrm>
+            <a:off x="777240" y="1993392"/>
+            <a:ext cx="10835640" cy="1005840"/>
+          </a:xfrm>
+          <a:prstGeom prst="roundRect">
+            <a:avLst/>
+          </a:prstGeom>
+          <a:solidFill>
+            <a:srgbClr val="FFFBEB"/>
+          </a:solidFill>
+          <a:ln w="15240">
+            <a:solidFill>
+              <a:srgbClr val="059669"/>
+            </a:solidFill>
+          </a:ln>
+        </p:spPr>
+        <p:style>
+          <a:lnRef idx="1">
+            <a:schemeClr val="accent1"/>
+          </a:lnRef>
+          <a:fillRef idx="3">
+            <a:schemeClr val="accent1"/>
+          </a:fillRef>
+          <a:effectRef idx="2">
+            <a:schemeClr val="accent1"/>
+          </a:effectRef>
+          <a:fontRef idx="minor">
+            <a:schemeClr val="lt1"/>
+          </a:fontRef>
+        </p:style>
+        <p:txBody>
+          <a:bodyPr rtlCol="0" anchor="ctr"/>
+          <a:lstStyle/>
+          <a:p>
+            <a:pPr algn="ctr"/>
+          </a:p>
+        </p:txBody>
+      </p:sp>
+      <p:sp>
+        <p:nvSpPr>
+          <p:cNvPr id="8" name="TextBox 7"/>
+          <p:cNvSpPr txBox="1"/>
+          <p:nvPr/>
+        </p:nvSpPr>
+        <p:spPr>
+          <a:xfrm>
+            <a:off x="1051560" y="2212848"/>
+            <a:ext cx="10287000" cy="502920"/>
+          </a:xfrm>
+          <a:prstGeom prst="rect">
+            <a:avLst/>
+          </a:prstGeom>
+          <a:noFill/>
+        </p:spPr>
+        <p:txBody>
+          <a:bodyPr wrap="square">
+            <a:spAutoFit/>
+          </a:bodyPr>
+          <a:lstStyle/>
+          <a:p>
+            <a:r>
+              <a:rPr sz="2100" b="1">
+                <a:solidFill>
+                  <a:srgbClr val="1A202C"/>
+                </a:solidFill>
+              </a:rPr>
+              <a:t>Goal: I can reflect on personal progress in English during Term 1 and identifies</a:t>
+            </a:r>
+          </a:p>
+        </p:txBody>
+      </p:sp>
+      <p:sp>
+        <p:nvSpPr>
+          <p:cNvPr id="9" name="Rounded Rectangle 8"/>
+          <p:cNvSpPr/>
+          <p:nvPr/>
+        </p:nvSpPr>
+        <p:spPr>
+          <a:xfrm>
+            <a:off x="1005840" y="3246120"/>
+            <a:ext cx="10149840" cy="731520"/>
+          </a:xfrm>
+          <a:prstGeom prst="roundRect">
+            <a:avLst/>
+          </a:prstGeom>
+          <a:solidFill>
+            <a:srgbClr val="F8FAFC"/>
+          </a:solidFill>
+          <a:ln w="15240">
+            <a:solidFill>
+              <a:srgbClr val="CBD5E1"/>
+            </a:solidFill>
+          </a:ln>
+        </p:spPr>
+        <p:style>
+          <a:lnRef idx="1">
+            <a:schemeClr val="accent1"/>
+          </a:lnRef>
+          <a:fillRef idx="3">
+            <a:schemeClr val="accent1"/>
+          </a:fillRef>
+          <a:effectRef idx="2">
+            <a:schemeClr val="accent1"/>
+          </a:effectRef>
+          <a:fontRef idx="minor">
+            <a:schemeClr val="lt1"/>
+          </a:fontRef>
+        </p:style>
+        <p:txBody>
+          <a:bodyPr rtlCol="0" anchor="ctr"/>
+          <a:lstStyle/>
+          <a:p>
+            <a:pPr algn="ctr"/>
+          </a:p>
+        </p:txBody>
+      </p:sp>
+      <p:sp>
+        <p:nvSpPr>
+          <p:cNvPr id="10" name="Oval 9"/>
+          <p:cNvSpPr/>
+          <p:nvPr/>
+        </p:nvSpPr>
+        <p:spPr>
+          <a:xfrm>
+            <a:off x="1234440" y="3364991"/>
+            <a:ext cx="347472" cy="347472"/>
+          </a:xfrm>
+          <a:prstGeom prst="ellipse">
+            <a:avLst/>
+          </a:prstGeom>
+          <a:solidFill>
+            <a:srgbClr val="059669"/>
+          </a:solidFill>
+          <a:ln>
+            <a:noFill/>
+          </a:ln>
+        </p:spPr>
+        <p:style>
+          <a:lnRef idx="1">
+            <a:schemeClr val="accent1"/>
+          </a:lnRef>
+          <a:fillRef idx="3">
+            <a:schemeClr val="accent1"/>
+          </a:fillRef>
+          <a:effectRef idx="2">
+            <a:schemeClr val="accent1"/>
+          </a:effectRef>
+          <a:fontRef idx="minor">
+            <a:schemeClr val="lt1"/>
+          </a:fontRef>
+        </p:style>
+        <p:txBody>
+          <a:bodyPr rtlCol="0" anchor="ctr"/>
+          <a:lstStyle/>
+          <a:p>
+            <a:pPr algn="ctr"/>
+          </a:p>
+        </p:txBody>
+      </p:sp>
+      <p:sp>
+        <p:nvSpPr>
+          <p:cNvPr id="11" name="TextBox 10"/>
+          <p:cNvSpPr txBox="1"/>
+          <p:nvPr/>
+        </p:nvSpPr>
+        <p:spPr>
+          <a:xfrm>
+            <a:off x="1234440" y="3410712"/>
+            <a:ext cx="347472" cy="182880"/>
+          </a:xfrm>
+          <a:prstGeom prst="rect">
+            <a:avLst/>
+          </a:prstGeom>
+          <a:noFill/>
+        </p:spPr>
+        <p:txBody>
+          <a:bodyPr wrap="square">
+            <a:spAutoFit/>
+          </a:bodyPr>
+          <a:lstStyle/>
+          <a:p>
+            <a:pPr algn="ctr"/>
+            <a:r>
+              <a:rPr sz="1000" b="1">
+                <a:solidFill>
+                  <a:srgbClr val="FFFFFF"/>
+                </a:solidFill>
+              </a:rPr>
+              <a:t>1</a:t>
+            </a:r>
+          </a:p>
+        </p:txBody>
+      </p:sp>
+      <p:sp>
+        <p:nvSpPr>
+          <p:cNvPr id="12" name="TextBox 11"/>
+          <p:cNvSpPr txBox="1"/>
+          <p:nvPr/>
+        </p:nvSpPr>
+        <p:spPr>
+          <a:xfrm>
+            <a:off x="1783080" y="3364991"/>
+            <a:ext cx="9006840" cy="347472"/>
+          </a:xfrm>
+          <a:prstGeom prst="rect">
+            <a:avLst/>
+          </a:prstGeom>
+          <a:noFill/>
+        </p:spPr>
+        <p:txBody>
+          <a:bodyPr wrap="square">
+            <a:spAutoFit/>
+          </a:bodyPr>
+          <a:lstStyle/>
+          <a:p>
+            <a:r>
+              <a:rPr sz="1700" b="0">
+                <a:solidFill>
+                  <a:srgbClr val="1A202C"/>
+                </a:solidFill>
+              </a:rPr>
               <a:t>areas of strength.</a:t>
             </a:r>
           </a:p>
-          <a:p>
-            <a:pPr>
-              <a:spcAft>
-                <a:spcPts val="800"/>
-              </a:spcAft>
-              <a:defRPr sz="2200"/>
-            </a:pPr>
-            <a:r>
-              <a:t>Lesson focus: 3.4 Final Review and Assessment</a:t>
+        </p:txBody>
+      </p:sp>
+      <p:sp>
+        <p:nvSpPr>
+          <p:cNvPr id="13" name="Rounded Rectangle 12"/>
+          <p:cNvSpPr/>
+          <p:nvPr/>
+        </p:nvSpPr>
+        <p:spPr>
+          <a:xfrm>
+            <a:off x="1005840" y="4178808"/>
+            <a:ext cx="10149840" cy="731520"/>
+          </a:xfrm>
+          <a:prstGeom prst="roundRect">
+            <a:avLst/>
+          </a:prstGeom>
+          <a:solidFill>
+            <a:srgbClr val="F8FAFC"/>
+          </a:solidFill>
+          <a:ln w="15240">
+            <a:solidFill>
+              <a:srgbClr val="CBD5E1"/>
+            </a:solidFill>
+          </a:ln>
+        </p:spPr>
+        <p:style>
+          <a:lnRef idx="1">
+            <a:schemeClr val="accent1"/>
+          </a:lnRef>
+          <a:fillRef idx="3">
+            <a:schemeClr val="accent1"/>
+          </a:fillRef>
+          <a:effectRef idx="2">
+            <a:schemeClr val="accent1"/>
+          </a:effectRef>
+          <a:fontRef idx="minor">
+            <a:schemeClr val="lt1"/>
+          </a:fontRef>
+        </p:style>
+        <p:txBody>
+          <a:bodyPr rtlCol="0" anchor="ctr"/>
+          <a:lstStyle/>
+          <a:p>
+            <a:pPr algn="ctr"/>
+          </a:p>
+        </p:txBody>
+      </p:sp>
+      <p:sp>
+        <p:nvSpPr>
+          <p:cNvPr id="14" name="Oval 13"/>
+          <p:cNvSpPr/>
+          <p:nvPr/>
+        </p:nvSpPr>
+        <p:spPr>
+          <a:xfrm>
+            <a:off x="1234440" y="4297680"/>
+            <a:ext cx="347472" cy="347472"/>
+          </a:xfrm>
+          <a:prstGeom prst="ellipse">
+            <a:avLst/>
+          </a:prstGeom>
+          <a:solidFill>
+            <a:srgbClr val="059669"/>
+          </a:solidFill>
+          <a:ln>
+            <a:noFill/>
+          </a:ln>
+        </p:spPr>
+        <p:style>
+          <a:lnRef idx="1">
+            <a:schemeClr val="accent1"/>
+          </a:lnRef>
+          <a:fillRef idx="3">
+            <a:schemeClr val="accent1"/>
+          </a:fillRef>
+          <a:effectRef idx="2">
+            <a:schemeClr val="accent1"/>
+          </a:effectRef>
+          <a:fontRef idx="minor">
+            <a:schemeClr val="lt1"/>
+          </a:fontRef>
+        </p:style>
+        <p:txBody>
+          <a:bodyPr rtlCol="0" anchor="ctr"/>
+          <a:lstStyle/>
+          <a:p>
+            <a:pPr algn="ctr"/>
+          </a:p>
+        </p:txBody>
+      </p:sp>
+      <p:sp>
+        <p:nvSpPr>
+          <p:cNvPr id="15" name="TextBox 14"/>
+          <p:cNvSpPr txBox="1"/>
+          <p:nvPr/>
+        </p:nvSpPr>
+        <p:spPr>
+          <a:xfrm>
+            <a:off x="1234440" y="4343400"/>
+            <a:ext cx="347472" cy="182880"/>
+          </a:xfrm>
+          <a:prstGeom prst="rect">
+            <a:avLst/>
+          </a:prstGeom>
+          <a:noFill/>
+        </p:spPr>
+        <p:txBody>
+          <a:bodyPr wrap="square">
+            <a:spAutoFit/>
+          </a:bodyPr>
+          <a:lstStyle/>
+          <a:p>
+            <a:pPr algn="ctr"/>
+            <a:r>
+              <a:rPr sz="1000" b="1">
+                <a:solidFill>
+                  <a:srgbClr val="FFFFFF"/>
+                </a:solidFill>
+              </a:rPr>
+              <a:t>2</a:t>
+            </a:r>
+          </a:p>
+        </p:txBody>
+      </p:sp>
+      <p:sp>
+        <p:nvSpPr>
+          <p:cNvPr id="16" name="TextBox 15"/>
+          <p:cNvSpPr txBox="1"/>
+          <p:nvPr/>
+        </p:nvSpPr>
+        <p:spPr>
+          <a:xfrm>
+            <a:off x="1783080" y="4297680"/>
+            <a:ext cx="9006840" cy="347472"/>
+          </a:xfrm>
+          <a:prstGeom prst="rect">
+            <a:avLst/>
+          </a:prstGeom>
+          <a:noFill/>
+        </p:spPr>
+        <p:txBody>
+          <a:bodyPr wrap="square">
+            <a:spAutoFit/>
+          </a:bodyPr>
+          <a:lstStyle/>
+          <a:p>
+            <a:r>
+              <a:rPr sz="1700" b="0">
+                <a:solidFill>
+                  <a:srgbClr val="1A202C"/>
+                </a:solidFill>
+              </a:rPr>
+              <a:t>You will use: Looking Back at Term 1, What is a Portfolio?</a:t>
+            </a:r>
+          </a:p>
+        </p:txBody>
+      </p:sp>
+      <p:sp>
+        <p:nvSpPr>
+          <p:cNvPr id="17" name="Rounded Rectangle 16"/>
+          <p:cNvSpPr/>
+          <p:nvPr/>
+        </p:nvSpPr>
+        <p:spPr>
+          <a:xfrm>
+            <a:off x="1005840" y="5111496"/>
+            <a:ext cx="10149840" cy="731520"/>
+          </a:xfrm>
+          <a:prstGeom prst="roundRect">
+            <a:avLst/>
+          </a:prstGeom>
+          <a:solidFill>
+            <a:srgbClr val="F8FAFC"/>
+          </a:solidFill>
+          <a:ln w="15240">
+            <a:solidFill>
+              <a:srgbClr val="CBD5E1"/>
+            </a:solidFill>
+          </a:ln>
+        </p:spPr>
+        <p:style>
+          <a:lnRef idx="1">
+            <a:schemeClr val="accent1"/>
+          </a:lnRef>
+          <a:fillRef idx="3">
+            <a:schemeClr val="accent1"/>
+          </a:fillRef>
+          <a:effectRef idx="2">
+            <a:schemeClr val="accent1"/>
+          </a:effectRef>
+          <a:fontRef idx="minor">
+            <a:schemeClr val="lt1"/>
+          </a:fontRef>
+        </p:style>
+        <p:txBody>
+          <a:bodyPr rtlCol="0" anchor="ctr"/>
+          <a:lstStyle/>
+          <a:p>
+            <a:pPr algn="ctr"/>
+          </a:p>
+        </p:txBody>
+      </p:sp>
+      <p:sp>
+        <p:nvSpPr>
+          <p:cNvPr id="18" name="Oval 17"/>
+          <p:cNvSpPr/>
+          <p:nvPr/>
+        </p:nvSpPr>
+        <p:spPr>
+          <a:xfrm>
+            <a:off x="1234440" y="5230368"/>
+            <a:ext cx="347472" cy="347472"/>
+          </a:xfrm>
+          <a:prstGeom prst="ellipse">
+            <a:avLst/>
+          </a:prstGeom>
+          <a:solidFill>
+            <a:srgbClr val="059669"/>
+          </a:solidFill>
+          <a:ln>
+            <a:noFill/>
+          </a:ln>
+        </p:spPr>
+        <p:style>
+          <a:lnRef idx="1">
+            <a:schemeClr val="accent1"/>
+          </a:lnRef>
+          <a:fillRef idx="3">
+            <a:schemeClr val="accent1"/>
+          </a:fillRef>
+          <a:effectRef idx="2">
+            <a:schemeClr val="accent1"/>
+          </a:effectRef>
+          <a:fontRef idx="minor">
+            <a:schemeClr val="lt1"/>
+          </a:fontRef>
+        </p:style>
+        <p:txBody>
+          <a:bodyPr rtlCol="0" anchor="ctr"/>
+          <a:lstStyle/>
+          <a:p>
+            <a:pPr algn="ctr"/>
+          </a:p>
+        </p:txBody>
+      </p:sp>
+      <p:sp>
+        <p:nvSpPr>
+          <p:cNvPr id="19" name="TextBox 18"/>
+          <p:cNvSpPr txBox="1"/>
+          <p:nvPr/>
+        </p:nvSpPr>
+        <p:spPr>
+          <a:xfrm>
+            <a:off x="1234440" y="5276088"/>
+            <a:ext cx="347472" cy="182880"/>
+          </a:xfrm>
+          <a:prstGeom prst="rect">
+            <a:avLst/>
+          </a:prstGeom>
+          <a:noFill/>
+        </p:spPr>
+        <p:txBody>
+          <a:bodyPr wrap="square">
+            <a:spAutoFit/>
+          </a:bodyPr>
+          <a:lstStyle/>
+          <a:p>
+            <a:pPr algn="ctr"/>
+            <a:r>
+              <a:rPr sz="1000" b="1">
+                <a:solidFill>
+                  <a:srgbClr val="FFFFFF"/>
+                </a:solidFill>
+              </a:rPr>
+              <a:t>3</a:t>
+            </a:r>
+          </a:p>
+        </p:txBody>
+      </p:sp>
+      <p:sp>
+        <p:nvSpPr>
+          <p:cNvPr id="20" name="TextBox 19"/>
+          <p:cNvSpPr txBox="1"/>
+          <p:nvPr/>
+        </p:nvSpPr>
+        <p:spPr>
+          <a:xfrm>
+            <a:off x="1783080" y="5230368"/>
+            <a:ext cx="9006840" cy="347472"/>
+          </a:xfrm>
+          <a:prstGeom prst="rect">
+            <a:avLst/>
+          </a:prstGeom>
+          <a:noFill/>
+        </p:spPr>
+        <p:txBody>
+          <a:bodyPr wrap="square">
+            <a:spAutoFit/>
+          </a:bodyPr>
+          <a:lstStyle/>
+          <a:p>
+            <a:r>
+              <a:rPr sz="1700" b="0">
+                <a:solidFill>
+                  <a:srgbClr val="1A202C"/>
+                </a:solidFill>
+              </a:rPr>
+              <a:t>Success: explain, try, and answer in your own words.</a:t>
+            </a:r>
+          </a:p>
+        </p:txBody>
+      </p:sp>
+      <p:sp>
+        <p:nvSpPr>
+          <p:cNvPr id="21" name="TextBox 20"/>
+          <p:cNvSpPr txBox="1"/>
+          <p:nvPr/>
+        </p:nvSpPr>
+        <p:spPr>
+          <a:xfrm>
+            <a:off x="777240" y="6419088"/>
+            <a:ext cx="10835640" cy="228600"/>
+          </a:xfrm>
+          <a:prstGeom prst="rect">
+            <a:avLst/>
+          </a:prstGeom>
+          <a:noFill/>
+        </p:spPr>
+        <p:txBody>
+          <a:bodyPr wrap="square">
+            <a:spAutoFit/>
+          </a:bodyPr>
+          <a:lstStyle/>
+          <a:p>
+            <a:pPr algn="r"/>
+            <a:r>
+              <a:rPr sz="1000" b="0">
+                <a:solidFill>
+                  <a:srgbClr val="5B677D"/>
+                </a:solidFill>
+              </a:rPr>
+              <a:t>Listen • Talk • Try • Explain</a:t>
             </a:r>
           </a:p>
         </p:txBody>
@@ -3292,43 +4230,100 @@
       <p:grpSpPr/>
       <p:sp>
         <p:nvSpPr>
-          <p:cNvPr id="2" name="TextBox 1"/>
+          <p:cNvPr id="2" name="Rectangle 1"/>
+          <p:cNvSpPr/>
+          <p:nvPr/>
+        </p:nvSpPr>
+        <p:spPr>
+          <a:xfrm>
+            <a:off x="0" y="0"/>
+            <a:ext cx="12191695" cy="914400"/>
+          </a:xfrm>
+          <a:prstGeom prst="rect">
+            <a:avLst/>
+          </a:prstGeom>
+          <a:solidFill>
+            <a:srgbClr val="7C3AED"/>
+          </a:solidFill>
+          <a:ln>
+            <a:noFill/>
+          </a:ln>
+        </p:spPr>
+        <p:style>
+          <a:lnRef idx="1">
+            <a:schemeClr val="accent1"/>
+          </a:lnRef>
+          <a:fillRef idx="3">
+            <a:schemeClr val="accent1"/>
+          </a:fillRef>
+          <a:effectRef idx="2">
+            <a:schemeClr val="accent1"/>
+          </a:effectRef>
+          <a:fontRef idx="minor">
+            <a:schemeClr val="lt1"/>
+          </a:fontRef>
+        </p:style>
+        <p:txBody>
+          <a:bodyPr rtlCol="0" anchor="ctr"/>
+          <a:lstStyle/>
+          <a:p>
+            <a:pPr algn="ctr"/>
+          </a:p>
+        </p:txBody>
+      </p:sp>
+      <p:sp>
+        <p:nvSpPr>
+          <p:cNvPr id="3" name="Rectangle 2"/>
+          <p:cNvSpPr/>
+          <p:nvPr/>
+        </p:nvSpPr>
+        <p:spPr>
+          <a:xfrm>
+            <a:off x="0" y="914400"/>
+            <a:ext cx="164592" cy="5943600"/>
+          </a:xfrm>
+          <a:prstGeom prst="rect">
+            <a:avLst/>
+          </a:prstGeom>
+          <a:solidFill>
+            <a:srgbClr val="7C3AED"/>
+          </a:solidFill>
+          <a:ln>
+            <a:noFill/>
+          </a:ln>
+        </p:spPr>
+        <p:style>
+          <a:lnRef idx="1">
+            <a:schemeClr val="accent1"/>
+          </a:lnRef>
+          <a:fillRef idx="3">
+            <a:schemeClr val="accent1"/>
+          </a:fillRef>
+          <a:effectRef idx="2">
+            <a:schemeClr val="accent1"/>
+          </a:effectRef>
+          <a:fontRef idx="minor">
+            <a:schemeClr val="lt1"/>
+          </a:fontRef>
+        </p:style>
+        <p:txBody>
+          <a:bodyPr rtlCol="0" anchor="ctr"/>
+          <a:lstStyle/>
+          <a:p>
+            <a:pPr algn="ctr"/>
+          </a:p>
+        </p:txBody>
+      </p:sp>
+      <p:sp>
+        <p:nvSpPr>
+          <p:cNvPr id="4" name="TextBox 3"/>
           <p:cNvSpPr txBox="1"/>
           <p:nvPr/>
         </p:nvSpPr>
         <p:spPr>
           <a:xfrm>
-            <a:off x="548640" y="320040"/>
-            <a:ext cx="11064240" cy="777240"/>
-          </a:xfrm>
-          <a:prstGeom prst="rect">
-            <a:avLst/>
-          </a:prstGeom>
-          <a:noFill/>
-        </p:spPr>
-        <p:txBody>
-          <a:bodyPr wrap="none">
-            <a:spAutoFit/>
-          </a:bodyPr>
-          <a:lstStyle/>
-          <a:p>
-            <a:r>
-              <a:rPr sz="3000" b="1"/>
-              <a:t>Looking Back at Term 1</a:t>
-            </a:r>
-          </a:p>
-        </p:txBody>
-      </p:sp>
-      <p:sp>
-        <p:nvSpPr>
-          <p:cNvPr id="3" name="TextBox 2"/>
-          <p:cNvSpPr txBox="1"/>
-          <p:nvPr/>
-        </p:nvSpPr>
-        <p:spPr>
-          <a:xfrm>
-            <a:off x="868680" y="1417320"/>
-            <a:ext cx="10424160" cy="4892040"/>
+            <a:off x="594360" y="246888"/>
+            <a:ext cx="2926080" cy="320040"/>
           </a:xfrm>
           <a:prstGeom prst="rect">
             <a:avLst/>
@@ -3341,47 +4336,502 @@
           </a:bodyPr>
           <a:lstStyle/>
           <a:p>
-            <a:pPr>
-              <a:spcAft>
-                <a:spcPts val="800"/>
-              </a:spcAft>
-              <a:defRPr sz="2200"/>
-            </a:pPr>
-            <a:r>
-              <a:t>Review the topics we covered</a:t>
-            </a:r>
-          </a:p>
-          <a:p>
-            <a:pPr>
-              <a:spcAft>
-                <a:spcPts val="800"/>
-              </a:spcAft>
-              <a:defRPr sz="2200"/>
-            </a:pPr>
-            <a:r>
-              <a:t>Share our favorite English activities</a:t>
-            </a:r>
-          </a:p>
-          <a:p>
-            <a:pPr>
-              <a:spcAft>
-                <a:spcPts val="800"/>
-              </a:spcAft>
-              <a:defRPr sz="2200"/>
-            </a:pPr>
-            <a:r>
-              <a:t>Discuss how our writing has improved</a:t>
-            </a:r>
-          </a:p>
-          <a:p>
-            <a:pPr>
-              <a:spcAft>
-                <a:spcPts val="800"/>
-              </a:spcAft>
-              <a:defRPr sz="2200"/>
-            </a:pPr>
-            <a:r>
-              <a:t>Prepare for our final portfolio</a:t>
+            <a:r>
+              <a:rPr sz="1300" b="1">
+                <a:solidFill>
+                  <a:srgbClr val="FFFFFF"/>
+                </a:solidFill>
+              </a:rPr>
+              <a:t>3. STARTER</a:t>
+            </a:r>
+          </a:p>
+        </p:txBody>
+      </p:sp>
+      <p:sp>
+        <p:nvSpPr>
+          <p:cNvPr id="5" name="TextBox 4"/>
+          <p:cNvSpPr txBox="1"/>
+          <p:nvPr/>
+        </p:nvSpPr>
+        <p:spPr>
+          <a:xfrm>
+            <a:off x="7772400" y="246888"/>
+            <a:ext cx="3840480" cy="320040"/>
+          </a:xfrm>
+          <a:prstGeom prst="rect">
+            <a:avLst/>
+          </a:prstGeom>
+          <a:noFill/>
+        </p:spPr>
+        <p:txBody>
+          <a:bodyPr wrap="square">
+            <a:spAutoFit/>
+          </a:bodyPr>
+          <a:lstStyle/>
+          <a:p>
+            <a:pPr algn="r"/>
+            <a:r>
+              <a:rPr sz="1100" b="0">
+                <a:solidFill>
+                  <a:srgbClr val="FFFFFF"/>
+                </a:solidFill>
+              </a:rPr>
+              <a:t>p7_t1_english_1205</a:t>
+            </a:r>
+          </a:p>
+        </p:txBody>
+      </p:sp>
+      <p:sp>
+        <p:nvSpPr>
+          <p:cNvPr id="6" name="TextBox 5"/>
+          <p:cNvSpPr txBox="1"/>
+          <p:nvPr/>
+        </p:nvSpPr>
+        <p:spPr>
+          <a:xfrm>
+            <a:off x="640080" y="1143000"/>
+            <a:ext cx="10972800" cy="685800"/>
+          </a:xfrm>
+          <a:prstGeom prst="rect">
+            <a:avLst/>
+          </a:prstGeom>
+          <a:noFill/>
+        </p:spPr>
+        <p:txBody>
+          <a:bodyPr wrap="square">
+            <a:spAutoFit/>
+          </a:bodyPr>
+          <a:lstStyle/>
+          <a:p>
+            <a:r>
+              <a:rPr sz="2800" b="1">
+                <a:solidFill>
+                  <a:srgbClr val="1A202C"/>
+                </a:solidFill>
+              </a:rPr>
+              <a:t>Starter: think first</a:t>
+            </a:r>
+          </a:p>
+        </p:txBody>
+      </p:sp>
+      <p:sp>
+        <p:nvSpPr>
+          <p:cNvPr id="7" name="Rounded Rectangle 6"/>
+          <p:cNvSpPr/>
+          <p:nvPr/>
+        </p:nvSpPr>
+        <p:spPr>
+          <a:xfrm>
+            <a:off x="777240" y="1993392"/>
+            <a:ext cx="10835640" cy="1005840"/>
+          </a:xfrm>
+          <a:prstGeom prst="roundRect">
+            <a:avLst/>
+          </a:prstGeom>
+          <a:solidFill>
+            <a:srgbClr val="FFFBEB"/>
+          </a:solidFill>
+          <a:ln w="15240">
+            <a:solidFill>
+              <a:srgbClr val="7C3AED"/>
+            </a:solidFill>
+          </a:ln>
+        </p:spPr>
+        <p:style>
+          <a:lnRef idx="1">
+            <a:schemeClr val="accent1"/>
+          </a:lnRef>
+          <a:fillRef idx="3">
+            <a:schemeClr val="accent1"/>
+          </a:fillRef>
+          <a:effectRef idx="2">
+            <a:schemeClr val="accent1"/>
+          </a:effectRef>
+          <a:fontRef idx="minor">
+            <a:schemeClr val="lt1"/>
+          </a:fontRef>
+        </p:style>
+        <p:txBody>
+          <a:bodyPr rtlCol="0" anchor="ctr"/>
+          <a:lstStyle/>
+          <a:p>
+            <a:pPr algn="ctr"/>
+          </a:p>
+        </p:txBody>
+      </p:sp>
+      <p:sp>
+        <p:nvSpPr>
+          <p:cNvPr id="8" name="TextBox 7"/>
+          <p:cNvSpPr txBox="1"/>
+          <p:nvPr/>
+        </p:nvSpPr>
+        <p:spPr>
+          <a:xfrm>
+            <a:off x="1051560" y="2212848"/>
+            <a:ext cx="10287000" cy="502920"/>
+          </a:xfrm>
+          <a:prstGeom prst="rect">
+            <a:avLst/>
+          </a:prstGeom>
+          <a:noFill/>
+        </p:spPr>
+        <p:txBody>
+          <a:bodyPr wrap="square">
+            <a:spAutoFit/>
+          </a:bodyPr>
+          <a:lstStyle/>
+          <a:p>
+            <a:r>
+              <a:rPr sz="2100" b="1">
+                <a:solidFill>
+                  <a:srgbClr val="1A202C"/>
+                </a:solidFill>
+              </a:rPr>
+              <a:t>Think: What are the three main topics we studied this term?</a:t>
+            </a:r>
+          </a:p>
+        </p:txBody>
+      </p:sp>
+      <p:sp>
+        <p:nvSpPr>
+          <p:cNvPr id="9" name="Rounded Rectangle 8"/>
+          <p:cNvSpPr/>
+          <p:nvPr/>
+        </p:nvSpPr>
+        <p:spPr>
+          <a:xfrm>
+            <a:off x="1005840" y="3246120"/>
+            <a:ext cx="10149840" cy="731520"/>
+          </a:xfrm>
+          <a:prstGeom prst="roundRect">
+            <a:avLst/>
+          </a:prstGeom>
+          <a:solidFill>
+            <a:srgbClr val="F8FAFC"/>
+          </a:solidFill>
+          <a:ln w="15240">
+            <a:solidFill>
+              <a:srgbClr val="CBD5E1"/>
+            </a:solidFill>
+          </a:ln>
+        </p:spPr>
+        <p:style>
+          <a:lnRef idx="1">
+            <a:schemeClr val="accent1"/>
+          </a:lnRef>
+          <a:fillRef idx="3">
+            <a:schemeClr val="accent1"/>
+          </a:fillRef>
+          <a:effectRef idx="2">
+            <a:schemeClr val="accent1"/>
+          </a:effectRef>
+          <a:fontRef idx="minor">
+            <a:schemeClr val="lt1"/>
+          </a:fontRef>
+        </p:style>
+        <p:txBody>
+          <a:bodyPr rtlCol="0" anchor="ctr"/>
+          <a:lstStyle/>
+          <a:p>
+            <a:pPr algn="ctr"/>
+          </a:p>
+        </p:txBody>
+      </p:sp>
+      <p:sp>
+        <p:nvSpPr>
+          <p:cNvPr id="10" name="Oval 9"/>
+          <p:cNvSpPr/>
+          <p:nvPr/>
+        </p:nvSpPr>
+        <p:spPr>
+          <a:xfrm>
+            <a:off x="1234440" y="3364991"/>
+            <a:ext cx="347472" cy="347472"/>
+          </a:xfrm>
+          <a:prstGeom prst="ellipse">
+            <a:avLst/>
+          </a:prstGeom>
+          <a:solidFill>
+            <a:srgbClr val="7C3AED"/>
+          </a:solidFill>
+          <a:ln>
+            <a:noFill/>
+          </a:ln>
+        </p:spPr>
+        <p:style>
+          <a:lnRef idx="1">
+            <a:schemeClr val="accent1"/>
+          </a:lnRef>
+          <a:fillRef idx="3">
+            <a:schemeClr val="accent1"/>
+          </a:fillRef>
+          <a:effectRef idx="2">
+            <a:schemeClr val="accent1"/>
+          </a:effectRef>
+          <a:fontRef idx="minor">
+            <a:schemeClr val="lt1"/>
+          </a:fontRef>
+        </p:style>
+        <p:txBody>
+          <a:bodyPr rtlCol="0" anchor="ctr"/>
+          <a:lstStyle/>
+          <a:p>
+            <a:pPr algn="ctr"/>
+          </a:p>
+        </p:txBody>
+      </p:sp>
+      <p:sp>
+        <p:nvSpPr>
+          <p:cNvPr id="11" name="TextBox 10"/>
+          <p:cNvSpPr txBox="1"/>
+          <p:nvPr/>
+        </p:nvSpPr>
+        <p:spPr>
+          <a:xfrm>
+            <a:off x="1234440" y="3410712"/>
+            <a:ext cx="347472" cy="182880"/>
+          </a:xfrm>
+          <a:prstGeom prst="rect">
+            <a:avLst/>
+          </a:prstGeom>
+          <a:noFill/>
+        </p:spPr>
+        <p:txBody>
+          <a:bodyPr wrap="square">
+            <a:spAutoFit/>
+          </a:bodyPr>
+          <a:lstStyle/>
+          <a:p>
+            <a:pPr algn="ctr"/>
+            <a:r>
+              <a:rPr sz="1000" b="1">
+                <a:solidFill>
+                  <a:srgbClr val="FFFFFF"/>
+                </a:solidFill>
+              </a:rPr>
+              <a:t>1</a:t>
+            </a:r>
+          </a:p>
+        </p:txBody>
+      </p:sp>
+      <p:sp>
+        <p:nvSpPr>
+          <p:cNvPr id="12" name="TextBox 11"/>
+          <p:cNvSpPr txBox="1"/>
+          <p:nvPr/>
+        </p:nvSpPr>
+        <p:spPr>
+          <a:xfrm>
+            <a:off x="1783080" y="3364991"/>
+            <a:ext cx="9006840" cy="347472"/>
+          </a:xfrm>
+          <a:prstGeom prst="rect">
+            <a:avLst/>
+          </a:prstGeom>
+          <a:noFill/>
+        </p:spPr>
+        <p:txBody>
+          <a:bodyPr wrap="square">
+            <a:spAutoFit/>
+          </a:bodyPr>
+          <a:lstStyle/>
+          <a:p>
+            <a:r>
+              <a:rPr sz="1700" b="0">
+                <a:solidFill>
+                  <a:srgbClr val="1A202C"/>
+                </a:solidFill>
+              </a:rPr>
+              <a:t>Pair: compare your first answer with a partner.</a:t>
+            </a:r>
+          </a:p>
+        </p:txBody>
+      </p:sp>
+      <p:sp>
+        <p:nvSpPr>
+          <p:cNvPr id="13" name="Rounded Rectangle 12"/>
+          <p:cNvSpPr/>
+          <p:nvPr/>
+        </p:nvSpPr>
+        <p:spPr>
+          <a:xfrm>
+            <a:off x="1005840" y="4178808"/>
+            <a:ext cx="10149840" cy="731520"/>
+          </a:xfrm>
+          <a:prstGeom prst="roundRect">
+            <a:avLst/>
+          </a:prstGeom>
+          <a:solidFill>
+            <a:srgbClr val="F8FAFC"/>
+          </a:solidFill>
+          <a:ln w="15240">
+            <a:solidFill>
+              <a:srgbClr val="CBD5E1"/>
+            </a:solidFill>
+          </a:ln>
+        </p:spPr>
+        <p:style>
+          <a:lnRef idx="1">
+            <a:schemeClr val="accent1"/>
+          </a:lnRef>
+          <a:fillRef idx="3">
+            <a:schemeClr val="accent1"/>
+          </a:fillRef>
+          <a:effectRef idx="2">
+            <a:schemeClr val="accent1"/>
+          </a:effectRef>
+          <a:fontRef idx="minor">
+            <a:schemeClr val="lt1"/>
+          </a:fontRef>
+        </p:style>
+        <p:txBody>
+          <a:bodyPr rtlCol="0" anchor="ctr"/>
+          <a:lstStyle/>
+          <a:p>
+            <a:pPr algn="ctr"/>
+          </a:p>
+        </p:txBody>
+      </p:sp>
+      <p:sp>
+        <p:nvSpPr>
+          <p:cNvPr id="14" name="Oval 13"/>
+          <p:cNvSpPr/>
+          <p:nvPr/>
+        </p:nvSpPr>
+        <p:spPr>
+          <a:xfrm>
+            <a:off x="1234440" y="4297680"/>
+            <a:ext cx="347472" cy="347472"/>
+          </a:xfrm>
+          <a:prstGeom prst="ellipse">
+            <a:avLst/>
+          </a:prstGeom>
+          <a:solidFill>
+            <a:srgbClr val="7C3AED"/>
+          </a:solidFill>
+          <a:ln>
+            <a:noFill/>
+          </a:ln>
+        </p:spPr>
+        <p:style>
+          <a:lnRef idx="1">
+            <a:schemeClr val="accent1"/>
+          </a:lnRef>
+          <a:fillRef idx="3">
+            <a:schemeClr val="accent1"/>
+          </a:fillRef>
+          <a:effectRef idx="2">
+            <a:schemeClr val="accent1"/>
+          </a:effectRef>
+          <a:fontRef idx="minor">
+            <a:schemeClr val="lt1"/>
+          </a:fontRef>
+        </p:style>
+        <p:txBody>
+          <a:bodyPr rtlCol="0" anchor="ctr"/>
+          <a:lstStyle/>
+          <a:p>
+            <a:pPr algn="ctr"/>
+          </a:p>
+        </p:txBody>
+      </p:sp>
+      <p:sp>
+        <p:nvSpPr>
+          <p:cNvPr id="15" name="TextBox 14"/>
+          <p:cNvSpPr txBox="1"/>
+          <p:nvPr/>
+        </p:nvSpPr>
+        <p:spPr>
+          <a:xfrm>
+            <a:off x="1234440" y="4343400"/>
+            <a:ext cx="347472" cy="182880"/>
+          </a:xfrm>
+          <a:prstGeom prst="rect">
+            <a:avLst/>
+          </a:prstGeom>
+          <a:noFill/>
+        </p:spPr>
+        <p:txBody>
+          <a:bodyPr wrap="square">
+            <a:spAutoFit/>
+          </a:bodyPr>
+          <a:lstStyle/>
+          <a:p>
+            <a:pPr algn="ctr"/>
+            <a:r>
+              <a:rPr sz="1000" b="1">
+                <a:solidFill>
+                  <a:srgbClr val="FFFFFF"/>
+                </a:solidFill>
+              </a:rPr>
+              <a:t>2</a:t>
+            </a:r>
+          </a:p>
+        </p:txBody>
+      </p:sp>
+      <p:sp>
+        <p:nvSpPr>
+          <p:cNvPr id="16" name="TextBox 15"/>
+          <p:cNvSpPr txBox="1"/>
+          <p:nvPr/>
+        </p:nvSpPr>
+        <p:spPr>
+          <a:xfrm>
+            <a:off x="1783080" y="4297680"/>
+            <a:ext cx="9006840" cy="347472"/>
+          </a:xfrm>
+          <a:prstGeom prst="rect">
+            <a:avLst/>
+          </a:prstGeom>
+          <a:noFill/>
+        </p:spPr>
+        <p:txBody>
+          <a:bodyPr wrap="square">
+            <a:spAutoFit/>
+          </a:bodyPr>
+          <a:lstStyle/>
+          <a:p>
+            <a:r>
+              <a:rPr sz="1700" b="0">
+                <a:solidFill>
+                  <a:srgbClr val="1A202C"/>
+                </a:solidFill>
+              </a:rPr>
+              <a:t>Share: connect your answer to Looking Back at Term 1.</a:t>
+            </a:r>
+          </a:p>
+        </p:txBody>
+      </p:sp>
+      <p:sp>
+        <p:nvSpPr>
+          <p:cNvPr id="17" name="TextBox 16"/>
+          <p:cNvSpPr txBox="1"/>
+          <p:nvPr/>
+        </p:nvSpPr>
+        <p:spPr>
+          <a:xfrm>
+            <a:off x="777240" y="6419088"/>
+            <a:ext cx="10835640" cy="228600"/>
+          </a:xfrm>
+          <a:prstGeom prst="rect">
+            <a:avLst/>
+          </a:prstGeom>
+          <a:noFill/>
+        </p:spPr>
+        <p:txBody>
+          <a:bodyPr wrap="square">
+            <a:spAutoFit/>
+          </a:bodyPr>
+          <a:lstStyle/>
+          <a:p>
+            <a:pPr algn="r"/>
+            <a:r>
+              <a:rPr sz="1000" b="0">
+                <a:solidFill>
+                  <a:srgbClr val="5B677D"/>
+                </a:solidFill>
+              </a:rPr>
+              <a:t>Listen • Talk • Try • Explain</a:t>
             </a:r>
           </a:p>
         </p:txBody>
@@ -3406,43 +4856,100 @@
       <p:grpSpPr/>
       <p:sp>
         <p:nvSpPr>
-          <p:cNvPr id="2" name="TextBox 1"/>
+          <p:cNvPr id="2" name="Rectangle 1"/>
+          <p:cNvSpPr/>
+          <p:nvPr/>
+        </p:nvSpPr>
+        <p:spPr>
+          <a:xfrm>
+            <a:off x="0" y="0"/>
+            <a:ext cx="12191695" cy="914400"/>
+          </a:xfrm>
+          <a:prstGeom prst="rect">
+            <a:avLst/>
+          </a:prstGeom>
+          <a:solidFill>
+            <a:srgbClr val="0E7490"/>
+          </a:solidFill>
+          <a:ln>
+            <a:noFill/>
+          </a:ln>
+        </p:spPr>
+        <p:style>
+          <a:lnRef idx="1">
+            <a:schemeClr val="accent1"/>
+          </a:lnRef>
+          <a:fillRef idx="3">
+            <a:schemeClr val="accent1"/>
+          </a:fillRef>
+          <a:effectRef idx="2">
+            <a:schemeClr val="accent1"/>
+          </a:effectRef>
+          <a:fontRef idx="minor">
+            <a:schemeClr val="lt1"/>
+          </a:fontRef>
+        </p:style>
+        <p:txBody>
+          <a:bodyPr rtlCol="0" anchor="ctr"/>
+          <a:lstStyle/>
+          <a:p>
+            <a:pPr algn="ctr"/>
+          </a:p>
+        </p:txBody>
+      </p:sp>
+      <p:sp>
+        <p:nvSpPr>
+          <p:cNvPr id="3" name="Rectangle 2"/>
+          <p:cNvSpPr/>
+          <p:nvPr/>
+        </p:nvSpPr>
+        <p:spPr>
+          <a:xfrm>
+            <a:off x="0" y="914400"/>
+            <a:ext cx="164592" cy="5943600"/>
+          </a:xfrm>
+          <a:prstGeom prst="rect">
+            <a:avLst/>
+          </a:prstGeom>
+          <a:solidFill>
+            <a:srgbClr val="0E7490"/>
+          </a:solidFill>
+          <a:ln>
+            <a:noFill/>
+          </a:ln>
+        </p:spPr>
+        <p:style>
+          <a:lnRef idx="1">
+            <a:schemeClr val="accent1"/>
+          </a:lnRef>
+          <a:fillRef idx="3">
+            <a:schemeClr val="accent1"/>
+          </a:fillRef>
+          <a:effectRef idx="2">
+            <a:schemeClr val="accent1"/>
+          </a:effectRef>
+          <a:fontRef idx="minor">
+            <a:schemeClr val="lt1"/>
+          </a:fontRef>
+        </p:style>
+        <p:txBody>
+          <a:bodyPr rtlCol="0" anchor="ctr"/>
+          <a:lstStyle/>
+          <a:p>
+            <a:pPr algn="ctr"/>
+          </a:p>
+        </p:txBody>
+      </p:sp>
+      <p:sp>
+        <p:nvSpPr>
+          <p:cNvPr id="4" name="TextBox 3"/>
           <p:cNvSpPr txBox="1"/>
           <p:nvPr/>
         </p:nvSpPr>
         <p:spPr>
           <a:xfrm>
-            <a:off x="548640" y="320040"/>
-            <a:ext cx="11064240" cy="777240"/>
-          </a:xfrm>
-          <a:prstGeom prst="rect">
-            <a:avLst/>
-          </a:prstGeom>
-          <a:noFill/>
-        </p:spPr>
-        <p:txBody>
-          <a:bodyPr wrap="none">
-            <a:spAutoFit/>
-          </a:bodyPr>
-          <a:lstStyle/>
-          <a:p>
-            <a:r>
-              <a:rPr sz="3000" b="1"/>
-              <a:t>What is a Portfolio?</a:t>
-            </a:r>
-          </a:p>
-        </p:txBody>
-      </p:sp>
-      <p:sp>
-        <p:nvSpPr>
-          <p:cNvPr id="3" name="TextBox 2"/>
-          <p:cNvSpPr txBox="1"/>
-          <p:nvPr/>
-        </p:nvSpPr>
-        <p:spPr>
-          <a:xfrm>
-            <a:off x="868680" y="1417320"/>
-            <a:ext cx="10424160" cy="4892040"/>
+            <a:off x="594360" y="246888"/>
+            <a:ext cx="2926080" cy="320040"/>
           </a:xfrm>
           <a:prstGeom prst="rect">
             <a:avLst/>
@@ -3455,47 +4962,812 @@
           </a:bodyPr>
           <a:lstStyle/>
           <a:p>
-            <a:pPr>
-              <a:spcAft>
-                <a:spcPts val="800"/>
-              </a:spcAft>
-              <a:defRPr sz="2200"/>
-            </a:pPr>
-            <a:r>
-              <a:t>A collection of your best work</a:t>
-            </a:r>
-          </a:p>
-          <a:p>
-            <a:pPr>
-              <a:spcAft>
-                <a:spcPts val="800"/>
-              </a:spcAft>
-              <a:defRPr sz="2200"/>
-            </a:pPr>
-            <a:r>
-              <a:t>Evidence of your learning</a:t>
-            </a:r>
-          </a:p>
-          <a:p>
-            <a:pPr>
-              <a:spcAft>
-                <a:spcPts val="800"/>
-              </a:spcAft>
-              <a:defRPr sz="2200"/>
-            </a:pPr>
-            <a:r>
-              <a:t>Criteria for selection: Neatness, Accuracy, Interest</a:t>
-            </a:r>
-          </a:p>
-          <a:p>
-            <a:pPr>
-              <a:spcAft>
-                <a:spcPts val="800"/>
-              </a:spcAft>
-              <a:defRPr sz="2200"/>
-            </a:pPr>
-            <a:r>
-              <a:t>Organized from start to finish</a:t>
+            <a:r>
+              <a:rPr sz="1300" b="1">
+                <a:solidFill>
+                  <a:srgbClr val="FFFFFF"/>
+                </a:solidFill>
+              </a:rPr>
+              <a:t>4. CONCEPT</a:t>
+            </a:r>
+          </a:p>
+        </p:txBody>
+      </p:sp>
+      <p:sp>
+        <p:nvSpPr>
+          <p:cNvPr id="5" name="TextBox 4"/>
+          <p:cNvSpPr txBox="1"/>
+          <p:nvPr/>
+        </p:nvSpPr>
+        <p:spPr>
+          <a:xfrm>
+            <a:off x="7772400" y="246888"/>
+            <a:ext cx="3840480" cy="320040"/>
+          </a:xfrm>
+          <a:prstGeom prst="rect">
+            <a:avLst/>
+          </a:prstGeom>
+          <a:noFill/>
+        </p:spPr>
+        <p:txBody>
+          <a:bodyPr wrap="square">
+            <a:spAutoFit/>
+          </a:bodyPr>
+          <a:lstStyle/>
+          <a:p>
+            <a:pPr algn="r"/>
+            <a:r>
+              <a:rPr sz="1100" b="0">
+                <a:solidFill>
+                  <a:srgbClr val="FFFFFF"/>
+                </a:solidFill>
+              </a:rPr>
+              <a:t>p7_t1_english_1205</a:t>
+            </a:r>
+          </a:p>
+        </p:txBody>
+      </p:sp>
+      <p:sp>
+        <p:nvSpPr>
+          <p:cNvPr id="6" name="TextBox 5"/>
+          <p:cNvSpPr txBox="1"/>
+          <p:nvPr/>
+        </p:nvSpPr>
+        <p:spPr>
+          <a:xfrm>
+            <a:off x="640080" y="1143000"/>
+            <a:ext cx="10972800" cy="685800"/>
+          </a:xfrm>
+          <a:prstGeom prst="rect">
+            <a:avLst/>
+          </a:prstGeom>
+          <a:noFill/>
+        </p:spPr>
+        <p:txBody>
+          <a:bodyPr wrap="square">
+            <a:spAutoFit/>
+          </a:bodyPr>
+          <a:lstStyle/>
+          <a:p>
+            <a:r>
+              <a:rPr sz="2800" b="1">
+                <a:solidFill>
+                  <a:srgbClr val="1A202C"/>
+                </a:solidFill>
+              </a:rPr>
+              <a:t>Looking Back at Term 1</a:t>
+            </a:r>
+          </a:p>
+        </p:txBody>
+      </p:sp>
+      <p:sp>
+        <p:nvSpPr>
+          <p:cNvPr id="7" name="Rounded Rectangle 6"/>
+          <p:cNvSpPr/>
+          <p:nvPr/>
+        </p:nvSpPr>
+        <p:spPr>
+          <a:xfrm>
+            <a:off x="777240" y="1993392"/>
+            <a:ext cx="10835640" cy="1005840"/>
+          </a:xfrm>
+          <a:prstGeom prst="roundRect">
+            <a:avLst/>
+          </a:prstGeom>
+          <a:solidFill>
+            <a:srgbClr val="FFFBEB"/>
+          </a:solidFill>
+          <a:ln w="15240">
+            <a:solidFill>
+              <a:srgbClr val="0E7490"/>
+            </a:solidFill>
+          </a:ln>
+        </p:spPr>
+        <p:style>
+          <a:lnRef idx="1">
+            <a:schemeClr val="accent1"/>
+          </a:lnRef>
+          <a:fillRef idx="3">
+            <a:schemeClr val="accent1"/>
+          </a:fillRef>
+          <a:effectRef idx="2">
+            <a:schemeClr val="accent1"/>
+          </a:effectRef>
+          <a:fontRef idx="minor">
+            <a:schemeClr val="lt1"/>
+          </a:fontRef>
+        </p:style>
+        <p:txBody>
+          <a:bodyPr rtlCol="0" anchor="ctr"/>
+          <a:lstStyle/>
+          <a:p>
+            <a:pPr algn="ctr"/>
+          </a:p>
+        </p:txBody>
+      </p:sp>
+      <p:sp>
+        <p:nvSpPr>
+          <p:cNvPr id="8" name="TextBox 7"/>
+          <p:cNvSpPr txBox="1"/>
+          <p:nvPr/>
+        </p:nvSpPr>
+        <p:spPr>
+          <a:xfrm>
+            <a:off x="1051560" y="2212848"/>
+            <a:ext cx="10287000" cy="502920"/>
+          </a:xfrm>
+          <a:prstGeom prst="rect">
+            <a:avLst/>
+          </a:prstGeom>
+          <a:noFill/>
+        </p:spPr>
+        <p:txBody>
+          <a:bodyPr wrap="square">
+            <a:spAutoFit/>
+          </a:bodyPr>
+          <a:lstStyle/>
+          <a:p>
+            <a:r>
+              <a:rPr sz="2100" b="1">
+                <a:solidFill>
+                  <a:srgbClr val="1A202C"/>
+                </a:solidFill>
+              </a:rPr>
+              <a:t>Key idea: Oral reflection on the three main topics of Term 1: School Holidays, Letter</a:t>
+            </a:r>
+          </a:p>
+        </p:txBody>
+      </p:sp>
+      <p:sp>
+        <p:nvSpPr>
+          <p:cNvPr id="9" name="Rounded Rectangle 8"/>
+          <p:cNvSpPr/>
+          <p:nvPr/>
+        </p:nvSpPr>
+        <p:spPr>
+          <a:xfrm>
+            <a:off x="1005840" y="3246120"/>
+            <a:ext cx="10149840" cy="621792"/>
+          </a:xfrm>
+          <a:prstGeom prst="roundRect">
+            <a:avLst/>
+          </a:prstGeom>
+          <a:solidFill>
+            <a:srgbClr val="F8FAFC"/>
+          </a:solidFill>
+          <a:ln w="15240">
+            <a:solidFill>
+              <a:srgbClr val="CBD5E1"/>
+            </a:solidFill>
+          </a:ln>
+        </p:spPr>
+        <p:style>
+          <a:lnRef idx="1">
+            <a:schemeClr val="accent1"/>
+          </a:lnRef>
+          <a:fillRef idx="3">
+            <a:schemeClr val="accent1"/>
+          </a:fillRef>
+          <a:effectRef idx="2">
+            <a:schemeClr val="accent1"/>
+          </a:effectRef>
+          <a:fontRef idx="minor">
+            <a:schemeClr val="lt1"/>
+          </a:fontRef>
+        </p:style>
+        <p:txBody>
+          <a:bodyPr rtlCol="0" anchor="ctr"/>
+          <a:lstStyle/>
+          <a:p>
+            <a:pPr algn="ctr"/>
+          </a:p>
+        </p:txBody>
+      </p:sp>
+      <p:sp>
+        <p:nvSpPr>
+          <p:cNvPr id="10" name="Oval 9"/>
+          <p:cNvSpPr/>
+          <p:nvPr/>
+        </p:nvSpPr>
+        <p:spPr>
+          <a:xfrm>
+            <a:off x="1234440" y="3364991"/>
+            <a:ext cx="347472" cy="347472"/>
+          </a:xfrm>
+          <a:prstGeom prst="ellipse">
+            <a:avLst/>
+          </a:prstGeom>
+          <a:solidFill>
+            <a:srgbClr val="0E7490"/>
+          </a:solidFill>
+          <a:ln>
+            <a:noFill/>
+          </a:ln>
+        </p:spPr>
+        <p:style>
+          <a:lnRef idx="1">
+            <a:schemeClr val="accent1"/>
+          </a:lnRef>
+          <a:fillRef idx="3">
+            <a:schemeClr val="accent1"/>
+          </a:fillRef>
+          <a:effectRef idx="2">
+            <a:schemeClr val="accent1"/>
+          </a:effectRef>
+          <a:fontRef idx="minor">
+            <a:schemeClr val="lt1"/>
+          </a:fontRef>
+        </p:style>
+        <p:txBody>
+          <a:bodyPr rtlCol="0" anchor="ctr"/>
+          <a:lstStyle/>
+          <a:p>
+            <a:pPr algn="ctr"/>
+          </a:p>
+        </p:txBody>
+      </p:sp>
+      <p:sp>
+        <p:nvSpPr>
+          <p:cNvPr id="11" name="TextBox 10"/>
+          <p:cNvSpPr txBox="1"/>
+          <p:nvPr/>
+        </p:nvSpPr>
+        <p:spPr>
+          <a:xfrm>
+            <a:off x="1234440" y="3410712"/>
+            <a:ext cx="347472" cy="182880"/>
+          </a:xfrm>
+          <a:prstGeom prst="rect">
+            <a:avLst/>
+          </a:prstGeom>
+          <a:noFill/>
+        </p:spPr>
+        <p:txBody>
+          <a:bodyPr wrap="square">
+            <a:spAutoFit/>
+          </a:bodyPr>
+          <a:lstStyle/>
+          <a:p>
+            <a:pPr algn="ctr"/>
+            <a:r>
+              <a:rPr sz="1000" b="1">
+                <a:solidFill>
+                  <a:srgbClr val="FFFFFF"/>
+                </a:solidFill>
+              </a:rPr>
+              <a:t>1</a:t>
+            </a:r>
+          </a:p>
+        </p:txBody>
+      </p:sp>
+      <p:sp>
+        <p:nvSpPr>
+          <p:cNvPr id="12" name="TextBox 11"/>
+          <p:cNvSpPr txBox="1"/>
+          <p:nvPr/>
+        </p:nvSpPr>
+        <p:spPr>
+          <a:xfrm>
+            <a:off x="1783080" y="3364991"/>
+            <a:ext cx="9006840" cy="347472"/>
+          </a:xfrm>
+          <a:prstGeom prst="rect">
+            <a:avLst/>
+          </a:prstGeom>
+          <a:noFill/>
+        </p:spPr>
+        <p:txBody>
+          <a:bodyPr wrap="square">
+            <a:spAutoFit/>
+          </a:bodyPr>
+          <a:lstStyle/>
+          <a:p>
+            <a:r>
+              <a:rPr sz="1700" b="0">
+                <a:solidFill>
+                  <a:srgbClr val="1A202C"/>
+                </a:solidFill>
+              </a:rPr>
+              <a:t>Writing, and Examinations.</a:t>
+            </a:r>
+          </a:p>
+        </p:txBody>
+      </p:sp>
+      <p:sp>
+        <p:nvSpPr>
+          <p:cNvPr id="13" name="Rounded Rectangle 12"/>
+          <p:cNvSpPr/>
+          <p:nvPr/>
+        </p:nvSpPr>
+        <p:spPr>
+          <a:xfrm>
+            <a:off x="1005840" y="4069080"/>
+            <a:ext cx="10149840" cy="621792"/>
+          </a:xfrm>
+          <a:prstGeom prst="roundRect">
+            <a:avLst/>
+          </a:prstGeom>
+          <a:solidFill>
+            <a:srgbClr val="F8FAFC"/>
+          </a:solidFill>
+          <a:ln w="15240">
+            <a:solidFill>
+              <a:srgbClr val="CBD5E1"/>
+            </a:solidFill>
+          </a:ln>
+        </p:spPr>
+        <p:style>
+          <a:lnRef idx="1">
+            <a:schemeClr val="accent1"/>
+          </a:lnRef>
+          <a:fillRef idx="3">
+            <a:schemeClr val="accent1"/>
+          </a:fillRef>
+          <a:effectRef idx="2">
+            <a:schemeClr val="accent1"/>
+          </a:effectRef>
+          <a:fontRef idx="minor">
+            <a:schemeClr val="lt1"/>
+          </a:fontRef>
+        </p:style>
+        <p:txBody>
+          <a:bodyPr rtlCol="0" anchor="ctr"/>
+          <a:lstStyle/>
+          <a:p>
+            <a:pPr algn="ctr"/>
+          </a:p>
+        </p:txBody>
+      </p:sp>
+      <p:sp>
+        <p:nvSpPr>
+          <p:cNvPr id="14" name="Oval 13"/>
+          <p:cNvSpPr/>
+          <p:nvPr/>
+        </p:nvSpPr>
+        <p:spPr>
+          <a:xfrm>
+            <a:off x="1234440" y="4187952"/>
+            <a:ext cx="347472" cy="347472"/>
+          </a:xfrm>
+          <a:prstGeom prst="ellipse">
+            <a:avLst/>
+          </a:prstGeom>
+          <a:solidFill>
+            <a:srgbClr val="0E7490"/>
+          </a:solidFill>
+          <a:ln>
+            <a:noFill/>
+          </a:ln>
+        </p:spPr>
+        <p:style>
+          <a:lnRef idx="1">
+            <a:schemeClr val="accent1"/>
+          </a:lnRef>
+          <a:fillRef idx="3">
+            <a:schemeClr val="accent1"/>
+          </a:fillRef>
+          <a:effectRef idx="2">
+            <a:schemeClr val="accent1"/>
+          </a:effectRef>
+          <a:fontRef idx="minor">
+            <a:schemeClr val="lt1"/>
+          </a:fontRef>
+        </p:style>
+        <p:txBody>
+          <a:bodyPr rtlCol="0" anchor="ctr"/>
+          <a:lstStyle/>
+          <a:p>
+            <a:pPr algn="ctr"/>
+          </a:p>
+        </p:txBody>
+      </p:sp>
+      <p:sp>
+        <p:nvSpPr>
+          <p:cNvPr id="15" name="TextBox 14"/>
+          <p:cNvSpPr txBox="1"/>
+          <p:nvPr/>
+        </p:nvSpPr>
+        <p:spPr>
+          <a:xfrm>
+            <a:off x="1234440" y="4233672"/>
+            <a:ext cx="347472" cy="182880"/>
+          </a:xfrm>
+          <a:prstGeom prst="rect">
+            <a:avLst/>
+          </a:prstGeom>
+          <a:noFill/>
+        </p:spPr>
+        <p:txBody>
+          <a:bodyPr wrap="square">
+            <a:spAutoFit/>
+          </a:bodyPr>
+          <a:lstStyle/>
+          <a:p>
+            <a:pPr algn="ctr"/>
+            <a:r>
+              <a:rPr sz="1000" b="1">
+                <a:solidFill>
+                  <a:srgbClr val="FFFFFF"/>
+                </a:solidFill>
+              </a:rPr>
+              <a:t>2</a:t>
+            </a:r>
+          </a:p>
+        </p:txBody>
+      </p:sp>
+      <p:sp>
+        <p:nvSpPr>
+          <p:cNvPr id="16" name="TextBox 15"/>
+          <p:cNvSpPr txBox="1"/>
+          <p:nvPr/>
+        </p:nvSpPr>
+        <p:spPr>
+          <a:xfrm>
+            <a:off x="1783080" y="4187952"/>
+            <a:ext cx="9006840" cy="347472"/>
+          </a:xfrm>
+          <a:prstGeom prst="rect">
+            <a:avLst/>
+          </a:prstGeom>
+          <a:noFill/>
+        </p:spPr>
+        <p:txBody>
+          <a:bodyPr wrap="square">
+            <a:spAutoFit/>
+          </a:bodyPr>
+          <a:lstStyle/>
+          <a:p>
+            <a:r>
+              <a:rPr sz="1700" b="0">
+                <a:solidFill>
+                  <a:srgbClr val="1A202C"/>
+                </a:solidFill>
+              </a:rPr>
+              <a:t>Review the topics we covered</a:t>
+            </a:r>
+          </a:p>
+        </p:txBody>
+      </p:sp>
+      <p:sp>
+        <p:nvSpPr>
+          <p:cNvPr id="17" name="Rounded Rectangle 16"/>
+          <p:cNvSpPr/>
+          <p:nvPr/>
+        </p:nvSpPr>
+        <p:spPr>
+          <a:xfrm>
+            <a:off x="1005840" y="4892040"/>
+            <a:ext cx="10149840" cy="621792"/>
+          </a:xfrm>
+          <a:prstGeom prst="roundRect">
+            <a:avLst/>
+          </a:prstGeom>
+          <a:solidFill>
+            <a:srgbClr val="F8FAFC"/>
+          </a:solidFill>
+          <a:ln w="15240">
+            <a:solidFill>
+              <a:srgbClr val="CBD5E1"/>
+            </a:solidFill>
+          </a:ln>
+        </p:spPr>
+        <p:style>
+          <a:lnRef idx="1">
+            <a:schemeClr val="accent1"/>
+          </a:lnRef>
+          <a:fillRef idx="3">
+            <a:schemeClr val="accent1"/>
+          </a:fillRef>
+          <a:effectRef idx="2">
+            <a:schemeClr val="accent1"/>
+          </a:effectRef>
+          <a:fontRef idx="minor">
+            <a:schemeClr val="lt1"/>
+          </a:fontRef>
+        </p:style>
+        <p:txBody>
+          <a:bodyPr rtlCol="0" anchor="ctr"/>
+          <a:lstStyle/>
+          <a:p>
+            <a:pPr algn="ctr"/>
+          </a:p>
+        </p:txBody>
+      </p:sp>
+      <p:sp>
+        <p:nvSpPr>
+          <p:cNvPr id="18" name="Oval 17"/>
+          <p:cNvSpPr/>
+          <p:nvPr/>
+        </p:nvSpPr>
+        <p:spPr>
+          <a:xfrm>
+            <a:off x="1234440" y="5010912"/>
+            <a:ext cx="347472" cy="347472"/>
+          </a:xfrm>
+          <a:prstGeom prst="ellipse">
+            <a:avLst/>
+          </a:prstGeom>
+          <a:solidFill>
+            <a:srgbClr val="0E7490"/>
+          </a:solidFill>
+          <a:ln>
+            <a:noFill/>
+          </a:ln>
+        </p:spPr>
+        <p:style>
+          <a:lnRef idx="1">
+            <a:schemeClr val="accent1"/>
+          </a:lnRef>
+          <a:fillRef idx="3">
+            <a:schemeClr val="accent1"/>
+          </a:fillRef>
+          <a:effectRef idx="2">
+            <a:schemeClr val="accent1"/>
+          </a:effectRef>
+          <a:fontRef idx="minor">
+            <a:schemeClr val="lt1"/>
+          </a:fontRef>
+        </p:style>
+        <p:txBody>
+          <a:bodyPr rtlCol="0" anchor="ctr"/>
+          <a:lstStyle/>
+          <a:p>
+            <a:pPr algn="ctr"/>
+          </a:p>
+        </p:txBody>
+      </p:sp>
+      <p:sp>
+        <p:nvSpPr>
+          <p:cNvPr id="19" name="TextBox 18"/>
+          <p:cNvSpPr txBox="1"/>
+          <p:nvPr/>
+        </p:nvSpPr>
+        <p:spPr>
+          <a:xfrm>
+            <a:off x="1234440" y="5056632"/>
+            <a:ext cx="347472" cy="182880"/>
+          </a:xfrm>
+          <a:prstGeom prst="rect">
+            <a:avLst/>
+          </a:prstGeom>
+          <a:noFill/>
+        </p:spPr>
+        <p:txBody>
+          <a:bodyPr wrap="square">
+            <a:spAutoFit/>
+          </a:bodyPr>
+          <a:lstStyle/>
+          <a:p>
+            <a:pPr algn="ctr"/>
+            <a:r>
+              <a:rPr sz="1000" b="1">
+                <a:solidFill>
+                  <a:srgbClr val="FFFFFF"/>
+                </a:solidFill>
+              </a:rPr>
+              <a:t>3</a:t>
+            </a:r>
+          </a:p>
+        </p:txBody>
+      </p:sp>
+      <p:sp>
+        <p:nvSpPr>
+          <p:cNvPr id="20" name="TextBox 19"/>
+          <p:cNvSpPr txBox="1"/>
+          <p:nvPr/>
+        </p:nvSpPr>
+        <p:spPr>
+          <a:xfrm>
+            <a:off x="1783080" y="5010912"/>
+            <a:ext cx="9006840" cy="347472"/>
+          </a:xfrm>
+          <a:prstGeom prst="rect">
+            <a:avLst/>
+          </a:prstGeom>
+          <a:noFill/>
+        </p:spPr>
+        <p:txBody>
+          <a:bodyPr wrap="square">
+            <a:spAutoFit/>
+          </a:bodyPr>
+          <a:lstStyle/>
+          <a:p>
+            <a:r>
+              <a:rPr sz="1700" b="0">
+                <a:solidFill>
+                  <a:srgbClr val="1A202C"/>
+                </a:solidFill>
+              </a:rPr>
+              <a:t>Share our favorite English activities</a:t>
+            </a:r>
+          </a:p>
+        </p:txBody>
+      </p:sp>
+      <p:sp>
+        <p:nvSpPr>
+          <p:cNvPr id="21" name="Rounded Rectangle 20"/>
+          <p:cNvSpPr/>
+          <p:nvPr/>
+        </p:nvSpPr>
+        <p:spPr>
+          <a:xfrm>
+            <a:off x="1005840" y="5715000"/>
+            <a:ext cx="10149840" cy="621792"/>
+          </a:xfrm>
+          <a:prstGeom prst="roundRect">
+            <a:avLst/>
+          </a:prstGeom>
+          <a:solidFill>
+            <a:srgbClr val="F8FAFC"/>
+          </a:solidFill>
+          <a:ln w="15240">
+            <a:solidFill>
+              <a:srgbClr val="CBD5E1"/>
+            </a:solidFill>
+          </a:ln>
+        </p:spPr>
+        <p:style>
+          <a:lnRef idx="1">
+            <a:schemeClr val="accent1"/>
+          </a:lnRef>
+          <a:fillRef idx="3">
+            <a:schemeClr val="accent1"/>
+          </a:fillRef>
+          <a:effectRef idx="2">
+            <a:schemeClr val="accent1"/>
+          </a:effectRef>
+          <a:fontRef idx="minor">
+            <a:schemeClr val="lt1"/>
+          </a:fontRef>
+        </p:style>
+        <p:txBody>
+          <a:bodyPr rtlCol="0" anchor="ctr"/>
+          <a:lstStyle/>
+          <a:p>
+            <a:pPr algn="ctr"/>
+          </a:p>
+        </p:txBody>
+      </p:sp>
+      <p:sp>
+        <p:nvSpPr>
+          <p:cNvPr id="22" name="Oval 21"/>
+          <p:cNvSpPr/>
+          <p:nvPr/>
+        </p:nvSpPr>
+        <p:spPr>
+          <a:xfrm>
+            <a:off x="1234440" y="5833872"/>
+            <a:ext cx="347472" cy="347472"/>
+          </a:xfrm>
+          <a:prstGeom prst="ellipse">
+            <a:avLst/>
+          </a:prstGeom>
+          <a:solidFill>
+            <a:srgbClr val="0E7490"/>
+          </a:solidFill>
+          <a:ln>
+            <a:noFill/>
+          </a:ln>
+        </p:spPr>
+        <p:style>
+          <a:lnRef idx="1">
+            <a:schemeClr val="accent1"/>
+          </a:lnRef>
+          <a:fillRef idx="3">
+            <a:schemeClr val="accent1"/>
+          </a:fillRef>
+          <a:effectRef idx="2">
+            <a:schemeClr val="accent1"/>
+          </a:effectRef>
+          <a:fontRef idx="minor">
+            <a:schemeClr val="lt1"/>
+          </a:fontRef>
+        </p:style>
+        <p:txBody>
+          <a:bodyPr rtlCol="0" anchor="ctr"/>
+          <a:lstStyle/>
+          <a:p>
+            <a:pPr algn="ctr"/>
+          </a:p>
+        </p:txBody>
+      </p:sp>
+      <p:sp>
+        <p:nvSpPr>
+          <p:cNvPr id="23" name="TextBox 22"/>
+          <p:cNvSpPr txBox="1"/>
+          <p:nvPr/>
+        </p:nvSpPr>
+        <p:spPr>
+          <a:xfrm>
+            <a:off x="1234440" y="5879592"/>
+            <a:ext cx="347472" cy="182880"/>
+          </a:xfrm>
+          <a:prstGeom prst="rect">
+            <a:avLst/>
+          </a:prstGeom>
+          <a:noFill/>
+        </p:spPr>
+        <p:txBody>
+          <a:bodyPr wrap="square">
+            <a:spAutoFit/>
+          </a:bodyPr>
+          <a:lstStyle/>
+          <a:p>
+            <a:pPr algn="ctr"/>
+            <a:r>
+              <a:rPr sz="1000" b="1">
+                <a:solidFill>
+                  <a:srgbClr val="FFFFFF"/>
+                </a:solidFill>
+              </a:rPr>
+              <a:t>4</a:t>
+            </a:r>
+          </a:p>
+        </p:txBody>
+      </p:sp>
+      <p:sp>
+        <p:nvSpPr>
+          <p:cNvPr id="24" name="TextBox 23"/>
+          <p:cNvSpPr txBox="1"/>
+          <p:nvPr/>
+        </p:nvSpPr>
+        <p:spPr>
+          <a:xfrm>
+            <a:off x="1783080" y="5833872"/>
+            <a:ext cx="9006840" cy="347472"/>
+          </a:xfrm>
+          <a:prstGeom prst="rect">
+            <a:avLst/>
+          </a:prstGeom>
+          <a:noFill/>
+        </p:spPr>
+        <p:txBody>
+          <a:bodyPr wrap="square">
+            <a:spAutoFit/>
+          </a:bodyPr>
+          <a:lstStyle/>
+          <a:p>
+            <a:r>
+              <a:rPr sz="1700" b="0">
+                <a:solidFill>
+                  <a:srgbClr val="1A202C"/>
+                </a:solidFill>
+              </a:rPr>
+              <a:t>Discuss how our writing has improved</a:t>
+            </a:r>
+          </a:p>
+        </p:txBody>
+      </p:sp>
+      <p:sp>
+        <p:nvSpPr>
+          <p:cNvPr id="25" name="TextBox 24"/>
+          <p:cNvSpPr txBox="1"/>
+          <p:nvPr/>
+        </p:nvSpPr>
+        <p:spPr>
+          <a:xfrm>
+            <a:off x="777240" y="6419088"/>
+            <a:ext cx="10835640" cy="228600"/>
+          </a:xfrm>
+          <a:prstGeom prst="rect">
+            <a:avLst/>
+          </a:prstGeom>
+          <a:noFill/>
+        </p:spPr>
+        <p:txBody>
+          <a:bodyPr wrap="square">
+            <a:spAutoFit/>
+          </a:bodyPr>
+          <a:lstStyle/>
+          <a:p>
+            <a:pPr algn="r"/>
+            <a:r>
+              <a:rPr sz="1000" b="0">
+                <a:solidFill>
+                  <a:srgbClr val="5B677D"/>
+                </a:solidFill>
+              </a:rPr>
+              <a:t>Listen • Talk • Try • Explain</a:t>
             </a:r>
           </a:p>
         </p:txBody>
@@ -3520,43 +5792,100 @@
       <p:grpSpPr/>
       <p:sp>
         <p:nvSpPr>
-          <p:cNvPr id="2" name="TextBox 1"/>
+          <p:cNvPr id="2" name="Rectangle 1"/>
+          <p:cNvSpPr/>
+          <p:nvPr/>
+        </p:nvSpPr>
+        <p:spPr>
+          <a:xfrm>
+            <a:off x="0" y="0"/>
+            <a:ext cx="12191695" cy="914400"/>
+          </a:xfrm>
+          <a:prstGeom prst="rect">
+            <a:avLst/>
+          </a:prstGeom>
+          <a:solidFill>
+            <a:srgbClr val="D97706"/>
+          </a:solidFill>
+          <a:ln>
+            <a:noFill/>
+          </a:ln>
+        </p:spPr>
+        <p:style>
+          <a:lnRef idx="1">
+            <a:schemeClr val="accent1"/>
+          </a:lnRef>
+          <a:fillRef idx="3">
+            <a:schemeClr val="accent1"/>
+          </a:fillRef>
+          <a:effectRef idx="2">
+            <a:schemeClr val="accent1"/>
+          </a:effectRef>
+          <a:fontRef idx="minor">
+            <a:schemeClr val="lt1"/>
+          </a:fontRef>
+        </p:style>
+        <p:txBody>
+          <a:bodyPr rtlCol="0" anchor="ctr"/>
+          <a:lstStyle/>
+          <a:p>
+            <a:pPr algn="ctr"/>
+          </a:p>
+        </p:txBody>
+      </p:sp>
+      <p:sp>
+        <p:nvSpPr>
+          <p:cNvPr id="3" name="Rectangle 2"/>
+          <p:cNvSpPr/>
+          <p:nvPr/>
+        </p:nvSpPr>
+        <p:spPr>
+          <a:xfrm>
+            <a:off x="0" y="914400"/>
+            <a:ext cx="164592" cy="5943600"/>
+          </a:xfrm>
+          <a:prstGeom prst="rect">
+            <a:avLst/>
+          </a:prstGeom>
+          <a:solidFill>
+            <a:srgbClr val="D97706"/>
+          </a:solidFill>
+          <a:ln>
+            <a:noFill/>
+          </a:ln>
+        </p:spPr>
+        <p:style>
+          <a:lnRef idx="1">
+            <a:schemeClr val="accent1"/>
+          </a:lnRef>
+          <a:fillRef idx="3">
+            <a:schemeClr val="accent1"/>
+          </a:fillRef>
+          <a:effectRef idx="2">
+            <a:schemeClr val="accent1"/>
+          </a:effectRef>
+          <a:fontRef idx="minor">
+            <a:schemeClr val="lt1"/>
+          </a:fontRef>
+        </p:style>
+        <p:txBody>
+          <a:bodyPr rtlCol="0" anchor="ctr"/>
+          <a:lstStyle/>
+          <a:p>
+            <a:pPr algn="ctr"/>
+          </a:p>
+        </p:txBody>
+      </p:sp>
+      <p:sp>
+        <p:nvSpPr>
+          <p:cNvPr id="4" name="TextBox 3"/>
           <p:cNvSpPr txBox="1"/>
           <p:nvPr/>
         </p:nvSpPr>
         <p:spPr>
           <a:xfrm>
-            <a:off x="548640" y="320040"/>
-            <a:ext cx="11064240" cy="777240"/>
-          </a:xfrm>
-          <a:prstGeom prst="rect">
-            <a:avLst/>
-          </a:prstGeom>
-          <a:noFill/>
-        </p:spPr>
-        <p:txBody>
-          <a:bodyPr wrap="none">
-            <a:spAutoFit/>
-          </a:bodyPr>
-          <a:lstStyle/>
-          <a:p>
-            <a:r>
-              <a:rPr sz="3000" b="1"/>
-              <a:t>Selecting Your Best Work</a:t>
-            </a:r>
-          </a:p>
-        </p:txBody>
-      </p:sp>
-      <p:sp>
-        <p:nvSpPr>
-          <p:cNvPr id="3" name="TextBox 2"/>
-          <p:cNvSpPr txBox="1"/>
-          <p:nvPr/>
-        </p:nvSpPr>
-        <p:spPr>
-          <a:xfrm>
-            <a:off x="868680" y="1417320"/>
-            <a:ext cx="10424160" cy="4892040"/>
+            <a:off x="594360" y="246888"/>
+            <a:ext cx="2926080" cy="320040"/>
           </a:xfrm>
           <a:prstGeom prst="rect">
             <a:avLst/>
@@ -3569,47 +5898,347 @@
           </a:bodyPr>
           <a:lstStyle/>
           <a:p>
-            <a:pPr>
-              <a:spcAft>
-                <a:spcPts val="800"/>
-              </a:spcAft>
-              <a:defRPr sz="2200"/>
-            </a:pPr>
-            <a:r>
-              <a:t>Read your compositions from Week 1 to Week 11</a:t>
-            </a:r>
-          </a:p>
-          <a:p>
-            <a:pPr>
-              <a:spcAft>
-                <a:spcPts val="800"/>
-              </a:spcAft>
-              <a:defRPr sz="2200"/>
-            </a:pPr>
-            <a:r>
-              <a:t>Compare your early work to your recent work</a:t>
-            </a:r>
-          </a:p>
-          <a:p>
-            <a:pPr>
-              <a:spcAft>
-                <a:spcPts val="800"/>
-              </a:spcAft>
-              <a:defRPr sz="2200"/>
-            </a:pPr>
-            <a:r>
-              <a:t>Check for teacher's comments and marks</a:t>
-            </a:r>
-          </a:p>
-          <a:p>
-            <a:pPr>
-              <a:spcAft>
-                <a:spcPts val="800"/>
-              </a:spcAft>
-              <a:defRPr sz="2200"/>
-            </a:pPr>
-            <a:r>
-              <a:t>Pick 3 pieces that show your best English</a:t>
+            <a:r>
+              <a:rPr sz="1300" b="1">
+                <a:solidFill>
+                  <a:srgbClr val="FFFFFF"/>
+                </a:solidFill>
+              </a:rPr>
+              <a:t>5. MODEL</a:t>
+            </a:r>
+          </a:p>
+        </p:txBody>
+      </p:sp>
+      <p:sp>
+        <p:nvSpPr>
+          <p:cNvPr id="5" name="TextBox 4"/>
+          <p:cNvSpPr txBox="1"/>
+          <p:nvPr/>
+        </p:nvSpPr>
+        <p:spPr>
+          <a:xfrm>
+            <a:off x="7772400" y="246888"/>
+            <a:ext cx="3840480" cy="320040"/>
+          </a:xfrm>
+          <a:prstGeom prst="rect">
+            <a:avLst/>
+          </a:prstGeom>
+          <a:noFill/>
+        </p:spPr>
+        <p:txBody>
+          <a:bodyPr wrap="square">
+            <a:spAutoFit/>
+          </a:bodyPr>
+          <a:lstStyle/>
+          <a:p>
+            <a:pPr algn="r"/>
+            <a:r>
+              <a:rPr sz="1100" b="0">
+                <a:solidFill>
+                  <a:srgbClr val="FFFFFF"/>
+                </a:solidFill>
+              </a:rPr>
+              <a:t>p7_t1_english_1205</a:t>
+            </a:r>
+          </a:p>
+        </p:txBody>
+      </p:sp>
+      <p:sp>
+        <p:nvSpPr>
+          <p:cNvPr id="6" name="TextBox 5"/>
+          <p:cNvSpPr txBox="1"/>
+          <p:nvPr/>
+        </p:nvSpPr>
+        <p:spPr>
+          <a:xfrm>
+            <a:off x="640080" y="1143000"/>
+            <a:ext cx="10972800" cy="685800"/>
+          </a:xfrm>
+          <a:prstGeom prst="rect">
+            <a:avLst/>
+          </a:prstGeom>
+          <a:noFill/>
+        </p:spPr>
+        <p:txBody>
+          <a:bodyPr wrap="square">
+            <a:spAutoFit/>
+          </a:bodyPr>
+          <a:lstStyle/>
+          <a:p>
+            <a:r>
+              <a:rPr sz="2800" b="1">
+                <a:solidFill>
+                  <a:srgbClr val="1A202C"/>
+                </a:solidFill>
+              </a:rPr>
+              <a:t>What is a Portfolio?</a:t>
+            </a:r>
+          </a:p>
+        </p:txBody>
+      </p:sp>
+      <p:sp>
+        <p:nvSpPr>
+          <p:cNvPr id="7" name="Rounded Rectangle 6"/>
+          <p:cNvSpPr/>
+          <p:nvPr/>
+        </p:nvSpPr>
+        <p:spPr>
+          <a:xfrm>
+            <a:off x="777240" y="1993392"/>
+            <a:ext cx="10835640" cy="1005840"/>
+          </a:xfrm>
+          <a:prstGeom prst="roundRect">
+            <a:avLst/>
+          </a:prstGeom>
+          <a:solidFill>
+            <a:srgbClr val="FFFBEB"/>
+          </a:solidFill>
+          <a:ln w="15240">
+            <a:solidFill>
+              <a:srgbClr val="D97706"/>
+            </a:solidFill>
+          </a:ln>
+        </p:spPr>
+        <p:style>
+          <a:lnRef idx="1">
+            <a:schemeClr val="accent1"/>
+          </a:lnRef>
+          <a:fillRef idx="3">
+            <a:schemeClr val="accent1"/>
+          </a:fillRef>
+          <a:effectRef idx="2">
+            <a:schemeClr val="accent1"/>
+          </a:effectRef>
+          <a:fontRef idx="minor">
+            <a:schemeClr val="lt1"/>
+          </a:fontRef>
+        </p:style>
+        <p:txBody>
+          <a:bodyPr rtlCol="0" anchor="ctr"/>
+          <a:lstStyle/>
+          <a:p>
+            <a:pPr algn="ctr"/>
+          </a:p>
+        </p:txBody>
+      </p:sp>
+      <p:sp>
+        <p:nvSpPr>
+          <p:cNvPr id="8" name="TextBox 7"/>
+          <p:cNvSpPr txBox="1"/>
+          <p:nvPr/>
+        </p:nvSpPr>
+        <p:spPr>
+          <a:xfrm>
+            <a:off x="1051560" y="2212848"/>
+            <a:ext cx="10287000" cy="502920"/>
+          </a:xfrm>
+          <a:prstGeom prst="rect">
+            <a:avLst/>
+          </a:prstGeom>
+          <a:noFill/>
+        </p:spPr>
+        <p:txBody>
+          <a:bodyPr wrap="square">
+            <a:spAutoFit/>
+          </a:bodyPr>
+          <a:lstStyle/>
+          <a:p>
+            <a:r>
+              <a:rPr sz="2100" b="1">
+                <a:solidFill>
+                  <a:srgbClr val="1A202C"/>
+                </a:solidFill>
+              </a:rPr>
+              <a:t>Model the example step by step.</a:t>
+            </a:r>
+          </a:p>
+        </p:txBody>
+      </p:sp>
+      <p:sp>
+        <p:nvSpPr>
+          <p:cNvPr id="9" name="Rounded Rectangle 8"/>
+          <p:cNvSpPr/>
+          <p:nvPr/>
+        </p:nvSpPr>
+        <p:spPr>
+          <a:xfrm>
+            <a:off x="1005840" y="3246120"/>
+            <a:ext cx="10149840" cy="731520"/>
+          </a:xfrm>
+          <a:prstGeom prst="roundRect">
+            <a:avLst/>
+          </a:prstGeom>
+          <a:solidFill>
+            <a:srgbClr val="F8FAFC"/>
+          </a:solidFill>
+          <a:ln w="15240">
+            <a:solidFill>
+              <a:srgbClr val="CBD5E1"/>
+            </a:solidFill>
+          </a:ln>
+        </p:spPr>
+        <p:style>
+          <a:lnRef idx="1">
+            <a:schemeClr val="accent1"/>
+          </a:lnRef>
+          <a:fillRef idx="3">
+            <a:schemeClr val="accent1"/>
+          </a:fillRef>
+          <a:effectRef idx="2">
+            <a:schemeClr val="accent1"/>
+          </a:effectRef>
+          <a:fontRef idx="minor">
+            <a:schemeClr val="lt1"/>
+          </a:fontRef>
+        </p:style>
+        <p:txBody>
+          <a:bodyPr rtlCol="0" anchor="ctr"/>
+          <a:lstStyle/>
+          <a:p>
+            <a:pPr algn="ctr"/>
+          </a:p>
+        </p:txBody>
+      </p:sp>
+      <p:sp>
+        <p:nvSpPr>
+          <p:cNvPr id="10" name="Oval 9"/>
+          <p:cNvSpPr/>
+          <p:nvPr/>
+        </p:nvSpPr>
+        <p:spPr>
+          <a:xfrm>
+            <a:off x="1234440" y="3364991"/>
+            <a:ext cx="347472" cy="347472"/>
+          </a:xfrm>
+          <a:prstGeom prst="ellipse">
+            <a:avLst/>
+          </a:prstGeom>
+          <a:solidFill>
+            <a:srgbClr val="D97706"/>
+          </a:solidFill>
+          <a:ln>
+            <a:noFill/>
+          </a:ln>
+        </p:spPr>
+        <p:style>
+          <a:lnRef idx="1">
+            <a:schemeClr val="accent1"/>
+          </a:lnRef>
+          <a:fillRef idx="3">
+            <a:schemeClr val="accent1"/>
+          </a:fillRef>
+          <a:effectRef idx="2">
+            <a:schemeClr val="accent1"/>
+          </a:effectRef>
+          <a:fontRef idx="minor">
+            <a:schemeClr val="lt1"/>
+          </a:fontRef>
+        </p:style>
+        <p:txBody>
+          <a:bodyPr rtlCol="0" anchor="ctr"/>
+          <a:lstStyle/>
+          <a:p>
+            <a:pPr algn="ctr"/>
+          </a:p>
+        </p:txBody>
+      </p:sp>
+      <p:sp>
+        <p:nvSpPr>
+          <p:cNvPr id="11" name="TextBox 10"/>
+          <p:cNvSpPr txBox="1"/>
+          <p:nvPr/>
+        </p:nvSpPr>
+        <p:spPr>
+          <a:xfrm>
+            <a:off x="1234440" y="3410712"/>
+            <a:ext cx="347472" cy="182880"/>
+          </a:xfrm>
+          <a:prstGeom prst="rect">
+            <a:avLst/>
+          </a:prstGeom>
+          <a:noFill/>
+        </p:spPr>
+        <p:txBody>
+          <a:bodyPr wrap="square">
+            <a:spAutoFit/>
+          </a:bodyPr>
+          <a:lstStyle/>
+          <a:p>
+            <a:pPr algn="ctr"/>
+            <a:r>
+              <a:rPr sz="1000" b="1">
+                <a:solidFill>
+                  <a:srgbClr val="FFFFFF"/>
+                </a:solidFill>
+              </a:rPr>
+              <a:t>1</a:t>
+            </a:r>
+          </a:p>
+        </p:txBody>
+      </p:sp>
+      <p:sp>
+        <p:nvSpPr>
+          <p:cNvPr id="12" name="TextBox 11"/>
+          <p:cNvSpPr txBox="1"/>
+          <p:nvPr/>
+        </p:nvSpPr>
+        <p:spPr>
+          <a:xfrm>
+            <a:off x="1783080" y="3364991"/>
+            <a:ext cx="9006840" cy="347472"/>
+          </a:xfrm>
+          <a:prstGeom prst="rect">
+            <a:avLst/>
+          </a:prstGeom>
+          <a:noFill/>
+        </p:spPr>
+        <p:txBody>
+          <a:bodyPr wrap="square">
+            <a:spAutoFit/>
+          </a:bodyPr>
+          <a:lstStyle/>
+          <a:p>
+            <a:r>
+              <a:rPr sz="1700" b="0">
+                <a:solidFill>
+                  <a:srgbClr val="1A202C"/>
+                </a:solidFill>
+              </a:rPr>
+              <a:t>NEW VOCABULARY</a:t>
+            </a:r>
+          </a:p>
+        </p:txBody>
+      </p:sp>
+      <p:sp>
+        <p:nvSpPr>
+          <p:cNvPr id="13" name="TextBox 12"/>
+          <p:cNvSpPr txBox="1"/>
+          <p:nvPr/>
+        </p:nvSpPr>
+        <p:spPr>
+          <a:xfrm>
+            <a:off x="777240" y="6419088"/>
+            <a:ext cx="10835640" cy="228600"/>
+          </a:xfrm>
+          <a:prstGeom prst="rect">
+            <a:avLst/>
+          </a:prstGeom>
+          <a:noFill/>
+        </p:spPr>
+        <p:txBody>
+          <a:bodyPr wrap="square">
+            <a:spAutoFit/>
+          </a:bodyPr>
+          <a:lstStyle/>
+          <a:p>
+            <a:pPr algn="r"/>
+            <a:r>
+              <a:rPr sz="1000" b="0">
+                <a:solidFill>
+                  <a:srgbClr val="5B677D"/>
+                </a:solidFill>
+              </a:rPr>
+              <a:t>Listen • Talk • Try • Explain</a:t>
             </a:r>
           </a:p>
         </p:txBody>
@@ -3634,43 +6263,100 @@
       <p:grpSpPr/>
       <p:sp>
         <p:nvSpPr>
-          <p:cNvPr id="2" name="TextBox 1"/>
+          <p:cNvPr id="2" name="Rectangle 1"/>
+          <p:cNvSpPr/>
+          <p:nvPr/>
+        </p:nvSpPr>
+        <p:spPr>
+          <a:xfrm>
+            <a:off x="0" y="0"/>
+            <a:ext cx="12191695" cy="914400"/>
+          </a:xfrm>
+          <a:prstGeom prst="rect">
+            <a:avLst/>
+          </a:prstGeom>
+          <a:solidFill>
+            <a:srgbClr val="BE123C"/>
+          </a:solidFill>
+          <a:ln>
+            <a:noFill/>
+          </a:ln>
+        </p:spPr>
+        <p:style>
+          <a:lnRef idx="1">
+            <a:schemeClr val="accent1"/>
+          </a:lnRef>
+          <a:fillRef idx="3">
+            <a:schemeClr val="accent1"/>
+          </a:fillRef>
+          <a:effectRef idx="2">
+            <a:schemeClr val="accent1"/>
+          </a:effectRef>
+          <a:fontRef idx="minor">
+            <a:schemeClr val="lt1"/>
+          </a:fontRef>
+        </p:style>
+        <p:txBody>
+          <a:bodyPr rtlCol="0" anchor="ctr"/>
+          <a:lstStyle/>
+          <a:p>
+            <a:pPr algn="ctr"/>
+          </a:p>
+        </p:txBody>
+      </p:sp>
+      <p:sp>
+        <p:nvSpPr>
+          <p:cNvPr id="3" name="Rectangle 2"/>
+          <p:cNvSpPr/>
+          <p:nvPr/>
+        </p:nvSpPr>
+        <p:spPr>
+          <a:xfrm>
+            <a:off x="0" y="914400"/>
+            <a:ext cx="164592" cy="5943600"/>
+          </a:xfrm>
+          <a:prstGeom prst="rect">
+            <a:avLst/>
+          </a:prstGeom>
+          <a:solidFill>
+            <a:srgbClr val="BE123C"/>
+          </a:solidFill>
+          <a:ln>
+            <a:noFill/>
+          </a:ln>
+        </p:spPr>
+        <p:style>
+          <a:lnRef idx="1">
+            <a:schemeClr val="accent1"/>
+          </a:lnRef>
+          <a:fillRef idx="3">
+            <a:schemeClr val="accent1"/>
+          </a:fillRef>
+          <a:effectRef idx="2">
+            <a:schemeClr val="accent1"/>
+          </a:effectRef>
+          <a:fontRef idx="minor">
+            <a:schemeClr val="lt1"/>
+          </a:fontRef>
+        </p:style>
+        <p:txBody>
+          <a:bodyPr rtlCol="0" anchor="ctr"/>
+          <a:lstStyle/>
+          <a:p>
+            <a:pPr algn="ctr"/>
+          </a:p>
+        </p:txBody>
+      </p:sp>
+      <p:sp>
+        <p:nvSpPr>
+          <p:cNvPr id="4" name="TextBox 3"/>
           <p:cNvSpPr txBox="1"/>
           <p:nvPr/>
         </p:nvSpPr>
         <p:spPr>
           <a:xfrm>
-            <a:off x="548640" y="320040"/>
-            <a:ext cx="11064240" cy="777240"/>
-          </a:xfrm>
-          <a:prstGeom prst="rect">
-            <a:avLst/>
-          </a:prstGeom>
-          <a:noFill/>
-        </p:spPr>
-        <p:txBody>
-          <a:bodyPr wrap="none">
-            <a:spAutoFit/>
-          </a:bodyPr>
-          <a:lstStyle/>
-          <a:p>
-            <a:r>
-              <a:rPr sz="3000" b="1"/>
-              <a:t>Creating the Portfolio Structure</a:t>
-            </a:r>
-          </a:p>
-        </p:txBody>
-      </p:sp>
-      <p:sp>
-        <p:nvSpPr>
-          <p:cNvPr id="3" name="TextBox 2"/>
-          <p:cNvSpPr txBox="1"/>
-          <p:nvPr/>
-        </p:nvSpPr>
-        <p:spPr>
-          <a:xfrm>
-            <a:off x="868680" y="1417320"/>
-            <a:ext cx="10424160" cy="4892040"/>
+            <a:off x="594360" y="246888"/>
+            <a:ext cx="2926080" cy="320040"/>
           </a:xfrm>
           <a:prstGeom prst="rect">
             <a:avLst/>
@@ -3683,47 +6369,657 @@
           </a:bodyPr>
           <a:lstStyle/>
           <a:p>
-            <a:pPr>
-              <a:spcAft>
-                <a:spcPts val="800"/>
-              </a:spcAft>
-              <a:defRPr sz="2200"/>
-            </a:pPr>
-            <a:r>
-              <a:t>Title Page: Name, Class, Subject, Term</a:t>
-            </a:r>
-          </a:p>
-          <a:p>
-            <a:pPr>
-              <a:spcAft>
-                <a:spcPts val="800"/>
-              </a:spcAft>
-              <a:defRPr sz="2200"/>
-            </a:pPr>
-            <a:r>
-              <a:t>Table of Contents: List of selected work</a:t>
-            </a:r>
-          </a:p>
-          <a:p>
-            <a:pPr>
-              <a:spcAft>
-                <a:spcPts val="800"/>
-              </a:spcAft>
-              <a:defRPr sz="2200"/>
-            </a:pPr>
-            <a:r>
-              <a:t>Introduction: A short sentence about the portfolio</a:t>
-            </a:r>
-          </a:p>
-          <a:p>
-            <a:pPr>
-              <a:spcAft>
-                <a:spcPts val="800"/>
-              </a:spcAft>
-              <a:defRPr sz="2200"/>
-            </a:pPr>
-            <a:r>
-              <a:t>Order: Chronological or by topic</a:t>
+            <a:r>
+              <a:rPr sz="1300" b="1">
+                <a:solidFill>
+                  <a:srgbClr val="FFFFFF"/>
+                </a:solidFill>
+              </a:rPr>
+              <a:t>6. PRACTICE</a:t>
+            </a:r>
+          </a:p>
+        </p:txBody>
+      </p:sp>
+      <p:sp>
+        <p:nvSpPr>
+          <p:cNvPr id="5" name="TextBox 4"/>
+          <p:cNvSpPr txBox="1"/>
+          <p:nvPr/>
+        </p:nvSpPr>
+        <p:spPr>
+          <a:xfrm>
+            <a:off x="7772400" y="246888"/>
+            <a:ext cx="3840480" cy="320040"/>
+          </a:xfrm>
+          <a:prstGeom prst="rect">
+            <a:avLst/>
+          </a:prstGeom>
+          <a:noFill/>
+        </p:spPr>
+        <p:txBody>
+          <a:bodyPr wrap="square">
+            <a:spAutoFit/>
+          </a:bodyPr>
+          <a:lstStyle/>
+          <a:p>
+            <a:pPr algn="r"/>
+            <a:r>
+              <a:rPr sz="1100" b="0">
+                <a:solidFill>
+                  <a:srgbClr val="FFFFFF"/>
+                </a:solidFill>
+              </a:rPr>
+              <a:t>p7_t1_english_1205</a:t>
+            </a:r>
+          </a:p>
+        </p:txBody>
+      </p:sp>
+      <p:sp>
+        <p:nvSpPr>
+          <p:cNvPr id="6" name="TextBox 5"/>
+          <p:cNvSpPr txBox="1"/>
+          <p:nvPr/>
+        </p:nvSpPr>
+        <p:spPr>
+          <a:xfrm>
+            <a:off x="640080" y="1143000"/>
+            <a:ext cx="10972800" cy="685800"/>
+          </a:xfrm>
+          <a:prstGeom prst="rect">
+            <a:avLst/>
+          </a:prstGeom>
+          <a:noFill/>
+        </p:spPr>
+        <p:txBody>
+          <a:bodyPr wrap="square">
+            <a:spAutoFit/>
+          </a:bodyPr>
+          <a:lstStyle/>
+          <a:p>
+            <a:r>
+              <a:rPr sz="2800" b="1">
+                <a:solidFill>
+                  <a:srgbClr val="1A202C"/>
+                </a:solidFill>
+              </a:rPr>
+              <a:t>Try it together</a:t>
+            </a:r>
+          </a:p>
+        </p:txBody>
+      </p:sp>
+      <p:sp>
+        <p:nvSpPr>
+          <p:cNvPr id="7" name="Rounded Rectangle 6"/>
+          <p:cNvSpPr/>
+          <p:nvPr/>
+        </p:nvSpPr>
+        <p:spPr>
+          <a:xfrm>
+            <a:off x="777240" y="1993392"/>
+            <a:ext cx="10835640" cy="1005840"/>
+          </a:xfrm>
+          <a:prstGeom prst="roundRect">
+            <a:avLst/>
+          </a:prstGeom>
+          <a:solidFill>
+            <a:srgbClr val="FFFBEB"/>
+          </a:solidFill>
+          <a:ln w="15240">
+            <a:solidFill>
+              <a:srgbClr val="BE123C"/>
+            </a:solidFill>
+          </a:ln>
+        </p:spPr>
+        <p:style>
+          <a:lnRef idx="1">
+            <a:schemeClr val="accent1"/>
+          </a:lnRef>
+          <a:fillRef idx="3">
+            <a:schemeClr val="accent1"/>
+          </a:fillRef>
+          <a:effectRef idx="2">
+            <a:schemeClr val="accent1"/>
+          </a:effectRef>
+          <a:fontRef idx="minor">
+            <a:schemeClr val="lt1"/>
+          </a:fontRef>
+        </p:style>
+        <p:txBody>
+          <a:bodyPr rtlCol="0" anchor="ctr"/>
+          <a:lstStyle/>
+          <a:p>
+            <a:pPr algn="ctr"/>
+          </a:p>
+        </p:txBody>
+      </p:sp>
+      <p:sp>
+        <p:nvSpPr>
+          <p:cNvPr id="8" name="TextBox 7"/>
+          <p:cNvSpPr txBox="1"/>
+          <p:nvPr/>
+        </p:nvSpPr>
+        <p:spPr>
+          <a:xfrm>
+            <a:off x="1051560" y="2212848"/>
+            <a:ext cx="10287000" cy="502920"/>
+          </a:xfrm>
+          <a:prstGeom prst="rect">
+            <a:avLst/>
+          </a:prstGeom>
+          <a:noFill/>
+        </p:spPr>
+        <p:txBody>
+          <a:bodyPr wrap="square">
+            <a:spAutoFit/>
+          </a:bodyPr>
+          <a:lstStyle/>
+          <a:p>
+            <a:r>
+              <a:rPr sz="2100" b="1">
+                <a:solidFill>
+                  <a:srgbClr val="1A202C"/>
+                </a:solidFill>
+              </a:rPr>
+              <a:t>Which activity helped you improve your English most?</a:t>
+            </a:r>
+          </a:p>
+        </p:txBody>
+      </p:sp>
+      <p:sp>
+        <p:nvSpPr>
+          <p:cNvPr id="9" name="Rounded Rectangle 8"/>
+          <p:cNvSpPr/>
+          <p:nvPr/>
+        </p:nvSpPr>
+        <p:spPr>
+          <a:xfrm>
+            <a:off x="1005840" y="3246120"/>
+            <a:ext cx="10149840" cy="731520"/>
+          </a:xfrm>
+          <a:prstGeom prst="roundRect">
+            <a:avLst/>
+          </a:prstGeom>
+          <a:solidFill>
+            <a:srgbClr val="F8FAFC"/>
+          </a:solidFill>
+          <a:ln w="15240">
+            <a:solidFill>
+              <a:srgbClr val="CBD5E1"/>
+            </a:solidFill>
+          </a:ln>
+        </p:spPr>
+        <p:style>
+          <a:lnRef idx="1">
+            <a:schemeClr val="accent1"/>
+          </a:lnRef>
+          <a:fillRef idx="3">
+            <a:schemeClr val="accent1"/>
+          </a:fillRef>
+          <a:effectRef idx="2">
+            <a:schemeClr val="accent1"/>
+          </a:effectRef>
+          <a:fontRef idx="minor">
+            <a:schemeClr val="lt1"/>
+          </a:fontRef>
+        </p:style>
+        <p:txBody>
+          <a:bodyPr rtlCol="0" anchor="ctr"/>
+          <a:lstStyle/>
+          <a:p>
+            <a:pPr algn="ctr"/>
+          </a:p>
+        </p:txBody>
+      </p:sp>
+      <p:sp>
+        <p:nvSpPr>
+          <p:cNvPr id="10" name="Oval 9"/>
+          <p:cNvSpPr/>
+          <p:nvPr/>
+        </p:nvSpPr>
+        <p:spPr>
+          <a:xfrm>
+            <a:off x="1234440" y="3364991"/>
+            <a:ext cx="347472" cy="347472"/>
+          </a:xfrm>
+          <a:prstGeom prst="ellipse">
+            <a:avLst/>
+          </a:prstGeom>
+          <a:solidFill>
+            <a:srgbClr val="BE123C"/>
+          </a:solidFill>
+          <a:ln>
+            <a:noFill/>
+          </a:ln>
+        </p:spPr>
+        <p:style>
+          <a:lnRef idx="1">
+            <a:schemeClr val="accent1"/>
+          </a:lnRef>
+          <a:fillRef idx="3">
+            <a:schemeClr val="accent1"/>
+          </a:fillRef>
+          <a:effectRef idx="2">
+            <a:schemeClr val="accent1"/>
+          </a:effectRef>
+          <a:fontRef idx="minor">
+            <a:schemeClr val="lt1"/>
+          </a:fontRef>
+        </p:style>
+        <p:txBody>
+          <a:bodyPr rtlCol="0" anchor="ctr"/>
+          <a:lstStyle/>
+          <a:p>
+            <a:pPr algn="ctr"/>
+          </a:p>
+        </p:txBody>
+      </p:sp>
+      <p:sp>
+        <p:nvSpPr>
+          <p:cNvPr id="11" name="TextBox 10"/>
+          <p:cNvSpPr txBox="1"/>
+          <p:nvPr/>
+        </p:nvSpPr>
+        <p:spPr>
+          <a:xfrm>
+            <a:off x="1234440" y="3410712"/>
+            <a:ext cx="347472" cy="182880"/>
+          </a:xfrm>
+          <a:prstGeom prst="rect">
+            <a:avLst/>
+          </a:prstGeom>
+          <a:noFill/>
+        </p:spPr>
+        <p:txBody>
+          <a:bodyPr wrap="square">
+            <a:spAutoFit/>
+          </a:bodyPr>
+          <a:lstStyle/>
+          <a:p>
+            <a:pPr algn="ctr"/>
+            <a:r>
+              <a:rPr sz="1000" b="1">
+                <a:solidFill>
+                  <a:srgbClr val="FFFFFF"/>
+                </a:solidFill>
+              </a:rPr>
+              <a:t>1</a:t>
+            </a:r>
+          </a:p>
+        </p:txBody>
+      </p:sp>
+      <p:sp>
+        <p:nvSpPr>
+          <p:cNvPr id="12" name="TextBox 11"/>
+          <p:cNvSpPr txBox="1"/>
+          <p:nvPr/>
+        </p:nvSpPr>
+        <p:spPr>
+          <a:xfrm>
+            <a:off x="1783080" y="3364991"/>
+            <a:ext cx="9006840" cy="347472"/>
+          </a:xfrm>
+          <a:prstGeom prst="rect">
+            <a:avLst/>
+          </a:prstGeom>
+          <a:noFill/>
+        </p:spPr>
+        <p:txBody>
+          <a:bodyPr wrap="square">
+            <a:spAutoFit/>
+          </a:bodyPr>
+          <a:lstStyle/>
+          <a:p>
+            <a:r>
+              <a:rPr sz="1700" b="0">
+                <a:solidFill>
+                  <a:srgbClr val="1A202C"/>
+                </a:solidFill>
+              </a:rPr>
+              <a:t>Why is it important to review our work?</a:t>
+            </a:r>
+          </a:p>
+        </p:txBody>
+      </p:sp>
+      <p:sp>
+        <p:nvSpPr>
+          <p:cNvPr id="13" name="Rounded Rectangle 12"/>
+          <p:cNvSpPr/>
+          <p:nvPr/>
+        </p:nvSpPr>
+        <p:spPr>
+          <a:xfrm>
+            <a:off x="1005840" y="4178808"/>
+            <a:ext cx="10149840" cy="731520"/>
+          </a:xfrm>
+          <a:prstGeom prst="roundRect">
+            <a:avLst/>
+          </a:prstGeom>
+          <a:solidFill>
+            <a:srgbClr val="F8FAFC"/>
+          </a:solidFill>
+          <a:ln w="15240">
+            <a:solidFill>
+              <a:srgbClr val="CBD5E1"/>
+            </a:solidFill>
+          </a:ln>
+        </p:spPr>
+        <p:style>
+          <a:lnRef idx="1">
+            <a:schemeClr val="accent1"/>
+          </a:lnRef>
+          <a:fillRef idx="3">
+            <a:schemeClr val="accent1"/>
+          </a:fillRef>
+          <a:effectRef idx="2">
+            <a:schemeClr val="accent1"/>
+          </a:effectRef>
+          <a:fontRef idx="minor">
+            <a:schemeClr val="lt1"/>
+          </a:fontRef>
+        </p:style>
+        <p:txBody>
+          <a:bodyPr rtlCol="0" anchor="ctr"/>
+          <a:lstStyle/>
+          <a:p>
+            <a:pPr algn="ctr"/>
+          </a:p>
+        </p:txBody>
+      </p:sp>
+      <p:sp>
+        <p:nvSpPr>
+          <p:cNvPr id="14" name="Oval 13"/>
+          <p:cNvSpPr/>
+          <p:nvPr/>
+        </p:nvSpPr>
+        <p:spPr>
+          <a:xfrm>
+            <a:off x="1234440" y="4297680"/>
+            <a:ext cx="347472" cy="347472"/>
+          </a:xfrm>
+          <a:prstGeom prst="ellipse">
+            <a:avLst/>
+          </a:prstGeom>
+          <a:solidFill>
+            <a:srgbClr val="BE123C"/>
+          </a:solidFill>
+          <a:ln>
+            <a:noFill/>
+          </a:ln>
+        </p:spPr>
+        <p:style>
+          <a:lnRef idx="1">
+            <a:schemeClr val="accent1"/>
+          </a:lnRef>
+          <a:fillRef idx="3">
+            <a:schemeClr val="accent1"/>
+          </a:fillRef>
+          <a:effectRef idx="2">
+            <a:schemeClr val="accent1"/>
+          </a:effectRef>
+          <a:fontRef idx="minor">
+            <a:schemeClr val="lt1"/>
+          </a:fontRef>
+        </p:style>
+        <p:txBody>
+          <a:bodyPr rtlCol="0" anchor="ctr"/>
+          <a:lstStyle/>
+          <a:p>
+            <a:pPr algn="ctr"/>
+          </a:p>
+        </p:txBody>
+      </p:sp>
+      <p:sp>
+        <p:nvSpPr>
+          <p:cNvPr id="15" name="TextBox 14"/>
+          <p:cNvSpPr txBox="1"/>
+          <p:nvPr/>
+        </p:nvSpPr>
+        <p:spPr>
+          <a:xfrm>
+            <a:off x="1234440" y="4343400"/>
+            <a:ext cx="347472" cy="182880"/>
+          </a:xfrm>
+          <a:prstGeom prst="rect">
+            <a:avLst/>
+          </a:prstGeom>
+          <a:noFill/>
+        </p:spPr>
+        <p:txBody>
+          <a:bodyPr wrap="square">
+            <a:spAutoFit/>
+          </a:bodyPr>
+          <a:lstStyle/>
+          <a:p>
+            <a:pPr algn="ctr"/>
+            <a:r>
+              <a:rPr sz="1000" b="1">
+                <a:solidFill>
+                  <a:srgbClr val="FFFFFF"/>
+                </a:solidFill>
+              </a:rPr>
+              <a:t>2</a:t>
+            </a:r>
+          </a:p>
+        </p:txBody>
+      </p:sp>
+      <p:sp>
+        <p:nvSpPr>
+          <p:cNvPr id="16" name="TextBox 15"/>
+          <p:cNvSpPr txBox="1"/>
+          <p:nvPr/>
+        </p:nvSpPr>
+        <p:spPr>
+          <a:xfrm>
+            <a:off x="1783080" y="4297680"/>
+            <a:ext cx="9006840" cy="347472"/>
+          </a:xfrm>
+          <a:prstGeom prst="rect">
+            <a:avLst/>
+          </a:prstGeom>
+          <a:noFill/>
+        </p:spPr>
+        <p:txBody>
+          <a:bodyPr wrap="square">
+            <a:spAutoFit/>
+          </a:bodyPr>
+          <a:lstStyle/>
+          <a:p>
+            <a:r>
+              <a:rPr sz="1700" b="0">
+                <a:solidFill>
+                  <a:srgbClr val="1A202C"/>
+                </a:solidFill>
+              </a:rPr>
+              <a:t>What is a portfolio?</a:t>
+            </a:r>
+          </a:p>
+        </p:txBody>
+      </p:sp>
+      <p:sp>
+        <p:nvSpPr>
+          <p:cNvPr id="17" name="Rounded Rectangle 16"/>
+          <p:cNvSpPr/>
+          <p:nvPr/>
+        </p:nvSpPr>
+        <p:spPr>
+          <a:xfrm>
+            <a:off x="1005840" y="5111496"/>
+            <a:ext cx="10149840" cy="731520"/>
+          </a:xfrm>
+          <a:prstGeom prst="roundRect">
+            <a:avLst/>
+          </a:prstGeom>
+          <a:solidFill>
+            <a:srgbClr val="F8FAFC"/>
+          </a:solidFill>
+          <a:ln w="15240">
+            <a:solidFill>
+              <a:srgbClr val="CBD5E1"/>
+            </a:solidFill>
+          </a:ln>
+        </p:spPr>
+        <p:style>
+          <a:lnRef idx="1">
+            <a:schemeClr val="accent1"/>
+          </a:lnRef>
+          <a:fillRef idx="3">
+            <a:schemeClr val="accent1"/>
+          </a:fillRef>
+          <a:effectRef idx="2">
+            <a:schemeClr val="accent1"/>
+          </a:effectRef>
+          <a:fontRef idx="minor">
+            <a:schemeClr val="lt1"/>
+          </a:fontRef>
+        </p:style>
+        <p:txBody>
+          <a:bodyPr rtlCol="0" anchor="ctr"/>
+          <a:lstStyle/>
+          <a:p>
+            <a:pPr algn="ctr"/>
+          </a:p>
+        </p:txBody>
+      </p:sp>
+      <p:sp>
+        <p:nvSpPr>
+          <p:cNvPr id="18" name="Oval 17"/>
+          <p:cNvSpPr/>
+          <p:nvPr/>
+        </p:nvSpPr>
+        <p:spPr>
+          <a:xfrm>
+            <a:off x="1234440" y="5230368"/>
+            <a:ext cx="347472" cy="347472"/>
+          </a:xfrm>
+          <a:prstGeom prst="ellipse">
+            <a:avLst/>
+          </a:prstGeom>
+          <a:solidFill>
+            <a:srgbClr val="BE123C"/>
+          </a:solidFill>
+          <a:ln>
+            <a:noFill/>
+          </a:ln>
+        </p:spPr>
+        <p:style>
+          <a:lnRef idx="1">
+            <a:schemeClr val="accent1"/>
+          </a:lnRef>
+          <a:fillRef idx="3">
+            <a:schemeClr val="accent1"/>
+          </a:fillRef>
+          <a:effectRef idx="2">
+            <a:schemeClr val="accent1"/>
+          </a:effectRef>
+          <a:fontRef idx="minor">
+            <a:schemeClr val="lt1"/>
+          </a:fontRef>
+        </p:style>
+        <p:txBody>
+          <a:bodyPr rtlCol="0" anchor="ctr"/>
+          <a:lstStyle/>
+          <a:p>
+            <a:pPr algn="ctr"/>
+          </a:p>
+        </p:txBody>
+      </p:sp>
+      <p:sp>
+        <p:nvSpPr>
+          <p:cNvPr id="19" name="TextBox 18"/>
+          <p:cNvSpPr txBox="1"/>
+          <p:nvPr/>
+        </p:nvSpPr>
+        <p:spPr>
+          <a:xfrm>
+            <a:off x="1234440" y="5276088"/>
+            <a:ext cx="347472" cy="182880"/>
+          </a:xfrm>
+          <a:prstGeom prst="rect">
+            <a:avLst/>
+          </a:prstGeom>
+          <a:noFill/>
+        </p:spPr>
+        <p:txBody>
+          <a:bodyPr wrap="square">
+            <a:spAutoFit/>
+          </a:bodyPr>
+          <a:lstStyle/>
+          <a:p>
+            <a:pPr algn="ctr"/>
+            <a:r>
+              <a:rPr sz="1000" b="1">
+                <a:solidFill>
+                  <a:srgbClr val="FFFFFF"/>
+                </a:solidFill>
+              </a:rPr>
+              <a:t>3</a:t>
+            </a:r>
+          </a:p>
+        </p:txBody>
+      </p:sp>
+      <p:sp>
+        <p:nvSpPr>
+          <p:cNvPr id="20" name="TextBox 19"/>
+          <p:cNvSpPr txBox="1"/>
+          <p:nvPr/>
+        </p:nvSpPr>
+        <p:spPr>
+          <a:xfrm>
+            <a:off x="1783080" y="5230368"/>
+            <a:ext cx="9006840" cy="347472"/>
+          </a:xfrm>
+          <a:prstGeom prst="rect">
+            <a:avLst/>
+          </a:prstGeom>
+          <a:noFill/>
+        </p:spPr>
+        <p:txBody>
+          <a:bodyPr wrap="square">
+            <a:spAutoFit/>
+          </a:bodyPr>
+          <a:lstStyle/>
+          <a:p>
+            <a:r>
+              <a:rPr sz="1700" b="0">
+                <a:solidFill>
+                  <a:srgbClr val="1A202C"/>
+                </a:solidFill>
+              </a:rPr>
+              <a:t>Agree on one answer before writing.</a:t>
+            </a:r>
+          </a:p>
+        </p:txBody>
+      </p:sp>
+      <p:sp>
+        <p:nvSpPr>
+          <p:cNvPr id="21" name="TextBox 20"/>
+          <p:cNvSpPr txBox="1"/>
+          <p:nvPr/>
+        </p:nvSpPr>
+        <p:spPr>
+          <a:xfrm>
+            <a:off x="777240" y="6419088"/>
+            <a:ext cx="10835640" cy="228600"/>
+          </a:xfrm>
+          <a:prstGeom prst="rect">
+            <a:avLst/>
+          </a:prstGeom>
+          <a:noFill/>
+        </p:spPr>
+        <p:txBody>
+          <a:bodyPr wrap="square">
+            <a:spAutoFit/>
+          </a:bodyPr>
+          <a:lstStyle/>
+          <a:p>
+            <a:pPr algn="r"/>
+            <a:r>
+              <a:rPr sz="1000" b="0">
+                <a:solidFill>
+                  <a:srgbClr val="5B677D"/>
+                </a:solidFill>
+              </a:rPr>
+              <a:t>Listen • Talk • Try • Explain</a:t>
             </a:r>
           </a:p>
         </p:txBody>
@@ -3748,43 +7044,100 @@
       <p:grpSpPr/>
       <p:sp>
         <p:nvSpPr>
-          <p:cNvPr id="2" name="TextBox 1"/>
+          <p:cNvPr id="2" name="Rectangle 1"/>
+          <p:cNvSpPr/>
+          <p:nvPr/>
+        </p:nvSpPr>
+        <p:spPr>
+          <a:xfrm>
+            <a:off x="0" y="0"/>
+            <a:ext cx="12191695" cy="914400"/>
+          </a:xfrm>
+          <a:prstGeom prst="rect">
+            <a:avLst/>
+          </a:prstGeom>
+          <a:solidFill>
+            <a:srgbClr val="166534"/>
+          </a:solidFill>
+          <a:ln>
+            <a:noFill/>
+          </a:ln>
+        </p:spPr>
+        <p:style>
+          <a:lnRef idx="1">
+            <a:schemeClr val="accent1"/>
+          </a:lnRef>
+          <a:fillRef idx="3">
+            <a:schemeClr val="accent1"/>
+          </a:fillRef>
+          <a:effectRef idx="2">
+            <a:schemeClr val="accent1"/>
+          </a:effectRef>
+          <a:fontRef idx="minor">
+            <a:schemeClr val="lt1"/>
+          </a:fontRef>
+        </p:style>
+        <p:txBody>
+          <a:bodyPr rtlCol="0" anchor="ctr"/>
+          <a:lstStyle/>
+          <a:p>
+            <a:pPr algn="ctr"/>
+          </a:p>
+        </p:txBody>
+      </p:sp>
+      <p:sp>
+        <p:nvSpPr>
+          <p:cNvPr id="3" name="Rectangle 2"/>
+          <p:cNvSpPr/>
+          <p:nvPr/>
+        </p:nvSpPr>
+        <p:spPr>
+          <a:xfrm>
+            <a:off x="0" y="914400"/>
+            <a:ext cx="164592" cy="5943600"/>
+          </a:xfrm>
+          <a:prstGeom prst="rect">
+            <a:avLst/>
+          </a:prstGeom>
+          <a:solidFill>
+            <a:srgbClr val="166534"/>
+          </a:solidFill>
+          <a:ln>
+            <a:noFill/>
+          </a:ln>
+        </p:spPr>
+        <p:style>
+          <a:lnRef idx="1">
+            <a:schemeClr val="accent1"/>
+          </a:lnRef>
+          <a:fillRef idx="3">
+            <a:schemeClr val="accent1"/>
+          </a:fillRef>
+          <a:effectRef idx="2">
+            <a:schemeClr val="accent1"/>
+          </a:effectRef>
+          <a:fontRef idx="minor">
+            <a:schemeClr val="lt1"/>
+          </a:fontRef>
+        </p:style>
+        <p:txBody>
+          <a:bodyPr rtlCol="0" anchor="ctr"/>
+          <a:lstStyle/>
+          <a:p>
+            <a:pPr algn="ctr"/>
+          </a:p>
+        </p:txBody>
+      </p:sp>
+      <p:sp>
+        <p:nvSpPr>
+          <p:cNvPr id="4" name="TextBox 3"/>
           <p:cNvSpPr txBox="1"/>
           <p:nvPr/>
         </p:nvSpPr>
         <p:spPr>
           <a:xfrm>
-            <a:off x="548640" y="320040"/>
-            <a:ext cx="11064240" cy="777240"/>
-          </a:xfrm>
-          <a:prstGeom prst="rect">
-            <a:avLst/>
-          </a:prstGeom>
-          <a:noFill/>
-        </p:spPr>
-        <p:txBody>
-          <a:bodyPr wrap="none">
-            <a:spAutoFit/>
-          </a:bodyPr>
-          <a:lstStyle/>
-          <a:p>
-            <a:r>
-              <a:rPr sz="3000" b="1"/>
-              <a:t>Share Your Success!</a:t>
-            </a:r>
-          </a:p>
-        </p:txBody>
-      </p:sp>
-      <p:sp>
-        <p:nvSpPr>
-          <p:cNvPr id="3" name="TextBox 2"/>
-          <p:cNvSpPr txBox="1"/>
-          <p:nvPr/>
-        </p:nvSpPr>
-        <p:spPr>
-          <a:xfrm>
-            <a:off x="868680" y="1417320"/>
-            <a:ext cx="10424160" cy="4892040"/>
+            <a:off x="594360" y="246888"/>
+            <a:ext cx="2926080" cy="320040"/>
           </a:xfrm>
           <a:prstGeom prst="rect">
             <a:avLst/>
@@ -3797,47 +7150,967 @@
           </a:bodyPr>
           <a:lstStyle/>
           <a:p>
-            <a:pPr>
-              <a:spcAft>
-                <a:spcPts val="800"/>
-              </a:spcAft>
-              <a:defRPr sz="2200"/>
-            </a:pPr>
-            <a:r>
-              <a:t>Present your portfolio to your group</a:t>
-            </a:r>
-          </a:p>
-          <a:p>
-            <a:pPr>
-              <a:spcAft>
-                <a:spcPts val="800"/>
-              </a:spcAft>
-              <a:defRPr sz="2200"/>
-            </a:pPr>
-            <a:r>
-              <a:t>Explain why you chose these pieces</a:t>
-            </a:r>
-          </a:p>
-          <a:p>
-            <a:pPr>
-              <a:spcAft>
-                <a:spcPts val="800"/>
-              </a:spcAft>
-              <a:defRPr sz="2200"/>
-            </a:pPr>
-            <a:r>
-              <a:t>Listen to your friends' work</a:t>
-            </a:r>
-          </a:p>
-          <a:p>
-            <a:pPr>
-              <a:spcAft>
-                <a:spcPts val="800"/>
-              </a:spcAft>
-              <a:defRPr sz="2200"/>
-            </a:pPr>
-            <a:r>
-              <a:t>Give positive feedback</a:t>
+            <a:r>
+              <a:rPr sz="1300" b="1">
+                <a:solidFill>
+                  <a:srgbClr val="FFFFFF"/>
+                </a:solidFill>
+              </a:rPr>
+              <a:t>7. ACTIVITY</a:t>
+            </a:r>
+          </a:p>
+        </p:txBody>
+      </p:sp>
+      <p:sp>
+        <p:nvSpPr>
+          <p:cNvPr id="5" name="TextBox 4"/>
+          <p:cNvSpPr txBox="1"/>
+          <p:nvPr/>
+        </p:nvSpPr>
+        <p:spPr>
+          <a:xfrm>
+            <a:off x="7772400" y="246888"/>
+            <a:ext cx="3840480" cy="320040"/>
+          </a:xfrm>
+          <a:prstGeom prst="rect">
+            <a:avLst/>
+          </a:prstGeom>
+          <a:noFill/>
+        </p:spPr>
+        <p:txBody>
+          <a:bodyPr wrap="square">
+            <a:spAutoFit/>
+          </a:bodyPr>
+          <a:lstStyle/>
+          <a:p>
+            <a:pPr algn="r"/>
+            <a:r>
+              <a:rPr sz="1100" b="0">
+                <a:solidFill>
+                  <a:srgbClr val="FFFFFF"/>
+                </a:solidFill>
+              </a:rPr>
+              <a:t>p7_t1_english_1205</a:t>
+            </a:r>
+          </a:p>
+        </p:txBody>
+      </p:sp>
+      <p:sp>
+        <p:nvSpPr>
+          <p:cNvPr id="6" name="TextBox 5"/>
+          <p:cNvSpPr txBox="1"/>
+          <p:nvPr/>
+        </p:nvSpPr>
+        <p:spPr>
+          <a:xfrm>
+            <a:off x="640080" y="1143000"/>
+            <a:ext cx="10972800" cy="685800"/>
+          </a:xfrm>
+          <a:prstGeom prst="rect">
+            <a:avLst/>
+          </a:prstGeom>
+          <a:noFill/>
+        </p:spPr>
+        <p:txBody>
+          <a:bodyPr wrap="square">
+            <a:spAutoFit/>
+          </a:bodyPr>
+          <a:lstStyle/>
+          <a:p>
+            <a:r>
+              <a:rPr sz="2800" b="1">
+                <a:solidFill>
+                  <a:srgbClr val="1A202C"/>
+                </a:solidFill>
+              </a:rPr>
+              <a:t>Activity challenge</a:t>
+            </a:r>
+          </a:p>
+        </p:txBody>
+      </p:sp>
+      <p:sp>
+        <p:nvSpPr>
+          <p:cNvPr id="7" name="Rounded Rectangle 6"/>
+          <p:cNvSpPr/>
+          <p:nvPr/>
+        </p:nvSpPr>
+        <p:spPr>
+          <a:xfrm>
+            <a:off x="777240" y="1993392"/>
+            <a:ext cx="10835640" cy="1005840"/>
+          </a:xfrm>
+          <a:prstGeom prst="roundRect">
+            <a:avLst/>
+          </a:prstGeom>
+          <a:solidFill>
+            <a:srgbClr val="FFFBEB"/>
+          </a:solidFill>
+          <a:ln w="15240">
+            <a:solidFill>
+              <a:srgbClr val="166534"/>
+            </a:solidFill>
+          </a:ln>
+        </p:spPr>
+        <p:style>
+          <a:lnRef idx="1">
+            <a:schemeClr val="accent1"/>
+          </a:lnRef>
+          <a:fillRef idx="3">
+            <a:schemeClr val="accent1"/>
+          </a:fillRef>
+          <a:effectRef idx="2">
+            <a:schemeClr val="accent1"/>
+          </a:effectRef>
+          <a:fontRef idx="minor">
+            <a:schemeClr val="lt1"/>
+          </a:fontRef>
+        </p:style>
+        <p:txBody>
+          <a:bodyPr rtlCol="0" anchor="ctr"/>
+          <a:lstStyle/>
+          <a:p>
+            <a:pPr algn="ctr"/>
+          </a:p>
+        </p:txBody>
+      </p:sp>
+      <p:sp>
+        <p:nvSpPr>
+          <p:cNvPr id="8" name="TextBox 7"/>
+          <p:cNvSpPr txBox="1"/>
+          <p:nvPr/>
+        </p:nvSpPr>
+        <p:spPr>
+          <a:xfrm>
+            <a:off x="1051560" y="2212848"/>
+            <a:ext cx="10287000" cy="502920"/>
+          </a:xfrm>
+          <a:prstGeom prst="rect">
+            <a:avLst/>
+          </a:prstGeom>
+          <a:noFill/>
+        </p:spPr>
+        <p:txBody>
+          <a:bodyPr wrap="square">
+            <a:spAutoFit/>
+          </a:bodyPr>
+          <a:lstStyle/>
+          <a:p>
+            <a:r>
+              <a:rPr sz="2100" b="1">
+                <a:solidFill>
+                  <a:srgbClr val="1A202C"/>
+                </a:solidFill>
+              </a:rPr>
+              <a:t>Group task:</a:t>
+            </a:r>
+          </a:p>
+        </p:txBody>
+      </p:sp>
+      <p:sp>
+        <p:nvSpPr>
+          <p:cNvPr id="9" name="Rounded Rectangle 8"/>
+          <p:cNvSpPr/>
+          <p:nvPr/>
+        </p:nvSpPr>
+        <p:spPr>
+          <a:xfrm>
+            <a:off x="1005840" y="3246120"/>
+            <a:ext cx="10149840" cy="621792"/>
+          </a:xfrm>
+          <a:prstGeom prst="roundRect">
+            <a:avLst/>
+          </a:prstGeom>
+          <a:solidFill>
+            <a:srgbClr val="F8FAFC"/>
+          </a:solidFill>
+          <a:ln w="15240">
+            <a:solidFill>
+              <a:srgbClr val="CBD5E1"/>
+            </a:solidFill>
+          </a:ln>
+        </p:spPr>
+        <p:style>
+          <a:lnRef idx="1">
+            <a:schemeClr val="accent1"/>
+          </a:lnRef>
+          <a:fillRef idx="3">
+            <a:schemeClr val="accent1"/>
+          </a:fillRef>
+          <a:effectRef idx="2">
+            <a:schemeClr val="accent1"/>
+          </a:effectRef>
+          <a:fontRef idx="minor">
+            <a:schemeClr val="lt1"/>
+          </a:fontRef>
+        </p:style>
+        <p:txBody>
+          <a:bodyPr rtlCol="0" anchor="ctr"/>
+          <a:lstStyle/>
+          <a:p>
+            <a:pPr algn="ctr"/>
+          </a:p>
+        </p:txBody>
+      </p:sp>
+      <p:sp>
+        <p:nvSpPr>
+          <p:cNvPr id="10" name="Oval 9"/>
+          <p:cNvSpPr/>
+          <p:nvPr/>
+        </p:nvSpPr>
+        <p:spPr>
+          <a:xfrm>
+            <a:off x="1234440" y="3364991"/>
+            <a:ext cx="347472" cy="347472"/>
+          </a:xfrm>
+          <a:prstGeom prst="ellipse">
+            <a:avLst/>
+          </a:prstGeom>
+          <a:solidFill>
+            <a:srgbClr val="166534"/>
+          </a:solidFill>
+          <a:ln>
+            <a:noFill/>
+          </a:ln>
+        </p:spPr>
+        <p:style>
+          <a:lnRef idx="1">
+            <a:schemeClr val="accent1"/>
+          </a:lnRef>
+          <a:fillRef idx="3">
+            <a:schemeClr val="accent1"/>
+          </a:fillRef>
+          <a:effectRef idx="2">
+            <a:schemeClr val="accent1"/>
+          </a:effectRef>
+          <a:fontRef idx="minor">
+            <a:schemeClr val="lt1"/>
+          </a:fontRef>
+        </p:style>
+        <p:txBody>
+          <a:bodyPr rtlCol="0" anchor="ctr"/>
+          <a:lstStyle/>
+          <a:p>
+            <a:pPr algn="ctr"/>
+          </a:p>
+        </p:txBody>
+      </p:sp>
+      <p:sp>
+        <p:nvSpPr>
+          <p:cNvPr id="11" name="TextBox 10"/>
+          <p:cNvSpPr txBox="1"/>
+          <p:nvPr/>
+        </p:nvSpPr>
+        <p:spPr>
+          <a:xfrm>
+            <a:off x="1234440" y="3410712"/>
+            <a:ext cx="347472" cy="182880"/>
+          </a:xfrm>
+          <a:prstGeom prst="rect">
+            <a:avLst/>
+          </a:prstGeom>
+          <a:noFill/>
+        </p:spPr>
+        <p:txBody>
+          <a:bodyPr wrap="square">
+            <a:spAutoFit/>
+          </a:bodyPr>
+          <a:lstStyle/>
+          <a:p>
+            <a:pPr algn="ctr"/>
+            <a:r>
+              <a:rPr sz="1000" b="1">
+                <a:solidFill>
+                  <a:srgbClr val="FFFFFF"/>
+                </a:solidFill>
+              </a:rPr>
+              <a:t>1</a:t>
+            </a:r>
+          </a:p>
+        </p:txBody>
+      </p:sp>
+      <p:sp>
+        <p:nvSpPr>
+          <p:cNvPr id="12" name="TextBox 11"/>
+          <p:cNvSpPr txBox="1"/>
+          <p:nvPr/>
+        </p:nvSpPr>
+        <p:spPr>
+          <a:xfrm>
+            <a:off x="1783080" y="3364991"/>
+            <a:ext cx="9006840" cy="347472"/>
+          </a:xfrm>
+          <a:prstGeom prst="rect">
+            <a:avLst/>
+          </a:prstGeom>
+          <a:noFill/>
+        </p:spPr>
+        <p:txBody>
+          <a:bodyPr wrap="square">
+            <a:spAutoFit/>
+          </a:bodyPr>
+          <a:lstStyle/>
+          <a:p>
+            <a:r>
+              <a:rPr sz="1700" b="0">
+                <a:solidFill>
+                  <a:srgbClr val="1A202C"/>
+                </a:solidFill>
+              </a:rPr>
+              <a:t>Students sit in a circle and participate in a "Turn and Talk" session to share their</a:t>
+            </a:r>
+          </a:p>
+        </p:txBody>
+      </p:sp>
+      <p:sp>
+        <p:nvSpPr>
+          <p:cNvPr id="13" name="Rounded Rectangle 12"/>
+          <p:cNvSpPr/>
+          <p:nvPr/>
+        </p:nvSpPr>
+        <p:spPr>
+          <a:xfrm>
+            <a:off x="1005840" y="4069080"/>
+            <a:ext cx="10149840" cy="621792"/>
+          </a:xfrm>
+          <a:prstGeom prst="roundRect">
+            <a:avLst/>
+          </a:prstGeom>
+          <a:solidFill>
+            <a:srgbClr val="F8FAFC"/>
+          </a:solidFill>
+          <a:ln w="15240">
+            <a:solidFill>
+              <a:srgbClr val="CBD5E1"/>
+            </a:solidFill>
+          </a:ln>
+        </p:spPr>
+        <p:style>
+          <a:lnRef idx="1">
+            <a:schemeClr val="accent1"/>
+          </a:lnRef>
+          <a:fillRef idx="3">
+            <a:schemeClr val="accent1"/>
+          </a:fillRef>
+          <a:effectRef idx="2">
+            <a:schemeClr val="accent1"/>
+          </a:effectRef>
+          <a:fontRef idx="minor">
+            <a:schemeClr val="lt1"/>
+          </a:fontRef>
+        </p:style>
+        <p:txBody>
+          <a:bodyPr rtlCol="0" anchor="ctr"/>
+          <a:lstStyle/>
+          <a:p>
+            <a:pPr algn="ctr"/>
+          </a:p>
+        </p:txBody>
+      </p:sp>
+      <p:sp>
+        <p:nvSpPr>
+          <p:cNvPr id="14" name="Oval 13"/>
+          <p:cNvSpPr/>
+          <p:nvPr/>
+        </p:nvSpPr>
+        <p:spPr>
+          <a:xfrm>
+            <a:off x="1234440" y="4187952"/>
+            <a:ext cx="347472" cy="347472"/>
+          </a:xfrm>
+          <a:prstGeom prst="ellipse">
+            <a:avLst/>
+          </a:prstGeom>
+          <a:solidFill>
+            <a:srgbClr val="166534"/>
+          </a:solidFill>
+          <a:ln>
+            <a:noFill/>
+          </a:ln>
+        </p:spPr>
+        <p:style>
+          <a:lnRef idx="1">
+            <a:schemeClr val="accent1"/>
+          </a:lnRef>
+          <a:fillRef idx="3">
+            <a:schemeClr val="accent1"/>
+          </a:fillRef>
+          <a:effectRef idx="2">
+            <a:schemeClr val="accent1"/>
+          </a:effectRef>
+          <a:fontRef idx="minor">
+            <a:schemeClr val="lt1"/>
+          </a:fontRef>
+        </p:style>
+        <p:txBody>
+          <a:bodyPr rtlCol="0" anchor="ctr"/>
+          <a:lstStyle/>
+          <a:p>
+            <a:pPr algn="ctr"/>
+          </a:p>
+        </p:txBody>
+      </p:sp>
+      <p:sp>
+        <p:nvSpPr>
+          <p:cNvPr id="15" name="TextBox 14"/>
+          <p:cNvSpPr txBox="1"/>
+          <p:nvPr/>
+        </p:nvSpPr>
+        <p:spPr>
+          <a:xfrm>
+            <a:off x="1234440" y="4233672"/>
+            <a:ext cx="347472" cy="182880"/>
+          </a:xfrm>
+          <a:prstGeom prst="rect">
+            <a:avLst/>
+          </a:prstGeom>
+          <a:noFill/>
+        </p:spPr>
+        <p:txBody>
+          <a:bodyPr wrap="square">
+            <a:spAutoFit/>
+          </a:bodyPr>
+          <a:lstStyle/>
+          <a:p>
+            <a:pPr algn="ctr"/>
+            <a:r>
+              <a:rPr sz="1000" b="1">
+                <a:solidFill>
+                  <a:srgbClr val="FFFFFF"/>
+                </a:solidFill>
+              </a:rPr>
+              <a:t>2</a:t>
+            </a:r>
+          </a:p>
+        </p:txBody>
+      </p:sp>
+      <p:sp>
+        <p:nvSpPr>
+          <p:cNvPr id="16" name="TextBox 15"/>
+          <p:cNvSpPr txBox="1"/>
+          <p:nvPr/>
+        </p:nvSpPr>
+        <p:spPr>
+          <a:xfrm>
+            <a:off x="1783080" y="4187952"/>
+            <a:ext cx="9006840" cy="347472"/>
+          </a:xfrm>
+          <a:prstGeom prst="rect">
+            <a:avLst/>
+          </a:prstGeom>
+          <a:noFill/>
+        </p:spPr>
+        <p:txBody>
+          <a:bodyPr wrap="square">
+            <a:spAutoFit/>
+          </a:bodyPr>
+          <a:lstStyle/>
+          <a:p>
+            <a:r>
+              <a:rPr sz="1700" b="0">
+                <a:solidFill>
+                  <a:srgbClr val="1A202C"/>
+                </a:solidFill>
+              </a:rPr>
+              <a:t>favorite English lesson from the term with a partner, then share one strength with</a:t>
+            </a:r>
+          </a:p>
+        </p:txBody>
+      </p:sp>
+      <p:sp>
+        <p:nvSpPr>
+          <p:cNvPr id="17" name="Rounded Rectangle 16"/>
+          <p:cNvSpPr/>
+          <p:nvPr/>
+        </p:nvSpPr>
+        <p:spPr>
+          <a:xfrm>
+            <a:off x="1005840" y="4892040"/>
+            <a:ext cx="10149840" cy="621792"/>
+          </a:xfrm>
+          <a:prstGeom prst="roundRect">
+            <a:avLst/>
+          </a:prstGeom>
+          <a:solidFill>
+            <a:srgbClr val="F8FAFC"/>
+          </a:solidFill>
+          <a:ln w="15240">
+            <a:solidFill>
+              <a:srgbClr val="CBD5E1"/>
+            </a:solidFill>
+          </a:ln>
+        </p:spPr>
+        <p:style>
+          <a:lnRef idx="1">
+            <a:schemeClr val="accent1"/>
+          </a:lnRef>
+          <a:fillRef idx="3">
+            <a:schemeClr val="accent1"/>
+          </a:fillRef>
+          <a:effectRef idx="2">
+            <a:schemeClr val="accent1"/>
+          </a:effectRef>
+          <a:fontRef idx="minor">
+            <a:schemeClr val="lt1"/>
+          </a:fontRef>
+        </p:style>
+        <p:txBody>
+          <a:bodyPr rtlCol="0" anchor="ctr"/>
+          <a:lstStyle/>
+          <a:p>
+            <a:pPr algn="ctr"/>
+          </a:p>
+        </p:txBody>
+      </p:sp>
+      <p:sp>
+        <p:nvSpPr>
+          <p:cNvPr id="18" name="Oval 17"/>
+          <p:cNvSpPr/>
+          <p:nvPr/>
+        </p:nvSpPr>
+        <p:spPr>
+          <a:xfrm>
+            <a:off x="1234440" y="5010912"/>
+            <a:ext cx="347472" cy="347472"/>
+          </a:xfrm>
+          <a:prstGeom prst="ellipse">
+            <a:avLst/>
+          </a:prstGeom>
+          <a:solidFill>
+            <a:srgbClr val="166534"/>
+          </a:solidFill>
+          <a:ln>
+            <a:noFill/>
+          </a:ln>
+        </p:spPr>
+        <p:style>
+          <a:lnRef idx="1">
+            <a:schemeClr val="accent1"/>
+          </a:lnRef>
+          <a:fillRef idx="3">
+            <a:schemeClr val="accent1"/>
+          </a:fillRef>
+          <a:effectRef idx="2">
+            <a:schemeClr val="accent1"/>
+          </a:effectRef>
+          <a:fontRef idx="minor">
+            <a:schemeClr val="lt1"/>
+          </a:fontRef>
+        </p:style>
+        <p:txBody>
+          <a:bodyPr rtlCol="0" anchor="ctr"/>
+          <a:lstStyle/>
+          <a:p>
+            <a:pPr algn="ctr"/>
+          </a:p>
+        </p:txBody>
+      </p:sp>
+      <p:sp>
+        <p:nvSpPr>
+          <p:cNvPr id="19" name="TextBox 18"/>
+          <p:cNvSpPr txBox="1"/>
+          <p:nvPr/>
+        </p:nvSpPr>
+        <p:spPr>
+          <a:xfrm>
+            <a:off x="1234440" y="5056632"/>
+            <a:ext cx="347472" cy="182880"/>
+          </a:xfrm>
+          <a:prstGeom prst="rect">
+            <a:avLst/>
+          </a:prstGeom>
+          <a:noFill/>
+        </p:spPr>
+        <p:txBody>
+          <a:bodyPr wrap="square">
+            <a:spAutoFit/>
+          </a:bodyPr>
+          <a:lstStyle/>
+          <a:p>
+            <a:pPr algn="ctr"/>
+            <a:r>
+              <a:rPr sz="1000" b="1">
+                <a:solidFill>
+                  <a:srgbClr val="FFFFFF"/>
+                </a:solidFill>
+              </a:rPr>
+              <a:t>3</a:t>
+            </a:r>
+          </a:p>
+        </p:txBody>
+      </p:sp>
+      <p:sp>
+        <p:nvSpPr>
+          <p:cNvPr id="20" name="TextBox 19"/>
+          <p:cNvSpPr txBox="1"/>
+          <p:nvPr/>
+        </p:nvSpPr>
+        <p:spPr>
+          <a:xfrm>
+            <a:off x="1783080" y="5010912"/>
+            <a:ext cx="9006840" cy="347472"/>
+          </a:xfrm>
+          <a:prstGeom prst="rect">
+            <a:avLst/>
+          </a:prstGeom>
+          <a:noFill/>
+        </p:spPr>
+        <p:txBody>
+          <a:bodyPr wrap="square">
+            <a:spAutoFit/>
+          </a:bodyPr>
+          <a:lstStyle/>
+          <a:p>
+            <a:r>
+              <a:rPr sz="1700" b="0">
+                <a:solidFill>
+                  <a:srgbClr val="1A202C"/>
+                </a:solidFill>
+              </a:rPr>
+              <a:t>the whole class.</a:t>
+            </a:r>
+          </a:p>
+        </p:txBody>
+      </p:sp>
+      <p:sp>
+        <p:nvSpPr>
+          <p:cNvPr id="21" name="Rounded Rectangle 20"/>
+          <p:cNvSpPr/>
+          <p:nvPr/>
+        </p:nvSpPr>
+        <p:spPr>
+          <a:xfrm>
+            <a:off x="1005840" y="5715000"/>
+            <a:ext cx="10149840" cy="621792"/>
+          </a:xfrm>
+          <a:prstGeom prst="roundRect">
+            <a:avLst/>
+          </a:prstGeom>
+          <a:solidFill>
+            <a:srgbClr val="F8FAFC"/>
+          </a:solidFill>
+          <a:ln w="15240">
+            <a:solidFill>
+              <a:srgbClr val="CBD5E1"/>
+            </a:solidFill>
+          </a:ln>
+        </p:spPr>
+        <p:style>
+          <a:lnRef idx="1">
+            <a:schemeClr val="accent1"/>
+          </a:lnRef>
+          <a:fillRef idx="3">
+            <a:schemeClr val="accent1"/>
+          </a:fillRef>
+          <a:effectRef idx="2">
+            <a:schemeClr val="accent1"/>
+          </a:effectRef>
+          <a:fontRef idx="minor">
+            <a:schemeClr val="lt1"/>
+          </a:fontRef>
+        </p:style>
+        <p:txBody>
+          <a:bodyPr rtlCol="0" anchor="ctr"/>
+          <a:lstStyle/>
+          <a:p>
+            <a:pPr algn="ctr"/>
+          </a:p>
+        </p:txBody>
+      </p:sp>
+      <p:sp>
+        <p:nvSpPr>
+          <p:cNvPr id="22" name="Oval 21"/>
+          <p:cNvSpPr/>
+          <p:nvPr/>
+        </p:nvSpPr>
+        <p:spPr>
+          <a:xfrm>
+            <a:off x="1234440" y="5833872"/>
+            <a:ext cx="347472" cy="347472"/>
+          </a:xfrm>
+          <a:prstGeom prst="ellipse">
+            <a:avLst/>
+          </a:prstGeom>
+          <a:solidFill>
+            <a:srgbClr val="166534"/>
+          </a:solidFill>
+          <a:ln>
+            <a:noFill/>
+          </a:ln>
+        </p:spPr>
+        <p:style>
+          <a:lnRef idx="1">
+            <a:schemeClr val="accent1"/>
+          </a:lnRef>
+          <a:fillRef idx="3">
+            <a:schemeClr val="accent1"/>
+          </a:fillRef>
+          <a:effectRef idx="2">
+            <a:schemeClr val="accent1"/>
+          </a:effectRef>
+          <a:fontRef idx="minor">
+            <a:schemeClr val="lt1"/>
+          </a:fontRef>
+        </p:style>
+        <p:txBody>
+          <a:bodyPr rtlCol="0" anchor="ctr"/>
+          <a:lstStyle/>
+          <a:p>
+            <a:pPr algn="ctr"/>
+          </a:p>
+        </p:txBody>
+      </p:sp>
+      <p:sp>
+        <p:nvSpPr>
+          <p:cNvPr id="23" name="TextBox 22"/>
+          <p:cNvSpPr txBox="1"/>
+          <p:nvPr/>
+        </p:nvSpPr>
+        <p:spPr>
+          <a:xfrm>
+            <a:off x="1234440" y="5879592"/>
+            <a:ext cx="347472" cy="182880"/>
+          </a:xfrm>
+          <a:prstGeom prst="rect">
+            <a:avLst/>
+          </a:prstGeom>
+          <a:noFill/>
+        </p:spPr>
+        <p:txBody>
+          <a:bodyPr wrap="square">
+            <a:spAutoFit/>
+          </a:bodyPr>
+          <a:lstStyle/>
+          <a:p>
+            <a:pPr algn="ctr"/>
+            <a:r>
+              <a:rPr sz="1000" b="1">
+                <a:solidFill>
+                  <a:srgbClr val="FFFFFF"/>
+                </a:solidFill>
+              </a:rPr>
+              <a:t>4</a:t>
+            </a:r>
+          </a:p>
+        </p:txBody>
+      </p:sp>
+      <p:sp>
+        <p:nvSpPr>
+          <p:cNvPr id="24" name="TextBox 23"/>
+          <p:cNvSpPr txBox="1"/>
+          <p:nvPr/>
+        </p:nvSpPr>
+        <p:spPr>
+          <a:xfrm>
+            <a:off x="1783080" y="5833872"/>
+            <a:ext cx="9006840" cy="347472"/>
+          </a:xfrm>
+          <a:prstGeom prst="rect">
+            <a:avLst/>
+          </a:prstGeom>
+          <a:noFill/>
+        </p:spPr>
+        <p:txBody>
+          <a:bodyPr wrap="square">
+            <a:spAutoFit/>
+          </a:bodyPr>
+          <a:lstStyle/>
+          <a:p>
+            <a:r>
+              <a:rPr sz="1700" b="0">
+                <a:solidFill>
+                  <a:srgbClr val="1A202C"/>
+                </a:solidFill>
+              </a:rPr>
+              <a:t>Students write the new vocabulary in their exercise books and work in pairs to list</a:t>
+            </a:r>
+          </a:p>
+        </p:txBody>
+      </p:sp>
+      <p:sp>
+        <p:nvSpPr>
+          <p:cNvPr id="25" name="Rounded Rectangle 24"/>
+          <p:cNvSpPr/>
+          <p:nvPr/>
+        </p:nvSpPr>
+        <p:spPr>
+          <a:xfrm>
+            <a:off x="1005840" y="6537960"/>
+            <a:ext cx="10149840" cy="621792"/>
+          </a:xfrm>
+          <a:prstGeom prst="roundRect">
+            <a:avLst/>
+          </a:prstGeom>
+          <a:solidFill>
+            <a:srgbClr val="F8FAFC"/>
+          </a:solidFill>
+          <a:ln w="15240">
+            <a:solidFill>
+              <a:srgbClr val="CBD5E1"/>
+            </a:solidFill>
+          </a:ln>
+        </p:spPr>
+        <p:style>
+          <a:lnRef idx="1">
+            <a:schemeClr val="accent1"/>
+          </a:lnRef>
+          <a:fillRef idx="3">
+            <a:schemeClr val="accent1"/>
+          </a:fillRef>
+          <a:effectRef idx="2">
+            <a:schemeClr val="accent1"/>
+          </a:effectRef>
+          <a:fontRef idx="minor">
+            <a:schemeClr val="lt1"/>
+          </a:fontRef>
+        </p:style>
+        <p:txBody>
+          <a:bodyPr rtlCol="0" anchor="ctr"/>
+          <a:lstStyle/>
+          <a:p>
+            <a:pPr algn="ctr"/>
+          </a:p>
+        </p:txBody>
+      </p:sp>
+      <p:sp>
+        <p:nvSpPr>
+          <p:cNvPr id="26" name="Oval 25"/>
+          <p:cNvSpPr/>
+          <p:nvPr/>
+        </p:nvSpPr>
+        <p:spPr>
+          <a:xfrm>
+            <a:off x="1234440" y="6656832"/>
+            <a:ext cx="347472" cy="347472"/>
+          </a:xfrm>
+          <a:prstGeom prst="ellipse">
+            <a:avLst/>
+          </a:prstGeom>
+          <a:solidFill>
+            <a:srgbClr val="166534"/>
+          </a:solidFill>
+          <a:ln>
+            <a:noFill/>
+          </a:ln>
+        </p:spPr>
+        <p:style>
+          <a:lnRef idx="1">
+            <a:schemeClr val="accent1"/>
+          </a:lnRef>
+          <a:fillRef idx="3">
+            <a:schemeClr val="accent1"/>
+          </a:fillRef>
+          <a:effectRef idx="2">
+            <a:schemeClr val="accent1"/>
+          </a:effectRef>
+          <a:fontRef idx="minor">
+            <a:schemeClr val="lt1"/>
+          </a:fontRef>
+        </p:style>
+        <p:txBody>
+          <a:bodyPr rtlCol="0" anchor="ctr"/>
+          <a:lstStyle/>
+          <a:p>
+            <a:pPr algn="ctr"/>
+          </a:p>
+        </p:txBody>
+      </p:sp>
+      <p:sp>
+        <p:nvSpPr>
+          <p:cNvPr id="27" name="TextBox 26"/>
+          <p:cNvSpPr txBox="1"/>
+          <p:nvPr/>
+        </p:nvSpPr>
+        <p:spPr>
+          <a:xfrm>
+            <a:off x="1234440" y="6702552"/>
+            <a:ext cx="347472" cy="182880"/>
+          </a:xfrm>
+          <a:prstGeom prst="rect">
+            <a:avLst/>
+          </a:prstGeom>
+          <a:noFill/>
+        </p:spPr>
+        <p:txBody>
+          <a:bodyPr wrap="square">
+            <a:spAutoFit/>
+          </a:bodyPr>
+          <a:lstStyle/>
+          <a:p>
+            <a:pPr algn="ctr"/>
+            <a:r>
+              <a:rPr sz="1000" b="1">
+                <a:solidFill>
+                  <a:srgbClr val="FFFFFF"/>
+                </a:solidFill>
+              </a:rPr>
+              <a:t>5</a:t>
+            </a:r>
+          </a:p>
+        </p:txBody>
+      </p:sp>
+      <p:sp>
+        <p:nvSpPr>
+          <p:cNvPr id="28" name="TextBox 27"/>
+          <p:cNvSpPr txBox="1"/>
+          <p:nvPr/>
+        </p:nvSpPr>
+        <p:spPr>
+          <a:xfrm>
+            <a:off x="1783080" y="6656832"/>
+            <a:ext cx="9006840" cy="347472"/>
+          </a:xfrm>
+          <a:prstGeom prst="rect">
+            <a:avLst/>
+          </a:prstGeom>
+          <a:noFill/>
+        </p:spPr>
+        <p:txBody>
+          <a:bodyPr wrap="square">
+            <a:spAutoFit/>
+          </a:bodyPr>
+          <a:lstStyle/>
+          <a:p>
+            <a:r>
+              <a:rPr sz="1700" b="0">
+                <a:solidFill>
+                  <a:srgbClr val="1A202C"/>
+                </a:solidFill>
+              </a:rPr>
+              <a:t>three "criteria"...</a:t>
+            </a:r>
+          </a:p>
+        </p:txBody>
+      </p:sp>
+      <p:sp>
+        <p:nvSpPr>
+          <p:cNvPr id="29" name="TextBox 28"/>
+          <p:cNvSpPr txBox="1"/>
+          <p:nvPr/>
+        </p:nvSpPr>
+        <p:spPr>
+          <a:xfrm>
+            <a:off x="777240" y="6419088"/>
+            <a:ext cx="10835640" cy="228600"/>
+          </a:xfrm>
+          <a:prstGeom prst="rect">
+            <a:avLst/>
+          </a:prstGeom>
+          <a:noFill/>
+        </p:spPr>
+        <p:txBody>
+          <a:bodyPr wrap="square">
+            <a:spAutoFit/>
+          </a:bodyPr>
+          <a:lstStyle/>
+          <a:p>
+            <a:pPr algn="r"/>
+            <a:r>
+              <a:rPr sz="1000" b="0">
+                <a:solidFill>
+                  <a:srgbClr val="5B677D"/>
+                </a:solidFill>
+              </a:rPr>
+              <a:t>Listen • Talk • Try • Explain</a:t>
             </a:r>
           </a:p>
         </p:txBody>
@@ -3862,43 +8135,100 @@
       <p:grpSpPr/>
       <p:sp>
         <p:nvSpPr>
-          <p:cNvPr id="2" name="TextBox 1"/>
+          <p:cNvPr id="2" name="Rectangle 1"/>
+          <p:cNvSpPr/>
+          <p:nvPr/>
+        </p:nvSpPr>
+        <p:spPr>
+          <a:xfrm>
+            <a:off x="0" y="0"/>
+            <a:ext cx="12191695" cy="914400"/>
+          </a:xfrm>
+          <a:prstGeom prst="rect">
+            <a:avLst/>
+          </a:prstGeom>
+          <a:solidFill>
+            <a:srgbClr val="4338CA"/>
+          </a:solidFill>
+          <a:ln>
+            <a:noFill/>
+          </a:ln>
+        </p:spPr>
+        <p:style>
+          <a:lnRef idx="1">
+            <a:schemeClr val="accent1"/>
+          </a:lnRef>
+          <a:fillRef idx="3">
+            <a:schemeClr val="accent1"/>
+          </a:fillRef>
+          <a:effectRef idx="2">
+            <a:schemeClr val="accent1"/>
+          </a:effectRef>
+          <a:fontRef idx="minor">
+            <a:schemeClr val="lt1"/>
+          </a:fontRef>
+        </p:style>
+        <p:txBody>
+          <a:bodyPr rtlCol="0" anchor="ctr"/>
+          <a:lstStyle/>
+          <a:p>
+            <a:pPr algn="ctr"/>
+          </a:p>
+        </p:txBody>
+      </p:sp>
+      <p:sp>
+        <p:nvSpPr>
+          <p:cNvPr id="3" name="Rectangle 2"/>
+          <p:cNvSpPr/>
+          <p:nvPr/>
+        </p:nvSpPr>
+        <p:spPr>
+          <a:xfrm>
+            <a:off x="0" y="914400"/>
+            <a:ext cx="164592" cy="5943600"/>
+          </a:xfrm>
+          <a:prstGeom prst="rect">
+            <a:avLst/>
+          </a:prstGeom>
+          <a:solidFill>
+            <a:srgbClr val="4338CA"/>
+          </a:solidFill>
+          <a:ln>
+            <a:noFill/>
+          </a:ln>
+        </p:spPr>
+        <p:style>
+          <a:lnRef idx="1">
+            <a:schemeClr val="accent1"/>
+          </a:lnRef>
+          <a:fillRef idx="3">
+            <a:schemeClr val="accent1"/>
+          </a:fillRef>
+          <a:effectRef idx="2">
+            <a:schemeClr val="accent1"/>
+          </a:effectRef>
+          <a:fontRef idx="minor">
+            <a:schemeClr val="lt1"/>
+          </a:fontRef>
+        </p:style>
+        <p:txBody>
+          <a:bodyPr rtlCol="0" anchor="ctr"/>
+          <a:lstStyle/>
+          <a:p>
+            <a:pPr algn="ctr"/>
+          </a:p>
+        </p:txBody>
+      </p:sp>
+      <p:sp>
+        <p:nvSpPr>
+          <p:cNvPr id="4" name="TextBox 3"/>
           <p:cNvSpPr txBox="1"/>
           <p:nvPr/>
         </p:nvSpPr>
         <p:spPr>
           <a:xfrm>
-            <a:off x="548640" y="320040"/>
-            <a:ext cx="11064240" cy="777240"/>
-          </a:xfrm>
-          <a:prstGeom prst="rect">
-            <a:avLst/>
-          </a:prstGeom>
-          <a:noFill/>
-        </p:spPr>
-        <p:txBody>
-          <a:bodyPr wrap="none">
-            <a:spAutoFit/>
-          </a:bodyPr>
-          <a:lstStyle/>
-          <a:p>
-            <a:r>
-              <a:rPr sz="3000" b="1"/>
-              <a:t>Check your understanding</a:t>
-            </a:r>
-          </a:p>
-        </p:txBody>
-      </p:sp>
-      <p:sp>
-        <p:nvSpPr>
-          <p:cNvPr id="3" name="TextBox 2"/>
-          <p:cNvSpPr txBox="1"/>
-          <p:nvPr/>
-        </p:nvSpPr>
-        <p:spPr>
-          <a:xfrm>
-            <a:off x="868680" y="1417320"/>
-            <a:ext cx="10424160" cy="4892040"/>
+            <a:off x="594360" y="246888"/>
+            <a:ext cx="2926080" cy="320040"/>
           </a:xfrm>
           <a:prstGeom prst="rect">
             <a:avLst/>
@@ -3911,58 +8241,657 @@
           </a:bodyPr>
           <a:lstStyle/>
           <a:p>
-            <a:pPr>
-              <a:spcAft>
-                <a:spcPts val="800"/>
-              </a:spcAft>
-              <a:defRPr sz="2200"/>
-            </a:pPr>
-            <a:r>
-              <a:t>Which activity helped you improve your English most?</a:t>
-            </a:r>
-          </a:p>
-          <a:p>
-            <a:pPr>
-              <a:spcAft>
-                <a:spcPts val="800"/>
-              </a:spcAft>
-              <a:defRPr sz="2200"/>
-            </a:pPr>
-            <a:r>
-              <a:t>Why is it important to review our work?</a:t>
-            </a:r>
-          </a:p>
-          <a:p>
-            <a:pPr>
-              <a:spcAft>
-                <a:spcPts val="800"/>
-              </a:spcAft>
-              <a:defRPr sz="2200"/>
-            </a:pPr>
-            <a:r>
-              <a:t>What is a portfolio?</a:t>
-            </a:r>
-          </a:p>
-          <a:p>
-            <a:pPr>
-              <a:spcAft>
-                <a:spcPts val="800"/>
-              </a:spcAft>
-              <a:defRPr sz="2200"/>
-            </a:pPr>
-            <a:r>
-              <a:t>What does 'criteria' mean?</a:t>
-            </a:r>
-          </a:p>
-          <a:p>
-            <a:pPr>
-              <a:spcAft>
-                <a:spcPts val="800"/>
-              </a:spcAft>
-              <a:defRPr sz="2200"/>
-            </a:pPr>
-            <a:r>
-              <a:t>Write one answer clearly in your notebook.</a:t>
+            <a:r>
+              <a:rPr sz="1300" b="1">
+                <a:solidFill>
+                  <a:srgbClr val="FFFFFF"/>
+                </a:solidFill>
+              </a:rPr>
+              <a:t>8. EXIT</a:t>
+            </a:r>
+          </a:p>
+        </p:txBody>
+      </p:sp>
+      <p:sp>
+        <p:nvSpPr>
+          <p:cNvPr id="5" name="TextBox 4"/>
+          <p:cNvSpPr txBox="1"/>
+          <p:nvPr/>
+        </p:nvSpPr>
+        <p:spPr>
+          <a:xfrm>
+            <a:off x="7772400" y="246888"/>
+            <a:ext cx="3840480" cy="320040"/>
+          </a:xfrm>
+          <a:prstGeom prst="rect">
+            <a:avLst/>
+          </a:prstGeom>
+          <a:noFill/>
+        </p:spPr>
+        <p:txBody>
+          <a:bodyPr wrap="square">
+            <a:spAutoFit/>
+          </a:bodyPr>
+          <a:lstStyle/>
+          <a:p>
+            <a:pPr algn="r"/>
+            <a:r>
+              <a:rPr sz="1100" b="0">
+                <a:solidFill>
+                  <a:srgbClr val="FFFFFF"/>
+                </a:solidFill>
+              </a:rPr>
+              <a:t>p7_t1_english_1205</a:t>
+            </a:r>
+          </a:p>
+        </p:txBody>
+      </p:sp>
+      <p:sp>
+        <p:nvSpPr>
+          <p:cNvPr id="6" name="TextBox 5"/>
+          <p:cNvSpPr txBox="1"/>
+          <p:nvPr/>
+        </p:nvSpPr>
+        <p:spPr>
+          <a:xfrm>
+            <a:off x="640080" y="1143000"/>
+            <a:ext cx="10972800" cy="685800"/>
+          </a:xfrm>
+          <a:prstGeom prst="rect">
+            <a:avLst/>
+          </a:prstGeom>
+          <a:noFill/>
+        </p:spPr>
+        <p:txBody>
+          <a:bodyPr wrap="square">
+            <a:spAutoFit/>
+          </a:bodyPr>
+          <a:lstStyle/>
+          <a:p>
+            <a:r>
+              <a:rPr sz="2800" b="1">
+                <a:solidFill>
+                  <a:srgbClr val="1A202C"/>
+                </a:solidFill>
+              </a:rPr>
+              <a:t>Exit ticket</a:t>
+            </a:r>
+          </a:p>
+        </p:txBody>
+      </p:sp>
+      <p:sp>
+        <p:nvSpPr>
+          <p:cNvPr id="7" name="Rounded Rectangle 6"/>
+          <p:cNvSpPr/>
+          <p:nvPr/>
+        </p:nvSpPr>
+        <p:spPr>
+          <a:xfrm>
+            <a:off x="777240" y="1993392"/>
+            <a:ext cx="10835640" cy="1005840"/>
+          </a:xfrm>
+          <a:prstGeom prst="roundRect">
+            <a:avLst/>
+          </a:prstGeom>
+          <a:solidFill>
+            <a:srgbClr val="FFFBEB"/>
+          </a:solidFill>
+          <a:ln w="15240">
+            <a:solidFill>
+              <a:srgbClr val="4338CA"/>
+            </a:solidFill>
+          </a:ln>
+        </p:spPr>
+        <p:style>
+          <a:lnRef idx="1">
+            <a:schemeClr val="accent1"/>
+          </a:lnRef>
+          <a:fillRef idx="3">
+            <a:schemeClr val="accent1"/>
+          </a:fillRef>
+          <a:effectRef idx="2">
+            <a:schemeClr val="accent1"/>
+          </a:effectRef>
+          <a:fontRef idx="minor">
+            <a:schemeClr val="lt1"/>
+          </a:fontRef>
+        </p:style>
+        <p:txBody>
+          <a:bodyPr rtlCol="0" anchor="ctr"/>
+          <a:lstStyle/>
+          <a:p>
+            <a:pPr algn="ctr"/>
+          </a:p>
+        </p:txBody>
+      </p:sp>
+      <p:sp>
+        <p:nvSpPr>
+          <p:cNvPr id="8" name="TextBox 7"/>
+          <p:cNvSpPr txBox="1"/>
+          <p:nvPr/>
+        </p:nvSpPr>
+        <p:spPr>
+          <a:xfrm>
+            <a:off x="1051560" y="2212848"/>
+            <a:ext cx="10287000" cy="502920"/>
+          </a:xfrm>
+          <a:prstGeom prst="rect">
+            <a:avLst/>
+          </a:prstGeom>
+          <a:noFill/>
+        </p:spPr>
+        <p:txBody>
+          <a:bodyPr wrap="square">
+            <a:spAutoFit/>
+          </a:bodyPr>
+          <a:lstStyle/>
+          <a:p>
+            <a:r>
+              <a:rPr sz="2100" b="1">
+                <a:solidFill>
+                  <a:srgbClr val="1A202C"/>
+                </a:solidFill>
+              </a:rPr>
+              <a:t>Answer: How will you make your work even better in Term 2?</a:t>
+            </a:r>
+          </a:p>
+        </p:txBody>
+      </p:sp>
+      <p:sp>
+        <p:nvSpPr>
+          <p:cNvPr id="9" name="Rounded Rectangle 8"/>
+          <p:cNvSpPr/>
+          <p:nvPr/>
+        </p:nvSpPr>
+        <p:spPr>
+          <a:xfrm>
+            <a:off x="1005840" y="3246120"/>
+            <a:ext cx="10149840" cy="731520"/>
+          </a:xfrm>
+          <a:prstGeom prst="roundRect">
+            <a:avLst/>
+          </a:prstGeom>
+          <a:solidFill>
+            <a:srgbClr val="F8FAFC"/>
+          </a:solidFill>
+          <a:ln w="15240">
+            <a:solidFill>
+              <a:srgbClr val="CBD5E1"/>
+            </a:solidFill>
+          </a:ln>
+        </p:spPr>
+        <p:style>
+          <a:lnRef idx="1">
+            <a:schemeClr val="accent1"/>
+          </a:lnRef>
+          <a:fillRef idx="3">
+            <a:schemeClr val="accent1"/>
+          </a:fillRef>
+          <a:effectRef idx="2">
+            <a:schemeClr val="accent1"/>
+          </a:effectRef>
+          <a:fontRef idx="minor">
+            <a:schemeClr val="lt1"/>
+          </a:fontRef>
+        </p:style>
+        <p:txBody>
+          <a:bodyPr rtlCol="0" anchor="ctr"/>
+          <a:lstStyle/>
+          <a:p>
+            <a:pPr algn="ctr"/>
+          </a:p>
+        </p:txBody>
+      </p:sp>
+      <p:sp>
+        <p:nvSpPr>
+          <p:cNvPr id="10" name="Oval 9"/>
+          <p:cNvSpPr/>
+          <p:nvPr/>
+        </p:nvSpPr>
+        <p:spPr>
+          <a:xfrm>
+            <a:off x="1234440" y="3364991"/>
+            <a:ext cx="347472" cy="347472"/>
+          </a:xfrm>
+          <a:prstGeom prst="ellipse">
+            <a:avLst/>
+          </a:prstGeom>
+          <a:solidFill>
+            <a:srgbClr val="4338CA"/>
+          </a:solidFill>
+          <a:ln>
+            <a:noFill/>
+          </a:ln>
+        </p:spPr>
+        <p:style>
+          <a:lnRef idx="1">
+            <a:schemeClr val="accent1"/>
+          </a:lnRef>
+          <a:fillRef idx="3">
+            <a:schemeClr val="accent1"/>
+          </a:fillRef>
+          <a:effectRef idx="2">
+            <a:schemeClr val="accent1"/>
+          </a:effectRef>
+          <a:fontRef idx="minor">
+            <a:schemeClr val="lt1"/>
+          </a:fontRef>
+        </p:style>
+        <p:txBody>
+          <a:bodyPr rtlCol="0" anchor="ctr"/>
+          <a:lstStyle/>
+          <a:p>
+            <a:pPr algn="ctr"/>
+          </a:p>
+        </p:txBody>
+      </p:sp>
+      <p:sp>
+        <p:nvSpPr>
+          <p:cNvPr id="11" name="TextBox 10"/>
+          <p:cNvSpPr txBox="1"/>
+          <p:nvPr/>
+        </p:nvSpPr>
+        <p:spPr>
+          <a:xfrm>
+            <a:off x="1234440" y="3410712"/>
+            <a:ext cx="347472" cy="182880"/>
+          </a:xfrm>
+          <a:prstGeom prst="rect">
+            <a:avLst/>
+          </a:prstGeom>
+          <a:noFill/>
+        </p:spPr>
+        <p:txBody>
+          <a:bodyPr wrap="square">
+            <a:spAutoFit/>
+          </a:bodyPr>
+          <a:lstStyle/>
+          <a:p>
+            <a:pPr algn="ctr"/>
+            <a:r>
+              <a:rPr sz="1000" b="1">
+                <a:solidFill>
+                  <a:srgbClr val="FFFFFF"/>
+                </a:solidFill>
+              </a:rPr>
+              <a:t>1</a:t>
+            </a:r>
+          </a:p>
+        </p:txBody>
+      </p:sp>
+      <p:sp>
+        <p:nvSpPr>
+          <p:cNvPr id="12" name="TextBox 11"/>
+          <p:cNvSpPr txBox="1"/>
+          <p:nvPr/>
+        </p:nvSpPr>
+        <p:spPr>
+          <a:xfrm>
+            <a:off x="1783080" y="3364991"/>
+            <a:ext cx="9006840" cy="347472"/>
+          </a:xfrm>
+          <a:prstGeom prst="rect">
+            <a:avLst/>
+          </a:prstGeom>
+          <a:noFill/>
+        </p:spPr>
+        <p:txBody>
+          <a:bodyPr wrap="square">
+            <a:spAutoFit/>
+          </a:bodyPr>
+          <a:lstStyle/>
+          <a:p>
+            <a:r>
+              <a:rPr sz="1700" b="0">
+                <a:solidFill>
+                  <a:srgbClr val="1A202C"/>
+                </a:solidFill>
+              </a:rPr>
+              <a:t>Use one complete sentence.</a:t>
+            </a:r>
+          </a:p>
+        </p:txBody>
+      </p:sp>
+      <p:sp>
+        <p:nvSpPr>
+          <p:cNvPr id="13" name="Rounded Rectangle 12"/>
+          <p:cNvSpPr/>
+          <p:nvPr/>
+        </p:nvSpPr>
+        <p:spPr>
+          <a:xfrm>
+            <a:off x="1005840" y="4178808"/>
+            <a:ext cx="10149840" cy="731520"/>
+          </a:xfrm>
+          <a:prstGeom prst="roundRect">
+            <a:avLst/>
+          </a:prstGeom>
+          <a:solidFill>
+            <a:srgbClr val="F8FAFC"/>
+          </a:solidFill>
+          <a:ln w="15240">
+            <a:solidFill>
+              <a:srgbClr val="CBD5E1"/>
+            </a:solidFill>
+          </a:ln>
+        </p:spPr>
+        <p:style>
+          <a:lnRef idx="1">
+            <a:schemeClr val="accent1"/>
+          </a:lnRef>
+          <a:fillRef idx="3">
+            <a:schemeClr val="accent1"/>
+          </a:fillRef>
+          <a:effectRef idx="2">
+            <a:schemeClr val="accent1"/>
+          </a:effectRef>
+          <a:fontRef idx="minor">
+            <a:schemeClr val="lt1"/>
+          </a:fontRef>
+        </p:style>
+        <p:txBody>
+          <a:bodyPr rtlCol="0" anchor="ctr"/>
+          <a:lstStyle/>
+          <a:p>
+            <a:pPr algn="ctr"/>
+          </a:p>
+        </p:txBody>
+      </p:sp>
+      <p:sp>
+        <p:nvSpPr>
+          <p:cNvPr id="14" name="Oval 13"/>
+          <p:cNvSpPr/>
+          <p:nvPr/>
+        </p:nvSpPr>
+        <p:spPr>
+          <a:xfrm>
+            <a:off x="1234440" y="4297680"/>
+            <a:ext cx="347472" cy="347472"/>
+          </a:xfrm>
+          <a:prstGeom prst="ellipse">
+            <a:avLst/>
+          </a:prstGeom>
+          <a:solidFill>
+            <a:srgbClr val="4338CA"/>
+          </a:solidFill>
+          <a:ln>
+            <a:noFill/>
+          </a:ln>
+        </p:spPr>
+        <p:style>
+          <a:lnRef idx="1">
+            <a:schemeClr val="accent1"/>
+          </a:lnRef>
+          <a:fillRef idx="3">
+            <a:schemeClr val="accent1"/>
+          </a:fillRef>
+          <a:effectRef idx="2">
+            <a:schemeClr val="accent1"/>
+          </a:effectRef>
+          <a:fontRef idx="minor">
+            <a:schemeClr val="lt1"/>
+          </a:fontRef>
+        </p:style>
+        <p:txBody>
+          <a:bodyPr rtlCol="0" anchor="ctr"/>
+          <a:lstStyle/>
+          <a:p>
+            <a:pPr algn="ctr"/>
+          </a:p>
+        </p:txBody>
+      </p:sp>
+      <p:sp>
+        <p:nvSpPr>
+          <p:cNvPr id="15" name="TextBox 14"/>
+          <p:cNvSpPr txBox="1"/>
+          <p:nvPr/>
+        </p:nvSpPr>
+        <p:spPr>
+          <a:xfrm>
+            <a:off x="1234440" y="4343400"/>
+            <a:ext cx="347472" cy="182880"/>
+          </a:xfrm>
+          <a:prstGeom prst="rect">
+            <a:avLst/>
+          </a:prstGeom>
+          <a:noFill/>
+        </p:spPr>
+        <p:txBody>
+          <a:bodyPr wrap="square">
+            <a:spAutoFit/>
+          </a:bodyPr>
+          <a:lstStyle/>
+          <a:p>
+            <a:pPr algn="ctr"/>
+            <a:r>
+              <a:rPr sz="1000" b="1">
+                <a:solidFill>
+                  <a:srgbClr val="FFFFFF"/>
+                </a:solidFill>
+              </a:rPr>
+              <a:t>2</a:t>
+            </a:r>
+          </a:p>
+        </p:txBody>
+      </p:sp>
+      <p:sp>
+        <p:nvSpPr>
+          <p:cNvPr id="16" name="TextBox 15"/>
+          <p:cNvSpPr txBox="1"/>
+          <p:nvPr/>
+        </p:nvSpPr>
+        <p:spPr>
+          <a:xfrm>
+            <a:off x="1783080" y="4297680"/>
+            <a:ext cx="9006840" cy="347472"/>
+          </a:xfrm>
+          <a:prstGeom prst="rect">
+            <a:avLst/>
+          </a:prstGeom>
+          <a:noFill/>
+        </p:spPr>
+        <p:txBody>
+          <a:bodyPr wrap="square">
+            <a:spAutoFit/>
+          </a:bodyPr>
+          <a:lstStyle/>
+          <a:p>
+            <a:r>
+              <a:rPr sz="1700" b="0">
+                <a:solidFill>
+                  <a:srgbClr val="1A202C"/>
+                </a:solidFill>
+              </a:rPr>
+              <a:t>Include one key word: Past simple tense for reflection (e.g, "I learned, " "I enjoyed</a:t>
+            </a:r>
+          </a:p>
+        </p:txBody>
+      </p:sp>
+      <p:sp>
+        <p:nvSpPr>
+          <p:cNvPr id="17" name="Rounded Rectangle 16"/>
+          <p:cNvSpPr/>
+          <p:nvPr/>
+        </p:nvSpPr>
+        <p:spPr>
+          <a:xfrm>
+            <a:off x="1005840" y="5111496"/>
+            <a:ext cx="10149840" cy="731520"/>
+          </a:xfrm>
+          <a:prstGeom prst="roundRect">
+            <a:avLst/>
+          </a:prstGeom>
+          <a:solidFill>
+            <a:srgbClr val="F8FAFC"/>
+          </a:solidFill>
+          <a:ln w="15240">
+            <a:solidFill>
+              <a:srgbClr val="CBD5E1"/>
+            </a:solidFill>
+          </a:ln>
+        </p:spPr>
+        <p:style>
+          <a:lnRef idx="1">
+            <a:schemeClr val="accent1"/>
+          </a:lnRef>
+          <a:fillRef idx="3">
+            <a:schemeClr val="accent1"/>
+          </a:fillRef>
+          <a:effectRef idx="2">
+            <a:schemeClr val="accent1"/>
+          </a:effectRef>
+          <a:fontRef idx="minor">
+            <a:schemeClr val="lt1"/>
+          </a:fontRef>
+        </p:style>
+        <p:txBody>
+          <a:bodyPr rtlCol="0" anchor="ctr"/>
+          <a:lstStyle/>
+          <a:p>
+            <a:pPr algn="ctr"/>
+          </a:p>
+        </p:txBody>
+      </p:sp>
+      <p:sp>
+        <p:nvSpPr>
+          <p:cNvPr id="18" name="Oval 17"/>
+          <p:cNvSpPr/>
+          <p:nvPr/>
+        </p:nvSpPr>
+        <p:spPr>
+          <a:xfrm>
+            <a:off x="1234440" y="5230368"/>
+            <a:ext cx="347472" cy="347472"/>
+          </a:xfrm>
+          <a:prstGeom prst="ellipse">
+            <a:avLst/>
+          </a:prstGeom>
+          <a:solidFill>
+            <a:srgbClr val="4338CA"/>
+          </a:solidFill>
+          <a:ln>
+            <a:noFill/>
+          </a:ln>
+        </p:spPr>
+        <p:style>
+          <a:lnRef idx="1">
+            <a:schemeClr val="accent1"/>
+          </a:lnRef>
+          <a:fillRef idx="3">
+            <a:schemeClr val="accent1"/>
+          </a:fillRef>
+          <a:effectRef idx="2">
+            <a:schemeClr val="accent1"/>
+          </a:effectRef>
+          <a:fontRef idx="minor">
+            <a:schemeClr val="lt1"/>
+          </a:fontRef>
+        </p:style>
+        <p:txBody>
+          <a:bodyPr rtlCol="0" anchor="ctr"/>
+          <a:lstStyle/>
+          <a:p>
+            <a:pPr algn="ctr"/>
+          </a:p>
+        </p:txBody>
+      </p:sp>
+      <p:sp>
+        <p:nvSpPr>
+          <p:cNvPr id="19" name="TextBox 18"/>
+          <p:cNvSpPr txBox="1"/>
+          <p:nvPr/>
+        </p:nvSpPr>
+        <p:spPr>
+          <a:xfrm>
+            <a:off x="1234440" y="5276088"/>
+            <a:ext cx="347472" cy="182880"/>
+          </a:xfrm>
+          <a:prstGeom prst="rect">
+            <a:avLst/>
+          </a:prstGeom>
+          <a:noFill/>
+        </p:spPr>
+        <p:txBody>
+          <a:bodyPr wrap="square">
+            <a:spAutoFit/>
+          </a:bodyPr>
+          <a:lstStyle/>
+          <a:p>
+            <a:pPr algn="ctr"/>
+            <a:r>
+              <a:rPr sz="1000" b="1">
+                <a:solidFill>
+                  <a:srgbClr val="FFFFFF"/>
+                </a:solidFill>
+              </a:rPr>
+              <a:t>3</a:t>
+            </a:r>
+          </a:p>
+        </p:txBody>
+      </p:sp>
+      <p:sp>
+        <p:nvSpPr>
+          <p:cNvPr id="20" name="TextBox 19"/>
+          <p:cNvSpPr txBox="1"/>
+          <p:nvPr/>
+        </p:nvSpPr>
+        <p:spPr>
+          <a:xfrm>
+            <a:off x="1783080" y="5230368"/>
+            <a:ext cx="9006840" cy="347472"/>
+          </a:xfrm>
+          <a:prstGeom prst="rect">
+            <a:avLst/>
+          </a:prstGeom>
+          <a:noFill/>
+        </p:spPr>
+        <p:txBody>
+          <a:bodyPr wrap="square">
+            <a:spAutoFit/>
+          </a:bodyPr>
+          <a:lstStyle/>
+          <a:p>
+            <a:r>
+              <a:rPr sz="1700" b="0">
+                <a:solidFill>
+                  <a:srgbClr val="1A202C"/>
+                </a:solidFill>
+              </a:rPr>
+              <a:t>Hand in or read your answer aloud.</a:t>
+            </a:r>
+          </a:p>
+        </p:txBody>
+      </p:sp>
+      <p:sp>
+        <p:nvSpPr>
+          <p:cNvPr id="21" name="TextBox 20"/>
+          <p:cNvSpPr txBox="1"/>
+          <p:nvPr/>
+        </p:nvSpPr>
+        <p:spPr>
+          <a:xfrm>
+            <a:off x="777240" y="6419088"/>
+            <a:ext cx="10835640" cy="228600"/>
+          </a:xfrm>
+          <a:prstGeom prst="rect">
+            <a:avLst/>
+          </a:prstGeom>
+          <a:noFill/>
+        </p:spPr>
+        <p:txBody>
+          <a:bodyPr wrap="square">
+            <a:spAutoFit/>
+          </a:bodyPr>
+          <a:lstStyle/>
+          <a:p>
+            <a:pPr algn="r"/>
+            <a:r>
+              <a:rPr sz="1000" b="0">
+                <a:solidFill>
+                  <a:srgbClr val="5B677D"/>
+                </a:solidFill>
+              </a:rPr>
+              <a:t>Listen • Talk • Try • Explain</a:t>
             </a:r>
           </a:p>
         </p:txBody>

--- a/uganda-p7-mvp/p7_t1_english_1205/p7_t1_english_1205.pptx
+++ b/uganda-p7-mvp/p7_t1_english_1205/p7_t1_english_1205.pptx
@@ -3088,6 +3088,14 @@
 <file path=ppt/slides/slide1.xml><?xml version="1.0" encoding="utf-8"?>
 <p:sld xmlns:a="http://schemas.openxmlformats.org/drawingml/2006/main" xmlns:p="http://schemas.openxmlformats.org/presentationml/2006/main" xmlns:r="http://schemas.openxmlformats.org/officeDocument/2006/relationships">
   <p:cSld>
+    <p:bg>
+      <p:bgPr>
+        <a:solidFill>
+          <a:srgbClr val="F8FAFC"/>
+        </a:solidFill>
+        <a:effectLst/>
+      </p:bgPr>
+    </p:bg>
     <p:spTree>
       <p:nvGrpSpPr>
         <p:cNvPr id="1" name=""/>
@@ -3104,13 +3112,13 @@
         <p:spPr>
           <a:xfrm>
             <a:off x="0" y="0"/>
-            <a:ext cx="12191695" cy="914400"/>
-          </a:xfrm>
-          <a:prstGeom prst="rect">
-            <a:avLst/>
-          </a:prstGeom>
-          <a:solidFill>
-            <a:srgbClr val="2563EB"/>
+            <a:ext cx="12191695" cy="713232"/>
+          </a:xfrm>
+          <a:prstGeom prst="rect">
+            <a:avLst/>
+          </a:prstGeom>
+          <a:solidFill>
+            <a:srgbClr val="111827"/>
           </a:solidFill>
           <a:ln>
             <a:noFill/>
@@ -3146,14 +3154,14 @@
         </p:nvSpPr>
         <p:spPr>
           <a:xfrm>
-            <a:off x="0" y="914400"/>
-            <a:ext cx="164592" cy="5943600"/>
-          </a:xfrm>
-          <a:prstGeom prst="rect">
-            <a:avLst/>
-          </a:prstGeom>
-          <a:solidFill>
-            <a:srgbClr val="2563EB"/>
+            <a:off x="0" y="713232"/>
+            <a:ext cx="12191695" cy="82296"/>
+          </a:xfrm>
+          <a:prstGeom prst="rect">
+            <a:avLst/>
+          </a:prstGeom>
+          <a:solidFill>
+            <a:srgbClr val="FCD116"/>
           </a:solidFill>
           <a:ln>
             <a:noFill/>
@@ -3183,126 +3191,23 @@
       </p:sp>
       <p:sp>
         <p:nvSpPr>
-          <p:cNvPr id="4" name="TextBox 3"/>
-          <p:cNvSpPr txBox="1"/>
-          <p:nvPr/>
-        </p:nvSpPr>
-        <p:spPr>
-          <a:xfrm>
-            <a:off x="594360" y="246888"/>
-            <a:ext cx="2743200" cy="320040"/>
-          </a:xfrm>
-          <a:prstGeom prst="rect">
-            <a:avLst/>
-          </a:prstGeom>
-          <a:noFill/>
-        </p:spPr>
-        <p:txBody>
-          <a:bodyPr wrap="square">
-            <a:spAutoFit/>
-          </a:bodyPr>
-          <a:lstStyle/>
-          <a:p>
-            <a:r>
-              <a:rPr sz="1300" b="1">
-                <a:solidFill>
-                  <a:srgbClr val="FFFFFF"/>
-                </a:solidFill>
-              </a:rPr>
-              <a:t>LESSON START</a:t>
-            </a:r>
-          </a:p>
-        </p:txBody>
-      </p:sp>
-      <p:sp>
-        <p:nvSpPr>
-          <p:cNvPr id="5" name="TextBox 4"/>
-          <p:cNvSpPr txBox="1"/>
-          <p:nvPr/>
-        </p:nvSpPr>
-        <p:spPr>
-          <a:xfrm>
-            <a:off x="8412480" y="246888"/>
-            <a:ext cx="3200400" cy="320040"/>
-          </a:xfrm>
-          <a:prstGeom prst="rect">
-            <a:avLst/>
-          </a:prstGeom>
-          <a:noFill/>
-        </p:spPr>
-        <p:txBody>
-          <a:bodyPr wrap="square">
-            <a:spAutoFit/>
-          </a:bodyPr>
-          <a:lstStyle/>
-          <a:p>
-            <a:pPr algn="r"/>
-            <a:r>
-              <a:rPr sz="1100" b="0">
-                <a:solidFill>
-                  <a:srgbClr val="FFFFFF"/>
-                </a:solidFill>
-              </a:rPr>
-              <a:t>p7_t1_english_1205</a:t>
-            </a:r>
-          </a:p>
-        </p:txBody>
-      </p:sp>
-      <p:sp>
-        <p:nvSpPr>
-          <p:cNvPr id="6" name="TextBox 5"/>
-          <p:cNvSpPr txBox="1"/>
-          <p:nvPr/>
-        </p:nvSpPr>
-        <p:spPr>
-          <a:xfrm>
-            <a:off x="822960" y="1325880"/>
-            <a:ext cx="10698480" cy="1005840"/>
-          </a:xfrm>
-          <a:prstGeom prst="rect">
-            <a:avLst/>
-          </a:prstGeom>
-          <a:noFill/>
-        </p:spPr>
-        <p:txBody>
-          <a:bodyPr wrap="square">
-            <a:spAutoFit/>
-          </a:bodyPr>
-          <a:lstStyle/>
-          <a:p>
-            <a:pPr algn="ctr"/>
-            <a:r>
-              <a:rPr sz="3400" b="1">
-                <a:solidFill>
-                  <a:srgbClr val="1A202C"/>
-                </a:solidFill>
-              </a:rPr>
-              <a:t>3.4 Final Review and Assessment</a:t>
-            </a:r>
-          </a:p>
-        </p:txBody>
-      </p:sp>
-      <p:sp>
-        <p:nvSpPr>
-          <p:cNvPr id="7" name="Rounded Rectangle 6"/>
+          <p:cNvPr id="4" name="Rectangle 3"/>
           <p:cNvSpPr/>
           <p:nvPr/>
         </p:nvSpPr>
         <p:spPr>
           <a:xfrm>
-            <a:off x="1143000" y="2743200"/>
-            <a:ext cx="9921240" cy="2194560"/>
-          </a:xfrm>
-          <a:prstGeom prst="roundRect">
-            <a:avLst/>
-          </a:prstGeom>
-          <a:solidFill>
-            <a:srgbClr val="EFF6FF"/>
-          </a:solidFill>
-          <a:ln w="15240">
-            <a:solidFill>
-              <a:srgbClr val="2563EB"/>
-            </a:solidFill>
+            <a:off x="0" y="795528"/>
+            <a:ext cx="12191695" cy="64008"/>
+          </a:xfrm>
+          <a:prstGeom prst="rect">
+            <a:avLst/>
+          </a:prstGeom>
+          <a:solidFill>
+            <a:srgbClr val="D90000"/>
+          </a:solidFill>
+          <a:ln>
+            <a:noFill/>
           </a:ln>
         </p:spPr>
         <p:style>
@@ -3329,14 +3234,126 @@
       </p:sp>
       <p:sp>
         <p:nvSpPr>
+          <p:cNvPr id="5" name="Rectangle 4"/>
+          <p:cNvSpPr/>
+          <p:nvPr/>
+        </p:nvSpPr>
+        <p:spPr>
+          <a:xfrm>
+            <a:off x="0" y="859536"/>
+            <a:ext cx="164592" cy="5998464"/>
+          </a:xfrm>
+          <a:prstGeom prst="rect">
+            <a:avLst/>
+          </a:prstGeom>
+          <a:solidFill>
+            <a:srgbClr val="1D4ED8"/>
+          </a:solidFill>
+          <a:ln>
+            <a:noFill/>
+          </a:ln>
+        </p:spPr>
+        <p:style>
+          <a:lnRef idx="1">
+            <a:schemeClr val="accent1"/>
+          </a:lnRef>
+          <a:fillRef idx="3">
+            <a:schemeClr val="accent1"/>
+          </a:fillRef>
+          <a:effectRef idx="2">
+            <a:schemeClr val="accent1"/>
+          </a:effectRef>
+          <a:fontRef idx="minor">
+            <a:schemeClr val="lt1"/>
+          </a:fontRef>
+        </p:style>
+        <p:txBody>
+          <a:bodyPr rtlCol="0" anchor="ctr"/>
+          <a:lstStyle/>
+          <a:p>
+            <a:pPr algn="ctr"/>
+          </a:p>
+        </p:txBody>
+      </p:sp>
+      <p:sp>
+        <p:nvSpPr>
+          <p:cNvPr id="6" name="TextBox 5"/>
+          <p:cNvSpPr txBox="1"/>
+          <p:nvPr/>
+        </p:nvSpPr>
+        <p:spPr>
+          <a:xfrm>
+            <a:off x="502920" y="210312"/>
+            <a:ext cx="2926080" cy="256032"/>
+          </a:xfrm>
+          <a:prstGeom prst="rect">
+            <a:avLst/>
+          </a:prstGeom>
+          <a:noFill/>
+        </p:spPr>
+        <p:txBody>
+          <a:bodyPr wrap="square" lIns="0" rIns="0" tIns="0" bIns="0">
+            <a:spAutoFit/>
+          </a:bodyPr>
+          <a:lstStyle/>
+          <a:p>
+            <a:r>
+              <a:rPr sz="1200" b="1">
+                <a:solidFill>
+                  <a:srgbClr val="FFFFFF"/>
+                </a:solidFill>
+                <a:latin typeface="Arial"/>
+              </a:rPr>
+              <a:t>UGANDA P7 LESSON</a:t>
+            </a:r>
+          </a:p>
+        </p:txBody>
+      </p:sp>
+      <p:sp>
+        <p:nvSpPr>
+          <p:cNvPr id="7" name="TextBox 6"/>
+          <p:cNvSpPr txBox="1"/>
+          <p:nvPr/>
+        </p:nvSpPr>
+        <p:spPr>
+          <a:xfrm>
+            <a:off x="7589520" y="210312"/>
+            <a:ext cx="4069080" cy="256032"/>
+          </a:xfrm>
+          <a:prstGeom prst="rect">
+            <a:avLst/>
+          </a:prstGeom>
+          <a:noFill/>
+        </p:spPr>
+        <p:txBody>
+          <a:bodyPr wrap="square" lIns="0" rIns="0" tIns="0" bIns="0">
+            <a:spAutoFit/>
+          </a:bodyPr>
+          <a:lstStyle/>
+          <a:p>
+            <a:pPr algn="r"/>
+            <a:r>
+              <a:rPr sz="1000" b="0">
+                <a:solidFill>
+                  <a:srgbClr val="FFFFFF"/>
+                </a:solidFill>
+                <a:latin typeface="Arial"/>
+              </a:rPr>
+              <a:t>p7_t1_english_1205</a:t>
+            </a:r>
+          </a:p>
+        </p:txBody>
+      </p:sp>
+      <p:sp>
+        <p:nvSpPr>
           <p:cNvPr id="8" name="TextBox 7"/>
           <p:cNvSpPr txBox="1"/>
           <p:nvPr/>
         </p:nvSpPr>
         <p:spPr>
           <a:xfrm>
-            <a:off x="1508760" y="2999232"/>
-            <a:ext cx="9189720" cy="411480"/>
+            <a:off x="731520" y="1207008"/>
+            <a:ext cx="10789920" cy="731520"/>
           </a:xfrm>
           <a:prstGeom prst="rect">
             <a:avLst/>
@@ -3344,17 +3361,98 @@
           <a:noFill/>
         </p:spPr>
         <p:txBody>
-          <a:bodyPr wrap="square">
+          <a:bodyPr wrap="square" lIns="0" rIns="0" tIns="0" bIns="0">
             <a:spAutoFit/>
           </a:bodyPr>
           <a:lstStyle/>
           <a:p>
             <a:pPr algn="ctr"/>
             <a:r>
-              <a:rPr sz="1800" b="1">
-                <a:solidFill>
-                  <a:srgbClr val="2563EB"/>
-                </a:solidFill>
+              <a:rPr sz="3000" b="1">
+                <a:solidFill>
+                  <a:srgbClr val="111827"/>
+                </a:solidFill>
+                <a:latin typeface="Arial"/>
+              </a:rPr>
+              <a:t>3.4 Final Review and Assessment</a:t>
+            </a:r>
+          </a:p>
+        </p:txBody>
+      </p:sp>
+      <p:sp>
+        <p:nvSpPr>
+          <p:cNvPr id="9" name="Rectangle 8"/>
+          <p:cNvSpPr/>
+          <p:nvPr/>
+        </p:nvSpPr>
+        <p:spPr>
+          <a:xfrm>
+            <a:off x="1143000" y="2423160"/>
+            <a:ext cx="9921240" cy="2423160"/>
+          </a:xfrm>
+          <a:prstGeom prst="rect">
+            <a:avLst/>
+          </a:prstGeom>
+          <a:solidFill>
+            <a:srgbClr val="FFFFFF"/>
+          </a:solidFill>
+          <a:ln w="19050">
+            <a:solidFill>
+              <a:srgbClr val="1D4ED8"/>
+            </a:solidFill>
+          </a:ln>
+        </p:spPr>
+        <p:style>
+          <a:lnRef idx="1">
+            <a:schemeClr val="accent1"/>
+          </a:lnRef>
+          <a:fillRef idx="3">
+            <a:schemeClr val="accent1"/>
+          </a:fillRef>
+          <a:effectRef idx="2">
+            <a:schemeClr val="accent1"/>
+          </a:effectRef>
+          <a:fontRef idx="minor">
+            <a:schemeClr val="lt1"/>
+          </a:fontRef>
+        </p:style>
+        <p:txBody>
+          <a:bodyPr rtlCol="0" anchor="ctr"/>
+          <a:lstStyle/>
+          <a:p>
+            <a:pPr algn="ctr"/>
+          </a:p>
+        </p:txBody>
+      </p:sp>
+      <p:sp>
+        <p:nvSpPr>
+          <p:cNvPr id="10" name="TextBox 9"/>
+          <p:cNvSpPr txBox="1"/>
+          <p:nvPr/>
+        </p:nvSpPr>
+        <p:spPr>
+          <a:xfrm>
+            <a:off x="1463040" y="2743200"/>
+            <a:ext cx="9281160" cy="347472"/>
+          </a:xfrm>
+          <a:prstGeom prst="rect">
+            <a:avLst/>
+          </a:prstGeom>
+          <a:noFill/>
+        </p:spPr>
+        <p:txBody>
+          <a:bodyPr wrap="square" lIns="0" rIns="0" tIns="0" bIns="0">
+            <a:spAutoFit/>
+          </a:bodyPr>
+          <a:lstStyle/>
+          <a:p>
+            <a:pPr algn="ctr"/>
+            <a:r>
+              <a:rPr sz="1700" b="1">
+                <a:solidFill>
+                  <a:srgbClr val="1D4ED8"/>
+                </a:solidFill>
+                <a:latin typeface="Arial"/>
               </a:rPr>
               <a:t>English</a:t>
             </a:r>
@@ -3363,14 +3461,14 @@
       </p:sp>
       <p:sp>
         <p:nvSpPr>
-          <p:cNvPr id="9" name="TextBox 8"/>
+          <p:cNvPr id="11" name="TextBox 10"/>
           <p:cNvSpPr txBox="1"/>
           <p:nvPr/>
         </p:nvSpPr>
         <p:spPr>
           <a:xfrm>
-            <a:off x="1508760" y="3611880"/>
-            <a:ext cx="9189720" cy="914400"/>
+            <a:off x="1645920" y="3355848"/>
+            <a:ext cx="8915400" cy="868680"/>
           </a:xfrm>
           <a:prstGeom prst="rect">
             <a:avLst/>
@@ -3378,17 +3476,18 @@
           <a:noFill/>
         </p:spPr>
         <p:txBody>
-          <a:bodyPr wrap="square">
+          <a:bodyPr wrap="square" lIns="0" rIns="0" tIns="0" bIns="0">
             <a:spAutoFit/>
           </a:bodyPr>
           <a:lstStyle/>
           <a:p>
             <a:pPr algn="ctr"/>
             <a:r>
-              <a:rPr sz="2500" b="1">
-                <a:solidFill>
-                  <a:srgbClr val="1A202C"/>
-                </a:solidFill>
+              <a:rPr sz="2400" b="1">
+                <a:solidFill>
+                  <a:srgbClr val="111827"/>
+                </a:solidFill>
+                <a:latin typeface="Arial"/>
               </a:rPr>
               <a:t>Big question: What are the three main topics we studied this term?</a:t>
             </a:r>
@@ -3397,14 +3496,14 @@
       </p:sp>
       <p:sp>
         <p:nvSpPr>
-          <p:cNvPr id="10" name="TextBox 9"/>
+          <p:cNvPr id="12" name="TextBox 11"/>
           <p:cNvSpPr txBox="1"/>
           <p:nvPr/>
         </p:nvSpPr>
         <p:spPr>
           <a:xfrm>
-            <a:off x="1508760" y="4617720"/>
-            <a:ext cx="9189720" cy="320040"/>
+            <a:off x="1143000" y="5074920"/>
+            <a:ext cx="9921240" cy="320040"/>
           </a:xfrm>
           <a:prstGeom prst="rect">
             <a:avLst/>
@@ -3412,19 +3511,20 @@
           <a:noFill/>
         </p:spPr>
         <p:txBody>
-          <a:bodyPr wrap="square">
+          <a:bodyPr wrap="square" lIns="0" rIns="0" tIns="0" bIns="0">
             <a:spAutoFit/>
           </a:bodyPr>
           <a:lstStyle/>
           <a:p>
             <a:pPr algn="ctr"/>
             <a:r>
-              <a:rPr sz="1500" b="0">
-                <a:solidFill>
-                  <a:srgbClr val="5B677D"/>
-                </a:solidFill>
+              <a:rPr sz="1400" b="0">
+                <a:solidFill>
+                  <a:srgbClr val="475569"/>
+                </a:solidFill>
+                <a:latin typeface="Arial"/>
               </a:rPr>
-              <a:t>Think silently first. Then be ready to explain one idea.</a:t>
+              <a:t>Think silently → pair talk → share one idea</a:t>
             </a:r>
           </a:p>
         </p:txBody>
@@ -3440,6 +3540,14 @@
 <file path=ppt/slides/slide2.xml><?xml version="1.0" encoding="utf-8"?>
 <p:sld xmlns:a="http://schemas.openxmlformats.org/drawingml/2006/main" xmlns:p="http://schemas.openxmlformats.org/presentationml/2006/main" xmlns:r="http://schemas.openxmlformats.org/officeDocument/2006/relationships">
   <p:cSld>
+    <p:bg>
+      <p:bgPr>
+        <a:solidFill>
+          <a:srgbClr val="F8FAFC"/>
+        </a:solidFill>
+        <a:effectLst/>
+      </p:bgPr>
+    </p:bg>
     <p:spTree>
       <p:nvGrpSpPr>
         <p:cNvPr id="1" name=""/>
@@ -3456,13 +3564,13 @@
         <p:spPr>
           <a:xfrm>
             <a:off x="0" y="0"/>
-            <a:ext cx="12191695" cy="914400"/>
-          </a:xfrm>
-          <a:prstGeom prst="rect">
-            <a:avLst/>
-          </a:prstGeom>
-          <a:solidFill>
-            <a:srgbClr val="059669"/>
+            <a:ext cx="12191695" cy="713232"/>
+          </a:xfrm>
+          <a:prstGeom prst="rect">
+            <a:avLst/>
+          </a:prstGeom>
+          <a:solidFill>
+            <a:srgbClr val="111827"/>
           </a:solidFill>
           <a:ln>
             <a:noFill/>
@@ -3498,14 +3606,14 @@
         </p:nvSpPr>
         <p:spPr>
           <a:xfrm>
-            <a:off x="0" y="914400"/>
-            <a:ext cx="164592" cy="5943600"/>
-          </a:xfrm>
-          <a:prstGeom prst="rect">
-            <a:avLst/>
-          </a:prstGeom>
-          <a:solidFill>
-            <a:srgbClr val="059669"/>
+            <a:off x="0" y="713232"/>
+            <a:ext cx="12191695" cy="82296"/>
+          </a:xfrm>
+          <a:prstGeom prst="rect">
+            <a:avLst/>
+          </a:prstGeom>
+          <a:solidFill>
+            <a:srgbClr val="FCD116"/>
           </a:solidFill>
           <a:ln>
             <a:noFill/>
@@ -3535,125 +3643,23 @@
       </p:sp>
       <p:sp>
         <p:nvSpPr>
-          <p:cNvPr id="4" name="TextBox 3"/>
-          <p:cNvSpPr txBox="1"/>
-          <p:nvPr/>
-        </p:nvSpPr>
-        <p:spPr>
-          <a:xfrm>
-            <a:off x="594360" y="246888"/>
-            <a:ext cx="2926080" cy="320040"/>
-          </a:xfrm>
-          <a:prstGeom prst="rect">
-            <a:avLst/>
-          </a:prstGeom>
-          <a:noFill/>
-        </p:spPr>
-        <p:txBody>
-          <a:bodyPr wrap="square">
-            <a:spAutoFit/>
-          </a:bodyPr>
-          <a:lstStyle/>
-          <a:p>
-            <a:r>
-              <a:rPr sz="1300" b="1">
-                <a:solidFill>
-                  <a:srgbClr val="FFFFFF"/>
-                </a:solidFill>
-              </a:rPr>
-              <a:t>2. MISSION</a:t>
-            </a:r>
-          </a:p>
-        </p:txBody>
-      </p:sp>
-      <p:sp>
-        <p:nvSpPr>
-          <p:cNvPr id="5" name="TextBox 4"/>
-          <p:cNvSpPr txBox="1"/>
-          <p:nvPr/>
-        </p:nvSpPr>
-        <p:spPr>
-          <a:xfrm>
-            <a:off x="7772400" y="246888"/>
-            <a:ext cx="3840480" cy="320040"/>
-          </a:xfrm>
-          <a:prstGeom prst="rect">
-            <a:avLst/>
-          </a:prstGeom>
-          <a:noFill/>
-        </p:spPr>
-        <p:txBody>
-          <a:bodyPr wrap="square">
-            <a:spAutoFit/>
-          </a:bodyPr>
-          <a:lstStyle/>
-          <a:p>
-            <a:pPr algn="r"/>
-            <a:r>
-              <a:rPr sz="1100" b="0">
-                <a:solidFill>
-                  <a:srgbClr val="FFFFFF"/>
-                </a:solidFill>
-              </a:rPr>
-              <a:t>p7_t1_english_1205</a:t>
-            </a:r>
-          </a:p>
-        </p:txBody>
-      </p:sp>
-      <p:sp>
-        <p:nvSpPr>
-          <p:cNvPr id="6" name="TextBox 5"/>
-          <p:cNvSpPr txBox="1"/>
-          <p:nvPr/>
-        </p:nvSpPr>
-        <p:spPr>
-          <a:xfrm>
-            <a:off x="640080" y="1143000"/>
-            <a:ext cx="10972800" cy="685800"/>
-          </a:xfrm>
-          <a:prstGeom prst="rect">
-            <a:avLst/>
-          </a:prstGeom>
-          <a:noFill/>
-        </p:spPr>
-        <p:txBody>
-          <a:bodyPr wrap="square">
-            <a:spAutoFit/>
-          </a:bodyPr>
-          <a:lstStyle/>
-          <a:p>
-            <a:r>
-              <a:rPr sz="2800" b="1">
-                <a:solidFill>
-                  <a:srgbClr val="1A202C"/>
-                </a:solidFill>
-              </a:rPr>
-              <a:t>Today's mission</a:t>
-            </a:r>
-          </a:p>
-        </p:txBody>
-      </p:sp>
-      <p:sp>
-        <p:nvSpPr>
-          <p:cNvPr id="7" name="Rounded Rectangle 6"/>
+          <p:cNvPr id="4" name="Rectangle 3"/>
           <p:cNvSpPr/>
           <p:nvPr/>
         </p:nvSpPr>
         <p:spPr>
           <a:xfrm>
-            <a:off x="777240" y="1993392"/>
-            <a:ext cx="10835640" cy="1005840"/>
-          </a:xfrm>
-          <a:prstGeom prst="roundRect">
-            <a:avLst/>
-          </a:prstGeom>
-          <a:solidFill>
-            <a:srgbClr val="FFFBEB"/>
-          </a:solidFill>
-          <a:ln w="15240">
-            <a:solidFill>
-              <a:srgbClr val="059669"/>
-            </a:solidFill>
+            <a:off x="0" y="795528"/>
+            <a:ext cx="12191695" cy="64008"/>
+          </a:xfrm>
+          <a:prstGeom prst="rect">
+            <a:avLst/>
+          </a:prstGeom>
+          <a:solidFill>
+            <a:srgbClr val="D90000"/>
+          </a:solidFill>
+          <a:ln>
+            <a:noFill/>
           </a:ln>
         </p:spPr>
         <p:style>
@@ -3680,58 +3686,23 @@
       </p:sp>
       <p:sp>
         <p:nvSpPr>
-          <p:cNvPr id="8" name="TextBox 7"/>
-          <p:cNvSpPr txBox="1"/>
-          <p:nvPr/>
-        </p:nvSpPr>
-        <p:spPr>
-          <a:xfrm>
-            <a:off x="1051560" y="2212848"/>
-            <a:ext cx="10287000" cy="502920"/>
-          </a:xfrm>
-          <a:prstGeom prst="rect">
-            <a:avLst/>
-          </a:prstGeom>
-          <a:noFill/>
-        </p:spPr>
-        <p:txBody>
-          <a:bodyPr wrap="square">
-            <a:spAutoFit/>
-          </a:bodyPr>
-          <a:lstStyle/>
-          <a:p>
-            <a:r>
-              <a:rPr sz="2100" b="1">
-                <a:solidFill>
-                  <a:srgbClr val="1A202C"/>
-                </a:solidFill>
-              </a:rPr>
-              <a:t>Goal: I can reflect on personal progress in English during Term 1 and identifies</a:t>
-            </a:r>
-          </a:p>
-        </p:txBody>
-      </p:sp>
-      <p:sp>
-        <p:nvSpPr>
-          <p:cNvPr id="9" name="Rounded Rectangle 8"/>
+          <p:cNvPr id="5" name="Rectangle 4"/>
           <p:cNvSpPr/>
           <p:nvPr/>
         </p:nvSpPr>
         <p:spPr>
           <a:xfrm>
-            <a:off x="1005840" y="3246120"/>
-            <a:ext cx="10149840" cy="731520"/>
-          </a:xfrm>
-          <a:prstGeom prst="roundRect">
-            <a:avLst/>
-          </a:prstGeom>
-          <a:solidFill>
-            <a:srgbClr val="F8FAFC"/>
-          </a:solidFill>
-          <a:ln w="15240">
-            <a:solidFill>
-              <a:srgbClr val="CBD5E1"/>
-            </a:solidFill>
+            <a:off x="0" y="859536"/>
+            <a:ext cx="164592" cy="5998464"/>
+          </a:xfrm>
+          <a:prstGeom prst="rect">
+            <a:avLst/>
+          </a:prstGeom>
+          <a:solidFill>
+            <a:srgbClr val="1B7F3A"/>
+          </a:solidFill>
+          <a:ln>
+            <a:noFill/>
           </a:ln>
         </p:spPr>
         <p:style>
@@ -3758,23 +3729,128 @@
       </p:sp>
       <p:sp>
         <p:nvSpPr>
-          <p:cNvPr id="10" name="Oval 9"/>
+          <p:cNvPr id="6" name="TextBox 5"/>
+          <p:cNvSpPr txBox="1"/>
+          <p:nvPr/>
+        </p:nvSpPr>
+        <p:spPr>
+          <a:xfrm>
+            <a:off x="502920" y="210312"/>
+            <a:ext cx="3200400" cy="256032"/>
+          </a:xfrm>
+          <a:prstGeom prst="rect">
+            <a:avLst/>
+          </a:prstGeom>
+          <a:noFill/>
+        </p:spPr>
+        <p:txBody>
+          <a:bodyPr wrap="square" lIns="0" rIns="0" tIns="0" bIns="0">
+            <a:spAutoFit/>
+          </a:bodyPr>
+          <a:lstStyle/>
+          <a:p>
+            <a:r>
+              <a:rPr sz="1200" b="1">
+                <a:solidFill>
+                  <a:srgbClr val="FFFFFF"/>
+                </a:solidFill>
+                <a:latin typeface="Arial"/>
+              </a:rPr>
+              <a:t>2. MISSION</a:t>
+            </a:r>
+          </a:p>
+        </p:txBody>
+      </p:sp>
+      <p:sp>
+        <p:nvSpPr>
+          <p:cNvPr id="7" name="TextBox 6"/>
+          <p:cNvSpPr txBox="1"/>
+          <p:nvPr/>
+        </p:nvSpPr>
+        <p:spPr>
+          <a:xfrm>
+            <a:off x="7589520" y="210312"/>
+            <a:ext cx="4069080" cy="256032"/>
+          </a:xfrm>
+          <a:prstGeom prst="rect">
+            <a:avLst/>
+          </a:prstGeom>
+          <a:noFill/>
+        </p:spPr>
+        <p:txBody>
+          <a:bodyPr wrap="square" lIns="0" rIns="0" tIns="0" bIns="0">
+            <a:spAutoFit/>
+          </a:bodyPr>
+          <a:lstStyle/>
+          <a:p>
+            <a:pPr algn="r"/>
+            <a:r>
+              <a:rPr sz="1000" b="0">
+                <a:solidFill>
+                  <a:srgbClr val="FFFFFF"/>
+                </a:solidFill>
+                <a:latin typeface="Arial"/>
+              </a:rPr>
+              <a:t>p7_t1_english_1205</a:t>
+            </a:r>
+          </a:p>
+        </p:txBody>
+      </p:sp>
+      <p:sp>
+        <p:nvSpPr>
+          <p:cNvPr id="8" name="TextBox 7"/>
+          <p:cNvSpPr txBox="1"/>
+          <p:nvPr/>
+        </p:nvSpPr>
+        <p:spPr>
+          <a:xfrm>
+            <a:off x="594360" y="1042415"/>
+            <a:ext cx="11109960" cy="566928"/>
+          </a:xfrm>
+          <a:prstGeom prst="rect">
+            <a:avLst/>
+          </a:prstGeom>
+          <a:noFill/>
+        </p:spPr>
+        <p:txBody>
+          <a:bodyPr wrap="square" lIns="0" rIns="0" tIns="0" bIns="0">
+            <a:spAutoFit/>
+          </a:bodyPr>
+          <a:lstStyle/>
+          <a:p>
+            <a:r>
+              <a:rPr sz="2600" b="1">
+                <a:solidFill>
+                  <a:srgbClr val="111827"/>
+                </a:solidFill>
+                <a:latin typeface="Arial"/>
+              </a:rPr>
+              <a:t>Today's mission</a:t>
+            </a:r>
+          </a:p>
+        </p:txBody>
+      </p:sp>
+      <p:sp>
+        <p:nvSpPr>
+          <p:cNvPr id="9" name="Rectangle 8"/>
           <p:cNvSpPr/>
           <p:nvPr/>
         </p:nvSpPr>
         <p:spPr>
           <a:xfrm>
-            <a:off x="1234440" y="3364991"/>
-            <a:ext cx="347472" cy="347472"/>
-          </a:xfrm>
-          <a:prstGeom prst="ellipse">
-            <a:avLst/>
-          </a:prstGeom>
-          <a:solidFill>
-            <a:srgbClr val="059669"/>
-          </a:solidFill>
-          <a:ln>
-            <a:noFill/>
+            <a:off x="685800" y="1874519"/>
+            <a:ext cx="10835640" cy="804672"/>
+          </a:xfrm>
+          <a:prstGeom prst="rect">
+            <a:avLst/>
+          </a:prstGeom>
+          <a:solidFill>
+            <a:srgbClr val="FFF7E0"/>
+          </a:solidFill>
+          <a:ln w="17780">
+            <a:solidFill>
+              <a:srgbClr val="1B7F3A"/>
+            </a:solidFill>
           </a:ln>
         </p:spPr>
         <p:style>
@@ -3792,98 +3868,40 @@
           </a:fontRef>
         </p:style>
         <p:txBody>
-          <a:bodyPr rtlCol="0" anchor="ctr"/>
+          <a:bodyPr rtlCol="0" anchor="ctr" wrap="square" lIns="101600" rIns="101600" tIns="38100" bIns="38100"/>
           <a:lstStyle/>
           <a:p>
             <a:pPr algn="ctr"/>
-          </a:p>
-        </p:txBody>
-      </p:sp>
-      <p:sp>
-        <p:nvSpPr>
-          <p:cNvPr id="11" name="TextBox 10"/>
-          <p:cNvSpPr txBox="1"/>
-          <p:nvPr/>
-        </p:nvSpPr>
-        <p:spPr>
-          <a:xfrm>
-            <a:off x="1234440" y="3410712"/>
-            <a:ext cx="347472" cy="182880"/>
-          </a:xfrm>
-          <a:prstGeom prst="rect">
-            <a:avLst/>
-          </a:prstGeom>
-          <a:noFill/>
-        </p:spPr>
-        <p:txBody>
-          <a:bodyPr wrap="square">
-            <a:spAutoFit/>
-          </a:bodyPr>
-          <a:lstStyle/>
-          <a:p>
-            <a:pPr algn="ctr"/>
-            <a:r>
-              <a:rPr sz="1000" b="1">
-                <a:solidFill>
-                  <a:srgbClr val="FFFFFF"/>
-                </a:solidFill>
+            <a:r>
+              <a:rPr sz="1900" b="1">
+                <a:solidFill>
+                  <a:srgbClr val="111827"/>
+                </a:solidFill>
+                <a:latin typeface="Arial"/>
               </a:rPr>
-              <a:t>1</a:t>
-            </a:r>
-          </a:p>
-        </p:txBody>
-      </p:sp>
-      <p:sp>
-        <p:nvSpPr>
-          <p:cNvPr id="12" name="TextBox 11"/>
-          <p:cNvSpPr txBox="1"/>
-          <p:nvPr/>
-        </p:nvSpPr>
-        <p:spPr>
-          <a:xfrm>
-            <a:off x="1783080" y="3364991"/>
-            <a:ext cx="9006840" cy="347472"/>
-          </a:xfrm>
-          <a:prstGeom prst="rect">
-            <a:avLst/>
-          </a:prstGeom>
-          <a:noFill/>
-        </p:spPr>
-        <p:txBody>
-          <a:bodyPr wrap="square">
-            <a:spAutoFit/>
-          </a:bodyPr>
-          <a:lstStyle/>
-          <a:p>
-            <a:r>
-              <a:rPr sz="1700" b="0">
-                <a:solidFill>
-                  <a:srgbClr val="1A202C"/>
-                </a:solidFill>
-              </a:rPr>
-              <a:t>areas of strength.</a:t>
-            </a:r>
-          </a:p>
-        </p:txBody>
-      </p:sp>
-      <p:sp>
-        <p:nvSpPr>
-          <p:cNvPr id="13" name="Rounded Rectangle 12"/>
+              <a:t>Goal: I can reflect on personal progress in English from Term...</a:t>
+            </a:r>
+          </a:p>
+        </p:txBody>
+      </p:sp>
+      <p:sp>
+        <p:nvSpPr>
+          <p:cNvPr id="10" name="Rectangle 9"/>
           <p:cNvSpPr/>
           <p:nvPr/>
         </p:nvSpPr>
         <p:spPr>
           <a:xfrm>
-            <a:off x="1005840" y="4178808"/>
-            <a:ext cx="10149840" cy="731520"/>
-          </a:xfrm>
-          <a:prstGeom prst="roundRect">
-            <a:avLst/>
-          </a:prstGeom>
-          <a:solidFill>
-            <a:srgbClr val="F8FAFC"/>
-          </a:solidFill>
-          <a:ln w="15240">
+            <a:off x="868680" y="2971800"/>
+            <a:ext cx="10378440" cy="713232"/>
+          </a:xfrm>
+          <a:prstGeom prst="rect">
+            <a:avLst/>
+          </a:prstGeom>
+          <a:solidFill>
+            <a:srgbClr val="FFFFFF"/>
+          </a:solidFill>
+          <a:ln w="11430">
             <a:solidFill>
               <a:srgbClr val="CBD5E1"/>
             </a:solidFill>
@@ -3913,20 +3931,20 @@
       </p:sp>
       <p:sp>
         <p:nvSpPr>
-          <p:cNvPr id="14" name="Oval 13"/>
+          <p:cNvPr id="11" name="Rectangle 10"/>
           <p:cNvSpPr/>
           <p:nvPr/>
         </p:nvSpPr>
         <p:spPr>
           <a:xfrm>
-            <a:off x="1234440" y="4297680"/>
-            <a:ext cx="347472" cy="347472"/>
-          </a:xfrm>
-          <a:prstGeom prst="ellipse">
-            <a:avLst/>
-          </a:prstGeom>
-          <a:solidFill>
-            <a:srgbClr val="059669"/>
+            <a:off x="868680" y="2971800"/>
+            <a:ext cx="530352" cy="713232"/>
+          </a:xfrm>
+          <a:prstGeom prst="rect">
+            <a:avLst/>
+          </a:prstGeom>
+          <a:solidFill>
+            <a:srgbClr val="1B7F3A"/>
           </a:solidFill>
           <a:ln>
             <a:noFill/>
@@ -3947,23 +3965,32 @@
           </a:fontRef>
         </p:style>
         <p:txBody>
-          <a:bodyPr rtlCol="0" anchor="ctr"/>
+          <a:bodyPr rtlCol="0" anchor="ctr" wrap="square" lIns="101600" rIns="101600" tIns="38100" bIns="38100"/>
           <a:lstStyle/>
           <a:p>
             <a:pPr algn="ctr"/>
-          </a:p>
-        </p:txBody>
-      </p:sp>
-      <p:sp>
-        <p:nvSpPr>
-          <p:cNvPr id="15" name="TextBox 14"/>
+            <a:r>
+              <a:rPr sz="1500" b="1">
+                <a:solidFill>
+                  <a:srgbClr val="FFFFFF"/>
+                </a:solidFill>
+                <a:latin typeface="Arial"/>
+              </a:rPr>
+              <a:t>1</a:t>
+            </a:r>
+          </a:p>
+        </p:txBody>
+      </p:sp>
+      <p:sp>
+        <p:nvSpPr>
+          <p:cNvPr id="12" name="TextBox 11"/>
           <p:cNvSpPr txBox="1"/>
           <p:nvPr/>
         </p:nvSpPr>
         <p:spPr>
           <a:xfrm>
-            <a:off x="1234440" y="4343400"/>
-            <a:ext cx="347472" cy="182880"/>
+            <a:off x="1572768" y="3118104"/>
+            <a:ext cx="9372600" cy="384048"/>
           </a:xfrm>
           <a:prstGeom prst="rect">
             <a:avLst/>
@@ -3971,50 +3998,17 @@
           <a:noFill/>
         </p:spPr>
         <p:txBody>
-          <a:bodyPr wrap="square">
+          <a:bodyPr wrap="square" lIns="0" rIns="0" tIns="0" bIns="0">
             <a:spAutoFit/>
           </a:bodyPr>
           <a:lstStyle/>
           <a:p>
-            <a:pPr algn="ctr"/>
-            <a:r>
-              <a:rPr sz="1000" b="1">
-                <a:solidFill>
-                  <a:srgbClr val="FFFFFF"/>
-                </a:solidFill>
-              </a:rPr>
-              <a:t>2</a:t>
-            </a:r>
-          </a:p>
-        </p:txBody>
-      </p:sp>
-      <p:sp>
-        <p:nvSpPr>
-          <p:cNvPr id="16" name="TextBox 15"/>
-          <p:cNvSpPr txBox="1"/>
-          <p:nvPr/>
-        </p:nvSpPr>
-        <p:spPr>
-          <a:xfrm>
-            <a:off x="1783080" y="4297680"/>
-            <a:ext cx="9006840" cy="347472"/>
-          </a:xfrm>
-          <a:prstGeom prst="rect">
-            <a:avLst/>
-          </a:prstGeom>
-          <a:noFill/>
-        </p:spPr>
-        <p:txBody>
-          <a:bodyPr wrap="square">
-            <a:spAutoFit/>
-          </a:bodyPr>
-          <a:lstStyle/>
-          <a:p>
-            <a:r>
-              <a:rPr sz="1700" b="0">
-                <a:solidFill>
-                  <a:srgbClr val="1A202C"/>
-                </a:solidFill>
+            <a:r>
+              <a:rPr sz="1500" b="0">
+                <a:solidFill>
+                  <a:srgbClr val="111827"/>
+                </a:solidFill>
+                <a:latin typeface="Arial"/>
               </a:rPr>
               <a:t>You will use: Looking Back at Term 1, What is a Portfolio?</a:t>
             </a:r>
@@ -4023,22 +4017,22 @@
       </p:sp>
       <p:sp>
         <p:nvSpPr>
-          <p:cNvPr id="17" name="Rounded Rectangle 16"/>
+          <p:cNvPr id="13" name="Rectangle 12"/>
           <p:cNvSpPr/>
           <p:nvPr/>
         </p:nvSpPr>
         <p:spPr>
           <a:xfrm>
-            <a:off x="1005840" y="5111496"/>
-            <a:ext cx="10149840" cy="731520"/>
-          </a:xfrm>
-          <a:prstGeom prst="roundRect">
-            <a:avLst/>
-          </a:prstGeom>
-          <a:solidFill>
-            <a:srgbClr val="F8FAFC"/>
-          </a:solidFill>
-          <a:ln w="15240">
+            <a:off x="868680" y="3822191"/>
+            <a:ext cx="10378440" cy="713232"/>
+          </a:xfrm>
+          <a:prstGeom prst="rect">
+            <a:avLst/>
+          </a:prstGeom>
+          <a:solidFill>
+            <a:srgbClr val="FFFFFF"/>
+          </a:solidFill>
+          <a:ln w="11430">
             <a:solidFill>
               <a:srgbClr val="CBD5E1"/>
             </a:solidFill>
@@ -4068,20 +4062,20 @@
       </p:sp>
       <p:sp>
         <p:nvSpPr>
-          <p:cNvPr id="18" name="Oval 17"/>
+          <p:cNvPr id="14" name="Rectangle 13"/>
           <p:cNvSpPr/>
           <p:nvPr/>
         </p:nvSpPr>
         <p:spPr>
           <a:xfrm>
-            <a:off x="1234440" y="5230368"/>
-            <a:ext cx="347472" cy="347472"/>
-          </a:xfrm>
-          <a:prstGeom prst="ellipse">
-            <a:avLst/>
-          </a:prstGeom>
-          <a:solidFill>
-            <a:srgbClr val="059669"/>
+            <a:off x="868680" y="3822191"/>
+            <a:ext cx="530352" cy="713232"/>
+          </a:xfrm>
+          <a:prstGeom prst="rect">
+            <a:avLst/>
+          </a:prstGeom>
+          <a:solidFill>
+            <a:srgbClr val="1B7F3A"/>
           </a:solidFill>
           <a:ln>
             <a:noFill/>
@@ -4102,23 +4096,32 @@
           </a:fontRef>
         </p:style>
         <p:txBody>
-          <a:bodyPr rtlCol="0" anchor="ctr"/>
+          <a:bodyPr rtlCol="0" anchor="ctr" wrap="square" lIns="101600" rIns="101600" tIns="38100" bIns="38100"/>
           <a:lstStyle/>
           <a:p>
             <a:pPr algn="ctr"/>
-          </a:p>
-        </p:txBody>
-      </p:sp>
-      <p:sp>
-        <p:nvSpPr>
-          <p:cNvPr id="19" name="TextBox 18"/>
+            <a:r>
+              <a:rPr sz="1500" b="1">
+                <a:solidFill>
+                  <a:srgbClr val="FFFFFF"/>
+                </a:solidFill>
+                <a:latin typeface="Arial"/>
+              </a:rPr>
+              <a:t>2</a:t>
+            </a:r>
+          </a:p>
+        </p:txBody>
+      </p:sp>
+      <p:sp>
+        <p:nvSpPr>
+          <p:cNvPr id="15" name="TextBox 14"/>
           <p:cNvSpPr txBox="1"/>
           <p:nvPr/>
         </p:nvSpPr>
         <p:spPr>
           <a:xfrm>
-            <a:off x="1234440" y="5276088"/>
-            <a:ext cx="347472" cy="182880"/>
+            <a:off x="1572768" y="3968496"/>
+            <a:ext cx="9372600" cy="384048"/>
           </a:xfrm>
           <a:prstGeom prst="rect">
             <a:avLst/>
@@ -4126,17 +4129,114 @@
           <a:noFill/>
         </p:spPr>
         <p:txBody>
-          <a:bodyPr wrap="square">
+          <a:bodyPr wrap="square" lIns="0" rIns="0" tIns="0" bIns="0">
             <a:spAutoFit/>
           </a:bodyPr>
           <a:lstStyle/>
           <a:p>
+            <a:r>
+              <a:rPr sz="1500" b="0">
+                <a:solidFill>
+                  <a:srgbClr val="111827"/>
+                </a:solidFill>
+                <a:latin typeface="Arial"/>
+              </a:rPr>
+              <a:t>Success: explain, try, and answer in your own words.</a:t>
+            </a:r>
+          </a:p>
+        </p:txBody>
+      </p:sp>
+      <p:sp>
+        <p:nvSpPr>
+          <p:cNvPr id="16" name="Rectangle 15"/>
+          <p:cNvSpPr/>
+          <p:nvPr/>
+        </p:nvSpPr>
+        <p:spPr>
+          <a:xfrm>
+            <a:off x="868680" y="4672584"/>
+            <a:ext cx="10378440" cy="713232"/>
+          </a:xfrm>
+          <a:prstGeom prst="rect">
+            <a:avLst/>
+          </a:prstGeom>
+          <a:solidFill>
+            <a:srgbClr val="FFFFFF"/>
+          </a:solidFill>
+          <a:ln w="11430">
+            <a:solidFill>
+              <a:srgbClr val="CBD5E1"/>
+            </a:solidFill>
+          </a:ln>
+        </p:spPr>
+        <p:style>
+          <a:lnRef idx="1">
+            <a:schemeClr val="accent1"/>
+          </a:lnRef>
+          <a:fillRef idx="3">
+            <a:schemeClr val="accent1"/>
+          </a:fillRef>
+          <a:effectRef idx="2">
+            <a:schemeClr val="accent1"/>
+          </a:effectRef>
+          <a:fontRef idx="minor">
+            <a:schemeClr val="lt1"/>
+          </a:fontRef>
+        </p:style>
+        <p:txBody>
+          <a:bodyPr rtlCol="0" anchor="ctr"/>
+          <a:lstStyle/>
+          <a:p>
             <a:pPr algn="ctr"/>
-            <a:r>
-              <a:rPr sz="1000" b="1">
+          </a:p>
+        </p:txBody>
+      </p:sp>
+      <p:sp>
+        <p:nvSpPr>
+          <p:cNvPr id="17" name="Rectangle 16"/>
+          <p:cNvSpPr/>
+          <p:nvPr/>
+        </p:nvSpPr>
+        <p:spPr>
+          <a:xfrm>
+            <a:off x="868680" y="4672584"/>
+            <a:ext cx="530352" cy="713232"/>
+          </a:xfrm>
+          <a:prstGeom prst="rect">
+            <a:avLst/>
+          </a:prstGeom>
+          <a:solidFill>
+            <a:srgbClr val="1B7F3A"/>
+          </a:solidFill>
+          <a:ln>
+            <a:noFill/>
+          </a:ln>
+        </p:spPr>
+        <p:style>
+          <a:lnRef idx="1">
+            <a:schemeClr val="accent1"/>
+          </a:lnRef>
+          <a:fillRef idx="3">
+            <a:schemeClr val="accent1"/>
+          </a:fillRef>
+          <a:effectRef idx="2">
+            <a:schemeClr val="accent1"/>
+          </a:effectRef>
+          <a:fontRef idx="minor">
+            <a:schemeClr val="lt1"/>
+          </a:fontRef>
+        </p:style>
+        <p:txBody>
+          <a:bodyPr rtlCol="0" anchor="ctr" wrap="square" lIns="101600" rIns="101600" tIns="38100" bIns="38100"/>
+          <a:lstStyle/>
+          <a:p>
+            <a:pPr algn="ctr"/>
+            <a:r>
+              <a:rPr sz="1500" b="1">
                 <a:solidFill>
                   <a:srgbClr val="FFFFFF"/>
                 </a:solidFill>
+                <a:latin typeface="Arial"/>
               </a:rPr>
               <a:t>3</a:t>
             </a:r>
@@ -4145,14 +4245,14 @@
       </p:sp>
       <p:sp>
         <p:nvSpPr>
-          <p:cNvPr id="20" name="TextBox 19"/>
+          <p:cNvPr id="18" name="TextBox 17"/>
           <p:cNvSpPr txBox="1"/>
           <p:nvPr/>
         </p:nvSpPr>
         <p:spPr>
           <a:xfrm>
-            <a:off x="1783080" y="5230368"/>
-            <a:ext cx="9006840" cy="347472"/>
+            <a:off x="1572768" y="4818888"/>
+            <a:ext cx="9372600" cy="384048"/>
           </a:xfrm>
           <a:prstGeom prst="rect">
             <a:avLst/>
@@ -4160,18 +4260,116 @@
           <a:noFill/>
         </p:spPr>
         <p:txBody>
-          <a:bodyPr wrap="square">
+          <a:bodyPr wrap="square" lIns="0" rIns="0" tIns="0" bIns="0">
             <a:spAutoFit/>
           </a:bodyPr>
           <a:lstStyle/>
           <a:p>
             <a:r>
-              <a:rPr sz="1700" b="0">
-                <a:solidFill>
-                  <a:srgbClr val="1A202C"/>
-                </a:solidFill>
+              <a:rPr sz="1500" b="0">
+                <a:solidFill>
+                  <a:srgbClr val="111827"/>
+                </a:solidFill>
+                <a:latin typeface="Arial"/>
               </a:rPr>
-              <a:t>Success: explain, try, and answer in your own words.</a:t>
+              <a:t>Write one clear response.</a:t>
+            </a:r>
+          </a:p>
+        </p:txBody>
+      </p:sp>
+      <p:sp>
+        <p:nvSpPr>
+          <p:cNvPr id="19" name="Rectangle 18"/>
+          <p:cNvSpPr/>
+          <p:nvPr/>
+        </p:nvSpPr>
+        <p:spPr>
+          <a:xfrm>
+            <a:off x="868680" y="5522976"/>
+            <a:ext cx="10378440" cy="713232"/>
+          </a:xfrm>
+          <a:prstGeom prst="rect">
+            <a:avLst/>
+          </a:prstGeom>
+          <a:solidFill>
+            <a:srgbClr val="FFFFFF"/>
+          </a:solidFill>
+          <a:ln w="11430">
+            <a:solidFill>
+              <a:srgbClr val="CBD5E1"/>
+            </a:solidFill>
+          </a:ln>
+        </p:spPr>
+        <p:style>
+          <a:lnRef idx="1">
+            <a:schemeClr val="accent1"/>
+          </a:lnRef>
+          <a:fillRef idx="3">
+            <a:schemeClr val="accent1"/>
+          </a:fillRef>
+          <a:effectRef idx="2">
+            <a:schemeClr val="accent1"/>
+          </a:effectRef>
+          <a:fontRef idx="minor">
+            <a:schemeClr val="lt1"/>
+          </a:fontRef>
+        </p:style>
+        <p:txBody>
+          <a:bodyPr rtlCol="0" anchor="ctr"/>
+          <a:lstStyle/>
+          <a:p>
+            <a:pPr algn="ctr"/>
+          </a:p>
+        </p:txBody>
+      </p:sp>
+      <p:sp>
+        <p:nvSpPr>
+          <p:cNvPr id="20" name="Rectangle 19"/>
+          <p:cNvSpPr/>
+          <p:nvPr/>
+        </p:nvSpPr>
+        <p:spPr>
+          <a:xfrm>
+            <a:off x="868680" y="5522976"/>
+            <a:ext cx="530352" cy="713232"/>
+          </a:xfrm>
+          <a:prstGeom prst="rect">
+            <a:avLst/>
+          </a:prstGeom>
+          <a:solidFill>
+            <a:srgbClr val="1B7F3A"/>
+          </a:solidFill>
+          <a:ln>
+            <a:noFill/>
+          </a:ln>
+        </p:spPr>
+        <p:style>
+          <a:lnRef idx="1">
+            <a:schemeClr val="accent1"/>
+          </a:lnRef>
+          <a:fillRef idx="3">
+            <a:schemeClr val="accent1"/>
+          </a:fillRef>
+          <a:effectRef idx="2">
+            <a:schemeClr val="accent1"/>
+          </a:effectRef>
+          <a:fontRef idx="minor">
+            <a:schemeClr val="lt1"/>
+          </a:fontRef>
+        </p:style>
+        <p:txBody>
+          <a:bodyPr rtlCol="0" anchor="ctr" wrap="square" lIns="101600" rIns="101600" tIns="38100" bIns="38100"/>
+          <a:lstStyle/>
+          <a:p>
+            <a:pPr algn="ctr"/>
+            <a:r>
+              <a:rPr sz="1500" b="1">
+                <a:solidFill>
+                  <a:srgbClr val="FFFFFF"/>
+                </a:solidFill>
+                <a:latin typeface="Arial"/>
+              </a:rPr>
+              <a:t>4</a:t>
             </a:r>
           </a:p>
         </p:txBody>
@@ -4184,8 +4382,8 @@
         </p:nvSpPr>
         <p:spPr>
           <a:xfrm>
-            <a:off x="777240" y="6419088"/>
-            <a:ext cx="10835640" cy="228600"/>
+            <a:off x="1572768" y="5669280"/>
+            <a:ext cx="9372600" cy="384048"/>
           </a:xfrm>
           <a:prstGeom prst="rect">
             <a:avLst/>
@@ -4193,17 +4391,52 @@
           <a:noFill/>
         </p:spPr>
         <p:txBody>
-          <a:bodyPr wrap="square">
+          <a:bodyPr wrap="square" lIns="0" rIns="0" tIns="0" bIns="0">
             <a:spAutoFit/>
           </a:bodyPr>
           <a:lstStyle/>
           <a:p>
+            <a:r>
+              <a:rPr sz="1500" b="0">
+                <a:solidFill>
+                  <a:srgbClr val="111827"/>
+                </a:solidFill>
+                <a:latin typeface="Arial"/>
+              </a:rPr>
+              <a:t>Write one clear response.</a:t>
+            </a:r>
+          </a:p>
+        </p:txBody>
+      </p:sp>
+      <p:sp>
+        <p:nvSpPr>
+          <p:cNvPr id="22" name="TextBox 21"/>
+          <p:cNvSpPr txBox="1"/>
+          <p:nvPr/>
+        </p:nvSpPr>
+        <p:spPr>
+          <a:xfrm>
+            <a:off x="685800" y="6419088"/>
+            <a:ext cx="10835640" cy="228600"/>
+          </a:xfrm>
+          <a:prstGeom prst="rect">
+            <a:avLst/>
+          </a:prstGeom>
+          <a:noFill/>
+        </p:spPr>
+        <p:txBody>
+          <a:bodyPr wrap="square" lIns="0" rIns="0" tIns="0" bIns="0">
+            <a:spAutoFit/>
+          </a:bodyPr>
+          <a:lstStyle/>
+          <a:p>
             <a:pPr algn="r"/>
             <a:r>
               <a:rPr sz="1000" b="0">
                 <a:solidFill>
-                  <a:srgbClr val="5B677D"/>
-                </a:solidFill>
+                  <a:srgbClr val="475569"/>
+                </a:solidFill>
+                <a:latin typeface="Arial"/>
               </a:rPr>
               <a:t>Listen • Talk • Try • Explain</a:t>
             </a:r>
@@ -4221,6 +4454,14 @@
 <file path=ppt/slides/slide3.xml><?xml version="1.0" encoding="utf-8"?>
 <p:sld xmlns:a="http://schemas.openxmlformats.org/drawingml/2006/main" xmlns:p="http://schemas.openxmlformats.org/presentationml/2006/main" xmlns:r="http://schemas.openxmlformats.org/officeDocument/2006/relationships">
   <p:cSld>
+    <p:bg>
+      <p:bgPr>
+        <a:solidFill>
+          <a:srgbClr val="F8FAFC"/>
+        </a:solidFill>
+        <a:effectLst/>
+      </p:bgPr>
+    </p:bg>
     <p:spTree>
       <p:nvGrpSpPr>
         <p:cNvPr id="1" name=""/>
@@ -4237,13 +4478,13 @@
         <p:spPr>
           <a:xfrm>
             <a:off x="0" y="0"/>
-            <a:ext cx="12191695" cy="914400"/>
-          </a:xfrm>
-          <a:prstGeom prst="rect">
-            <a:avLst/>
-          </a:prstGeom>
-          <a:solidFill>
-            <a:srgbClr val="7C3AED"/>
+            <a:ext cx="12191695" cy="713232"/>
+          </a:xfrm>
+          <a:prstGeom prst="rect">
+            <a:avLst/>
+          </a:prstGeom>
+          <a:solidFill>
+            <a:srgbClr val="111827"/>
           </a:solidFill>
           <a:ln>
             <a:noFill/>
@@ -4279,14 +4520,14 @@
         </p:nvSpPr>
         <p:spPr>
           <a:xfrm>
-            <a:off x="0" y="914400"/>
-            <a:ext cx="164592" cy="5943600"/>
-          </a:xfrm>
-          <a:prstGeom prst="rect">
-            <a:avLst/>
-          </a:prstGeom>
-          <a:solidFill>
-            <a:srgbClr val="7C3AED"/>
+            <a:off x="0" y="713232"/>
+            <a:ext cx="12191695" cy="82296"/>
+          </a:xfrm>
+          <a:prstGeom prst="rect">
+            <a:avLst/>
+          </a:prstGeom>
+          <a:solidFill>
+            <a:srgbClr val="FCD116"/>
           </a:solidFill>
           <a:ln>
             <a:noFill/>
@@ -4316,125 +4557,23 @@
       </p:sp>
       <p:sp>
         <p:nvSpPr>
-          <p:cNvPr id="4" name="TextBox 3"/>
-          <p:cNvSpPr txBox="1"/>
-          <p:nvPr/>
-        </p:nvSpPr>
-        <p:spPr>
-          <a:xfrm>
-            <a:off x="594360" y="246888"/>
-            <a:ext cx="2926080" cy="320040"/>
-          </a:xfrm>
-          <a:prstGeom prst="rect">
-            <a:avLst/>
-          </a:prstGeom>
-          <a:noFill/>
-        </p:spPr>
-        <p:txBody>
-          <a:bodyPr wrap="square">
-            <a:spAutoFit/>
-          </a:bodyPr>
-          <a:lstStyle/>
-          <a:p>
-            <a:r>
-              <a:rPr sz="1300" b="1">
-                <a:solidFill>
-                  <a:srgbClr val="FFFFFF"/>
-                </a:solidFill>
-              </a:rPr>
-              <a:t>3. STARTER</a:t>
-            </a:r>
-          </a:p>
-        </p:txBody>
-      </p:sp>
-      <p:sp>
-        <p:nvSpPr>
-          <p:cNvPr id="5" name="TextBox 4"/>
-          <p:cNvSpPr txBox="1"/>
-          <p:nvPr/>
-        </p:nvSpPr>
-        <p:spPr>
-          <a:xfrm>
-            <a:off x="7772400" y="246888"/>
-            <a:ext cx="3840480" cy="320040"/>
-          </a:xfrm>
-          <a:prstGeom prst="rect">
-            <a:avLst/>
-          </a:prstGeom>
-          <a:noFill/>
-        </p:spPr>
-        <p:txBody>
-          <a:bodyPr wrap="square">
-            <a:spAutoFit/>
-          </a:bodyPr>
-          <a:lstStyle/>
-          <a:p>
-            <a:pPr algn="r"/>
-            <a:r>
-              <a:rPr sz="1100" b="0">
-                <a:solidFill>
-                  <a:srgbClr val="FFFFFF"/>
-                </a:solidFill>
-              </a:rPr>
-              <a:t>p7_t1_english_1205</a:t>
-            </a:r>
-          </a:p>
-        </p:txBody>
-      </p:sp>
-      <p:sp>
-        <p:nvSpPr>
-          <p:cNvPr id="6" name="TextBox 5"/>
-          <p:cNvSpPr txBox="1"/>
-          <p:nvPr/>
-        </p:nvSpPr>
-        <p:spPr>
-          <a:xfrm>
-            <a:off x="640080" y="1143000"/>
-            <a:ext cx="10972800" cy="685800"/>
-          </a:xfrm>
-          <a:prstGeom prst="rect">
-            <a:avLst/>
-          </a:prstGeom>
-          <a:noFill/>
-        </p:spPr>
-        <p:txBody>
-          <a:bodyPr wrap="square">
-            <a:spAutoFit/>
-          </a:bodyPr>
-          <a:lstStyle/>
-          <a:p>
-            <a:r>
-              <a:rPr sz="2800" b="1">
-                <a:solidFill>
-                  <a:srgbClr val="1A202C"/>
-                </a:solidFill>
-              </a:rPr>
-              <a:t>Starter: think first</a:t>
-            </a:r>
-          </a:p>
-        </p:txBody>
-      </p:sp>
-      <p:sp>
-        <p:nvSpPr>
-          <p:cNvPr id="7" name="Rounded Rectangle 6"/>
+          <p:cNvPr id="4" name="Rectangle 3"/>
           <p:cNvSpPr/>
           <p:nvPr/>
         </p:nvSpPr>
         <p:spPr>
           <a:xfrm>
-            <a:off x="777240" y="1993392"/>
-            <a:ext cx="10835640" cy="1005840"/>
-          </a:xfrm>
-          <a:prstGeom prst="roundRect">
-            <a:avLst/>
-          </a:prstGeom>
-          <a:solidFill>
-            <a:srgbClr val="FFFBEB"/>
-          </a:solidFill>
-          <a:ln w="15240">
-            <a:solidFill>
-              <a:srgbClr val="7C3AED"/>
-            </a:solidFill>
+            <a:off x="0" y="795528"/>
+            <a:ext cx="12191695" cy="64008"/>
+          </a:xfrm>
+          <a:prstGeom prst="rect">
+            <a:avLst/>
+          </a:prstGeom>
+          <a:solidFill>
+            <a:srgbClr val="D90000"/>
+          </a:solidFill>
+          <a:ln>
+            <a:noFill/>
           </a:ln>
         </p:spPr>
         <p:style>
@@ -4461,58 +4600,23 @@
       </p:sp>
       <p:sp>
         <p:nvSpPr>
-          <p:cNvPr id="8" name="TextBox 7"/>
-          <p:cNvSpPr txBox="1"/>
-          <p:nvPr/>
-        </p:nvSpPr>
-        <p:spPr>
-          <a:xfrm>
-            <a:off x="1051560" y="2212848"/>
-            <a:ext cx="10287000" cy="502920"/>
-          </a:xfrm>
-          <a:prstGeom prst="rect">
-            <a:avLst/>
-          </a:prstGeom>
-          <a:noFill/>
-        </p:spPr>
-        <p:txBody>
-          <a:bodyPr wrap="square">
-            <a:spAutoFit/>
-          </a:bodyPr>
-          <a:lstStyle/>
-          <a:p>
-            <a:r>
-              <a:rPr sz="2100" b="1">
-                <a:solidFill>
-                  <a:srgbClr val="1A202C"/>
-                </a:solidFill>
-              </a:rPr>
-              <a:t>Think: What are the three main topics we studied this term?</a:t>
-            </a:r>
-          </a:p>
-        </p:txBody>
-      </p:sp>
-      <p:sp>
-        <p:nvSpPr>
-          <p:cNvPr id="9" name="Rounded Rectangle 8"/>
+          <p:cNvPr id="5" name="Rectangle 4"/>
           <p:cNvSpPr/>
           <p:nvPr/>
         </p:nvSpPr>
         <p:spPr>
           <a:xfrm>
-            <a:off x="1005840" y="3246120"/>
-            <a:ext cx="10149840" cy="731520"/>
-          </a:xfrm>
-          <a:prstGeom prst="roundRect">
-            <a:avLst/>
-          </a:prstGeom>
-          <a:solidFill>
-            <a:srgbClr val="F8FAFC"/>
-          </a:solidFill>
-          <a:ln w="15240">
-            <a:solidFill>
-              <a:srgbClr val="CBD5E1"/>
-            </a:solidFill>
+            <a:off x="0" y="859536"/>
+            <a:ext cx="164592" cy="5998464"/>
+          </a:xfrm>
+          <a:prstGeom prst="rect">
+            <a:avLst/>
+          </a:prstGeom>
+          <a:solidFill>
+            <a:srgbClr val="7C3AED"/>
+          </a:solidFill>
+          <a:ln>
+            <a:noFill/>
           </a:ln>
         </p:spPr>
         <p:style>
@@ -4539,23 +4643,128 @@
       </p:sp>
       <p:sp>
         <p:nvSpPr>
-          <p:cNvPr id="10" name="Oval 9"/>
+          <p:cNvPr id="6" name="TextBox 5"/>
+          <p:cNvSpPr txBox="1"/>
+          <p:nvPr/>
+        </p:nvSpPr>
+        <p:spPr>
+          <a:xfrm>
+            <a:off x="502920" y="210312"/>
+            <a:ext cx="3200400" cy="256032"/>
+          </a:xfrm>
+          <a:prstGeom prst="rect">
+            <a:avLst/>
+          </a:prstGeom>
+          <a:noFill/>
+        </p:spPr>
+        <p:txBody>
+          <a:bodyPr wrap="square" lIns="0" rIns="0" tIns="0" bIns="0">
+            <a:spAutoFit/>
+          </a:bodyPr>
+          <a:lstStyle/>
+          <a:p>
+            <a:r>
+              <a:rPr sz="1200" b="1">
+                <a:solidFill>
+                  <a:srgbClr val="FFFFFF"/>
+                </a:solidFill>
+                <a:latin typeface="Arial"/>
+              </a:rPr>
+              <a:t>3. STARTER</a:t>
+            </a:r>
+          </a:p>
+        </p:txBody>
+      </p:sp>
+      <p:sp>
+        <p:nvSpPr>
+          <p:cNvPr id="7" name="TextBox 6"/>
+          <p:cNvSpPr txBox="1"/>
+          <p:nvPr/>
+        </p:nvSpPr>
+        <p:spPr>
+          <a:xfrm>
+            <a:off x="7589520" y="210312"/>
+            <a:ext cx="4069080" cy="256032"/>
+          </a:xfrm>
+          <a:prstGeom prst="rect">
+            <a:avLst/>
+          </a:prstGeom>
+          <a:noFill/>
+        </p:spPr>
+        <p:txBody>
+          <a:bodyPr wrap="square" lIns="0" rIns="0" tIns="0" bIns="0">
+            <a:spAutoFit/>
+          </a:bodyPr>
+          <a:lstStyle/>
+          <a:p>
+            <a:pPr algn="r"/>
+            <a:r>
+              <a:rPr sz="1000" b="0">
+                <a:solidFill>
+                  <a:srgbClr val="FFFFFF"/>
+                </a:solidFill>
+                <a:latin typeface="Arial"/>
+              </a:rPr>
+              <a:t>p7_t1_english_1205</a:t>
+            </a:r>
+          </a:p>
+        </p:txBody>
+      </p:sp>
+      <p:sp>
+        <p:nvSpPr>
+          <p:cNvPr id="8" name="TextBox 7"/>
+          <p:cNvSpPr txBox="1"/>
+          <p:nvPr/>
+        </p:nvSpPr>
+        <p:spPr>
+          <a:xfrm>
+            <a:off x="594360" y="1042415"/>
+            <a:ext cx="11109960" cy="566928"/>
+          </a:xfrm>
+          <a:prstGeom prst="rect">
+            <a:avLst/>
+          </a:prstGeom>
+          <a:noFill/>
+        </p:spPr>
+        <p:txBody>
+          <a:bodyPr wrap="square" lIns="0" rIns="0" tIns="0" bIns="0">
+            <a:spAutoFit/>
+          </a:bodyPr>
+          <a:lstStyle/>
+          <a:p>
+            <a:r>
+              <a:rPr sz="2600" b="1">
+                <a:solidFill>
+                  <a:srgbClr val="111827"/>
+                </a:solidFill>
+                <a:latin typeface="Arial"/>
+              </a:rPr>
+              <a:t>Starter: think first</a:t>
+            </a:r>
+          </a:p>
+        </p:txBody>
+      </p:sp>
+      <p:sp>
+        <p:nvSpPr>
+          <p:cNvPr id="9" name="Rectangle 8"/>
           <p:cNvSpPr/>
           <p:nvPr/>
         </p:nvSpPr>
         <p:spPr>
           <a:xfrm>
-            <a:off x="1234440" y="3364991"/>
-            <a:ext cx="347472" cy="347472"/>
-          </a:xfrm>
-          <a:prstGeom prst="ellipse">
-            <a:avLst/>
-          </a:prstGeom>
-          <a:solidFill>
-            <a:srgbClr val="7C3AED"/>
-          </a:solidFill>
-          <a:ln>
-            <a:noFill/>
+            <a:off x="685800" y="1874519"/>
+            <a:ext cx="10835640" cy="804672"/>
+          </a:xfrm>
+          <a:prstGeom prst="rect">
+            <a:avLst/>
+          </a:prstGeom>
+          <a:solidFill>
+            <a:srgbClr val="FFF7E0"/>
+          </a:solidFill>
+          <a:ln w="17780">
+            <a:solidFill>
+              <a:srgbClr val="7C3AED"/>
+            </a:solidFill>
           </a:ln>
         </p:spPr>
         <p:style>
@@ -4573,98 +4782,40 @@
           </a:fontRef>
         </p:style>
         <p:txBody>
-          <a:bodyPr rtlCol="0" anchor="ctr"/>
+          <a:bodyPr rtlCol="0" anchor="ctr" wrap="square" lIns="101600" rIns="101600" tIns="38100" bIns="38100"/>
           <a:lstStyle/>
           <a:p>
             <a:pPr algn="ctr"/>
-          </a:p>
-        </p:txBody>
-      </p:sp>
-      <p:sp>
-        <p:nvSpPr>
-          <p:cNvPr id="11" name="TextBox 10"/>
-          <p:cNvSpPr txBox="1"/>
-          <p:nvPr/>
-        </p:nvSpPr>
-        <p:spPr>
-          <a:xfrm>
-            <a:off x="1234440" y="3410712"/>
-            <a:ext cx="347472" cy="182880"/>
-          </a:xfrm>
-          <a:prstGeom prst="rect">
-            <a:avLst/>
-          </a:prstGeom>
-          <a:noFill/>
-        </p:spPr>
-        <p:txBody>
-          <a:bodyPr wrap="square">
-            <a:spAutoFit/>
-          </a:bodyPr>
-          <a:lstStyle/>
-          <a:p>
-            <a:pPr algn="ctr"/>
-            <a:r>
-              <a:rPr sz="1000" b="1">
-                <a:solidFill>
-                  <a:srgbClr val="FFFFFF"/>
-                </a:solidFill>
+            <a:r>
+              <a:rPr sz="1900" b="1">
+                <a:solidFill>
+                  <a:srgbClr val="111827"/>
+                </a:solidFill>
+                <a:latin typeface="Arial"/>
               </a:rPr>
-              <a:t>1</a:t>
-            </a:r>
-          </a:p>
-        </p:txBody>
-      </p:sp>
-      <p:sp>
-        <p:nvSpPr>
-          <p:cNvPr id="12" name="TextBox 11"/>
-          <p:cNvSpPr txBox="1"/>
-          <p:nvPr/>
-        </p:nvSpPr>
-        <p:spPr>
-          <a:xfrm>
-            <a:off x="1783080" y="3364991"/>
-            <a:ext cx="9006840" cy="347472"/>
-          </a:xfrm>
-          <a:prstGeom prst="rect">
-            <a:avLst/>
-          </a:prstGeom>
-          <a:noFill/>
-        </p:spPr>
-        <p:txBody>
-          <a:bodyPr wrap="square">
-            <a:spAutoFit/>
-          </a:bodyPr>
-          <a:lstStyle/>
-          <a:p>
-            <a:r>
-              <a:rPr sz="1700" b="0">
-                <a:solidFill>
-                  <a:srgbClr val="1A202C"/>
-                </a:solidFill>
-              </a:rPr>
-              <a:t>Pair: compare your first answer with a partner.</a:t>
-            </a:r>
-          </a:p>
-        </p:txBody>
-      </p:sp>
-      <p:sp>
-        <p:nvSpPr>
-          <p:cNvPr id="13" name="Rounded Rectangle 12"/>
+              <a:t>Think: What are the three main topics we studied this term?</a:t>
+            </a:r>
+          </a:p>
+        </p:txBody>
+      </p:sp>
+      <p:sp>
+        <p:nvSpPr>
+          <p:cNvPr id="10" name="Rectangle 9"/>
           <p:cNvSpPr/>
           <p:nvPr/>
         </p:nvSpPr>
         <p:spPr>
           <a:xfrm>
-            <a:off x="1005840" y="4178808"/>
-            <a:ext cx="10149840" cy="731520"/>
-          </a:xfrm>
-          <a:prstGeom prst="roundRect">
-            <a:avLst/>
-          </a:prstGeom>
-          <a:solidFill>
-            <a:srgbClr val="F8FAFC"/>
-          </a:solidFill>
-          <a:ln w="15240">
+            <a:off x="868680" y="2971800"/>
+            <a:ext cx="10378440" cy="713232"/>
+          </a:xfrm>
+          <a:prstGeom prst="rect">
+            <a:avLst/>
+          </a:prstGeom>
+          <a:solidFill>
+            <a:srgbClr val="FFFFFF"/>
+          </a:solidFill>
+          <a:ln w="11430">
             <a:solidFill>
               <a:srgbClr val="CBD5E1"/>
             </a:solidFill>
@@ -4694,16 +4845,16 @@
       </p:sp>
       <p:sp>
         <p:nvSpPr>
-          <p:cNvPr id="14" name="Oval 13"/>
+          <p:cNvPr id="11" name="Rectangle 10"/>
           <p:cNvSpPr/>
           <p:nvPr/>
         </p:nvSpPr>
         <p:spPr>
           <a:xfrm>
-            <a:off x="1234440" y="4297680"/>
-            <a:ext cx="347472" cy="347472"/>
-          </a:xfrm>
-          <a:prstGeom prst="ellipse">
+            <a:off x="868680" y="2971800"/>
+            <a:ext cx="530352" cy="713232"/>
+          </a:xfrm>
+          <a:prstGeom prst="rect">
             <a:avLst/>
           </a:prstGeom>
           <a:solidFill>
@@ -4728,10 +4879,150 @@
           </a:fontRef>
         </p:style>
         <p:txBody>
+          <a:bodyPr rtlCol="0" anchor="ctr" wrap="square" lIns="101600" rIns="101600" tIns="38100" bIns="38100"/>
+          <a:lstStyle/>
+          <a:p>
+            <a:pPr algn="ctr"/>
+            <a:r>
+              <a:rPr sz="1500" b="1">
+                <a:solidFill>
+                  <a:srgbClr val="FFFFFF"/>
+                </a:solidFill>
+                <a:latin typeface="Arial"/>
+              </a:rPr>
+              <a:t>1</a:t>
+            </a:r>
+          </a:p>
+        </p:txBody>
+      </p:sp>
+      <p:sp>
+        <p:nvSpPr>
+          <p:cNvPr id="12" name="TextBox 11"/>
+          <p:cNvSpPr txBox="1"/>
+          <p:nvPr/>
+        </p:nvSpPr>
+        <p:spPr>
+          <a:xfrm>
+            <a:off x="1572768" y="3118104"/>
+            <a:ext cx="9372600" cy="384048"/>
+          </a:xfrm>
+          <a:prstGeom prst="rect">
+            <a:avLst/>
+          </a:prstGeom>
+          <a:noFill/>
+        </p:spPr>
+        <p:txBody>
+          <a:bodyPr wrap="square" lIns="0" rIns="0" tIns="0" bIns="0">
+            <a:spAutoFit/>
+          </a:bodyPr>
+          <a:lstStyle/>
+          <a:p>
+            <a:r>
+              <a:rPr sz="1500" b="0">
+                <a:solidFill>
+                  <a:srgbClr val="111827"/>
+                </a:solidFill>
+                <a:latin typeface="Arial"/>
+              </a:rPr>
+              <a:t>Pair: compare your first answer with a partner.</a:t>
+            </a:r>
+          </a:p>
+        </p:txBody>
+      </p:sp>
+      <p:sp>
+        <p:nvSpPr>
+          <p:cNvPr id="13" name="Rectangle 12"/>
+          <p:cNvSpPr/>
+          <p:nvPr/>
+        </p:nvSpPr>
+        <p:spPr>
+          <a:xfrm>
+            <a:off x="868680" y="3822191"/>
+            <a:ext cx="10378440" cy="713232"/>
+          </a:xfrm>
+          <a:prstGeom prst="rect">
+            <a:avLst/>
+          </a:prstGeom>
+          <a:solidFill>
+            <a:srgbClr val="FFFFFF"/>
+          </a:solidFill>
+          <a:ln w="11430">
+            <a:solidFill>
+              <a:srgbClr val="CBD5E1"/>
+            </a:solidFill>
+          </a:ln>
+        </p:spPr>
+        <p:style>
+          <a:lnRef idx="1">
+            <a:schemeClr val="accent1"/>
+          </a:lnRef>
+          <a:fillRef idx="3">
+            <a:schemeClr val="accent1"/>
+          </a:fillRef>
+          <a:effectRef idx="2">
+            <a:schemeClr val="accent1"/>
+          </a:effectRef>
+          <a:fontRef idx="minor">
+            <a:schemeClr val="lt1"/>
+          </a:fontRef>
+        </p:style>
+        <p:txBody>
           <a:bodyPr rtlCol="0" anchor="ctr"/>
           <a:lstStyle/>
           <a:p>
             <a:pPr algn="ctr"/>
+          </a:p>
+        </p:txBody>
+      </p:sp>
+      <p:sp>
+        <p:nvSpPr>
+          <p:cNvPr id="14" name="Rectangle 13"/>
+          <p:cNvSpPr/>
+          <p:nvPr/>
+        </p:nvSpPr>
+        <p:spPr>
+          <a:xfrm>
+            <a:off x="868680" y="3822191"/>
+            <a:ext cx="530352" cy="713232"/>
+          </a:xfrm>
+          <a:prstGeom prst="rect">
+            <a:avLst/>
+          </a:prstGeom>
+          <a:solidFill>
+            <a:srgbClr val="7C3AED"/>
+          </a:solidFill>
+          <a:ln>
+            <a:noFill/>
+          </a:ln>
+        </p:spPr>
+        <p:style>
+          <a:lnRef idx="1">
+            <a:schemeClr val="accent1"/>
+          </a:lnRef>
+          <a:fillRef idx="3">
+            <a:schemeClr val="accent1"/>
+          </a:fillRef>
+          <a:effectRef idx="2">
+            <a:schemeClr val="accent1"/>
+          </a:effectRef>
+          <a:fontRef idx="minor">
+            <a:schemeClr val="lt1"/>
+          </a:fontRef>
+        </p:style>
+        <p:txBody>
+          <a:bodyPr rtlCol="0" anchor="ctr" wrap="square" lIns="101600" rIns="101600" tIns="38100" bIns="38100"/>
+          <a:lstStyle/>
+          <a:p>
+            <a:pPr algn="ctr"/>
+            <a:r>
+              <a:rPr sz="1500" b="1">
+                <a:solidFill>
+                  <a:srgbClr val="FFFFFF"/>
+                </a:solidFill>
+                <a:latin typeface="Arial"/>
+              </a:rPr>
+              <a:t>2</a:t>
+            </a:r>
           </a:p>
         </p:txBody>
       </p:sp>
@@ -4743,8 +5034,8 @@
         </p:nvSpPr>
         <p:spPr>
           <a:xfrm>
-            <a:off x="1234440" y="4343400"/>
-            <a:ext cx="347472" cy="182880"/>
+            <a:off x="1572768" y="3968496"/>
+            <a:ext cx="9372600" cy="384048"/>
           </a:xfrm>
           <a:prstGeom prst="rect">
             <a:avLst/>
@@ -4752,33 +5043,130 @@
           <a:noFill/>
         </p:spPr>
         <p:txBody>
-          <a:bodyPr wrap="square">
+          <a:bodyPr wrap="square" lIns="0" rIns="0" tIns="0" bIns="0">
             <a:spAutoFit/>
           </a:bodyPr>
           <a:lstStyle/>
           <a:p>
+            <a:r>
+              <a:rPr sz="1500" b="0">
+                <a:solidFill>
+                  <a:srgbClr val="111827"/>
+                </a:solidFill>
+                <a:latin typeface="Arial"/>
+              </a:rPr>
+              <a:t>Share: connect your answer to Looking Back at Term 1.</a:t>
+            </a:r>
+          </a:p>
+        </p:txBody>
+      </p:sp>
+      <p:sp>
+        <p:nvSpPr>
+          <p:cNvPr id="16" name="Rectangle 15"/>
+          <p:cNvSpPr/>
+          <p:nvPr/>
+        </p:nvSpPr>
+        <p:spPr>
+          <a:xfrm>
+            <a:off x="868680" y="4672584"/>
+            <a:ext cx="10378440" cy="713232"/>
+          </a:xfrm>
+          <a:prstGeom prst="rect">
+            <a:avLst/>
+          </a:prstGeom>
+          <a:solidFill>
+            <a:srgbClr val="FFFFFF"/>
+          </a:solidFill>
+          <a:ln w="11430">
+            <a:solidFill>
+              <a:srgbClr val="CBD5E1"/>
+            </a:solidFill>
+          </a:ln>
+        </p:spPr>
+        <p:style>
+          <a:lnRef idx="1">
+            <a:schemeClr val="accent1"/>
+          </a:lnRef>
+          <a:fillRef idx="3">
+            <a:schemeClr val="accent1"/>
+          </a:fillRef>
+          <a:effectRef idx="2">
+            <a:schemeClr val="accent1"/>
+          </a:effectRef>
+          <a:fontRef idx="minor">
+            <a:schemeClr val="lt1"/>
+          </a:fontRef>
+        </p:style>
+        <p:txBody>
+          <a:bodyPr rtlCol="0" anchor="ctr"/>
+          <a:lstStyle/>
+          <a:p>
             <a:pPr algn="ctr"/>
-            <a:r>
-              <a:rPr sz="1000" b="1">
+          </a:p>
+        </p:txBody>
+      </p:sp>
+      <p:sp>
+        <p:nvSpPr>
+          <p:cNvPr id="17" name="Rectangle 16"/>
+          <p:cNvSpPr/>
+          <p:nvPr/>
+        </p:nvSpPr>
+        <p:spPr>
+          <a:xfrm>
+            <a:off x="868680" y="4672584"/>
+            <a:ext cx="530352" cy="713232"/>
+          </a:xfrm>
+          <a:prstGeom prst="rect">
+            <a:avLst/>
+          </a:prstGeom>
+          <a:solidFill>
+            <a:srgbClr val="7C3AED"/>
+          </a:solidFill>
+          <a:ln>
+            <a:noFill/>
+          </a:ln>
+        </p:spPr>
+        <p:style>
+          <a:lnRef idx="1">
+            <a:schemeClr val="accent1"/>
+          </a:lnRef>
+          <a:fillRef idx="3">
+            <a:schemeClr val="accent1"/>
+          </a:fillRef>
+          <a:effectRef idx="2">
+            <a:schemeClr val="accent1"/>
+          </a:effectRef>
+          <a:fontRef idx="minor">
+            <a:schemeClr val="lt1"/>
+          </a:fontRef>
+        </p:style>
+        <p:txBody>
+          <a:bodyPr rtlCol="0" anchor="ctr" wrap="square" lIns="101600" rIns="101600" tIns="38100" bIns="38100"/>
+          <a:lstStyle/>
+          <a:p>
+            <a:pPr algn="ctr"/>
+            <a:r>
+              <a:rPr sz="1500" b="1">
                 <a:solidFill>
                   <a:srgbClr val="FFFFFF"/>
                 </a:solidFill>
+                <a:latin typeface="Arial"/>
               </a:rPr>
-              <a:t>2</a:t>
-            </a:r>
-          </a:p>
-        </p:txBody>
-      </p:sp>
-      <p:sp>
-        <p:nvSpPr>
-          <p:cNvPr id="16" name="TextBox 15"/>
+              <a:t>3</a:t>
+            </a:r>
+          </a:p>
+        </p:txBody>
+      </p:sp>
+      <p:sp>
+        <p:nvSpPr>
+          <p:cNvPr id="18" name="TextBox 17"/>
           <p:cNvSpPr txBox="1"/>
           <p:nvPr/>
         </p:nvSpPr>
         <p:spPr>
           <a:xfrm>
-            <a:off x="1783080" y="4297680"/>
-            <a:ext cx="9006840" cy="347472"/>
+            <a:off x="1572768" y="4818888"/>
+            <a:ext cx="9372600" cy="384048"/>
           </a:xfrm>
           <a:prstGeom prst="rect">
             <a:avLst/>
@@ -4786,32 +5174,130 @@
           <a:noFill/>
         </p:spPr>
         <p:txBody>
-          <a:bodyPr wrap="square">
+          <a:bodyPr wrap="square" lIns="0" rIns="0" tIns="0" bIns="0">
             <a:spAutoFit/>
           </a:bodyPr>
           <a:lstStyle/>
           <a:p>
             <a:r>
-              <a:rPr sz="1700" b="0">
-                <a:solidFill>
-                  <a:srgbClr val="1A202C"/>
-                </a:solidFill>
+              <a:rPr sz="1500" b="0">
+                <a:solidFill>
+                  <a:srgbClr val="111827"/>
+                </a:solidFill>
+                <a:latin typeface="Arial"/>
               </a:rPr>
-              <a:t>Share: connect your answer to Looking Back at Term 1.</a:t>
-            </a:r>
-          </a:p>
-        </p:txBody>
-      </p:sp>
-      <p:sp>
-        <p:nvSpPr>
-          <p:cNvPr id="17" name="TextBox 16"/>
+              <a:t>Write one clear response.</a:t>
+            </a:r>
+          </a:p>
+        </p:txBody>
+      </p:sp>
+      <p:sp>
+        <p:nvSpPr>
+          <p:cNvPr id="19" name="Rectangle 18"/>
+          <p:cNvSpPr/>
+          <p:nvPr/>
+        </p:nvSpPr>
+        <p:spPr>
+          <a:xfrm>
+            <a:off x="868680" y="5522976"/>
+            <a:ext cx="10378440" cy="713232"/>
+          </a:xfrm>
+          <a:prstGeom prst="rect">
+            <a:avLst/>
+          </a:prstGeom>
+          <a:solidFill>
+            <a:srgbClr val="FFFFFF"/>
+          </a:solidFill>
+          <a:ln w="11430">
+            <a:solidFill>
+              <a:srgbClr val="CBD5E1"/>
+            </a:solidFill>
+          </a:ln>
+        </p:spPr>
+        <p:style>
+          <a:lnRef idx="1">
+            <a:schemeClr val="accent1"/>
+          </a:lnRef>
+          <a:fillRef idx="3">
+            <a:schemeClr val="accent1"/>
+          </a:fillRef>
+          <a:effectRef idx="2">
+            <a:schemeClr val="accent1"/>
+          </a:effectRef>
+          <a:fontRef idx="minor">
+            <a:schemeClr val="lt1"/>
+          </a:fontRef>
+        </p:style>
+        <p:txBody>
+          <a:bodyPr rtlCol="0" anchor="ctr"/>
+          <a:lstStyle/>
+          <a:p>
+            <a:pPr algn="ctr"/>
+          </a:p>
+        </p:txBody>
+      </p:sp>
+      <p:sp>
+        <p:nvSpPr>
+          <p:cNvPr id="20" name="Rectangle 19"/>
+          <p:cNvSpPr/>
+          <p:nvPr/>
+        </p:nvSpPr>
+        <p:spPr>
+          <a:xfrm>
+            <a:off x="868680" y="5522976"/>
+            <a:ext cx="530352" cy="713232"/>
+          </a:xfrm>
+          <a:prstGeom prst="rect">
+            <a:avLst/>
+          </a:prstGeom>
+          <a:solidFill>
+            <a:srgbClr val="7C3AED"/>
+          </a:solidFill>
+          <a:ln>
+            <a:noFill/>
+          </a:ln>
+        </p:spPr>
+        <p:style>
+          <a:lnRef idx="1">
+            <a:schemeClr val="accent1"/>
+          </a:lnRef>
+          <a:fillRef idx="3">
+            <a:schemeClr val="accent1"/>
+          </a:fillRef>
+          <a:effectRef idx="2">
+            <a:schemeClr val="accent1"/>
+          </a:effectRef>
+          <a:fontRef idx="minor">
+            <a:schemeClr val="lt1"/>
+          </a:fontRef>
+        </p:style>
+        <p:txBody>
+          <a:bodyPr rtlCol="0" anchor="ctr" wrap="square" lIns="101600" rIns="101600" tIns="38100" bIns="38100"/>
+          <a:lstStyle/>
+          <a:p>
+            <a:pPr algn="ctr"/>
+            <a:r>
+              <a:rPr sz="1500" b="1">
+                <a:solidFill>
+                  <a:srgbClr val="FFFFFF"/>
+                </a:solidFill>
+                <a:latin typeface="Arial"/>
+              </a:rPr>
+              <a:t>4</a:t>
+            </a:r>
+          </a:p>
+        </p:txBody>
+      </p:sp>
+      <p:sp>
+        <p:nvSpPr>
+          <p:cNvPr id="21" name="TextBox 20"/>
           <p:cNvSpPr txBox="1"/>
           <p:nvPr/>
         </p:nvSpPr>
         <p:spPr>
           <a:xfrm>
-            <a:off x="777240" y="6419088"/>
-            <a:ext cx="10835640" cy="228600"/>
+            <a:off x="1572768" y="5669280"/>
+            <a:ext cx="9372600" cy="384048"/>
           </a:xfrm>
           <a:prstGeom prst="rect">
             <a:avLst/>
@@ -4819,17 +5305,52 @@
           <a:noFill/>
         </p:spPr>
         <p:txBody>
-          <a:bodyPr wrap="square">
+          <a:bodyPr wrap="square" lIns="0" rIns="0" tIns="0" bIns="0">
             <a:spAutoFit/>
           </a:bodyPr>
           <a:lstStyle/>
           <a:p>
+            <a:r>
+              <a:rPr sz="1500" b="0">
+                <a:solidFill>
+                  <a:srgbClr val="111827"/>
+                </a:solidFill>
+                <a:latin typeface="Arial"/>
+              </a:rPr>
+              <a:t>Write one clear response.</a:t>
+            </a:r>
+          </a:p>
+        </p:txBody>
+      </p:sp>
+      <p:sp>
+        <p:nvSpPr>
+          <p:cNvPr id="22" name="TextBox 21"/>
+          <p:cNvSpPr txBox="1"/>
+          <p:nvPr/>
+        </p:nvSpPr>
+        <p:spPr>
+          <a:xfrm>
+            <a:off x="685800" y="6419088"/>
+            <a:ext cx="10835640" cy="228600"/>
+          </a:xfrm>
+          <a:prstGeom prst="rect">
+            <a:avLst/>
+          </a:prstGeom>
+          <a:noFill/>
+        </p:spPr>
+        <p:txBody>
+          <a:bodyPr wrap="square" lIns="0" rIns="0" tIns="0" bIns="0">
+            <a:spAutoFit/>
+          </a:bodyPr>
+          <a:lstStyle/>
+          <a:p>
             <a:pPr algn="r"/>
             <a:r>
               <a:rPr sz="1000" b="0">
                 <a:solidFill>
-                  <a:srgbClr val="5B677D"/>
-                </a:solidFill>
+                  <a:srgbClr val="475569"/>
+                </a:solidFill>
+                <a:latin typeface="Arial"/>
               </a:rPr>
               <a:t>Listen • Talk • Try • Explain</a:t>
             </a:r>
@@ -4847,6 +5368,14 @@
 <file path=ppt/slides/slide4.xml><?xml version="1.0" encoding="utf-8"?>
 <p:sld xmlns:a="http://schemas.openxmlformats.org/drawingml/2006/main" xmlns:p="http://schemas.openxmlformats.org/presentationml/2006/main" xmlns:r="http://schemas.openxmlformats.org/officeDocument/2006/relationships">
   <p:cSld>
+    <p:bg>
+      <p:bgPr>
+        <a:solidFill>
+          <a:srgbClr val="F8FAFC"/>
+        </a:solidFill>
+        <a:effectLst/>
+      </p:bgPr>
+    </p:bg>
     <p:spTree>
       <p:nvGrpSpPr>
         <p:cNvPr id="1" name=""/>
@@ -4863,13 +5392,13 @@
         <p:spPr>
           <a:xfrm>
             <a:off x="0" y="0"/>
-            <a:ext cx="12191695" cy="914400"/>
-          </a:xfrm>
-          <a:prstGeom prst="rect">
-            <a:avLst/>
-          </a:prstGeom>
-          <a:solidFill>
-            <a:srgbClr val="0E7490"/>
+            <a:ext cx="12191695" cy="713232"/>
+          </a:xfrm>
+          <a:prstGeom prst="rect">
+            <a:avLst/>
+          </a:prstGeom>
+          <a:solidFill>
+            <a:srgbClr val="111827"/>
           </a:solidFill>
           <a:ln>
             <a:noFill/>
@@ -4905,14 +5434,14 @@
         </p:nvSpPr>
         <p:spPr>
           <a:xfrm>
-            <a:off x="0" y="914400"/>
-            <a:ext cx="164592" cy="5943600"/>
-          </a:xfrm>
-          <a:prstGeom prst="rect">
-            <a:avLst/>
-          </a:prstGeom>
-          <a:solidFill>
-            <a:srgbClr val="0E7490"/>
+            <a:off x="0" y="713232"/>
+            <a:ext cx="12191695" cy="82296"/>
+          </a:xfrm>
+          <a:prstGeom prst="rect">
+            <a:avLst/>
+          </a:prstGeom>
+          <a:solidFill>
+            <a:srgbClr val="FCD116"/>
           </a:solidFill>
           <a:ln>
             <a:noFill/>
@@ -4942,125 +5471,23 @@
       </p:sp>
       <p:sp>
         <p:nvSpPr>
-          <p:cNvPr id="4" name="TextBox 3"/>
-          <p:cNvSpPr txBox="1"/>
-          <p:nvPr/>
-        </p:nvSpPr>
-        <p:spPr>
-          <a:xfrm>
-            <a:off x="594360" y="246888"/>
-            <a:ext cx="2926080" cy="320040"/>
-          </a:xfrm>
-          <a:prstGeom prst="rect">
-            <a:avLst/>
-          </a:prstGeom>
-          <a:noFill/>
-        </p:spPr>
-        <p:txBody>
-          <a:bodyPr wrap="square">
-            <a:spAutoFit/>
-          </a:bodyPr>
-          <a:lstStyle/>
-          <a:p>
-            <a:r>
-              <a:rPr sz="1300" b="1">
-                <a:solidFill>
-                  <a:srgbClr val="FFFFFF"/>
-                </a:solidFill>
-              </a:rPr>
-              <a:t>4. CONCEPT</a:t>
-            </a:r>
-          </a:p>
-        </p:txBody>
-      </p:sp>
-      <p:sp>
-        <p:nvSpPr>
-          <p:cNvPr id="5" name="TextBox 4"/>
-          <p:cNvSpPr txBox="1"/>
-          <p:nvPr/>
-        </p:nvSpPr>
-        <p:spPr>
-          <a:xfrm>
-            <a:off x="7772400" y="246888"/>
-            <a:ext cx="3840480" cy="320040"/>
-          </a:xfrm>
-          <a:prstGeom prst="rect">
-            <a:avLst/>
-          </a:prstGeom>
-          <a:noFill/>
-        </p:spPr>
-        <p:txBody>
-          <a:bodyPr wrap="square">
-            <a:spAutoFit/>
-          </a:bodyPr>
-          <a:lstStyle/>
-          <a:p>
-            <a:pPr algn="r"/>
-            <a:r>
-              <a:rPr sz="1100" b="0">
-                <a:solidFill>
-                  <a:srgbClr val="FFFFFF"/>
-                </a:solidFill>
-              </a:rPr>
-              <a:t>p7_t1_english_1205</a:t>
-            </a:r>
-          </a:p>
-        </p:txBody>
-      </p:sp>
-      <p:sp>
-        <p:nvSpPr>
-          <p:cNvPr id="6" name="TextBox 5"/>
-          <p:cNvSpPr txBox="1"/>
-          <p:nvPr/>
-        </p:nvSpPr>
-        <p:spPr>
-          <a:xfrm>
-            <a:off x="640080" y="1143000"/>
-            <a:ext cx="10972800" cy="685800"/>
-          </a:xfrm>
-          <a:prstGeom prst="rect">
-            <a:avLst/>
-          </a:prstGeom>
-          <a:noFill/>
-        </p:spPr>
-        <p:txBody>
-          <a:bodyPr wrap="square">
-            <a:spAutoFit/>
-          </a:bodyPr>
-          <a:lstStyle/>
-          <a:p>
-            <a:r>
-              <a:rPr sz="2800" b="1">
-                <a:solidFill>
-                  <a:srgbClr val="1A202C"/>
-                </a:solidFill>
-              </a:rPr>
-              <a:t>Looking Back at Term 1</a:t>
-            </a:r>
-          </a:p>
-        </p:txBody>
-      </p:sp>
-      <p:sp>
-        <p:nvSpPr>
-          <p:cNvPr id="7" name="Rounded Rectangle 6"/>
+          <p:cNvPr id="4" name="Rectangle 3"/>
           <p:cNvSpPr/>
           <p:nvPr/>
         </p:nvSpPr>
         <p:spPr>
           <a:xfrm>
-            <a:off x="777240" y="1993392"/>
-            <a:ext cx="10835640" cy="1005840"/>
-          </a:xfrm>
-          <a:prstGeom prst="roundRect">
-            <a:avLst/>
-          </a:prstGeom>
-          <a:solidFill>
-            <a:srgbClr val="FFFBEB"/>
-          </a:solidFill>
-          <a:ln w="15240">
-            <a:solidFill>
-              <a:srgbClr val="0E7490"/>
-            </a:solidFill>
+            <a:off x="0" y="795528"/>
+            <a:ext cx="12191695" cy="64008"/>
+          </a:xfrm>
+          <a:prstGeom prst="rect">
+            <a:avLst/>
+          </a:prstGeom>
+          <a:solidFill>
+            <a:srgbClr val="D90000"/>
+          </a:solidFill>
+          <a:ln>
+            <a:noFill/>
           </a:ln>
         </p:spPr>
         <p:style>
@@ -5087,58 +5514,23 @@
       </p:sp>
       <p:sp>
         <p:nvSpPr>
-          <p:cNvPr id="8" name="TextBox 7"/>
-          <p:cNvSpPr txBox="1"/>
-          <p:nvPr/>
-        </p:nvSpPr>
-        <p:spPr>
-          <a:xfrm>
-            <a:off x="1051560" y="2212848"/>
-            <a:ext cx="10287000" cy="502920"/>
-          </a:xfrm>
-          <a:prstGeom prst="rect">
-            <a:avLst/>
-          </a:prstGeom>
-          <a:noFill/>
-        </p:spPr>
-        <p:txBody>
-          <a:bodyPr wrap="square">
-            <a:spAutoFit/>
-          </a:bodyPr>
-          <a:lstStyle/>
-          <a:p>
-            <a:r>
-              <a:rPr sz="2100" b="1">
-                <a:solidFill>
-                  <a:srgbClr val="1A202C"/>
-                </a:solidFill>
-              </a:rPr>
-              <a:t>Key idea: Oral reflection on the three main topics of Term 1: School Holidays, Letter</a:t>
-            </a:r>
-          </a:p>
-        </p:txBody>
-      </p:sp>
-      <p:sp>
-        <p:nvSpPr>
-          <p:cNvPr id="9" name="Rounded Rectangle 8"/>
+          <p:cNvPr id="5" name="Rectangle 4"/>
           <p:cNvSpPr/>
           <p:nvPr/>
         </p:nvSpPr>
         <p:spPr>
           <a:xfrm>
-            <a:off x="1005840" y="3246120"/>
-            <a:ext cx="10149840" cy="621792"/>
-          </a:xfrm>
-          <a:prstGeom prst="roundRect">
-            <a:avLst/>
-          </a:prstGeom>
-          <a:solidFill>
-            <a:srgbClr val="F8FAFC"/>
-          </a:solidFill>
-          <a:ln w="15240">
-            <a:solidFill>
-              <a:srgbClr val="CBD5E1"/>
-            </a:solidFill>
+            <a:off x="0" y="859536"/>
+            <a:ext cx="164592" cy="5998464"/>
+          </a:xfrm>
+          <a:prstGeom prst="rect">
+            <a:avLst/>
+          </a:prstGeom>
+          <a:solidFill>
+            <a:srgbClr val="087490"/>
+          </a:solidFill>
+          <a:ln>
+            <a:noFill/>
           </a:ln>
         </p:spPr>
         <p:style>
@@ -5165,23 +5557,128 @@
       </p:sp>
       <p:sp>
         <p:nvSpPr>
-          <p:cNvPr id="10" name="Oval 9"/>
+          <p:cNvPr id="6" name="TextBox 5"/>
+          <p:cNvSpPr txBox="1"/>
+          <p:nvPr/>
+        </p:nvSpPr>
+        <p:spPr>
+          <a:xfrm>
+            <a:off x="502920" y="210312"/>
+            <a:ext cx="3200400" cy="256032"/>
+          </a:xfrm>
+          <a:prstGeom prst="rect">
+            <a:avLst/>
+          </a:prstGeom>
+          <a:noFill/>
+        </p:spPr>
+        <p:txBody>
+          <a:bodyPr wrap="square" lIns="0" rIns="0" tIns="0" bIns="0">
+            <a:spAutoFit/>
+          </a:bodyPr>
+          <a:lstStyle/>
+          <a:p>
+            <a:r>
+              <a:rPr sz="1200" b="1">
+                <a:solidFill>
+                  <a:srgbClr val="FFFFFF"/>
+                </a:solidFill>
+                <a:latin typeface="Arial"/>
+              </a:rPr>
+              <a:t>4. CONCEPT</a:t>
+            </a:r>
+          </a:p>
+        </p:txBody>
+      </p:sp>
+      <p:sp>
+        <p:nvSpPr>
+          <p:cNvPr id="7" name="TextBox 6"/>
+          <p:cNvSpPr txBox="1"/>
+          <p:nvPr/>
+        </p:nvSpPr>
+        <p:spPr>
+          <a:xfrm>
+            <a:off x="7589520" y="210312"/>
+            <a:ext cx="4069080" cy="256032"/>
+          </a:xfrm>
+          <a:prstGeom prst="rect">
+            <a:avLst/>
+          </a:prstGeom>
+          <a:noFill/>
+        </p:spPr>
+        <p:txBody>
+          <a:bodyPr wrap="square" lIns="0" rIns="0" tIns="0" bIns="0">
+            <a:spAutoFit/>
+          </a:bodyPr>
+          <a:lstStyle/>
+          <a:p>
+            <a:pPr algn="r"/>
+            <a:r>
+              <a:rPr sz="1000" b="0">
+                <a:solidFill>
+                  <a:srgbClr val="FFFFFF"/>
+                </a:solidFill>
+                <a:latin typeface="Arial"/>
+              </a:rPr>
+              <a:t>p7_t1_english_1205</a:t>
+            </a:r>
+          </a:p>
+        </p:txBody>
+      </p:sp>
+      <p:sp>
+        <p:nvSpPr>
+          <p:cNvPr id="8" name="TextBox 7"/>
+          <p:cNvSpPr txBox="1"/>
+          <p:nvPr/>
+        </p:nvSpPr>
+        <p:spPr>
+          <a:xfrm>
+            <a:off x="594360" y="1042415"/>
+            <a:ext cx="11109960" cy="566928"/>
+          </a:xfrm>
+          <a:prstGeom prst="rect">
+            <a:avLst/>
+          </a:prstGeom>
+          <a:noFill/>
+        </p:spPr>
+        <p:txBody>
+          <a:bodyPr wrap="square" lIns="0" rIns="0" tIns="0" bIns="0">
+            <a:spAutoFit/>
+          </a:bodyPr>
+          <a:lstStyle/>
+          <a:p>
+            <a:r>
+              <a:rPr sz="2600" b="1">
+                <a:solidFill>
+                  <a:srgbClr val="111827"/>
+                </a:solidFill>
+                <a:latin typeface="Arial"/>
+              </a:rPr>
+              <a:t>Looking Back at Term 1</a:t>
+            </a:r>
+          </a:p>
+        </p:txBody>
+      </p:sp>
+      <p:sp>
+        <p:nvSpPr>
+          <p:cNvPr id="9" name="Rectangle 8"/>
           <p:cNvSpPr/>
           <p:nvPr/>
         </p:nvSpPr>
         <p:spPr>
           <a:xfrm>
-            <a:off x="1234440" y="3364991"/>
-            <a:ext cx="347472" cy="347472"/>
-          </a:xfrm>
-          <a:prstGeom prst="ellipse">
-            <a:avLst/>
-          </a:prstGeom>
-          <a:solidFill>
-            <a:srgbClr val="0E7490"/>
-          </a:solidFill>
-          <a:ln>
-            <a:noFill/>
+            <a:off x="685800" y="1874519"/>
+            <a:ext cx="10835640" cy="804672"/>
+          </a:xfrm>
+          <a:prstGeom prst="rect">
+            <a:avLst/>
+          </a:prstGeom>
+          <a:solidFill>
+            <a:srgbClr val="FFF7E0"/>
+          </a:solidFill>
+          <a:ln w="17780">
+            <a:solidFill>
+              <a:srgbClr val="087490"/>
+            </a:solidFill>
           </a:ln>
         </p:spPr>
         <p:style>
@@ -5199,98 +5696,40 @@
           </a:fontRef>
         </p:style>
         <p:txBody>
-          <a:bodyPr rtlCol="0" anchor="ctr"/>
+          <a:bodyPr rtlCol="0" anchor="ctr" wrap="square" lIns="101600" rIns="101600" tIns="38100" bIns="38100"/>
           <a:lstStyle/>
           <a:p>
             <a:pPr algn="ctr"/>
-          </a:p>
-        </p:txBody>
-      </p:sp>
-      <p:sp>
-        <p:nvSpPr>
-          <p:cNvPr id="11" name="TextBox 10"/>
-          <p:cNvSpPr txBox="1"/>
-          <p:nvPr/>
-        </p:nvSpPr>
-        <p:spPr>
-          <a:xfrm>
-            <a:off x="1234440" y="3410712"/>
-            <a:ext cx="347472" cy="182880"/>
-          </a:xfrm>
-          <a:prstGeom prst="rect">
-            <a:avLst/>
-          </a:prstGeom>
-          <a:noFill/>
-        </p:spPr>
-        <p:txBody>
-          <a:bodyPr wrap="square">
-            <a:spAutoFit/>
-          </a:bodyPr>
-          <a:lstStyle/>
-          <a:p>
-            <a:pPr algn="ctr"/>
-            <a:r>
-              <a:rPr sz="1000" b="1">
-                <a:solidFill>
-                  <a:srgbClr val="FFFFFF"/>
-                </a:solidFill>
+            <a:r>
+              <a:rPr sz="1900" b="1">
+                <a:solidFill>
+                  <a:srgbClr val="111827"/>
+                </a:solidFill>
+                <a:latin typeface="Arial"/>
               </a:rPr>
-              <a:t>1</a:t>
-            </a:r>
-          </a:p>
-        </p:txBody>
-      </p:sp>
-      <p:sp>
-        <p:nvSpPr>
-          <p:cNvPr id="12" name="TextBox 11"/>
-          <p:cNvSpPr txBox="1"/>
-          <p:nvPr/>
-        </p:nvSpPr>
-        <p:spPr>
-          <a:xfrm>
-            <a:off x="1783080" y="3364991"/>
-            <a:ext cx="9006840" cy="347472"/>
-          </a:xfrm>
-          <a:prstGeom prst="rect">
-            <a:avLst/>
-          </a:prstGeom>
-          <a:noFill/>
-        </p:spPr>
-        <p:txBody>
-          <a:bodyPr wrap="square">
-            <a:spAutoFit/>
-          </a:bodyPr>
-          <a:lstStyle/>
-          <a:p>
-            <a:r>
-              <a:rPr sz="1700" b="0">
-                <a:solidFill>
-                  <a:srgbClr val="1A202C"/>
-                </a:solidFill>
-              </a:rPr>
-              <a:t>Writing, and Examinations.</a:t>
-            </a:r>
-          </a:p>
-        </p:txBody>
-      </p:sp>
-      <p:sp>
-        <p:nvSpPr>
-          <p:cNvPr id="13" name="Rounded Rectangle 12"/>
+              <a:t>Key idea: Oral reflection on the three main topics of Term 1: Sch...</a:t>
+            </a:r>
+          </a:p>
+        </p:txBody>
+      </p:sp>
+      <p:sp>
+        <p:nvSpPr>
+          <p:cNvPr id="10" name="Rectangle 9"/>
           <p:cNvSpPr/>
           <p:nvPr/>
         </p:nvSpPr>
         <p:spPr>
           <a:xfrm>
-            <a:off x="1005840" y="4069080"/>
-            <a:ext cx="10149840" cy="621792"/>
-          </a:xfrm>
-          <a:prstGeom prst="roundRect">
-            <a:avLst/>
-          </a:prstGeom>
-          <a:solidFill>
-            <a:srgbClr val="F8FAFC"/>
-          </a:solidFill>
-          <a:ln w="15240">
+            <a:off x="868680" y="2971800"/>
+            <a:ext cx="10378440" cy="713232"/>
+          </a:xfrm>
+          <a:prstGeom prst="rect">
+            <a:avLst/>
+          </a:prstGeom>
+          <a:solidFill>
+            <a:srgbClr val="FFFFFF"/>
+          </a:solidFill>
+          <a:ln w="11430">
             <a:solidFill>
               <a:srgbClr val="CBD5E1"/>
             </a:solidFill>
@@ -5320,20 +5759,20 @@
       </p:sp>
       <p:sp>
         <p:nvSpPr>
-          <p:cNvPr id="14" name="Oval 13"/>
+          <p:cNvPr id="11" name="Rectangle 10"/>
           <p:cNvSpPr/>
           <p:nvPr/>
         </p:nvSpPr>
         <p:spPr>
           <a:xfrm>
-            <a:off x="1234440" y="4187952"/>
-            <a:ext cx="347472" cy="347472"/>
-          </a:xfrm>
-          <a:prstGeom prst="ellipse">
-            <a:avLst/>
-          </a:prstGeom>
-          <a:solidFill>
-            <a:srgbClr val="0E7490"/>
+            <a:off x="868680" y="2971800"/>
+            <a:ext cx="530352" cy="713232"/>
+          </a:xfrm>
+          <a:prstGeom prst="rect">
+            <a:avLst/>
+          </a:prstGeom>
+          <a:solidFill>
+            <a:srgbClr val="087490"/>
           </a:solidFill>
           <a:ln>
             <a:noFill/>
@@ -5354,23 +5793,32 @@
           </a:fontRef>
         </p:style>
         <p:txBody>
-          <a:bodyPr rtlCol="0" anchor="ctr"/>
+          <a:bodyPr rtlCol="0" anchor="ctr" wrap="square" lIns="101600" rIns="101600" tIns="38100" bIns="38100"/>
           <a:lstStyle/>
           <a:p>
             <a:pPr algn="ctr"/>
-          </a:p>
-        </p:txBody>
-      </p:sp>
-      <p:sp>
-        <p:nvSpPr>
-          <p:cNvPr id="15" name="TextBox 14"/>
+            <a:r>
+              <a:rPr sz="1500" b="1">
+                <a:solidFill>
+                  <a:srgbClr val="FFFFFF"/>
+                </a:solidFill>
+                <a:latin typeface="Arial"/>
+              </a:rPr>
+              <a:t>1</a:t>
+            </a:r>
+          </a:p>
+        </p:txBody>
+      </p:sp>
+      <p:sp>
+        <p:nvSpPr>
+          <p:cNvPr id="12" name="TextBox 11"/>
           <p:cNvSpPr txBox="1"/>
           <p:nvPr/>
         </p:nvSpPr>
         <p:spPr>
           <a:xfrm>
-            <a:off x="1234440" y="4233672"/>
-            <a:ext cx="347472" cy="182880"/>
+            <a:off x="1572768" y="3118104"/>
+            <a:ext cx="9372600" cy="384048"/>
           </a:xfrm>
           <a:prstGeom prst="rect">
             <a:avLst/>
@@ -5378,50 +5826,17 @@
           <a:noFill/>
         </p:spPr>
         <p:txBody>
-          <a:bodyPr wrap="square">
+          <a:bodyPr wrap="square" lIns="0" rIns="0" tIns="0" bIns="0">
             <a:spAutoFit/>
           </a:bodyPr>
           <a:lstStyle/>
           <a:p>
-            <a:pPr algn="ctr"/>
-            <a:r>
-              <a:rPr sz="1000" b="1">
-                <a:solidFill>
-                  <a:srgbClr val="FFFFFF"/>
-                </a:solidFill>
-              </a:rPr>
-              <a:t>2</a:t>
-            </a:r>
-          </a:p>
-        </p:txBody>
-      </p:sp>
-      <p:sp>
-        <p:nvSpPr>
-          <p:cNvPr id="16" name="TextBox 15"/>
-          <p:cNvSpPr txBox="1"/>
-          <p:nvPr/>
-        </p:nvSpPr>
-        <p:spPr>
-          <a:xfrm>
-            <a:off x="1783080" y="4187952"/>
-            <a:ext cx="9006840" cy="347472"/>
-          </a:xfrm>
-          <a:prstGeom prst="rect">
-            <a:avLst/>
-          </a:prstGeom>
-          <a:noFill/>
-        </p:spPr>
-        <p:txBody>
-          <a:bodyPr wrap="square">
-            <a:spAutoFit/>
-          </a:bodyPr>
-          <a:lstStyle/>
-          <a:p>
-            <a:r>
-              <a:rPr sz="1700" b="0">
-                <a:solidFill>
-                  <a:srgbClr val="1A202C"/>
-                </a:solidFill>
+            <a:r>
+              <a:rPr sz="1500" b="0">
+                <a:solidFill>
+                  <a:srgbClr val="111827"/>
+                </a:solidFill>
+                <a:latin typeface="Arial"/>
               </a:rPr>
               <a:t>Review the topics we covered</a:t>
             </a:r>
@@ -5430,22 +5845,22 @@
       </p:sp>
       <p:sp>
         <p:nvSpPr>
-          <p:cNvPr id="17" name="Rounded Rectangle 16"/>
+          <p:cNvPr id="13" name="Rectangle 12"/>
           <p:cNvSpPr/>
           <p:nvPr/>
         </p:nvSpPr>
         <p:spPr>
           <a:xfrm>
-            <a:off x="1005840" y="4892040"/>
-            <a:ext cx="10149840" cy="621792"/>
-          </a:xfrm>
-          <a:prstGeom prst="roundRect">
-            <a:avLst/>
-          </a:prstGeom>
-          <a:solidFill>
-            <a:srgbClr val="F8FAFC"/>
-          </a:solidFill>
-          <a:ln w="15240">
+            <a:off x="868680" y="3822191"/>
+            <a:ext cx="10378440" cy="713232"/>
+          </a:xfrm>
+          <a:prstGeom prst="rect">
+            <a:avLst/>
+          </a:prstGeom>
+          <a:solidFill>
+            <a:srgbClr val="FFFFFF"/>
+          </a:solidFill>
+          <a:ln w="11430">
             <a:solidFill>
               <a:srgbClr val="CBD5E1"/>
             </a:solidFill>
@@ -5475,20 +5890,20 @@
       </p:sp>
       <p:sp>
         <p:nvSpPr>
-          <p:cNvPr id="18" name="Oval 17"/>
+          <p:cNvPr id="14" name="Rectangle 13"/>
           <p:cNvSpPr/>
           <p:nvPr/>
         </p:nvSpPr>
         <p:spPr>
           <a:xfrm>
-            <a:off x="1234440" y="5010912"/>
-            <a:ext cx="347472" cy="347472"/>
-          </a:xfrm>
-          <a:prstGeom prst="ellipse">
-            <a:avLst/>
-          </a:prstGeom>
-          <a:solidFill>
-            <a:srgbClr val="0E7490"/>
+            <a:off x="868680" y="3822191"/>
+            <a:ext cx="530352" cy="713232"/>
+          </a:xfrm>
+          <a:prstGeom prst="rect">
+            <a:avLst/>
+          </a:prstGeom>
+          <a:solidFill>
+            <a:srgbClr val="087490"/>
           </a:solidFill>
           <a:ln>
             <a:noFill/>
@@ -5509,23 +5924,32 @@
           </a:fontRef>
         </p:style>
         <p:txBody>
-          <a:bodyPr rtlCol="0" anchor="ctr"/>
+          <a:bodyPr rtlCol="0" anchor="ctr" wrap="square" lIns="101600" rIns="101600" tIns="38100" bIns="38100"/>
           <a:lstStyle/>
           <a:p>
             <a:pPr algn="ctr"/>
-          </a:p>
-        </p:txBody>
-      </p:sp>
-      <p:sp>
-        <p:nvSpPr>
-          <p:cNvPr id="19" name="TextBox 18"/>
+            <a:r>
+              <a:rPr sz="1500" b="1">
+                <a:solidFill>
+                  <a:srgbClr val="FFFFFF"/>
+                </a:solidFill>
+                <a:latin typeface="Arial"/>
+              </a:rPr>
+              <a:t>2</a:t>
+            </a:r>
+          </a:p>
+        </p:txBody>
+      </p:sp>
+      <p:sp>
+        <p:nvSpPr>
+          <p:cNvPr id="15" name="TextBox 14"/>
           <p:cNvSpPr txBox="1"/>
           <p:nvPr/>
         </p:nvSpPr>
         <p:spPr>
           <a:xfrm>
-            <a:off x="1234440" y="5056632"/>
-            <a:ext cx="347472" cy="182880"/>
+            <a:off x="1572768" y="3968496"/>
+            <a:ext cx="9372600" cy="384048"/>
           </a:xfrm>
           <a:prstGeom prst="rect">
             <a:avLst/>
@@ -5533,50 +5957,17 @@
           <a:noFill/>
         </p:spPr>
         <p:txBody>
-          <a:bodyPr wrap="square">
+          <a:bodyPr wrap="square" lIns="0" rIns="0" tIns="0" bIns="0">
             <a:spAutoFit/>
           </a:bodyPr>
           <a:lstStyle/>
           <a:p>
-            <a:pPr algn="ctr"/>
-            <a:r>
-              <a:rPr sz="1000" b="1">
-                <a:solidFill>
-                  <a:srgbClr val="FFFFFF"/>
-                </a:solidFill>
-              </a:rPr>
-              <a:t>3</a:t>
-            </a:r>
-          </a:p>
-        </p:txBody>
-      </p:sp>
-      <p:sp>
-        <p:nvSpPr>
-          <p:cNvPr id="20" name="TextBox 19"/>
-          <p:cNvSpPr txBox="1"/>
-          <p:nvPr/>
-        </p:nvSpPr>
-        <p:spPr>
-          <a:xfrm>
-            <a:off x="1783080" y="5010912"/>
-            <a:ext cx="9006840" cy="347472"/>
-          </a:xfrm>
-          <a:prstGeom prst="rect">
-            <a:avLst/>
-          </a:prstGeom>
-          <a:noFill/>
-        </p:spPr>
-        <p:txBody>
-          <a:bodyPr wrap="square">
-            <a:spAutoFit/>
-          </a:bodyPr>
-          <a:lstStyle/>
-          <a:p>
-            <a:r>
-              <a:rPr sz="1700" b="0">
-                <a:solidFill>
-                  <a:srgbClr val="1A202C"/>
-                </a:solidFill>
+            <a:r>
+              <a:rPr sz="1500" b="0">
+                <a:solidFill>
+                  <a:srgbClr val="111827"/>
+                </a:solidFill>
+                <a:latin typeface="Arial"/>
               </a:rPr>
               <a:t>Share our favorite English activities</a:t>
             </a:r>
@@ -5585,22 +5976,22 @@
       </p:sp>
       <p:sp>
         <p:nvSpPr>
-          <p:cNvPr id="21" name="Rounded Rectangle 20"/>
+          <p:cNvPr id="16" name="Rectangle 15"/>
           <p:cNvSpPr/>
           <p:nvPr/>
         </p:nvSpPr>
         <p:spPr>
           <a:xfrm>
-            <a:off x="1005840" y="5715000"/>
-            <a:ext cx="10149840" cy="621792"/>
-          </a:xfrm>
-          <a:prstGeom prst="roundRect">
-            <a:avLst/>
-          </a:prstGeom>
-          <a:solidFill>
-            <a:srgbClr val="F8FAFC"/>
-          </a:solidFill>
-          <a:ln w="15240">
+            <a:off x="868680" y="4672584"/>
+            <a:ext cx="10378440" cy="713232"/>
+          </a:xfrm>
+          <a:prstGeom prst="rect">
+            <a:avLst/>
+          </a:prstGeom>
+          <a:solidFill>
+            <a:srgbClr val="FFFFFF"/>
+          </a:solidFill>
+          <a:ln w="11430">
             <a:solidFill>
               <a:srgbClr val="CBD5E1"/>
             </a:solidFill>
@@ -5630,20 +6021,20 @@
       </p:sp>
       <p:sp>
         <p:nvSpPr>
-          <p:cNvPr id="22" name="Oval 21"/>
+          <p:cNvPr id="17" name="Rectangle 16"/>
           <p:cNvSpPr/>
           <p:nvPr/>
         </p:nvSpPr>
         <p:spPr>
           <a:xfrm>
-            <a:off x="1234440" y="5833872"/>
-            <a:ext cx="347472" cy="347472"/>
-          </a:xfrm>
-          <a:prstGeom prst="ellipse">
-            <a:avLst/>
-          </a:prstGeom>
-          <a:solidFill>
-            <a:srgbClr val="0E7490"/>
+            <a:off x="868680" y="4672584"/>
+            <a:ext cx="530352" cy="713232"/>
+          </a:xfrm>
+          <a:prstGeom prst="rect">
+            <a:avLst/>
+          </a:prstGeom>
+          <a:solidFill>
+            <a:srgbClr val="087490"/>
           </a:solidFill>
           <a:ln>
             <a:noFill/>
@@ -5664,23 +6055,32 @@
           </a:fontRef>
         </p:style>
         <p:txBody>
-          <a:bodyPr rtlCol="0" anchor="ctr"/>
+          <a:bodyPr rtlCol="0" anchor="ctr" wrap="square" lIns="101600" rIns="101600" tIns="38100" bIns="38100"/>
           <a:lstStyle/>
           <a:p>
             <a:pPr algn="ctr"/>
-          </a:p>
-        </p:txBody>
-      </p:sp>
-      <p:sp>
-        <p:nvSpPr>
-          <p:cNvPr id="23" name="TextBox 22"/>
+            <a:r>
+              <a:rPr sz="1500" b="1">
+                <a:solidFill>
+                  <a:srgbClr val="FFFFFF"/>
+                </a:solidFill>
+                <a:latin typeface="Arial"/>
+              </a:rPr>
+              <a:t>3</a:t>
+            </a:r>
+          </a:p>
+        </p:txBody>
+      </p:sp>
+      <p:sp>
+        <p:nvSpPr>
+          <p:cNvPr id="18" name="TextBox 17"/>
           <p:cNvSpPr txBox="1"/>
           <p:nvPr/>
         </p:nvSpPr>
         <p:spPr>
           <a:xfrm>
-            <a:off x="1234440" y="5879592"/>
-            <a:ext cx="347472" cy="182880"/>
+            <a:off x="1572768" y="4818888"/>
+            <a:ext cx="9372600" cy="384048"/>
           </a:xfrm>
           <a:prstGeom prst="rect">
             <a:avLst/>
@@ -5688,17 +6088,114 @@
           <a:noFill/>
         </p:spPr>
         <p:txBody>
-          <a:bodyPr wrap="square">
+          <a:bodyPr wrap="square" lIns="0" rIns="0" tIns="0" bIns="0">
             <a:spAutoFit/>
           </a:bodyPr>
           <a:lstStyle/>
           <a:p>
+            <a:r>
+              <a:rPr sz="1500" b="0">
+                <a:solidFill>
+                  <a:srgbClr val="111827"/>
+                </a:solidFill>
+                <a:latin typeface="Arial"/>
+              </a:rPr>
+              <a:t>Discuss how our writing has improved</a:t>
+            </a:r>
+          </a:p>
+        </p:txBody>
+      </p:sp>
+      <p:sp>
+        <p:nvSpPr>
+          <p:cNvPr id="19" name="Rectangle 18"/>
+          <p:cNvSpPr/>
+          <p:nvPr/>
+        </p:nvSpPr>
+        <p:spPr>
+          <a:xfrm>
+            <a:off x="868680" y="5522976"/>
+            <a:ext cx="10378440" cy="713232"/>
+          </a:xfrm>
+          <a:prstGeom prst="rect">
+            <a:avLst/>
+          </a:prstGeom>
+          <a:solidFill>
+            <a:srgbClr val="FFFFFF"/>
+          </a:solidFill>
+          <a:ln w="11430">
+            <a:solidFill>
+              <a:srgbClr val="CBD5E1"/>
+            </a:solidFill>
+          </a:ln>
+        </p:spPr>
+        <p:style>
+          <a:lnRef idx="1">
+            <a:schemeClr val="accent1"/>
+          </a:lnRef>
+          <a:fillRef idx="3">
+            <a:schemeClr val="accent1"/>
+          </a:fillRef>
+          <a:effectRef idx="2">
+            <a:schemeClr val="accent1"/>
+          </a:effectRef>
+          <a:fontRef idx="minor">
+            <a:schemeClr val="lt1"/>
+          </a:fontRef>
+        </p:style>
+        <p:txBody>
+          <a:bodyPr rtlCol="0" anchor="ctr"/>
+          <a:lstStyle/>
+          <a:p>
             <a:pPr algn="ctr"/>
-            <a:r>
-              <a:rPr sz="1000" b="1">
+          </a:p>
+        </p:txBody>
+      </p:sp>
+      <p:sp>
+        <p:nvSpPr>
+          <p:cNvPr id="20" name="Rectangle 19"/>
+          <p:cNvSpPr/>
+          <p:nvPr/>
+        </p:nvSpPr>
+        <p:spPr>
+          <a:xfrm>
+            <a:off x="868680" y="5522976"/>
+            <a:ext cx="530352" cy="713232"/>
+          </a:xfrm>
+          <a:prstGeom prst="rect">
+            <a:avLst/>
+          </a:prstGeom>
+          <a:solidFill>
+            <a:srgbClr val="087490"/>
+          </a:solidFill>
+          <a:ln>
+            <a:noFill/>
+          </a:ln>
+        </p:spPr>
+        <p:style>
+          <a:lnRef idx="1">
+            <a:schemeClr val="accent1"/>
+          </a:lnRef>
+          <a:fillRef idx="3">
+            <a:schemeClr val="accent1"/>
+          </a:fillRef>
+          <a:effectRef idx="2">
+            <a:schemeClr val="accent1"/>
+          </a:effectRef>
+          <a:fontRef idx="minor">
+            <a:schemeClr val="lt1"/>
+          </a:fontRef>
+        </p:style>
+        <p:txBody>
+          <a:bodyPr rtlCol="0" anchor="ctr" wrap="square" lIns="101600" rIns="101600" tIns="38100" bIns="38100"/>
+          <a:lstStyle/>
+          <a:p>
+            <a:pPr algn="ctr"/>
+            <a:r>
+              <a:rPr sz="1500" b="1">
                 <a:solidFill>
                   <a:srgbClr val="FFFFFF"/>
                 </a:solidFill>
+                <a:latin typeface="Arial"/>
               </a:rPr>
               <a:t>4</a:t>
             </a:r>
@@ -5707,14 +6204,14 @@
       </p:sp>
       <p:sp>
         <p:nvSpPr>
-          <p:cNvPr id="24" name="TextBox 23"/>
+          <p:cNvPr id="21" name="TextBox 20"/>
           <p:cNvSpPr txBox="1"/>
           <p:nvPr/>
         </p:nvSpPr>
         <p:spPr>
           <a:xfrm>
-            <a:off x="1783080" y="5833872"/>
-            <a:ext cx="9006840" cy="347472"/>
+            <a:off x="1572768" y="5669280"/>
+            <a:ext cx="9372600" cy="384048"/>
           </a:xfrm>
           <a:prstGeom prst="rect">
             <a:avLst/>
@@ -5722,31 +6219,32 @@
           <a:noFill/>
         </p:spPr>
         <p:txBody>
-          <a:bodyPr wrap="square">
+          <a:bodyPr wrap="square" lIns="0" rIns="0" tIns="0" bIns="0">
             <a:spAutoFit/>
           </a:bodyPr>
           <a:lstStyle/>
           <a:p>
             <a:r>
-              <a:rPr sz="1700" b="0">
-                <a:solidFill>
-                  <a:srgbClr val="1A202C"/>
-                </a:solidFill>
+              <a:rPr sz="1500" b="0">
+                <a:solidFill>
+                  <a:srgbClr val="111827"/>
+                </a:solidFill>
+                <a:latin typeface="Arial"/>
               </a:rPr>
-              <a:t>Discuss how our writing has improved</a:t>
-            </a:r>
-          </a:p>
-        </p:txBody>
-      </p:sp>
-      <p:sp>
-        <p:nvSpPr>
-          <p:cNvPr id="25" name="TextBox 24"/>
+              <a:t>Write one clear response.</a:t>
+            </a:r>
+          </a:p>
+        </p:txBody>
+      </p:sp>
+      <p:sp>
+        <p:nvSpPr>
+          <p:cNvPr id="22" name="TextBox 21"/>
           <p:cNvSpPr txBox="1"/>
           <p:nvPr/>
         </p:nvSpPr>
         <p:spPr>
           <a:xfrm>
-            <a:off x="777240" y="6419088"/>
+            <a:off x="685800" y="6419088"/>
             <a:ext cx="10835640" cy="228600"/>
           </a:xfrm>
           <a:prstGeom prst="rect">
@@ -5755,7 +6253,7 @@
           <a:noFill/>
         </p:spPr>
         <p:txBody>
-          <a:bodyPr wrap="square">
+          <a:bodyPr wrap="square" lIns="0" rIns="0" tIns="0" bIns="0">
             <a:spAutoFit/>
           </a:bodyPr>
           <a:lstStyle/>
@@ -5764,8 +6262,9 @@
             <a:r>
               <a:rPr sz="1000" b="0">
                 <a:solidFill>
-                  <a:srgbClr val="5B677D"/>
-                </a:solidFill>
+                  <a:srgbClr val="475569"/>
+                </a:solidFill>
+                <a:latin typeface="Arial"/>
               </a:rPr>
               <a:t>Listen • Talk • Try • Explain</a:t>
             </a:r>
@@ -5783,6 +6282,14 @@
 <file path=ppt/slides/slide5.xml><?xml version="1.0" encoding="utf-8"?>
 <p:sld xmlns:a="http://schemas.openxmlformats.org/drawingml/2006/main" xmlns:p="http://schemas.openxmlformats.org/presentationml/2006/main" xmlns:r="http://schemas.openxmlformats.org/officeDocument/2006/relationships">
   <p:cSld>
+    <p:bg>
+      <p:bgPr>
+        <a:solidFill>
+          <a:srgbClr val="F8FAFC"/>
+        </a:solidFill>
+        <a:effectLst/>
+      </p:bgPr>
+    </p:bg>
     <p:spTree>
       <p:nvGrpSpPr>
         <p:cNvPr id="1" name=""/>
@@ -5799,13 +6306,13 @@
         <p:spPr>
           <a:xfrm>
             <a:off x="0" y="0"/>
-            <a:ext cx="12191695" cy="914400"/>
-          </a:xfrm>
-          <a:prstGeom prst="rect">
-            <a:avLst/>
-          </a:prstGeom>
-          <a:solidFill>
-            <a:srgbClr val="D97706"/>
+            <a:ext cx="12191695" cy="713232"/>
+          </a:xfrm>
+          <a:prstGeom prst="rect">
+            <a:avLst/>
+          </a:prstGeom>
+          <a:solidFill>
+            <a:srgbClr val="111827"/>
           </a:solidFill>
           <a:ln>
             <a:noFill/>
@@ -5841,14 +6348,14 @@
         </p:nvSpPr>
         <p:spPr>
           <a:xfrm>
-            <a:off x="0" y="914400"/>
-            <a:ext cx="164592" cy="5943600"/>
-          </a:xfrm>
-          <a:prstGeom prst="rect">
-            <a:avLst/>
-          </a:prstGeom>
-          <a:solidFill>
-            <a:srgbClr val="D97706"/>
+            <a:off x="0" y="713232"/>
+            <a:ext cx="12191695" cy="82296"/>
+          </a:xfrm>
+          <a:prstGeom prst="rect">
+            <a:avLst/>
+          </a:prstGeom>
+          <a:solidFill>
+            <a:srgbClr val="FCD116"/>
           </a:solidFill>
           <a:ln>
             <a:noFill/>
@@ -5878,125 +6385,23 @@
       </p:sp>
       <p:sp>
         <p:nvSpPr>
-          <p:cNvPr id="4" name="TextBox 3"/>
-          <p:cNvSpPr txBox="1"/>
-          <p:nvPr/>
-        </p:nvSpPr>
-        <p:spPr>
-          <a:xfrm>
-            <a:off x="594360" y="246888"/>
-            <a:ext cx="2926080" cy="320040"/>
-          </a:xfrm>
-          <a:prstGeom prst="rect">
-            <a:avLst/>
-          </a:prstGeom>
-          <a:noFill/>
-        </p:spPr>
-        <p:txBody>
-          <a:bodyPr wrap="square">
-            <a:spAutoFit/>
-          </a:bodyPr>
-          <a:lstStyle/>
-          <a:p>
-            <a:r>
-              <a:rPr sz="1300" b="1">
-                <a:solidFill>
-                  <a:srgbClr val="FFFFFF"/>
-                </a:solidFill>
-              </a:rPr>
-              <a:t>5. MODEL</a:t>
-            </a:r>
-          </a:p>
-        </p:txBody>
-      </p:sp>
-      <p:sp>
-        <p:nvSpPr>
-          <p:cNvPr id="5" name="TextBox 4"/>
-          <p:cNvSpPr txBox="1"/>
-          <p:nvPr/>
-        </p:nvSpPr>
-        <p:spPr>
-          <a:xfrm>
-            <a:off x="7772400" y="246888"/>
-            <a:ext cx="3840480" cy="320040"/>
-          </a:xfrm>
-          <a:prstGeom prst="rect">
-            <a:avLst/>
-          </a:prstGeom>
-          <a:noFill/>
-        </p:spPr>
-        <p:txBody>
-          <a:bodyPr wrap="square">
-            <a:spAutoFit/>
-          </a:bodyPr>
-          <a:lstStyle/>
-          <a:p>
-            <a:pPr algn="r"/>
-            <a:r>
-              <a:rPr sz="1100" b="0">
-                <a:solidFill>
-                  <a:srgbClr val="FFFFFF"/>
-                </a:solidFill>
-              </a:rPr>
-              <a:t>p7_t1_english_1205</a:t>
-            </a:r>
-          </a:p>
-        </p:txBody>
-      </p:sp>
-      <p:sp>
-        <p:nvSpPr>
-          <p:cNvPr id="6" name="TextBox 5"/>
-          <p:cNvSpPr txBox="1"/>
-          <p:nvPr/>
-        </p:nvSpPr>
-        <p:spPr>
-          <a:xfrm>
-            <a:off x="640080" y="1143000"/>
-            <a:ext cx="10972800" cy="685800"/>
-          </a:xfrm>
-          <a:prstGeom prst="rect">
-            <a:avLst/>
-          </a:prstGeom>
-          <a:noFill/>
-        </p:spPr>
-        <p:txBody>
-          <a:bodyPr wrap="square">
-            <a:spAutoFit/>
-          </a:bodyPr>
-          <a:lstStyle/>
-          <a:p>
-            <a:r>
-              <a:rPr sz="2800" b="1">
-                <a:solidFill>
-                  <a:srgbClr val="1A202C"/>
-                </a:solidFill>
-              </a:rPr>
-              <a:t>What is a Portfolio?</a:t>
-            </a:r>
-          </a:p>
-        </p:txBody>
-      </p:sp>
-      <p:sp>
-        <p:nvSpPr>
-          <p:cNvPr id="7" name="Rounded Rectangle 6"/>
+          <p:cNvPr id="4" name="Rectangle 3"/>
           <p:cNvSpPr/>
           <p:nvPr/>
         </p:nvSpPr>
         <p:spPr>
           <a:xfrm>
-            <a:off x="777240" y="1993392"/>
-            <a:ext cx="10835640" cy="1005840"/>
-          </a:xfrm>
-          <a:prstGeom prst="roundRect">
-            <a:avLst/>
-          </a:prstGeom>
-          <a:solidFill>
-            <a:srgbClr val="FFFBEB"/>
-          </a:solidFill>
-          <a:ln w="15240">
-            <a:solidFill>
-              <a:srgbClr val="D97706"/>
-            </a:solidFill>
+            <a:off x="0" y="795528"/>
+            <a:ext cx="12191695" cy="64008"/>
+          </a:xfrm>
+          <a:prstGeom prst="rect">
+            <a:avLst/>
+          </a:prstGeom>
+          <a:solidFill>
+            <a:srgbClr val="D90000"/>
+          </a:solidFill>
+          <a:ln>
+            <a:noFill/>
           </a:ln>
         </p:spPr>
         <p:style>
@@ -6023,58 +6428,23 @@
       </p:sp>
       <p:sp>
         <p:nvSpPr>
-          <p:cNvPr id="8" name="TextBox 7"/>
-          <p:cNvSpPr txBox="1"/>
-          <p:nvPr/>
-        </p:nvSpPr>
-        <p:spPr>
-          <a:xfrm>
-            <a:off x="1051560" y="2212848"/>
-            <a:ext cx="10287000" cy="502920"/>
-          </a:xfrm>
-          <a:prstGeom prst="rect">
-            <a:avLst/>
-          </a:prstGeom>
-          <a:noFill/>
-        </p:spPr>
-        <p:txBody>
-          <a:bodyPr wrap="square">
-            <a:spAutoFit/>
-          </a:bodyPr>
-          <a:lstStyle/>
-          <a:p>
-            <a:r>
-              <a:rPr sz="2100" b="1">
-                <a:solidFill>
-                  <a:srgbClr val="1A202C"/>
-                </a:solidFill>
-              </a:rPr>
-              <a:t>Model the example step by step.</a:t>
-            </a:r>
-          </a:p>
-        </p:txBody>
-      </p:sp>
-      <p:sp>
-        <p:nvSpPr>
-          <p:cNvPr id="9" name="Rounded Rectangle 8"/>
+          <p:cNvPr id="5" name="Rectangle 4"/>
           <p:cNvSpPr/>
           <p:nvPr/>
         </p:nvSpPr>
         <p:spPr>
           <a:xfrm>
-            <a:off x="1005840" y="3246120"/>
-            <a:ext cx="10149840" cy="731520"/>
-          </a:xfrm>
-          <a:prstGeom prst="roundRect">
-            <a:avLst/>
-          </a:prstGeom>
-          <a:solidFill>
-            <a:srgbClr val="F8FAFC"/>
-          </a:solidFill>
-          <a:ln w="15240">
-            <a:solidFill>
-              <a:srgbClr val="CBD5E1"/>
-            </a:solidFill>
+            <a:off x="0" y="859536"/>
+            <a:ext cx="164592" cy="5998464"/>
+          </a:xfrm>
+          <a:prstGeom prst="rect">
+            <a:avLst/>
+          </a:prstGeom>
+          <a:solidFill>
+            <a:srgbClr val="D97706"/>
+          </a:solidFill>
+          <a:ln>
+            <a:noFill/>
           </a:ln>
         </p:spPr>
         <p:style>
@@ -6101,23 +6471,128 @@
       </p:sp>
       <p:sp>
         <p:nvSpPr>
-          <p:cNvPr id="10" name="Oval 9"/>
+          <p:cNvPr id="6" name="TextBox 5"/>
+          <p:cNvSpPr txBox="1"/>
+          <p:nvPr/>
+        </p:nvSpPr>
+        <p:spPr>
+          <a:xfrm>
+            <a:off x="502920" y="210312"/>
+            <a:ext cx="3200400" cy="256032"/>
+          </a:xfrm>
+          <a:prstGeom prst="rect">
+            <a:avLst/>
+          </a:prstGeom>
+          <a:noFill/>
+        </p:spPr>
+        <p:txBody>
+          <a:bodyPr wrap="square" lIns="0" rIns="0" tIns="0" bIns="0">
+            <a:spAutoFit/>
+          </a:bodyPr>
+          <a:lstStyle/>
+          <a:p>
+            <a:r>
+              <a:rPr sz="1200" b="1">
+                <a:solidFill>
+                  <a:srgbClr val="FFFFFF"/>
+                </a:solidFill>
+                <a:latin typeface="Arial"/>
+              </a:rPr>
+              <a:t>5. MODEL</a:t>
+            </a:r>
+          </a:p>
+        </p:txBody>
+      </p:sp>
+      <p:sp>
+        <p:nvSpPr>
+          <p:cNvPr id="7" name="TextBox 6"/>
+          <p:cNvSpPr txBox="1"/>
+          <p:nvPr/>
+        </p:nvSpPr>
+        <p:spPr>
+          <a:xfrm>
+            <a:off x="7589520" y="210312"/>
+            <a:ext cx="4069080" cy="256032"/>
+          </a:xfrm>
+          <a:prstGeom prst="rect">
+            <a:avLst/>
+          </a:prstGeom>
+          <a:noFill/>
+        </p:spPr>
+        <p:txBody>
+          <a:bodyPr wrap="square" lIns="0" rIns="0" tIns="0" bIns="0">
+            <a:spAutoFit/>
+          </a:bodyPr>
+          <a:lstStyle/>
+          <a:p>
+            <a:pPr algn="r"/>
+            <a:r>
+              <a:rPr sz="1000" b="0">
+                <a:solidFill>
+                  <a:srgbClr val="FFFFFF"/>
+                </a:solidFill>
+                <a:latin typeface="Arial"/>
+              </a:rPr>
+              <a:t>p7_t1_english_1205</a:t>
+            </a:r>
+          </a:p>
+        </p:txBody>
+      </p:sp>
+      <p:sp>
+        <p:nvSpPr>
+          <p:cNvPr id="8" name="TextBox 7"/>
+          <p:cNvSpPr txBox="1"/>
+          <p:nvPr/>
+        </p:nvSpPr>
+        <p:spPr>
+          <a:xfrm>
+            <a:off x="594360" y="1042415"/>
+            <a:ext cx="11109960" cy="566928"/>
+          </a:xfrm>
+          <a:prstGeom prst="rect">
+            <a:avLst/>
+          </a:prstGeom>
+          <a:noFill/>
+        </p:spPr>
+        <p:txBody>
+          <a:bodyPr wrap="square" lIns="0" rIns="0" tIns="0" bIns="0">
+            <a:spAutoFit/>
+          </a:bodyPr>
+          <a:lstStyle/>
+          <a:p>
+            <a:r>
+              <a:rPr sz="2600" b="1">
+                <a:solidFill>
+                  <a:srgbClr val="111827"/>
+                </a:solidFill>
+                <a:latin typeface="Arial"/>
+              </a:rPr>
+              <a:t>What is a Portfolio?</a:t>
+            </a:r>
+          </a:p>
+        </p:txBody>
+      </p:sp>
+      <p:sp>
+        <p:nvSpPr>
+          <p:cNvPr id="9" name="Rectangle 8"/>
           <p:cNvSpPr/>
           <p:nvPr/>
         </p:nvSpPr>
         <p:spPr>
           <a:xfrm>
-            <a:off x="1234440" y="3364991"/>
-            <a:ext cx="347472" cy="347472"/>
-          </a:xfrm>
-          <a:prstGeom prst="ellipse">
-            <a:avLst/>
-          </a:prstGeom>
-          <a:solidFill>
-            <a:srgbClr val="D97706"/>
-          </a:solidFill>
-          <a:ln>
-            <a:noFill/>
+            <a:off x="685800" y="1874519"/>
+            <a:ext cx="10835640" cy="804672"/>
+          </a:xfrm>
+          <a:prstGeom prst="rect">
+            <a:avLst/>
+          </a:prstGeom>
+          <a:solidFill>
+            <a:srgbClr val="FFF7E0"/>
+          </a:solidFill>
+          <a:ln w="17780">
+            <a:solidFill>
+              <a:srgbClr val="D97706"/>
+            </a:solidFill>
           </a:ln>
         </p:spPr>
         <p:style>
@@ -6135,6 +6610,60 @@
           </a:fontRef>
         </p:style>
         <p:txBody>
+          <a:bodyPr rtlCol="0" anchor="ctr" wrap="square" lIns="101600" rIns="101600" tIns="38100" bIns="38100"/>
+          <a:lstStyle/>
+          <a:p>
+            <a:pPr algn="ctr"/>
+            <a:r>
+              <a:rPr sz="1900" b="1">
+                <a:solidFill>
+                  <a:srgbClr val="111827"/>
+                </a:solidFill>
+                <a:latin typeface="Arial"/>
+              </a:rPr>
+              <a:t>Model the example step by step.</a:t>
+            </a:r>
+          </a:p>
+        </p:txBody>
+      </p:sp>
+      <p:sp>
+        <p:nvSpPr>
+          <p:cNvPr id="10" name="Rectangle 9"/>
+          <p:cNvSpPr/>
+          <p:nvPr/>
+        </p:nvSpPr>
+        <p:spPr>
+          <a:xfrm>
+            <a:off x="868680" y="2971800"/>
+            <a:ext cx="10378440" cy="713232"/>
+          </a:xfrm>
+          <a:prstGeom prst="rect">
+            <a:avLst/>
+          </a:prstGeom>
+          <a:solidFill>
+            <a:srgbClr val="FFFFFF"/>
+          </a:solidFill>
+          <a:ln w="11430">
+            <a:solidFill>
+              <a:srgbClr val="CBD5E1"/>
+            </a:solidFill>
+          </a:ln>
+        </p:spPr>
+        <p:style>
+          <a:lnRef idx="1">
+            <a:schemeClr val="accent1"/>
+          </a:lnRef>
+          <a:fillRef idx="3">
+            <a:schemeClr val="accent1"/>
+          </a:fillRef>
+          <a:effectRef idx="2">
+            <a:schemeClr val="accent1"/>
+          </a:effectRef>
+          <a:fontRef idx="minor">
+            <a:schemeClr val="lt1"/>
+          </a:fontRef>
+        </p:style>
+        <p:txBody>
           <a:bodyPr rtlCol="0" anchor="ctr"/>
           <a:lstStyle/>
           <a:p>
@@ -6144,14 +6673,66 @@
       </p:sp>
       <p:sp>
         <p:nvSpPr>
-          <p:cNvPr id="11" name="TextBox 10"/>
+          <p:cNvPr id="11" name="Rectangle 10"/>
+          <p:cNvSpPr/>
+          <p:nvPr/>
+        </p:nvSpPr>
+        <p:spPr>
+          <a:xfrm>
+            <a:off x="868680" y="2971800"/>
+            <a:ext cx="530352" cy="713232"/>
+          </a:xfrm>
+          <a:prstGeom prst="rect">
+            <a:avLst/>
+          </a:prstGeom>
+          <a:solidFill>
+            <a:srgbClr val="D97706"/>
+          </a:solidFill>
+          <a:ln>
+            <a:noFill/>
+          </a:ln>
+        </p:spPr>
+        <p:style>
+          <a:lnRef idx="1">
+            <a:schemeClr val="accent1"/>
+          </a:lnRef>
+          <a:fillRef idx="3">
+            <a:schemeClr val="accent1"/>
+          </a:fillRef>
+          <a:effectRef idx="2">
+            <a:schemeClr val="accent1"/>
+          </a:effectRef>
+          <a:fontRef idx="minor">
+            <a:schemeClr val="lt1"/>
+          </a:fontRef>
+        </p:style>
+        <p:txBody>
+          <a:bodyPr rtlCol="0" anchor="ctr" wrap="square" lIns="101600" rIns="101600" tIns="38100" bIns="38100"/>
+          <a:lstStyle/>
+          <a:p>
+            <a:pPr algn="ctr"/>
+            <a:r>
+              <a:rPr sz="1500" b="1">
+                <a:solidFill>
+                  <a:srgbClr val="FFFFFF"/>
+                </a:solidFill>
+                <a:latin typeface="Arial"/>
+              </a:rPr>
+              <a:t>1</a:t>
+            </a:r>
+          </a:p>
+        </p:txBody>
+      </p:sp>
+      <p:sp>
+        <p:nvSpPr>
+          <p:cNvPr id="12" name="TextBox 11"/>
           <p:cNvSpPr txBox="1"/>
           <p:nvPr/>
         </p:nvSpPr>
         <p:spPr>
           <a:xfrm>
-            <a:off x="1234440" y="3410712"/>
-            <a:ext cx="347472" cy="182880"/>
+            <a:off x="1572768" y="3118104"/>
+            <a:ext cx="9372600" cy="384048"/>
           </a:xfrm>
           <a:prstGeom prst="rect">
             <a:avLst/>
@@ -6159,33 +6740,130 @@
           <a:noFill/>
         </p:spPr>
         <p:txBody>
-          <a:bodyPr wrap="square">
+          <a:bodyPr wrap="square" lIns="0" rIns="0" tIns="0" bIns="0">
             <a:spAutoFit/>
           </a:bodyPr>
           <a:lstStyle/>
           <a:p>
+            <a:r>
+              <a:rPr sz="1500" b="0">
+                <a:solidFill>
+                  <a:srgbClr val="111827"/>
+                </a:solidFill>
+                <a:latin typeface="Arial"/>
+              </a:rPr>
+              <a:t>NEW VOCABULARY</a:t>
+            </a:r>
+          </a:p>
+        </p:txBody>
+      </p:sp>
+      <p:sp>
+        <p:nvSpPr>
+          <p:cNvPr id="13" name="Rectangle 12"/>
+          <p:cNvSpPr/>
+          <p:nvPr/>
+        </p:nvSpPr>
+        <p:spPr>
+          <a:xfrm>
+            <a:off x="868680" y="3822191"/>
+            <a:ext cx="10378440" cy="713232"/>
+          </a:xfrm>
+          <a:prstGeom prst="rect">
+            <a:avLst/>
+          </a:prstGeom>
+          <a:solidFill>
+            <a:srgbClr val="FFFFFF"/>
+          </a:solidFill>
+          <a:ln w="11430">
+            <a:solidFill>
+              <a:srgbClr val="CBD5E1"/>
+            </a:solidFill>
+          </a:ln>
+        </p:spPr>
+        <p:style>
+          <a:lnRef idx="1">
+            <a:schemeClr val="accent1"/>
+          </a:lnRef>
+          <a:fillRef idx="3">
+            <a:schemeClr val="accent1"/>
+          </a:fillRef>
+          <a:effectRef idx="2">
+            <a:schemeClr val="accent1"/>
+          </a:effectRef>
+          <a:fontRef idx="minor">
+            <a:schemeClr val="lt1"/>
+          </a:fontRef>
+        </p:style>
+        <p:txBody>
+          <a:bodyPr rtlCol="0" anchor="ctr"/>
+          <a:lstStyle/>
+          <a:p>
             <a:pPr algn="ctr"/>
-            <a:r>
-              <a:rPr sz="1000" b="1">
+          </a:p>
+        </p:txBody>
+      </p:sp>
+      <p:sp>
+        <p:nvSpPr>
+          <p:cNvPr id="14" name="Rectangle 13"/>
+          <p:cNvSpPr/>
+          <p:nvPr/>
+        </p:nvSpPr>
+        <p:spPr>
+          <a:xfrm>
+            <a:off x="868680" y="3822191"/>
+            <a:ext cx="530352" cy="713232"/>
+          </a:xfrm>
+          <a:prstGeom prst="rect">
+            <a:avLst/>
+          </a:prstGeom>
+          <a:solidFill>
+            <a:srgbClr val="D97706"/>
+          </a:solidFill>
+          <a:ln>
+            <a:noFill/>
+          </a:ln>
+        </p:spPr>
+        <p:style>
+          <a:lnRef idx="1">
+            <a:schemeClr val="accent1"/>
+          </a:lnRef>
+          <a:fillRef idx="3">
+            <a:schemeClr val="accent1"/>
+          </a:fillRef>
+          <a:effectRef idx="2">
+            <a:schemeClr val="accent1"/>
+          </a:effectRef>
+          <a:fontRef idx="minor">
+            <a:schemeClr val="lt1"/>
+          </a:fontRef>
+        </p:style>
+        <p:txBody>
+          <a:bodyPr rtlCol="0" anchor="ctr" wrap="square" lIns="101600" rIns="101600" tIns="38100" bIns="38100"/>
+          <a:lstStyle/>
+          <a:p>
+            <a:pPr algn="ctr"/>
+            <a:r>
+              <a:rPr sz="1500" b="1">
                 <a:solidFill>
                   <a:srgbClr val="FFFFFF"/>
                 </a:solidFill>
+                <a:latin typeface="Arial"/>
               </a:rPr>
-              <a:t>1</a:t>
-            </a:r>
-          </a:p>
-        </p:txBody>
-      </p:sp>
-      <p:sp>
-        <p:nvSpPr>
-          <p:cNvPr id="12" name="TextBox 11"/>
+              <a:t>2</a:t>
+            </a:r>
+          </a:p>
+        </p:txBody>
+      </p:sp>
+      <p:sp>
+        <p:nvSpPr>
+          <p:cNvPr id="15" name="TextBox 14"/>
           <p:cNvSpPr txBox="1"/>
           <p:nvPr/>
         </p:nvSpPr>
         <p:spPr>
           <a:xfrm>
-            <a:off x="1783080" y="3364991"/>
-            <a:ext cx="9006840" cy="347472"/>
+            <a:off x="1572768" y="3968496"/>
+            <a:ext cx="9372600" cy="384048"/>
           </a:xfrm>
           <a:prstGeom prst="rect">
             <a:avLst/>
@@ -6193,32 +6871,130 @@
           <a:noFill/>
         </p:spPr>
         <p:txBody>
-          <a:bodyPr wrap="square">
+          <a:bodyPr wrap="square" lIns="0" rIns="0" tIns="0" bIns="0">
             <a:spAutoFit/>
           </a:bodyPr>
           <a:lstStyle/>
           <a:p>
             <a:r>
-              <a:rPr sz="1700" b="0">
-                <a:solidFill>
-                  <a:srgbClr val="1A202C"/>
-                </a:solidFill>
+              <a:rPr sz="1500" b="0">
+                <a:solidFill>
+                  <a:srgbClr val="111827"/>
+                </a:solidFill>
+                <a:latin typeface="Arial"/>
               </a:rPr>
-              <a:t>NEW VOCABULARY</a:t>
-            </a:r>
-          </a:p>
-        </p:txBody>
-      </p:sp>
-      <p:sp>
-        <p:nvSpPr>
-          <p:cNvPr id="13" name="TextBox 12"/>
+              <a:t>Write one clear response.</a:t>
+            </a:r>
+          </a:p>
+        </p:txBody>
+      </p:sp>
+      <p:sp>
+        <p:nvSpPr>
+          <p:cNvPr id="16" name="Rectangle 15"/>
+          <p:cNvSpPr/>
+          <p:nvPr/>
+        </p:nvSpPr>
+        <p:spPr>
+          <a:xfrm>
+            <a:off x="868680" y="4672584"/>
+            <a:ext cx="10378440" cy="713232"/>
+          </a:xfrm>
+          <a:prstGeom prst="rect">
+            <a:avLst/>
+          </a:prstGeom>
+          <a:solidFill>
+            <a:srgbClr val="FFFFFF"/>
+          </a:solidFill>
+          <a:ln w="11430">
+            <a:solidFill>
+              <a:srgbClr val="CBD5E1"/>
+            </a:solidFill>
+          </a:ln>
+        </p:spPr>
+        <p:style>
+          <a:lnRef idx="1">
+            <a:schemeClr val="accent1"/>
+          </a:lnRef>
+          <a:fillRef idx="3">
+            <a:schemeClr val="accent1"/>
+          </a:fillRef>
+          <a:effectRef idx="2">
+            <a:schemeClr val="accent1"/>
+          </a:effectRef>
+          <a:fontRef idx="minor">
+            <a:schemeClr val="lt1"/>
+          </a:fontRef>
+        </p:style>
+        <p:txBody>
+          <a:bodyPr rtlCol="0" anchor="ctr"/>
+          <a:lstStyle/>
+          <a:p>
+            <a:pPr algn="ctr"/>
+          </a:p>
+        </p:txBody>
+      </p:sp>
+      <p:sp>
+        <p:nvSpPr>
+          <p:cNvPr id="17" name="Rectangle 16"/>
+          <p:cNvSpPr/>
+          <p:nvPr/>
+        </p:nvSpPr>
+        <p:spPr>
+          <a:xfrm>
+            <a:off x="868680" y="4672584"/>
+            <a:ext cx="530352" cy="713232"/>
+          </a:xfrm>
+          <a:prstGeom prst="rect">
+            <a:avLst/>
+          </a:prstGeom>
+          <a:solidFill>
+            <a:srgbClr val="D97706"/>
+          </a:solidFill>
+          <a:ln>
+            <a:noFill/>
+          </a:ln>
+        </p:spPr>
+        <p:style>
+          <a:lnRef idx="1">
+            <a:schemeClr val="accent1"/>
+          </a:lnRef>
+          <a:fillRef idx="3">
+            <a:schemeClr val="accent1"/>
+          </a:fillRef>
+          <a:effectRef idx="2">
+            <a:schemeClr val="accent1"/>
+          </a:effectRef>
+          <a:fontRef idx="minor">
+            <a:schemeClr val="lt1"/>
+          </a:fontRef>
+        </p:style>
+        <p:txBody>
+          <a:bodyPr rtlCol="0" anchor="ctr" wrap="square" lIns="101600" rIns="101600" tIns="38100" bIns="38100"/>
+          <a:lstStyle/>
+          <a:p>
+            <a:pPr algn="ctr"/>
+            <a:r>
+              <a:rPr sz="1500" b="1">
+                <a:solidFill>
+                  <a:srgbClr val="FFFFFF"/>
+                </a:solidFill>
+                <a:latin typeface="Arial"/>
+              </a:rPr>
+              <a:t>3</a:t>
+            </a:r>
+          </a:p>
+        </p:txBody>
+      </p:sp>
+      <p:sp>
+        <p:nvSpPr>
+          <p:cNvPr id="18" name="TextBox 17"/>
           <p:cNvSpPr txBox="1"/>
           <p:nvPr/>
         </p:nvSpPr>
         <p:spPr>
           <a:xfrm>
-            <a:off x="777240" y="6419088"/>
-            <a:ext cx="10835640" cy="228600"/>
+            <a:off x="1572768" y="4818888"/>
+            <a:ext cx="9372600" cy="384048"/>
           </a:xfrm>
           <a:prstGeom prst="rect">
             <a:avLst/>
@@ -6226,17 +7002,183 @@
           <a:noFill/>
         </p:spPr>
         <p:txBody>
-          <a:bodyPr wrap="square">
+          <a:bodyPr wrap="square" lIns="0" rIns="0" tIns="0" bIns="0">
             <a:spAutoFit/>
           </a:bodyPr>
           <a:lstStyle/>
           <a:p>
+            <a:r>
+              <a:rPr sz="1500" b="0">
+                <a:solidFill>
+                  <a:srgbClr val="111827"/>
+                </a:solidFill>
+                <a:latin typeface="Arial"/>
+              </a:rPr>
+              <a:t>Write one clear response.</a:t>
+            </a:r>
+          </a:p>
+        </p:txBody>
+      </p:sp>
+      <p:sp>
+        <p:nvSpPr>
+          <p:cNvPr id="19" name="Rectangle 18"/>
+          <p:cNvSpPr/>
+          <p:nvPr/>
+        </p:nvSpPr>
+        <p:spPr>
+          <a:xfrm>
+            <a:off x="868680" y="5522976"/>
+            <a:ext cx="10378440" cy="713232"/>
+          </a:xfrm>
+          <a:prstGeom prst="rect">
+            <a:avLst/>
+          </a:prstGeom>
+          <a:solidFill>
+            <a:srgbClr val="FFFFFF"/>
+          </a:solidFill>
+          <a:ln w="11430">
+            <a:solidFill>
+              <a:srgbClr val="CBD5E1"/>
+            </a:solidFill>
+          </a:ln>
+        </p:spPr>
+        <p:style>
+          <a:lnRef idx="1">
+            <a:schemeClr val="accent1"/>
+          </a:lnRef>
+          <a:fillRef idx="3">
+            <a:schemeClr val="accent1"/>
+          </a:fillRef>
+          <a:effectRef idx="2">
+            <a:schemeClr val="accent1"/>
+          </a:effectRef>
+          <a:fontRef idx="minor">
+            <a:schemeClr val="lt1"/>
+          </a:fontRef>
+        </p:style>
+        <p:txBody>
+          <a:bodyPr rtlCol="0" anchor="ctr"/>
+          <a:lstStyle/>
+          <a:p>
+            <a:pPr algn="ctr"/>
+          </a:p>
+        </p:txBody>
+      </p:sp>
+      <p:sp>
+        <p:nvSpPr>
+          <p:cNvPr id="20" name="Rectangle 19"/>
+          <p:cNvSpPr/>
+          <p:nvPr/>
+        </p:nvSpPr>
+        <p:spPr>
+          <a:xfrm>
+            <a:off x="868680" y="5522976"/>
+            <a:ext cx="530352" cy="713232"/>
+          </a:xfrm>
+          <a:prstGeom prst="rect">
+            <a:avLst/>
+          </a:prstGeom>
+          <a:solidFill>
+            <a:srgbClr val="D97706"/>
+          </a:solidFill>
+          <a:ln>
+            <a:noFill/>
+          </a:ln>
+        </p:spPr>
+        <p:style>
+          <a:lnRef idx="1">
+            <a:schemeClr val="accent1"/>
+          </a:lnRef>
+          <a:fillRef idx="3">
+            <a:schemeClr val="accent1"/>
+          </a:fillRef>
+          <a:effectRef idx="2">
+            <a:schemeClr val="accent1"/>
+          </a:effectRef>
+          <a:fontRef idx="minor">
+            <a:schemeClr val="lt1"/>
+          </a:fontRef>
+        </p:style>
+        <p:txBody>
+          <a:bodyPr rtlCol="0" anchor="ctr" wrap="square" lIns="101600" rIns="101600" tIns="38100" bIns="38100"/>
+          <a:lstStyle/>
+          <a:p>
+            <a:pPr algn="ctr"/>
+            <a:r>
+              <a:rPr sz="1500" b="1">
+                <a:solidFill>
+                  <a:srgbClr val="FFFFFF"/>
+                </a:solidFill>
+                <a:latin typeface="Arial"/>
+              </a:rPr>
+              <a:t>4</a:t>
+            </a:r>
+          </a:p>
+        </p:txBody>
+      </p:sp>
+      <p:sp>
+        <p:nvSpPr>
+          <p:cNvPr id="21" name="TextBox 20"/>
+          <p:cNvSpPr txBox="1"/>
+          <p:nvPr/>
+        </p:nvSpPr>
+        <p:spPr>
+          <a:xfrm>
+            <a:off x="1572768" y="5669280"/>
+            <a:ext cx="9372600" cy="384048"/>
+          </a:xfrm>
+          <a:prstGeom prst="rect">
+            <a:avLst/>
+          </a:prstGeom>
+          <a:noFill/>
+        </p:spPr>
+        <p:txBody>
+          <a:bodyPr wrap="square" lIns="0" rIns="0" tIns="0" bIns="0">
+            <a:spAutoFit/>
+          </a:bodyPr>
+          <a:lstStyle/>
+          <a:p>
+            <a:r>
+              <a:rPr sz="1500" b="0">
+                <a:solidFill>
+                  <a:srgbClr val="111827"/>
+                </a:solidFill>
+                <a:latin typeface="Arial"/>
+              </a:rPr>
+              <a:t>Write one clear response.</a:t>
+            </a:r>
+          </a:p>
+        </p:txBody>
+      </p:sp>
+      <p:sp>
+        <p:nvSpPr>
+          <p:cNvPr id="22" name="TextBox 21"/>
+          <p:cNvSpPr txBox="1"/>
+          <p:nvPr/>
+        </p:nvSpPr>
+        <p:spPr>
+          <a:xfrm>
+            <a:off x="685800" y="6419088"/>
+            <a:ext cx="10835640" cy="228600"/>
+          </a:xfrm>
+          <a:prstGeom prst="rect">
+            <a:avLst/>
+          </a:prstGeom>
+          <a:noFill/>
+        </p:spPr>
+        <p:txBody>
+          <a:bodyPr wrap="square" lIns="0" rIns="0" tIns="0" bIns="0">
+            <a:spAutoFit/>
+          </a:bodyPr>
+          <a:lstStyle/>
+          <a:p>
             <a:pPr algn="r"/>
             <a:r>
               <a:rPr sz="1000" b="0">
                 <a:solidFill>
-                  <a:srgbClr val="5B677D"/>
-                </a:solidFill>
+                  <a:srgbClr val="475569"/>
+                </a:solidFill>
+                <a:latin typeface="Arial"/>
               </a:rPr>
               <a:t>Listen • Talk • Try • Explain</a:t>
             </a:r>
@@ -6254,6 +7196,14 @@
 <file path=ppt/slides/slide6.xml><?xml version="1.0" encoding="utf-8"?>
 <p:sld xmlns:a="http://schemas.openxmlformats.org/drawingml/2006/main" xmlns:p="http://schemas.openxmlformats.org/presentationml/2006/main" xmlns:r="http://schemas.openxmlformats.org/officeDocument/2006/relationships">
   <p:cSld>
+    <p:bg>
+      <p:bgPr>
+        <a:solidFill>
+          <a:srgbClr val="F8FAFC"/>
+        </a:solidFill>
+        <a:effectLst/>
+      </p:bgPr>
+    </p:bg>
     <p:spTree>
       <p:nvGrpSpPr>
         <p:cNvPr id="1" name=""/>
@@ -6270,13 +7220,13 @@
         <p:spPr>
           <a:xfrm>
             <a:off x="0" y="0"/>
-            <a:ext cx="12191695" cy="914400"/>
-          </a:xfrm>
-          <a:prstGeom prst="rect">
-            <a:avLst/>
-          </a:prstGeom>
-          <a:solidFill>
-            <a:srgbClr val="BE123C"/>
+            <a:ext cx="12191695" cy="713232"/>
+          </a:xfrm>
+          <a:prstGeom prst="rect">
+            <a:avLst/>
+          </a:prstGeom>
+          <a:solidFill>
+            <a:srgbClr val="111827"/>
           </a:solidFill>
           <a:ln>
             <a:noFill/>
@@ -6312,14 +7262,14 @@
         </p:nvSpPr>
         <p:spPr>
           <a:xfrm>
-            <a:off x="0" y="914400"/>
-            <a:ext cx="164592" cy="5943600"/>
-          </a:xfrm>
-          <a:prstGeom prst="rect">
-            <a:avLst/>
-          </a:prstGeom>
-          <a:solidFill>
-            <a:srgbClr val="BE123C"/>
+            <a:off x="0" y="713232"/>
+            <a:ext cx="12191695" cy="82296"/>
+          </a:xfrm>
+          <a:prstGeom prst="rect">
+            <a:avLst/>
+          </a:prstGeom>
+          <a:solidFill>
+            <a:srgbClr val="FCD116"/>
           </a:solidFill>
           <a:ln>
             <a:noFill/>
@@ -6349,125 +7299,23 @@
       </p:sp>
       <p:sp>
         <p:nvSpPr>
-          <p:cNvPr id="4" name="TextBox 3"/>
-          <p:cNvSpPr txBox="1"/>
-          <p:nvPr/>
-        </p:nvSpPr>
-        <p:spPr>
-          <a:xfrm>
-            <a:off x="594360" y="246888"/>
-            <a:ext cx="2926080" cy="320040"/>
-          </a:xfrm>
-          <a:prstGeom prst="rect">
-            <a:avLst/>
-          </a:prstGeom>
-          <a:noFill/>
-        </p:spPr>
-        <p:txBody>
-          <a:bodyPr wrap="square">
-            <a:spAutoFit/>
-          </a:bodyPr>
-          <a:lstStyle/>
-          <a:p>
-            <a:r>
-              <a:rPr sz="1300" b="1">
-                <a:solidFill>
-                  <a:srgbClr val="FFFFFF"/>
-                </a:solidFill>
-              </a:rPr>
-              <a:t>6. PRACTICE</a:t>
-            </a:r>
-          </a:p>
-        </p:txBody>
-      </p:sp>
-      <p:sp>
-        <p:nvSpPr>
-          <p:cNvPr id="5" name="TextBox 4"/>
-          <p:cNvSpPr txBox="1"/>
-          <p:nvPr/>
-        </p:nvSpPr>
-        <p:spPr>
-          <a:xfrm>
-            <a:off x="7772400" y="246888"/>
-            <a:ext cx="3840480" cy="320040"/>
-          </a:xfrm>
-          <a:prstGeom prst="rect">
-            <a:avLst/>
-          </a:prstGeom>
-          <a:noFill/>
-        </p:spPr>
-        <p:txBody>
-          <a:bodyPr wrap="square">
-            <a:spAutoFit/>
-          </a:bodyPr>
-          <a:lstStyle/>
-          <a:p>
-            <a:pPr algn="r"/>
-            <a:r>
-              <a:rPr sz="1100" b="0">
-                <a:solidFill>
-                  <a:srgbClr val="FFFFFF"/>
-                </a:solidFill>
-              </a:rPr>
-              <a:t>p7_t1_english_1205</a:t>
-            </a:r>
-          </a:p>
-        </p:txBody>
-      </p:sp>
-      <p:sp>
-        <p:nvSpPr>
-          <p:cNvPr id="6" name="TextBox 5"/>
-          <p:cNvSpPr txBox="1"/>
-          <p:nvPr/>
-        </p:nvSpPr>
-        <p:spPr>
-          <a:xfrm>
-            <a:off x="640080" y="1143000"/>
-            <a:ext cx="10972800" cy="685800"/>
-          </a:xfrm>
-          <a:prstGeom prst="rect">
-            <a:avLst/>
-          </a:prstGeom>
-          <a:noFill/>
-        </p:spPr>
-        <p:txBody>
-          <a:bodyPr wrap="square">
-            <a:spAutoFit/>
-          </a:bodyPr>
-          <a:lstStyle/>
-          <a:p>
-            <a:r>
-              <a:rPr sz="2800" b="1">
-                <a:solidFill>
-                  <a:srgbClr val="1A202C"/>
-                </a:solidFill>
-              </a:rPr>
-              <a:t>Try it together</a:t>
-            </a:r>
-          </a:p>
-        </p:txBody>
-      </p:sp>
-      <p:sp>
-        <p:nvSpPr>
-          <p:cNvPr id="7" name="Rounded Rectangle 6"/>
+          <p:cNvPr id="4" name="Rectangle 3"/>
           <p:cNvSpPr/>
           <p:nvPr/>
         </p:nvSpPr>
         <p:spPr>
           <a:xfrm>
-            <a:off x="777240" y="1993392"/>
-            <a:ext cx="10835640" cy="1005840"/>
-          </a:xfrm>
-          <a:prstGeom prst="roundRect">
-            <a:avLst/>
-          </a:prstGeom>
-          <a:solidFill>
-            <a:srgbClr val="FFFBEB"/>
-          </a:solidFill>
-          <a:ln w="15240">
-            <a:solidFill>
-              <a:srgbClr val="BE123C"/>
-            </a:solidFill>
+            <a:off x="0" y="795528"/>
+            <a:ext cx="12191695" cy="64008"/>
+          </a:xfrm>
+          <a:prstGeom prst="rect">
+            <a:avLst/>
+          </a:prstGeom>
+          <a:solidFill>
+            <a:srgbClr val="D90000"/>
+          </a:solidFill>
+          <a:ln>
+            <a:noFill/>
           </a:ln>
         </p:spPr>
         <p:style>
@@ -6494,58 +7342,23 @@
       </p:sp>
       <p:sp>
         <p:nvSpPr>
-          <p:cNvPr id="8" name="TextBox 7"/>
-          <p:cNvSpPr txBox="1"/>
-          <p:nvPr/>
-        </p:nvSpPr>
-        <p:spPr>
-          <a:xfrm>
-            <a:off x="1051560" y="2212848"/>
-            <a:ext cx="10287000" cy="502920"/>
-          </a:xfrm>
-          <a:prstGeom prst="rect">
-            <a:avLst/>
-          </a:prstGeom>
-          <a:noFill/>
-        </p:spPr>
-        <p:txBody>
-          <a:bodyPr wrap="square">
-            <a:spAutoFit/>
-          </a:bodyPr>
-          <a:lstStyle/>
-          <a:p>
-            <a:r>
-              <a:rPr sz="2100" b="1">
-                <a:solidFill>
-                  <a:srgbClr val="1A202C"/>
-                </a:solidFill>
-              </a:rPr>
-              <a:t>Which activity helped you improve your English most?</a:t>
-            </a:r>
-          </a:p>
-        </p:txBody>
-      </p:sp>
-      <p:sp>
-        <p:nvSpPr>
-          <p:cNvPr id="9" name="Rounded Rectangle 8"/>
+          <p:cNvPr id="5" name="Rectangle 4"/>
           <p:cNvSpPr/>
           <p:nvPr/>
         </p:nvSpPr>
         <p:spPr>
           <a:xfrm>
-            <a:off x="1005840" y="3246120"/>
-            <a:ext cx="10149840" cy="731520"/>
-          </a:xfrm>
-          <a:prstGeom prst="roundRect">
-            <a:avLst/>
-          </a:prstGeom>
-          <a:solidFill>
-            <a:srgbClr val="F8FAFC"/>
-          </a:solidFill>
-          <a:ln w="15240">
-            <a:solidFill>
-              <a:srgbClr val="CBD5E1"/>
-            </a:solidFill>
+            <a:off x="0" y="859536"/>
+            <a:ext cx="164592" cy="5998464"/>
+          </a:xfrm>
+          <a:prstGeom prst="rect">
+            <a:avLst/>
+          </a:prstGeom>
+          <a:solidFill>
+            <a:srgbClr val="BE123C"/>
+          </a:solidFill>
+          <a:ln>
+            <a:noFill/>
           </a:ln>
         </p:spPr>
         <p:style>
@@ -6572,23 +7385,128 @@
       </p:sp>
       <p:sp>
         <p:nvSpPr>
-          <p:cNvPr id="10" name="Oval 9"/>
+          <p:cNvPr id="6" name="TextBox 5"/>
+          <p:cNvSpPr txBox="1"/>
+          <p:nvPr/>
+        </p:nvSpPr>
+        <p:spPr>
+          <a:xfrm>
+            <a:off x="502920" y="210312"/>
+            <a:ext cx="3200400" cy="256032"/>
+          </a:xfrm>
+          <a:prstGeom prst="rect">
+            <a:avLst/>
+          </a:prstGeom>
+          <a:noFill/>
+        </p:spPr>
+        <p:txBody>
+          <a:bodyPr wrap="square" lIns="0" rIns="0" tIns="0" bIns="0">
+            <a:spAutoFit/>
+          </a:bodyPr>
+          <a:lstStyle/>
+          <a:p>
+            <a:r>
+              <a:rPr sz="1200" b="1">
+                <a:solidFill>
+                  <a:srgbClr val="FFFFFF"/>
+                </a:solidFill>
+                <a:latin typeface="Arial"/>
+              </a:rPr>
+              <a:t>6. PRACTICE</a:t>
+            </a:r>
+          </a:p>
+        </p:txBody>
+      </p:sp>
+      <p:sp>
+        <p:nvSpPr>
+          <p:cNvPr id="7" name="TextBox 6"/>
+          <p:cNvSpPr txBox="1"/>
+          <p:nvPr/>
+        </p:nvSpPr>
+        <p:spPr>
+          <a:xfrm>
+            <a:off x="7589520" y="210312"/>
+            <a:ext cx="4069080" cy="256032"/>
+          </a:xfrm>
+          <a:prstGeom prst="rect">
+            <a:avLst/>
+          </a:prstGeom>
+          <a:noFill/>
+        </p:spPr>
+        <p:txBody>
+          <a:bodyPr wrap="square" lIns="0" rIns="0" tIns="0" bIns="0">
+            <a:spAutoFit/>
+          </a:bodyPr>
+          <a:lstStyle/>
+          <a:p>
+            <a:pPr algn="r"/>
+            <a:r>
+              <a:rPr sz="1000" b="0">
+                <a:solidFill>
+                  <a:srgbClr val="FFFFFF"/>
+                </a:solidFill>
+                <a:latin typeface="Arial"/>
+              </a:rPr>
+              <a:t>p7_t1_english_1205</a:t>
+            </a:r>
+          </a:p>
+        </p:txBody>
+      </p:sp>
+      <p:sp>
+        <p:nvSpPr>
+          <p:cNvPr id="8" name="TextBox 7"/>
+          <p:cNvSpPr txBox="1"/>
+          <p:nvPr/>
+        </p:nvSpPr>
+        <p:spPr>
+          <a:xfrm>
+            <a:off x="594360" y="1042415"/>
+            <a:ext cx="11109960" cy="566928"/>
+          </a:xfrm>
+          <a:prstGeom prst="rect">
+            <a:avLst/>
+          </a:prstGeom>
+          <a:noFill/>
+        </p:spPr>
+        <p:txBody>
+          <a:bodyPr wrap="square" lIns="0" rIns="0" tIns="0" bIns="0">
+            <a:spAutoFit/>
+          </a:bodyPr>
+          <a:lstStyle/>
+          <a:p>
+            <a:r>
+              <a:rPr sz="2600" b="1">
+                <a:solidFill>
+                  <a:srgbClr val="111827"/>
+                </a:solidFill>
+                <a:latin typeface="Arial"/>
+              </a:rPr>
+              <a:t>Try it together</a:t>
+            </a:r>
+          </a:p>
+        </p:txBody>
+      </p:sp>
+      <p:sp>
+        <p:nvSpPr>
+          <p:cNvPr id="9" name="Rectangle 8"/>
           <p:cNvSpPr/>
           <p:nvPr/>
         </p:nvSpPr>
         <p:spPr>
           <a:xfrm>
-            <a:off x="1234440" y="3364991"/>
-            <a:ext cx="347472" cy="347472"/>
-          </a:xfrm>
-          <a:prstGeom prst="ellipse">
-            <a:avLst/>
-          </a:prstGeom>
-          <a:solidFill>
-            <a:srgbClr val="BE123C"/>
-          </a:solidFill>
-          <a:ln>
-            <a:noFill/>
+            <a:off x="685800" y="1874519"/>
+            <a:ext cx="10835640" cy="804672"/>
+          </a:xfrm>
+          <a:prstGeom prst="rect">
+            <a:avLst/>
+          </a:prstGeom>
+          <a:solidFill>
+            <a:srgbClr val="FFF7E0"/>
+          </a:solidFill>
+          <a:ln w="17780">
+            <a:solidFill>
+              <a:srgbClr val="BE123C"/>
+            </a:solidFill>
           </a:ln>
         </p:spPr>
         <p:style>
@@ -6606,98 +7524,40 @@
           </a:fontRef>
         </p:style>
         <p:txBody>
-          <a:bodyPr rtlCol="0" anchor="ctr"/>
+          <a:bodyPr rtlCol="0" anchor="ctr" wrap="square" lIns="101600" rIns="101600" tIns="38100" bIns="38100"/>
           <a:lstStyle/>
           <a:p>
             <a:pPr algn="ctr"/>
-          </a:p>
-        </p:txBody>
-      </p:sp>
-      <p:sp>
-        <p:nvSpPr>
-          <p:cNvPr id="11" name="TextBox 10"/>
-          <p:cNvSpPr txBox="1"/>
-          <p:nvPr/>
-        </p:nvSpPr>
-        <p:spPr>
-          <a:xfrm>
-            <a:off x="1234440" y="3410712"/>
-            <a:ext cx="347472" cy="182880"/>
-          </a:xfrm>
-          <a:prstGeom prst="rect">
-            <a:avLst/>
-          </a:prstGeom>
-          <a:noFill/>
-        </p:spPr>
-        <p:txBody>
-          <a:bodyPr wrap="square">
-            <a:spAutoFit/>
-          </a:bodyPr>
-          <a:lstStyle/>
-          <a:p>
-            <a:pPr algn="ctr"/>
-            <a:r>
-              <a:rPr sz="1000" b="1">
-                <a:solidFill>
-                  <a:srgbClr val="FFFFFF"/>
-                </a:solidFill>
+            <a:r>
+              <a:rPr sz="1900" b="1">
+                <a:solidFill>
+                  <a:srgbClr val="111827"/>
+                </a:solidFill>
+                <a:latin typeface="Arial"/>
               </a:rPr>
-              <a:t>1</a:t>
-            </a:r>
-          </a:p>
-        </p:txBody>
-      </p:sp>
-      <p:sp>
-        <p:nvSpPr>
-          <p:cNvPr id="12" name="TextBox 11"/>
-          <p:cNvSpPr txBox="1"/>
-          <p:nvPr/>
-        </p:nvSpPr>
-        <p:spPr>
-          <a:xfrm>
-            <a:off x="1783080" y="3364991"/>
-            <a:ext cx="9006840" cy="347472"/>
-          </a:xfrm>
-          <a:prstGeom prst="rect">
-            <a:avLst/>
-          </a:prstGeom>
-          <a:noFill/>
-        </p:spPr>
-        <p:txBody>
-          <a:bodyPr wrap="square">
-            <a:spAutoFit/>
-          </a:bodyPr>
-          <a:lstStyle/>
-          <a:p>
-            <a:r>
-              <a:rPr sz="1700" b="0">
-                <a:solidFill>
-                  <a:srgbClr val="1A202C"/>
-                </a:solidFill>
-              </a:rPr>
-              <a:t>Why is it important to review our work?</a:t>
-            </a:r>
-          </a:p>
-        </p:txBody>
-      </p:sp>
-      <p:sp>
-        <p:nvSpPr>
-          <p:cNvPr id="13" name="Rounded Rectangle 12"/>
+              <a:t>Which activity helped you improve your English most?</a:t>
+            </a:r>
+          </a:p>
+        </p:txBody>
+      </p:sp>
+      <p:sp>
+        <p:nvSpPr>
+          <p:cNvPr id="10" name="Rectangle 9"/>
           <p:cNvSpPr/>
           <p:nvPr/>
         </p:nvSpPr>
         <p:spPr>
           <a:xfrm>
-            <a:off x="1005840" y="4178808"/>
-            <a:ext cx="10149840" cy="731520"/>
-          </a:xfrm>
-          <a:prstGeom prst="roundRect">
-            <a:avLst/>
-          </a:prstGeom>
-          <a:solidFill>
-            <a:srgbClr val="F8FAFC"/>
-          </a:solidFill>
-          <a:ln w="15240">
+            <a:off x="868680" y="2971800"/>
+            <a:ext cx="10378440" cy="713232"/>
+          </a:xfrm>
+          <a:prstGeom prst="rect">
+            <a:avLst/>
+          </a:prstGeom>
+          <a:solidFill>
+            <a:srgbClr val="FFFFFF"/>
+          </a:solidFill>
+          <a:ln w="11430">
             <a:solidFill>
               <a:srgbClr val="CBD5E1"/>
             </a:solidFill>
@@ -6727,16 +7587,16 @@
       </p:sp>
       <p:sp>
         <p:nvSpPr>
-          <p:cNvPr id="14" name="Oval 13"/>
+          <p:cNvPr id="11" name="Rectangle 10"/>
           <p:cNvSpPr/>
           <p:nvPr/>
         </p:nvSpPr>
         <p:spPr>
           <a:xfrm>
-            <a:off x="1234440" y="4297680"/>
-            <a:ext cx="347472" cy="347472"/>
-          </a:xfrm>
-          <a:prstGeom prst="ellipse">
+            <a:off x="868680" y="2971800"/>
+            <a:ext cx="530352" cy="713232"/>
+          </a:xfrm>
+          <a:prstGeom prst="rect">
             <a:avLst/>
           </a:prstGeom>
           <a:solidFill>
@@ -6761,23 +7621,32 @@
           </a:fontRef>
         </p:style>
         <p:txBody>
-          <a:bodyPr rtlCol="0" anchor="ctr"/>
+          <a:bodyPr rtlCol="0" anchor="ctr" wrap="square" lIns="101600" rIns="101600" tIns="38100" bIns="38100"/>
           <a:lstStyle/>
           <a:p>
             <a:pPr algn="ctr"/>
-          </a:p>
-        </p:txBody>
-      </p:sp>
-      <p:sp>
-        <p:nvSpPr>
-          <p:cNvPr id="15" name="TextBox 14"/>
+            <a:r>
+              <a:rPr sz="1500" b="1">
+                <a:solidFill>
+                  <a:srgbClr val="FFFFFF"/>
+                </a:solidFill>
+                <a:latin typeface="Arial"/>
+              </a:rPr>
+              <a:t>1</a:t>
+            </a:r>
+          </a:p>
+        </p:txBody>
+      </p:sp>
+      <p:sp>
+        <p:nvSpPr>
+          <p:cNvPr id="12" name="TextBox 11"/>
           <p:cNvSpPr txBox="1"/>
           <p:nvPr/>
         </p:nvSpPr>
         <p:spPr>
           <a:xfrm>
-            <a:off x="1234440" y="4343400"/>
-            <a:ext cx="347472" cy="182880"/>
+            <a:off x="1572768" y="3118104"/>
+            <a:ext cx="9372600" cy="384048"/>
           </a:xfrm>
           <a:prstGeom prst="rect">
             <a:avLst/>
@@ -6785,74 +7654,41 @@
           <a:noFill/>
         </p:spPr>
         <p:txBody>
-          <a:bodyPr wrap="square">
+          <a:bodyPr wrap="square" lIns="0" rIns="0" tIns="0" bIns="0">
             <a:spAutoFit/>
           </a:bodyPr>
           <a:lstStyle/>
           <a:p>
-            <a:pPr algn="ctr"/>
-            <a:r>
-              <a:rPr sz="1000" b="1">
-                <a:solidFill>
-                  <a:srgbClr val="FFFFFF"/>
-                </a:solidFill>
+            <a:r>
+              <a:rPr sz="1500" b="0">
+                <a:solidFill>
+                  <a:srgbClr val="111827"/>
+                </a:solidFill>
+                <a:latin typeface="Arial"/>
               </a:rPr>
-              <a:t>2</a:t>
-            </a:r>
-          </a:p>
-        </p:txBody>
-      </p:sp>
-      <p:sp>
-        <p:nvSpPr>
-          <p:cNvPr id="16" name="TextBox 15"/>
-          <p:cNvSpPr txBox="1"/>
-          <p:nvPr/>
-        </p:nvSpPr>
-        <p:spPr>
-          <a:xfrm>
-            <a:off x="1783080" y="4297680"/>
-            <a:ext cx="9006840" cy="347472"/>
-          </a:xfrm>
-          <a:prstGeom prst="rect">
-            <a:avLst/>
-          </a:prstGeom>
-          <a:noFill/>
-        </p:spPr>
-        <p:txBody>
-          <a:bodyPr wrap="square">
-            <a:spAutoFit/>
-          </a:bodyPr>
-          <a:lstStyle/>
-          <a:p>
-            <a:r>
-              <a:rPr sz="1700" b="0">
-                <a:solidFill>
-                  <a:srgbClr val="1A202C"/>
-                </a:solidFill>
-              </a:rPr>
-              <a:t>What is a portfolio?</a:t>
-            </a:r>
-          </a:p>
-        </p:txBody>
-      </p:sp>
-      <p:sp>
-        <p:nvSpPr>
-          <p:cNvPr id="17" name="Rounded Rectangle 16"/>
+              <a:t>Why is it important to review our work?</a:t>
+            </a:r>
+          </a:p>
+        </p:txBody>
+      </p:sp>
+      <p:sp>
+        <p:nvSpPr>
+          <p:cNvPr id="13" name="Rectangle 12"/>
           <p:cNvSpPr/>
           <p:nvPr/>
         </p:nvSpPr>
         <p:spPr>
           <a:xfrm>
-            <a:off x="1005840" y="5111496"/>
-            <a:ext cx="10149840" cy="731520"/>
-          </a:xfrm>
-          <a:prstGeom prst="roundRect">
-            <a:avLst/>
-          </a:prstGeom>
-          <a:solidFill>
-            <a:srgbClr val="F8FAFC"/>
-          </a:solidFill>
-          <a:ln w="15240">
+            <a:off x="868680" y="3822191"/>
+            <a:ext cx="10378440" cy="713232"/>
+          </a:xfrm>
+          <a:prstGeom prst="rect">
+            <a:avLst/>
+          </a:prstGeom>
+          <a:solidFill>
+            <a:srgbClr val="FFFFFF"/>
+          </a:solidFill>
+          <a:ln w="11430">
             <a:solidFill>
               <a:srgbClr val="CBD5E1"/>
             </a:solidFill>
@@ -6882,16 +7718,16 @@
       </p:sp>
       <p:sp>
         <p:nvSpPr>
-          <p:cNvPr id="18" name="Oval 17"/>
+          <p:cNvPr id="14" name="Rectangle 13"/>
           <p:cNvSpPr/>
           <p:nvPr/>
         </p:nvSpPr>
         <p:spPr>
           <a:xfrm>
-            <a:off x="1234440" y="5230368"/>
-            <a:ext cx="347472" cy="347472"/>
-          </a:xfrm>
-          <a:prstGeom prst="ellipse">
+            <a:off x="868680" y="3822191"/>
+            <a:ext cx="530352" cy="713232"/>
+          </a:xfrm>
+          <a:prstGeom prst="rect">
             <a:avLst/>
           </a:prstGeom>
           <a:solidFill>
@@ -6916,23 +7752,32 @@
           </a:fontRef>
         </p:style>
         <p:txBody>
-          <a:bodyPr rtlCol="0" anchor="ctr"/>
+          <a:bodyPr rtlCol="0" anchor="ctr" wrap="square" lIns="101600" rIns="101600" tIns="38100" bIns="38100"/>
           <a:lstStyle/>
           <a:p>
             <a:pPr algn="ctr"/>
-          </a:p>
-        </p:txBody>
-      </p:sp>
-      <p:sp>
-        <p:nvSpPr>
-          <p:cNvPr id="19" name="TextBox 18"/>
+            <a:r>
+              <a:rPr sz="1500" b="1">
+                <a:solidFill>
+                  <a:srgbClr val="FFFFFF"/>
+                </a:solidFill>
+                <a:latin typeface="Arial"/>
+              </a:rPr>
+              <a:t>2</a:t>
+            </a:r>
+          </a:p>
+        </p:txBody>
+      </p:sp>
+      <p:sp>
+        <p:nvSpPr>
+          <p:cNvPr id="15" name="TextBox 14"/>
           <p:cNvSpPr txBox="1"/>
           <p:nvPr/>
         </p:nvSpPr>
         <p:spPr>
           <a:xfrm>
-            <a:off x="1234440" y="5276088"/>
-            <a:ext cx="347472" cy="182880"/>
+            <a:off x="1572768" y="3968496"/>
+            <a:ext cx="9372600" cy="384048"/>
           </a:xfrm>
           <a:prstGeom prst="rect">
             <a:avLst/>
@@ -6940,17 +7785,114 @@
           <a:noFill/>
         </p:spPr>
         <p:txBody>
-          <a:bodyPr wrap="square">
+          <a:bodyPr wrap="square" lIns="0" rIns="0" tIns="0" bIns="0">
             <a:spAutoFit/>
           </a:bodyPr>
           <a:lstStyle/>
           <a:p>
+            <a:r>
+              <a:rPr sz="1500" b="0">
+                <a:solidFill>
+                  <a:srgbClr val="111827"/>
+                </a:solidFill>
+                <a:latin typeface="Arial"/>
+              </a:rPr>
+              <a:t>What is a portfolio?</a:t>
+            </a:r>
+          </a:p>
+        </p:txBody>
+      </p:sp>
+      <p:sp>
+        <p:nvSpPr>
+          <p:cNvPr id="16" name="Rectangle 15"/>
+          <p:cNvSpPr/>
+          <p:nvPr/>
+        </p:nvSpPr>
+        <p:spPr>
+          <a:xfrm>
+            <a:off x="868680" y="4672584"/>
+            <a:ext cx="10378440" cy="713232"/>
+          </a:xfrm>
+          <a:prstGeom prst="rect">
+            <a:avLst/>
+          </a:prstGeom>
+          <a:solidFill>
+            <a:srgbClr val="FFFFFF"/>
+          </a:solidFill>
+          <a:ln w="11430">
+            <a:solidFill>
+              <a:srgbClr val="CBD5E1"/>
+            </a:solidFill>
+          </a:ln>
+        </p:spPr>
+        <p:style>
+          <a:lnRef idx="1">
+            <a:schemeClr val="accent1"/>
+          </a:lnRef>
+          <a:fillRef idx="3">
+            <a:schemeClr val="accent1"/>
+          </a:fillRef>
+          <a:effectRef idx="2">
+            <a:schemeClr val="accent1"/>
+          </a:effectRef>
+          <a:fontRef idx="minor">
+            <a:schemeClr val="lt1"/>
+          </a:fontRef>
+        </p:style>
+        <p:txBody>
+          <a:bodyPr rtlCol="0" anchor="ctr"/>
+          <a:lstStyle/>
+          <a:p>
             <a:pPr algn="ctr"/>
-            <a:r>
-              <a:rPr sz="1000" b="1">
+          </a:p>
+        </p:txBody>
+      </p:sp>
+      <p:sp>
+        <p:nvSpPr>
+          <p:cNvPr id="17" name="Rectangle 16"/>
+          <p:cNvSpPr/>
+          <p:nvPr/>
+        </p:nvSpPr>
+        <p:spPr>
+          <a:xfrm>
+            <a:off x="868680" y="4672584"/>
+            <a:ext cx="530352" cy="713232"/>
+          </a:xfrm>
+          <a:prstGeom prst="rect">
+            <a:avLst/>
+          </a:prstGeom>
+          <a:solidFill>
+            <a:srgbClr val="BE123C"/>
+          </a:solidFill>
+          <a:ln>
+            <a:noFill/>
+          </a:ln>
+        </p:spPr>
+        <p:style>
+          <a:lnRef idx="1">
+            <a:schemeClr val="accent1"/>
+          </a:lnRef>
+          <a:fillRef idx="3">
+            <a:schemeClr val="accent1"/>
+          </a:fillRef>
+          <a:effectRef idx="2">
+            <a:schemeClr val="accent1"/>
+          </a:effectRef>
+          <a:fontRef idx="minor">
+            <a:schemeClr val="lt1"/>
+          </a:fontRef>
+        </p:style>
+        <p:txBody>
+          <a:bodyPr rtlCol="0" anchor="ctr" wrap="square" lIns="101600" rIns="101600" tIns="38100" bIns="38100"/>
+          <a:lstStyle/>
+          <a:p>
+            <a:pPr algn="ctr"/>
+            <a:r>
+              <a:rPr sz="1500" b="1">
                 <a:solidFill>
                   <a:srgbClr val="FFFFFF"/>
                 </a:solidFill>
+                <a:latin typeface="Arial"/>
               </a:rPr>
               <a:t>3</a:t>
             </a:r>
@@ -6959,14 +7901,14 @@
       </p:sp>
       <p:sp>
         <p:nvSpPr>
-          <p:cNvPr id="20" name="TextBox 19"/>
+          <p:cNvPr id="18" name="TextBox 17"/>
           <p:cNvSpPr txBox="1"/>
           <p:nvPr/>
         </p:nvSpPr>
         <p:spPr>
           <a:xfrm>
-            <a:off x="1783080" y="5230368"/>
-            <a:ext cx="9006840" cy="347472"/>
+            <a:off x="1572768" y="4818888"/>
+            <a:ext cx="9372600" cy="384048"/>
           </a:xfrm>
           <a:prstGeom prst="rect">
             <a:avLst/>
@@ -6974,16 +7916,17 @@
           <a:noFill/>
         </p:spPr>
         <p:txBody>
-          <a:bodyPr wrap="square">
+          <a:bodyPr wrap="square" lIns="0" rIns="0" tIns="0" bIns="0">
             <a:spAutoFit/>
           </a:bodyPr>
           <a:lstStyle/>
           <a:p>
             <a:r>
-              <a:rPr sz="1700" b="0">
-                <a:solidFill>
-                  <a:srgbClr val="1A202C"/>
-                </a:solidFill>
+              <a:rPr sz="1500" b="0">
+                <a:solidFill>
+                  <a:srgbClr val="111827"/>
+                </a:solidFill>
+                <a:latin typeface="Arial"/>
               </a:rPr>
               <a:t>Agree on one answer before writing.</a:t>
             </a:r>
@@ -6992,14 +7935,111 @@
       </p:sp>
       <p:sp>
         <p:nvSpPr>
+          <p:cNvPr id="19" name="Rectangle 18"/>
+          <p:cNvSpPr/>
+          <p:nvPr/>
+        </p:nvSpPr>
+        <p:spPr>
+          <a:xfrm>
+            <a:off x="868680" y="5522976"/>
+            <a:ext cx="10378440" cy="713232"/>
+          </a:xfrm>
+          <a:prstGeom prst="rect">
+            <a:avLst/>
+          </a:prstGeom>
+          <a:solidFill>
+            <a:srgbClr val="FFFFFF"/>
+          </a:solidFill>
+          <a:ln w="11430">
+            <a:solidFill>
+              <a:srgbClr val="CBD5E1"/>
+            </a:solidFill>
+          </a:ln>
+        </p:spPr>
+        <p:style>
+          <a:lnRef idx="1">
+            <a:schemeClr val="accent1"/>
+          </a:lnRef>
+          <a:fillRef idx="3">
+            <a:schemeClr val="accent1"/>
+          </a:fillRef>
+          <a:effectRef idx="2">
+            <a:schemeClr val="accent1"/>
+          </a:effectRef>
+          <a:fontRef idx="minor">
+            <a:schemeClr val="lt1"/>
+          </a:fontRef>
+        </p:style>
+        <p:txBody>
+          <a:bodyPr rtlCol="0" anchor="ctr"/>
+          <a:lstStyle/>
+          <a:p>
+            <a:pPr algn="ctr"/>
+          </a:p>
+        </p:txBody>
+      </p:sp>
+      <p:sp>
+        <p:nvSpPr>
+          <p:cNvPr id="20" name="Rectangle 19"/>
+          <p:cNvSpPr/>
+          <p:nvPr/>
+        </p:nvSpPr>
+        <p:spPr>
+          <a:xfrm>
+            <a:off x="868680" y="5522976"/>
+            <a:ext cx="530352" cy="713232"/>
+          </a:xfrm>
+          <a:prstGeom prst="rect">
+            <a:avLst/>
+          </a:prstGeom>
+          <a:solidFill>
+            <a:srgbClr val="BE123C"/>
+          </a:solidFill>
+          <a:ln>
+            <a:noFill/>
+          </a:ln>
+        </p:spPr>
+        <p:style>
+          <a:lnRef idx="1">
+            <a:schemeClr val="accent1"/>
+          </a:lnRef>
+          <a:fillRef idx="3">
+            <a:schemeClr val="accent1"/>
+          </a:fillRef>
+          <a:effectRef idx="2">
+            <a:schemeClr val="accent1"/>
+          </a:effectRef>
+          <a:fontRef idx="minor">
+            <a:schemeClr val="lt1"/>
+          </a:fontRef>
+        </p:style>
+        <p:txBody>
+          <a:bodyPr rtlCol="0" anchor="ctr" wrap="square" lIns="101600" rIns="101600" tIns="38100" bIns="38100"/>
+          <a:lstStyle/>
+          <a:p>
+            <a:pPr algn="ctr"/>
+            <a:r>
+              <a:rPr sz="1500" b="1">
+                <a:solidFill>
+                  <a:srgbClr val="FFFFFF"/>
+                </a:solidFill>
+                <a:latin typeface="Arial"/>
+              </a:rPr>
+              <a:t>4</a:t>
+            </a:r>
+          </a:p>
+        </p:txBody>
+      </p:sp>
+      <p:sp>
+        <p:nvSpPr>
           <p:cNvPr id="21" name="TextBox 20"/>
           <p:cNvSpPr txBox="1"/>
           <p:nvPr/>
         </p:nvSpPr>
         <p:spPr>
           <a:xfrm>
-            <a:off x="777240" y="6419088"/>
-            <a:ext cx="10835640" cy="228600"/>
+            <a:off x="1572768" y="5669280"/>
+            <a:ext cx="9372600" cy="384048"/>
           </a:xfrm>
           <a:prstGeom prst="rect">
             <a:avLst/>
@@ -7007,17 +8047,52 @@
           <a:noFill/>
         </p:spPr>
         <p:txBody>
-          <a:bodyPr wrap="square">
+          <a:bodyPr wrap="square" lIns="0" rIns="0" tIns="0" bIns="0">
             <a:spAutoFit/>
           </a:bodyPr>
           <a:lstStyle/>
           <a:p>
+            <a:r>
+              <a:rPr sz="1500" b="0">
+                <a:solidFill>
+                  <a:srgbClr val="111827"/>
+                </a:solidFill>
+                <a:latin typeface="Arial"/>
+              </a:rPr>
+              <a:t>Write one clear response.</a:t>
+            </a:r>
+          </a:p>
+        </p:txBody>
+      </p:sp>
+      <p:sp>
+        <p:nvSpPr>
+          <p:cNvPr id="22" name="TextBox 21"/>
+          <p:cNvSpPr txBox="1"/>
+          <p:nvPr/>
+        </p:nvSpPr>
+        <p:spPr>
+          <a:xfrm>
+            <a:off x="685800" y="6419088"/>
+            <a:ext cx="10835640" cy="228600"/>
+          </a:xfrm>
+          <a:prstGeom prst="rect">
+            <a:avLst/>
+          </a:prstGeom>
+          <a:noFill/>
+        </p:spPr>
+        <p:txBody>
+          <a:bodyPr wrap="square" lIns="0" rIns="0" tIns="0" bIns="0">
+            <a:spAutoFit/>
+          </a:bodyPr>
+          <a:lstStyle/>
+          <a:p>
             <a:pPr algn="r"/>
             <a:r>
               <a:rPr sz="1000" b="0">
                 <a:solidFill>
-                  <a:srgbClr val="5B677D"/>
-                </a:solidFill>
+                  <a:srgbClr val="475569"/>
+                </a:solidFill>
+                <a:latin typeface="Arial"/>
               </a:rPr>
               <a:t>Listen • Talk • Try • Explain</a:t>
             </a:r>
@@ -7035,6 +8110,14 @@
 <file path=ppt/slides/slide7.xml><?xml version="1.0" encoding="utf-8"?>
 <p:sld xmlns:a="http://schemas.openxmlformats.org/drawingml/2006/main" xmlns:p="http://schemas.openxmlformats.org/presentationml/2006/main" xmlns:r="http://schemas.openxmlformats.org/officeDocument/2006/relationships">
   <p:cSld>
+    <p:bg>
+      <p:bgPr>
+        <a:solidFill>
+          <a:srgbClr val="F8FAFC"/>
+        </a:solidFill>
+        <a:effectLst/>
+      </p:bgPr>
+    </p:bg>
     <p:spTree>
       <p:nvGrpSpPr>
         <p:cNvPr id="1" name=""/>
@@ -7051,13 +8134,13 @@
         <p:spPr>
           <a:xfrm>
             <a:off x="0" y="0"/>
-            <a:ext cx="12191695" cy="914400"/>
-          </a:xfrm>
-          <a:prstGeom prst="rect">
-            <a:avLst/>
-          </a:prstGeom>
-          <a:solidFill>
-            <a:srgbClr val="166534"/>
+            <a:ext cx="12191695" cy="713232"/>
+          </a:xfrm>
+          <a:prstGeom prst="rect">
+            <a:avLst/>
+          </a:prstGeom>
+          <a:solidFill>
+            <a:srgbClr val="111827"/>
           </a:solidFill>
           <a:ln>
             <a:noFill/>
@@ -7093,14 +8176,14 @@
         </p:nvSpPr>
         <p:spPr>
           <a:xfrm>
-            <a:off x="0" y="914400"/>
-            <a:ext cx="164592" cy="5943600"/>
-          </a:xfrm>
-          <a:prstGeom prst="rect">
-            <a:avLst/>
-          </a:prstGeom>
-          <a:solidFill>
-            <a:srgbClr val="166534"/>
+            <a:off x="0" y="713232"/>
+            <a:ext cx="12191695" cy="82296"/>
+          </a:xfrm>
+          <a:prstGeom prst="rect">
+            <a:avLst/>
+          </a:prstGeom>
+          <a:solidFill>
+            <a:srgbClr val="FCD116"/>
           </a:solidFill>
           <a:ln>
             <a:noFill/>
@@ -7130,125 +8213,23 @@
       </p:sp>
       <p:sp>
         <p:nvSpPr>
-          <p:cNvPr id="4" name="TextBox 3"/>
-          <p:cNvSpPr txBox="1"/>
-          <p:nvPr/>
-        </p:nvSpPr>
-        <p:spPr>
-          <a:xfrm>
-            <a:off x="594360" y="246888"/>
-            <a:ext cx="2926080" cy="320040"/>
-          </a:xfrm>
-          <a:prstGeom prst="rect">
-            <a:avLst/>
-          </a:prstGeom>
-          <a:noFill/>
-        </p:spPr>
-        <p:txBody>
-          <a:bodyPr wrap="square">
-            <a:spAutoFit/>
-          </a:bodyPr>
-          <a:lstStyle/>
-          <a:p>
-            <a:r>
-              <a:rPr sz="1300" b="1">
-                <a:solidFill>
-                  <a:srgbClr val="FFFFFF"/>
-                </a:solidFill>
-              </a:rPr>
-              <a:t>7. ACTIVITY</a:t>
-            </a:r>
-          </a:p>
-        </p:txBody>
-      </p:sp>
-      <p:sp>
-        <p:nvSpPr>
-          <p:cNvPr id="5" name="TextBox 4"/>
-          <p:cNvSpPr txBox="1"/>
-          <p:nvPr/>
-        </p:nvSpPr>
-        <p:spPr>
-          <a:xfrm>
-            <a:off x="7772400" y="246888"/>
-            <a:ext cx="3840480" cy="320040"/>
-          </a:xfrm>
-          <a:prstGeom prst="rect">
-            <a:avLst/>
-          </a:prstGeom>
-          <a:noFill/>
-        </p:spPr>
-        <p:txBody>
-          <a:bodyPr wrap="square">
-            <a:spAutoFit/>
-          </a:bodyPr>
-          <a:lstStyle/>
-          <a:p>
-            <a:pPr algn="r"/>
-            <a:r>
-              <a:rPr sz="1100" b="0">
-                <a:solidFill>
-                  <a:srgbClr val="FFFFFF"/>
-                </a:solidFill>
-              </a:rPr>
-              <a:t>p7_t1_english_1205</a:t>
-            </a:r>
-          </a:p>
-        </p:txBody>
-      </p:sp>
-      <p:sp>
-        <p:nvSpPr>
-          <p:cNvPr id="6" name="TextBox 5"/>
-          <p:cNvSpPr txBox="1"/>
-          <p:nvPr/>
-        </p:nvSpPr>
-        <p:spPr>
-          <a:xfrm>
-            <a:off x="640080" y="1143000"/>
-            <a:ext cx="10972800" cy="685800"/>
-          </a:xfrm>
-          <a:prstGeom prst="rect">
-            <a:avLst/>
-          </a:prstGeom>
-          <a:noFill/>
-        </p:spPr>
-        <p:txBody>
-          <a:bodyPr wrap="square">
-            <a:spAutoFit/>
-          </a:bodyPr>
-          <a:lstStyle/>
-          <a:p>
-            <a:r>
-              <a:rPr sz="2800" b="1">
-                <a:solidFill>
-                  <a:srgbClr val="1A202C"/>
-                </a:solidFill>
-              </a:rPr>
-              <a:t>Activity challenge</a:t>
-            </a:r>
-          </a:p>
-        </p:txBody>
-      </p:sp>
-      <p:sp>
-        <p:nvSpPr>
-          <p:cNvPr id="7" name="Rounded Rectangle 6"/>
+          <p:cNvPr id="4" name="Rectangle 3"/>
           <p:cNvSpPr/>
           <p:nvPr/>
         </p:nvSpPr>
         <p:spPr>
           <a:xfrm>
-            <a:off x="777240" y="1993392"/>
-            <a:ext cx="10835640" cy="1005840"/>
-          </a:xfrm>
-          <a:prstGeom prst="roundRect">
-            <a:avLst/>
-          </a:prstGeom>
-          <a:solidFill>
-            <a:srgbClr val="FFFBEB"/>
-          </a:solidFill>
-          <a:ln w="15240">
-            <a:solidFill>
-              <a:srgbClr val="166534"/>
-            </a:solidFill>
+            <a:off x="0" y="795528"/>
+            <a:ext cx="12191695" cy="64008"/>
+          </a:xfrm>
+          <a:prstGeom prst="rect">
+            <a:avLst/>
+          </a:prstGeom>
+          <a:solidFill>
+            <a:srgbClr val="D90000"/>
+          </a:solidFill>
+          <a:ln>
+            <a:noFill/>
           </a:ln>
         </p:spPr>
         <p:style>
@@ -7275,58 +8256,23 @@
       </p:sp>
       <p:sp>
         <p:nvSpPr>
-          <p:cNvPr id="8" name="TextBox 7"/>
-          <p:cNvSpPr txBox="1"/>
-          <p:nvPr/>
-        </p:nvSpPr>
-        <p:spPr>
-          <a:xfrm>
-            <a:off x="1051560" y="2212848"/>
-            <a:ext cx="10287000" cy="502920"/>
-          </a:xfrm>
-          <a:prstGeom prst="rect">
-            <a:avLst/>
-          </a:prstGeom>
-          <a:noFill/>
-        </p:spPr>
-        <p:txBody>
-          <a:bodyPr wrap="square">
-            <a:spAutoFit/>
-          </a:bodyPr>
-          <a:lstStyle/>
-          <a:p>
-            <a:r>
-              <a:rPr sz="2100" b="1">
-                <a:solidFill>
-                  <a:srgbClr val="1A202C"/>
-                </a:solidFill>
-              </a:rPr>
-              <a:t>Group task:</a:t>
-            </a:r>
-          </a:p>
-        </p:txBody>
-      </p:sp>
-      <p:sp>
-        <p:nvSpPr>
-          <p:cNvPr id="9" name="Rounded Rectangle 8"/>
+          <p:cNvPr id="5" name="Rectangle 4"/>
           <p:cNvSpPr/>
           <p:nvPr/>
         </p:nvSpPr>
         <p:spPr>
           <a:xfrm>
-            <a:off x="1005840" y="3246120"/>
-            <a:ext cx="10149840" cy="621792"/>
-          </a:xfrm>
-          <a:prstGeom prst="roundRect">
-            <a:avLst/>
-          </a:prstGeom>
-          <a:solidFill>
-            <a:srgbClr val="F8FAFC"/>
-          </a:solidFill>
-          <a:ln w="15240">
-            <a:solidFill>
-              <a:srgbClr val="CBD5E1"/>
-            </a:solidFill>
+            <a:off x="0" y="859536"/>
+            <a:ext cx="164592" cy="5998464"/>
+          </a:xfrm>
+          <a:prstGeom prst="rect">
+            <a:avLst/>
+          </a:prstGeom>
+          <a:solidFill>
+            <a:srgbClr val="1B7F3A"/>
+          </a:solidFill>
+          <a:ln>
+            <a:noFill/>
           </a:ln>
         </p:spPr>
         <p:style>
@@ -7353,23 +8299,128 @@
       </p:sp>
       <p:sp>
         <p:nvSpPr>
-          <p:cNvPr id="10" name="Oval 9"/>
+          <p:cNvPr id="6" name="TextBox 5"/>
+          <p:cNvSpPr txBox="1"/>
+          <p:nvPr/>
+        </p:nvSpPr>
+        <p:spPr>
+          <a:xfrm>
+            <a:off x="502920" y="210312"/>
+            <a:ext cx="3200400" cy="256032"/>
+          </a:xfrm>
+          <a:prstGeom prst="rect">
+            <a:avLst/>
+          </a:prstGeom>
+          <a:noFill/>
+        </p:spPr>
+        <p:txBody>
+          <a:bodyPr wrap="square" lIns="0" rIns="0" tIns="0" bIns="0">
+            <a:spAutoFit/>
+          </a:bodyPr>
+          <a:lstStyle/>
+          <a:p>
+            <a:r>
+              <a:rPr sz="1200" b="1">
+                <a:solidFill>
+                  <a:srgbClr val="FFFFFF"/>
+                </a:solidFill>
+                <a:latin typeface="Arial"/>
+              </a:rPr>
+              <a:t>7. ACTIVITY</a:t>
+            </a:r>
+          </a:p>
+        </p:txBody>
+      </p:sp>
+      <p:sp>
+        <p:nvSpPr>
+          <p:cNvPr id="7" name="TextBox 6"/>
+          <p:cNvSpPr txBox="1"/>
+          <p:nvPr/>
+        </p:nvSpPr>
+        <p:spPr>
+          <a:xfrm>
+            <a:off x="7589520" y="210312"/>
+            <a:ext cx="4069080" cy="256032"/>
+          </a:xfrm>
+          <a:prstGeom prst="rect">
+            <a:avLst/>
+          </a:prstGeom>
+          <a:noFill/>
+        </p:spPr>
+        <p:txBody>
+          <a:bodyPr wrap="square" lIns="0" rIns="0" tIns="0" bIns="0">
+            <a:spAutoFit/>
+          </a:bodyPr>
+          <a:lstStyle/>
+          <a:p>
+            <a:pPr algn="r"/>
+            <a:r>
+              <a:rPr sz="1000" b="0">
+                <a:solidFill>
+                  <a:srgbClr val="FFFFFF"/>
+                </a:solidFill>
+                <a:latin typeface="Arial"/>
+              </a:rPr>
+              <a:t>p7_t1_english_1205</a:t>
+            </a:r>
+          </a:p>
+        </p:txBody>
+      </p:sp>
+      <p:sp>
+        <p:nvSpPr>
+          <p:cNvPr id="8" name="TextBox 7"/>
+          <p:cNvSpPr txBox="1"/>
+          <p:nvPr/>
+        </p:nvSpPr>
+        <p:spPr>
+          <a:xfrm>
+            <a:off x="594360" y="1042415"/>
+            <a:ext cx="11109960" cy="566928"/>
+          </a:xfrm>
+          <a:prstGeom prst="rect">
+            <a:avLst/>
+          </a:prstGeom>
+          <a:noFill/>
+        </p:spPr>
+        <p:txBody>
+          <a:bodyPr wrap="square" lIns="0" rIns="0" tIns="0" bIns="0">
+            <a:spAutoFit/>
+          </a:bodyPr>
+          <a:lstStyle/>
+          <a:p>
+            <a:r>
+              <a:rPr sz="2600" b="1">
+                <a:solidFill>
+                  <a:srgbClr val="111827"/>
+                </a:solidFill>
+                <a:latin typeface="Arial"/>
+              </a:rPr>
+              <a:t>Activity challenge</a:t>
+            </a:r>
+          </a:p>
+        </p:txBody>
+      </p:sp>
+      <p:sp>
+        <p:nvSpPr>
+          <p:cNvPr id="9" name="Rectangle 8"/>
           <p:cNvSpPr/>
           <p:nvPr/>
         </p:nvSpPr>
         <p:spPr>
           <a:xfrm>
-            <a:off x="1234440" y="3364991"/>
-            <a:ext cx="347472" cy="347472"/>
-          </a:xfrm>
-          <a:prstGeom prst="ellipse">
-            <a:avLst/>
-          </a:prstGeom>
-          <a:solidFill>
-            <a:srgbClr val="166534"/>
-          </a:solidFill>
-          <a:ln>
-            <a:noFill/>
+            <a:off x="685800" y="1874519"/>
+            <a:ext cx="10835640" cy="804672"/>
+          </a:xfrm>
+          <a:prstGeom prst="rect">
+            <a:avLst/>
+          </a:prstGeom>
+          <a:solidFill>
+            <a:srgbClr val="FFF7E0"/>
+          </a:solidFill>
+          <a:ln w="17780">
+            <a:solidFill>
+              <a:srgbClr val="1B7F3A"/>
+            </a:solidFill>
           </a:ln>
         </p:spPr>
         <p:style>
@@ -7387,98 +8438,40 @@
           </a:fontRef>
         </p:style>
         <p:txBody>
-          <a:bodyPr rtlCol="0" anchor="ctr"/>
+          <a:bodyPr rtlCol="0" anchor="ctr" wrap="square" lIns="101600" rIns="101600" tIns="38100" bIns="38100"/>
           <a:lstStyle/>
           <a:p>
             <a:pPr algn="ctr"/>
-          </a:p>
-        </p:txBody>
-      </p:sp>
-      <p:sp>
-        <p:nvSpPr>
-          <p:cNvPr id="11" name="TextBox 10"/>
-          <p:cNvSpPr txBox="1"/>
-          <p:nvPr/>
-        </p:nvSpPr>
-        <p:spPr>
-          <a:xfrm>
-            <a:off x="1234440" y="3410712"/>
-            <a:ext cx="347472" cy="182880"/>
-          </a:xfrm>
-          <a:prstGeom prst="rect">
-            <a:avLst/>
-          </a:prstGeom>
-          <a:noFill/>
-        </p:spPr>
-        <p:txBody>
-          <a:bodyPr wrap="square">
-            <a:spAutoFit/>
-          </a:bodyPr>
-          <a:lstStyle/>
-          <a:p>
-            <a:pPr algn="ctr"/>
-            <a:r>
-              <a:rPr sz="1000" b="1">
-                <a:solidFill>
-                  <a:srgbClr val="FFFFFF"/>
-                </a:solidFill>
+            <a:r>
+              <a:rPr sz="1900" b="1">
+                <a:solidFill>
+                  <a:srgbClr val="111827"/>
+                </a:solidFill>
+                <a:latin typeface="Arial"/>
               </a:rPr>
-              <a:t>1</a:t>
-            </a:r>
-          </a:p>
-        </p:txBody>
-      </p:sp>
-      <p:sp>
-        <p:nvSpPr>
-          <p:cNvPr id="12" name="TextBox 11"/>
-          <p:cNvSpPr txBox="1"/>
-          <p:nvPr/>
-        </p:nvSpPr>
-        <p:spPr>
-          <a:xfrm>
-            <a:off x="1783080" y="3364991"/>
-            <a:ext cx="9006840" cy="347472"/>
-          </a:xfrm>
-          <a:prstGeom prst="rect">
-            <a:avLst/>
-          </a:prstGeom>
-          <a:noFill/>
-        </p:spPr>
-        <p:txBody>
-          <a:bodyPr wrap="square">
-            <a:spAutoFit/>
-          </a:bodyPr>
-          <a:lstStyle/>
-          <a:p>
-            <a:r>
-              <a:rPr sz="1700" b="0">
-                <a:solidFill>
-                  <a:srgbClr val="1A202C"/>
-                </a:solidFill>
-              </a:rPr>
-              <a:t>Students sit in a circle and participate in a "Turn and Talk" session to share their</a:t>
-            </a:r>
-          </a:p>
-        </p:txBody>
-      </p:sp>
-      <p:sp>
-        <p:nvSpPr>
-          <p:cNvPr id="13" name="Rounded Rectangle 12"/>
+              <a:t>Group task:</a:t>
+            </a:r>
+          </a:p>
+        </p:txBody>
+      </p:sp>
+      <p:sp>
+        <p:nvSpPr>
+          <p:cNvPr id="10" name="Rectangle 9"/>
           <p:cNvSpPr/>
           <p:nvPr/>
         </p:nvSpPr>
         <p:spPr>
           <a:xfrm>
-            <a:off x="1005840" y="4069080"/>
-            <a:ext cx="10149840" cy="621792"/>
-          </a:xfrm>
-          <a:prstGeom prst="roundRect">
-            <a:avLst/>
-          </a:prstGeom>
-          <a:solidFill>
-            <a:srgbClr val="F8FAFC"/>
-          </a:solidFill>
-          <a:ln w="15240">
+            <a:off x="868680" y="2971800"/>
+            <a:ext cx="10378440" cy="713232"/>
+          </a:xfrm>
+          <a:prstGeom prst="rect">
+            <a:avLst/>
+          </a:prstGeom>
+          <a:solidFill>
+            <a:srgbClr val="FFFFFF"/>
+          </a:solidFill>
+          <a:ln w="11430">
             <a:solidFill>
               <a:srgbClr val="CBD5E1"/>
             </a:solidFill>
@@ -7508,20 +8501,20 @@
       </p:sp>
       <p:sp>
         <p:nvSpPr>
-          <p:cNvPr id="14" name="Oval 13"/>
+          <p:cNvPr id="11" name="Rectangle 10"/>
           <p:cNvSpPr/>
           <p:nvPr/>
         </p:nvSpPr>
         <p:spPr>
           <a:xfrm>
-            <a:off x="1234440" y="4187952"/>
-            <a:ext cx="347472" cy="347472"/>
-          </a:xfrm>
-          <a:prstGeom prst="ellipse">
-            <a:avLst/>
-          </a:prstGeom>
-          <a:solidFill>
-            <a:srgbClr val="166534"/>
+            <a:off x="868680" y="2971800"/>
+            <a:ext cx="530352" cy="713232"/>
+          </a:xfrm>
+          <a:prstGeom prst="rect">
+            <a:avLst/>
+          </a:prstGeom>
+          <a:solidFill>
+            <a:srgbClr val="1B7F3A"/>
           </a:solidFill>
           <a:ln>
             <a:noFill/>
@@ -7542,23 +8535,32 @@
           </a:fontRef>
         </p:style>
         <p:txBody>
-          <a:bodyPr rtlCol="0" anchor="ctr"/>
+          <a:bodyPr rtlCol="0" anchor="ctr" wrap="square" lIns="101600" rIns="101600" tIns="38100" bIns="38100"/>
           <a:lstStyle/>
           <a:p>
             <a:pPr algn="ctr"/>
-          </a:p>
-        </p:txBody>
-      </p:sp>
-      <p:sp>
-        <p:nvSpPr>
-          <p:cNvPr id="15" name="TextBox 14"/>
+            <a:r>
+              <a:rPr sz="1500" b="1">
+                <a:solidFill>
+                  <a:srgbClr val="FFFFFF"/>
+                </a:solidFill>
+                <a:latin typeface="Arial"/>
+              </a:rPr>
+              <a:t>1</a:t>
+            </a:r>
+          </a:p>
+        </p:txBody>
+      </p:sp>
+      <p:sp>
+        <p:nvSpPr>
+          <p:cNvPr id="12" name="TextBox 11"/>
           <p:cNvSpPr txBox="1"/>
           <p:nvPr/>
         </p:nvSpPr>
         <p:spPr>
           <a:xfrm>
-            <a:off x="1234440" y="4233672"/>
-            <a:ext cx="347472" cy="182880"/>
+            <a:off x="1572768" y="3118104"/>
+            <a:ext cx="9372600" cy="384048"/>
           </a:xfrm>
           <a:prstGeom prst="rect">
             <a:avLst/>
@@ -7566,74 +8568,41 @@
           <a:noFill/>
         </p:spPr>
         <p:txBody>
-          <a:bodyPr wrap="square">
+          <a:bodyPr wrap="square" lIns="0" rIns="0" tIns="0" bIns="0">
             <a:spAutoFit/>
           </a:bodyPr>
           <a:lstStyle/>
           <a:p>
-            <a:pPr algn="ctr"/>
-            <a:r>
-              <a:rPr sz="1000" b="1">
-                <a:solidFill>
-                  <a:srgbClr val="FFFFFF"/>
-                </a:solidFill>
+            <a:r>
+              <a:rPr sz="1500" b="0">
+                <a:solidFill>
+                  <a:srgbClr val="111827"/>
+                </a:solidFill>
+                <a:latin typeface="Arial"/>
               </a:rPr>
-              <a:t>2</a:t>
-            </a:r>
-          </a:p>
-        </p:txBody>
-      </p:sp>
-      <p:sp>
-        <p:nvSpPr>
-          <p:cNvPr id="16" name="TextBox 15"/>
-          <p:cNvSpPr txBox="1"/>
-          <p:nvPr/>
-        </p:nvSpPr>
-        <p:spPr>
-          <a:xfrm>
-            <a:off x="1783080" y="4187952"/>
-            <a:ext cx="9006840" cy="347472"/>
-          </a:xfrm>
-          <a:prstGeom prst="rect">
-            <a:avLst/>
-          </a:prstGeom>
-          <a:noFill/>
-        </p:spPr>
-        <p:txBody>
-          <a:bodyPr wrap="square">
-            <a:spAutoFit/>
-          </a:bodyPr>
-          <a:lstStyle/>
-          <a:p>
-            <a:r>
-              <a:rPr sz="1700" b="0">
-                <a:solidFill>
-                  <a:srgbClr val="1A202C"/>
-                </a:solidFill>
-              </a:rPr>
-              <a:t>favorite English lesson from the term with a partner, then share one strength with</a:t>
-            </a:r>
-          </a:p>
-        </p:txBody>
-      </p:sp>
-      <p:sp>
-        <p:nvSpPr>
-          <p:cNvPr id="17" name="Rounded Rectangle 16"/>
+              <a:t>Students sit in a circle and participate in a "Turn and Talk" ses...</a:t>
+            </a:r>
+          </a:p>
+        </p:txBody>
+      </p:sp>
+      <p:sp>
+        <p:nvSpPr>
+          <p:cNvPr id="13" name="Rectangle 12"/>
           <p:cNvSpPr/>
           <p:nvPr/>
         </p:nvSpPr>
         <p:spPr>
           <a:xfrm>
-            <a:off x="1005840" y="4892040"/>
-            <a:ext cx="10149840" cy="621792"/>
-          </a:xfrm>
-          <a:prstGeom prst="roundRect">
-            <a:avLst/>
-          </a:prstGeom>
-          <a:solidFill>
-            <a:srgbClr val="F8FAFC"/>
-          </a:solidFill>
-          <a:ln w="15240">
+            <a:off x="868680" y="3822191"/>
+            <a:ext cx="10378440" cy="713232"/>
+          </a:xfrm>
+          <a:prstGeom prst="rect">
+            <a:avLst/>
+          </a:prstGeom>
+          <a:solidFill>
+            <a:srgbClr val="FFFFFF"/>
+          </a:solidFill>
+          <a:ln w="11430">
             <a:solidFill>
               <a:srgbClr val="CBD5E1"/>
             </a:solidFill>
@@ -7663,20 +8632,20 @@
       </p:sp>
       <p:sp>
         <p:nvSpPr>
-          <p:cNvPr id="18" name="Oval 17"/>
+          <p:cNvPr id="14" name="Rectangle 13"/>
           <p:cNvSpPr/>
           <p:nvPr/>
         </p:nvSpPr>
         <p:spPr>
           <a:xfrm>
-            <a:off x="1234440" y="5010912"/>
-            <a:ext cx="347472" cy="347472"/>
-          </a:xfrm>
-          <a:prstGeom prst="ellipse">
-            <a:avLst/>
-          </a:prstGeom>
-          <a:solidFill>
-            <a:srgbClr val="166534"/>
+            <a:off x="868680" y="3822191"/>
+            <a:ext cx="530352" cy="713232"/>
+          </a:xfrm>
+          <a:prstGeom prst="rect">
+            <a:avLst/>
+          </a:prstGeom>
+          <a:solidFill>
+            <a:srgbClr val="1B7F3A"/>
           </a:solidFill>
           <a:ln>
             <a:noFill/>
@@ -7697,23 +8666,32 @@
           </a:fontRef>
         </p:style>
         <p:txBody>
-          <a:bodyPr rtlCol="0" anchor="ctr"/>
+          <a:bodyPr rtlCol="0" anchor="ctr" wrap="square" lIns="101600" rIns="101600" tIns="38100" bIns="38100"/>
           <a:lstStyle/>
           <a:p>
             <a:pPr algn="ctr"/>
-          </a:p>
-        </p:txBody>
-      </p:sp>
-      <p:sp>
-        <p:nvSpPr>
-          <p:cNvPr id="19" name="TextBox 18"/>
+            <a:r>
+              <a:rPr sz="1500" b="1">
+                <a:solidFill>
+                  <a:srgbClr val="FFFFFF"/>
+                </a:solidFill>
+                <a:latin typeface="Arial"/>
+              </a:rPr>
+              <a:t>2</a:t>
+            </a:r>
+          </a:p>
+        </p:txBody>
+      </p:sp>
+      <p:sp>
+        <p:nvSpPr>
+          <p:cNvPr id="15" name="TextBox 14"/>
           <p:cNvSpPr txBox="1"/>
           <p:nvPr/>
         </p:nvSpPr>
         <p:spPr>
           <a:xfrm>
-            <a:off x="1234440" y="5056632"/>
-            <a:ext cx="347472" cy="182880"/>
+            <a:off x="1572768" y="3968496"/>
+            <a:ext cx="9372600" cy="384048"/>
           </a:xfrm>
           <a:prstGeom prst="rect">
             <a:avLst/>
@@ -7721,74 +8699,41 @@
           <a:noFill/>
         </p:spPr>
         <p:txBody>
-          <a:bodyPr wrap="square">
+          <a:bodyPr wrap="square" lIns="0" rIns="0" tIns="0" bIns="0">
             <a:spAutoFit/>
           </a:bodyPr>
           <a:lstStyle/>
           <a:p>
-            <a:pPr algn="ctr"/>
-            <a:r>
-              <a:rPr sz="1000" b="1">
-                <a:solidFill>
-                  <a:srgbClr val="FFFFFF"/>
-                </a:solidFill>
+            <a:r>
+              <a:rPr sz="1500" b="0">
+                <a:solidFill>
+                  <a:srgbClr val="111827"/>
+                </a:solidFill>
+                <a:latin typeface="Arial"/>
               </a:rPr>
-              <a:t>3</a:t>
-            </a:r>
-          </a:p>
-        </p:txBody>
-      </p:sp>
-      <p:sp>
-        <p:nvSpPr>
-          <p:cNvPr id="20" name="TextBox 19"/>
-          <p:cNvSpPr txBox="1"/>
-          <p:nvPr/>
-        </p:nvSpPr>
-        <p:spPr>
-          <a:xfrm>
-            <a:off x="1783080" y="5010912"/>
-            <a:ext cx="9006840" cy="347472"/>
-          </a:xfrm>
-          <a:prstGeom prst="rect">
-            <a:avLst/>
-          </a:prstGeom>
-          <a:noFill/>
-        </p:spPr>
-        <p:txBody>
-          <a:bodyPr wrap="square">
-            <a:spAutoFit/>
-          </a:bodyPr>
-          <a:lstStyle/>
-          <a:p>
-            <a:r>
-              <a:rPr sz="1700" b="0">
-                <a:solidFill>
-                  <a:srgbClr val="1A202C"/>
-                </a:solidFill>
-              </a:rPr>
-              <a:t>the whole class.</a:t>
-            </a:r>
-          </a:p>
-        </p:txBody>
-      </p:sp>
-      <p:sp>
-        <p:nvSpPr>
-          <p:cNvPr id="21" name="Rounded Rectangle 20"/>
+              <a:t>Students write the new vocabulary in their exercise books and wor...</a:t>
+            </a:r>
+          </a:p>
+        </p:txBody>
+      </p:sp>
+      <p:sp>
+        <p:nvSpPr>
+          <p:cNvPr id="16" name="Rectangle 15"/>
           <p:cNvSpPr/>
           <p:nvPr/>
         </p:nvSpPr>
         <p:spPr>
           <a:xfrm>
-            <a:off x="1005840" y="5715000"/>
-            <a:ext cx="10149840" cy="621792"/>
-          </a:xfrm>
-          <a:prstGeom prst="roundRect">
-            <a:avLst/>
-          </a:prstGeom>
-          <a:solidFill>
-            <a:srgbClr val="F8FAFC"/>
-          </a:solidFill>
-          <a:ln w="15240">
+            <a:off x="868680" y="4672584"/>
+            <a:ext cx="10378440" cy="713232"/>
+          </a:xfrm>
+          <a:prstGeom prst="rect">
+            <a:avLst/>
+          </a:prstGeom>
+          <a:solidFill>
+            <a:srgbClr val="FFFFFF"/>
+          </a:solidFill>
+          <a:ln w="11430">
             <a:solidFill>
               <a:srgbClr val="CBD5E1"/>
             </a:solidFill>
@@ -7818,20 +8763,20 @@
       </p:sp>
       <p:sp>
         <p:nvSpPr>
-          <p:cNvPr id="22" name="Oval 21"/>
+          <p:cNvPr id="17" name="Rectangle 16"/>
           <p:cNvSpPr/>
           <p:nvPr/>
         </p:nvSpPr>
         <p:spPr>
           <a:xfrm>
-            <a:off x="1234440" y="5833872"/>
-            <a:ext cx="347472" cy="347472"/>
-          </a:xfrm>
-          <a:prstGeom prst="ellipse">
-            <a:avLst/>
-          </a:prstGeom>
-          <a:solidFill>
-            <a:srgbClr val="166534"/>
+            <a:off x="868680" y="4672584"/>
+            <a:ext cx="530352" cy="713232"/>
+          </a:xfrm>
+          <a:prstGeom prst="rect">
+            <a:avLst/>
+          </a:prstGeom>
+          <a:solidFill>
+            <a:srgbClr val="1B7F3A"/>
           </a:solidFill>
           <a:ln>
             <a:noFill/>
@@ -7852,23 +8797,32 @@
           </a:fontRef>
         </p:style>
         <p:txBody>
-          <a:bodyPr rtlCol="0" anchor="ctr"/>
+          <a:bodyPr rtlCol="0" anchor="ctr" wrap="square" lIns="101600" rIns="101600" tIns="38100" bIns="38100"/>
           <a:lstStyle/>
           <a:p>
             <a:pPr algn="ctr"/>
-          </a:p>
-        </p:txBody>
-      </p:sp>
-      <p:sp>
-        <p:nvSpPr>
-          <p:cNvPr id="23" name="TextBox 22"/>
+            <a:r>
+              <a:rPr sz="1500" b="1">
+                <a:solidFill>
+                  <a:srgbClr val="FFFFFF"/>
+                </a:solidFill>
+                <a:latin typeface="Arial"/>
+              </a:rPr>
+              <a:t>3</a:t>
+            </a:r>
+          </a:p>
+        </p:txBody>
+      </p:sp>
+      <p:sp>
+        <p:nvSpPr>
+          <p:cNvPr id="18" name="TextBox 17"/>
           <p:cNvSpPr txBox="1"/>
           <p:nvPr/>
         </p:nvSpPr>
         <p:spPr>
           <a:xfrm>
-            <a:off x="1234440" y="5879592"/>
-            <a:ext cx="347472" cy="182880"/>
+            <a:off x="1572768" y="4818888"/>
+            <a:ext cx="9372600" cy="384048"/>
           </a:xfrm>
           <a:prstGeom prst="rect">
             <a:avLst/>
@@ -7876,74 +8830,41 @@
           <a:noFill/>
         </p:spPr>
         <p:txBody>
-          <a:bodyPr wrap="square">
+          <a:bodyPr wrap="square" lIns="0" rIns="0" tIns="0" bIns="0">
             <a:spAutoFit/>
           </a:bodyPr>
           <a:lstStyle/>
           <a:p>
-            <a:pPr algn="ctr"/>
-            <a:r>
-              <a:rPr sz="1000" b="1">
-                <a:solidFill>
-                  <a:srgbClr val="FFFFFF"/>
-                </a:solidFill>
+            <a:r>
+              <a:rPr sz="1500" b="0">
+                <a:solidFill>
+                  <a:srgbClr val="111827"/>
+                </a:solidFill>
+                <a:latin typeface="Arial"/>
               </a:rPr>
-              <a:t>4</a:t>
-            </a:r>
-          </a:p>
-        </p:txBody>
-      </p:sp>
-      <p:sp>
-        <p:nvSpPr>
-          <p:cNvPr id="24" name="TextBox 23"/>
-          <p:cNvSpPr txBox="1"/>
-          <p:nvPr/>
-        </p:nvSpPr>
-        <p:spPr>
-          <a:xfrm>
-            <a:off x="1783080" y="5833872"/>
-            <a:ext cx="9006840" cy="347472"/>
-          </a:xfrm>
-          <a:prstGeom prst="rect">
-            <a:avLst/>
-          </a:prstGeom>
-          <a:noFill/>
-        </p:spPr>
-        <p:txBody>
-          <a:bodyPr wrap="square">
-            <a:spAutoFit/>
-          </a:bodyPr>
-          <a:lstStyle/>
-          <a:p>
-            <a:r>
-              <a:rPr sz="1700" b="0">
-                <a:solidFill>
-                  <a:srgbClr val="1A202C"/>
-                </a:solidFill>
-              </a:rPr>
-              <a:t>Students write the new vocabulary in their exercise books and work in pairs to list</a:t>
-            </a:r>
-          </a:p>
-        </p:txBody>
-      </p:sp>
-      <p:sp>
-        <p:nvSpPr>
-          <p:cNvPr id="25" name="Rounded Rectangle 24"/>
+              <a:t>Individual activity: Learners silently read through their term's...</a:t>
+            </a:r>
+          </a:p>
+        </p:txBody>
+      </p:sp>
+      <p:sp>
+        <p:nvSpPr>
+          <p:cNvPr id="19" name="Rectangle 18"/>
           <p:cNvSpPr/>
           <p:nvPr/>
         </p:nvSpPr>
         <p:spPr>
           <a:xfrm>
-            <a:off x="1005840" y="6537960"/>
-            <a:ext cx="10149840" cy="621792"/>
-          </a:xfrm>
-          <a:prstGeom prst="roundRect">
-            <a:avLst/>
-          </a:prstGeom>
-          <a:solidFill>
-            <a:srgbClr val="F8FAFC"/>
-          </a:solidFill>
-          <a:ln w="15240">
+            <a:off x="868680" y="5522976"/>
+            <a:ext cx="10378440" cy="713232"/>
+          </a:xfrm>
+          <a:prstGeom prst="rect">
+            <a:avLst/>
+          </a:prstGeom>
+          <a:solidFill>
+            <a:srgbClr val="FFFFFF"/>
+          </a:solidFill>
+          <a:ln w="11430">
             <a:solidFill>
               <a:srgbClr val="CBD5E1"/>
             </a:solidFill>
@@ -7973,20 +8894,20 @@
       </p:sp>
       <p:sp>
         <p:nvSpPr>
-          <p:cNvPr id="26" name="Oval 25"/>
+          <p:cNvPr id="20" name="Rectangle 19"/>
           <p:cNvSpPr/>
           <p:nvPr/>
         </p:nvSpPr>
         <p:spPr>
           <a:xfrm>
-            <a:off x="1234440" y="6656832"/>
-            <a:ext cx="347472" cy="347472"/>
-          </a:xfrm>
-          <a:prstGeom prst="ellipse">
-            <a:avLst/>
-          </a:prstGeom>
-          <a:solidFill>
-            <a:srgbClr val="166534"/>
+            <a:off x="868680" y="5522976"/>
+            <a:ext cx="530352" cy="713232"/>
+          </a:xfrm>
+          <a:prstGeom prst="rect">
+            <a:avLst/>
+          </a:prstGeom>
+          <a:solidFill>
+            <a:srgbClr val="1B7F3A"/>
           </a:solidFill>
           <a:ln>
             <a:noFill/>
@@ -8007,23 +8928,32 @@
           </a:fontRef>
         </p:style>
         <p:txBody>
-          <a:bodyPr rtlCol="0" anchor="ctr"/>
+          <a:bodyPr rtlCol="0" anchor="ctr" wrap="square" lIns="101600" rIns="101600" tIns="38100" bIns="38100"/>
           <a:lstStyle/>
           <a:p>
             <a:pPr algn="ctr"/>
-          </a:p>
-        </p:txBody>
-      </p:sp>
-      <p:sp>
-        <p:nvSpPr>
-          <p:cNvPr id="27" name="TextBox 26"/>
+            <a:r>
+              <a:rPr sz="1500" b="1">
+                <a:solidFill>
+                  <a:srgbClr val="FFFFFF"/>
+                </a:solidFill>
+                <a:latin typeface="Arial"/>
+              </a:rPr>
+              <a:t>4</a:t>
+            </a:r>
+          </a:p>
+        </p:txBody>
+      </p:sp>
+      <p:sp>
+        <p:nvSpPr>
+          <p:cNvPr id="21" name="TextBox 20"/>
           <p:cNvSpPr txBox="1"/>
           <p:nvPr/>
         </p:nvSpPr>
         <p:spPr>
           <a:xfrm>
-            <a:off x="1234440" y="6702552"/>
-            <a:ext cx="347472" cy="182880"/>
+            <a:off x="1572768" y="5669280"/>
+            <a:ext cx="9372600" cy="384048"/>
           </a:xfrm>
           <a:prstGeom prst="rect">
             <a:avLst/>
@@ -8031,33 +8961,33 @@
           <a:noFill/>
         </p:spPr>
         <p:txBody>
-          <a:bodyPr wrap="square">
+          <a:bodyPr wrap="square" lIns="0" rIns="0" tIns="0" bIns="0">
             <a:spAutoFit/>
           </a:bodyPr>
           <a:lstStyle/>
           <a:p>
-            <a:pPr algn="ctr"/>
-            <a:r>
-              <a:rPr sz="1000" b="1">
-                <a:solidFill>
-                  <a:srgbClr val="FFFFFF"/>
-                </a:solidFill>
+            <a:r>
+              <a:rPr sz="1500" b="0">
+                <a:solidFill>
+                  <a:srgbClr val="111827"/>
+                </a:solidFill>
+                <a:latin typeface="Arial"/>
               </a:rPr>
-              <a:t>5</a:t>
-            </a:r>
-          </a:p>
-        </p:txBody>
-      </p:sp>
-      <p:sp>
-        <p:nvSpPr>
-          <p:cNvPr id="28" name="TextBox 27"/>
+              <a:t>Write one clear response.</a:t>
+            </a:r>
+          </a:p>
+        </p:txBody>
+      </p:sp>
+      <p:sp>
+        <p:nvSpPr>
+          <p:cNvPr id="22" name="TextBox 21"/>
           <p:cNvSpPr txBox="1"/>
           <p:nvPr/>
         </p:nvSpPr>
         <p:spPr>
           <a:xfrm>
-            <a:off x="1783080" y="6656832"/>
-            <a:ext cx="9006840" cy="347472"/>
+            <a:off x="685800" y="6419088"/>
+            <a:ext cx="10835640" cy="228600"/>
           </a:xfrm>
           <a:prstGeom prst="rect">
             <a:avLst/>
@@ -8065,50 +8995,18 @@
           <a:noFill/>
         </p:spPr>
         <p:txBody>
-          <a:bodyPr wrap="square">
+          <a:bodyPr wrap="square" lIns="0" rIns="0" tIns="0" bIns="0">
             <a:spAutoFit/>
           </a:bodyPr>
           <a:lstStyle/>
           <a:p>
-            <a:r>
-              <a:rPr sz="1700" b="0">
-                <a:solidFill>
-                  <a:srgbClr val="1A202C"/>
-                </a:solidFill>
-              </a:rPr>
-              <a:t>three "criteria"...</a:t>
-            </a:r>
-          </a:p>
-        </p:txBody>
-      </p:sp>
-      <p:sp>
-        <p:nvSpPr>
-          <p:cNvPr id="29" name="TextBox 28"/>
-          <p:cNvSpPr txBox="1"/>
-          <p:nvPr/>
-        </p:nvSpPr>
-        <p:spPr>
-          <a:xfrm>
-            <a:off x="777240" y="6419088"/>
-            <a:ext cx="10835640" cy="228600"/>
-          </a:xfrm>
-          <a:prstGeom prst="rect">
-            <a:avLst/>
-          </a:prstGeom>
-          <a:noFill/>
-        </p:spPr>
-        <p:txBody>
-          <a:bodyPr wrap="square">
-            <a:spAutoFit/>
-          </a:bodyPr>
-          <a:lstStyle/>
-          <a:p>
             <a:pPr algn="r"/>
             <a:r>
               <a:rPr sz="1000" b="0">
                 <a:solidFill>
-                  <a:srgbClr val="5B677D"/>
-                </a:solidFill>
+                  <a:srgbClr val="475569"/>
+                </a:solidFill>
+                <a:latin typeface="Arial"/>
               </a:rPr>
               <a:t>Listen • Talk • Try • Explain</a:t>
             </a:r>
@@ -8126,6 +9024,14 @@
 <file path=ppt/slides/slide8.xml><?xml version="1.0" encoding="utf-8"?>
 <p:sld xmlns:a="http://schemas.openxmlformats.org/drawingml/2006/main" xmlns:p="http://schemas.openxmlformats.org/presentationml/2006/main" xmlns:r="http://schemas.openxmlformats.org/officeDocument/2006/relationships">
   <p:cSld>
+    <p:bg>
+      <p:bgPr>
+        <a:solidFill>
+          <a:srgbClr val="F8FAFC"/>
+        </a:solidFill>
+        <a:effectLst/>
+      </p:bgPr>
+    </p:bg>
     <p:spTree>
       <p:nvGrpSpPr>
         <p:cNvPr id="1" name=""/>
@@ -8142,13 +9048,13 @@
         <p:spPr>
           <a:xfrm>
             <a:off x="0" y="0"/>
-            <a:ext cx="12191695" cy="914400"/>
-          </a:xfrm>
-          <a:prstGeom prst="rect">
-            <a:avLst/>
-          </a:prstGeom>
-          <a:solidFill>
-            <a:srgbClr val="4338CA"/>
+            <a:ext cx="12191695" cy="713232"/>
+          </a:xfrm>
+          <a:prstGeom prst="rect">
+            <a:avLst/>
+          </a:prstGeom>
+          <a:solidFill>
+            <a:srgbClr val="111827"/>
           </a:solidFill>
           <a:ln>
             <a:noFill/>
@@ -8184,14 +9090,14 @@
         </p:nvSpPr>
         <p:spPr>
           <a:xfrm>
-            <a:off x="0" y="914400"/>
-            <a:ext cx="164592" cy="5943600"/>
-          </a:xfrm>
-          <a:prstGeom prst="rect">
-            <a:avLst/>
-          </a:prstGeom>
-          <a:solidFill>
-            <a:srgbClr val="4338CA"/>
+            <a:off x="0" y="713232"/>
+            <a:ext cx="12191695" cy="82296"/>
+          </a:xfrm>
+          <a:prstGeom prst="rect">
+            <a:avLst/>
+          </a:prstGeom>
+          <a:solidFill>
+            <a:srgbClr val="FCD116"/>
           </a:solidFill>
           <a:ln>
             <a:noFill/>
@@ -8221,125 +9127,23 @@
       </p:sp>
       <p:sp>
         <p:nvSpPr>
-          <p:cNvPr id="4" name="TextBox 3"/>
-          <p:cNvSpPr txBox="1"/>
-          <p:nvPr/>
-        </p:nvSpPr>
-        <p:spPr>
-          <a:xfrm>
-            <a:off x="594360" y="246888"/>
-            <a:ext cx="2926080" cy="320040"/>
-          </a:xfrm>
-          <a:prstGeom prst="rect">
-            <a:avLst/>
-          </a:prstGeom>
-          <a:noFill/>
-        </p:spPr>
-        <p:txBody>
-          <a:bodyPr wrap="square">
-            <a:spAutoFit/>
-          </a:bodyPr>
-          <a:lstStyle/>
-          <a:p>
-            <a:r>
-              <a:rPr sz="1300" b="1">
-                <a:solidFill>
-                  <a:srgbClr val="FFFFFF"/>
-                </a:solidFill>
-              </a:rPr>
-              <a:t>8. EXIT</a:t>
-            </a:r>
-          </a:p>
-        </p:txBody>
-      </p:sp>
-      <p:sp>
-        <p:nvSpPr>
-          <p:cNvPr id="5" name="TextBox 4"/>
-          <p:cNvSpPr txBox="1"/>
-          <p:nvPr/>
-        </p:nvSpPr>
-        <p:spPr>
-          <a:xfrm>
-            <a:off x="7772400" y="246888"/>
-            <a:ext cx="3840480" cy="320040"/>
-          </a:xfrm>
-          <a:prstGeom prst="rect">
-            <a:avLst/>
-          </a:prstGeom>
-          <a:noFill/>
-        </p:spPr>
-        <p:txBody>
-          <a:bodyPr wrap="square">
-            <a:spAutoFit/>
-          </a:bodyPr>
-          <a:lstStyle/>
-          <a:p>
-            <a:pPr algn="r"/>
-            <a:r>
-              <a:rPr sz="1100" b="0">
-                <a:solidFill>
-                  <a:srgbClr val="FFFFFF"/>
-                </a:solidFill>
-              </a:rPr>
-              <a:t>p7_t1_english_1205</a:t>
-            </a:r>
-          </a:p>
-        </p:txBody>
-      </p:sp>
-      <p:sp>
-        <p:nvSpPr>
-          <p:cNvPr id="6" name="TextBox 5"/>
-          <p:cNvSpPr txBox="1"/>
-          <p:nvPr/>
-        </p:nvSpPr>
-        <p:spPr>
-          <a:xfrm>
-            <a:off x="640080" y="1143000"/>
-            <a:ext cx="10972800" cy="685800"/>
-          </a:xfrm>
-          <a:prstGeom prst="rect">
-            <a:avLst/>
-          </a:prstGeom>
-          <a:noFill/>
-        </p:spPr>
-        <p:txBody>
-          <a:bodyPr wrap="square">
-            <a:spAutoFit/>
-          </a:bodyPr>
-          <a:lstStyle/>
-          <a:p>
-            <a:r>
-              <a:rPr sz="2800" b="1">
-                <a:solidFill>
-                  <a:srgbClr val="1A202C"/>
-                </a:solidFill>
-              </a:rPr>
-              <a:t>Exit ticket</a:t>
-            </a:r>
-          </a:p>
-        </p:txBody>
-      </p:sp>
-      <p:sp>
-        <p:nvSpPr>
-          <p:cNvPr id="7" name="Rounded Rectangle 6"/>
+          <p:cNvPr id="4" name="Rectangle 3"/>
           <p:cNvSpPr/>
           <p:nvPr/>
         </p:nvSpPr>
         <p:spPr>
           <a:xfrm>
-            <a:off x="777240" y="1993392"/>
-            <a:ext cx="10835640" cy="1005840"/>
-          </a:xfrm>
-          <a:prstGeom prst="roundRect">
-            <a:avLst/>
-          </a:prstGeom>
-          <a:solidFill>
-            <a:srgbClr val="FFFBEB"/>
-          </a:solidFill>
-          <a:ln w="15240">
-            <a:solidFill>
-              <a:srgbClr val="4338CA"/>
-            </a:solidFill>
+            <a:off x="0" y="795528"/>
+            <a:ext cx="12191695" cy="64008"/>
+          </a:xfrm>
+          <a:prstGeom prst="rect">
+            <a:avLst/>
+          </a:prstGeom>
+          <a:solidFill>
+            <a:srgbClr val="D90000"/>
+          </a:solidFill>
+          <a:ln>
+            <a:noFill/>
           </a:ln>
         </p:spPr>
         <p:style>
@@ -8366,58 +9170,23 @@
       </p:sp>
       <p:sp>
         <p:nvSpPr>
-          <p:cNvPr id="8" name="TextBox 7"/>
-          <p:cNvSpPr txBox="1"/>
-          <p:nvPr/>
-        </p:nvSpPr>
-        <p:spPr>
-          <a:xfrm>
-            <a:off x="1051560" y="2212848"/>
-            <a:ext cx="10287000" cy="502920"/>
-          </a:xfrm>
-          <a:prstGeom prst="rect">
-            <a:avLst/>
-          </a:prstGeom>
-          <a:noFill/>
-        </p:spPr>
-        <p:txBody>
-          <a:bodyPr wrap="square">
-            <a:spAutoFit/>
-          </a:bodyPr>
-          <a:lstStyle/>
-          <a:p>
-            <a:r>
-              <a:rPr sz="2100" b="1">
-                <a:solidFill>
-                  <a:srgbClr val="1A202C"/>
-                </a:solidFill>
-              </a:rPr>
-              <a:t>Answer: How will you make your work even better in Term 2?</a:t>
-            </a:r>
-          </a:p>
-        </p:txBody>
-      </p:sp>
-      <p:sp>
-        <p:nvSpPr>
-          <p:cNvPr id="9" name="Rounded Rectangle 8"/>
+          <p:cNvPr id="5" name="Rectangle 4"/>
           <p:cNvSpPr/>
           <p:nvPr/>
         </p:nvSpPr>
         <p:spPr>
           <a:xfrm>
-            <a:off x="1005840" y="3246120"/>
-            <a:ext cx="10149840" cy="731520"/>
-          </a:xfrm>
-          <a:prstGeom prst="roundRect">
-            <a:avLst/>
-          </a:prstGeom>
-          <a:solidFill>
-            <a:srgbClr val="F8FAFC"/>
-          </a:solidFill>
-          <a:ln w="15240">
-            <a:solidFill>
-              <a:srgbClr val="CBD5E1"/>
-            </a:solidFill>
+            <a:off x="0" y="859536"/>
+            <a:ext cx="164592" cy="5998464"/>
+          </a:xfrm>
+          <a:prstGeom prst="rect">
+            <a:avLst/>
+          </a:prstGeom>
+          <a:solidFill>
+            <a:srgbClr val="4338CA"/>
+          </a:solidFill>
+          <a:ln>
+            <a:noFill/>
           </a:ln>
         </p:spPr>
         <p:style>
@@ -8444,23 +9213,128 @@
       </p:sp>
       <p:sp>
         <p:nvSpPr>
-          <p:cNvPr id="10" name="Oval 9"/>
+          <p:cNvPr id="6" name="TextBox 5"/>
+          <p:cNvSpPr txBox="1"/>
+          <p:nvPr/>
+        </p:nvSpPr>
+        <p:spPr>
+          <a:xfrm>
+            <a:off x="502920" y="210312"/>
+            <a:ext cx="3200400" cy="256032"/>
+          </a:xfrm>
+          <a:prstGeom prst="rect">
+            <a:avLst/>
+          </a:prstGeom>
+          <a:noFill/>
+        </p:spPr>
+        <p:txBody>
+          <a:bodyPr wrap="square" lIns="0" rIns="0" tIns="0" bIns="0">
+            <a:spAutoFit/>
+          </a:bodyPr>
+          <a:lstStyle/>
+          <a:p>
+            <a:r>
+              <a:rPr sz="1200" b="1">
+                <a:solidFill>
+                  <a:srgbClr val="FFFFFF"/>
+                </a:solidFill>
+                <a:latin typeface="Arial"/>
+              </a:rPr>
+              <a:t>8. EXIT</a:t>
+            </a:r>
+          </a:p>
+        </p:txBody>
+      </p:sp>
+      <p:sp>
+        <p:nvSpPr>
+          <p:cNvPr id="7" name="TextBox 6"/>
+          <p:cNvSpPr txBox="1"/>
+          <p:nvPr/>
+        </p:nvSpPr>
+        <p:spPr>
+          <a:xfrm>
+            <a:off x="7589520" y="210312"/>
+            <a:ext cx="4069080" cy="256032"/>
+          </a:xfrm>
+          <a:prstGeom prst="rect">
+            <a:avLst/>
+          </a:prstGeom>
+          <a:noFill/>
+        </p:spPr>
+        <p:txBody>
+          <a:bodyPr wrap="square" lIns="0" rIns="0" tIns="0" bIns="0">
+            <a:spAutoFit/>
+          </a:bodyPr>
+          <a:lstStyle/>
+          <a:p>
+            <a:pPr algn="r"/>
+            <a:r>
+              <a:rPr sz="1000" b="0">
+                <a:solidFill>
+                  <a:srgbClr val="FFFFFF"/>
+                </a:solidFill>
+                <a:latin typeface="Arial"/>
+              </a:rPr>
+              <a:t>p7_t1_english_1205</a:t>
+            </a:r>
+          </a:p>
+        </p:txBody>
+      </p:sp>
+      <p:sp>
+        <p:nvSpPr>
+          <p:cNvPr id="8" name="TextBox 7"/>
+          <p:cNvSpPr txBox="1"/>
+          <p:nvPr/>
+        </p:nvSpPr>
+        <p:spPr>
+          <a:xfrm>
+            <a:off x="594360" y="1042415"/>
+            <a:ext cx="11109960" cy="566928"/>
+          </a:xfrm>
+          <a:prstGeom prst="rect">
+            <a:avLst/>
+          </a:prstGeom>
+          <a:noFill/>
+        </p:spPr>
+        <p:txBody>
+          <a:bodyPr wrap="square" lIns="0" rIns="0" tIns="0" bIns="0">
+            <a:spAutoFit/>
+          </a:bodyPr>
+          <a:lstStyle/>
+          <a:p>
+            <a:r>
+              <a:rPr sz="2600" b="1">
+                <a:solidFill>
+                  <a:srgbClr val="111827"/>
+                </a:solidFill>
+                <a:latin typeface="Arial"/>
+              </a:rPr>
+              <a:t>Exit ticket</a:t>
+            </a:r>
+          </a:p>
+        </p:txBody>
+      </p:sp>
+      <p:sp>
+        <p:nvSpPr>
+          <p:cNvPr id="9" name="Rectangle 8"/>
           <p:cNvSpPr/>
           <p:nvPr/>
         </p:nvSpPr>
         <p:spPr>
           <a:xfrm>
-            <a:off x="1234440" y="3364991"/>
-            <a:ext cx="347472" cy="347472"/>
-          </a:xfrm>
-          <a:prstGeom prst="ellipse">
-            <a:avLst/>
-          </a:prstGeom>
-          <a:solidFill>
-            <a:srgbClr val="4338CA"/>
-          </a:solidFill>
-          <a:ln>
-            <a:noFill/>
+            <a:off x="685800" y="1874519"/>
+            <a:ext cx="10835640" cy="804672"/>
+          </a:xfrm>
+          <a:prstGeom prst="rect">
+            <a:avLst/>
+          </a:prstGeom>
+          <a:solidFill>
+            <a:srgbClr val="FFF7E0"/>
+          </a:solidFill>
+          <a:ln w="17780">
+            <a:solidFill>
+              <a:srgbClr val="4338CA"/>
+            </a:solidFill>
           </a:ln>
         </p:spPr>
         <p:style>
@@ -8478,98 +9352,40 @@
           </a:fontRef>
         </p:style>
         <p:txBody>
-          <a:bodyPr rtlCol="0" anchor="ctr"/>
+          <a:bodyPr rtlCol="0" anchor="ctr" wrap="square" lIns="101600" rIns="101600" tIns="38100" bIns="38100"/>
           <a:lstStyle/>
           <a:p>
             <a:pPr algn="ctr"/>
-          </a:p>
-        </p:txBody>
-      </p:sp>
-      <p:sp>
-        <p:nvSpPr>
-          <p:cNvPr id="11" name="TextBox 10"/>
-          <p:cNvSpPr txBox="1"/>
-          <p:nvPr/>
-        </p:nvSpPr>
-        <p:spPr>
-          <a:xfrm>
-            <a:off x="1234440" y="3410712"/>
-            <a:ext cx="347472" cy="182880"/>
-          </a:xfrm>
-          <a:prstGeom prst="rect">
-            <a:avLst/>
-          </a:prstGeom>
-          <a:noFill/>
-        </p:spPr>
-        <p:txBody>
-          <a:bodyPr wrap="square">
-            <a:spAutoFit/>
-          </a:bodyPr>
-          <a:lstStyle/>
-          <a:p>
-            <a:pPr algn="ctr"/>
-            <a:r>
-              <a:rPr sz="1000" b="1">
-                <a:solidFill>
-                  <a:srgbClr val="FFFFFF"/>
-                </a:solidFill>
+            <a:r>
+              <a:rPr sz="1900" b="1">
+                <a:solidFill>
+                  <a:srgbClr val="111827"/>
+                </a:solidFill>
+                <a:latin typeface="Arial"/>
               </a:rPr>
-              <a:t>1</a:t>
-            </a:r>
-          </a:p>
-        </p:txBody>
-      </p:sp>
-      <p:sp>
-        <p:nvSpPr>
-          <p:cNvPr id="12" name="TextBox 11"/>
-          <p:cNvSpPr txBox="1"/>
-          <p:nvPr/>
-        </p:nvSpPr>
-        <p:spPr>
-          <a:xfrm>
-            <a:off x="1783080" y="3364991"/>
-            <a:ext cx="9006840" cy="347472"/>
-          </a:xfrm>
-          <a:prstGeom prst="rect">
-            <a:avLst/>
-          </a:prstGeom>
-          <a:noFill/>
-        </p:spPr>
-        <p:txBody>
-          <a:bodyPr wrap="square">
-            <a:spAutoFit/>
-          </a:bodyPr>
-          <a:lstStyle/>
-          <a:p>
-            <a:r>
-              <a:rPr sz="1700" b="0">
-                <a:solidFill>
-                  <a:srgbClr val="1A202C"/>
-                </a:solidFill>
-              </a:rPr>
-              <a:t>Use one complete sentence.</a:t>
-            </a:r>
-          </a:p>
-        </p:txBody>
-      </p:sp>
-      <p:sp>
-        <p:nvSpPr>
-          <p:cNvPr id="13" name="Rounded Rectangle 12"/>
+              <a:t>Answer: How will you make your work even better in Term 2?</a:t>
+            </a:r>
+          </a:p>
+        </p:txBody>
+      </p:sp>
+      <p:sp>
+        <p:nvSpPr>
+          <p:cNvPr id="10" name="Rectangle 9"/>
           <p:cNvSpPr/>
           <p:nvPr/>
         </p:nvSpPr>
         <p:spPr>
           <a:xfrm>
-            <a:off x="1005840" y="4178808"/>
-            <a:ext cx="10149840" cy="731520"/>
-          </a:xfrm>
-          <a:prstGeom prst="roundRect">
-            <a:avLst/>
-          </a:prstGeom>
-          <a:solidFill>
-            <a:srgbClr val="F8FAFC"/>
-          </a:solidFill>
-          <a:ln w="15240">
+            <a:off x="868680" y="2971800"/>
+            <a:ext cx="10378440" cy="713232"/>
+          </a:xfrm>
+          <a:prstGeom prst="rect">
+            <a:avLst/>
+          </a:prstGeom>
+          <a:solidFill>
+            <a:srgbClr val="FFFFFF"/>
+          </a:solidFill>
+          <a:ln w="11430">
             <a:solidFill>
               <a:srgbClr val="CBD5E1"/>
             </a:solidFill>
@@ -8599,16 +9415,16 @@
       </p:sp>
       <p:sp>
         <p:nvSpPr>
-          <p:cNvPr id="14" name="Oval 13"/>
+          <p:cNvPr id="11" name="Rectangle 10"/>
           <p:cNvSpPr/>
           <p:nvPr/>
         </p:nvSpPr>
         <p:spPr>
           <a:xfrm>
-            <a:off x="1234440" y="4297680"/>
-            <a:ext cx="347472" cy="347472"/>
-          </a:xfrm>
-          <a:prstGeom prst="ellipse">
+            <a:off x="868680" y="2971800"/>
+            <a:ext cx="530352" cy="713232"/>
+          </a:xfrm>
+          <a:prstGeom prst="rect">
             <a:avLst/>
           </a:prstGeom>
           <a:solidFill>
@@ -8633,23 +9449,32 @@
           </a:fontRef>
         </p:style>
         <p:txBody>
-          <a:bodyPr rtlCol="0" anchor="ctr"/>
+          <a:bodyPr rtlCol="0" anchor="ctr" wrap="square" lIns="101600" rIns="101600" tIns="38100" bIns="38100"/>
           <a:lstStyle/>
           <a:p>
             <a:pPr algn="ctr"/>
-          </a:p>
-        </p:txBody>
-      </p:sp>
-      <p:sp>
-        <p:nvSpPr>
-          <p:cNvPr id="15" name="TextBox 14"/>
+            <a:r>
+              <a:rPr sz="1500" b="1">
+                <a:solidFill>
+                  <a:srgbClr val="FFFFFF"/>
+                </a:solidFill>
+                <a:latin typeface="Arial"/>
+              </a:rPr>
+              <a:t>1</a:t>
+            </a:r>
+          </a:p>
+        </p:txBody>
+      </p:sp>
+      <p:sp>
+        <p:nvSpPr>
+          <p:cNvPr id="12" name="TextBox 11"/>
           <p:cNvSpPr txBox="1"/>
           <p:nvPr/>
         </p:nvSpPr>
         <p:spPr>
           <a:xfrm>
-            <a:off x="1234440" y="4343400"/>
-            <a:ext cx="347472" cy="182880"/>
+            <a:off x="1572768" y="3118104"/>
+            <a:ext cx="9372600" cy="384048"/>
           </a:xfrm>
           <a:prstGeom prst="rect">
             <a:avLst/>
@@ -8657,74 +9482,41 @@
           <a:noFill/>
         </p:spPr>
         <p:txBody>
-          <a:bodyPr wrap="square">
+          <a:bodyPr wrap="square" lIns="0" rIns="0" tIns="0" bIns="0">
             <a:spAutoFit/>
           </a:bodyPr>
           <a:lstStyle/>
           <a:p>
-            <a:pPr algn="ctr"/>
-            <a:r>
-              <a:rPr sz="1000" b="1">
-                <a:solidFill>
-                  <a:srgbClr val="FFFFFF"/>
-                </a:solidFill>
+            <a:r>
+              <a:rPr sz="1500" b="0">
+                <a:solidFill>
+                  <a:srgbClr val="111827"/>
+                </a:solidFill>
+                <a:latin typeface="Arial"/>
               </a:rPr>
-              <a:t>2</a:t>
-            </a:r>
-          </a:p>
-        </p:txBody>
-      </p:sp>
-      <p:sp>
-        <p:nvSpPr>
-          <p:cNvPr id="16" name="TextBox 15"/>
-          <p:cNvSpPr txBox="1"/>
-          <p:nvPr/>
-        </p:nvSpPr>
-        <p:spPr>
-          <a:xfrm>
-            <a:off x="1783080" y="4297680"/>
-            <a:ext cx="9006840" cy="347472"/>
-          </a:xfrm>
-          <a:prstGeom prst="rect">
-            <a:avLst/>
-          </a:prstGeom>
-          <a:noFill/>
-        </p:spPr>
-        <p:txBody>
-          <a:bodyPr wrap="square">
-            <a:spAutoFit/>
-          </a:bodyPr>
-          <a:lstStyle/>
-          <a:p>
-            <a:r>
-              <a:rPr sz="1700" b="0">
-                <a:solidFill>
-                  <a:srgbClr val="1A202C"/>
-                </a:solidFill>
-              </a:rPr>
-              <a:t>Include one key word: Past simple tense for reflection (e.g, "I learned, " "I enjoyed</a:t>
-            </a:r>
-          </a:p>
-        </p:txBody>
-      </p:sp>
-      <p:sp>
-        <p:nvSpPr>
-          <p:cNvPr id="17" name="Rounded Rectangle 16"/>
+              <a:t>Use one complete sentence.</a:t>
+            </a:r>
+          </a:p>
+        </p:txBody>
+      </p:sp>
+      <p:sp>
+        <p:nvSpPr>
+          <p:cNvPr id="13" name="Rectangle 12"/>
           <p:cNvSpPr/>
           <p:nvPr/>
         </p:nvSpPr>
         <p:spPr>
           <a:xfrm>
-            <a:off x="1005840" y="5111496"/>
-            <a:ext cx="10149840" cy="731520"/>
-          </a:xfrm>
-          <a:prstGeom prst="roundRect">
-            <a:avLst/>
-          </a:prstGeom>
-          <a:solidFill>
-            <a:srgbClr val="F8FAFC"/>
-          </a:solidFill>
-          <a:ln w="15240">
+            <a:off x="868680" y="3822191"/>
+            <a:ext cx="10378440" cy="713232"/>
+          </a:xfrm>
+          <a:prstGeom prst="rect">
+            <a:avLst/>
+          </a:prstGeom>
+          <a:solidFill>
+            <a:srgbClr val="FFFFFF"/>
+          </a:solidFill>
+          <a:ln w="11430">
             <a:solidFill>
               <a:srgbClr val="CBD5E1"/>
             </a:solidFill>
@@ -8754,16 +9546,16 @@
       </p:sp>
       <p:sp>
         <p:nvSpPr>
-          <p:cNvPr id="18" name="Oval 17"/>
+          <p:cNvPr id="14" name="Rectangle 13"/>
           <p:cNvSpPr/>
           <p:nvPr/>
         </p:nvSpPr>
         <p:spPr>
           <a:xfrm>
-            <a:off x="1234440" y="5230368"/>
-            <a:ext cx="347472" cy="347472"/>
-          </a:xfrm>
-          <a:prstGeom prst="ellipse">
+            <a:off x="868680" y="3822191"/>
+            <a:ext cx="530352" cy="713232"/>
+          </a:xfrm>
+          <a:prstGeom prst="rect">
             <a:avLst/>
           </a:prstGeom>
           <a:solidFill>
@@ -8788,23 +9580,32 @@
           </a:fontRef>
         </p:style>
         <p:txBody>
-          <a:bodyPr rtlCol="0" anchor="ctr"/>
+          <a:bodyPr rtlCol="0" anchor="ctr" wrap="square" lIns="101600" rIns="101600" tIns="38100" bIns="38100"/>
           <a:lstStyle/>
           <a:p>
             <a:pPr algn="ctr"/>
-          </a:p>
-        </p:txBody>
-      </p:sp>
-      <p:sp>
-        <p:nvSpPr>
-          <p:cNvPr id="19" name="TextBox 18"/>
+            <a:r>
+              <a:rPr sz="1500" b="1">
+                <a:solidFill>
+                  <a:srgbClr val="FFFFFF"/>
+                </a:solidFill>
+                <a:latin typeface="Arial"/>
+              </a:rPr>
+              <a:t>2</a:t>
+            </a:r>
+          </a:p>
+        </p:txBody>
+      </p:sp>
+      <p:sp>
+        <p:nvSpPr>
+          <p:cNvPr id="15" name="TextBox 14"/>
           <p:cNvSpPr txBox="1"/>
           <p:nvPr/>
         </p:nvSpPr>
         <p:spPr>
           <a:xfrm>
-            <a:off x="1234440" y="5276088"/>
-            <a:ext cx="347472" cy="182880"/>
+            <a:off x="1572768" y="3968496"/>
+            <a:ext cx="9372600" cy="384048"/>
           </a:xfrm>
           <a:prstGeom prst="rect">
             <a:avLst/>
@@ -8812,17 +9613,114 @@
           <a:noFill/>
         </p:spPr>
         <p:txBody>
-          <a:bodyPr wrap="square">
+          <a:bodyPr wrap="square" lIns="0" rIns="0" tIns="0" bIns="0">
             <a:spAutoFit/>
           </a:bodyPr>
           <a:lstStyle/>
           <a:p>
+            <a:r>
+              <a:rPr sz="1500" b="0">
+                <a:solidFill>
+                  <a:srgbClr val="111827"/>
+                </a:solidFill>
+                <a:latin typeface="Arial"/>
+              </a:rPr>
+              <a:t>Include one key word: Past simple tense for reflection (e.g, "I l...</a:t>
+            </a:r>
+          </a:p>
+        </p:txBody>
+      </p:sp>
+      <p:sp>
+        <p:nvSpPr>
+          <p:cNvPr id="16" name="Rectangle 15"/>
+          <p:cNvSpPr/>
+          <p:nvPr/>
+        </p:nvSpPr>
+        <p:spPr>
+          <a:xfrm>
+            <a:off x="868680" y="4672584"/>
+            <a:ext cx="10378440" cy="713232"/>
+          </a:xfrm>
+          <a:prstGeom prst="rect">
+            <a:avLst/>
+          </a:prstGeom>
+          <a:solidFill>
+            <a:srgbClr val="FFFFFF"/>
+          </a:solidFill>
+          <a:ln w="11430">
+            <a:solidFill>
+              <a:srgbClr val="CBD5E1"/>
+            </a:solidFill>
+          </a:ln>
+        </p:spPr>
+        <p:style>
+          <a:lnRef idx="1">
+            <a:schemeClr val="accent1"/>
+          </a:lnRef>
+          <a:fillRef idx="3">
+            <a:schemeClr val="accent1"/>
+          </a:fillRef>
+          <a:effectRef idx="2">
+            <a:schemeClr val="accent1"/>
+          </a:effectRef>
+          <a:fontRef idx="minor">
+            <a:schemeClr val="lt1"/>
+          </a:fontRef>
+        </p:style>
+        <p:txBody>
+          <a:bodyPr rtlCol="0" anchor="ctr"/>
+          <a:lstStyle/>
+          <a:p>
             <a:pPr algn="ctr"/>
-            <a:r>
-              <a:rPr sz="1000" b="1">
+          </a:p>
+        </p:txBody>
+      </p:sp>
+      <p:sp>
+        <p:nvSpPr>
+          <p:cNvPr id="17" name="Rectangle 16"/>
+          <p:cNvSpPr/>
+          <p:nvPr/>
+        </p:nvSpPr>
+        <p:spPr>
+          <a:xfrm>
+            <a:off x="868680" y="4672584"/>
+            <a:ext cx="530352" cy="713232"/>
+          </a:xfrm>
+          <a:prstGeom prst="rect">
+            <a:avLst/>
+          </a:prstGeom>
+          <a:solidFill>
+            <a:srgbClr val="4338CA"/>
+          </a:solidFill>
+          <a:ln>
+            <a:noFill/>
+          </a:ln>
+        </p:spPr>
+        <p:style>
+          <a:lnRef idx="1">
+            <a:schemeClr val="accent1"/>
+          </a:lnRef>
+          <a:fillRef idx="3">
+            <a:schemeClr val="accent1"/>
+          </a:fillRef>
+          <a:effectRef idx="2">
+            <a:schemeClr val="accent1"/>
+          </a:effectRef>
+          <a:fontRef idx="minor">
+            <a:schemeClr val="lt1"/>
+          </a:fontRef>
+        </p:style>
+        <p:txBody>
+          <a:bodyPr rtlCol="0" anchor="ctr" wrap="square" lIns="101600" rIns="101600" tIns="38100" bIns="38100"/>
+          <a:lstStyle/>
+          <a:p>
+            <a:pPr algn="ctr"/>
+            <a:r>
+              <a:rPr sz="1500" b="1">
                 <a:solidFill>
                   <a:srgbClr val="FFFFFF"/>
                 </a:solidFill>
+                <a:latin typeface="Arial"/>
               </a:rPr>
               <a:t>3</a:t>
             </a:r>
@@ -8831,14 +9729,14 @@
       </p:sp>
       <p:sp>
         <p:nvSpPr>
-          <p:cNvPr id="20" name="TextBox 19"/>
+          <p:cNvPr id="18" name="TextBox 17"/>
           <p:cNvSpPr txBox="1"/>
           <p:nvPr/>
         </p:nvSpPr>
         <p:spPr>
           <a:xfrm>
-            <a:off x="1783080" y="5230368"/>
-            <a:ext cx="9006840" cy="347472"/>
+            <a:off x="1572768" y="4818888"/>
+            <a:ext cx="9372600" cy="384048"/>
           </a:xfrm>
           <a:prstGeom prst="rect">
             <a:avLst/>
@@ -8846,16 +9744,17 @@
           <a:noFill/>
         </p:spPr>
         <p:txBody>
-          <a:bodyPr wrap="square">
+          <a:bodyPr wrap="square" lIns="0" rIns="0" tIns="0" bIns="0">
             <a:spAutoFit/>
           </a:bodyPr>
           <a:lstStyle/>
           <a:p>
             <a:r>
-              <a:rPr sz="1700" b="0">
-                <a:solidFill>
-                  <a:srgbClr val="1A202C"/>
-                </a:solidFill>
+              <a:rPr sz="1500" b="0">
+                <a:solidFill>
+                  <a:srgbClr val="111827"/>
+                </a:solidFill>
+                <a:latin typeface="Arial"/>
               </a:rPr>
               <a:t>Hand in or read your answer aloud.</a:t>
             </a:r>
@@ -8864,14 +9763,111 @@
       </p:sp>
       <p:sp>
         <p:nvSpPr>
+          <p:cNvPr id="19" name="Rectangle 18"/>
+          <p:cNvSpPr/>
+          <p:nvPr/>
+        </p:nvSpPr>
+        <p:spPr>
+          <a:xfrm>
+            <a:off x="868680" y="5522976"/>
+            <a:ext cx="10378440" cy="713232"/>
+          </a:xfrm>
+          <a:prstGeom prst="rect">
+            <a:avLst/>
+          </a:prstGeom>
+          <a:solidFill>
+            <a:srgbClr val="FFFFFF"/>
+          </a:solidFill>
+          <a:ln w="11430">
+            <a:solidFill>
+              <a:srgbClr val="CBD5E1"/>
+            </a:solidFill>
+          </a:ln>
+        </p:spPr>
+        <p:style>
+          <a:lnRef idx="1">
+            <a:schemeClr val="accent1"/>
+          </a:lnRef>
+          <a:fillRef idx="3">
+            <a:schemeClr val="accent1"/>
+          </a:fillRef>
+          <a:effectRef idx="2">
+            <a:schemeClr val="accent1"/>
+          </a:effectRef>
+          <a:fontRef idx="minor">
+            <a:schemeClr val="lt1"/>
+          </a:fontRef>
+        </p:style>
+        <p:txBody>
+          <a:bodyPr rtlCol="0" anchor="ctr"/>
+          <a:lstStyle/>
+          <a:p>
+            <a:pPr algn="ctr"/>
+          </a:p>
+        </p:txBody>
+      </p:sp>
+      <p:sp>
+        <p:nvSpPr>
+          <p:cNvPr id="20" name="Rectangle 19"/>
+          <p:cNvSpPr/>
+          <p:nvPr/>
+        </p:nvSpPr>
+        <p:spPr>
+          <a:xfrm>
+            <a:off x="868680" y="5522976"/>
+            <a:ext cx="530352" cy="713232"/>
+          </a:xfrm>
+          <a:prstGeom prst="rect">
+            <a:avLst/>
+          </a:prstGeom>
+          <a:solidFill>
+            <a:srgbClr val="4338CA"/>
+          </a:solidFill>
+          <a:ln>
+            <a:noFill/>
+          </a:ln>
+        </p:spPr>
+        <p:style>
+          <a:lnRef idx="1">
+            <a:schemeClr val="accent1"/>
+          </a:lnRef>
+          <a:fillRef idx="3">
+            <a:schemeClr val="accent1"/>
+          </a:fillRef>
+          <a:effectRef idx="2">
+            <a:schemeClr val="accent1"/>
+          </a:effectRef>
+          <a:fontRef idx="minor">
+            <a:schemeClr val="lt1"/>
+          </a:fontRef>
+        </p:style>
+        <p:txBody>
+          <a:bodyPr rtlCol="0" anchor="ctr" wrap="square" lIns="101600" rIns="101600" tIns="38100" bIns="38100"/>
+          <a:lstStyle/>
+          <a:p>
+            <a:pPr algn="ctr"/>
+            <a:r>
+              <a:rPr sz="1500" b="1">
+                <a:solidFill>
+                  <a:srgbClr val="FFFFFF"/>
+                </a:solidFill>
+                <a:latin typeface="Arial"/>
+              </a:rPr>
+              <a:t>4</a:t>
+            </a:r>
+          </a:p>
+        </p:txBody>
+      </p:sp>
+      <p:sp>
+        <p:nvSpPr>
           <p:cNvPr id="21" name="TextBox 20"/>
           <p:cNvSpPr txBox="1"/>
           <p:nvPr/>
         </p:nvSpPr>
         <p:spPr>
           <a:xfrm>
-            <a:off x="777240" y="6419088"/>
-            <a:ext cx="10835640" cy="228600"/>
+            <a:off x="1572768" y="5669280"/>
+            <a:ext cx="9372600" cy="384048"/>
           </a:xfrm>
           <a:prstGeom prst="rect">
             <a:avLst/>
@@ -8879,17 +9875,52 @@
           <a:noFill/>
         </p:spPr>
         <p:txBody>
-          <a:bodyPr wrap="square">
+          <a:bodyPr wrap="square" lIns="0" rIns="0" tIns="0" bIns="0">
             <a:spAutoFit/>
           </a:bodyPr>
           <a:lstStyle/>
           <a:p>
+            <a:r>
+              <a:rPr sz="1500" b="0">
+                <a:solidFill>
+                  <a:srgbClr val="111827"/>
+                </a:solidFill>
+                <a:latin typeface="Arial"/>
+              </a:rPr>
+              <a:t>Write one clear response.</a:t>
+            </a:r>
+          </a:p>
+        </p:txBody>
+      </p:sp>
+      <p:sp>
+        <p:nvSpPr>
+          <p:cNvPr id="22" name="TextBox 21"/>
+          <p:cNvSpPr txBox="1"/>
+          <p:nvPr/>
+        </p:nvSpPr>
+        <p:spPr>
+          <a:xfrm>
+            <a:off x="685800" y="6419088"/>
+            <a:ext cx="10835640" cy="228600"/>
+          </a:xfrm>
+          <a:prstGeom prst="rect">
+            <a:avLst/>
+          </a:prstGeom>
+          <a:noFill/>
+        </p:spPr>
+        <p:txBody>
+          <a:bodyPr wrap="square" lIns="0" rIns="0" tIns="0" bIns="0">
+            <a:spAutoFit/>
+          </a:bodyPr>
+          <a:lstStyle/>
+          <a:p>
             <a:pPr algn="r"/>
             <a:r>
               <a:rPr sz="1000" b="0">
                 <a:solidFill>
-                  <a:srgbClr val="5B677D"/>
-                </a:solidFill>
+                  <a:srgbClr val="475569"/>
+                </a:solidFill>
+                <a:latin typeface="Arial"/>
               </a:rPr>
               <a:t>Listen • Talk • Try • Explain</a:t>
             </a:r>

--- a/uganda-p7-mvp/p7_t1_english_1205/p7_t1_english_1205.pptx
+++ b/uganda-p7-mvp/p7_t1_english_1205/p7_t1_english_1205.pptx
@@ -3277,14 +3277,100 @@
       </p:sp>
       <p:sp>
         <p:nvSpPr>
-          <p:cNvPr id="6" name="TextBox 5"/>
+          <p:cNvPr id="6" name="Rectangle 5"/>
+          <p:cNvSpPr/>
+          <p:nvPr/>
+        </p:nvSpPr>
+        <p:spPr>
+          <a:xfrm>
+            <a:off x="164592" y="6565392"/>
+            <a:ext cx="12027103" cy="73152"/>
+          </a:xfrm>
+          <a:prstGeom prst="rect">
+            <a:avLst/>
+          </a:prstGeom>
+          <a:solidFill>
+            <a:srgbClr val="FCD116"/>
+          </a:solidFill>
+          <a:ln>
+            <a:noFill/>
+          </a:ln>
+        </p:spPr>
+        <p:style>
+          <a:lnRef idx="1">
+            <a:schemeClr val="accent1"/>
+          </a:lnRef>
+          <a:fillRef idx="3">
+            <a:schemeClr val="accent1"/>
+          </a:fillRef>
+          <a:effectRef idx="2">
+            <a:schemeClr val="accent1"/>
+          </a:effectRef>
+          <a:fontRef idx="minor">
+            <a:schemeClr val="lt1"/>
+          </a:fontRef>
+        </p:style>
+        <p:txBody>
+          <a:bodyPr rtlCol="0" anchor="ctr"/>
+          <a:lstStyle/>
+          <a:p>
+            <a:pPr algn="ctr"/>
+          </a:p>
+        </p:txBody>
+      </p:sp>
+      <p:sp>
+        <p:nvSpPr>
+          <p:cNvPr id="7" name="Rectangle 6"/>
+          <p:cNvSpPr/>
+          <p:nvPr/>
+        </p:nvSpPr>
+        <p:spPr>
+          <a:xfrm>
+            <a:off x="164592" y="6638544"/>
+            <a:ext cx="12027103" cy="45720"/>
+          </a:xfrm>
+          <a:prstGeom prst="rect">
+            <a:avLst/>
+          </a:prstGeom>
+          <a:solidFill>
+            <a:srgbClr val="D90000"/>
+          </a:solidFill>
+          <a:ln>
+            <a:noFill/>
+          </a:ln>
+        </p:spPr>
+        <p:style>
+          <a:lnRef idx="1">
+            <a:schemeClr val="accent1"/>
+          </a:lnRef>
+          <a:fillRef idx="3">
+            <a:schemeClr val="accent1"/>
+          </a:fillRef>
+          <a:effectRef idx="2">
+            <a:schemeClr val="accent1"/>
+          </a:effectRef>
+          <a:fontRef idx="minor">
+            <a:schemeClr val="lt1"/>
+          </a:fontRef>
+        </p:style>
+        <p:txBody>
+          <a:bodyPr rtlCol="0" anchor="ctr"/>
+          <a:lstStyle/>
+          <a:p>
+            <a:pPr algn="ctr"/>
+          </a:p>
+        </p:txBody>
+      </p:sp>
+      <p:sp>
+        <p:nvSpPr>
+          <p:cNvPr id="8" name="TextBox 7"/>
           <p:cNvSpPr txBox="1"/>
           <p:nvPr/>
         </p:nvSpPr>
         <p:spPr>
           <a:xfrm>
             <a:off x="502920" y="210312"/>
-            <a:ext cx="2926080" cy="256032"/>
+            <a:ext cx="3200400" cy="256032"/>
           </a:xfrm>
           <a:prstGeom prst="rect">
             <a:avLst/>
@@ -3304,14 +3390,14 @@
                 </a:solidFill>
                 <a:latin typeface="Arial"/>
               </a:rPr>
-              <a:t>UGANDA P7 LESSON</a:t>
-            </a:r>
-          </a:p>
-        </p:txBody>
-      </p:sp>
-      <p:sp>
-        <p:nvSpPr>
-          <p:cNvPr id="7" name="TextBox 6"/>
+              <a:t>1. HOOK</a:t>
+            </a:r>
+          </a:p>
+        </p:txBody>
+      </p:sp>
+      <p:sp>
+        <p:nvSpPr>
+          <p:cNvPr id="9" name="TextBox 8"/>
           <p:cNvSpPr txBox="1"/>
           <p:nvPr/>
         </p:nvSpPr>
@@ -3346,14 +3432,14 @@
       </p:sp>
       <p:sp>
         <p:nvSpPr>
-          <p:cNvPr id="8" name="TextBox 7"/>
+          <p:cNvPr id="10" name="TextBox 9"/>
           <p:cNvSpPr txBox="1"/>
           <p:nvPr/>
         </p:nvSpPr>
         <p:spPr>
           <a:xfrm>
-            <a:off x="731520" y="1207008"/>
-            <a:ext cx="10789920" cy="731520"/>
+            <a:off x="685800" y="1024128"/>
+            <a:ext cx="10835640" cy="502920"/>
           </a:xfrm>
           <a:prstGeom prst="rect">
             <a:avLst/>
@@ -3381,22 +3467,22 @@
       </p:sp>
       <p:sp>
         <p:nvSpPr>
-          <p:cNvPr id="9" name="Rectangle 8"/>
-          <p:cNvSpPr/>
-          <p:nvPr/>
-        </p:nvSpPr>
-        <p:spPr>
-          <a:xfrm>
-            <a:off x="1143000" y="2423160"/>
-            <a:ext cx="9921240" cy="2423160"/>
-          </a:xfrm>
-          <a:prstGeom prst="rect">
+          <p:cNvPr id="11" name="Rounded Rectangle 10"/>
+          <p:cNvSpPr/>
+          <p:nvPr/>
+        </p:nvSpPr>
+        <p:spPr>
+          <a:xfrm>
+            <a:off x="777240" y="1783080"/>
+            <a:ext cx="3794760" cy="4343400"/>
+          </a:xfrm>
+          <a:prstGeom prst="roundRect">
             <a:avLst/>
           </a:prstGeom>
           <a:solidFill>
             <a:srgbClr val="FFFFFF"/>
           </a:solidFill>
-          <a:ln w="19050">
+          <a:ln w="17780">
             <a:solidFill>
               <a:srgbClr val="1D4ED8"/>
             </a:solidFill>
@@ -3417,38 +3503,12 @@
           </a:fontRef>
         </p:style>
         <p:txBody>
-          <a:bodyPr rtlCol="0" anchor="ctr"/>
-          <a:lstStyle/>
-          <a:p>
-            <a:pPr algn="ctr"/>
-          </a:p>
-        </p:txBody>
-      </p:sp>
-      <p:sp>
-        <p:nvSpPr>
-          <p:cNvPr id="10" name="TextBox 9"/>
-          <p:cNvSpPr txBox="1"/>
-          <p:nvPr/>
-        </p:nvSpPr>
-        <p:spPr>
-          <a:xfrm>
-            <a:off x="1463040" y="2743200"/>
-            <a:ext cx="9281160" cy="347472"/>
-          </a:xfrm>
-          <a:prstGeom prst="rect">
-            <a:avLst/>
-          </a:prstGeom>
-          <a:noFill/>
-        </p:spPr>
-        <p:txBody>
-          <a:bodyPr wrap="square" lIns="0" rIns="0" tIns="0" bIns="0">
-            <a:spAutoFit/>
-          </a:bodyPr>
-          <a:lstStyle/>
-          <a:p>
-            <a:pPr algn="ctr"/>
-            <a:r>
-              <a:rPr sz="1700" b="1">
+          <a:bodyPr rtlCol="0" anchor="t" wrap="square" lIns="101600" rIns="101600" tIns="152400" bIns="38100"/>
+          <a:lstStyle/>
+          <a:p>
+            <a:pPr algn="ctr"/>
+            <a:r>
+              <a:rPr sz="1800" b="1">
                 <a:solidFill>
                   <a:srgbClr val="1D4ED8"/>
                 </a:solidFill>
@@ -3461,14 +3521,276 @@
       </p:sp>
       <p:sp>
         <p:nvSpPr>
-          <p:cNvPr id="11" name="TextBox 10"/>
+          <p:cNvPr id="12" name="Rectangle 11"/>
+          <p:cNvSpPr/>
+          <p:nvPr/>
+        </p:nvSpPr>
+        <p:spPr>
+          <a:xfrm>
+            <a:off x="1633118" y="3115818"/>
+            <a:ext cx="918971" cy="1156716"/>
+          </a:xfrm>
+          <a:prstGeom prst="rect">
+            <a:avLst/>
+          </a:prstGeom>
+          <a:solidFill>
+            <a:srgbClr val="FFFFFF"/>
+          </a:solidFill>
+          <a:ln w="10160">
+            <a:solidFill>
+              <a:srgbClr val="1D4ED8"/>
+            </a:solidFill>
+          </a:ln>
+        </p:spPr>
+        <p:style>
+          <a:lnRef idx="1">
+            <a:schemeClr val="accent1"/>
+          </a:lnRef>
+          <a:fillRef idx="3">
+            <a:schemeClr val="accent1"/>
+          </a:fillRef>
+          <a:effectRef idx="2">
+            <a:schemeClr val="accent1"/>
+          </a:effectRef>
+          <a:fontRef idx="minor">
+            <a:schemeClr val="lt1"/>
+          </a:fontRef>
+        </p:style>
+        <p:txBody>
+          <a:bodyPr rtlCol="0" anchor="ctr"/>
+          <a:lstStyle/>
+          <a:p>
+            <a:pPr algn="ctr"/>
+          </a:p>
+        </p:txBody>
+      </p:sp>
+      <p:sp>
+        <p:nvSpPr>
+          <p:cNvPr id="13" name="Rectangle 12"/>
+          <p:cNvSpPr/>
+          <p:nvPr/>
+        </p:nvSpPr>
+        <p:spPr>
+          <a:xfrm>
+            <a:off x="2552090" y="3115818"/>
+            <a:ext cx="918971" cy="1156716"/>
+          </a:xfrm>
+          <a:prstGeom prst="rect">
+            <a:avLst/>
+          </a:prstGeom>
+          <a:solidFill>
+            <a:srgbClr val="FFFFFF"/>
+          </a:solidFill>
+          <a:ln w="10160">
+            <a:solidFill>
+              <a:srgbClr val="1D4ED8"/>
+            </a:solidFill>
+          </a:ln>
+        </p:spPr>
+        <p:style>
+          <a:lnRef idx="1">
+            <a:schemeClr val="accent1"/>
+          </a:lnRef>
+          <a:fillRef idx="3">
+            <a:schemeClr val="accent1"/>
+          </a:fillRef>
+          <a:effectRef idx="2">
+            <a:schemeClr val="accent1"/>
+          </a:effectRef>
+          <a:fontRef idx="minor">
+            <a:schemeClr val="lt1"/>
+          </a:fontRef>
+        </p:style>
+        <p:txBody>
+          <a:bodyPr rtlCol="0" anchor="ctr"/>
+          <a:lstStyle/>
+          <a:p>
+            <a:pPr algn="ctr"/>
+          </a:p>
+        </p:txBody>
+      </p:sp>
+      <p:sp>
+        <p:nvSpPr>
+          <p:cNvPr id="14" name="Rectangle 13"/>
+          <p:cNvSpPr/>
+          <p:nvPr/>
+        </p:nvSpPr>
+        <p:spPr>
+          <a:xfrm>
+            <a:off x="2000707" y="2990088"/>
+            <a:ext cx="1133398" cy="150875"/>
+          </a:xfrm>
+          <a:prstGeom prst="rect">
+            <a:avLst/>
+          </a:prstGeom>
+          <a:solidFill>
+            <a:srgbClr val="D90000"/>
+          </a:solidFill>
+          <a:ln>
+            <a:noFill/>
+          </a:ln>
+        </p:spPr>
+        <p:style>
+          <a:lnRef idx="1">
+            <a:schemeClr val="accent1"/>
+          </a:lnRef>
+          <a:fillRef idx="3">
+            <a:schemeClr val="accent1"/>
+          </a:fillRef>
+          <a:effectRef idx="2">
+            <a:schemeClr val="accent1"/>
+          </a:effectRef>
+          <a:fontRef idx="minor">
+            <a:schemeClr val="lt1"/>
+          </a:fontRef>
+        </p:style>
+        <p:txBody>
+          <a:bodyPr rtlCol="0" anchor="ctr"/>
+          <a:lstStyle/>
+          <a:p>
+            <a:pPr algn="ctr"/>
+          </a:p>
+        </p:txBody>
+      </p:sp>
+      <p:sp>
+        <p:nvSpPr>
+          <p:cNvPr id="15" name="Rectangle 14"/>
+          <p:cNvSpPr/>
+          <p:nvPr/>
+        </p:nvSpPr>
+        <p:spPr>
+          <a:xfrm>
+            <a:off x="1816912" y="3442716"/>
+            <a:ext cx="1470355" cy="62865"/>
+          </a:xfrm>
+          <a:prstGeom prst="rect">
+            <a:avLst/>
+          </a:prstGeom>
+          <a:solidFill>
+            <a:srgbClr val="CBD5E1"/>
+          </a:solidFill>
+          <a:ln>
+            <a:noFill/>
+          </a:ln>
+        </p:spPr>
+        <p:style>
+          <a:lnRef idx="1">
+            <a:schemeClr val="accent1"/>
+          </a:lnRef>
+          <a:fillRef idx="3">
+            <a:schemeClr val="accent1"/>
+          </a:fillRef>
+          <a:effectRef idx="2">
+            <a:schemeClr val="accent1"/>
+          </a:effectRef>
+          <a:fontRef idx="minor">
+            <a:schemeClr val="lt1"/>
+          </a:fontRef>
+        </p:style>
+        <p:txBody>
+          <a:bodyPr rtlCol="0" anchor="ctr"/>
+          <a:lstStyle/>
+          <a:p>
+            <a:pPr algn="ctr"/>
+          </a:p>
+        </p:txBody>
+      </p:sp>
+      <p:sp>
+        <p:nvSpPr>
+          <p:cNvPr id="16" name="Rectangle 15"/>
+          <p:cNvSpPr/>
+          <p:nvPr/>
+        </p:nvSpPr>
+        <p:spPr>
+          <a:xfrm>
+            <a:off x="1816912" y="3744468"/>
+            <a:ext cx="1470355" cy="62865"/>
+          </a:xfrm>
+          <a:prstGeom prst="rect">
+            <a:avLst/>
+          </a:prstGeom>
+          <a:solidFill>
+            <a:srgbClr val="CBD5E1"/>
+          </a:solidFill>
+          <a:ln>
+            <a:noFill/>
+          </a:ln>
+        </p:spPr>
+        <p:style>
+          <a:lnRef idx="1">
+            <a:schemeClr val="accent1"/>
+          </a:lnRef>
+          <a:fillRef idx="3">
+            <a:schemeClr val="accent1"/>
+          </a:fillRef>
+          <a:effectRef idx="2">
+            <a:schemeClr val="accent1"/>
+          </a:effectRef>
+          <a:fontRef idx="minor">
+            <a:schemeClr val="lt1"/>
+          </a:fontRef>
+        </p:style>
+        <p:txBody>
+          <a:bodyPr rtlCol="0" anchor="ctr"/>
+          <a:lstStyle/>
+          <a:p>
+            <a:pPr algn="ctr"/>
+          </a:p>
+        </p:txBody>
+      </p:sp>
+      <p:sp>
+        <p:nvSpPr>
+          <p:cNvPr id="17" name="Rectangle 16"/>
+          <p:cNvSpPr/>
+          <p:nvPr/>
+        </p:nvSpPr>
+        <p:spPr>
+          <a:xfrm>
+            <a:off x="1816912" y="4046220"/>
+            <a:ext cx="1470355" cy="62865"/>
+          </a:xfrm>
+          <a:prstGeom prst="rect">
+            <a:avLst/>
+          </a:prstGeom>
+          <a:solidFill>
+            <a:srgbClr val="CBD5E1"/>
+          </a:solidFill>
+          <a:ln>
+            <a:noFill/>
+          </a:ln>
+        </p:spPr>
+        <p:style>
+          <a:lnRef idx="1">
+            <a:schemeClr val="accent1"/>
+          </a:lnRef>
+          <a:fillRef idx="3">
+            <a:schemeClr val="accent1"/>
+          </a:fillRef>
+          <a:effectRef idx="2">
+            <a:schemeClr val="accent1"/>
+          </a:effectRef>
+          <a:fontRef idx="minor">
+            <a:schemeClr val="lt1"/>
+          </a:fontRef>
+        </p:style>
+        <p:txBody>
+          <a:bodyPr rtlCol="0" anchor="ctr"/>
+          <a:lstStyle/>
+          <a:p>
+            <a:pPr algn="ctr"/>
+          </a:p>
+        </p:txBody>
+      </p:sp>
+      <p:sp>
+        <p:nvSpPr>
+          <p:cNvPr id="18" name="TextBox 17"/>
           <p:cNvSpPr txBox="1"/>
           <p:nvPr/>
         </p:nvSpPr>
         <p:spPr>
           <a:xfrm>
-            <a:off x="1645920" y="3355848"/>
-            <a:ext cx="8915400" cy="868680"/>
+            <a:off x="1143000" y="4745736"/>
+            <a:ext cx="3063240" cy="228600"/>
           </a:xfrm>
           <a:prstGeom prst="rect">
             <a:avLst/>
@@ -3483,7 +3805,157 @@
           <a:p>
             <a:pPr algn="ctr"/>
             <a:r>
-              <a:rPr sz="2400" b="1">
+              <a:rPr sz="1000" b="0">
+                <a:solidFill>
+                  <a:srgbClr val="475569"/>
+                </a:solidFill>
+                <a:latin typeface="Arial"/>
+              </a:rPr>
+              <a:t>English</a:t>
+            </a:r>
+          </a:p>
+        </p:txBody>
+      </p:sp>
+      <p:sp>
+        <p:nvSpPr>
+          <p:cNvPr id="19" name="TextBox 18"/>
+          <p:cNvSpPr txBox="1"/>
+          <p:nvPr/>
+        </p:nvSpPr>
+        <p:spPr>
+          <a:xfrm>
+            <a:off x="960120" y="5504688"/>
+            <a:ext cx="3429000" cy="274320"/>
+          </a:xfrm>
+          <a:prstGeom prst="rect">
+            <a:avLst/>
+          </a:prstGeom>
+          <a:noFill/>
+        </p:spPr>
+        <p:txBody>
+          <a:bodyPr wrap="square" lIns="0" rIns="0" tIns="0" bIns="0">
+            <a:spAutoFit/>
+          </a:bodyPr>
+          <a:lstStyle/>
+          <a:p>
+            <a:pPr algn="ctr"/>
+            <a:r>
+              <a:rPr sz="1200" b="0">
+                <a:solidFill>
+                  <a:srgbClr val="475569"/>
+                </a:solidFill>
+                <a:latin typeface="Arial"/>
+              </a:rPr>
+              <a:t>Look • wonder • predict</a:t>
+            </a:r>
+          </a:p>
+        </p:txBody>
+      </p:sp>
+      <p:sp>
+        <p:nvSpPr>
+          <p:cNvPr id="20" name="Rounded Rectangle 19"/>
+          <p:cNvSpPr/>
+          <p:nvPr/>
+        </p:nvSpPr>
+        <p:spPr>
+          <a:xfrm>
+            <a:off x="4892040" y="1965960"/>
+            <a:ext cx="6355080" cy="3520440"/>
+          </a:xfrm>
+          <a:prstGeom prst="roundRect">
+            <a:avLst/>
+          </a:prstGeom>
+          <a:solidFill>
+            <a:srgbClr val="FFF7E0"/>
+          </a:solidFill>
+          <a:ln w="20320">
+            <a:solidFill>
+              <a:srgbClr val="1D4ED8"/>
+            </a:solidFill>
+          </a:ln>
+        </p:spPr>
+        <p:style>
+          <a:lnRef idx="1">
+            <a:schemeClr val="accent1"/>
+          </a:lnRef>
+          <a:fillRef idx="3">
+            <a:schemeClr val="accent1"/>
+          </a:fillRef>
+          <a:effectRef idx="2">
+            <a:schemeClr val="accent1"/>
+          </a:effectRef>
+          <a:fontRef idx="minor">
+            <a:schemeClr val="lt1"/>
+          </a:fontRef>
+        </p:style>
+        <p:txBody>
+          <a:bodyPr rtlCol="0" anchor="ctr"/>
+          <a:lstStyle/>
+          <a:p>
+            <a:pPr algn="ctr"/>
+          </a:p>
+        </p:txBody>
+      </p:sp>
+      <p:sp>
+        <p:nvSpPr>
+          <p:cNvPr id="21" name="TextBox 20"/>
+          <p:cNvSpPr txBox="1"/>
+          <p:nvPr/>
+        </p:nvSpPr>
+        <p:spPr>
+          <a:xfrm>
+            <a:off x="5257800" y="2267712"/>
+            <a:ext cx="5623560" cy="256032"/>
+          </a:xfrm>
+          <a:prstGeom prst="rect">
+            <a:avLst/>
+          </a:prstGeom>
+          <a:noFill/>
+        </p:spPr>
+        <p:txBody>
+          <a:bodyPr wrap="square" lIns="0" rIns="0" tIns="0" bIns="0">
+            <a:spAutoFit/>
+          </a:bodyPr>
+          <a:lstStyle/>
+          <a:p>
+            <a:pPr algn="ctr"/>
+            <a:r>
+              <a:rPr sz="1200" b="1">
+                <a:solidFill>
+                  <a:srgbClr val="1D4ED8"/>
+                </a:solidFill>
+                <a:latin typeface="Arial"/>
+              </a:rPr>
+              <a:t>OPENING QUESTION</a:t>
+            </a:r>
+          </a:p>
+        </p:txBody>
+      </p:sp>
+      <p:sp>
+        <p:nvSpPr>
+          <p:cNvPr id="22" name="TextBox 21"/>
+          <p:cNvSpPr txBox="1"/>
+          <p:nvPr/>
+        </p:nvSpPr>
+        <p:spPr>
+          <a:xfrm>
+            <a:off x="5285232" y="2788920"/>
+            <a:ext cx="5577840" cy="987552"/>
+          </a:xfrm>
+          <a:prstGeom prst="rect">
+            <a:avLst/>
+          </a:prstGeom>
+          <a:noFill/>
+        </p:spPr>
+        <p:txBody>
+          <a:bodyPr wrap="square" lIns="0" rIns="0" tIns="0" bIns="0">
+            <a:spAutoFit/>
+          </a:bodyPr>
+          <a:lstStyle/>
+          <a:p>
+            <a:pPr algn="ctr"/>
+            <a:r>
+              <a:rPr sz="2600" b="1">
                 <a:solidFill>
                   <a:srgbClr val="111827"/>
                 </a:solidFill>
@@ -3496,14 +3968,14 @@
       </p:sp>
       <p:sp>
         <p:nvSpPr>
-          <p:cNvPr id="12" name="TextBox 11"/>
+          <p:cNvPr id="23" name="TextBox 22"/>
           <p:cNvSpPr txBox="1"/>
           <p:nvPr/>
         </p:nvSpPr>
         <p:spPr>
           <a:xfrm>
-            <a:off x="1143000" y="5074920"/>
-            <a:ext cx="9921240" cy="320040"/>
+            <a:off x="5285232" y="4315968"/>
+            <a:ext cx="5577840" cy="411480"/>
           </a:xfrm>
           <a:prstGeom prst="rect">
             <a:avLst/>
@@ -3524,7 +3996,7 @@
                 </a:solidFill>
                 <a:latin typeface="Arial"/>
               </a:rPr>
-              <a:t>Think silently → pair talk → share one idea</a:t>
+              <a:t>First think alone. Then tell a partner one possible answer.</a:t>
             </a:r>
           </a:p>
         </p:txBody>
@@ -3729,7 +4201,93 @@
       </p:sp>
       <p:sp>
         <p:nvSpPr>
-          <p:cNvPr id="6" name="TextBox 5"/>
+          <p:cNvPr id="6" name="Rectangle 5"/>
+          <p:cNvSpPr/>
+          <p:nvPr/>
+        </p:nvSpPr>
+        <p:spPr>
+          <a:xfrm>
+            <a:off x="164592" y="6565392"/>
+            <a:ext cx="12027103" cy="73152"/>
+          </a:xfrm>
+          <a:prstGeom prst="rect">
+            <a:avLst/>
+          </a:prstGeom>
+          <a:solidFill>
+            <a:srgbClr val="FCD116"/>
+          </a:solidFill>
+          <a:ln>
+            <a:noFill/>
+          </a:ln>
+        </p:spPr>
+        <p:style>
+          <a:lnRef idx="1">
+            <a:schemeClr val="accent1"/>
+          </a:lnRef>
+          <a:fillRef idx="3">
+            <a:schemeClr val="accent1"/>
+          </a:fillRef>
+          <a:effectRef idx="2">
+            <a:schemeClr val="accent1"/>
+          </a:effectRef>
+          <a:fontRef idx="minor">
+            <a:schemeClr val="lt1"/>
+          </a:fontRef>
+        </p:style>
+        <p:txBody>
+          <a:bodyPr rtlCol="0" anchor="ctr"/>
+          <a:lstStyle/>
+          <a:p>
+            <a:pPr algn="ctr"/>
+          </a:p>
+        </p:txBody>
+      </p:sp>
+      <p:sp>
+        <p:nvSpPr>
+          <p:cNvPr id="7" name="Rectangle 6"/>
+          <p:cNvSpPr/>
+          <p:nvPr/>
+        </p:nvSpPr>
+        <p:spPr>
+          <a:xfrm>
+            <a:off x="164592" y="6638544"/>
+            <a:ext cx="12027103" cy="45720"/>
+          </a:xfrm>
+          <a:prstGeom prst="rect">
+            <a:avLst/>
+          </a:prstGeom>
+          <a:solidFill>
+            <a:srgbClr val="D90000"/>
+          </a:solidFill>
+          <a:ln>
+            <a:noFill/>
+          </a:ln>
+        </p:spPr>
+        <p:style>
+          <a:lnRef idx="1">
+            <a:schemeClr val="accent1"/>
+          </a:lnRef>
+          <a:fillRef idx="3">
+            <a:schemeClr val="accent1"/>
+          </a:fillRef>
+          <a:effectRef idx="2">
+            <a:schemeClr val="accent1"/>
+          </a:effectRef>
+          <a:fontRef idx="minor">
+            <a:schemeClr val="lt1"/>
+          </a:fontRef>
+        </p:style>
+        <p:txBody>
+          <a:bodyPr rtlCol="0" anchor="ctr"/>
+          <a:lstStyle/>
+          <a:p>
+            <a:pPr algn="ctr"/>
+          </a:p>
+        </p:txBody>
+      </p:sp>
+      <p:sp>
+        <p:nvSpPr>
+          <p:cNvPr id="8" name="TextBox 7"/>
           <p:cNvSpPr txBox="1"/>
           <p:nvPr/>
         </p:nvSpPr>
@@ -3763,7 +4321,7 @@
       </p:sp>
       <p:sp>
         <p:nvSpPr>
-          <p:cNvPr id="7" name="TextBox 6"/>
+          <p:cNvPr id="9" name="TextBox 8"/>
           <p:cNvSpPr txBox="1"/>
           <p:nvPr/>
         </p:nvSpPr>
@@ -3798,14 +4356,14 @@
       </p:sp>
       <p:sp>
         <p:nvSpPr>
-          <p:cNvPr id="8" name="TextBox 7"/>
+          <p:cNvPr id="10" name="TextBox 9"/>
           <p:cNvSpPr txBox="1"/>
           <p:nvPr/>
         </p:nvSpPr>
         <p:spPr>
           <a:xfrm>
-            <a:off x="594360" y="1042415"/>
-            <a:ext cx="11109960" cy="566928"/>
+            <a:off x="594360" y="1005840"/>
+            <a:ext cx="11064240" cy="512064"/>
           </a:xfrm>
           <a:prstGeom prst="rect">
             <a:avLst/>
@@ -3832,16 +4390,16 @@
       </p:sp>
       <p:sp>
         <p:nvSpPr>
-          <p:cNvPr id="9" name="Rectangle 8"/>
-          <p:cNvSpPr/>
-          <p:nvPr/>
-        </p:nvSpPr>
-        <p:spPr>
-          <a:xfrm>
-            <a:off x="685800" y="1874519"/>
-            <a:ext cx="10835640" cy="804672"/>
-          </a:xfrm>
-          <a:prstGeom prst="rect">
+          <p:cNvPr id="11" name="Rounded Rectangle 10"/>
+          <p:cNvSpPr/>
+          <p:nvPr/>
+        </p:nvSpPr>
+        <p:spPr>
+          <a:xfrm>
+            <a:off x="777240" y="1755648"/>
+            <a:ext cx="10652760" cy="822960"/>
+          </a:xfrm>
+          <a:prstGeom prst="roundRect">
             <a:avLst/>
           </a:prstGeom>
           <a:solidFill>
@@ -3879,23 +4437,23 @@
                 </a:solidFill>
                 <a:latin typeface="Arial"/>
               </a:rPr>
-              <a:t>Goal: I can reflect on personal progress in English from Term...</a:t>
-            </a:r>
-          </a:p>
-        </p:txBody>
-      </p:sp>
-      <p:sp>
-        <p:nvSpPr>
-          <p:cNvPr id="10" name="Rectangle 9"/>
-          <p:cNvSpPr/>
-          <p:nvPr/>
-        </p:nvSpPr>
-        <p:spPr>
-          <a:xfrm>
-            <a:off x="868680" y="2971800"/>
-            <a:ext cx="10378440" cy="713232"/>
-          </a:xfrm>
-          <a:prstGeom prst="rect">
+              <a:t>Goal: I can reflect on personal progress in English from Term 1</a:t>
+            </a:r>
+          </a:p>
+        </p:txBody>
+      </p:sp>
+      <p:sp>
+        <p:nvSpPr>
+          <p:cNvPr id="12" name="Rounded Rectangle 11"/>
+          <p:cNvSpPr/>
+          <p:nvPr/>
+        </p:nvSpPr>
+        <p:spPr>
+          <a:xfrm>
+            <a:off x="777240" y="2971800"/>
+            <a:ext cx="2423160" cy="2103120"/>
+          </a:xfrm>
+          <a:prstGeom prst="roundRect">
             <a:avLst/>
           </a:prstGeom>
           <a:solidFill>
@@ -3931,14 +4489,14 @@
       </p:sp>
       <p:sp>
         <p:nvSpPr>
-          <p:cNvPr id="11" name="Rectangle 10"/>
-          <p:cNvSpPr/>
-          <p:nvPr/>
-        </p:nvSpPr>
-        <p:spPr>
-          <a:xfrm>
-            <a:off x="868680" y="2971800"/>
-            <a:ext cx="530352" cy="713232"/>
+          <p:cNvPr id="13" name="Rectangle 12"/>
+          <p:cNvSpPr/>
+          <p:nvPr/>
+        </p:nvSpPr>
+        <p:spPr>
+          <a:xfrm>
+            <a:off x="777240" y="2971800"/>
+            <a:ext cx="2423160" cy="164592"/>
           </a:xfrm>
           <a:prstGeom prst="rect">
             <a:avLst/>
@@ -3965,32 +4523,58 @@
           </a:fontRef>
         </p:style>
         <p:txBody>
-          <a:bodyPr rtlCol="0" anchor="ctr" wrap="square" lIns="101600" rIns="101600" tIns="38100" bIns="38100"/>
+          <a:bodyPr rtlCol="0" anchor="ctr"/>
+          <a:lstStyle/>
+          <a:p>
+            <a:pPr algn="ctr"/>
+          </a:p>
+        </p:txBody>
+      </p:sp>
+      <p:sp>
+        <p:nvSpPr>
+          <p:cNvPr id="14" name="TextBox 13"/>
+          <p:cNvSpPr txBox="1"/>
+          <p:nvPr/>
+        </p:nvSpPr>
+        <p:spPr>
+          <a:xfrm>
+            <a:off x="978408" y="3355848"/>
+            <a:ext cx="2020824" cy="320040"/>
+          </a:xfrm>
+          <a:prstGeom prst="rect">
+            <a:avLst/>
+          </a:prstGeom>
+          <a:noFill/>
+        </p:spPr>
+        <p:txBody>
+          <a:bodyPr wrap="square" lIns="0" rIns="0" tIns="0" bIns="0">
+            <a:spAutoFit/>
+          </a:bodyPr>
           <a:lstStyle/>
           <a:p>
             <a:pPr algn="ctr"/>
             <a:r>
               <a:rPr sz="1500" b="1">
                 <a:solidFill>
-                  <a:srgbClr val="FFFFFF"/>
+                  <a:srgbClr val="1B7F3A"/>
                 </a:solidFill>
                 <a:latin typeface="Arial"/>
               </a:rPr>
-              <a:t>1</a:t>
-            </a:r>
-          </a:p>
-        </p:txBody>
-      </p:sp>
-      <p:sp>
-        <p:nvSpPr>
-          <p:cNvPr id="12" name="TextBox 11"/>
+              <a:t>1  Learn</a:t>
+            </a:r>
+          </a:p>
+        </p:txBody>
+      </p:sp>
+      <p:sp>
+        <p:nvSpPr>
+          <p:cNvPr id="15" name="TextBox 14"/>
           <p:cNvSpPr txBox="1"/>
           <p:nvPr/>
         </p:nvSpPr>
         <p:spPr>
           <a:xfrm>
-            <a:off x="1572768" y="3118104"/>
-            <a:ext cx="9372600" cy="384048"/>
+            <a:off x="1005840" y="3922776"/>
+            <a:ext cx="1965960" cy="658368"/>
           </a:xfrm>
           <a:prstGeom prst="rect">
             <a:avLst/>
@@ -4003,30 +4587,31 @@
           </a:bodyPr>
           <a:lstStyle/>
           <a:p>
-            <a:r>
-              <a:rPr sz="1500" b="0">
+            <a:pPr algn="ctr"/>
+            <a:r>
+              <a:rPr sz="1400" b="1">
                 <a:solidFill>
                   <a:srgbClr val="111827"/>
                 </a:solidFill>
                 <a:latin typeface="Arial"/>
               </a:rPr>
-              <a:t>You will use: Looking Back at Term 1, What is a Portfolio?</a:t>
-            </a:r>
-          </a:p>
-        </p:txBody>
-      </p:sp>
-      <p:sp>
-        <p:nvSpPr>
-          <p:cNvPr id="13" name="Rectangle 12"/>
-          <p:cNvSpPr/>
-          <p:nvPr/>
-        </p:nvSpPr>
-        <p:spPr>
-          <a:xfrm>
-            <a:off x="868680" y="3822191"/>
-            <a:ext cx="10378440" cy="713232"/>
-          </a:xfrm>
-          <a:prstGeom prst="rect">
+              <a:t>Use: Looking Back at Term 1, What is a Portfolio?</a:t>
+            </a:r>
+          </a:p>
+        </p:txBody>
+      </p:sp>
+      <p:sp>
+        <p:nvSpPr>
+          <p:cNvPr id="16" name="Rounded Rectangle 15"/>
+          <p:cNvSpPr/>
+          <p:nvPr/>
+        </p:nvSpPr>
+        <p:spPr>
+          <a:xfrm>
+            <a:off x="3566160" y="2971800"/>
+            <a:ext cx="2423160" cy="2103120"/>
+          </a:xfrm>
+          <a:prstGeom prst="roundRect">
             <a:avLst/>
           </a:prstGeom>
           <a:solidFill>
@@ -4062,14 +4647,14 @@
       </p:sp>
       <p:sp>
         <p:nvSpPr>
-          <p:cNvPr id="14" name="Rectangle 13"/>
-          <p:cNvSpPr/>
-          <p:nvPr/>
-        </p:nvSpPr>
-        <p:spPr>
-          <a:xfrm>
-            <a:off x="868680" y="3822191"/>
-            <a:ext cx="530352" cy="713232"/>
+          <p:cNvPr id="17" name="Rectangle 16"/>
+          <p:cNvSpPr/>
+          <p:nvPr/>
+        </p:nvSpPr>
+        <p:spPr>
+          <a:xfrm>
+            <a:off x="3566160" y="2971800"/>
+            <a:ext cx="2423160" cy="164592"/>
           </a:xfrm>
           <a:prstGeom prst="rect">
             <a:avLst/>
@@ -4096,32 +4681,58 @@
           </a:fontRef>
         </p:style>
         <p:txBody>
-          <a:bodyPr rtlCol="0" anchor="ctr" wrap="square" lIns="101600" rIns="101600" tIns="38100" bIns="38100"/>
+          <a:bodyPr rtlCol="0" anchor="ctr"/>
+          <a:lstStyle/>
+          <a:p>
+            <a:pPr algn="ctr"/>
+          </a:p>
+        </p:txBody>
+      </p:sp>
+      <p:sp>
+        <p:nvSpPr>
+          <p:cNvPr id="18" name="TextBox 17"/>
+          <p:cNvSpPr txBox="1"/>
+          <p:nvPr/>
+        </p:nvSpPr>
+        <p:spPr>
+          <a:xfrm>
+            <a:off x="3767328" y="3355848"/>
+            <a:ext cx="2020824" cy="320040"/>
+          </a:xfrm>
+          <a:prstGeom prst="rect">
+            <a:avLst/>
+          </a:prstGeom>
+          <a:noFill/>
+        </p:spPr>
+        <p:txBody>
+          <a:bodyPr wrap="square" lIns="0" rIns="0" tIns="0" bIns="0">
+            <a:spAutoFit/>
+          </a:bodyPr>
           <a:lstStyle/>
           <a:p>
             <a:pPr algn="ctr"/>
             <a:r>
               <a:rPr sz="1500" b="1">
                 <a:solidFill>
-                  <a:srgbClr val="FFFFFF"/>
+                  <a:srgbClr val="1B7F3A"/>
                 </a:solidFill>
                 <a:latin typeface="Arial"/>
               </a:rPr>
-              <a:t>2</a:t>
-            </a:r>
-          </a:p>
-        </p:txBody>
-      </p:sp>
-      <p:sp>
-        <p:nvSpPr>
-          <p:cNvPr id="15" name="TextBox 14"/>
+              <a:t>2  Practise</a:t>
+            </a:r>
+          </a:p>
+        </p:txBody>
+      </p:sp>
+      <p:sp>
+        <p:nvSpPr>
+          <p:cNvPr id="19" name="TextBox 18"/>
           <p:cNvSpPr txBox="1"/>
           <p:nvPr/>
         </p:nvSpPr>
         <p:spPr>
           <a:xfrm>
-            <a:off x="1572768" y="3968496"/>
-            <a:ext cx="9372600" cy="384048"/>
+            <a:off x="3794760" y="3922776"/>
+            <a:ext cx="1965960" cy="658368"/>
           </a:xfrm>
           <a:prstGeom prst="rect">
             <a:avLst/>
@@ -4134,30 +4745,31 @@
           </a:bodyPr>
           <a:lstStyle/>
           <a:p>
-            <a:r>
-              <a:rPr sz="1500" b="0">
+            <a:pPr algn="ctr"/>
+            <a:r>
+              <a:rPr sz="1400" b="1">
                 <a:solidFill>
                   <a:srgbClr val="111827"/>
                 </a:solidFill>
                 <a:latin typeface="Arial"/>
               </a:rPr>
-              <a:t>Success: explain, try, and answer in your own words.</a:t>
-            </a:r>
-          </a:p>
-        </p:txBody>
-      </p:sp>
-      <p:sp>
-        <p:nvSpPr>
-          <p:cNvPr id="16" name="Rectangle 15"/>
-          <p:cNvSpPr/>
-          <p:nvPr/>
-        </p:nvSpPr>
-        <p:spPr>
-          <a:xfrm>
-            <a:off x="868680" y="4672584"/>
-            <a:ext cx="10378440" cy="713232"/>
-          </a:xfrm>
-          <a:prstGeom prst="rect">
+              <a:t>Show: answer with one reason or example.</a:t>
+            </a:r>
+          </a:p>
+        </p:txBody>
+      </p:sp>
+      <p:sp>
+        <p:nvSpPr>
+          <p:cNvPr id="20" name="Rounded Rectangle 19"/>
+          <p:cNvSpPr/>
+          <p:nvPr/>
+        </p:nvSpPr>
+        <p:spPr>
+          <a:xfrm>
+            <a:off x="6355079" y="2971800"/>
+            <a:ext cx="2423160" cy="2103120"/>
+          </a:xfrm>
+          <a:prstGeom prst="roundRect">
             <a:avLst/>
           </a:prstGeom>
           <a:solidFill>
@@ -4193,14 +4805,14 @@
       </p:sp>
       <p:sp>
         <p:nvSpPr>
-          <p:cNvPr id="17" name="Rectangle 16"/>
-          <p:cNvSpPr/>
-          <p:nvPr/>
-        </p:nvSpPr>
-        <p:spPr>
-          <a:xfrm>
-            <a:off x="868680" y="4672584"/>
-            <a:ext cx="530352" cy="713232"/>
+          <p:cNvPr id="21" name="Rectangle 20"/>
+          <p:cNvSpPr/>
+          <p:nvPr/>
+        </p:nvSpPr>
+        <p:spPr>
+          <a:xfrm>
+            <a:off x="6355079" y="2971800"/>
+            <a:ext cx="2423160" cy="164592"/>
           </a:xfrm>
           <a:prstGeom prst="rect">
             <a:avLst/>
@@ -4227,32 +4839,58 @@
           </a:fontRef>
         </p:style>
         <p:txBody>
-          <a:bodyPr rtlCol="0" anchor="ctr" wrap="square" lIns="101600" rIns="101600" tIns="38100" bIns="38100"/>
+          <a:bodyPr rtlCol="0" anchor="ctr"/>
+          <a:lstStyle/>
+          <a:p>
+            <a:pPr algn="ctr"/>
+          </a:p>
+        </p:txBody>
+      </p:sp>
+      <p:sp>
+        <p:nvSpPr>
+          <p:cNvPr id="22" name="TextBox 21"/>
+          <p:cNvSpPr txBox="1"/>
+          <p:nvPr/>
+        </p:nvSpPr>
+        <p:spPr>
+          <a:xfrm>
+            <a:off x="6556247" y="3355848"/>
+            <a:ext cx="2020824" cy="320040"/>
+          </a:xfrm>
+          <a:prstGeom prst="rect">
+            <a:avLst/>
+          </a:prstGeom>
+          <a:noFill/>
+        </p:spPr>
+        <p:txBody>
+          <a:bodyPr wrap="square" lIns="0" rIns="0" tIns="0" bIns="0">
+            <a:spAutoFit/>
+          </a:bodyPr>
           <a:lstStyle/>
           <a:p>
             <a:pPr algn="ctr"/>
             <a:r>
               <a:rPr sz="1500" b="1">
                 <a:solidFill>
-                  <a:srgbClr val="FFFFFF"/>
+                  <a:srgbClr val="1B7F3A"/>
                 </a:solidFill>
                 <a:latin typeface="Arial"/>
               </a:rPr>
-              <a:t>3</a:t>
-            </a:r>
-          </a:p>
-        </p:txBody>
-      </p:sp>
-      <p:sp>
-        <p:nvSpPr>
-          <p:cNvPr id="18" name="TextBox 17"/>
+              <a:t>3  Show</a:t>
+            </a:r>
+          </a:p>
+        </p:txBody>
+      </p:sp>
+      <p:sp>
+        <p:nvSpPr>
+          <p:cNvPr id="23" name="TextBox 22"/>
           <p:cNvSpPr txBox="1"/>
           <p:nvPr/>
         </p:nvSpPr>
         <p:spPr>
           <a:xfrm>
-            <a:off x="1572768" y="4818888"/>
-            <a:ext cx="9372600" cy="384048"/>
+            <a:off x="6583679" y="3922776"/>
+            <a:ext cx="1965960" cy="658368"/>
           </a:xfrm>
           <a:prstGeom prst="rect">
             <a:avLst/>
@@ -4265,30 +4903,31 @@
           </a:bodyPr>
           <a:lstStyle/>
           <a:p>
-            <a:r>
-              <a:rPr sz="1500" b="0">
+            <a:pPr algn="ctr"/>
+            <a:r>
+              <a:rPr sz="1400" b="1">
                 <a:solidFill>
                   <a:srgbClr val="111827"/>
                 </a:solidFill>
                 <a:latin typeface="Arial"/>
               </a:rPr>
-              <a:t>Write one clear response.</a:t>
-            </a:r>
-          </a:p>
-        </p:txBody>
-      </p:sp>
-      <p:sp>
-        <p:nvSpPr>
-          <p:cNvPr id="19" name="Rectangle 18"/>
-          <p:cNvSpPr/>
-          <p:nvPr/>
-        </p:nvSpPr>
-        <p:spPr>
-          <a:xfrm>
-            <a:off x="868680" y="5522976"/>
-            <a:ext cx="10378440" cy="713232"/>
-          </a:xfrm>
-          <a:prstGeom prst="rect">
+              <a:t>Routine: listen, talk, try, explain.</a:t>
+            </a:r>
+          </a:p>
+        </p:txBody>
+      </p:sp>
+      <p:sp>
+        <p:nvSpPr>
+          <p:cNvPr id="24" name="Rounded Rectangle 23"/>
+          <p:cNvSpPr/>
+          <p:nvPr/>
+        </p:nvSpPr>
+        <p:spPr>
+          <a:xfrm>
+            <a:off x="9143999" y="2971800"/>
+            <a:ext cx="2423160" cy="2103120"/>
+          </a:xfrm>
+          <a:prstGeom prst="roundRect">
             <a:avLst/>
           </a:prstGeom>
           <a:solidFill>
@@ -4324,14 +4963,14 @@
       </p:sp>
       <p:sp>
         <p:nvSpPr>
-          <p:cNvPr id="20" name="Rectangle 19"/>
-          <p:cNvSpPr/>
-          <p:nvPr/>
-        </p:nvSpPr>
-        <p:spPr>
-          <a:xfrm>
-            <a:off x="868680" y="5522976"/>
-            <a:ext cx="530352" cy="713232"/>
+          <p:cNvPr id="25" name="Rectangle 24"/>
+          <p:cNvSpPr/>
+          <p:nvPr/>
+        </p:nvSpPr>
+        <p:spPr>
+          <a:xfrm>
+            <a:off x="9143999" y="2971800"/>
+            <a:ext cx="2423160" cy="164592"/>
           </a:xfrm>
           <a:prstGeom prst="rect">
             <a:avLst/>
@@ -4358,32 +4997,58 @@
           </a:fontRef>
         </p:style>
         <p:txBody>
-          <a:bodyPr rtlCol="0" anchor="ctr" wrap="square" lIns="101600" rIns="101600" tIns="38100" bIns="38100"/>
+          <a:bodyPr rtlCol="0" anchor="ctr"/>
+          <a:lstStyle/>
+          <a:p>
+            <a:pPr algn="ctr"/>
+          </a:p>
+        </p:txBody>
+      </p:sp>
+      <p:sp>
+        <p:nvSpPr>
+          <p:cNvPr id="26" name="TextBox 25"/>
+          <p:cNvSpPr txBox="1"/>
+          <p:nvPr/>
+        </p:nvSpPr>
+        <p:spPr>
+          <a:xfrm>
+            <a:off x="9345167" y="3355848"/>
+            <a:ext cx="2020824" cy="320040"/>
+          </a:xfrm>
+          <a:prstGeom prst="rect">
+            <a:avLst/>
+          </a:prstGeom>
+          <a:noFill/>
+        </p:spPr>
+        <p:txBody>
+          <a:bodyPr wrap="square" lIns="0" rIns="0" tIns="0" bIns="0">
+            <a:spAutoFit/>
+          </a:bodyPr>
           <a:lstStyle/>
           <a:p>
             <a:pPr algn="ctr"/>
             <a:r>
               <a:rPr sz="1500" b="1">
                 <a:solidFill>
-                  <a:srgbClr val="FFFFFF"/>
+                  <a:srgbClr val="1B7F3A"/>
                 </a:solidFill>
                 <a:latin typeface="Arial"/>
               </a:rPr>
-              <a:t>4</a:t>
-            </a:r>
-          </a:p>
-        </p:txBody>
-      </p:sp>
-      <p:sp>
-        <p:nvSpPr>
-          <p:cNvPr id="21" name="TextBox 20"/>
+              <a:t>4  Reflect</a:t>
+            </a:r>
+          </a:p>
+        </p:txBody>
+      </p:sp>
+      <p:sp>
+        <p:nvSpPr>
+          <p:cNvPr id="27" name="TextBox 26"/>
           <p:cNvSpPr txBox="1"/>
           <p:nvPr/>
         </p:nvSpPr>
         <p:spPr>
           <a:xfrm>
-            <a:off x="1572768" y="5669280"/>
-            <a:ext cx="9372600" cy="384048"/>
+            <a:off x="9372599" y="3922776"/>
+            <a:ext cx="1965960" cy="658368"/>
           </a:xfrm>
           <a:prstGeom prst="rect">
             <a:avLst/>
@@ -4396,28 +5061,291 @@
           </a:bodyPr>
           <a:lstStyle/>
           <a:p>
-            <a:r>
-              <a:rPr sz="1500" b="0">
+            <a:pPr algn="ctr"/>
+            <a:r>
+              <a:rPr sz="1400" b="1">
                 <a:solidFill>
                   <a:srgbClr val="111827"/>
                 </a:solidFill>
                 <a:latin typeface="Arial"/>
               </a:rPr>
-              <a:t>Write one clear response.</a:t>
-            </a:r>
-          </a:p>
-        </p:txBody>
-      </p:sp>
-      <p:sp>
-        <p:nvSpPr>
-          <p:cNvPr id="22" name="TextBox 21"/>
+              <a:t>Explain in your own words.</a:t>
+            </a:r>
+          </a:p>
+        </p:txBody>
+      </p:sp>
+      <p:sp>
+        <p:nvSpPr>
+          <p:cNvPr id="28" name="Rectangle 27"/>
+          <p:cNvSpPr/>
+          <p:nvPr/>
+        </p:nvSpPr>
+        <p:spPr>
+          <a:xfrm>
+            <a:off x="5182819" y="5417820"/>
+            <a:ext cx="768096" cy="378561"/>
+          </a:xfrm>
+          <a:prstGeom prst="rect">
+            <a:avLst/>
+          </a:prstGeom>
+          <a:solidFill>
+            <a:srgbClr val="FFFFFF"/>
+          </a:solidFill>
+          <a:ln w="10160">
+            <a:solidFill>
+              <a:srgbClr val="1D4ED8"/>
+            </a:solidFill>
+          </a:ln>
+        </p:spPr>
+        <p:style>
+          <a:lnRef idx="1">
+            <a:schemeClr val="accent1"/>
+          </a:lnRef>
+          <a:fillRef idx="3">
+            <a:schemeClr val="accent1"/>
+          </a:fillRef>
+          <a:effectRef idx="2">
+            <a:schemeClr val="accent1"/>
+          </a:effectRef>
+          <a:fontRef idx="minor">
+            <a:schemeClr val="lt1"/>
+          </a:fontRef>
+        </p:style>
+        <p:txBody>
+          <a:bodyPr rtlCol="0" anchor="ctr"/>
+          <a:lstStyle/>
+          <a:p>
+            <a:pPr algn="ctr"/>
+          </a:p>
+        </p:txBody>
+      </p:sp>
+      <p:sp>
+        <p:nvSpPr>
+          <p:cNvPr id="29" name="Rectangle 28"/>
+          <p:cNvSpPr/>
+          <p:nvPr/>
+        </p:nvSpPr>
+        <p:spPr>
+          <a:xfrm>
+            <a:off x="5950915" y="5417820"/>
+            <a:ext cx="768096" cy="378561"/>
+          </a:xfrm>
+          <a:prstGeom prst="rect">
+            <a:avLst/>
+          </a:prstGeom>
+          <a:solidFill>
+            <a:srgbClr val="FFFFFF"/>
+          </a:solidFill>
+          <a:ln w="10160">
+            <a:solidFill>
+              <a:srgbClr val="1D4ED8"/>
+            </a:solidFill>
+          </a:ln>
+        </p:spPr>
+        <p:style>
+          <a:lnRef idx="1">
+            <a:schemeClr val="accent1"/>
+          </a:lnRef>
+          <a:fillRef idx="3">
+            <a:schemeClr val="accent1"/>
+          </a:fillRef>
+          <a:effectRef idx="2">
+            <a:schemeClr val="accent1"/>
+          </a:effectRef>
+          <a:fontRef idx="minor">
+            <a:schemeClr val="lt1"/>
+          </a:fontRef>
+        </p:style>
+        <p:txBody>
+          <a:bodyPr rtlCol="0" anchor="ctr"/>
+          <a:lstStyle/>
+          <a:p>
+            <a:pPr algn="ctr"/>
+          </a:p>
+        </p:txBody>
+      </p:sp>
+      <p:sp>
+        <p:nvSpPr>
+          <p:cNvPr id="30" name="Rectangle 29"/>
+          <p:cNvSpPr/>
+          <p:nvPr/>
+        </p:nvSpPr>
+        <p:spPr>
+          <a:xfrm>
+            <a:off x="5490057" y="5376672"/>
+            <a:ext cx="947318" cy="49377"/>
+          </a:xfrm>
+          <a:prstGeom prst="rect">
+            <a:avLst/>
+          </a:prstGeom>
+          <a:solidFill>
+            <a:srgbClr val="D90000"/>
+          </a:solidFill>
+          <a:ln>
+            <a:noFill/>
+          </a:ln>
+        </p:spPr>
+        <p:style>
+          <a:lnRef idx="1">
+            <a:schemeClr val="accent1"/>
+          </a:lnRef>
+          <a:fillRef idx="3">
+            <a:schemeClr val="accent1"/>
+          </a:fillRef>
+          <a:effectRef idx="2">
+            <a:schemeClr val="accent1"/>
+          </a:effectRef>
+          <a:fontRef idx="minor">
+            <a:schemeClr val="lt1"/>
+          </a:fontRef>
+        </p:style>
+        <p:txBody>
+          <a:bodyPr rtlCol="0" anchor="ctr"/>
+          <a:lstStyle/>
+          <a:p>
+            <a:pPr algn="ctr"/>
+          </a:p>
+        </p:txBody>
+      </p:sp>
+      <p:sp>
+        <p:nvSpPr>
+          <p:cNvPr id="31" name="Rectangle 30"/>
+          <p:cNvSpPr/>
+          <p:nvPr/>
+        </p:nvSpPr>
+        <p:spPr>
+          <a:xfrm>
+            <a:off x="5336438" y="5524804"/>
+            <a:ext cx="1228953" cy="20574"/>
+          </a:xfrm>
+          <a:prstGeom prst="rect">
+            <a:avLst/>
+          </a:prstGeom>
+          <a:solidFill>
+            <a:srgbClr val="CBD5E1"/>
+          </a:solidFill>
+          <a:ln>
+            <a:noFill/>
+          </a:ln>
+        </p:spPr>
+        <p:style>
+          <a:lnRef idx="1">
+            <a:schemeClr val="accent1"/>
+          </a:lnRef>
+          <a:fillRef idx="3">
+            <a:schemeClr val="accent1"/>
+          </a:fillRef>
+          <a:effectRef idx="2">
+            <a:schemeClr val="accent1"/>
+          </a:effectRef>
+          <a:fontRef idx="minor">
+            <a:schemeClr val="lt1"/>
+          </a:fontRef>
+        </p:style>
+        <p:txBody>
+          <a:bodyPr rtlCol="0" anchor="ctr"/>
+          <a:lstStyle/>
+          <a:p>
+            <a:pPr algn="ctr"/>
+          </a:p>
+        </p:txBody>
+      </p:sp>
+      <p:sp>
+        <p:nvSpPr>
+          <p:cNvPr id="32" name="Rectangle 31"/>
+          <p:cNvSpPr/>
+          <p:nvPr/>
+        </p:nvSpPr>
+        <p:spPr>
+          <a:xfrm>
+            <a:off x="5336438" y="5623560"/>
+            <a:ext cx="1228953" cy="20574"/>
+          </a:xfrm>
+          <a:prstGeom prst="rect">
+            <a:avLst/>
+          </a:prstGeom>
+          <a:solidFill>
+            <a:srgbClr val="CBD5E1"/>
+          </a:solidFill>
+          <a:ln>
+            <a:noFill/>
+          </a:ln>
+        </p:spPr>
+        <p:style>
+          <a:lnRef idx="1">
+            <a:schemeClr val="accent1"/>
+          </a:lnRef>
+          <a:fillRef idx="3">
+            <a:schemeClr val="accent1"/>
+          </a:fillRef>
+          <a:effectRef idx="2">
+            <a:schemeClr val="accent1"/>
+          </a:effectRef>
+          <a:fontRef idx="minor">
+            <a:schemeClr val="lt1"/>
+          </a:fontRef>
+        </p:style>
+        <p:txBody>
+          <a:bodyPr rtlCol="0" anchor="ctr"/>
+          <a:lstStyle/>
+          <a:p>
+            <a:pPr algn="ctr"/>
+          </a:p>
+        </p:txBody>
+      </p:sp>
+      <p:sp>
+        <p:nvSpPr>
+          <p:cNvPr id="33" name="Rectangle 32"/>
+          <p:cNvSpPr/>
+          <p:nvPr/>
+        </p:nvSpPr>
+        <p:spPr>
+          <a:xfrm>
+            <a:off x="5336438" y="5722315"/>
+            <a:ext cx="1228953" cy="20574"/>
+          </a:xfrm>
+          <a:prstGeom prst="rect">
+            <a:avLst/>
+          </a:prstGeom>
+          <a:solidFill>
+            <a:srgbClr val="CBD5E1"/>
+          </a:solidFill>
+          <a:ln>
+            <a:noFill/>
+          </a:ln>
+        </p:spPr>
+        <p:style>
+          <a:lnRef idx="1">
+            <a:schemeClr val="accent1"/>
+          </a:lnRef>
+          <a:fillRef idx="3">
+            <a:schemeClr val="accent1"/>
+          </a:fillRef>
+          <a:effectRef idx="2">
+            <a:schemeClr val="accent1"/>
+          </a:effectRef>
+          <a:fontRef idx="minor">
+            <a:schemeClr val="lt1"/>
+          </a:fontRef>
+        </p:style>
+        <p:txBody>
+          <a:bodyPr rtlCol="0" anchor="ctr"/>
+          <a:lstStyle/>
+          <a:p>
+            <a:pPr algn="ctr"/>
+          </a:p>
+        </p:txBody>
+      </p:sp>
+      <p:sp>
+        <p:nvSpPr>
+          <p:cNvPr id="34" name="TextBox 33"/>
           <p:cNvSpPr txBox="1"/>
           <p:nvPr/>
         </p:nvSpPr>
         <p:spPr>
           <a:xfrm>
-            <a:off x="685800" y="6419088"/>
-            <a:ext cx="10835640" cy="228600"/>
+            <a:off x="713232" y="6355080"/>
+            <a:ext cx="10835640" cy="219456"/>
           </a:xfrm>
           <a:prstGeom prst="rect">
             <a:avLst/>
@@ -4438,7 +5366,7 @@
                 </a:solidFill>
                 <a:latin typeface="Arial"/>
               </a:rPr>
-              <a:t>Listen • Talk • Try • Explain</a:t>
+              <a:t>P7 class flow: listen • talk • try • explain</a:t>
             </a:r>
           </a:p>
         </p:txBody>
@@ -4643,7 +5571,93 @@
       </p:sp>
       <p:sp>
         <p:nvSpPr>
-          <p:cNvPr id="6" name="TextBox 5"/>
+          <p:cNvPr id="6" name="Rectangle 5"/>
+          <p:cNvSpPr/>
+          <p:nvPr/>
+        </p:nvSpPr>
+        <p:spPr>
+          <a:xfrm>
+            <a:off x="164592" y="6565392"/>
+            <a:ext cx="12027103" cy="73152"/>
+          </a:xfrm>
+          <a:prstGeom prst="rect">
+            <a:avLst/>
+          </a:prstGeom>
+          <a:solidFill>
+            <a:srgbClr val="FCD116"/>
+          </a:solidFill>
+          <a:ln>
+            <a:noFill/>
+          </a:ln>
+        </p:spPr>
+        <p:style>
+          <a:lnRef idx="1">
+            <a:schemeClr val="accent1"/>
+          </a:lnRef>
+          <a:fillRef idx="3">
+            <a:schemeClr val="accent1"/>
+          </a:fillRef>
+          <a:effectRef idx="2">
+            <a:schemeClr val="accent1"/>
+          </a:effectRef>
+          <a:fontRef idx="minor">
+            <a:schemeClr val="lt1"/>
+          </a:fontRef>
+        </p:style>
+        <p:txBody>
+          <a:bodyPr rtlCol="0" anchor="ctr"/>
+          <a:lstStyle/>
+          <a:p>
+            <a:pPr algn="ctr"/>
+          </a:p>
+        </p:txBody>
+      </p:sp>
+      <p:sp>
+        <p:nvSpPr>
+          <p:cNvPr id="7" name="Rectangle 6"/>
+          <p:cNvSpPr/>
+          <p:nvPr/>
+        </p:nvSpPr>
+        <p:spPr>
+          <a:xfrm>
+            <a:off x="164592" y="6638544"/>
+            <a:ext cx="12027103" cy="45720"/>
+          </a:xfrm>
+          <a:prstGeom prst="rect">
+            <a:avLst/>
+          </a:prstGeom>
+          <a:solidFill>
+            <a:srgbClr val="D90000"/>
+          </a:solidFill>
+          <a:ln>
+            <a:noFill/>
+          </a:ln>
+        </p:spPr>
+        <p:style>
+          <a:lnRef idx="1">
+            <a:schemeClr val="accent1"/>
+          </a:lnRef>
+          <a:fillRef idx="3">
+            <a:schemeClr val="accent1"/>
+          </a:fillRef>
+          <a:effectRef idx="2">
+            <a:schemeClr val="accent1"/>
+          </a:effectRef>
+          <a:fontRef idx="minor">
+            <a:schemeClr val="lt1"/>
+          </a:fontRef>
+        </p:style>
+        <p:txBody>
+          <a:bodyPr rtlCol="0" anchor="ctr"/>
+          <a:lstStyle/>
+          <a:p>
+            <a:pPr algn="ctr"/>
+          </a:p>
+        </p:txBody>
+      </p:sp>
+      <p:sp>
+        <p:nvSpPr>
+          <p:cNvPr id="8" name="TextBox 7"/>
           <p:cNvSpPr txBox="1"/>
           <p:nvPr/>
         </p:nvSpPr>
@@ -4677,7 +5691,7 @@
       </p:sp>
       <p:sp>
         <p:nvSpPr>
-          <p:cNvPr id="7" name="TextBox 6"/>
+          <p:cNvPr id="9" name="TextBox 8"/>
           <p:cNvSpPr txBox="1"/>
           <p:nvPr/>
         </p:nvSpPr>
@@ -4712,14 +5726,14 @@
       </p:sp>
       <p:sp>
         <p:nvSpPr>
-          <p:cNvPr id="8" name="TextBox 7"/>
+          <p:cNvPr id="10" name="TextBox 9"/>
           <p:cNvSpPr txBox="1"/>
           <p:nvPr/>
         </p:nvSpPr>
         <p:spPr>
           <a:xfrm>
-            <a:off x="594360" y="1042415"/>
-            <a:ext cx="11109960" cy="566928"/>
+            <a:off x="594360" y="1005840"/>
+            <a:ext cx="11064240" cy="512064"/>
           </a:xfrm>
           <a:prstGeom prst="rect">
             <a:avLst/>
@@ -4746,22 +5760,22 @@
       </p:sp>
       <p:sp>
         <p:nvSpPr>
-          <p:cNvPr id="9" name="Rectangle 8"/>
-          <p:cNvSpPr/>
-          <p:nvPr/>
-        </p:nvSpPr>
-        <p:spPr>
-          <a:xfrm>
-            <a:off x="685800" y="1874519"/>
-            <a:ext cx="10835640" cy="804672"/>
-          </a:xfrm>
-          <a:prstGeom prst="rect">
-            <a:avLst/>
-          </a:prstGeom>
-          <a:solidFill>
-            <a:srgbClr val="FFF7E0"/>
-          </a:solidFill>
-          <a:ln w="17780">
+          <p:cNvPr id="11" name="Rounded Rectangle 10"/>
+          <p:cNvSpPr/>
+          <p:nvPr/>
+        </p:nvSpPr>
+        <p:spPr>
+          <a:xfrm>
+            <a:off x="822960" y="1874519"/>
+            <a:ext cx="3154680" cy="3977639"/>
+          </a:xfrm>
+          <a:prstGeom prst="roundRect">
+            <a:avLst/>
+          </a:prstGeom>
+          <a:solidFill>
+            <a:srgbClr val="FFFFFF"/>
+          </a:solidFill>
+          <a:ln w="16510">
             <a:solidFill>
               <a:srgbClr val="7C3AED"/>
             </a:solidFill>
@@ -4782,60 +5796,6 @@
           </a:fontRef>
         </p:style>
         <p:txBody>
-          <a:bodyPr rtlCol="0" anchor="ctr" wrap="square" lIns="101600" rIns="101600" tIns="38100" bIns="38100"/>
-          <a:lstStyle/>
-          <a:p>
-            <a:pPr algn="ctr"/>
-            <a:r>
-              <a:rPr sz="1900" b="1">
-                <a:solidFill>
-                  <a:srgbClr val="111827"/>
-                </a:solidFill>
-                <a:latin typeface="Arial"/>
-              </a:rPr>
-              <a:t>Think: What are the three main topics we studied this term?</a:t>
-            </a:r>
-          </a:p>
-        </p:txBody>
-      </p:sp>
-      <p:sp>
-        <p:nvSpPr>
-          <p:cNvPr id="10" name="Rectangle 9"/>
-          <p:cNvSpPr/>
-          <p:nvPr/>
-        </p:nvSpPr>
-        <p:spPr>
-          <a:xfrm>
-            <a:off x="868680" y="2971800"/>
-            <a:ext cx="10378440" cy="713232"/>
-          </a:xfrm>
-          <a:prstGeom prst="rect">
-            <a:avLst/>
-          </a:prstGeom>
-          <a:solidFill>
-            <a:srgbClr val="FFFFFF"/>
-          </a:solidFill>
-          <a:ln w="11430">
-            <a:solidFill>
-              <a:srgbClr val="CBD5E1"/>
-            </a:solidFill>
-          </a:ln>
-        </p:spPr>
-        <p:style>
-          <a:lnRef idx="1">
-            <a:schemeClr val="accent1"/>
-          </a:lnRef>
-          <a:fillRef idx="3">
-            <a:schemeClr val="accent1"/>
-          </a:fillRef>
-          <a:effectRef idx="2">
-            <a:schemeClr val="accent1"/>
-          </a:effectRef>
-          <a:fontRef idx="minor">
-            <a:schemeClr val="lt1"/>
-          </a:fontRef>
-        </p:style>
-        <p:txBody>
           <a:bodyPr rtlCol="0" anchor="ctr"/>
           <a:lstStyle/>
           <a:p>
@@ -4845,16 +5805,16 @@
       </p:sp>
       <p:sp>
         <p:nvSpPr>
-          <p:cNvPr id="11" name="Rectangle 10"/>
-          <p:cNvSpPr/>
-          <p:nvPr/>
-        </p:nvSpPr>
-        <p:spPr>
-          <a:xfrm>
-            <a:off x="868680" y="2971800"/>
-            <a:ext cx="530352" cy="713232"/>
-          </a:xfrm>
-          <a:prstGeom prst="rect">
+          <p:cNvPr id="12" name="Oval 11"/>
+          <p:cNvSpPr/>
+          <p:nvPr/>
+        </p:nvSpPr>
+        <p:spPr>
+          <a:xfrm>
+            <a:off x="2029968" y="2148840"/>
+            <a:ext cx="713232" cy="713232"/>
+          </a:xfrm>
+          <a:prstGeom prst="ellipse">
             <a:avLst/>
           </a:prstGeom>
           <a:solidFill>
@@ -4897,14 +5857,14 @@
       </p:sp>
       <p:sp>
         <p:nvSpPr>
-          <p:cNvPr id="12" name="TextBox 11"/>
+          <p:cNvPr id="13" name="TextBox 12"/>
           <p:cNvSpPr txBox="1"/>
           <p:nvPr/>
         </p:nvSpPr>
         <p:spPr>
           <a:xfrm>
-            <a:off x="1572768" y="3118104"/>
-            <a:ext cx="9372600" cy="384048"/>
+            <a:off x="1143000" y="2999232"/>
+            <a:ext cx="2514600" cy="310896"/>
           </a:xfrm>
           <a:prstGeom prst="rect">
             <a:avLst/>
@@ -4917,38 +5877,109 @@
           </a:bodyPr>
           <a:lstStyle/>
           <a:p>
-            <a:r>
-              <a:rPr sz="1500" b="0">
+            <a:pPr algn="ctr"/>
+            <a:r>
+              <a:rPr sz="1600" b="1">
+                <a:solidFill>
+                  <a:srgbClr val="7C3AED"/>
+                </a:solidFill>
+                <a:latin typeface="Arial"/>
+              </a:rPr>
+              <a:t>THINK</a:t>
+            </a:r>
+          </a:p>
+        </p:txBody>
+      </p:sp>
+      <p:sp>
+        <p:nvSpPr>
+          <p:cNvPr id="14" name="TextBox 13"/>
+          <p:cNvSpPr txBox="1"/>
+          <p:nvPr/>
+        </p:nvSpPr>
+        <p:spPr>
+          <a:xfrm>
+            <a:off x="1143000" y="3657600"/>
+            <a:ext cx="2514600" cy="960120"/>
+          </a:xfrm>
+          <a:prstGeom prst="rect">
+            <a:avLst/>
+          </a:prstGeom>
+          <a:noFill/>
+        </p:spPr>
+        <p:txBody>
+          <a:bodyPr wrap="square" lIns="0" rIns="0" tIns="0" bIns="0">
+            <a:spAutoFit/>
+          </a:bodyPr>
+          <a:lstStyle/>
+          <a:p>
+            <a:pPr algn="ctr"/>
+            <a:r>
+              <a:rPr sz="1800" b="1">
                 <a:solidFill>
                   <a:srgbClr val="111827"/>
                 </a:solidFill>
                 <a:latin typeface="Arial"/>
               </a:rPr>
-              <a:t>Pair: compare your first answer with a partner.</a:t>
-            </a:r>
-          </a:p>
-        </p:txBody>
-      </p:sp>
-      <p:sp>
-        <p:nvSpPr>
-          <p:cNvPr id="13" name="Rectangle 12"/>
-          <p:cNvSpPr/>
-          <p:nvPr/>
-        </p:nvSpPr>
-        <p:spPr>
-          <a:xfrm>
-            <a:off x="868680" y="3822191"/>
-            <a:ext cx="10378440" cy="713232"/>
-          </a:xfrm>
-          <a:prstGeom prst="rect">
+              <a:t>What are the three main topics we studied this term?</a:t>
+            </a:r>
+          </a:p>
+        </p:txBody>
+      </p:sp>
+      <p:sp>
+        <p:nvSpPr>
+          <p:cNvPr id="15" name="TextBox 14"/>
+          <p:cNvSpPr txBox="1"/>
+          <p:nvPr/>
+        </p:nvSpPr>
+        <p:spPr>
+          <a:xfrm>
+            <a:off x="1143000" y="5166360"/>
+            <a:ext cx="2514600" cy="274320"/>
+          </a:xfrm>
+          <a:prstGeom prst="rect">
+            <a:avLst/>
+          </a:prstGeom>
+          <a:noFill/>
+        </p:spPr>
+        <p:txBody>
+          <a:bodyPr wrap="square" lIns="0" rIns="0" tIns="0" bIns="0">
+            <a:spAutoFit/>
+          </a:bodyPr>
+          <a:lstStyle/>
+          <a:p>
+            <a:pPr algn="ctr"/>
+            <a:r>
+              <a:rPr sz="1100" b="0">
+                <a:solidFill>
+                  <a:srgbClr val="475569"/>
+                </a:solidFill>
+                <a:latin typeface="Arial"/>
+              </a:rPr>
+              <a:t>30 seconds</a:t>
+            </a:r>
+          </a:p>
+        </p:txBody>
+      </p:sp>
+      <p:sp>
+        <p:nvSpPr>
+          <p:cNvPr id="16" name="Rounded Rectangle 15"/>
+          <p:cNvSpPr/>
+          <p:nvPr/>
+        </p:nvSpPr>
+        <p:spPr>
+          <a:xfrm>
+            <a:off x="4526280" y="1874519"/>
+            <a:ext cx="3154680" cy="3977639"/>
+          </a:xfrm>
+          <a:prstGeom prst="roundRect">
             <a:avLst/>
           </a:prstGeom>
           <a:solidFill>
             <a:srgbClr val="FFFFFF"/>
           </a:solidFill>
-          <a:ln w="11430">
+          <a:ln w="16510">
             <a:solidFill>
-              <a:srgbClr val="CBD5E1"/>
+              <a:srgbClr val="7C3AED"/>
             </a:solidFill>
           </a:ln>
         </p:spPr>
@@ -4976,16 +6007,16 @@
       </p:sp>
       <p:sp>
         <p:nvSpPr>
-          <p:cNvPr id="14" name="Rectangle 13"/>
-          <p:cNvSpPr/>
-          <p:nvPr/>
-        </p:nvSpPr>
-        <p:spPr>
-          <a:xfrm>
-            <a:off x="868680" y="3822191"/>
-            <a:ext cx="530352" cy="713232"/>
-          </a:xfrm>
-          <a:prstGeom prst="rect">
+          <p:cNvPr id="17" name="Oval 16"/>
+          <p:cNvSpPr/>
+          <p:nvPr/>
+        </p:nvSpPr>
+        <p:spPr>
+          <a:xfrm>
+            <a:off x="5733288" y="2148840"/>
+            <a:ext cx="713232" cy="713232"/>
+          </a:xfrm>
+          <a:prstGeom prst="ellipse">
             <a:avLst/>
           </a:prstGeom>
           <a:solidFill>
@@ -5028,14 +6059,14 @@
       </p:sp>
       <p:sp>
         <p:nvSpPr>
-          <p:cNvPr id="15" name="TextBox 14"/>
+          <p:cNvPr id="18" name="TextBox 17"/>
           <p:cNvSpPr txBox="1"/>
           <p:nvPr/>
         </p:nvSpPr>
         <p:spPr>
           <a:xfrm>
-            <a:off x="1572768" y="3968496"/>
-            <a:ext cx="9372600" cy="384048"/>
+            <a:off x="4846320" y="2999232"/>
+            <a:ext cx="2514600" cy="310896"/>
           </a:xfrm>
           <a:prstGeom prst="rect">
             <a:avLst/>
@@ -5048,38 +6079,109 @@
           </a:bodyPr>
           <a:lstStyle/>
           <a:p>
-            <a:r>
-              <a:rPr sz="1500" b="0">
+            <a:pPr algn="ctr"/>
+            <a:r>
+              <a:rPr sz="1600" b="1">
+                <a:solidFill>
+                  <a:srgbClr val="7C3AED"/>
+                </a:solidFill>
+                <a:latin typeface="Arial"/>
+              </a:rPr>
+              <a:t>PAIR</a:t>
+            </a:r>
+          </a:p>
+        </p:txBody>
+      </p:sp>
+      <p:sp>
+        <p:nvSpPr>
+          <p:cNvPr id="19" name="TextBox 18"/>
+          <p:cNvSpPr txBox="1"/>
+          <p:nvPr/>
+        </p:nvSpPr>
+        <p:spPr>
+          <a:xfrm>
+            <a:off x="4846320" y="3657600"/>
+            <a:ext cx="2514600" cy="960120"/>
+          </a:xfrm>
+          <a:prstGeom prst="rect">
+            <a:avLst/>
+          </a:prstGeom>
+          <a:noFill/>
+        </p:spPr>
+        <p:txBody>
+          <a:bodyPr wrap="square" lIns="0" rIns="0" tIns="0" bIns="0">
+            <a:spAutoFit/>
+          </a:bodyPr>
+          <a:lstStyle/>
+          <a:p>
+            <a:pPr algn="ctr"/>
+            <a:r>
+              <a:rPr sz="1800" b="1">
                 <a:solidFill>
                   <a:srgbClr val="111827"/>
                 </a:solidFill>
                 <a:latin typeface="Arial"/>
               </a:rPr>
-              <a:t>Share: connect your answer to Looking Back at Term 1.</a:t>
-            </a:r>
-          </a:p>
-        </p:txBody>
-      </p:sp>
-      <p:sp>
-        <p:nvSpPr>
-          <p:cNvPr id="16" name="Rectangle 15"/>
-          <p:cNvSpPr/>
-          <p:nvPr/>
-        </p:nvSpPr>
-        <p:spPr>
-          <a:xfrm>
-            <a:off x="868680" y="4672584"/>
-            <a:ext cx="10378440" cy="713232"/>
-          </a:xfrm>
-          <a:prstGeom prst="rect">
+              <a:t>compare your first answer with a partner.</a:t>
+            </a:r>
+          </a:p>
+        </p:txBody>
+      </p:sp>
+      <p:sp>
+        <p:nvSpPr>
+          <p:cNvPr id="20" name="TextBox 19"/>
+          <p:cNvSpPr txBox="1"/>
+          <p:nvPr/>
+        </p:nvSpPr>
+        <p:spPr>
+          <a:xfrm>
+            <a:off x="4846320" y="5166360"/>
+            <a:ext cx="2514600" cy="274320"/>
+          </a:xfrm>
+          <a:prstGeom prst="rect">
+            <a:avLst/>
+          </a:prstGeom>
+          <a:noFill/>
+        </p:spPr>
+        <p:txBody>
+          <a:bodyPr wrap="square" lIns="0" rIns="0" tIns="0" bIns="0">
+            <a:spAutoFit/>
+          </a:bodyPr>
+          <a:lstStyle/>
+          <a:p>
+            <a:pPr algn="ctr"/>
+            <a:r>
+              <a:rPr sz="1100" b="0">
+                <a:solidFill>
+                  <a:srgbClr val="475569"/>
+                </a:solidFill>
+                <a:latin typeface="Arial"/>
+              </a:rPr>
+              <a:t>with partner</a:t>
+            </a:r>
+          </a:p>
+        </p:txBody>
+      </p:sp>
+      <p:sp>
+        <p:nvSpPr>
+          <p:cNvPr id="21" name="Rounded Rectangle 20"/>
+          <p:cNvSpPr/>
+          <p:nvPr/>
+        </p:nvSpPr>
+        <p:spPr>
+          <a:xfrm>
+            <a:off x="8229600" y="1874519"/>
+            <a:ext cx="3154680" cy="3977639"/>
+          </a:xfrm>
+          <a:prstGeom prst="roundRect">
             <a:avLst/>
           </a:prstGeom>
           <a:solidFill>
             <a:srgbClr val="FFFFFF"/>
           </a:solidFill>
-          <a:ln w="11430">
+          <a:ln w="16510">
             <a:solidFill>
-              <a:srgbClr val="CBD5E1"/>
+              <a:srgbClr val="7C3AED"/>
             </a:solidFill>
           </a:ln>
         </p:spPr>
@@ -5107,16 +6209,16 @@
       </p:sp>
       <p:sp>
         <p:nvSpPr>
-          <p:cNvPr id="17" name="Rectangle 16"/>
-          <p:cNvSpPr/>
-          <p:nvPr/>
-        </p:nvSpPr>
-        <p:spPr>
-          <a:xfrm>
-            <a:off x="868680" y="4672584"/>
-            <a:ext cx="530352" cy="713232"/>
-          </a:xfrm>
-          <a:prstGeom prst="rect">
+          <p:cNvPr id="22" name="Oval 21"/>
+          <p:cNvSpPr/>
+          <p:nvPr/>
+        </p:nvSpPr>
+        <p:spPr>
+          <a:xfrm>
+            <a:off x="9436608" y="2148840"/>
+            <a:ext cx="713232" cy="713232"/>
+          </a:xfrm>
+          <a:prstGeom prst="ellipse">
             <a:avLst/>
           </a:prstGeom>
           <a:solidFill>
@@ -5159,14 +6261,14 @@
       </p:sp>
       <p:sp>
         <p:nvSpPr>
-          <p:cNvPr id="18" name="TextBox 17"/>
+          <p:cNvPr id="23" name="TextBox 22"/>
           <p:cNvSpPr txBox="1"/>
           <p:nvPr/>
         </p:nvSpPr>
         <p:spPr>
           <a:xfrm>
-            <a:off x="1572768" y="4818888"/>
-            <a:ext cx="9372600" cy="384048"/>
+            <a:off x="8549640" y="2999232"/>
+            <a:ext cx="2514600" cy="310896"/>
           </a:xfrm>
           <a:prstGeom prst="rect">
             <a:avLst/>
@@ -5179,159 +6281,99 @@
           </a:bodyPr>
           <a:lstStyle/>
           <a:p>
-            <a:r>
-              <a:rPr sz="1500" b="0">
+            <a:pPr algn="ctr"/>
+            <a:r>
+              <a:rPr sz="1600" b="1">
+                <a:solidFill>
+                  <a:srgbClr val="7C3AED"/>
+                </a:solidFill>
+                <a:latin typeface="Arial"/>
+              </a:rPr>
+              <a:t>SHARE</a:t>
+            </a:r>
+          </a:p>
+        </p:txBody>
+      </p:sp>
+      <p:sp>
+        <p:nvSpPr>
+          <p:cNvPr id="24" name="TextBox 23"/>
+          <p:cNvSpPr txBox="1"/>
+          <p:nvPr/>
+        </p:nvSpPr>
+        <p:spPr>
+          <a:xfrm>
+            <a:off x="8549640" y="3657600"/>
+            <a:ext cx="2514600" cy="960120"/>
+          </a:xfrm>
+          <a:prstGeom prst="rect">
+            <a:avLst/>
+          </a:prstGeom>
+          <a:noFill/>
+        </p:spPr>
+        <p:txBody>
+          <a:bodyPr wrap="square" lIns="0" rIns="0" tIns="0" bIns="0">
+            <a:spAutoFit/>
+          </a:bodyPr>
+          <a:lstStyle/>
+          <a:p>
+            <a:pPr algn="ctr"/>
+            <a:r>
+              <a:rPr sz="1800" b="1">
                 <a:solidFill>
                   <a:srgbClr val="111827"/>
                 </a:solidFill>
                 <a:latin typeface="Arial"/>
               </a:rPr>
-              <a:t>Write one clear response.</a:t>
-            </a:r>
-          </a:p>
-        </p:txBody>
-      </p:sp>
-      <p:sp>
-        <p:nvSpPr>
-          <p:cNvPr id="19" name="Rectangle 18"/>
-          <p:cNvSpPr/>
-          <p:nvPr/>
-        </p:nvSpPr>
-        <p:spPr>
-          <a:xfrm>
-            <a:off x="868680" y="5522976"/>
-            <a:ext cx="10378440" cy="713232"/>
-          </a:xfrm>
-          <a:prstGeom prst="rect">
-            <a:avLst/>
-          </a:prstGeom>
-          <a:solidFill>
-            <a:srgbClr val="FFFFFF"/>
-          </a:solidFill>
-          <a:ln w="11430">
-            <a:solidFill>
-              <a:srgbClr val="CBD5E1"/>
-            </a:solidFill>
-          </a:ln>
-        </p:spPr>
-        <p:style>
-          <a:lnRef idx="1">
-            <a:schemeClr val="accent1"/>
-          </a:lnRef>
-          <a:fillRef idx="3">
-            <a:schemeClr val="accent1"/>
-          </a:fillRef>
-          <a:effectRef idx="2">
-            <a:schemeClr val="accent1"/>
-          </a:effectRef>
-          <a:fontRef idx="minor">
-            <a:schemeClr val="lt1"/>
-          </a:fontRef>
-        </p:style>
-        <p:txBody>
-          <a:bodyPr rtlCol="0" anchor="ctr"/>
-          <a:lstStyle/>
-          <a:p>
-            <a:pPr algn="ctr"/>
-          </a:p>
-        </p:txBody>
-      </p:sp>
-      <p:sp>
-        <p:nvSpPr>
-          <p:cNvPr id="20" name="Rectangle 19"/>
-          <p:cNvSpPr/>
-          <p:nvPr/>
-        </p:nvSpPr>
-        <p:spPr>
-          <a:xfrm>
-            <a:off x="868680" y="5522976"/>
-            <a:ext cx="530352" cy="713232"/>
-          </a:xfrm>
-          <a:prstGeom prst="rect">
-            <a:avLst/>
-          </a:prstGeom>
-          <a:solidFill>
-            <a:srgbClr val="7C3AED"/>
-          </a:solidFill>
-          <a:ln>
-            <a:noFill/>
-          </a:ln>
-        </p:spPr>
-        <p:style>
-          <a:lnRef idx="1">
-            <a:schemeClr val="accent1"/>
-          </a:lnRef>
-          <a:fillRef idx="3">
-            <a:schemeClr val="accent1"/>
-          </a:fillRef>
-          <a:effectRef idx="2">
-            <a:schemeClr val="accent1"/>
-          </a:effectRef>
-          <a:fontRef idx="minor">
-            <a:schemeClr val="lt1"/>
-          </a:fontRef>
-        </p:style>
-        <p:txBody>
-          <a:bodyPr rtlCol="0" anchor="ctr" wrap="square" lIns="101600" rIns="101600" tIns="38100" bIns="38100"/>
-          <a:lstStyle/>
-          <a:p>
-            <a:pPr algn="ctr"/>
-            <a:r>
-              <a:rPr sz="1500" b="1">
+              <a:t>connect your answer to Looking Back at Term 1.</a:t>
+            </a:r>
+          </a:p>
+        </p:txBody>
+      </p:sp>
+      <p:sp>
+        <p:nvSpPr>
+          <p:cNvPr id="25" name="TextBox 24"/>
+          <p:cNvSpPr txBox="1"/>
+          <p:nvPr/>
+        </p:nvSpPr>
+        <p:spPr>
+          <a:xfrm>
+            <a:off x="8549640" y="5166360"/>
+            <a:ext cx="2514600" cy="274320"/>
+          </a:xfrm>
+          <a:prstGeom prst="rect">
+            <a:avLst/>
+          </a:prstGeom>
+          <a:noFill/>
+        </p:spPr>
+        <p:txBody>
+          <a:bodyPr wrap="square" lIns="0" rIns="0" tIns="0" bIns="0">
+            <a:spAutoFit/>
+          </a:bodyPr>
+          <a:lstStyle/>
+          <a:p>
+            <a:pPr algn="ctr"/>
+            <a:r>
+              <a:rPr sz="1100" b="0">
                 <a:solidFill>
-                  <a:srgbClr val="FFFFFF"/>
+                  <a:srgbClr val="475569"/>
                 </a:solidFill>
                 <a:latin typeface="Arial"/>
               </a:rPr>
-              <a:t>4</a:t>
-            </a:r>
-          </a:p>
-        </p:txBody>
-      </p:sp>
-      <p:sp>
-        <p:nvSpPr>
-          <p:cNvPr id="21" name="TextBox 20"/>
+              <a:t>whole class</a:t>
+            </a:r>
+          </a:p>
+        </p:txBody>
+      </p:sp>
+      <p:sp>
+        <p:nvSpPr>
+          <p:cNvPr id="26" name="TextBox 25"/>
           <p:cNvSpPr txBox="1"/>
           <p:nvPr/>
         </p:nvSpPr>
         <p:spPr>
           <a:xfrm>
-            <a:off x="1572768" y="5669280"/>
-            <a:ext cx="9372600" cy="384048"/>
-          </a:xfrm>
-          <a:prstGeom prst="rect">
-            <a:avLst/>
-          </a:prstGeom>
-          <a:noFill/>
-        </p:spPr>
-        <p:txBody>
-          <a:bodyPr wrap="square" lIns="0" rIns="0" tIns="0" bIns="0">
-            <a:spAutoFit/>
-          </a:bodyPr>
-          <a:lstStyle/>
-          <a:p>
-            <a:r>
-              <a:rPr sz="1500" b="0">
-                <a:solidFill>
-                  <a:srgbClr val="111827"/>
-                </a:solidFill>
-                <a:latin typeface="Arial"/>
-              </a:rPr>
-              <a:t>Write one clear response.</a:t>
-            </a:r>
-          </a:p>
-        </p:txBody>
-      </p:sp>
-      <p:sp>
-        <p:nvSpPr>
-          <p:cNvPr id="22" name="TextBox 21"/>
-          <p:cNvSpPr txBox="1"/>
-          <p:nvPr/>
-        </p:nvSpPr>
-        <p:spPr>
-          <a:xfrm>
-            <a:off x="685800" y="6419088"/>
-            <a:ext cx="10835640" cy="228600"/>
+            <a:off x="713232" y="6355080"/>
+            <a:ext cx="10835640" cy="219456"/>
           </a:xfrm>
           <a:prstGeom prst="rect">
             <a:avLst/>
@@ -5352,7 +6394,7 @@
                 </a:solidFill>
                 <a:latin typeface="Arial"/>
               </a:rPr>
-              <a:t>Listen • Talk • Try • Explain</a:t>
+              <a:t>P7 class flow: listen • talk • try • explain</a:t>
             </a:r>
           </a:p>
         </p:txBody>
@@ -5557,7 +6599,93 @@
       </p:sp>
       <p:sp>
         <p:nvSpPr>
-          <p:cNvPr id="6" name="TextBox 5"/>
+          <p:cNvPr id="6" name="Rectangle 5"/>
+          <p:cNvSpPr/>
+          <p:nvPr/>
+        </p:nvSpPr>
+        <p:spPr>
+          <a:xfrm>
+            <a:off x="164592" y="6565392"/>
+            <a:ext cx="12027103" cy="73152"/>
+          </a:xfrm>
+          <a:prstGeom prst="rect">
+            <a:avLst/>
+          </a:prstGeom>
+          <a:solidFill>
+            <a:srgbClr val="FCD116"/>
+          </a:solidFill>
+          <a:ln>
+            <a:noFill/>
+          </a:ln>
+        </p:spPr>
+        <p:style>
+          <a:lnRef idx="1">
+            <a:schemeClr val="accent1"/>
+          </a:lnRef>
+          <a:fillRef idx="3">
+            <a:schemeClr val="accent1"/>
+          </a:fillRef>
+          <a:effectRef idx="2">
+            <a:schemeClr val="accent1"/>
+          </a:effectRef>
+          <a:fontRef idx="minor">
+            <a:schemeClr val="lt1"/>
+          </a:fontRef>
+        </p:style>
+        <p:txBody>
+          <a:bodyPr rtlCol="0" anchor="ctr"/>
+          <a:lstStyle/>
+          <a:p>
+            <a:pPr algn="ctr"/>
+          </a:p>
+        </p:txBody>
+      </p:sp>
+      <p:sp>
+        <p:nvSpPr>
+          <p:cNvPr id="7" name="Rectangle 6"/>
+          <p:cNvSpPr/>
+          <p:nvPr/>
+        </p:nvSpPr>
+        <p:spPr>
+          <a:xfrm>
+            <a:off x="164592" y="6638544"/>
+            <a:ext cx="12027103" cy="45720"/>
+          </a:xfrm>
+          <a:prstGeom prst="rect">
+            <a:avLst/>
+          </a:prstGeom>
+          <a:solidFill>
+            <a:srgbClr val="D90000"/>
+          </a:solidFill>
+          <a:ln>
+            <a:noFill/>
+          </a:ln>
+        </p:spPr>
+        <p:style>
+          <a:lnRef idx="1">
+            <a:schemeClr val="accent1"/>
+          </a:lnRef>
+          <a:fillRef idx="3">
+            <a:schemeClr val="accent1"/>
+          </a:fillRef>
+          <a:effectRef idx="2">
+            <a:schemeClr val="accent1"/>
+          </a:effectRef>
+          <a:fontRef idx="minor">
+            <a:schemeClr val="lt1"/>
+          </a:fontRef>
+        </p:style>
+        <p:txBody>
+          <a:bodyPr rtlCol="0" anchor="ctr"/>
+          <a:lstStyle/>
+          <a:p>
+            <a:pPr algn="ctr"/>
+          </a:p>
+        </p:txBody>
+      </p:sp>
+      <p:sp>
+        <p:nvSpPr>
+          <p:cNvPr id="8" name="TextBox 7"/>
           <p:cNvSpPr txBox="1"/>
           <p:nvPr/>
         </p:nvSpPr>
@@ -5591,7 +6719,7 @@
       </p:sp>
       <p:sp>
         <p:nvSpPr>
-          <p:cNvPr id="7" name="TextBox 6"/>
+          <p:cNvPr id="9" name="TextBox 8"/>
           <p:cNvSpPr txBox="1"/>
           <p:nvPr/>
         </p:nvSpPr>
@@ -5626,14 +6754,14 @@
       </p:sp>
       <p:sp>
         <p:nvSpPr>
-          <p:cNvPr id="8" name="TextBox 7"/>
+          <p:cNvPr id="10" name="TextBox 9"/>
           <p:cNvSpPr txBox="1"/>
           <p:nvPr/>
         </p:nvSpPr>
         <p:spPr>
           <a:xfrm>
-            <a:off x="594360" y="1042415"/>
-            <a:ext cx="11109960" cy="566928"/>
+            <a:off x="594360" y="1005840"/>
+            <a:ext cx="11064240" cy="512064"/>
           </a:xfrm>
           <a:prstGeom prst="rect">
             <a:avLst/>
@@ -5660,22 +6788,22 @@
       </p:sp>
       <p:sp>
         <p:nvSpPr>
-          <p:cNvPr id="9" name="Rectangle 8"/>
-          <p:cNvSpPr/>
-          <p:nvPr/>
-        </p:nvSpPr>
-        <p:spPr>
-          <a:xfrm>
-            <a:off x="685800" y="1874519"/>
-            <a:ext cx="10835640" cy="804672"/>
-          </a:xfrm>
-          <a:prstGeom prst="rect">
+          <p:cNvPr id="11" name="Rounded Rectangle 10"/>
+          <p:cNvSpPr/>
+          <p:nvPr/>
+        </p:nvSpPr>
+        <p:spPr>
+          <a:xfrm>
+            <a:off x="777240" y="1828800"/>
+            <a:ext cx="3337560" cy="4160520"/>
+          </a:xfrm>
+          <a:prstGeom prst="roundRect">
             <a:avLst/>
           </a:prstGeom>
           <a:solidFill>
             <a:srgbClr val="FFF7E0"/>
           </a:solidFill>
-          <a:ln w="17780">
+          <a:ln w="19050">
             <a:solidFill>
               <a:srgbClr val="087490"/>
             </a:solidFill>
@@ -5696,34 +6824,392 @@
           </a:fontRef>
         </p:style>
         <p:txBody>
-          <a:bodyPr rtlCol="0" anchor="ctr" wrap="square" lIns="101600" rIns="101600" tIns="38100" bIns="38100"/>
-          <a:lstStyle/>
-          <a:p>
-            <a:pPr algn="ctr"/>
-            <a:r>
-              <a:rPr sz="1900" b="1">
+          <a:bodyPr rtlCol="0" anchor="ctr"/>
+          <a:lstStyle/>
+          <a:p>
+            <a:pPr algn="ctr"/>
+          </a:p>
+        </p:txBody>
+      </p:sp>
+      <p:sp>
+        <p:nvSpPr>
+          <p:cNvPr id="12" name="Rectangle 11"/>
+          <p:cNvSpPr/>
+          <p:nvPr/>
+        </p:nvSpPr>
+        <p:spPr>
+          <a:xfrm>
+            <a:off x="1528876" y="2754630"/>
+            <a:ext cx="809244" cy="946404"/>
+          </a:xfrm>
+          <a:prstGeom prst="rect">
+            <a:avLst/>
+          </a:prstGeom>
+          <a:solidFill>
+            <a:srgbClr val="FFFFFF"/>
+          </a:solidFill>
+          <a:ln w="10160">
+            <a:solidFill>
+              <a:srgbClr val="1D4ED8"/>
+            </a:solidFill>
+          </a:ln>
+        </p:spPr>
+        <p:style>
+          <a:lnRef idx="1">
+            <a:schemeClr val="accent1"/>
+          </a:lnRef>
+          <a:fillRef idx="3">
+            <a:schemeClr val="accent1"/>
+          </a:fillRef>
+          <a:effectRef idx="2">
+            <a:schemeClr val="accent1"/>
+          </a:effectRef>
+          <a:fontRef idx="minor">
+            <a:schemeClr val="lt1"/>
+          </a:fontRef>
+        </p:style>
+        <p:txBody>
+          <a:bodyPr rtlCol="0" anchor="ctr"/>
+          <a:lstStyle/>
+          <a:p>
+            <a:pPr algn="ctr"/>
+          </a:p>
+        </p:txBody>
+      </p:sp>
+      <p:sp>
+        <p:nvSpPr>
+          <p:cNvPr id="13" name="Rectangle 12"/>
+          <p:cNvSpPr/>
+          <p:nvPr/>
+        </p:nvSpPr>
+        <p:spPr>
+          <a:xfrm>
+            <a:off x="2338120" y="2754630"/>
+            <a:ext cx="809244" cy="946404"/>
+          </a:xfrm>
+          <a:prstGeom prst="rect">
+            <a:avLst/>
+          </a:prstGeom>
+          <a:solidFill>
+            <a:srgbClr val="FFFFFF"/>
+          </a:solidFill>
+          <a:ln w="10160">
+            <a:solidFill>
+              <a:srgbClr val="1D4ED8"/>
+            </a:solidFill>
+          </a:ln>
+        </p:spPr>
+        <p:style>
+          <a:lnRef idx="1">
+            <a:schemeClr val="accent1"/>
+          </a:lnRef>
+          <a:fillRef idx="3">
+            <a:schemeClr val="accent1"/>
+          </a:fillRef>
+          <a:effectRef idx="2">
+            <a:schemeClr val="accent1"/>
+          </a:effectRef>
+          <a:fontRef idx="minor">
+            <a:schemeClr val="lt1"/>
+          </a:fontRef>
+        </p:style>
+        <p:txBody>
+          <a:bodyPr rtlCol="0" anchor="ctr"/>
+          <a:lstStyle/>
+          <a:p>
+            <a:pPr algn="ctr"/>
+          </a:p>
+        </p:txBody>
+      </p:sp>
+      <p:sp>
+        <p:nvSpPr>
+          <p:cNvPr id="14" name="Rectangle 13"/>
+          <p:cNvSpPr/>
+          <p:nvPr/>
+        </p:nvSpPr>
+        <p:spPr>
+          <a:xfrm>
+            <a:off x="1852574" y="2651760"/>
+            <a:ext cx="998067" cy="123444"/>
+          </a:xfrm>
+          <a:prstGeom prst="rect">
+            <a:avLst/>
+          </a:prstGeom>
+          <a:solidFill>
+            <a:srgbClr val="D90000"/>
+          </a:solidFill>
+          <a:ln>
+            <a:noFill/>
+          </a:ln>
+        </p:spPr>
+        <p:style>
+          <a:lnRef idx="1">
+            <a:schemeClr val="accent1"/>
+          </a:lnRef>
+          <a:fillRef idx="3">
+            <a:schemeClr val="accent1"/>
+          </a:fillRef>
+          <a:effectRef idx="2">
+            <a:schemeClr val="accent1"/>
+          </a:effectRef>
+          <a:fontRef idx="minor">
+            <a:schemeClr val="lt1"/>
+          </a:fontRef>
+        </p:style>
+        <p:txBody>
+          <a:bodyPr rtlCol="0" anchor="ctr"/>
+          <a:lstStyle/>
+          <a:p>
+            <a:pPr algn="ctr"/>
+          </a:p>
+        </p:txBody>
+      </p:sp>
+      <p:sp>
+        <p:nvSpPr>
+          <p:cNvPr id="15" name="Rectangle 14"/>
+          <p:cNvSpPr/>
+          <p:nvPr/>
+        </p:nvSpPr>
+        <p:spPr>
+          <a:xfrm>
+            <a:off x="1690725" y="3022092"/>
+            <a:ext cx="1294790" cy="51435"/>
+          </a:xfrm>
+          <a:prstGeom prst="rect">
+            <a:avLst/>
+          </a:prstGeom>
+          <a:solidFill>
+            <a:srgbClr val="CBD5E1"/>
+          </a:solidFill>
+          <a:ln>
+            <a:noFill/>
+          </a:ln>
+        </p:spPr>
+        <p:style>
+          <a:lnRef idx="1">
+            <a:schemeClr val="accent1"/>
+          </a:lnRef>
+          <a:fillRef idx="3">
+            <a:schemeClr val="accent1"/>
+          </a:fillRef>
+          <a:effectRef idx="2">
+            <a:schemeClr val="accent1"/>
+          </a:effectRef>
+          <a:fontRef idx="minor">
+            <a:schemeClr val="lt1"/>
+          </a:fontRef>
+        </p:style>
+        <p:txBody>
+          <a:bodyPr rtlCol="0" anchor="ctr"/>
+          <a:lstStyle/>
+          <a:p>
+            <a:pPr algn="ctr"/>
+          </a:p>
+        </p:txBody>
+      </p:sp>
+      <p:sp>
+        <p:nvSpPr>
+          <p:cNvPr id="16" name="Rectangle 15"/>
+          <p:cNvSpPr/>
+          <p:nvPr/>
+        </p:nvSpPr>
+        <p:spPr>
+          <a:xfrm>
+            <a:off x="1690725" y="3268980"/>
+            <a:ext cx="1294790" cy="51435"/>
+          </a:xfrm>
+          <a:prstGeom prst="rect">
+            <a:avLst/>
+          </a:prstGeom>
+          <a:solidFill>
+            <a:srgbClr val="CBD5E1"/>
+          </a:solidFill>
+          <a:ln>
+            <a:noFill/>
+          </a:ln>
+        </p:spPr>
+        <p:style>
+          <a:lnRef idx="1">
+            <a:schemeClr val="accent1"/>
+          </a:lnRef>
+          <a:fillRef idx="3">
+            <a:schemeClr val="accent1"/>
+          </a:fillRef>
+          <a:effectRef idx="2">
+            <a:schemeClr val="accent1"/>
+          </a:effectRef>
+          <a:fontRef idx="minor">
+            <a:schemeClr val="lt1"/>
+          </a:fontRef>
+        </p:style>
+        <p:txBody>
+          <a:bodyPr rtlCol="0" anchor="ctr"/>
+          <a:lstStyle/>
+          <a:p>
+            <a:pPr algn="ctr"/>
+          </a:p>
+        </p:txBody>
+      </p:sp>
+      <p:sp>
+        <p:nvSpPr>
+          <p:cNvPr id="17" name="Rectangle 16"/>
+          <p:cNvSpPr/>
+          <p:nvPr/>
+        </p:nvSpPr>
+        <p:spPr>
+          <a:xfrm>
+            <a:off x="1690725" y="3515868"/>
+            <a:ext cx="1294790" cy="51435"/>
+          </a:xfrm>
+          <a:prstGeom prst="rect">
+            <a:avLst/>
+          </a:prstGeom>
+          <a:solidFill>
+            <a:srgbClr val="CBD5E1"/>
+          </a:solidFill>
+          <a:ln>
+            <a:noFill/>
+          </a:ln>
+        </p:spPr>
+        <p:style>
+          <a:lnRef idx="1">
+            <a:schemeClr val="accent1"/>
+          </a:lnRef>
+          <a:fillRef idx="3">
+            <a:schemeClr val="accent1"/>
+          </a:fillRef>
+          <a:effectRef idx="2">
+            <a:schemeClr val="accent1"/>
+          </a:effectRef>
+          <a:fontRef idx="minor">
+            <a:schemeClr val="lt1"/>
+          </a:fontRef>
+        </p:style>
+        <p:txBody>
+          <a:bodyPr rtlCol="0" anchor="ctr"/>
+          <a:lstStyle/>
+          <a:p>
+            <a:pPr algn="ctr"/>
+          </a:p>
+        </p:txBody>
+      </p:sp>
+      <p:sp>
+        <p:nvSpPr>
+          <p:cNvPr id="18" name="TextBox 17"/>
+          <p:cNvSpPr txBox="1"/>
+          <p:nvPr/>
+        </p:nvSpPr>
+        <p:spPr>
+          <a:xfrm>
+            <a:off x="1097280" y="4041648"/>
+            <a:ext cx="2697480" cy="228600"/>
+          </a:xfrm>
+          <a:prstGeom prst="rect">
+            <a:avLst/>
+          </a:prstGeom>
+          <a:noFill/>
+        </p:spPr>
+        <p:txBody>
+          <a:bodyPr wrap="square" lIns="0" rIns="0" tIns="0" bIns="0">
+            <a:spAutoFit/>
+          </a:bodyPr>
+          <a:lstStyle/>
+          <a:p>
+            <a:pPr algn="ctr"/>
+            <a:r>
+              <a:rPr sz="1000" b="0">
+                <a:solidFill>
+                  <a:srgbClr val="475569"/>
+                </a:solidFill>
+                <a:latin typeface="Arial"/>
+              </a:rPr>
+              <a:t>English</a:t>
+            </a:r>
+          </a:p>
+        </p:txBody>
+      </p:sp>
+      <p:sp>
+        <p:nvSpPr>
+          <p:cNvPr id="19" name="TextBox 18"/>
+          <p:cNvSpPr txBox="1"/>
+          <p:nvPr/>
+        </p:nvSpPr>
+        <p:spPr>
+          <a:xfrm>
+            <a:off x="987552" y="4617720"/>
+            <a:ext cx="2907792" cy="256032"/>
+          </a:xfrm>
+          <a:prstGeom prst="rect">
+            <a:avLst/>
+          </a:prstGeom>
+          <a:noFill/>
+        </p:spPr>
+        <p:txBody>
+          <a:bodyPr wrap="square" lIns="0" rIns="0" tIns="0" bIns="0">
+            <a:spAutoFit/>
+          </a:bodyPr>
+          <a:lstStyle/>
+          <a:p>
+            <a:pPr algn="ctr"/>
+            <a:r>
+              <a:rPr sz="1200" b="1">
+                <a:solidFill>
+                  <a:srgbClr val="087490"/>
+                </a:solidFill>
+                <a:latin typeface="Arial"/>
+              </a:rPr>
+              <a:t>KEY IDEA</a:t>
+            </a:r>
+          </a:p>
+        </p:txBody>
+      </p:sp>
+      <p:sp>
+        <p:nvSpPr>
+          <p:cNvPr id="20" name="TextBox 19"/>
+          <p:cNvSpPr txBox="1"/>
+          <p:nvPr/>
+        </p:nvSpPr>
+        <p:spPr>
+          <a:xfrm>
+            <a:off x="960120" y="4919472"/>
+            <a:ext cx="2971800" cy="685800"/>
+          </a:xfrm>
+          <a:prstGeom prst="rect">
+            <a:avLst/>
+          </a:prstGeom>
+          <a:noFill/>
+        </p:spPr>
+        <p:txBody>
+          <a:bodyPr wrap="square" lIns="0" rIns="0" tIns="0" bIns="0">
+            <a:spAutoFit/>
+          </a:bodyPr>
+          <a:lstStyle/>
+          <a:p>
+            <a:pPr algn="ctr"/>
+            <a:r>
+              <a:rPr sz="1500" b="1">
                 <a:solidFill>
                   <a:srgbClr val="111827"/>
                 </a:solidFill>
                 <a:latin typeface="Arial"/>
               </a:rPr>
-              <a:t>Key idea: Oral reflection on the three main topics of Term 1: Sch...</a:t>
-            </a:r>
-          </a:p>
-        </p:txBody>
-      </p:sp>
-      <p:sp>
-        <p:nvSpPr>
-          <p:cNvPr id="10" name="Rectangle 9"/>
-          <p:cNvSpPr/>
-          <p:nvPr/>
-        </p:nvSpPr>
-        <p:spPr>
-          <a:xfrm>
-            <a:off x="868680" y="2971800"/>
-            <a:ext cx="10378440" cy="713232"/>
-          </a:xfrm>
-          <a:prstGeom prst="rect">
+              <a:t>Key idea: Oral reflection on the three main topics of Term 1: School Holidays</a:t>
+            </a:r>
+          </a:p>
+        </p:txBody>
+      </p:sp>
+      <p:sp>
+        <p:nvSpPr>
+          <p:cNvPr id="21" name="Rounded Rectangle 20"/>
+          <p:cNvSpPr/>
+          <p:nvPr/>
+        </p:nvSpPr>
+        <p:spPr>
+          <a:xfrm>
+            <a:off x="4572000" y="1874519"/>
+            <a:ext cx="6812280" cy="932688"/>
+          </a:xfrm>
+          <a:prstGeom prst="roundRect">
             <a:avLst/>
           </a:prstGeom>
           <a:solidFill>
@@ -5759,14 +7245,14 @@
       </p:sp>
       <p:sp>
         <p:nvSpPr>
-          <p:cNvPr id="11" name="Rectangle 10"/>
-          <p:cNvSpPr/>
-          <p:nvPr/>
-        </p:nvSpPr>
-        <p:spPr>
-          <a:xfrm>
-            <a:off x="868680" y="2971800"/>
-            <a:ext cx="530352" cy="713232"/>
+          <p:cNvPr id="22" name="Rectangle 21"/>
+          <p:cNvSpPr/>
+          <p:nvPr/>
+        </p:nvSpPr>
+        <p:spPr>
+          <a:xfrm>
+            <a:off x="4572000" y="1874519"/>
+            <a:ext cx="566928" cy="932688"/>
           </a:xfrm>
           <a:prstGeom prst="rect">
             <a:avLst/>
@@ -5793,12 +7279,38 @@
           </a:fontRef>
         </p:style>
         <p:txBody>
-          <a:bodyPr rtlCol="0" anchor="ctr" wrap="square" lIns="101600" rIns="101600" tIns="38100" bIns="38100"/>
-          <a:lstStyle/>
-          <a:p>
-            <a:pPr algn="ctr"/>
-            <a:r>
-              <a:rPr sz="1500" b="1">
+          <a:bodyPr rtlCol="0" anchor="ctr"/>
+          <a:lstStyle/>
+          <a:p>
+            <a:pPr algn="ctr"/>
+          </a:p>
+        </p:txBody>
+      </p:sp>
+      <p:sp>
+        <p:nvSpPr>
+          <p:cNvPr id="23" name="TextBox 22"/>
+          <p:cNvSpPr txBox="1"/>
+          <p:nvPr/>
+        </p:nvSpPr>
+        <p:spPr>
+          <a:xfrm>
+            <a:off x="4572000" y="2221991"/>
+            <a:ext cx="566928" cy="237744"/>
+          </a:xfrm>
+          <a:prstGeom prst="rect">
+            <a:avLst/>
+          </a:prstGeom>
+          <a:noFill/>
+        </p:spPr>
+        <p:txBody>
+          <a:bodyPr wrap="square" lIns="0" rIns="0" tIns="0" bIns="0">
+            <a:spAutoFit/>
+          </a:bodyPr>
+          <a:lstStyle/>
+          <a:p>
+            <a:pPr algn="ctr"/>
+            <a:r>
+              <a:rPr sz="1400" b="1">
                 <a:solidFill>
                   <a:srgbClr val="FFFFFF"/>
                 </a:solidFill>
@@ -5811,14 +7323,14 @@
       </p:sp>
       <p:sp>
         <p:nvSpPr>
-          <p:cNvPr id="12" name="TextBox 11"/>
+          <p:cNvPr id="24" name="TextBox 23"/>
           <p:cNvSpPr txBox="1"/>
           <p:nvPr/>
         </p:nvSpPr>
         <p:spPr>
           <a:xfrm>
-            <a:off x="1572768" y="3118104"/>
-            <a:ext cx="9372600" cy="384048"/>
+            <a:off x="5358384" y="2039112"/>
+            <a:ext cx="5788152" cy="694944"/>
           </a:xfrm>
           <a:prstGeom prst="rect">
             <a:avLst/>
@@ -5832,7 +7344,7 @@
           <a:lstStyle/>
           <a:p>
             <a:r>
-              <a:rPr sz="1500" b="0">
+              <a:rPr sz="1600" b="1">
                 <a:solidFill>
                   <a:srgbClr val="111827"/>
                 </a:solidFill>
@@ -5845,16 +7357,16 @@
       </p:sp>
       <p:sp>
         <p:nvSpPr>
-          <p:cNvPr id="13" name="Rectangle 12"/>
-          <p:cNvSpPr/>
-          <p:nvPr/>
-        </p:nvSpPr>
-        <p:spPr>
-          <a:xfrm>
-            <a:off x="868680" y="3822191"/>
-            <a:ext cx="10378440" cy="713232"/>
-          </a:xfrm>
-          <a:prstGeom prst="rect">
+          <p:cNvPr id="25" name="Rounded Rectangle 24"/>
+          <p:cNvSpPr/>
+          <p:nvPr/>
+        </p:nvSpPr>
+        <p:spPr>
+          <a:xfrm>
+            <a:off x="4572000" y="3108960"/>
+            <a:ext cx="6812280" cy="932688"/>
+          </a:xfrm>
+          <a:prstGeom prst="roundRect">
             <a:avLst/>
           </a:prstGeom>
           <a:solidFill>
@@ -5890,14 +7402,14 @@
       </p:sp>
       <p:sp>
         <p:nvSpPr>
-          <p:cNvPr id="14" name="Rectangle 13"/>
-          <p:cNvSpPr/>
-          <p:nvPr/>
-        </p:nvSpPr>
-        <p:spPr>
-          <a:xfrm>
-            <a:off x="868680" y="3822191"/>
-            <a:ext cx="530352" cy="713232"/>
+          <p:cNvPr id="26" name="Rectangle 25"/>
+          <p:cNvSpPr/>
+          <p:nvPr/>
+        </p:nvSpPr>
+        <p:spPr>
+          <a:xfrm>
+            <a:off x="4572000" y="3108960"/>
+            <a:ext cx="566928" cy="932688"/>
           </a:xfrm>
           <a:prstGeom prst="rect">
             <a:avLst/>
@@ -5924,12 +7436,38 @@
           </a:fontRef>
         </p:style>
         <p:txBody>
-          <a:bodyPr rtlCol="0" anchor="ctr" wrap="square" lIns="101600" rIns="101600" tIns="38100" bIns="38100"/>
-          <a:lstStyle/>
-          <a:p>
-            <a:pPr algn="ctr"/>
-            <a:r>
-              <a:rPr sz="1500" b="1">
+          <a:bodyPr rtlCol="0" anchor="ctr"/>
+          <a:lstStyle/>
+          <a:p>
+            <a:pPr algn="ctr"/>
+          </a:p>
+        </p:txBody>
+      </p:sp>
+      <p:sp>
+        <p:nvSpPr>
+          <p:cNvPr id="27" name="TextBox 26"/>
+          <p:cNvSpPr txBox="1"/>
+          <p:nvPr/>
+        </p:nvSpPr>
+        <p:spPr>
+          <a:xfrm>
+            <a:off x="4572000" y="3456432"/>
+            <a:ext cx="566928" cy="237744"/>
+          </a:xfrm>
+          <a:prstGeom prst="rect">
+            <a:avLst/>
+          </a:prstGeom>
+          <a:noFill/>
+        </p:spPr>
+        <p:txBody>
+          <a:bodyPr wrap="square" lIns="0" rIns="0" tIns="0" bIns="0">
+            <a:spAutoFit/>
+          </a:bodyPr>
+          <a:lstStyle/>
+          <a:p>
+            <a:pPr algn="ctr"/>
+            <a:r>
+              <a:rPr sz="1400" b="1">
                 <a:solidFill>
                   <a:srgbClr val="FFFFFF"/>
                 </a:solidFill>
@@ -5942,14 +7480,14 @@
       </p:sp>
       <p:sp>
         <p:nvSpPr>
-          <p:cNvPr id="15" name="TextBox 14"/>
+          <p:cNvPr id="28" name="TextBox 27"/>
           <p:cNvSpPr txBox="1"/>
           <p:nvPr/>
         </p:nvSpPr>
         <p:spPr>
           <a:xfrm>
-            <a:off x="1572768" y="3968496"/>
-            <a:ext cx="9372600" cy="384048"/>
+            <a:off x="5358384" y="3273552"/>
+            <a:ext cx="5788152" cy="694944"/>
           </a:xfrm>
           <a:prstGeom prst="rect">
             <a:avLst/>
@@ -5963,7 +7501,7 @@
           <a:lstStyle/>
           <a:p>
             <a:r>
-              <a:rPr sz="1500" b="0">
+              <a:rPr sz="1600" b="1">
                 <a:solidFill>
                   <a:srgbClr val="111827"/>
                 </a:solidFill>
@@ -5976,16 +7514,16 @@
       </p:sp>
       <p:sp>
         <p:nvSpPr>
-          <p:cNvPr id="16" name="Rectangle 15"/>
-          <p:cNvSpPr/>
-          <p:nvPr/>
-        </p:nvSpPr>
-        <p:spPr>
-          <a:xfrm>
-            <a:off x="868680" y="4672584"/>
-            <a:ext cx="10378440" cy="713232"/>
-          </a:xfrm>
-          <a:prstGeom prst="rect">
+          <p:cNvPr id="29" name="Rounded Rectangle 28"/>
+          <p:cNvSpPr/>
+          <p:nvPr/>
+        </p:nvSpPr>
+        <p:spPr>
+          <a:xfrm>
+            <a:off x="4572000" y="4343400"/>
+            <a:ext cx="6812280" cy="932688"/>
+          </a:xfrm>
+          <a:prstGeom prst="roundRect">
             <a:avLst/>
           </a:prstGeom>
           <a:solidFill>
@@ -6021,14 +7559,14 @@
       </p:sp>
       <p:sp>
         <p:nvSpPr>
-          <p:cNvPr id="17" name="Rectangle 16"/>
-          <p:cNvSpPr/>
-          <p:nvPr/>
-        </p:nvSpPr>
-        <p:spPr>
-          <a:xfrm>
-            <a:off x="868680" y="4672584"/>
-            <a:ext cx="530352" cy="713232"/>
+          <p:cNvPr id="30" name="Rectangle 29"/>
+          <p:cNvSpPr/>
+          <p:nvPr/>
+        </p:nvSpPr>
+        <p:spPr>
+          <a:xfrm>
+            <a:off x="4572000" y="4343400"/>
+            <a:ext cx="566928" cy="932688"/>
           </a:xfrm>
           <a:prstGeom prst="rect">
             <a:avLst/>
@@ -6055,12 +7593,38 @@
           </a:fontRef>
         </p:style>
         <p:txBody>
-          <a:bodyPr rtlCol="0" anchor="ctr" wrap="square" lIns="101600" rIns="101600" tIns="38100" bIns="38100"/>
-          <a:lstStyle/>
-          <a:p>
-            <a:pPr algn="ctr"/>
-            <a:r>
-              <a:rPr sz="1500" b="1">
+          <a:bodyPr rtlCol="0" anchor="ctr"/>
+          <a:lstStyle/>
+          <a:p>
+            <a:pPr algn="ctr"/>
+          </a:p>
+        </p:txBody>
+      </p:sp>
+      <p:sp>
+        <p:nvSpPr>
+          <p:cNvPr id="31" name="TextBox 30"/>
+          <p:cNvSpPr txBox="1"/>
+          <p:nvPr/>
+        </p:nvSpPr>
+        <p:spPr>
+          <a:xfrm>
+            <a:off x="4572000" y="4690872"/>
+            <a:ext cx="566928" cy="237744"/>
+          </a:xfrm>
+          <a:prstGeom prst="rect">
+            <a:avLst/>
+          </a:prstGeom>
+          <a:noFill/>
+        </p:spPr>
+        <p:txBody>
+          <a:bodyPr wrap="square" lIns="0" rIns="0" tIns="0" bIns="0">
+            <a:spAutoFit/>
+          </a:bodyPr>
+          <a:lstStyle/>
+          <a:p>
+            <a:pPr algn="ctr"/>
+            <a:r>
+              <a:rPr sz="1400" b="1">
                 <a:solidFill>
                   <a:srgbClr val="FFFFFF"/>
                 </a:solidFill>
@@ -6073,14 +7637,14 @@
       </p:sp>
       <p:sp>
         <p:nvSpPr>
-          <p:cNvPr id="18" name="TextBox 17"/>
+          <p:cNvPr id="32" name="TextBox 31"/>
           <p:cNvSpPr txBox="1"/>
           <p:nvPr/>
         </p:nvSpPr>
         <p:spPr>
           <a:xfrm>
-            <a:off x="1572768" y="4818888"/>
-            <a:ext cx="9372600" cy="384048"/>
+            <a:off x="5358384" y="4507992"/>
+            <a:ext cx="5788152" cy="694944"/>
           </a:xfrm>
           <a:prstGeom prst="rect">
             <a:avLst/>
@@ -6094,7 +7658,7 @@
           <a:lstStyle/>
           <a:p>
             <a:r>
-              <a:rPr sz="1500" b="0">
+              <a:rPr sz="1600" b="1">
                 <a:solidFill>
                   <a:srgbClr val="111827"/>
                 </a:solidFill>
@@ -6107,145 +7671,14 @@
       </p:sp>
       <p:sp>
         <p:nvSpPr>
-          <p:cNvPr id="19" name="Rectangle 18"/>
-          <p:cNvSpPr/>
-          <p:nvPr/>
-        </p:nvSpPr>
-        <p:spPr>
-          <a:xfrm>
-            <a:off x="868680" y="5522976"/>
-            <a:ext cx="10378440" cy="713232"/>
-          </a:xfrm>
-          <a:prstGeom prst="rect">
-            <a:avLst/>
-          </a:prstGeom>
-          <a:solidFill>
-            <a:srgbClr val="FFFFFF"/>
-          </a:solidFill>
-          <a:ln w="11430">
-            <a:solidFill>
-              <a:srgbClr val="CBD5E1"/>
-            </a:solidFill>
-          </a:ln>
-        </p:spPr>
-        <p:style>
-          <a:lnRef idx="1">
-            <a:schemeClr val="accent1"/>
-          </a:lnRef>
-          <a:fillRef idx="3">
-            <a:schemeClr val="accent1"/>
-          </a:fillRef>
-          <a:effectRef idx="2">
-            <a:schemeClr val="accent1"/>
-          </a:effectRef>
-          <a:fontRef idx="minor">
-            <a:schemeClr val="lt1"/>
-          </a:fontRef>
-        </p:style>
-        <p:txBody>
-          <a:bodyPr rtlCol="0" anchor="ctr"/>
-          <a:lstStyle/>
-          <a:p>
-            <a:pPr algn="ctr"/>
-          </a:p>
-        </p:txBody>
-      </p:sp>
-      <p:sp>
-        <p:nvSpPr>
-          <p:cNvPr id="20" name="Rectangle 19"/>
-          <p:cNvSpPr/>
-          <p:nvPr/>
-        </p:nvSpPr>
-        <p:spPr>
-          <a:xfrm>
-            <a:off x="868680" y="5522976"/>
-            <a:ext cx="530352" cy="713232"/>
-          </a:xfrm>
-          <a:prstGeom prst="rect">
-            <a:avLst/>
-          </a:prstGeom>
-          <a:solidFill>
-            <a:srgbClr val="087490"/>
-          </a:solidFill>
-          <a:ln>
-            <a:noFill/>
-          </a:ln>
-        </p:spPr>
-        <p:style>
-          <a:lnRef idx="1">
-            <a:schemeClr val="accent1"/>
-          </a:lnRef>
-          <a:fillRef idx="3">
-            <a:schemeClr val="accent1"/>
-          </a:fillRef>
-          <a:effectRef idx="2">
-            <a:schemeClr val="accent1"/>
-          </a:effectRef>
-          <a:fontRef idx="minor">
-            <a:schemeClr val="lt1"/>
-          </a:fontRef>
-        </p:style>
-        <p:txBody>
-          <a:bodyPr rtlCol="0" anchor="ctr" wrap="square" lIns="101600" rIns="101600" tIns="38100" bIns="38100"/>
-          <a:lstStyle/>
-          <a:p>
-            <a:pPr algn="ctr"/>
-            <a:r>
-              <a:rPr sz="1500" b="1">
-                <a:solidFill>
-                  <a:srgbClr val="FFFFFF"/>
-                </a:solidFill>
-                <a:latin typeface="Arial"/>
-              </a:rPr>
-              <a:t>4</a:t>
-            </a:r>
-          </a:p>
-        </p:txBody>
-      </p:sp>
-      <p:sp>
-        <p:nvSpPr>
-          <p:cNvPr id="21" name="TextBox 20"/>
+          <p:cNvPr id="33" name="TextBox 32"/>
           <p:cNvSpPr txBox="1"/>
           <p:nvPr/>
         </p:nvSpPr>
         <p:spPr>
           <a:xfrm>
-            <a:off x="1572768" y="5669280"/>
-            <a:ext cx="9372600" cy="384048"/>
-          </a:xfrm>
-          <a:prstGeom prst="rect">
-            <a:avLst/>
-          </a:prstGeom>
-          <a:noFill/>
-        </p:spPr>
-        <p:txBody>
-          <a:bodyPr wrap="square" lIns="0" rIns="0" tIns="0" bIns="0">
-            <a:spAutoFit/>
-          </a:bodyPr>
-          <a:lstStyle/>
-          <a:p>
-            <a:r>
-              <a:rPr sz="1500" b="0">
-                <a:solidFill>
-                  <a:srgbClr val="111827"/>
-                </a:solidFill>
-                <a:latin typeface="Arial"/>
-              </a:rPr>
-              <a:t>Write one clear response.</a:t>
-            </a:r>
-          </a:p>
-        </p:txBody>
-      </p:sp>
-      <p:sp>
-        <p:nvSpPr>
-          <p:cNvPr id="22" name="TextBox 21"/>
-          <p:cNvSpPr txBox="1"/>
-          <p:nvPr/>
-        </p:nvSpPr>
-        <p:spPr>
-          <a:xfrm>
-            <a:off x="685800" y="6419088"/>
-            <a:ext cx="10835640" cy="228600"/>
+            <a:off x="713232" y="6355080"/>
+            <a:ext cx="10835640" cy="219456"/>
           </a:xfrm>
           <a:prstGeom prst="rect">
             <a:avLst/>
@@ -6266,7 +7699,7 @@
                 </a:solidFill>
                 <a:latin typeface="Arial"/>
               </a:rPr>
-              <a:t>Listen • Talk • Try • Explain</a:t>
+              <a:t>P7 class flow: listen • talk • try • explain</a:t>
             </a:r>
           </a:p>
         </p:txBody>
@@ -6471,7 +7904,93 @@
       </p:sp>
       <p:sp>
         <p:nvSpPr>
-          <p:cNvPr id="6" name="TextBox 5"/>
+          <p:cNvPr id="6" name="Rectangle 5"/>
+          <p:cNvSpPr/>
+          <p:nvPr/>
+        </p:nvSpPr>
+        <p:spPr>
+          <a:xfrm>
+            <a:off x="164592" y="6565392"/>
+            <a:ext cx="12027103" cy="73152"/>
+          </a:xfrm>
+          <a:prstGeom prst="rect">
+            <a:avLst/>
+          </a:prstGeom>
+          <a:solidFill>
+            <a:srgbClr val="FCD116"/>
+          </a:solidFill>
+          <a:ln>
+            <a:noFill/>
+          </a:ln>
+        </p:spPr>
+        <p:style>
+          <a:lnRef idx="1">
+            <a:schemeClr val="accent1"/>
+          </a:lnRef>
+          <a:fillRef idx="3">
+            <a:schemeClr val="accent1"/>
+          </a:fillRef>
+          <a:effectRef idx="2">
+            <a:schemeClr val="accent1"/>
+          </a:effectRef>
+          <a:fontRef idx="minor">
+            <a:schemeClr val="lt1"/>
+          </a:fontRef>
+        </p:style>
+        <p:txBody>
+          <a:bodyPr rtlCol="0" anchor="ctr"/>
+          <a:lstStyle/>
+          <a:p>
+            <a:pPr algn="ctr"/>
+          </a:p>
+        </p:txBody>
+      </p:sp>
+      <p:sp>
+        <p:nvSpPr>
+          <p:cNvPr id="7" name="Rectangle 6"/>
+          <p:cNvSpPr/>
+          <p:nvPr/>
+        </p:nvSpPr>
+        <p:spPr>
+          <a:xfrm>
+            <a:off x="164592" y="6638544"/>
+            <a:ext cx="12027103" cy="45720"/>
+          </a:xfrm>
+          <a:prstGeom prst="rect">
+            <a:avLst/>
+          </a:prstGeom>
+          <a:solidFill>
+            <a:srgbClr val="D90000"/>
+          </a:solidFill>
+          <a:ln>
+            <a:noFill/>
+          </a:ln>
+        </p:spPr>
+        <p:style>
+          <a:lnRef idx="1">
+            <a:schemeClr val="accent1"/>
+          </a:lnRef>
+          <a:fillRef idx="3">
+            <a:schemeClr val="accent1"/>
+          </a:fillRef>
+          <a:effectRef idx="2">
+            <a:schemeClr val="accent1"/>
+          </a:effectRef>
+          <a:fontRef idx="minor">
+            <a:schemeClr val="lt1"/>
+          </a:fontRef>
+        </p:style>
+        <p:txBody>
+          <a:bodyPr rtlCol="0" anchor="ctr"/>
+          <a:lstStyle/>
+          <a:p>
+            <a:pPr algn="ctr"/>
+          </a:p>
+        </p:txBody>
+      </p:sp>
+      <p:sp>
+        <p:nvSpPr>
+          <p:cNvPr id="8" name="TextBox 7"/>
           <p:cNvSpPr txBox="1"/>
           <p:nvPr/>
         </p:nvSpPr>
@@ -6505,7 +8024,7 @@
       </p:sp>
       <p:sp>
         <p:nvSpPr>
-          <p:cNvPr id="7" name="TextBox 6"/>
+          <p:cNvPr id="9" name="TextBox 8"/>
           <p:cNvSpPr txBox="1"/>
           <p:nvPr/>
         </p:nvSpPr>
@@ -6540,14 +8059,14 @@
       </p:sp>
       <p:sp>
         <p:nvSpPr>
-          <p:cNvPr id="8" name="TextBox 7"/>
+          <p:cNvPr id="10" name="TextBox 9"/>
           <p:cNvSpPr txBox="1"/>
           <p:nvPr/>
         </p:nvSpPr>
         <p:spPr>
           <a:xfrm>
-            <a:off x="594360" y="1042415"/>
-            <a:ext cx="11109960" cy="566928"/>
+            <a:off x="594360" y="1005840"/>
+            <a:ext cx="11064240" cy="512064"/>
           </a:xfrm>
           <a:prstGeom prst="rect">
             <a:avLst/>
@@ -6574,24 +8093,24 @@
       </p:sp>
       <p:sp>
         <p:nvSpPr>
-          <p:cNvPr id="9" name="Rectangle 8"/>
-          <p:cNvSpPr/>
-          <p:nvPr/>
-        </p:nvSpPr>
-        <p:spPr>
-          <a:xfrm>
-            <a:off x="685800" y="1874519"/>
-            <a:ext cx="10835640" cy="804672"/>
-          </a:xfrm>
-          <a:prstGeom prst="rect">
-            <a:avLst/>
-          </a:prstGeom>
-          <a:solidFill>
-            <a:srgbClr val="FFF7E0"/>
-          </a:solidFill>
-          <a:ln w="17780">
+          <p:cNvPr id="11" name="Rounded Rectangle 10"/>
+          <p:cNvSpPr/>
+          <p:nvPr/>
+        </p:nvSpPr>
+        <p:spPr>
+          <a:xfrm>
+            <a:off x="822960" y="1828800"/>
+            <a:ext cx="7360920" cy="4251960"/>
+          </a:xfrm>
+          <a:prstGeom prst="roundRect">
+            <a:avLst/>
+          </a:prstGeom>
+          <a:solidFill>
+            <a:srgbClr val="1F2937"/>
+          </a:solidFill>
+          <a:ln w="19050">
             <a:solidFill>
-              <a:srgbClr val="D97706"/>
+              <a:srgbClr val="FCD116"/>
             </a:solidFill>
           </a:ln>
         </p:spPr>
@@ -6610,129 +8129,398 @@
           </a:fontRef>
         </p:style>
         <p:txBody>
-          <a:bodyPr rtlCol="0" anchor="ctr" wrap="square" lIns="101600" rIns="101600" tIns="38100" bIns="38100"/>
-          <a:lstStyle/>
-          <a:p>
-            <a:pPr algn="ctr"/>
-            <a:r>
-              <a:rPr sz="1900" b="1">
+          <a:bodyPr rtlCol="0" anchor="ctr"/>
+          <a:lstStyle/>
+          <a:p>
+            <a:pPr algn="ctr"/>
+          </a:p>
+        </p:txBody>
+      </p:sp>
+      <p:sp>
+        <p:nvSpPr>
+          <p:cNvPr id="12" name="TextBox 11"/>
+          <p:cNvSpPr txBox="1"/>
+          <p:nvPr/>
+        </p:nvSpPr>
+        <p:spPr>
+          <a:xfrm>
+            <a:off x="1097280" y="2084831"/>
+            <a:ext cx="6812280" cy="256032"/>
+          </a:xfrm>
+          <a:prstGeom prst="rect">
+            <a:avLst/>
+          </a:prstGeom>
+          <a:noFill/>
+        </p:spPr>
+        <p:txBody>
+          <a:bodyPr wrap="square" lIns="0" rIns="0" tIns="0" bIns="0">
+            <a:spAutoFit/>
+          </a:bodyPr>
+          <a:lstStyle/>
+          <a:p>
+            <a:r>
+              <a:rPr sz="1200" b="1">
                 <a:solidFill>
-                  <a:srgbClr val="111827"/>
+                  <a:srgbClr val="FCD116"/>
                 </a:solidFill>
                 <a:latin typeface="Arial"/>
               </a:rPr>
-              <a:t>Model the example step by step.</a:t>
-            </a:r>
-          </a:p>
-        </p:txBody>
-      </p:sp>
-      <p:sp>
-        <p:nvSpPr>
-          <p:cNvPr id="10" name="Rectangle 9"/>
-          <p:cNvSpPr/>
-          <p:nvPr/>
-        </p:nvSpPr>
-        <p:spPr>
-          <a:xfrm>
-            <a:off x="868680" y="2971800"/>
-            <a:ext cx="10378440" cy="713232"/>
-          </a:xfrm>
-          <a:prstGeom prst="rect">
-            <a:avLst/>
-          </a:prstGeom>
-          <a:solidFill>
-            <a:srgbClr val="FFFFFF"/>
-          </a:solidFill>
-          <a:ln w="11430">
-            <a:solidFill>
-              <a:srgbClr val="CBD5E1"/>
-            </a:solidFill>
-          </a:ln>
-        </p:spPr>
-        <p:style>
-          <a:lnRef idx="1">
-            <a:schemeClr val="accent1"/>
-          </a:lnRef>
-          <a:fillRef idx="3">
-            <a:schemeClr val="accent1"/>
-          </a:fillRef>
-          <a:effectRef idx="2">
-            <a:schemeClr val="accent1"/>
-          </a:effectRef>
-          <a:fontRef idx="minor">
-            <a:schemeClr val="lt1"/>
-          </a:fontRef>
-        </p:style>
-        <p:txBody>
-          <a:bodyPr rtlCol="0" anchor="ctr"/>
-          <a:lstStyle/>
-          <a:p>
-            <a:pPr algn="ctr"/>
-          </a:p>
-        </p:txBody>
-      </p:sp>
-      <p:sp>
-        <p:nvSpPr>
-          <p:cNvPr id="11" name="Rectangle 10"/>
-          <p:cNvSpPr/>
-          <p:nvPr/>
-        </p:nvSpPr>
-        <p:spPr>
-          <a:xfrm>
-            <a:off x="868680" y="2971800"/>
-            <a:ext cx="530352" cy="713232"/>
-          </a:xfrm>
-          <a:prstGeom prst="rect">
-            <a:avLst/>
-          </a:prstGeom>
-          <a:solidFill>
-            <a:srgbClr val="D97706"/>
-          </a:solidFill>
-          <a:ln>
-            <a:noFill/>
-          </a:ln>
-        </p:spPr>
-        <p:style>
-          <a:lnRef idx="1">
-            <a:schemeClr val="accent1"/>
-          </a:lnRef>
-          <a:fillRef idx="3">
-            <a:schemeClr val="accent1"/>
-          </a:fillRef>
-          <a:effectRef idx="2">
-            <a:schemeClr val="accent1"/>
-          </a:effectRef>
-          <a:fontRef idx="minor">
-            <a:schemeClr val="lt1"/>
-          </a:fontRef>
-        </p:style>
-        <p:txBody>
-          <a:bodyPr rtlCol="0" anchor="ctr" wrap="square" lIns="101600" rIns="101600" tIns="38100" bIns="38100"/>
-          <a:lstStyle/>
-          <a:p>
-            <a:pPr algn="ctr"/>
-            <a:r>
-              <a:rPr sz="1500" b="1">
+              <a:t>BOARD MODEL</a:t>
+            </a:r>
+          </a:p>
+        </p:txBody>
+      </p:sp>
+      <p:sp>
+        <p:nvSpPr>
+          <p:cNvPr id="13" name="TextBox 12"/>
+          <p:cNvSpPr txBox="1"/>
+          <p:nvPr/>
+        </p:nvSpPr>
+        <p:spPr>
+          <a:xfrm>
+            <a:off x="1143000" y="2578608"/>
+            <a:ext cx="6583680" cy="347472"/>
+          </a:xfrm>
+          <a:prstGeom prst="rect">
+            <a:avLst/>
+          </a:prstGeom>
+          <a:noFill/>
+        </p:spPr>
+        <p:txBody>
+          <a:bodyPr wrap="square" lIns="0" rIns="0" tIns="0" bIns="0">
+            <a:spAutoFit/>
+          </a:bodyPr>
+          <a:lstStyle/>
+          <a:p>
+            <a:r>
+              <a:rPr sz="1600" b="0">
                 <a:solidFill>
                   <a:srgbClr val="FFFFFF"/>
                 </a:solidFill>
                 <a:latin typeface="Arial"/>
               </a:rPr>
-              <a:t>1</a:t>
-            </a:r>
-          </a:p>
-        </p:txBody>
-      </p:sp>
-      <p:sp>
-        <p:nvSpPr>
-          <p:cNvPr id="12" name="TextBox 11"/>
+              <a:t>1. NEW VOCABULARY</a:t>
+            </a:r>
+          </a:p>
+        </p:txBody>
+      </p:sp>
+      <p:sp>
+        <p:nvSpPr>
+          <p:cNvPr id="14" name="Rounded Rectangle 13"/>
+          <p:cNvSpPr/>
+          <p:nvPr/>
+        </p:nvSpPr>
+        <p:spPr>
+          <a:xfrm>
+            <a:off x="8549640" y="1828800"/>
+            <a:ext cx="2697480" cy="4251960"/>
+          </a:xfrm>
+          <a:prstGeom prst="roundRect">
+            <a:avLst/>
+          </a:prstGeom>
+          <a:solidFill>
+            <a:srgbClr val="FFF7E0"/>
+          </a:solidFill>
+          <a:ln w="16510">
+            <a:solidFill>
+              <a:srgbClr val="D97706"/>
+            </a:solidFill>
+          </a:ln>
+        </p:spPr>
+        <p:style>
+          <a:lnRef idx="1">
+            <a:schemeClr val="accent1"/>
+          </a:lnRef>
+          <a:fillRef idx="3">
+            <a:schemeClr val="accent1"/>
+          </a:fillRef>
+          <a:effectRef idx="2">
+            <a:schemeClr val="accent1"/>
+          </a:effectRef>
+          <a:fontRef idx="minor">
+            <a:schemeClr val="lt1"/>
+          </a:fontRef>
+        </p:style>
+        <p:txBody>
+          <a:bodyPr rtlCol="0" anchor="ctr"/>
+          <a:lstStyle/>
+          <a:p>
+            <a:pPr algn="ctr"/>
+          </a:p>
+        </p:txBody>
+      </p:sp>
+      <p:sp>
+        <p:nvSpPr>
+          <p:cNvPr id="15" name="Rectangle 14"/>
+          <p:cNvSpPr/>
+          <p:nvPr/>
+        </p:nvSpPr>
+        <p:spPr>
+          <a:xfrm>
+            <a:off x="9261043" y="2754629"/>
+            <a:ext cx="562355" cy="778154"/>
+          </a:xfrm>
+          <a:prstGeom prst="rect">
+            <a:avLst/>
+          </a:prstGeom>
+          <a:solidFill>
+            <a:srgbClr val="FFFFFF"/>
+          </a:solidFill>
+          <a:ln w="10160">
+            <a:solidFill>
+              <a:srgbClr val="1D4ED8"/>
+            </a:solidFill>
+          </a:ln>
+        </p:spPr>
+        <p:style>
+          <a:lnRef idx="1">
+            <a:schemeClr val="accent1"/>
+          </a:lnRef>
+          <a:fillRef idx="3">
+            <a:schemeClr val="accent1"/>
+          </a:fillRef>
+          <a:effectRef idx="2">
+            <a:schemeClr val="accent1"/>
+          </a:effectRef>
+          <a:fontRef idx="minor">
+            <a:schemeClr val="lt1"/>
+          </a:fontRef>
+        </p:style>
+        <p:txBody>
+          <a:bodyPr rtlCol="0" anchor="ctr"/>
+          <a:lstStyle/>
+          <a:p>
+            <a:pPr algn="ctr"/>
+          </a:p>
+        </p:txBody>
+      </p:sp>
+      <p:sp>
+        <p:nvSpPr>
+          <p:cNvPr id="16" name="Rectangle 15"/>
+          <p:cNvSpPr/>
+          <p:nvPr/>
+        </p:nvSpPr>
+        <p:spPr>
+          <a:xfrm>
+            <a:off x="9823399" y="2754629"/>
+            <a:ext cx="562355" cy="778154"/>
+          </a:xfrm>
+          <a:prstGeom prst="rect">
+            <a:avLst/>
+          </a:prstGeom>
+          <a:solidFill>
+            <a:srgbClr val="FFFFFF"/>
+          </a:solidFill>
+          <a:ln w="10160">
+            <a:solidFill>
+              <a:srgbClr val="1D4ED8"/>
+            </a:solidFill>
+          </a:ln>
+        </p:spPr>
+        <p:style>
+          <a:lnRef idx="1">
+            <a:schemeClr val="accent1"/>
+          </a:lnRef>
+          <a:fillRef idx="3">
+            <a:schemeClr val="accent1"/>
+          </a:fillRef>
+          <a:effectRef idx="2">
+            <a:schemeClr val="accent1"/>
+          </a:effectRef>
+          <a:fontRef idx="minor">
+            <a:schemeClr val="lt1"/>
+          </a:fontRef>
+        </p:style>
+        <p:txBody>
+          <a:bodyPr rtlCol="0" anchor="ctr"/>
+          <a:lstStyle/>
+          <a:p>
+            <a:pPr algn="ctr"/>
+          </a:p>
+        </p:txBody>
+      </p:sp>
+      <p:sp>
+        <p:nvSpPr>
+          <p:cNvPr id="17" name="Rectangle 16"/>
+          <p:cNvSpPr/>
+          <p:nvPr/>
+        </p:nvSpPr>
+        <p:spPr>
+          <a:xfrm>
+            <a:off x="9485985" y="2670048"/>
+            <a:ext cx="693572" cy="101498"/>
+          </a:xfrm>
+          <a:prstGeom prst="rect">
+            <a:avLst/>
+          </a:prstGeom>
+          <a:solidFill>
+            <a:srgbClr val="D90000"/>
+          </a:solidFill>
+          <a:ln>
+            <a:noFill/>
+          </a:ln>
+        </p:spPr>
+        <p:style>
+          <a:lnRef idx="1">
+            <a:schemeClr val="accent1"/>
+          </a:lnRef>
+          <a:fillRef idx="3">
+            <a:schemeClr val="accent1"/>
+          </a:fillRef>
+          <a:effectRef idx="2">
+            <a:schemeClr val="accent1"/>
+          </a:effectRef>
+          <a:fontRef idx="minor">
+            <a:schemeClr val="lt1"/>
+          </a:fontRef>
+        </p:style>
+        <p:txBody>
+          <a:bodyPr rtlCol="0" anchor="ctr"/>
+          <a:lstStyle/>
+          <a:p>
+            <a:pPr algn="ctr"/>
+          </a:p>
+        </p:txBody>
+      </p:sp>
+      <p:sp>
+        <p:nvSpPr>
+          <p:cNvPr id="18" name="Rectangle 17"/>
+          <p:cNvSpPr/>
+          <p:nvPr/>
+        </p:nvSpPr>
+        <p:spPr>
+          <a:xfrm>
+            <a:off x="9373514" y="2974543"/>
+            <a:ext cx="899769" cy="42291"/>
+          </a:xfrm>
+          <a:prstGeom prst="rect">
+            <a:avLst/>
+          </a:prstGeom>
+          <a:solidFill>
+            <a:srgbClr val="CBD5E1"/>
+          </a:solidFill>
+          <a:ln>
+            <a:noFill/>
+          </a:ln>
+        </p:spPr>
+        <p:style>
+          <a:lnRef idx="1">
+            <a:schemeClr val="accent1"/>
+          </a:lnRef>
+          <a:fillRef idx="3">
+            <a:schemeClr val="accent1"/>
+          </a:fillRef>
+          <a:effectRef idx="2">
+            <a:schemeClr val="accent1"/>
+          </a:effectRef>
+          <a:fontRef idx="minor">
+            <a:schemeClr val="lt1"/>
+          </a:fontRef>
+        </p:style>
+        <p:txBody>
+          <a:bodyPr rtlCol="0" anchor="ctr"/>
+          <a:lstStyle/>
+          <a:p>
+            <a:pPr algn="ctr"/>
+          </a:p>
+        </p:txBody>
+      </p:sp>
+      <p:sp>
+        <p:nvSpPr>
+          <p:cNvPr id="19" name="Rectangle 18"/>
+          <p:cNvSpPr/>
+          <p:nvPr/>
+        </p:nvSpPr>
+        <p:spPr>
+          <a:xfrm>
+            <a:off x="9373514" y="3177539"/>
+            <a:ext cx="899769" cy="42291"/>
+          </a:xfrm>
+          <a:prstGeom prst="rect">
+            <a:avLst/>
+          </a:prstGeom>
+          <a:solidFill>
+            <a:srgbClr val="CBD5E1"/>
+          </a:solidFill>
+          <a:ln>
+            <a:noFill/>
+          </a:ln>
+        </p:spPr>
+        <p:style>
+          <a:lnRef idx="1">
+            <a:schemeClr val="accent1"/>
+          </a:lnRef>
+          <a:fillRef idx="3">
+            <a:schemeClr val="accent1"/>
+          </a:fillRef>
+          <a:effectRef idx="2">
+            <a:schemeClr val="accent1"/>
+          </a:effectRef>
+          <a:fontRef idx="minor">
+            <a:schemeClr val="lt1"/>
+          </a:fontRef>
+        </p:style>
+        <p:txBody>
+          <a:bodyPr rtlCol="0" anchor="ctr"/>
+          <a:lstStyle/>
+          <a:p>
+            <a:pPr algn="ctr"/>
+          </a:p>
+        </p:txBody>
+      </p:sp>
+      <p:sp>
+        <p:nvSpPr>
+          <p:cNvPr id="20" name="Rectangle 19"/>
+          <p:cNvSpPr/>
+          <p:nvPr/>
+        </p:nvSpPr>
+        <p:spPr>
+          <a:xfrm>
+            <a:off x="9373514" y="3380536"/>
+            <a:ext cx="899769" cy="42291"/>
+          </a:xfrm>
+          <a:prstGeom prst="rect">
+            <a:avLst/>
+          </a:prstGeom>
+          <a:solidFill>
+            <a:srgbClr val="CBD5E1"/>
+          </a:solidFill>
+          <a:ln>
+            <a:noFill/>
+          </a:ln>
+        </p:spPr>
+        <p:style>
+          <a:lnRef idx="1">
+            <a:schemeClr val="accent1"/>
+          </a:lnRef>
+          <a:fillRef idx="3">
+            <a:schemeClr val="accent1"/>
+          </a:fillRef>
+          <a:effectRef idx="2">
+            <a:schemeClr val="accent1"/>
+          </a:effectRef>
+          <a:fontRef idx="minor">
+            <a:schemeClr val="lt1"/>
+          </a:fontRef>
+        </p:style>
+        <p:txBody>
+          <a:bodyPr rtlCol="0" anchor="ctr"/>
+          <a:lstStyle/>
+          <a:p>
+            <a:pPr algn="ctr"/>
+          </a:p>
+        </p:txBody>
+      </p:sp>
+      <p:sp>
+        <p:nvSpPr>
+          <p:cNvPr id="21" name="TextBox 20"/>
           <p:cNvSpPr txBox="1"/>
           <p:nvPr/>
         </p:nvSpPr>
         <p:spPr>
           <a:xfrm>
-            <a:off x="1572768" y="3118104"/>
-            <a:ext cx="9372600" cy="384048"/>
+            <a:off x="8961120" y="3767328"/>
+            <a:ext cx="1874519" cy="228600"/>
           </a:xfrm>
           <a:prstGeom prst="rect">
             <a:avLst/>
@@ -6745,434 +8533,7 @@
           </a:bodyPr>
           <a:lstStyle/>
           <a:p>
-            <a:r>
-              <a:rPr sz="1500" b="0">
-                <a:solidFill>
-                  <a:srgbClr val="111827"/>
-                </a:solidFill>
-                <a:latin typeface="Arial"/>
-              </a:rPr>
-              <a:t>NEW VOCABULARY</a:t>
-            </a:r>
-          </a:p>
-        </p:txBody>
-      </p:sp>
-      <p:sp>
-        <p:nvSpPr>
-          <p:cNvPr id="13" name="Rectangle 12"/>
-          <p:cNvSpPr/>
-          <p:nvPr/>
-        </p:nvSpPr>
-        <p:spPr>
-          <a:xfrm>
-            <a:off x="868680" y="3822191"/>
-            <a:ext cx="10378440" cy="713232"/>
-          </a:xfrm>
-          <a:prstGeom prst="rect">
-            <a:avLst/>
-          </a:prstGeom>
-          <a:solidFill>
-            <a:srgbClr val="FFFFFF"/>
-          </a:solidFill>
-          <a:ln w="11430">
-            <a:solidFill>
-              <a:srgbClr val="CBD5E1"/>
-            </a:solidFill>
-          </a:ln>
-        </p:spPr>
-        <p:style>
-          <a:lnRef idx="1">
-            <a:schemeClr val="accent1"/>
-          </a:lnRef>
-          <a:fillRef idx="3">
-            <a:schemeClr val="accent1"/>
-          </a:fillRef>
-          <a:effectRef idx="2">
-            <a:schemeClr val="accent1"/>
-          </a:effectRef>
-          <a:fontRef idx="minor">
-            <a:schemeClr val="lt1"/>
-          </a:fontRef>
-        </p:style>
-        <p:txBody>
-          <a:bodyPr rtlCol="0" anchor="ctr"/>
-          <a:lstStyle/>
-          <a:p>
-            <a:pPr algn="ctr"/>
-          </a:p>
-        </p:txBody>
-      </p:sp>
-      <p:sp>
-        <p:nvSpPr>
-          <p:cNvPr id="14" name="Rectangle 13"/>
-          <p:cNvSpPr/>
-          <p:nvPr/>
-        </p:nvSpPr>
-        <p:spPr>
-          <a:xfrm>
-            <a:off x="868680" y="3822191"/>
-            <a:ext cx="530352" cy="713232"/>
-          </a:xfrm>
-          <a:prstGeom prst="rect">
-            <a:avLst/>
-          </a:prstGeom>
-          <a:solidFill>
-            <a:srgbClr val="D97706"/>
-          </a:solidFill>
-          <a:ln>
-            <a:noFill/>
-          </a:ln>
-        </p:spPr>
-        <p:style>
-          <a:lnRef idx="1">
-            <a:schemeClr val="accent1"/>
-          </a:lnRef>
-          <a:fillRef idx="3">
-            <a:schemeClr val="accent1"/>
-          </a:fillRef>
-          <a:effectRef idx="2">
-            <a:schemeClr val="accent1"/>
-          </a:effectRef>
-          <a:fontRef idx="minor">
-            <a:schemeClr val="lt1"/>
-          </a:fontRef>
-        </p:style>
-        <p:txBody>
-          <a:bodyPr rtlCol="0" anchor="ctr" wrap="square" lIns="101600" rIns="101600" tIns="38100" bIns="38100"/>
-          <a:lstStyle/>
-          <a:p>
-            <a:pPr algn="ctr"/>
-            <a:r>
-              <a:rPr sz="1500" b="1">
-                <a:solidFill>
-                  <a:srgbClr val="FFFFFF"/>
-                </a:solidFill>
-                <a:latin typeface="Arial"/>
-              </a:rPr>
-              <a:t>2</a:t>
-            </a:r>
-          </a:p>
-        </p:txBody>
-      </p:sp>
-      <p:sp>
-        <p:nvSpPr>
-          <p:cNvPr id="15" name="TextBox 14"/>
-          <p:cNvSpPr txBox="1"/>
-          <p:nvPr/>
-        </p:nvSpPr>
-        <p:spPr>
-          <a:xfrm>
-            <a:off x="1572768" y="3968496"/>
-            <a:ext cx="9372600" cy="384048"/>
-          </a:xfrm>
-          <a:prstGeom prst="rect">
-            <a:avLst/>
-          </a:prstGeom>
-          <a:noFill/>
-        </p:spPr>
-        <p:txBody>
-          <a:bodyPr wrap="square" lIns="0" rIns="0" tIns="0" bIns="0">
-            <a:spAutoFit/>
-          </a:bodyPr>
-          <a:lstStyle/>
-          <a:p>
-            <a:r>
-              <a:rPr sz="1500" b="0">
-                <a:solidFill>
-                  <a:srgbClr val="111827"/>
-                </a:solidFill>
-                <a:latin typeface="Arial"/>
-              </a:rPr>
-              <a:t>Write one clear response.</a:t>
-            </a:r>
-          </a:p>
-        </p:txBody>
-      </p:sp>
-      <p:sp>
-        <p:nvSpPr>
-          <p:cNvPr id="16" name="Rectangle 15"/>
-          <p:cNvSpPr/>
-          <p:nvPr/>
-        </p:nvSpPr>
-        <p:spPr>
-          <a:xfrm>
-            <a:off x="868680" y="4672584"/>
-            <a:ext cx="10378440" cy="713232"/>
-          </a:xfrm>
-          <a:prstGeom prst="rect">
-            <a:avLst/>
-          </a:prstGeom>
-          <a:solidFill>
-            <a:srgbClr val="FFFFFF"/>
-          </a:solidFill>
-          <a:ln w="11430">
-            <a:solidFill>
-              <a:srgbClr val="CBD5E1"/>
-            </a:solidFill>
-          </a:ln>
-        </p:spPr>
-        <p:style>
-          <a:lnRef idx="1">
-            <a:schemeClr val="accent1"/>
-          </a:lnRef>
-          <a:fillRef idx="3">
-            <a:schemeClr val="accent1"/>
-          </a:fillRef>
-          <a:effectRef idx="2">
-            <a:schemeClr val="accent1"/>
-          </a:effectRef>
-          <a:fontRef idx="minor">
-            <a:schemeClr val="lt1"/>
-          </a:fontRef>
-        </p:style>
-        <p:txBody>
-          <a:bodyPr rtlCol="0" anchor="ctr"/>
-          <a:lstStyle/>
-          <a:p>
-            <a:pPr algn="ctr"/>
-          </a:p>
-        </p:txBody>
-      </p:sp>
-      <p:sp>
-        <p:nvSpPr>
-          <p:cNvPr id="17" name="Rectangle 16"/>
-          <p:cNvSpPr/>
-          <p:nvPr/>
-        </p:nvSpPr>
-        <p:spPr>
-          <a:xfrm>
-            <a:off x="868680" y="4672584"/>
-            <a:ext cx="530352" cy="713232"/>
-          </a:xfrm>
-          <a:prstGeom prst="rect">
-            <a:avLst/>
-          </a:prstGeom>
-          <a:solidFill>
-            <a:srgbClr val="D97706"/>
-          </a:solidFill>
-          <a:ln>
-            <a:noFill/>
-          </a:ln>
-        </p:spPr>
-        <p:style>
-          <a:lnRef idx="1">
-            <a:schemeClr val="accent1"/>
-          </a:lnRef>
-          <a:fillRef idx="3">
-            <a:schemeClr val="accent1"/>
-          </a:fillRef>
-          <a:effectRef idx="2">
-            <a:schemeClr val="accent1"/>
-          </a:effectRef>
-          <a:fontRef idx="minor">
-            <a:schemeClr val="lt1"/>
-          </a:fontRef>
-        </p:style>
-        <p:txBody>
-          <a:bodyPr rtlCol="0" anchor="ctr" wrap="square" lIns="101600" rIns="101600" tIns="38100" bIns="38100"/>
-          <a:lstStyle/>
-          <a:p>
-            <a:pPr algn="ctr"/>
-            <a:r>
-              <a:rPr sz="1500" b="1">
-                <a:solidFill>
-                  <a:srgbClr val="FFFFFF"/>
-                </a:solidFill>
-                <a:latin typeface="Arial"/>
-              </a:rPr>
-              <a:t>3</a:t>
-            </a:r>
-          </a:p>
-        </p:txBody>
-      </p:sp>
-      <p:sp>
-        <p:nvSpPr>
-          <p:cNvPr id="18" name="TextBox 17"/>
-          <p:cNvSpPr txBox="1"/>
-          <p:nvPr/>
-        </p:nvSpPr>
-        <p:spPr>
-          <a:xfrm>
-            <a:off x="1572768" y="4818888"/>
-            <a:ext cx="9372600" cy="384048"/>
-          </a:xfrm>
-          <a:prstGeom prst="rect">
-            <a:avLst/>
-          </a:prstGeom>
-          <a:noFill/>
-        </p:spPr>
-        <p:txBody>
-          <a:bodyPr wrap="square" lIns="0" rIns="0" tIns="0" bIns="0">
-            <a:spAutoFit/>
-          </a:bodyPr>
-          <a:lstStyle/>
-          <a:p>
-            <a:r>
-              <a:rPr sz="1500" b="0">
-                <a:solidFill>
-                  <a:srgbClr val="111827"/>
-                </a:solidFill>
-                <a:latin typeface="Arial"/>
-              </a:rPr>
-              <a:t>Write one clear response.</a:t>
-            </a:r>
-          </a:p>
-        </p:txBody>
-      </p:sp>
-      <p:sp>
-        <p:nvSpPr>
-          <p:cNvPr id="19" name="Rectangle 18"/>
-          <p:cNvSpPr/>
-          <p:nvPr/>
-        </p:nvSpPr>
-        <p:spPr>
-          <a:xfrm>
-            <a:off x="868680" y="5522976"/>
-            <a:ext cx="10378440" cy="713232"/>
-          </a:xfrm>
-          <a:prstGeom prst="rect">
-            <a:avLst/>
-          </a:prstGeom>
-          <a:solidFill>
-            <a:srgbClr val="FFFFFF"/>
-          </a:solidFill>
-          <a:ln w="11430">
-            <a:solidFill>
-              <a:srgbClr val="CBD5E1"/>
-            </a:solidFill>
-          </a:ln>
-        </p:spPr>
-        <p:style>
-          <a:lnRef idx="1">
-            <a:schemeClr val="accent1"/>
-          </a:lnRef>
-          <a:fillRef idx="3">
-            <a:schemeClr val="accent1"/>
-          </a:fillRef>
-          <a:effectRef idx="2">
-            <a:schemeClr val="accent1"/>
-          </a:effectRef>
-          <a:fontRef idx="minor">
-            <a:schemeClr val="lt1"/>
-          </a:fontRef>
-        </p:style>
-        <p:txBody>
-          <a:bodyPr rtlCol="0" anchor="ctr"/>
-          <a:lstStyle/>
-          <a:p>
-            <a:pPr algn="ctr"/>
-          </a:p>
-        </p:txBody>
-      </p:sp>
-      <p:sp>
-        <p:nvSpPr>
-          <p:cNvPr id="20" name="Rectangle 19"/>
-          <p:cNvSpPr/>
-          <p:nvPr/>
-        </p:nvSpPr>
-        <p:spPr>
-          <a:xfrm>
-            <a:off x="868680" y="5522976"/>
-            <a:ext cx="530352" cy="713232"/>
-          </a:xfrm>
-          <a:prstGeom prst="rect">
-            <a:avLst/>
-          </a:prstGeom>
-          <a:solidFill>
-            <a:srgbClr val="D97706"/>
-          </a:solidFill>
-          <a:ln>
-            <a:noFill/>
-          </a:ln>
-        </p:spPr>
-        <p:style>
-          <a:lnRef idx="1">
-            <a:schemeClr val="accent1"/>
-          </a:lnRef>
-          <a:fillRef idx="3">
-            <a:schemeClr val="accent1"/>
-          </a:fillRef>
-          <a:effectRef idx="2">
-            <a:schemeClr val="accent1"/>
-          </a:effectRef>
-          <a:fontRef idx="minor">
-            <a:schemeClr val="lt1"/>
-          </a:fontRef>
-        </p:style>
-        <p:txBody>
-          <a:bodyPr rtlCol="0" anchor="ctr" wrap="square" lIns="101600" rIns="101600" tIns="38100" bIns="38100"/>
-          <a:lstStyle/>
-          <a:p>
-            <a:pPr algn="ctr"/>
-            <a:r>
-              <a:rPr sz="1500" b="1">
-                <a:solidFill>
-                  <a:srgbClr val="FFFFFF"/>
-                </a:solidFill>
-                <a:latin typeface="Arial"/>
-              </a:rPr>
-              <a:t>4</a:t>
-            </a:r>
-          </a:p>
-        </p:txBody>
-      </p:sp>
-      <p:sp>
-        <p:nvSpPr>
-          <p:cNvPr id="21" name="TextBox 20"/>
-          <p:cNvSpPr txBox="1"/>
-          <p:nvPr/>
-        </p:nvSpPr>
-        <p:spPr>
-          <a:xfrm>
-            <a:off x="1572768" y="5669280"/>
-            <a:ext cx="9372600" cy="384048"/>
-          </a:xfrm>
-          <a:prstGeom prst="rect">
-            <a:avLst/>
-          </a:prstGeom>
-          <a:noFill/>
-        </p:spPr>
-        <p:txBody>
-          <a:bodyPr wrap="square" lIns="0" rIns="0" tIns="0" bIns="0">
-            <a:spAutoFit/>
-          </a:bodyPr>
-          <a:lstStyle/>
-          <a:p>
-            <a:r>
-              <a:rPr sz="1500" b="0">
-                <a:solidFill>
-                  <a:srgbClr val="111827"/>
-                </a:solidFill>
-                <a:latin typeface="Arial"/>
-              </a:rPr>
-              <a:t>Write one clear response.</a:t>
-            </a:r>
-          </a:p>
-        </p:txBody>
-      </p:sp>
-      <p:sp>
-        <p:nvSpPr>
-          <p:cNvPr id="22" name="TextBox 21"/>
-          <p:cNvSpPr txBox="1"/>
-          <p:nvPr/>
-        </p:nvSpPr>
-        <p:spPr>
-          <a:xfrm>
-            <a:off x="685800" y="6419088"/>
-            <a:ext cx="10835640" cy="228600"/>
-          </a:xfrm>
-          <a:prstGeom prst="rect">
-            <a:avLst/>
-          </a:prstGeom>
-          <a:noFill/>
-        </p:spPr>
-        <p:txBody>
-          <a:bodyPr wrap="square" lIns="0" rIns="0" tIns="0" bIns="0">
-            <a:spAutoFit/>
-          </a:bodyPr>
-          <a:lstStyle/>
-          <a:p>
-            <a:pPr algn="r"/>
+            <a:pPr algn="ctr"/>
             <a:r>
               <a:rPr sz="1000" b="0">
                 <a:solidFill>
@@ -7180,7 +8541,77 @@
                 </a:solidFill>
                 <a:latin typeface="Arial"/>
               </a:rPr>
-              <a:t>Listen • Talk • Try • Explain</a:t>
+              <a:t>English</a:t>
+            </a:r>
+          </a:p>
+        </p:txBody>
+      </p:sp>
+      <p:sp>
+        <p:nvSpPr>
+          <p:cNvPr id="22" name="TextBox 21"/>
+          <p:cNvSpPr txBox="1"/>
+          <p:nvPr/>
+        </p:nvSpPr>
+        <p:spPr>
+          <a:xfrm>
+            <a:off x="8869680" y="4526280"/>
+            <a:ext cx="2057400" cy="804672"/>
+          </a:xfrm>
+          <a:prstGeom prst="rect">
+            <a:avLst/>
+          </a:prstGeom>
+          <a:noFill/>
+        </p:spPr>
+        <p:txBody>
+          <a:bodyPr wrap="square" lIns="0" rIns="0" tIns="0" bIns="0">
+            <a:spAutoFit/>
+          </a:bodyPr>
+          <a:lstStyle/>
+          <a:p>
+            <a:pPr algn="ctr"/>
+            <a:r>
+              <a:rPr sz="1400" b="1">
+                <a:solidFill>
+                  <a:srgbClr val="111827"/>
+                </a:solidFill>
+                <a:latin typeface="Arial"/>
+              </a:rPr>
+              <a:t>Teacher models first. Learners copy the pattern, then explain the step.</a:t>
+            </a:r>
+          </a:p>
+        </p:txBody>
+      </p:sp>
+      <p:sp>
+        <p:nvSpPr>
+          <p:cNvPr id="23" name="TextBox 22"/>
+          <p:cNvSpPr txBox="1"/>
+          <p:nvPr/>
+        </p:nvSpPr>
+        <p:spPr>
+          <a:xfrm>
+            <a:off x="713232" y="6355080"/>
+            <a:ext cx="10835640" cy="219456"/>
+          </a:xfrm>
+          <a:prstGeom prst="rect">
+            <a:avLst/>
+          </a:prstGeom>
+          <a:noFill/>
+        </p:spPr>
+        <p:txBody>
+          <a:bodyPr wrap="square" lIns="0" rIns="0" tIns="0" bIns="0">
+            <a:spAutoFit/>
+          </a:bodyPr>
+          <a:lstStyle/>
+          <a:p>
+            <a:pPr algn="r"/>
+            <a:r>
+              <a:rPr sz="1000" b="0">
+                <a:solidFill>
+                  <a:srgbClr val="475569"/>
+                </a:solidFill>
+                <a:latin typeface="Arial"/>
+              </a:rPr>
+              <a:t>P7 class flow: listen • talk • try • explain</a:t>
             </a:r>
           </a:p>
         </p:txBody>
@@ -7385,7 +8816,93 @@
       </p:sp>
       <p:sp>
         <p:nvSpPr>
-          <p:cNvPr id="6" name="TextBox 5"/>
+          <p:cNvPr id="6" name="Rectangle 5"/>
+          <p:cNvSpPr/>
+          <p:nvPr/>
+        </p:nvSpPr>
+        <p:spPr>
+          <a:xfrm>
+            <a:off x="164592" y="6565392"/>
+            <a:ext cx="12027103" cy="73152"/>
+          </a:xfrm>
+          <a:prstGeom prst="rect">
+            <a:avLst/>
+          </a:prstGeom>
+          <a:solidFill>
+            <a:srgbClr val="FCD116"/>
+          </a:solidFill>
+          <a:ln>
+            <a:noFill/>
+          </a:ln>
+        </p:spPr>
+        <p:style>
+          <a:lnRef idx="1">
+            <a:schemeClr val="accent1"/>
+          </a:lnRef>
+          <a:fillRef idx="3">
+            <a:schemeClr val="accent1"/>
+          </a:fillRef>
+          <a:effectRef idx="2">
+            <a:schemeClr val="accent1"/>
+          </a:effectRef>
+          <a:fontRef idx="minor">
+            <a:schemeClr val="lt1"/>
+          </a:fontRef>
+        </p:style>
+        <p:txBody>
+          <a:bodyPr rtlCol="0" anchor="ctr"/>
+          <a:lstStyle/>
+          <a:p>
+            <a:pPr algn="ctr"/>
+          </a:p>
+        </p:txBody>
+      </p:sp>
+      <p:sp>
+        <p:nvSpPr>
+          <p:cNvPr id="7" name="Rectangle 6"/>
+          <p:cNvSpPr/>
+          <p:nvPr/>
+        </p:nvSpPr>
+        <p:spPr>
+          <a:xfrm>
+            <a:off x="164592" y="6638544"/>
+            <a:ext cx="12027103" cy="45720"/>
+          </a:xfrm>
+          <a:prstGeom prst="rect">
+            <a:avLst/>
+          </a:prstGeom>
+          <a:solidFill>
+            <a:srgbClr val="D90000"/>
+          </a:solidFill>
+          <a:ln>
+            <a:noFill/>
+          </a:ln>
+        </p:spPr>
+        <p:style>
+          <a:lnRef idx="1">
+            <a:schemeClr val="accent1"/>
+          </a:lnRef>
+          <a:fillRef idx="3">
+            <a:schemeClr val="accent1"/>
+          </a:fillRef>
+          <a:effectRef idx="2">
+            <a:schemeClr val="accent1"/>
+          </a:effectRef>
+          <a:fontRef idx="minor">
+            <a:schemeClr val="lt1"/>
+          </a:fontRef>
+        </p:style>
+        <p:txBody>
+          <a:bodyPr rtlCol="0" anchor="ctr"/>
+          <a:lstStyle/>
+          <a:p>
+            <a:pPr algn="ctr"/>
+          </a:p>
+        </p:txBody>
+      </p:sp>
+      <p:sp>
+        <p:nvSpPr>
+          <p:cNvPr id="8" name="TextBox 7"/>
           <p:cNvSpPr txBox="1"/>
           <p:nvPr/>
         </p:nvSpPr>
@@ -7419,7 +8936,7 @@
       </p:sp>
       <p:sp>
         <p:nvSpPr>
-          <p:cNvPr id="7" name="TextBox 6"/>
+          <p:cNvPr id="9" name="TextBox 8"/>
           <p:cNvSpPr txBox="1"/>
           <p:nvPr/>
         </p:nvSpPr>
@@ -7454,14 +8971,14 @@
       </p:sp>
       <p:sp>
         <p:nvSpPr>
-          <p:cNvPr id="8" name="TextBox 7"/>
+          <p:cNvPr id="10" name="TextBox 9"/>
           <p:cNvSpPr txBox="1"/>
           <p:nvPr/>
         </p:nvSpPr>
         <p:spPr>
           <a:xfrm>
-            <a:off x="594360" y="1042415"/>
-            <a:ext cx="11109960" cy="566928"/>
+            <a:off x="594360" y="1005840"/>
+            <a:ext cx="11064240" cy="512064"/>
           </a:xfrm>
           <a:prstGeom prst="rect">
             <a:avLst/>
@@ -7488,16 +9005,16 @@
       </p:sp>
       <p:sp>
         <p:nvSpPr>
-          <p:cNvPr id="9" name="Rectangle 8"/>
-          <p:cNvSpPr/>
-          <p:nvPr/>
-        </p:nvSpPr>
-        <p:spPr>
-          <a:xfrm>
-            <a:off x="685800" y="1874519"/>
-            <a:ext cx="10835640" cy="804672"/>
-          </a:xfrm>
-          <a:prstGeom prst="rect">
+          <p:cNvPr id="11" name="Rounded Rectangle 10"/>
+          <p:cNvSpPr/>
+          <p:nvPr/>
+        </p:nvSpPr>
+        <p:spPr>
+          <a:xfrm>
+            <a:off x="777240" y="1719072"/>
+            <a:ext cx="10652760" cy="822960"/>
+          </a:xfrm>
+          <a:prstGeom prst="roundRect">
             <a:avLst/>
           </a:prstGeom>
           <a:solidFill>
@@ -7535,23 +9052,23 @@
                 </a:solidFill>
                 <a:latin typeface="Arial"/>
               </a:rPr>
-              <a:t>Which activity helped you improve your English most?</a:t>
-            </a:r>
-          </a:p>
-        </p:txBody>
-      </p:sp>
-      <p:sp>
-        <p:nvSpPr>
-          <p:cNvPr id="10" name="Rectangle 9"/>
-          <p:cNvSpPr/>
-          <p:nvPr/>
-        </p:nvSpPr>
-        <p:spPr>
-          <a:xfrm>
-            <a:off x="868680" y="2971800"/>
-            <a:ext cx="10378440" cy="713232"/>
-          </a:xfrm>
-          <a:prstGeom prst="rect">
+              <a:t>Answer with evidence:</a:t>
+            </a:r>
+          </a:p>
+        </p:txBody>
+      </p:sp>
+      <p:sp>
+        <p:nvSpPr>
+          <p:cNvPr id="12" name="Rounded Rectangle 11"/>
+          <p:cNvSpPr/>
+          <p:nvPr/>
+        </p:nvSpPr>
+        <p:spPr>
+          <a:xfrm>
+            <a:off x="868680" y="2743200"/>
+            <a:ext cx="10378440" cy="804672"/>
+          </a:xfrm>
+          <a:prstGeom prst="roundRect">
             <a:avLst/>
           </a:prstGeom>
           <a:solidFill>
@@ -7587,16 +9104,16 @@
       </p:sp>
       <p:sp>
         <p:nvSpPr>
-          <p:cNvPr id="11" name="Rectangle 10"/>
-          <p:cNvSpPr/>
-          <p:nvPr/>
-        </p:nvSpPr>
-        <p:spPr>
-          <a:xfrm>
-            <a:off x="868680" y="2971800"/>
-            <a:ext cx="530352" cy="713232"/>
-          </a:xfrm>
-          <a:prstGeom prst="rect">
+          <p:cNvPr id="13" name="Oval 12"/>
+          <p:cNvSpPr/>
+          <p:nvPr/>
+        </p:nvSpPr>
+        <p:spPr>
+          <a:xfrm>
+            <a:off x="1078992" y="2898648"/>
+            <a:ext cx="475488" cy="475488"/>
+          </a:xfrm>
+          <a:prstGeom prst="ellipse">
             <a:avLst/>
           </a:prstGeom>
           <a:solidFill>
@@ -7632,21 +9149,21 @@
                 </a:solidFill>
                 <a:latin typeface="Arial"/>
               </a:rPr>
-              <a:t>1</a:t>
-            </a:r>
-          </a:p>
-        </p:txBody>
-      </p:sp>
-      <p:sp>
-        <p:nvSpPr>
-          <p:cNvPr id="12" name="TextBox 11"/>
+              <a:t>?</a:t>
+            </a:r>
+          </a:p>
+        </p:txBody>
+      </p:sp>
+      <p:sp>
+        <p:nvSpPr>
+          <p:cNvPr id="14" name="TextBox 13"/>
           <p:cNvSpPr txBox="1"/>
           <p:nvPr/>
         </p:nvSpPr>
         <p:spPr>
           <a:xfrm>
-            <a:off x="1572768" y="3118104"/>
-            <a:ext cx="9372600" cy="384048"/>
+            <a:off x="1719072" y="2889504"/>
+            <a:ext cx="5623560" cy="384048"/>
           </a:xfrm>
           <a:prstGeom prst="rect">
             <a:avLst/>
@@ -7660,7 +9177,181 @@
           <a:lstStyle/>
           <a:p>
             <a:r>
-              <a:rPr sz="1500" b="0">
+              <a:rPr sz="1600" b="1">
+                <a:solidFill>
+                  <a:srgbClr val="111827"/>
+                </a:solidFill>
+                <a:latin typeface="Arial"/>
+              </a:rPr>
+              <a:t>Which activity helped you improve your English most?</a:t>
+            </a:r>
+          </a:p>
+        </p:txBody>
+      </p:sp>
+      <p:sp>
+        <p:nvSpPr>
+          <p:cNvPr id="15" name="Rectangle 14"/>
+          <p:cNvSpPr/>
+          <p:nvPr/>
+        </p:nvSpPr>
+        <p:spPr>
+          <a:xfrm>
+            <a:off x="7635240" y="3264408"/>
+            <a:ext cx="3246120" cy="36576"/>
+          </a:xfrm>
+          <a:prstGeom prst="rect">
+            <a:avLst/>
+          </a:prstGeom>
+          <a:solidFill>
+            <a:srgbClr val="CBD5E1"/>
+          </a:solidFill>
+          <a:ln>
+            <a:noFill/>
+          </a:ln>
+        </p:spPr>
+        <p:style>
+          <a:lnRef idx="1">
+            <a:schemeClr val="accent1"/>
+          </a:lnRef>
+          <a:fillRef idx="3">
+            <a:schemeClr val="accent1"/>
+          </a:fillRef>
+          <a:effectRef idx="2">
+            <a:schemeClr val="accent1"/>
+          </a:effectRef>
+          <a:fontRef idx="minor">
+            <a:schemeClr val="lt1"/>
+          </a:fontRef>
+        </p:style>
+        <p:txBody>
+          <a:bodyPr rtlCol="0" anchor="ctr"/>
+          <a:lstStyle/>
+          <a:p>
+            <a:pPr algn="ctr"/>
+          </a:p>
+        </p:txBody>
+      </p:sp>
+      <p:sp>
+        <p:nvSpPr>
+          <p:cNvPr id="16" name="Rounded Rectangle 15"/>
+          <p:cNvSpPr/>
+          <p:nvPr/>
+        </p:nvSpPr>
+        <p:spPr>
+          <a:xfrm>
+            <a:off x="868680" y="3822191"/>
+            <a:ext cx="10378440" cy="804672"/>
+          </a:xfrm>
+          <a:prstGeom prst="roundRect">
+            <a:avLst/>
+          </a:prstGeom>
+          <a:solidFill>
+            <a:srgbClr val="FFFFFF"/>
+          </a:solidFill>
+          <a:ln w="11430">
+            <a:solidFill>
+              <a:srgbClr val="CBD5E1"/>
+            </a:solidFill>
+          </a:ln>
+        </p:spPr>
+        <p:style>
+          <a:lnRef idx="1">
+            <a:schemeClr val="accent1"/>
+          </a:lnRef>
+          <a:fillRef idx="3">
+            <a:schemeClr val="accent1"/>
+          </a:fillRef>
+          <a:effectRef idx="2">
+            <a:schemeClr val="accent1"/>
+          </a:effectRef>
+          <a:fontRef idx="minor">
+            <a:schemeClr val="lt1"/>
+          </a:fontRef>
+        </p:style>
+        <p:txBody>
+          <a:bodyPr rtlCol="0" anchor="ctr"/>
+          <a:lstStyle/>
+          <a:p>
+            <a:pPr algn="ctr"/>
+          </a:p>
+        </p:txBody>
+      </p:sp>
+      <p:sp>
+        <p:nvSpPr>
+          <p:cNvPr id="17" name="Oval 16"/>
+          <p:cNvSpPr/>
+          <p:nvPr/>
+        </p:nvSpPr>
+        <p:spPr>
+          <a:xfrm>
+            <a:off x="1078992" y="3977639"/>
+            <a:ext cx="475488" cy="475488"/>
+          </a:xfrm>
+          <a:prstGeom prst="ellipse">
+            <a:avLst/>
+          </a:prstGeom>
+          <a:solidFill>
+            <a:srgbClr val="BE123C"/>
+          </a:solidFill>
+          <a:ln>
+            <a:noFill/>
+          </a:ln>
+        </p:spPr>
+        <p:style>
+          <a:lnRef idx="1">
+            <a:schemeClr val="accent1"/>
+          </a:lnRef>
+          <a:fillRef idx="3">
+            <a:schemeClr val="accent1"/>
+          </a:fillRef>
+          <a:effectRef idx="2">
+            <a:schemeClr val="accent1"/>
+          </a:effectRef>
+          <a:fontRef idx="minor">
+            <a:schemeClr val="lt1"/>
+          </a:fontRef>
+        </p:style>
+        <p:txBody>
+          <a:bodyPr rtlCol="0" anchor="ctr" wrap="square" lIns="101600" rIns="101600" tIns="38100" bIns="38100"/>
+          <a:lstStyle/>
+          <a:p>
+            <a:pPr algn="ctr"/>
+            <a:r>
+              <a:rPr sz="1500" b="1">
+                <a:solidFill>
+                  <a:srgbClr val="FFFFFF"/>
+                </a:solidFill>
+                <a:latin typeface="Arial"/>
+              </a:rPr>
+              <a:t>?</a:t>
+            </a:r>
+          </a:p>
+        </p:txBody>
+      </p:sp>
+      <p:sp>
+        <p:nvSpPr>
+          <p:cNvPr id="18" name="TextBox 17"/>
+          <p:cNvSpPr txBox="1"/>
+          <p:nvPr/>
+        </p:nvSpPr>
+        <p:spPr>
+          <a:xfrm>
+            <a:off x="1719072" y="3968496"/>
+            <a:ext cx="5623560" cy="384048"/>
+          </a:xfrm>
+          <a:prstGeom prst="rect">
+            <a:avLst/>
+          </a:prstGeom>
+          <a:noFill/>
+        </p:spPr>
+        <p:txBody>
+          <a:bodyPr wrap="square" lIns="0" rIns="0" tIns="0" bIns="0">
+            <a:spAutoFit/>
+          </a:bodyPr>
+          <a:lstStyle/>
+          <a:p>
+            <a:r>
+              <a:rPr sz="1600" b="1">
                 <a:solidFill>
                   <a:srgbClr val="111827"/>
                 </a:solidFill>
@@ -7673,16 +9364,59 @@
       </p:sp>
       <p:sp>
         <p:nvSpPr>
-          <p:cNvPr id="13" name="Rectangle 12"/>
-          <p:cNvSpPr/>
-          <p:nvPr/>
-        </p:nvSpPr>
-        <p:spPr>
-          <a:xfrm>
-            <a:off x="868680" y="3822191"/>
-            <a:ext cx="10378440" cy="713232"/>
-          </a:xfrm>
-          <a:prstGeom prst="rect">
+          <p:cNvPr id="19" name="Rectangle 18"/>
+          <p:cNvSpPr/>
+          <p:nvPr/>
+        </p:nvSpPr>
+        <p:spPr>
+          <a:xfrm>
+            <a:off x="7635240" y="4343400"/>
+            <a:ext cx="3246120" cy="36576"/>
+          </a:xfrm>
+          <a:prstGeom prst="rect">
+            <a:avLst/>
+          </a:prstGeom>
+          <a:solidFill>
+            <a:srgbClr val="CBD5E1"/>
+          </a:solidFill>
+          <a:ln>
+            <a:noFill/>
+          </a:ln>
+        </p:spPr>
+        <p:style>
+          <a:lnRef idx="1">
+            <a:schemeClr val="accent1"/>
+          </a:lnRef>
+          <a:fillRef idx="3">
+            <a:schemeClr val="accent1"/>
+          </a:fillRef>
+          <a:effectRef idx="2">
+            <a:schemeClr val="accent1"/>
+          </a:effectRef>
+          <a:fontRef idx="minor">
+            <a:schemeClr val="lt1"/>
+          </a:fontRef>
+        </p:style>
+        <p:txBody>
+          <a:bodyPr rtlCol="0" anchor="ctr"/>
+          <a:lstStyle/>
+          <a:p>
+            <a:pPr algn="ctr"/>
+          </a:p>
+        </p:txBody>
+      </p:sp>
+      <p:sp>
+        <p:nvSpPr>
+          <p:cNvPr id="20" name="Rounded Rectangle 19"/>
+          <p:cNvSpPr/>
+          <p:nvPr/>
+        </p:nvSpPr>
+        <p:spPr>
+          <a:xfrm>
+            <a:off x="868680" y="4901183"/>
+            <a:ext cx="10378440" cy="804672"/>
+          </a:xfrm>
+          <a:prstGeom prst="roundRect">
             <a:avLst/>
           </a:prstGeom>
           <a:solidFill>
@@ -7718,16 +9452,16 @@
       </p:sp>
       <p:sp>
         <p:nvSpPr>
-          <p:cNvPr id="14" name="Rectangle 13"/>
-          <p:cNvSpPr/>
-          <p:nvPr/>
-        </p:nvSpPr>
-        <p:spPr>
-          <a:xfrm>
-            <a:off x="868680" y="3822191"/>
-            <a:ext cx="530352" cy="713232"/>
-          </a:xfrm>
-          <a:prstGeom prst="rect">
+          <p:cNvPr id="21" name="Oval 20"/>
+          <p:cNvSpPr/>
+          <p:nvPr/>
+        </p:nvSpPr>
+        <p:spPr>
+          <a:xfrm>
+            <a:off x="1078992" y="5056631"/>
+            <a:ext cx="475488" cy="475488"/>
+          </a:xfrm>
+          <a:prstGeom prst="ellipse">
             <a:avLst/>
           </a:prstGeom>
           <a:solidFill>
@@ -7763,21 +9497,21 @@
                 </a:solidFill>
                 <a:latin typeface="Arial"/>
               </a:rPr>
-              <a:t>2</a:t>
-            </a:r>
-          </a:p>
-        </p:txBody>
-      </p:sp>
-      <p:sp>
-        <p:nvSpPr>
-          <p:cNvPr id="15" name="TextBox 14"/>
+              <a:t>?</a:t>
+            </a:r>
+          </a:p>
+        </p:txBody>
+      </p:sp>
+      <p:sp>
+        <p:nvSpPr>
+          <p:cNvPr id="22" name="TextBox 21"/>
           <p:cNvSpPr txBox="1"/>
           <p:nvPr/>
         </p:nvSpPr>
         <p:spPr>
           <a:xfrm>
-            <a:off x="1572768" y="3968496"/>
-            <a:ext cx="9372600" cy="384048"/>
+            <a:off x="1719072" y="5047488"/>
+            <a:ext cx="5623560" cy="384048"/>
           </a:xfrm>
           <a:prstGeom prst="rect">
             <a:avLst/>
@@ -7791,7 +9525,7 @@
           <a:lstStyle/>
           <a:p>
             <a:r>
-              <a:rPr sz="1500" b="0">
+              <a:rPr sz="1600" b="1">
                 <a:solidFill>
                   <a:srgbClr val="111827"/>
                 </a:solidFill>
@@ -7804,65 +9538,20 @@
       </p:sp>
       <p:sp>
         <p:nvSpPr>
-          <p:cNvPr id="16" name="Rectangle 15"/>
-          <p:cNvSpPr/>
-          <p:nvPr/>
-        </p:nvSpPr>
-        <p:spPr>
-          <a:xfrm>
-            <a:off x="868680" y="4672584"/>
-            <a:ext cx="10378440" cy="713232"/>
-          </a:xfrm>
-          <a:prstGeom prst="rect">
-            <a:avLst/>
-          </a:prstGeom>
-          <a:solidFill>
-            <a:srgbClr val="FFFFFF"/>
-          </a:solidFill>
-          <a:ln w="11430">
-            <a:solidFill>
-              <a:srgbClr val="CBD5E1"/>
-            </a:solidFill>
-          </a:ln>
-        </p:spPr>
-        <p:style>
-          <a:lnRef idx="1">
-            <a:schemeClr val="accent1"/>
-          </a:lnRef>
-          <a:fillRef idx="3">
-            <a:schemeClr val="accent1"/>
-          </a:fillRef>
-          <a:effectRef idx="2">
-            <a:schemeClr val="accent1"/>
-          </a:effectRef>
-          <a:fontRef idx="minor">
-            <a:schemeClr val="lt1"/>
-          </a:fontRef>
-        </p:style>
-        <p:txBody>
-          <a:bodyPr rtlCol="0" anchor="ctr"/>
-          <a:lstStyle/>
-          <a:p>
-            <a:pPr algn="ctr"/>
-          </a:p>
-        </p:txBody>
-      </p:sp>
-      <p:sp>
-        <p:nvSpPr>
-          <p:cNvPr id="17" name="Rectangle 16"/>
-          <p:cNvSpPr/>
-          <p:nvPr/>
-        </p:nvSpPr>
-        <p:spPr>
-          <a:xfrm>
-            <a:off x="868680" y="4672584"/>
-            <a:ext cx="530352" cy="713232"/>
-          </a:xfrm>
-          <a:prstGeom prst="rect">
-            <a:avLst/>
-          </a:prstGeom>
-          <a:solidFill>
-            <a:srgbClr val="BE123C"/>
+          <p:cNvPr id="23" name="Rectangle 22"/>
+          <p:cNvSpPr/>
+          <p:nvPr/>
+        </p:nvSpPr>
+        <p:spPr>
+          <a:xfrm>
+            <a:off x="7635240" y="5422392"/>
+            <a:ext cx="3246120" cy="36576"/>
+          </a:xfrm>
+          <a:prstGeom prst="rect">
+            <a:avLst/>
+          </a:prstGeom>
+          <a:solidFill>
+            <a:srgbClr val="CBD5E1"/>
           </a:solidFill>
           <a:ln>
             <a:noFill/>
@@ -7883,197 +9572,58 @@
           </a:fontRef>
         </p:style>
         <p:txBody>
-          <a:bodyPr rtlCol="0" anchor="ctr" wrap="square" lIns="101600" rIns="101600" tIns="38100" bIns="38100"/>
-          <a:lstStyle/>
-          <a:p>
-            <a:pPr algn="ctr"/>
-            <a:r>
-              <a:rPr sz="1500" b="1">
+          <a:bodyPr rtlCol="0" anchor="ctr"/>
+          <a:lstStyle/>
+          <a:p>
+            <a:pPr algn="ctr"/>
+          </a:p>
+        </p:txBody>
+      </p:sp>
+      <p:sp>
+        <p:nvSpPr>
+          <p:cNvPr id="24" name="TextBox 23"/>
+          <p:cNvSpPr txBox="1"/>
+          <p:nvPr/>
+        </p:nvSpPr>
+        <p:spPr>
+          <a:xfrm>
+            <a:off x="896112" y="5989320"/>
+            <a:ext cx="10287000" cy="274320"/>
+          </a:xfrm>
+          <a:prstGeom prst="rect">
+            <a:avLst/>
+          </a:prstGeom>
+          <a:noFill/>
+        </p:spPr>
+        <p:txBody>
+          <a:bodyPr wrap="square" lIns="0" rIns="0" tIns="0" bIns="0">
+            <a:spAutoFit/>
+          </a:bodyPr>
+          <a:lstStyle/>
+          <a:p>
+            <a:pPr algn="ctr"/>
+            <a:r>
+              <a:rPr sz="1200" b="0">
                 <a:solidFill>
-                  <a:srgbClr val="FFFFFF"/>
+                  <a:srgbClr val="475569"/>
                 </a:solidFill>
                 <a:latin typeface="Arial"/>
               </a:rPr>
-              <a:t>3</a:t>
-            </a:r>
-          </a:p>
-        </p:txBody>
-      </p:sp>
-      <p:sp>
-        <p:nvSpPr>
-          <p:cNvPr id="18" name="TextBox 17"/>
+              <a:t>Use the source idea, not guessing.</a:t>
+            </a:r>
+          </a:p>
+        </p:txBody>
+      </p:sp>
+      <p:sp>
+        <p:nvSpPr>
+          <p:cNvPr id="25" name="TextBox 24"/>
           <p:cNvSpPr txBox="1"/>
           <p:nvPr/>
         </p:nvSpPr>
         <p:spPr>
           <a:xfrm>
-            <a:off x="1572768" y="4818888"/>
-            <a:ext cx="9372600" cy="384048"/>
-          </a:xfrm>
-          <a:prstGeom prst="rect">
-            <a:avLst/>
-          </a:prstGeom>
-          <a:noFill/>
-        </p:spPr>
-        <p:txBody>
-          <a:bodyPr wrap="square" lIns="0" rIns="0" tIns="0" bIns="0">
-            <a:spAutoFit/>
-          </a:bodyPr>
-          <a:lstStyle/>
-          <a:p>
-            <a:r>
-              <a:rPr sz="1500" b="0">
-                <a:solidFill>
-                  <a:srgbClr val="111827"/>
-                </a:solidFill>
-                <a:latin typeface="Arial"/>
-              </a:rPr>
-              <a:t>Agree on one answer before writing.</a:t>
-            </a:r>
-          </a:p>
-        </p:txBody>
-      </p:sp>
-      <p:sp>
-        <p:nvSpPr>
-          <p:cNvPr id="19" name="Rectangle 18"/>
-          <p:cNvSpPr/>
-          <p:nvPr/>
-        </p:nvSpPr>
-        <p:spPr>
-          <a:xfrm>
-            <a:off x="868680" y="5522976"/>
-            <a:ext cx="10378440" cy="713232"/>
-          </a:xfrm>
-          <a:prstGeom prst="rect">
-            <a:avLst/>
-          </a:prstGeom>
-          <a:solidFill>
-            <a:srgbClr val="FFFFFF"/>
-          </a:solidFill>
-          <a:ln w="11430">
-            <a:solidFill>
-              <a:srgbClr val="CBD5E1"/>
-            </a:solidFill>
-          </a:ln>
-        </p:spPr>
-        <p:style>
-          <a:lnRef idx="1">
-            <a:schemeClr val="accent1"/>
-          </a:lnRef>
-          <a:fillRef idx="3">
-            <a:schemeClr val="accent1"/>
-          </a:fillRef>
-          <a:effectRef idx="2">
-            <a:schemeClr val="accent1"/>
-          </a:effectRef>
-          <a:fontRef idx="minor">
-            <a:schemeClr val="lt1"/>
-          </a:fontRef>
-        </p:style>
-        <p:txBody>
-          <a:bodyPr rtlCol="0" anchor="ctr"/>
-          <a:lstStyle/>
-          <a:p>
-            <a:pPr algn="ctr"/>
-          </a:p>
-        </p:txBody>
-      </p:sp>
-      <p:sp>
-        <p:nvSpPr>
-          <p:cNvPr id="20" name="Rectangle 19"/>
-          <p:cNvSpPr/>
-          <p:nvPr/>
-        </p:nvSpPr>
-        <p:spPr>
-          <a:xfrm>
-            <a:off x="868680" y="5522976"/>
-            <a:ext cx="530352" cy="713232"/>
-          </a:xfrm>
-          <a:prstGeom prst="rect">
-            <a:avLst/>
-          </a:prstGeom>
-          <a:solidFill>
-            <a:srgbClr val="BE123C"/>
-          </a:solidFill>
-          <a:ln>
-            <a:noFill/>
-          </a:ln>
-        </p:spPr>
-        <p:style>
-          <a:lnRef idx="1">
-            <a:schemeClr val="accent1"/>
-          </a:lnRef>
-          <a:fillRef idx="3">
-            <a:schemeClr val="accent1"/>
-          </a:fillRef>
-          <a:effectRef idx="2">
-            <a:schemeClr val="accent1"/>
-          </a:effectRef>
-          <a:fontRef idx="minor">
-            <a:schemeClr val="lt1"/>
-          </a:fontRef>
-        </p:style>
-        <p:txBody>
-          <a:bodyPr rtlCol="0" anchor="ctr" wrap="square" lIns="101600" rIns="101600" tIns="38100" bIns="38100"/>
-          <a:lstStyle/>
-          <a:p>
-            <a:pPr algn="ctr"/>
-            <a:r>
-              <a:rPr sz="1500" b="1">
-                <a:solidFill>
-                  <a:srgbClr val="FFFFFF"/>
-                </a:solidFill>
-                <a:latin typeface="Arial"/>
-              </a:rPr>
-              <a:t>4</a:t>
-            </a:r>
-          </a:p>
-        </p:txBody>
-      </p:sp>
-      <p:sp>
-        <p:nvSpPr>
-          <p:cNvPr id="21" name="TextBox 20"/>
-          <p:cNvSpPr txBox="1"/>
-          <p:nvPr/>
-        </p:nvSpPr>
-        <p:spPr>
-          <a:xfrm>
-            <a:off x="1572768" y="5669280"/>
-            <a:ext cx="9372600" cy="384048"/>
-          </a:xfrm>
-          <a:prstGeom prst="rect">
-            <a:avLst/>
-          </a:prstGeom>
-          <a:noFill/>
-        </p:spPr>
-        <p:txBody>
-          <a:bodyPr wrap="square" lIns="0" rIns="0" tIns="0" bIns="0">
-            <a:spAutoFit/>
-          </a:bodyPr>
-          <a:lstStyle/>
-          <a:p>
-            <a:r>
-              <a:rPr sz="1500" b="0">
-                <a:solidFill>
-                  <a:srgbClr val="111827"/>
-                </a:solidFill>
-                <a:latin typeface="Arial"/>
-              </a:rPr>
-              <a:t>Write one clear response.</a:t>
-            </a:r>
-          </a:p>
-        </p:txBody>
-      </p:sp>
-      <p:sp>
-        <p:nvSpPr>
-          <p:cNvPr id="22" name="TextBox 21"/>
-          <p:cNvSpPr txBox="1"/>
-          <p:nvPr/>
-        </p:nvSpPr>
-        <p:spPr>
-          <a:xfrm>
-            <a:off x="685800" y="6419088"/>
-            <a:ext cx="10835640" cy="228600"/>
+            <a:off x="713232" y="6355080"/>
+            <a:ext cx="10835640" cy="219456"/>
           </a:xfrm>
           <a:prstGeom prst="rect">
             <a:avLst/>
@@ -8094,7 +9644,7 @@
                 </a:solidFill>
                 <a:latin typeface="Arial"/>
               </a:rPr>
-              <a:t>Listen • Talk • Try • Explain</a:t>
+              <a:t>P7 class flow: listen • talk • try • explain</a:t>
             </a:r>
           </a:p>
         </p:txBody>
@@ -8299,7 +9849,93 @@
       </p:sp>
       <p:sp>
         <p:nvSpPr>
-          <p:cNvPr id="6" name="TextBox 5"/>
+          <p:cNvPr id="6" name="Rectangle 5"/>
+          <p:cNvSpPr/>
+          <p:nvPr/>
+        </p:nvSpPr>
+        <p:spPr>
+          <a:xfrm>
+            <a:off x="164592" y="6565392"/>
+            <a:ext cx="12027103" cy="73152"/>
+          </a:xfrm>
+          <a:prstGeom prst="rect">
+            <a:avLst/>
+          </a:prstGeom>
+          <a:solidFill>
+            <a:srgbClr val="FCD116"/>
+          </a:solidFill>
+          <a:ln>
+            <a:noFill/>
+          </a:ln>
+        </p:spPr>
+        <p:style>
+          <a:lnRef idx="1">
+            <a:schemeClr val="accent1"/>
+          </a:lnRef>
+          <a:fillRef idx="3">
+            <a:schemeClr val="accent1"/>
+          </a:fillRef>
+          <a:effectRef idx="2">
+            <a:schemeClr val="accent1"/>
+          </a:effectRef>
+          <a:fontRef idx="minor">
+            <a:schemeClr val="lt1"/>
+          </a:fontRef>
+        </p:style>
+        <p:txBody>
+          <a:bodyPr rtlCol="0" anchor="ctr"/>
+          <a:lstStyle/>
+          <a:p>
+            <a:pPr algn="ctr"/>
+          </a:p>
+        </p:txBody>
+      </p:sp>
+      <p:sp>
+        <p:nvSpPr>
+          <p:cNvPr id="7" name="Rectangle 6"/>
+          <p:cNvSpPr/>
+          <p:nvPr/>
+        </p:nvSpPr>
+        <p:spPr>
+          <a:xfrm>
+            <a:off x="164592" y="6638544"/>
+            <a:ext cx="12027103" cy="45720"/>
+          </a:xfrm>
+          <a:prstGeom prst="rect">
+            <a:avLst/>
+          </a:prstGeom>
+          <a:solidFill>
+            <a:srgbClr val="D90000"/>
+          </a:solidFill>
+          <a:ln>
+            <a:noFill/>
+          </a:ln>
+        </p:spPr>
+        <p:style>
+          <a:lnRef idx="1">
+            <a:schemeClr val="accent1"/>
+          </a:lnRef>
+          <a:fillRef idx="3">
+            <a:schemeClr val="accent1"/>
+          </a:fillRef>
+          <a:effectRef idx="2">
+            <a:schemeClr val="accent1"/>
+          </a:effectRef>
+          <a:fontRef idx="minor">
+            <a:schemeClr val="lt1"/>
+          </a:fontRef>
+        </p:style>
+        <p:txBody>
+          <a:bodyPr rtlCol="0" anchor="ctr"/>
+          <a:lstStyle/>
+          <a:p>
+            <a:pPr algn="ctr"/>
+          </a:p>
+        </p:txBody>
+      </p:sp>
+      <p:sp>
+        <p:nvSpPr>
+          <p:cNvPr id="8" name="TextBox 7"/>
           <p:cNvSpPr txBox="1"/>
           <p:nvPr/>
         </p:nvSpPr>
@@ -8333,7 +9969,7 @@
       </p:sp>
       <p:sp>
         <p:nvSpPr>
-          <p:cNvPr id="7" name="TextBox 6"/>
+          <p:cNvPr id="9" name="TextBox 8"/>
           <p:cNvSpPr txBox="1"/>
           <p:nvPr/>
         </p:nvSpPr>
@@ -8368,14 +10004,14 @@
       </p:sp>
       <p:sp>
         <p:nvSpPr>
-          <p:cNvPr id="8" name="TextBox 7"/>
+          <p:cNvPr id="10" name="TextBox 9"/>
           <p:cNvSpPr txBox="1"/>
           <p:nvPr/>
         </p:nvSpPr>
         <p:spPr>
           <a:xfrm>
-            <a:off x="594360" y="1042415"/>
-            <a:ext cx="11109960" cy="566928"/>
+            <a:off x="594360" y="1005840"/>
+            <a:ext cx="11064240" cy="512064"/>
           </a:xfrm>
           <a:prstGeom prst="rect">
             <a:avLst/>
@@ -8402,16 +10038,16 @@
       </p:sp>
       <p:sp>
         <p:nvSpPr>
-          <p:cNvPr id="9" name="Rectangle 8"/>
-          <p:cNvSpPr/>
-          <p:nvPr/>
-        </p:nvSpPr>
-        <p:spPr>
-          <a:xfrm>
-            <a:off x="685800" y="1874519"/>
-            <a:ext cx="10835640" cy="804672"/>
-          </a:xfrm>
-          <a:prstGeom prst="rect">
+          <p:cNvPr id="11" name="Rounded Rectangle 10"/>
+          <p:cNvSpPr/>
+          <p:nvPr/>
+        </p:nvSpPr>
+        <p:spPr>
+          <a:xfrm>
+            <a:off x="777240" y="1783080"/>
+            <a:ext cx="3063240" cy="4343400"/>
+          </a:xfrm>
+          <a:prstGeom prst="roundRect">
             <a:avLst/>
           </a:prstGeom>
           <a:solidFill>
@@ -8438,34 +10074,392 @@
           </a:fontRef>
         </p:style>
         <p:txBody>
-          <a:bodyPr rtlCol="0" anchor="ctr" wrap="square" lIns="101600" rIns="101600" tIns="38100" bIns="38100"/>
-          <a:lstStyle/>
-          <a:p>
-            <a:pPr algn="ctr"/>
-            <a:r>
-              <a:rPr sz="1900" b="1">
+          <a:bodyPr rtlCol="0" anchor="ctr"/>
+          <a:lstStyle/>
+          <a:p>
+            <a:pPr algn="ctr"/>
+          </a:p>
+        </p:txBody>
+      </p:sp>
+      <p:sp>
+        <p:nvSpPr>
+          <p:cNvPr id="12" name="Rectangle 11"/>
+          <p:cNvSpPr/>
+          <p:nvPr/>
+        </p:nvSpPr>
+        <p:spPr>
+          <a:xfrm>
+            <a:off x="1516075" y="2583180"/>
+            <a:ext cx="699515" cy="799185"/>
+          </a:xfrm>
+          <a:prstGeom prst="rect">
+            <a:avLst/>
+          </a:prstGeom>
+          <a:solidFill>
+            <a:srgbClr val="FFFFFF"/>
+          </a:solidFill>
+          <a:ln w="10160">
+            <a:solidFill>
+              <a:srgbClr val="1D4ED8"/>
+            </a:solidFill>
+          </a:ln>
+        </p:spPr>
+        <p:style>
+          <a:lnRef idx="1">
+            <a:schemeClr val="accent1"/>
+          </a:lnRef>
+          <a:fillRef idx="3">
+            <a:schemeClr val="accent1"/>
+          </a:fillRef>
+          <a:effectRef idx="2">
+            <a:schemeClr val="accent1"/>
+          </a:effectRef>
+          <a:fontRef idx="minor">
+            <a:schemeClr val="lt1"/>
+          </a:fontRef>
+        </p:style>
+        <p:txBody>
+          <a:bodyPr rtlCol="0" anchor="ctr"/>
+          <a:lstStyle/>
+          <a:p>
+            <a:pPr algn="ctr"/>
+          </a:p>
+        </p:txBody>
+      </p:sp>
+      <p:sp>
+        <p:nvSpPr>
+          <p:cNvPr id="13" name="Rectangle 12"/>
+          <p:cNvSpPr/>
+          <p:nvPr/>
+        </p:nvSpPr>
+        <p:spPr>
+          <a:xfrm>
+            <a:off x="2215591" y="2583180"/>
+            <a:ext cx="699515" cy="799185"/>
+          </a:xfrm>
+          <a:prstGeom prst="rect">
+            <a:avLst/>
+          </a:prstGeom>
+          <a:solidFill>
+            <a:srgbClr val="FFFFFF"/>
+          </a:solidFill>
+          <a:ln w="10160">
+            <a:solidFill>
+              <a:srgbClr val="1D4ED8"/>
+            </a:solidFill>
+          </a:ln>
+        </p:spPr>
+        <p:style>
+          <a:lnRef idx="1">
+            <a:schemeClr val="accent1"/>
+          </a:lnRef>
+          <a:fillRef idx="3">
+            <a:schemeClr val="accent1"/>
+          </a:fillRef>
+          <a:effectRef idx="2">
+            <a:schemeClr val="accent1"/>
+          </a:effectRef>
+          <a:fontRef idx="minor">
+            <a:schemeClr val="lt1"/>
+          </a:fontRef>
+        </p:style>
+        <p:txBody>
+          <a:bodyPr rtlCol="0" anchor="ctr"/>
+          <a:lstStyle/>
+          <a:p>
+            <a:pPr algn="ctr"/>
+          </a:p>
+        </p:txBody>
+      </p:sp>
+      <p:sp>
+        <p:nvSpPr>
+          <p:cNvPr id="14" name="Rectangle 13"/>
+          <p:cNvSpPr/>
+          <p:nvPr/>
+        </p:nvSpPr>
+        <p:spPr>
+          <a:xfrm>
+            <a:off x="1795881" y="2496312"/>
+            <a:ext cx="862736" cy="104241"/>
+          </a:xfrm>
+          <a:prstGeom prst="rect">
+            <a:avLst/>
+          </a:prstGeom>
+          <a:solidFill>
+            <a:srgbClr val="D90000"/>
+          </a:solidFill>
+          <a:ln>
+            <a:noFill/>
+          </a:ln>
+        </p:spPr>
+        <p:style>
+          <a:lnRef idx="1">
+            <a:schemeClr val="accent1"/>
+          </a:lnRef>
+          <a:fillRef idx="3">
+            <a:schemeClr val="accent1"/>
+          </a:fillRef>
+          <a:effectRef idx="2">
+            <a:schemeClr val="accent1"/>
+          </a:effectRef>
+          <a:fontRef idx="minor">
+            <a:schemeClr val="lt1"/>
+          </a:fontRef>
+        </p:style>
+        <p:txBody>
+          <a:bodyPr rtlCol="0" anchor="ctr"/>
+          <a:lstStyle/>
+          <a:p>
+            <a:pPr algn="ctr"/>
+          </a:p>
+        </p:txBody>
+      </p:sp>
+      <p:sp>
+        <p:nvSpPr>
+          <p:cNvPr id="15" name="Rectangle 14"/>
+          <p:cNvSpPr/>
+          <p:nvPr/>
+        </p:nvSpPr>
+        <p:spPr>
+          <a:xfrm>
+            <a:off x="1655978" y="2809036"/>
+            <a:ext cx="1119225" cy="43434"/>
+          </a:xfrm>
+          <a:prstGeom prst="rect">
+            <a:avLst/>
+          </a:prstGeom>
+          <a:solidFill>
+            <a:srgbClr val="CBD5E1"/>
+          </a:solidFill>
+          <a:ln>
+            <a:noFill/>
+          </a:ln>
+        </p:spPr>
+        <p:style>
+          <a:lnRef idx="1">
+            <a:schemeClr val="accent1"/>
+          </a:lnRef>
+          <a:fillRef idx="3">
+            <a:schemeClr val="accent1"/>
+          </a:fillRef>
+          <a:effectRef idx="2">
+            <a:schemeClr val="accent1"/>
+          </a:effectRef>
+          <a:fontRef idx="minor">
+            <a:schemeClr val="lt1"/>
+          </a:fontRef>
+        </p:style>
+        <p:txBody>
+          <a:bodyPr rtlCol="0" anchor="ctr"/>
+          <a:lstStyle/>
+          <a:p>
+            <a:pPr algn="ctr"/>
+          </a:p>
+        </p:txBody>
+      </p:sp>
+      <p:sp>
+        <p:nvSpPr>
+          <p:cNvPr id="16" name="Rectangle 15"/>
+          <p:cNvSpPr/>
+          <p:nvPr/>
+        </p:nvSpPr>
+        <p:spPr>
+          <a:xfrm>
+            <a:off x="1655978" y="3017520"/>
+            <a:ext cx="1119225" cy="43434"/>
+          </a:xfrm>
+          <a:prstGeom prst="rect">
+            <a:avLst/>
+          </a:prstGeom>
+          <a:solidFill>
+            <a:srgbClr val="CBD5E1"/>
+          </a:solidFill>
+          <a:ln>
+            <a:noFill/>
+          </a:ln>
+        </p:spPr>
+        <p:style>
+          <a:lnRef idx="1">
+            <a:schemeClr val="accent1"/>
+          </a:lnRef>
+          <a:fillRef idx="3">
+            <a:schemeClr val="accent1"/>
+          </a:fillRef>
+          <a:effectRef idx="2">
+            <a:schemeClr val="accent1"/>
+          </a:effectRef>
+          <a:fontRef idx="minor">
+            <a:schemeClr val="lt1"/>
+          </a:fontRef>
+        </p:style>
+        <p:txBody>
+          <a:bodyPr rtlCol="0" anchor="ctr"/>
+          <a:lstStyle/>
+          <a:p>
+            <a:pPr algn="ctr"/>
+          </a:p>
+        </p:txBody>
+      </p:sp>
+      <p:sp>
+        <p:nvSpPr>
+          <p:cNvPr id="17" name="Rectangle 16"/>
+          <p:cNvSpPr/>
+          <p:nvPr/>
+        </p:nvSpPr>
+        <p:spPr>
+          <a:xfrm>
+            <a:off x="1655978" y="3226003"/>
+            <a:ext cx="1119225" cy="43434"/>
+          </a:xfrm>
+          <a:prstGeom prst="rect">
+            <a:avLst/>
+          </a:prstGeom>
+          <a:solidFill>
+            <a:srgbClr val="CBD5E1"/>
+          </a:solidFill>
+          <a:ln>
+            <a:noFill/>
+          </a:ln>
+        </p:spPr>
+        <p:style>
+          <a:lnRef idx="1">
+            <a:schemeClr val="accent1"/>
+          </a:lnRef>
+          <a:fillRef idx="3">
+            <a:schemeClr val="accent1"/>
+          </a:fillRef>
+          <a:effectRef idx="2">
+            <a:schemeClr val="accent1"/>
+          </a:effectRef>
+          <a:fontRef idx="minor">
+            <a:schemeClr val="lt1"/>
+          </a:fontRef>
+        </p:style>
+        <p:txBody>
+          <a:bodyPr rtlCol="0" anchor="ctr"/>
+          <a:lstStyle/>
+          <a:p>
+            <a:pPr algn="ctr"/>
+          </a:p>
+        </p:txBody>
+      </p:sp>
+      <p:sp>
+        <p:nvSpPr>
+          <p:cNvPr id="18" name="TextBox 17"/>
+          <p:cNvSpPr txBox="1"/>
+          <p:nvPr/>
+        </p:nvSpPr>
+        <p:spPr>
+          <a:xfrm>
+            <a:off x="1143000" y="3630168"/>
+            <a:ext cx="2331720" cy="228600"/>
+          </a:xfrm>
+          <a:prstGeom prst="rect">
+            <a:avLst/>
+          </a:prstGeom>
+          <a:noFill/>
+        </p:spPr>
+        <p:txBody>
+          <a:bodyPr wrap="square" lIns="0" rIns="0" tIns="0" bIns="0">
+            <a:spAutoFit/>
+          </a:bodyPr>
+          <a:lstStyle/>
+          <a:p>
+            <a:pPr algn="ctr"/>
+            <a:r>
+              <a:rPr sz="1000" b="0">
+                <a:solidFill>
+                  <a:srgbClr val="475569"/>
+                </a:solidFill>
+                <a:latin typeface="Arial"/>
+              </a:rPr>
+              <a:t>English</a:t>
+            </a:r>
+          </a:p>
+        </p:txBody>
+      </p:sp>
+      <p:sp>
+        <p:nvSpPr>
+          <p:cNvPr id="19" name="TextBox 18"/>
+          <p:cNvSpPr txBox="1"/>
+          <p:nvPr/>
+        </p:nvSpPr>
+        <p:spPr>
+          <a:xfrm>
+            <a:off x="960120" y="4315968"/>
+            <a:ext cx="2697480" cy="310896"/>
+          </a:xfrm>
+          <a:prstGeom prst="rect">
+            <a:avLst/>
+          </a:prstGeom>
+          <a:noFill/>
+        </p:spPr>
+        <p:txBody>
+          <a:bodyPr wrap="square" lIns="0" rIns="0" tIns="0" bIns="0">
+            <a:spAutoFit/>
+          </a:bodyPr>
+          <a:lstStyle/>
+          <a:p>
+            <a:pPr algn="ctr"/>
+            <a:r>
+              <a:rPr sz="1300" b="1">
+                <a:solidFill>
+                  <a:srgbClr val="1B7F3A"/>
+                </a:solidFill>
+                <a:latin typeface="Arial"/>
+              </a:rPr>
+              <a:t>GROUP CHALLENGE</a:t>
+            </a:r>
+          </a:p>
+        </p:txBody>
+      </p:sp>
+      <p:sp>
+        <p:nvSpPr>
+          <p:cNvPr id="20" name="TextBox 19"/>
+          <p:cNvSpPr txBox="1"/>
+          <p:nvPr/>
+        </p:nvSpPr>
+        <p:spPr>
+          <a:xfrm>
+            <a:off x="1005840" y="4754880"/>
+            <a:ext cx="2606040" cy="640080"/>
+          </a:xfrm>
+          <a:prstGeom prst="rect">
+            <a:avLst/>
+          </a:prstGeom>
+          <a:noFill/>
+        </p:spPr>
+        <p:txBody>
+          <a:bodyPr wrap="square" lIns="0" rIns="0" tIns="0" bIns="0">
+            <a:spAutoFit/>
+          </a:bodyPr>
+          <a:lstStyle/>
+          <a:p>
+            <a:pPr algn="ctr"/>
+            <a:r>
+              <a:rPr sz="1500" b="1">
                 <a:solidFill>
                   <a:srgbClr val="111827"/>
                 </a:solidFill>
                 <a:latin typeface="Arial"/>
               </a:rPr>
-              <a:t>Group task:</a:t>
-            </a:r>
-          </a:p>
-        </p:txBody>
-      </p:sp>
-      <p:sp>
-        <p:nvSpPr>
-          <p:cNvPr id="10" name="Rectangle 9"/>
-          <p:cNvSpPr/>
-          <p:nvPr/>
-        </p:nvSpPr>
-        <p:spPr>
-          <a:xfrm>
-            <a:off x="868680" y="2971800"/>
-            <a:ext cx="10378440" cy="713232"/>
-          </a:xfrm>
-          <a:prstGeom prst="rect">
+              <a:t>Produce one answer the class can check.</a:t>
+            </a:r>
+          </a:p>
+        </p:txBody>
+      </p:sp>
+      <p:sp>
+        <p:nvSpPr>
+          <p:cNvPr id="21" name="Rounded Rectangle 20"/>
+          <p:cNvSpPr/>
+          <p:nvPr/>
+        </p:nvSpPr>
+        <p:spPr>
+          <a:xfrm>
+            <a:off x="4343400" y="1828800"/>
+            <a:ext cx="6903720" cy="868680"/>
+          </a:xfrm>
+          <a:prstGeom prst="roundRect">
             <a:avLst/>
           </a:prstGeom>
           <a:solidFill>
@@ -8501,14 +10495,14 @@
       </p:sp>
       <p:sp>
         <p:nvSpPr>
-          <p:cNvPr id="11" name="Rectangle 10"/>
-          <p:cNvSpPr/>
-          <p:nvPr/>
-        </p:nvSpPr>
-        <p:spPr>
-          <a:xfrm>
-            <a:off x="868680" y="2971800"/>
-            <a:ext cx="530352" cy="713232"/>
+          <p:cNvPr id="22" name="Rectangle 21"/>
+          <p:cNvSpPr/>
+          <p:nvPr/>
+        </p:nvSpPr>
+        <p:spPr>
+          <a:xfrm>
+            <a:off x="4343400" y="1828800"/>
+            <a:ext cx="566928" cy="868680"/>
           </a:xfrm>
           <a:prstGeom prst="rect">
             <a:avLst/>
@@ -8535,12 +10529,38 @@
           </a:fontRef>
         </p:style>
         <p:txBody>
-          <a:bodyPr rtlCol="0" anchor="ctr" wrap="square" lIns="101600" rIns="101600" tIns="38100" bIns="38100"/>
-          <a:lstStyle/>
-          <a:p>
-            <a:pPr algn="ctr"/>
-            <a:r>
-              <a:rPr sz="1500" b="1">
+          <a:bodyPr rtlCol="0" anchor="ctr"/>
+          <a:lstStyle/>
+          <a:p>
+            <a:pPr algn="ctr"/>
+          </a:p>
+        </p:txBody>
+      </p:sp>
+      <p:sp>
+        <p:nvSpPr>
+          <p:cNvPr id="23" name="TextBox 22"/>
+          <p:cNvSpPr txBox="1"/>
+          <p:nvPr/>
+        </p:nvSpPr>
+        <p:spPr>
+          <a:xfrm>
+            <a:off x="4343400" y="2144268"/>
+            <a:ext cx="566928" cy="237744"/>
+          </a:xfrm>
+          <a:prstGeom prst="rect">
+            <a:avLst/>
+          </a:prstGeom>
+          <a:noFill/>
+        </p:spPr>
+        <p:txBody>
+          <a:bodyPr wrap="square" lIns="0" rIns="0" tIns="0" bIns="0">
+            <a:spAutoFit/>
+          </a:bodyPr>
+          <a:lstStyle/>
+          <a:p>
+            <a:pPr algn="ctr"/>
+            <a:r>
+              <a:rPr sz="1400" b="1">
                 <a:solidFill>
                   <a:srgbClr val="FFFFFF"/>
                 </a:solidFill>
@@ -8553,14 +10573,14 @@
       </p:sp>
       <p:sp>
         <p:nvSpPr>
-          <p:cNvPr id="12" name="TextBox 11"/>
+          <p:cNvPr id="24" name="TextBox 23"/>
           <p:cNvSpPr txBox="1"/>
           <p:nvPr/>
         </p:nvSpPr>
         <p:spPr>
           <a:xfrm>
-            <a:off x="1572768" y="3118104"/>
-            <a:ext cx="9372600" cy="384048"/>
+            <a:off x="5129784" y="1993392"/>
+            <a:ext cx="5879592" cy="630936"/>
           </a:xfrm>
           <a:prstGeom prst="rect">
             <a:avLst/>
@@ -8574,29 +10594,29 @@
           <a:lstStyle/>
           <a:p>
             <a:r>
-              <a:rPr sz="1500" b="0">
+              <a:rPr sz="1200" b="1">
                 <a:solidFill>
                   <a:srgbClr val="111827"/>
                 </a:solidFill>
                 <a:latin typeface="Arial"/>
               </a:rPr>
-              <a:t>Students sit in a circle and participate in a "Turn and Talk" ses...</a:t>
-            </a:r>
-          </a:p>
-        </p:txBody>
-      </p:sp>
-      <p:sp>
-        <p:nvSpPr>
-          <p:cNvPr id="13" name="Rectangle 12"/>
-          <p:cNvSpPr/>
-          <p:nvPr/>
-        </p:nvSpPr>
-        <p:spPr>
-          <a:xfrm>
-            <a:off x="868680" y="3822191"/>
-            <a:ext cx="10378440" cy="713232"/>
-          </a:xfrm>
-          <a:prstGeom prst="rect">
+              <a:t>Sit in a circle and participate in a "Turn and Talk" session to share</a:t>
+            </a:r>
+          </a:p>
+        </p:txBody>
+      </p:sp>
+      <p:sp>
+        <p:nvSpPr>
+          <p:cNvPr id="25" name="Rounded Rectangle 24"/>
+          <p:cNvSpPr/>
+          <p:nvPr/>
+        </p:nvSpPr>
+        <p:spPr>
+          <a:xfrm>
+            <a:off x="4343400" y="2999232"/>
+            <a:ext cx="6903720" cy="868680"/>
+          </a:xfrm>
+          <a:prstGeom prst="roundRect">
             <a:avLst/>
           </a:prstGeom>
           <a:solidFill>
@@ -8632,14 +10652,14 @@
       </p:sp>
       <p:sp>
         <p:nvSpPr>
-          <p:cNvPr id="14" name="Rectangle 13"/>
-          <p:cNvSpPr/>
-          <p:nvPr/>
-        </p:nvSpPr>
-        <p:spPr>
-          <a:xfrm>
-            <a:off x="868680" y="3822191"/>
-            <a:ext cx="530352" cy="713232"/>
+          <p:cNvPr id="26" name="Rectangle 25"/>
+          <p:cNvSpPr/>
+          <p:nvPr/>
+        </p:nvSpPr>
+        <p:spPr>
+          <a:xfrm>
+            <a:off x="4343400" y="2999232"/>
+            <a:ext cx="566928" cy="868680"/>
           </a:xfrm>
           <a:prstGeom prst="rect">
             <a:avLst/>
@@ -8666,12 +10686,38 @@
           </a:fontRef>
         </p:style>
         <p:txBody>
-          <a:bodyPr rtlCol="0" anchor="ctr" wrap="square" lIns="101600" rIns="101600" tIns="38100" bIns="38100"/>
-          <a:lstStyle/>
-          <a:p>
-            <a:pPr algn="ctr"/>
-            <a:r>
-              <a:rPr sz="1500" b="1">
+          <a:bodyPr rtlCol="0" anchor="ctr"/>
+          <a:lstStyle/>
+          <a:p>
+            <a:pPr algn="ctr"/>
+          </a:p>
+        </p:txBody>
+      </p:sp>
+      <p:sp>
+        <p:nvSpPr>
+          <p:cNvPr id="27" name="TextBox 26"/>
+          <p:cNvSpPr txBox="1"/>
+          <p:nvPr/>
+        </p:nvSpPr>
+        <p:spPr>
+          <a:xfrm>
+            <a:off x="4343400" y="3314700"/>
+            <a:ext cx="566928" cy="237744"/>
+          </a:xfrm>
+          <a:prstGeom prst="rect">
+            <a:avLst/>
+          </a:prstGeom>
+          <a:noFill/>
+        </p:spPr>
+        <p:txBody>
+          <a:bodyPr wrap="square" lIns="0" rIns="0" tIns="0" bIns="0">
+            <a:spAutoFit/>
+          </a:bodyPr>
+          <a:lstStyle/>
+          <a:p>
+            <a:pPr algn="ctr"/>
+            <a:r>
+              <a:rPr sz="1400" b="1">
                 <a:solidFill>
                   <a:srgbClr val="FFFFFF"/>
                 </a:solidFill>
@@ -8684,14 +10730,14 @@
       </p:sp>
       <p:sp>
         <p:nvSpPr>
-          <p:cNvPr id="15" name="TextBox 14"/>
+          <p:cNvPr id="28" name="TextBox 27"/>
           <p:cNvSpPr txBox="1"/>
           <p:nvPr/>
         </p:nvSpPr>
         <p:spPr>
           <a:xfrm>
-            <a:off x="1572768" y="3968496"/>
-            <a:ext cx="9372600" cy="384048"/>
+            <a:off x="5129784" y="3163824"/>
+            <a:ext cx="5879592" cy="630936"/>
           </a:xfrm>
           <a:prstGeom prst="rect">
             <a:avLst/>
@@ -8705,29 +10751,29 @@
           <a:lstStyle/>
           <a:p>
             <a:r>
-              <a:rPr sz="1500" b="0">
+              <a:rPr sz="1200" b="1">
                 <a:solidFill>
                   <a:srgbClr val="111827"/>
                 </a:solidFill>
                 <a:latin typeface="Arial"/>
               </a:rPr>
-              <a:t>Students write the new vocabulary in their exercise books and wor...</a:t>
-            </a:r>
-          </a:p>
-        </p:txBody>
-      </p:sp>
-      <p:sp>
-        <p:nvSpPr>
-          <p:cNvPr id="16" name="Rectangle 15"/>
-          <p:cNvSpPr/>
-          <p:nvPr/>
-        </p:nvSpPr>
-        <p:spPr>
-          <a:xfrm>
-            <a:off x="868680" y="4672584"/>
-            <a:ext cx="10378440" cy="713232"/>
-          </a:xfrm>
-          <a:prstGeom prst="rect">
+              <a:t>Write the new vocabulary in their exercise books and work in pairs to list three</a:t>
+            </a:r>
+          </a:p>
+        </p:txBody>
+      </p:sp>
+      <p:sp>
+        <p:nvSpPr>
+          <p:cNvPr id="29" name="Rounded Rectangle 28"/>
+          <p:cNvSpPr/>
+          <p:nvPr/>
+        </p:nvSpPr>
+        <p:spPr>
+          <a:xfrm>
+            <a:off x="4343400" y="4169664"/>
+            <a:ext cx="6903720" cy="868680"/>
+          </a:xfrm>
+          <a:prstGeom prst="roundRect">
             <a:avLst/>
           </a:prstGeom>
           <a:solidFill>
@@ -8763,14 +10809,14 @@
       </p:sp>
       <p:sp>
         <p:nvSpPr>
-          <p:cNvPr id="17" name="Rectangle 16"/>
-          <p:cNvSpPr/>
-          <p:nvPr/>
-        </p:nvSpPr>
-        <p:spPr>
-          <a:xfrm>
-            <a:off x="868680" y="4672584"/>
-            <a:ext cx="530352" cy="713232"/>
+          <p:cNvPr id="30" name="Rectangle 29"/>
+          <p:cNvSpPr/>
+          <p:nvPr/>
+        </p:nvSpPr>
+        <p:spPr>
+          <a:xfrm>
+            <a:off x="4343400" y="4169664"/>
+            <a:ext cx="566928" cy="868680"/>
           </a:xfrm>
           <a:prstGeom prst="rect">
             <a:avLst/>
@@ -8797,12 +10843,38 @@
           </a:fontRef>
         </p:style>
         <p:txBody>
-          <a:bodyPr rtlCol="0" anchor="ctr" wrap="square" lIns="101600" rIns="101600" tIns="38100" bIns="38100"/>
-          <a:lstStyle/>
-          <a:p>
-            <a:pPr algn="ctr"/>
-            <a:r>
-              <a:rPr sz="1500" b="1">
+          <a:bodyPr rtlCol="0" anchor="ctr"/>
+          <a:lstStyle/>
+          <a:p>
+            <a:pPr algn="ctr"/>
+          </a:p>
+        </p:txBody>
+      </p:sp>
+      <p:sp>
+        <p:nvSpPr>
+          <p:cNvPr id="31" name="TextBox 30"/>
+          <p:cNvSpPr txBox="1"/>
+          <p:nvPr/>
+        </p:nvSpPr>
+        <p:spPr>
+          <a:xfrm>
+            <a:off x="4343400" y="4485132"/>
+            <a:ext cx="566928" cy="237744"/>
+          </a:xfrm>
+          <a:prstGeom prst="rect">
+            <a:avLst/>
+          </a:prstGeom>
+          <a:noFill/>
+        </p:spPr>
+        <p:txBody>
+          <a:bodyPr wrap="square" lIns="0" rIns="0" tIns="0" bIns="0">
+            <a:spAutoFit/>
+          </a:bodyPr>
+          <a:lstStyle/>
+          <a:p>
+            <a:pPr algn="ctr"/>
+            <a:r>
+              <a:rPr sz="1400" b="1">
                 <a:solidFill>
                   <a:srgbClr val="FFFFFF"/>
                 </a:solidFill>
@@ -8815,14 +10887,14 @@
       </p:sp>
       <p:sp>
         <p:nvSpPr>
-          <p:cNvPr id="18" name="TextBox 17"/>
+          <p:cNvPr id="32" name="TextBox 31"/>
           <p:cNvSpPr txBox="1"/>
           <p:nvPr/>
         </p:nvSpPr>
         <p:spPr>
           <a:xfrm>
-            <a:off x="1572768" y="4818888"/>
-            <a:ext cx="9372600" cy="384048"/>
+            <a:off x="5129784" y="4334256"/>
+            <a:ext cx="5879592" cy="630936"/>
           </a:xfrm>
           <a:prstGeom prst="rect">
             <a:avLst/>
@@ -8836,37 +10908,37 @@
           <a:lstStyle/>
           <a:p>
             <a:r>
-              <a:rPr sz="1500" b="0">
+              <a:rPr sz="1200" b="1">
                 <a:solidFill>
                   <a:srgbClr val="111827"/>
                 </a:solidFill>
                 <a:latin typeface="Arial"/>
               </a:rPr>
-              <a:t>Individual activity: Learners silently read through their term's...</a:t>
-            </a:r>
-          </a:p>
-        </p:txBody>
-      </p:sp>
-      <p:sp>
-        <p:nvSpPr>
-          <p:cNvPr id="19" name="Rectangle 18"/>
-          <p:cNvSpPr/>
-          <p:nvPr/>
-        </p:nvSpPr>
-        <p:spPr>
-          <a:xfrm>
-            <a:off x="868680" y="5522976"/>
-            <a:ext cx="10378440" cy="713232"/>
-          </a:xfrm>
-          <a:prstGeom prst="rect">
+              <a:t>Individual activity: Learners silently read through their term's work and use</a:t>
+            </a:r>
+          </a:p>
+        </p:txBody>
+      </p:sp>
+      <p:sp>
+        <p:nvSpPr>
+          <p:cNvPr id="33" name="Rounded Rectangle 32"/>
+          <p:cNvSpPr/>
+          <p:nvPr/>
+        </p:nvSpPr>
+        <p:spPr>
+          <a:xfrm>
+            <a:off x="4343400" y="5413248"/>
+            <a:ext cx="6903720" cy="658368"/>
+          </a:xfrm>
+          <a:prstGeom prst="roundRect">
             <a:avLst/>
           </a:prstGeom>
           <a:solidFill>
             <a:srgbClr val="FFFFFF"/>
           </a:solidFill>
-          <a:ln w="11430">
+          <a:ln w="13970">
             <a:solidFill>
-              <a:srgbClr val="CBD5E1"/>
+              <a:srgbClr val="D90000"/>
             </a:solidFill>
           </a:ln>
         </p:spPr>
@@ -8894,100 +10966,49 @@
       </p:sp>
       <p:sp>
         <p:nvSpPr>
-          <p:cNvPr id="20" name="Rectangle 19"/>
-          <p:cNvSpPr/>
-          <p:nvPr/>
-        </p:nvSpPr>
-        <p:spPr>
-          <a:xfrm>
-            <a:off x="868680" y="5522976"/>
-            <a:ext cx="530352" cy="713232"/>
-          </a:xfrm>
-          <a:prstGeom prst="rect">
-            <a:avLst/>
-          </a:prstGeom>
-          <a:solidFill>
-            <a:srgbClr val="1B7F3A"/>
-          </a:solidFill>
-          <a:ln>
-            <a:noFill/>
-          </a:ln>
-        </p:spPr>
-        <p:style>
-          <a:lnRef idx="1">
-            <a:schemeClr val="accent1"/>
-          </a:lnRef>
-          <a:fillRef idx="3">
-            <a:schemeClr val="accent1"/>
-          </a:fillRef>
-          <a:effectRef idx="2">
-            <a:schemeClr val="accent1"/>
-          </a:effectRef>
-          <a:fontRef idx="minor">
-            <a:schemeClr val="lt1"/>
-          </a:fontRef>
-        </p:style>
-        <p:txBody>
-          <a:bodyPr rtlCol="0" anchor="ctr" wrap="square" lIns="101600" rIns="101600" tIns="38100" bIns="38100"/>
-          <a:lstStyle/>
-          <a:p>
-            <a:pPr algn="ctr"/>
-            <a:r>
-              <a:rPr sz="1500" b="1">
+          <p:cNvPr id="34" name="TextBox 33"/>
+          <p:cNvSpPr txBox="1"/>
+          <p:nvPr/>
+        </p:nvSpPr>
+        <p:spPr>
+          <a:xfrm>
+            <a:off x="4572000" y="5577840"/>
+            <a:ext cx="6446520" cy="274320"/>
+          </a:xfrm>
+          <a:prstGeom prst="rect">
+            <a:avLst/>
+          </a:prstGeom>
+          <a:noFill/>
+        </p:spPr>
+        <p:txBody>
+          <a:bodyPr wrap="square" lIns="0" rIns="0" tIns="0" bIns="0">
+            <a:spAutoFit/>
+          </a:bodyPr>
+          <a:lstStyle/>
+          <a:p>
+            <a:pPr algn="ctr"/>
+            <a:r>
+              <a:rPr sz="1400" b="1">
                 <a:solidFill>
-                  <a:srgbClr val="FFFFFF"/>
+                  <a:srgbClr val="D90000"/>
                 </a:solidFill>
                 <a:latin typeface="Arial"/>
               </a:rPr>
-              <a:t>4</a:t>
-            </a:r>
-          </a:p>
-        </p:txBody>
-      </p:sp>
-      <p:sp>
-        <p:nvSpPr>
-          <p:cNvPr id="21" name="TextBox 20"/>
+              <a:t>Class share-out: one group explains, one group improves it.</a:t>
+            </a:r>
+          </a:p>
+        </p:txBody>
+      </p:sp>
+      <p:sp>
+        <p:nvSpPr>
+          <p:cNvPr id="35" name="TextBox 34"/>
           <p:cNvSpPr txBox="1"/>
           <p:nvPr/>
         </p:nvSpPr>
         <p:spPr>
           <a:xfrm>
-            <a:off x="1572768" y="5669280"/>
-            <a:ext cx="9372600" cy="384048"/>
-          </a:xfrm>
-          <a:prstGeom prst="rect">
-            <a:avLst/>
-          </a:prstGeom>
-          <a:noFill/>
-        </p:spPr>
-        <p:txBody>
-          <a:bodyPr wrap="square" lIns="0" rIns="0" tIns="0" bIns="0">
-            <a:spAutoFit/>
-          </a:bodyPr>
-          <a:lstStyle/>
-          <a:p>
-            <a:r>
-              <a:rPr sz="1500" b="0">
-                <a:solidFill>
-                  <a:srgbClr val="111827"/>
-                </a:solidFill>
-                <a:latin typeface="Arial"/>
-              </a:rPr>
-              <a:t>Write one clear response.</a:t>
-            </a:r>
-          </a:p>
-        </p:txBody>
-      </p:sp>
-      <p:sp>
-        <p:nvSpPr>
-          <p:cNvPr id="22" name="TextBox 21"/>
-          <p:cNvSpPr txBox="1"/>
-          <p:nvPr/>
-        </p:nvSpPr>
-        <p:spPr>
-          <a:xfrm>
-            <a:off x="685800" y="6419088"/>
-            <a:ext cx="10835640" cy="228600"/>
+            <a:off x="713232" y="6355080"/>
+            <a:ext cx="10835640" cy="219456"/>
           </a:xfrm>
           <a:prstGeom prst="rect">
             <a:avLst/>
@@ -9008,7 +11029,7 @@
                 </a:solidFill>
                 <a:latin typeface="Arial"/>
               </a:rPr>
-              <a:t>Listen • Talk • Try • Explain</a:t>
+              <a:t>P7 class flow: listen • talk • try • explain</a:t>
             </a:r>
           </a:p>
         </p:txBody>
@@ -9213,7 +11234,93 @@
       </p:sp>
       <p:sp>
         <p:nvSpPr>
-          <p:cNvPr id="6" name="TextBox 5"/>
+          <p:cNvPr id="6" name="Rectangle 5"/>
+          <p:cNvSpPr/>
+          <p:nvPr/>
+        </p:nvSpPr>
+        <p:spPr>
+          <a:xfrm>
+            <a:off x="164592" y="6565392"/>
+            <a:ext cx="12027103" cy="73152"/>
+          </a:xfrm>
+          <a:prstGeom prst="rect">
+            <a:avLst/>
+          </a:prstGeom>
+          <a:solidFill>
+            <a:srgbClr val="FCD116"/>
+          </a:solidFill>
+          <a:ln>
+            <a:noFill/>
+          </a:ln>
+        </p:spPr>
+        <p:style>
+          <a:lnRef idx="1">
+            <a:schemeClr val="accent1"/>
+          </a:lnRef>
+          <a:fillRef idx="3">
+            <a:schemeClr val="accent1"/>
+          </a:fillRef>
+          <a:effectRef idx="2">
+            <a:schemeClr val="accent1"/>
+          </a:effectRef>
+          <a:fontRef idx="minor">
+            <a:schemeClr val="lt1"/>
+          </a:fontRef>
+        </p:style>
+        <p:txBody>
+          <a:bodyPr rtlCol="0" anchor="ctr"/>
+          <a:lstStyle/>
+          <a:p>
+            <a:pPr algn="ctr"/>
+          </a:p>
+        </p:txBody>
+      </p:sp>
+      <p:sp>
+        <p:nvSpPr>
+          <p:cNvPr id="7" name="Rectangle 6"/>
+          <p:cNvSpPr/>
+          <p:nvPr/>
+        </p:nvSpPr>
+        <p:spPr>
+          <a:xfrm>
+            <a:off x="164592" y="6638544"/>
+            <a:ext cx="12027103" cy="45720"/>
+          </a:xfrm>
+          <a:prstGeom prst="rect">
+            <a:avLst/>
+          </a:prstGeom>
+          <a:solidFill>
+            <a:srgbClr val="D90000"/>
+          </a:solidFill>
+          <a:ln>
+            <a:noFill/>
+          </a:ln>
+        </p:spPr>
+        <p:style>
+          <a:lnRef idx="1">
+            <a:schemeClr val="accent1"/>
+          </a:lnRef>
+          <a:fillRef idx="3">
+            <a:schemeClr val="accent1"/>
+          </a:fillRef>
+          <a:effectRef idx="2">
+            <a:schemeClr val="accent1"/>
+          </a:effectRef>
+          <a:fontRef idx="minor">
+            <a:schemeClr val="lt1"/>
+          </a:fontRef>
+        </p:style>
+        <p:txBody>
+          <a:bodyPr rtlCol="0" anchor="ctr"/>
+          <a:lstStyle/>
+          <a:p>
+            <a:pPr algn="ctr"/>
+          </a:p>
+        </p:txBody>
+      </p:sp>
+      <p:sp>
+        <p:nvSpPr>
+          <p:cNvPr id="8" name="TextBox 7"/>
           <p:cNvSpPr txBox="1"/>
           <p:nvPr/>
         </p:nvSpPr>
@@ -9247,7 +11354,7 @@
       </p:sp>
       <p:sp>
         <p:nvSpPr>
-          <p:cNvPr id="7" name="TextBox 6"/>
+          <p:cNvPr id="9" name="TextBox 8"/>
           <p:cNvSpPr txBox="1"/>
           <p:nvPr/>
         </p:nvSpPr>
@@ -9282,14 +11389,14 @@
       </p:sp>
       <p:sp>
         <p:nvSpPr>
-          <p:cNvPr id="8" name="TextBox 7"/>
+          <p:cNvPr id="10" name="TextBox 9"/>
           <p:cNvSpPr txBox="1"/>
           <p:nvPr/>
         </p:nvSpPr>
         <p:spPr>
           <a:xfrm>
-            <a:off x="594360" y="1042415"/>
-            <a:ext cx="11109960" cy="566928"/>
+            <a:off x="594360" y="1005840"/>
+            <a:ext cx="11064240" cy="512064"/>
           </a:xfrm>
           <a:prstGeom prst="rect">
             <a:avLst/>
@@ -9316,22 +11423,22 @@
       </p:sp>
       <p:sp>
         <p:nvSpPr>
-          <p:cNvPr id="9" name="Rectangle 8"/>
-          <p:cNvSpPr/>
-          <p:nvPr/>
-        </p:nvSpPr>
-        <p:spPr>
-          <a:xfrm>
-            <a:off x="685800" y="1874519"/>
-            <a:ext cx="10835640" cy="804672"/>
-          </a:xfrm>
-          <a:prstGeom prst="rect">
-            <a:avLst/>
-          </a:prstGeom>
-          <a:solidFill>
-            <a:srgbClr val="FFF7E0"/>
-          </a:solidFill>
-          <a:ln w="17780">
+          <p:cNvPr id="11" name="Rounded Rectangle 10"/>
+          <p:cNvSpPr/>
+          <p:nvPr/>
+        </p:nvSpPr>
+        <p:spPr>
+          <a:xfrm>
+            <a:off x="1143000" y="1783080"/>
+            <a:ext cx="9921240" cy="4434840"/>
+          </a:xfrm>
+          <a:prstGeom prst="roundRect">
+            <a:avLst/>
+          </a:prstGeom>
+          <a:solidFill>
+            <a:srgbClr val="FFFFFF"/>
+          </a:solidFill>
+          <a:ln w="20320">
             <a:solidFill>
               <a:srgbClr val="4338CA"/>
             </a:solidFill>
@@ -9352,12 +11459,47 @@
           </a:fontRef>
         </p:style>
         <p:txBody>
-          <a:bodyPr rtlCol="0" anchor="ctr" wrap="square" lIns="101600" rIns="101600" tIns="38100" bIns="38100"/>
-          <a:lstStyle/>
-          <a:p>
-            <a:pPr algn="ctr"/>
-            <a:r>
-              <a:rPr sz="1900" b="1">
+          <a:bodyPr rtlCol="0" anchor="t" wrap="square" lIns="101600" rIns="101600" tIns="127000" bIns="38100"/>
+          <a:lstStyle/>
+          <a:p>
+            <a:pPr algn="ctr"/>
+            <a:r>
+              <a:rPr sz="1500" b="1">
+                <a:solidFill>
+                  <a:srgbClr val="4338CA"/>
+                </a:solidFill>
+                <a:latin typeface="Arial"/>
+              </a:rPr>
+              <a:t>EXIT TICKET</a:t>
+            </a:r>
+          </a:p>
+        </p:txBody>
+      </p:sp>
+      <p:sp>
+        <p:nvSpPr>
+          <p:cNvPr id="12" name="TextBox 11"/>
+          <p:cNvSpPr txBox="1"/>
+          <p:nvPr/>
+        </p:nvSpPr>
+        <p:spPr>
+          <a:xfrm>
+            <a:off x="1691640" y="2487168"/>
+            <a:ext cx="8823960" cy="658368"/>
+          </a:xfrm>
+          <a:prstGeom prst="rect">
+            <a:avLst/>
+          </a:prstGeom>
+          <a:noFill/>
+        </p:spPr>
+        <p:txBody>
+          <a:bodyPr wrap="square" lIns="0" rIns="0" tIns="0" bIns="0">
+            <a:spAutoFit/>
+          </a:bodyPr>
+          <a:lstStyle/>
+          <a:p>
+            <a:pPr algn="ctr"/>
+            <a:r>
+              <a:rPr sz="2100" b="1">
                 <a:solidFill>
                   <a:srgbClr val="111827"/>
                 </a:solidFill>
@@ -9370,65 +11512,20 @@
       </p:sp>
       <p:sp>
         <p:nvSpPr>
-          <p:cNvPr id="10" name="Rectangle 9"/>
-          <p:cNvSpPr/>
-          <p:nvPr/>
-        </p:nvSpPr>
-        <p:spPr>
-          <a:xfrm>
-            <a:off x="868680" y="2971800"/>
-            <a:ext cx="10378440" cy="713232"/>
-          </a:xfrm>
-          <a:prstGeom prst="rect">
-            <a:avLst/>
-          </a:prstGeom>
-          <a:solidFill>
-            <a:srgbClr val="FFFFFF"/>
-          </a:solidFill>
-          <a:ln w="11430">
-            <a:solidFill>
-              <a:srgbClr val="CBD5E1"/>
-            </a:solidFill>
-          </a:ln>
-        </p:spPr>
-        <p:style>
-          <a:lnRef idx="1">
-            <a:schemeClr val="accent1"/>
-          </a:lnRef>
-          <a:fillRef idx="3">
-            <a:schemeClr val="accent1"/>
-          </a:fillRef>
-          <a:effectRef idx="2">
-            <a:schemeClr val="accent1"/>
-          </a:effectRef>
-          <a:fontRef idx="minor">
-            <a:schemeClr val="lt1"/>
-          </a:fontRef>
-        </p:style>
-        <p:txBody>
-          <a:bodyPr rtlCol="0" anchor="ctr"/>
-          <a:lstStyle/>
-          <a:p>
-            <a:pPr algn="ctr"/>
-          </a:p>
-        </p:txBody>
-      </p:sp>
-      <p:sp>
-        <p:nvSpPr>
-          <p:cNvPr id="11" name="Rectangle 10"/>
-          <p:cNvSpPr/>
-          <p:nvPr/>
-        </p:nvSpPr>
-        <p:spPr>
-          <a:xfrm>
-            <a:off x="868680" y="2971800"/>
-            <a:ext cx="530352" cy="713232"/>
-          </a:xfrm>
-          <a:prstGeom prst="rect">
-            <a:avLst/>
-          </a:prstGeom>
-          <a:solidFill>
-            <a:srgbClr val="4338CA"/>
+          <p:cNvPr id="13" name="Rectangle 12"/>
+          <p:cNvSpPr/>
+          <p:nvPr/>
+        </p:nvSpPr>
+        <p:spPr>
+          <a:xfrm>
+            <a:off x="1920240" y="3493008"/>
+            <a:ext cx="8321040" cy="32004"/>
+          </a:xfrm>
+          <a:prstGeom prst="rect">
+            <a:avLst/>
+          </a:prstGeom>
+          <a:solidFill>
+            <a:srgbClr val="CBD5E1"/>
           </a:solidFill>
           <a:ln>
             <a:noFill/>
@@ -9449,32 +11546,109 @@
           </a:fontRef>
         </p:style>
         <p:txBody>
-          <a:bodyPr rtlCol="0" anchor="ctr" wrap="square" lIns="101600" rIns="101600" tIns="38100" bIns="38100"/>
-          <a:lstStyle/>
-          <a:p>
-            <a:pPr algn="ctr"/>
-            <a:r>
-              <a:rPr sz="1500" b="1">
-                <a:solidFill>
-                  <a:srgbClr val="FFFFFF"/>
-                </a:solidFill>
-                <a:latin typeface="Arial"/>
-              </a:rPr>
-              <a:t>1</a:t>
-            </a:r>
-          </a:p>
-        </p:txBody>
-      </p:sp>
-      <p:sp>
-        <p:nvSpPr>
-          <p:cNvPr id="12" name="TextBox 11"/>
+          <a:bodyPr rtlCol="0" anchor="ctr"/>
+          <a:lstStyle/>
+          <a:p>
+            <a:pPr algn="ctr"/>
+          </a:p>
+        </p:txBody>
+      </p:sp>
+      <p:sp>
+        <p:nvSpPr>
+          <p:cNvPr id="14" name="Rectangle 13"/>
+          <p:cNvSpPr/>
+          <p:nvPr/>
+        </p:nvSpPr>
+        <p:spPr>
+          <a:xfrm>
+            <a:off x="1920240" y="3977639"/>
+            <a:ext cx="8321040" cy="32004"/>
+          </a:xfrm>
+          <a:prstGeom prst="rect">
+            <a:avLst/>
+          </a:prstGeom>
+          <a:solidFill>
+            <a:srgbClr val="CBD5E1"/>
+          </a:solidFill>
+          <a:ln>
+            <a:noFill/>
+          </a:ln>
+        </p:spPr>
+        <p:style>
+          <a:lnRef idx="1">
+            <a:schemeClr val="accent1"/>
+          </a:lnRef>
+          <a:fillRef idx="3">
+            <a:schemeClr val="accent1"/>
+          </a:fillRef>
+          <a:effectRef idx="2">
+            <a:schemeClr val="accent1"/>
+          </a:effectRef>
+          <a:fontRef idx="minor">
+            <a:schemeClr val="lt1"/>
+          </a:fontRef>
+        </p:style>
+        <p:txBody>
+          <a:bodyPr rtlCol="0" anchor="ctr"/>
+          <a:lstStyle/>
+          <a:p>
+            <a:pPr algn="ctr"/>
+          </a:p>
+        </p:txBody>
+      </p:sp>
+      <p:sp>
+        <p:nvSpPr>
+          <p:cNvPr id="15" name="Rectangle 14"/>
+          <p:cNvSpPr/>
+          <p:nvPr/>
+        </p:nvSpPr>
+        <p:spPr>
+          <a:xfrm>
+            <a:off x="1920240" y="4462272"/>
+            <a:ext cx="8321040" cy="32004"/>
+          </a:xfrm>
+          <a:prstGeom prst="rect">
+            <a:avLst/>
+          </a:prstGeom>
+          <a:solidFill>
+            <a:srgbClr val="CBD5E1"/>
+          </a:solidFill>
+          <a:ln>
+            <a:noFill/>
+          </a:ln>
+        </p:spPr>
+        <p:style>
+          <a:lnRef idx="1">
+            <a:schemeClr val="accent1"/>
+          </a:lnRef>
+          <a:fillRef idx="3">
+            <a:schemeClr val="accent1"/>
+          </a:fillRef>
+          <a:effectRef idx="2">
+            <a:schemeClr val="accent1"/>
+          </a:effectRef>
+          <a:fontRef idx="minor">
+            <a:schemeClr val="lt1"/>
+          </a:fontRef>
+        </p:style>
+        <p:txBody>
+          <a:bodyPr rtlCol="0" anchor="ctr"/>
+          <a:lstStyle/>
+          <a:p>
+            <a:pPr algn="ctr"/>
+          </a:p>
+        </p:txBody>
+      </p:sp>
+      <p:sp>
+        <p:nvSpPr>
+          <p:cNvPr id="16" name="TextBox 15"/>
           <p:cNvSpPr txBox="1"/>
           <p:nvPr/>
         </p:nvSpPr>
         <p:spPr>
           <a:xfrm>
-            <a:off x="1572768" y="3118104"/>
-            <a:ext cx="9372600" cy="384048"/>
+            <a:off x="1691640" y="4864608"/>
+            <a:ext cx="8823960" cy="237744"/>
           </a:xfrm>
           <a:prstGeom prst="rect">
             <a:avLst/>
@@ -9487,10 +11661,11 @@
           </a:bodyPr>
           <a:lstStyle/>
           <a:p>
-            <a:r>
-              <a:rPr sz="1500" b="0">
+            <a:pPr algn="ctr"/>
+            <a:r>
+              <a:rPr sz="1200" b="0">
                 <a:solidFill>
-                  <a:srgbClr val="111827"/>
+                  <a:srgbClr val="475569"/>
                 </a:solidFill>
                 <a:latin typeface="Arial"/>
               </a:rPr>
@@ -9501,111 +11676,49 @@
       </p:sp>
       <p:sp>
         <p:nvSpPr>
-          <p:cNvPr id="13" name="Rectangle 12"/>
-          <p:cNvSpPr/>
-          <p:nvPr/>
-        </p:nvSpPr>
-        <p:spPr>
-          <a:xfrm>
-            <a:off x="868680" y="3822191"/>
-            <a:ext cx="10378440" cy="713232"/>
-          </a:xfrm>
-          <a:prstGeom prst="rect">
-            <a:avLst/>
-          </a:prstGeom>
-          <a:solidFill>
-            <a:srgbClr val="FFFFFF"/>
-          </a:solidFill>
-          <a:ln w="11430">
-            <a:solidFill>
-              <a:srgbClr val="CBD5E1"/>
-            </a:solidFill>
-          </a:ln>
-        </p:spPr>
-        <p:style>
-          <a:lnRef idx="1">
-            <a:schemeClr val="accent1"/>
-          </a:lnRef>
-          <a:fillRef idx="3">
-            <a:schemeClr val="accent1"/>
-          </a:fillRef>
-          <a:effectRef idx="2">
-            <a:schemeClr val="accent1"/>
-          </a:effectRef>
-          <a:fontRef idx="minor">
-            <a:schemeClr val="lt1"/>
-          </a:fontRef>
-        </p:style>
-        <p:txBody>
-          <a:bodyPr rtlCol="0" anchor="ctr"/>
-          <a:lstStyle/>
-          <a:p>
-            <a:pPr algn="ctr"/>
-          </a:p>
-        </p:txBody>
-      </p:sp>
-      <p:sp>
-        <p:nvSpPr>
-          <p:cNvPr id="14" name="Rectangle 13"/>
-          <p:cNvSpPr/>
-          <p:nvPr/>
-        </p:nvSpPr>
-        <p:spPr>
-          <a:xfrm>
-            <a:off x="868680" y="3822191"/>
-            <a:ext cx="530352" cy="713232"/>
-          </a:xfrm>
-          <a:prstGeom prst="rect">
-            <a:avLst/>
-          </a:prstGeom>
-          <a:solidFill>
-            <a:srgbClr val="4338CA"/>
-          </a:solidFill>
-          <a:ln>
-            <a:noFill/>
-          </a:ln>
-        </p:spPr>
-        <p:style>
-          <a:lnRef idx="1">
-            <a:schemeClr val="accent1"/>
-          </a:lnRef>
-          <a:fillRef idx="3">
-            <a:schemeClr val="accent1"/>
-          </a:fillRef>
-          <a:effectRef idx="2">
-            <a:schemeClr val="accent1"/>
-          </a:effectRef>
-          <a:fontRef idx="minor">
-            <a:schemeClr val="lt1"/>
-          </a:fontRef>
-        </p:style>
-        <p:txBody>
-          <a:bodyPr rtlCol="0" anchor="ctr" wrap="square" lIns="101600" rIns="101600" tIns="38100" bIns="38100"/>
-          <a:lstStyle/>
-          <a:p>
-            <a:pPr algn="ctr"/>
-            <a:r>
-              <a:rPr sz="1500" b="1">
+          <p:cNvPr id="17" name="TextBox 16"/>
+          <p:cNvSpPr txBox="1"/>
+          <p:nvPr/>
+        </p:nvSpPr>
+        <p:spPr>
+          <a:xfrm>
+            <a:off x="1691640" y="5184648"/>
+            <a:ext cx="8823960" cy="237744"/>
+          </a:xfrm>
+          <a:prstGeom prst="rect">
+            <a:avLst/>
+          </a:prstGeom>
+          <a:noFill/>
+        </p:spPr>
+        <p:txBody>
+          <a:bodyPr wrap="square" lIns="0" rIns="0" tIns="0" bIns="0">
+            <a:spAutoFit/>
+          </a:bodyPr>
+          <a:lstStyle/>
+          <a:p>
+            <a:pPr algn="ctr"/>
+            <a:r>
+              <a:rPr sz="1200" b="0">
                 <a:solidFill>
-                  <a:srgbClr val="FFFFFF"/>
+                  <a:srgbClr val="475569"/>
                 </a:solidFill>
                 <a:latin typeface="Arial"/>
               </a:rPr>
-              <a:t>2</a:t>
-            </a:r>
-          </a:p>
-        </p:txBody>
-      </p:sp>
-      <p:sp>
-        <p:nvSpPr>
-          <p:cNvPr id="15" name="TextBox 14"/>
+              <a:t>Use one key word: Past simple tense for reflection</a:t>
+            </a:r>
+          </a:p>
+        </p:txBody>
+      </p:sp>
+      <p:sp>
+        <p:nvSpPr>
+          <p:cNvPr id="18" name="TextBox 17"/>
           <p:cNvSpPr txBox="1"/>
           <p:nvPr/>
         </p:nvSpPr>
         <p:spPr>
           <a:xfrm>
-            <a:off x="1572768" y="3968496"/>
-            <a:ext cx="9372600" cy="384048"/>
+            <a:off x="1691640" y="5504688"/>
+            <a:ext cx="8823960" cy="237744"/>
           </a:xfrm>
           <a:prstGeom prst="rect">
             <a:avLst/>
@@ -9618,141 +11731,11 @@
           </a:bodyPr>
           <a:lstStyle/>
           <a:p>
-            <a:r>
-              <a:rPr sz="1500" b="0">
+            <a:pPr algn="ctr"/>
+            <a:r>
+              <a:rPr sz="1200" b="1">
                 <a:solidFill>
-                  <a:srgbClr val="111827"/>
-                </a:solidFill>
-                <a:latin typeface="Arial"/>
-              </a:rPr>
-              <a:t>Include one key word: Past simple tense for reflection (e.g, "I l...</a:t>
-            </a:r>
-          </a:p>
-        </p:txBody>
-      </p:sp>
-      <p:sp>
-        <p:nvSpPr>
-          <p:cNvPr id="16" name="Rectangle 15"/>
-          <p:cNvSpPr/>
-          <p:nvPr/>
-        </p:nvSpPr>
-        <p:spPr>
-          <a:xfrm>
-            <a:off x="868680" y="4672584"/>
-            <a:ext cx="10378440" cy="713232"/>
-          </a:xfrm>
-          <a:prstGeom prst="rect">
-            <a:avLst/>
-          </a:prstGeom>
-          <a:solidFill>
-            <a:srgbClr val="FFFFFF"/>
-          </a:solidFill>
-          <a:ln w="11430">
-            <a:solidFill>
-              <a:srgbClr val="CBD5E1"/>
-            </a:solidFill>
-          </a:ln>
-        </p:spPr>
-        <p:style>
-          <a:lnRef idx="1">
-            <a:schemeClr val="accent1"/>
-          </a:lnRef>
-          <a:fillRef idx="3">
-            <a:schemeClr val="accent1"/>
-          </a:fillRef>
-          <a:effectRef idx="2">
-            <a:schemeClr val="accent1"/>
-          </a:effectRef>
-          <a:fontRef idx="minor">
-            <a:schemeClr val="lt1"/>
-          </a:fontRef>
-        </p:style>
-        <p:txBody>
-          <a:bodyPr rtlCol="0" anchor="ctr"/>
-          <a:lstStyle/>
-          <a:p>
-            <a:pPr algn="ctr"/>
-          </a:p>
-        </p:txBody>
-      </p:sp>
-      <p:sp>
-        <p:nvSpPr>
-          <p:cNvPr id="17" name="Rectangle 16"/>
-          <p:cNvSpPr/>
-          <p:nvPr/>
-        </p:nvSpPr>
-        <p:spPr>
-          <a:xfrm>
-            <a:off x="868680" y="4672584"/>
-            <a:ext cx="530352" cy="713232"/>
-          </a:xfrm>
-          <a:prstGeom prst="rect">
-            <a:avLst/>
-          </a:prstGeom>
-          <a:solidFill>
-            <a:srgbClr val="4338CA"/>
-          </a:solidFill>
-          <a:ln>
-            <a:noFill/>
-          </a:ln>
-        </p:spPr>
-        <p:style>
-          <a:lnRef idx="1">
-            <a:schemeClr val="accent1"/>
-          </a:lnRef>
-          <a:fillRef idx="3">
-            <a:schemeClr val="accent1"/>
-          </a:fillRef>
-          <a:effectRef idx="2">
-            <a:schemeClr val="accent1"/>
-          </a:effectRef>
-          <a:fontRef idx="minor">
-            <a:schemeClr val="lt1"/>
-          </a:fontRef>
-        </p:style>
-        <p:txBody>
-          <a:bodyPr rtlCol="0" anchor="ctr" wrap="square" lIns="101600" rIns="101600" tIns="38100" bIns="38100"/>
-          <a:lstStyle/>
-          <a:p>
-            <a:pPr algn="ctr"/>
-            <a:r>
-              <a:rPr sz="1500" b="1">
-                <a:solidFill>
-                  <a:srgbClr val="FFFFFF"/>
-                </a:solidFill>
-                <a:latin typeface="Arial"/>
-              </a:rPr>
-              <a:t>3</a:t>
-            </a:r>
-          </a:p>
-        </p:txBody>
-      </p:sp>
-      <p:sp>
-        <p:nvSpPr>
-          <p:cNvPr id="18" name="TextBox 17"/>
-          <p:cNvSpPr txBox="1"/>
-          <p:nvPr/>
-        </p:nvSpPr>
-        <p:spPr>
-          <a:xfrm>
-            <a:off x="1572768" y="4818888"/>
-            <a:ext cx="9372600" cy="384048"/>
-          </a:xfrm>
-          <a:prstGeom prst="rect">
-            <a:avLst/>
-          </a:prstGeom>
-          <a:noFill/>
-        </p:spPr>
-        <p:txBody>
-          <a:bodyPr wrap="square" lIns="0" rIns="0" tIns="0" bIns="0">
-            <a:spAutoFit/>
-          </a:bodyPr>
-          <a:lstStyle/>
-          <a:p>
-            <a:r>
-              <a:rPr sz="1500" b="0">
-                <a:solidFill>
-                  <a:srgbClr val="111827"/>
+                  <a:srgbClr val="D90000"/>
                 </a:solidFill>
                 <a:latin typeface="Arial"/>
               </a:rPr>
@@ -9763,145 +11746,14 @@
       </p:sp>
       <p:sp>
         <p:nvSpPr>
-          <p:cNvPr id="19" name="Rectangle 18"/>
-          <p:cNvSpPr/>
-          <p:nvPr/>
-        </p:nvSpPr>
-        <p:spPr>
-          <a:xfrm>
-            <a:off x="868680" y="5522976"/>
-            <a:ext cx="10378440" cy="713232"/>
-          </a:xfrm>
-          <a:prstGeom prst="rect">
-            <a:avLst/>
-          </a:prstGeom>
-          <a:solidFill>
-            <a:srgbClr val="FFFFFF"/>
-          </a:solidFill>
-          <a:ln w="11430">
-            <a:solidFill>
-              <a:srgbClr val="CBD5E1"/>
-            </a:solidFill>
-          </a:ln>
-        </p:spPr>
-        <p:style>
-          <a:lnRef idx="1">
-            <a:schemeClr val="accent1"/>
-          </a:lnRef>
-          <a:fillRef idx="3">
-            <a:schemeClr val="accent1"/>
-          </a:fillRef>
-          <a:effectRef idx="2">
-            <a:schemeClr val="accent1"/>
-          </a:effectRef>
-          <a:fontRef idx="minor">
-            <a:schemeClr val="lt1"/>
-          </a:fontRef>
-        </p:style>
-        <p:txBody>
-          <a:bodyPr rtlCol="0" anchor="ctr"/>
-          <a:lstStyle/>
-          <a:p>
-            <a:pPr algn="ctr"/>
-          </a:p>
-        </p:txBody>
-      </p:sp>
-      <p:sp>
-        <p:nvSpPr>
-          <p:cNvPr id="20" name="Rectangle 19"/>
-          <p:cNvSpPr/>
-          <p:nvPr/>
-        </p:nvSpPr>
-        <p:spPr>
-          <a:xfrm>
-            <a:off x="868680" y="5522976"/>
-            <a:ext cx="530352" cy="713232"/>
-          </a:xfrm>
-          <a:prstGeom prst="rect">
-            <a:avLst/>
-          </a:prstGeom>
-          <a:solidFill>
-            <a:srgbClr val="4338CA"/>
-          </a:solidFill>
-          <a:ln>
-            <a:noFill/>
-          </a:ln>
-        </p:spPr>
-        <p:style>
-          <a:lnRef idx="1">
-            <a:schemeClr val="accent1"/>
-          </a:lnRef>
-          <a:fillRef idx="3">
-            <a:schemeClr val="accent1"/>
-          </a:fillRef>
-          <a:effectRef idx="2">
-            <a:schemeClr val="accent1"/>
-          </a:effectRef>
-          <a:fontRef idx="minor">
-            <a:schemeClr val="lt1"/>
-          </a:fontRef>
-        </p:style>
-        <p:txBody>
-          <a:bodyPr rtlCol="0" anchor="ctr" wrap="square" lIns="101600" rIns="101600" tIns="38100" bIns="38100"/>
-          <a:lstStyle/>
-          <a:p>
-            <a:pPr algn="ctr"/>
-            <a:r>
-              <a:rPr sz="1500" b="1">
-                <a:solidFill>
-                  <a:srgbClr val="FFFFFF"/>
-                </a:solidFill>
-                <a:latin typeface="Arial"/>
-              </a:rPr>
-              <a:t>4</a:t>
-            </a:r>
-          </a:p>
-        </p:txBody>
-      </p:sp>
-      <p:sp>
-        <p:nvSpPr>
-          <p:cNvPr id="21" name="TextBox 20"/>
+          <p:cNvPr id="19" name="TextBox 18"/>
           <p:cNvSpPr txBox="1"/>
           <p:nvPr/>
         </p:nvSpPr>
         <p:spPr>
           <a:xfrm>
-            <a:off x="1572768" y="5669280"/>
-            <a:ext cx="9372600" cy="384048"/>
-          </a:xfrm>
-          <a:prstGeom prst="rect">
-            <a:avLst/>
-          </a:prstGeom>
-          <a:noFill/>
-        </p:spPr>
-        <p:txBody>
-          <a:bodyPr wrap="square" lIns="0" rIns="0" tIns="0" bIns="0">
-            <a:spAutoFit/>
-          </a:bodyPr>
-          <a:lstStyle/>
-          <a:p>
-            <a:r>
-              <a:rPr sz="1500" b="0">
-                <a:solidFill>
-                  <a:srgbClr val="111827"/>
-                </a:solidFill>
-                <a:latin typeface="Arial"/>
-              </a:rPr>
-              <a:t>Write one clear response.</a:t>
-            </a:r>
-          </a:p>
-        </p:txBody>
-      </p:sp>
-      <p:sp>
-        <p:nvSpPr>
-          <p:cNvPr id="22" name="TextBox 21"/>
-          <p:cNvSpPr txBox="1"/>
-          <p:nvPr/>
-        </p:nvSpPr>
-        <p:spPr>
-          <a:xfrm>
-            <a:off x="685800" y="6419088"/>
-            <a:ext cx="10835640" cy="228600"/>
+            <a:off x="713232" y="6355080"/>
+            <a:ext cx="10835640" cy="219456"/>
           </a:xfrm>
           <a:prstGeom prst="rect">
             <a:avLst/>
@@ -9922,7 +11774,7 @@
                 </a:solidFill>
                 <a:latin typeface="Arial"/>
               </a:rPr>
-              <a:t>Listen • Talk • Try • Explain</a:t>
+              <a:t>P7 class flow: listen • talk • try • explain</a:t>
             </a:r>
           </a:p>
         </p:txBody>

--- a/uganda-p7-mvp/p7_t1_english_1205/p7_t1_english_1205.pptx
+++ b/uganda-p7-mvp/p7_t1_english_1205/p7_t1_english_1205.pptx
@@ -3438,7 +3438,7 @@
         </p:nvSpPr>
         <p:spPr>
           <a:xfrm>
-            <a:off x="685800" y="1024128"/>
+            <a:off x="685800" y="987552"/>
             <a:ext cx="10835640" cy="502920"/>
           </a:xfrm>
           <a:prstGeom prst="rect">
@@ -3473,8 +3473,8 @@
         </p:nvSpPr>
         <p:spPr>
           <a:xfrm>
-            <a:off x="777240" y="1783080"/>
-            <a:ext cx="3794760" cy="4343400"/>
+            <a:off x="777240" y="1755648"/>
+            <a:ext cx="10652760" cy="4480560"/>
           </a:xfrm>
           <a:prstGeom prst="roundRect">
             <a:avLst/>
@@ -3482,7 +3482,7 @@
           <a:solidFill>
             <a:srgbClr val="FFFFFF"/>
           </a:solidFill>
-          <a:ln w="17780">
+          <a:ln w="17145">
             <a:solidFill>
               <a:srgbClr val="1D4ED8"/>
             </a:solidFill>
@@ -3503,42 +3503,147 @@
           </a:fontRef>
         </p:style>
         <p:txBody>
-          <a:bodyPr rtlCol="0" anchor="t" wrap="square" lIns="101600" rIns="101600" tIns="152400" bIns="38100"/>
-          <a:lstStyle/>
-          <a:p>
-            <a:pPr algn="ctr"/>
-            <a:r>
-              <a:rPr sz="1800" b="1">
+          <a:bodyPr rtlCol="0" anchor="t" wrap="square" lIns="101600" rIns="101600" tIns="101600" bIns="38100"/>
+          <a:lstStyle/>
+          <a:p>
+            <a:pPr algn="l"/>
+            <a:r>
+              <a:rPr sz="1200" b="1">
                 <a:solidFill>
                   <a:srgbClr val="1D4ED8"/>
                 </a:solidFill>
                 <a:latin typeface="Arial"/>
               </a:rPr>
-              <a:t>English</a:t>
-            </a:r>
-          </a:p>
-        </p:txBody>
-      </p:sp>
-      <p:sp>
-        <p:nvSpPr>
-          <p:cNvPr id="12" name="Rectangle 11"/>
-          <p:cNvSpPr/>
-          <p:nvPr/>
-        </p:nvSpPr>
-        <p:spPr>
-          <a:xfrm>
-            <a:off x="1633118" y="3115818"/>
-            <a:ext cx="918971" cy="1156716"/>
-          </a:xfrm>
-          <a:prstGeom prst="rect">
-            <a:avLst/>
-          </a:prstGeom>
-          <a:solidFill>
-            <a:srgbClr val="FFFFFF"/>
-          </a:solidFill>
-          <a:ln w="10160">
+              <a:t>OPENING VISUAL</a:t>
+            </a:r>
+          </a:p>
+        </p:txBody>
+      </p:sp>
+      <p:sp>
+        <p:nvSpPr>
+          <p:cNvPr id="12" name="TextBox 11"/>
+          <p:cNvSpPr txBox="1"/>
+          <p:nvPr/>
+        </p:nvSpPr>
+        <p:spPr>
+          <a:xfrm>
+            <a:off x="1371600" y="2414015"/>
+            <a:ext cx="9464040" cy="384048"/>
+          </a:xfrm>
+          <a:prstGeom prst="rect">
+            <a:avLst/>
+          </a:prstGeom>
+          <a:noFill/>
+        </p:spPr>
+        <p:txBody>
+          <a:bodyPr wrap="square" lIns="0" rIns="0" tIns="0" bIns="0">
+            <a:spAutoFit/>
+          </a:bodyPr>
+          <a:lstStyle/>
+          <a:p>
+            <a:pPr algn="ctr"/>
+            <a:r>
+              <a:rPr sz="1800" b="1">
+                <a:solidFill>
+                  <a:srgbClr val="111827"/>
+                </a:solidFill>
+                <a:latin typeface="Arial"/>
+              </a:rPr>
+              <a:t>What are the three main topics we studied this</a:t>
+            </a:r>
+          </a:p>
+        </p:txBody>
+      </p:sp>
+      <p:cxnSp>
+        <p:nvCxnSpPr>
+          <p:cNvPr id="13" name="Connector 12"/>
+          <p:cNvCxnSpPr/>
+          <p:nvPr/>
+        </p:nvCxnSpPr>
+        <p:spPr>
+          <a:xfrm flipV="1">
+            <a:off x="2880360" y="4023360"/>
+            <a:ext cx="3200399" cy="822960"/>
+          </a:xfrm>
+          <a:prstGeom prst="line">
+            <a:avLst/>
+          </a:prstGeom>
+          <a:ln w="38100">
             <a:solidFill>
               <a:srgbClr val="1D4ED8"/>
+            </a:solidFill>
+          </a:ln>
+        </p:spPr>
+        <p:style>
+          <a:lnRef idx="2">
+            <a:schemeClr val="accent1"/>
+          </a:lnRef>
+          <a:fillRef idx="0">
+            <a:schemeClr val="accent1"/>
+          </a:fillRef>
+          <a:effectRef idx="1">
+            <a:schemeClr val="accent1"/>
+          </a:effectRef>
+          <a:fontRef idx="minor">
+            <a:schemeClr val="tx1"/>
+          </a:fontRef>
+        </p:style>
+      </p:cxnSp>
+      <p:cxnSp>
+        <p:nvCxnSpPr>
+          <p:cNvPr id="14" name="Connector 13"/>
+          <p:cNvCxnSpPr/>
+          <p:nvPr/>
+        </p:nvCxnSpPr>
+        <p:spPr>
+          <a:xfrm>
+            <a:off x="6080759" y="4023360"/>
+            <a:ext cx="3200401" cy="822960"/>
+          </a:xfrm>
+          <a:prstGeom prst="line">
+            <a:avLst/>
+          </a:prstGeom>
+          <a:ln w="38100">
+            <a:solidFill>
+              <a:srgbClr val="1D4ED8"/>
+            </a:solidFill>
+          </a:ln>
+        </p:spPr>
+        <p:style>
+          <a:lnRef idx="2">
+            <a:schemeClr val="accent1"/>
+          </a:lnRef>
+          <a:fillRef idx="0">
+            <a:schemeClr val="accent1"/>
+          </a:fillRef>
+          <a:effectRef idx="1">
+            <a:schemeClr val="accent1"/>
+          </a:effectRef>
+          <a:fontRef idx="minor">
+            <a:schemeClr val="tx1"/>
+          </a:fontRef>
+        </p:style>
+      </p:cxnSp>
+      <p:sp>
+        <p:nvSpPr>
+          <p:cNvPr id="15" name="Oval 14"/>
+          <p:cNvSpPr/>
+          <p:nvPr/>
+        </p:nvSpPr>
+        <p:spPr>
+          <a:xfrm>
+            <a:off x="2551176" y="4517136"/>
+            <a:ext cx="658368" cy="658368"/>
+          </a:xfrm>
+          <a:prstGeom prst="ellipse">
+            <a:avLst/>
+          </a:prstGeom>
+          <a:solidFill>
+            <a:srgbClr val="FFFFFF"/>
+          </a:solidFill>
+          <a:ln w="22860">
+            <a:solidFill>
+              <a:srgbClr val="D90000"/>
             </a:solidFill>
           </a:ln>
         </p:spPr>
@@ -3566,22 +3671,92 @@
       </p:sp>
       <p:sp>
         <p:nvSpPr>
-          <p:cNvPr id="13" name="Rectangle 12"/>
+          <p:cNvPr id="16" name="TextBox 15"/>
+          <p:cNvSpPr txBox="1"/>
+          <p:nvPr/>
+        </p:nvSpPr>
+        <p:spPr>
+          <a:xfrm>
+            <a:off x="2715768" y="4700016"/>
+            <a:ext cx="329184" cy="201168"/>
+          </a:xfrm>
+          <a:prstGeom prst="rect">
+            <a:avLst/>
+          </a:prstGeom>
+          <a:noFill/>
+        </p:spPr>
+        <p:txBody>
+          <a:bodyPr wrap="square" lIns="0" rIns="0" tIns="0" bIns="0">
+            <a:spAutoFit/>
+          </a:bodyPr>
+          <a:lstStyle/>
+          <a:p>
+            <a:pPr algn="ctr"/>
+            <a:r>
+              <a:rPr sz="1300" b="1">
+                <a:solidFill>
+                  <a:srgbClr val="D90000"/>
+                </a:solidFill>
+                <a:latin typeface="Arial"/>
+              </a:rPr>
+              <a:t>1</a:t>
+            </a:r>
+          </a:p>
+        </p:txBody>
+      </p:sp>
+      <p:sp>
+        <p:nvSpPr>
+          <p:cNvPr id="17" name="TextBox 16"/>
+          <p:cNvSpPr txBox="1"/>
+          <p:nvPr/>
+        </p:nvSpPr>
+        <p:spPr>
+          <a:xfrm>
+            <a:off x="2039112" y="5349240"/>
+            <a:ext cx="1691640" cy="658368"/>
+          </a:xfrm>
+          <a:prstGeom prst="rect">
+            <a:avLst/>
+          </a:prstGeom>
+          <a:noFill/>
+        </p:spPr>
+        <p:txBody>
+          <a:bodyPr wrap="square" lIns="0" rIns="0" tIns="0" bIns="0">
+            <a:spAutoFit/>
+          </a:bodyPr>
+          <a:lstStyle/>
+          <a:p>
+            <a:pPr algn="ctr"/>
+            <a:r>
+              <a:rPr sz="1100" b="1">
+                <a:solidFill>
+                  <a:srgbClr val="111827"/>
+                </a:solidFill>
+                <a:latin typeface="Arial"/>
+              </a:rPr>
+              <a:t>Think alone</a:t>
+            </a:r>
+          </a:p>
+        </p:txBody>
+      </p:sp>
+      <p:sp>
+        <p:nvSpPr>
+          <p:cNvPr id="18" name="Oval 17"/>
           <p:cNvSpPr/>
           <p:nvPr/>
         </p:nvSpPr>
         <p:spPr>
           <a:xfrm>
-            <a:off x="2552090" y="3115818"/>
-            <a:ext cx="918971" cy="1156716"/>
-          </a:xfrm>
-          <a:prstGeom prst="rect">
+            <a:off x="5751575" y="3694176"/>
+            <a:ext cx="658368" cy="658368"/>
+          </a:xfrm>
+          <a:prstGeom prst="ellipse">
             <a:avLst/>
           </a:prstGeom>
           <a:solidFill>
             <a:srgbClr val="FFFFFF"/>
           </a:solidFill>
-          <a:ln w="10160">
+          <a:ln w="22860">
             <a:solidFill>
               <a:srgbClr val="1D4ED8"/>
             </a:solidFill>
@@ -3611,23 +3786,95 @@
       </p:sp>
       <p:sp>
         <p:nvSpPr>
-          <p:cNvPr id="14" name="Rectangle 13"/>
+          <p:cNvPr id="19" name="TextBox 18"/>
+          <p:cNvSpPr txBox="1"/>
+          <p:nvPr/>
+        </p:nvSpPr>
+        <p:spPr>
+          <a:xfrm>
+            <a:off x="5916168" y="3877056"/>
+            <a:ext cx="329184" cy="201168"/>
+          </a:xfrm>
+          <a:prstGeom prst="rect">
+            <a:avLst/>
+          </a:prstGeom>
+          <a:noFill/>
+        </p:spPr>
+        <p:txBody>
+          <a:bodyPr wrap="square" lIns="0" rIns="0" tIns="0" bIns="0">
+            <a:spAutoFit/>
+          </a:bodyPr>
+          <a:lstStyle/>
+          <a:p>
+            <a:pPr algn="ctr"/>
+            <a:r>
+              <a:rPr sz="1300" b="1">
+                <a:solidFill>
+                  <a:srgbClr val="1D4ED8"/>
+                </a:solidFill>
+                <a:latin typeface="Arial"/>
+              </a:rPr>
+              <a:t>2</a:t>
+            </a:r>
+          </a:p>
+        </p:txBody>
+      </p:sp>
+      <p:sp>
+        <p:nvSpPr>
+          <p:cNvPr id="20" name="TextBox 19"/>
+          <p:cNvSpPr txBox="1"/>
+          <p:nvPr/>
+        </p:nvSpPr>
+        <p:spPr>
+          <a:xfrm>
+            <a:off x="5239512" y="4526280"/>
+            <a:ext cx="1691640" cy="658368"/>
+          </a:xfrm>
+          <a:prstGeom prst="rect">
+            <a:avLst/>
+          </a:prstGeom>
+          <a:noFill/>
+        </p:spPr>
+        <p:txBody>
+          <a:bodyPr wrap="square" lIns="0" rIns="0" tIns="0" bIns="0">
+            <a:spAutoFit/>
+          </a:bodyPr>
+          <a:lstStyle/>
+          <a:p>
+            <a:pPr algn="ctr"/>
+            <a:r>
+              <a:rPr sz="1100" b="1">
+                <a:solidFill>
+                  <a:srgbClr val="111827"/>
+                </a:solidFill>
+                <a:latin typeface="Arial"/>
+              </a:rPr>
+              <a:t>Pair talk</a:t>
+            </a:r>
+          </a:p>
+        </p:txBody>
+      </p:sp>
+      <p:sp>
+        <p:nvSpPr>
+          <p:cNvPr id="21" name="Oval 20"/>
           <p:cNvSpPr/>
           <p:nvPr/>
         </p:nvSpPr>
         <p:spPr>
           <a:xfrm>
-            <a:off x="2000707" y="2990088"/>
-            <a:ext cx="1133398" cy="150875"/>
-          </a:xfrm>
-          <a:prstGeom prst="rect">
-            <a:avLst/>
-          </a:prstGeom>
-          <a:solidFill>
-            <a:srgbClr val="D90000"/>
-          </a:solidFill>
-          <a:ln>
-            <a:noFill/>
+            <a:off x="8951976" y="4517136"/>
+            <a:ext cx="658368" cy="658368"/>
+          </a:xfrm>
+          <a:prstGeom prst="ellipse">
+            <a:avLst/>
+          </a:prstGeom>
+          <a:solidFill>
+            <a:srgbClr val="FFFFFF"/>
+          </a:solidFill>
+          <a:ln w="22860">
+            <a:solidFill>
+              <a:srgbClr val="D90000"/>
+            </a:solidFill>
           </a:ln>
         </p:spPr>
         <p:style>
@@ -3654,143 +3901,14 @@
       </p:sp>
       <p:sp>
         <p:nvSpPr>
-          <p:cNvPr id="15" name="Rectangle 14"/>
-          <p:cNvSpPr/>
-          <p:nvPr/>
-        </p:nvSpPr>
-        <p:spPr>
-          <a:xfrm>
-            <a:off x="1816912" y="3442716"/>
-            <a:ext cx="1470355" cy="62865"/>
-          </a:xfrm>
-          <a:prstGeom prst="rect">
-            <a:avLst/>
-          </a:prstGeom>
-          <a:solidFill>
-            <a:srgbClr val="CBD5E1"/>
-          </a:solidFill>
-          <a:ln>
-            <a:noFill/>
-          </a:ln>
-        </p:spPr>
-        <p:style>
-          <a:lnRef idx="1">
-            <a:schemeClr val="accent1"/>
-          </a:lnRef>
-          <a:fillRef idx="3">
-            <a:schemeClr val="accent1"/>
-          </a:fillRef>
-          <a:effectRef idx="2">
-            <a:schemeClr val="accent1"/>
-          </a:effectRef>
-          <a:fontRef idx="minor">
-            <a:schemeClr val="lt1"/>
-          </a:fontRef>
-        </p:style>
-        <p:txBody>
-          <a:bodyPr rtlCol="0" anchor="ctr"/>
-          <a:lstStyle/>
-          <a:p>
-            <a:pPr algn="ctr"/>
-          </a:p>
-        </p:txBody>
-      </p:sp>
-      <p:sp>
-        <p:nvSpPr>
-          <p:cNvPr id="16" name="Rectangle 15"/>
-          <p:cNvSpPr/>
-          <p:nvPr/>
-        </p:nvSpPr>
-        <p:spPr>
-          <a:xfrm>
-            <a:off x="1816912" y="3744468"/>
-            <a:ext cx="1470355" cy="62865"/>
-          </a:xfrm>
-          <a:prstGeom prst="rect">
-            <a:avLst/>
-          </a:prstGeom>
-          <a:solidFill>
-            <a:srgbClr val="CBD5E1"/>
-          </a:solidFill>
-          <a:ln>
-            <a:noFill/>
-          </a:ln>
-        </p:spPr>
-        <p:style>
-          <a:lnRef idx="1">
-            <a:schemeClr val="accent1"/>
-          </a:lnRef>
-          <a:fillRef idx="3">
-            <a:schemeClr val="accent1"/>
-          </a:fillRef>
-          <a:effectRef idx="2">
-            <a:schemeClr val="accent1"/>
-          </a:effectRef>
-          <a:fontRef idx="minor">
-            <a:schemeClr val="lt1"/>
-          </a:fontRef>
-        </p:style>
-        <p:txBody>
-          <a:bodyPr rtlCol="0" anchor="ctr"/>
-          <a:lstStyle/>
-          <a:p>
-            <a:pPr algn="ctr"/>
-          </a:p>
-        </p:txBody>
-      </p:sp>
-      <p:sp>
-        <p:nvSpPr>
-          <p:cNvPr id="17" name="Rectangle 16"/>
-          <p:cNvSpPr/>
-          <p:nvPr/>
-        </p:nvSpPr>
-        <p:spPr>
-          <a:xfrm>
-            <a:off x="1816912" y="4046220"/>
-            <a:ext cx="1470355" cy="62865"/>
-          </a:xfrm>
-          <a:prstGeom prst="rect">
-            <a:avLst/>
-          </a:prstGeom>
-          <a:solidFill>
-            <a:srgbClr val="CBD5E1"/>
-          </a:solidFill>
-          <a:ln>
-            <a:noFill/>
-          </a:ln>
-        </p:spPr>
-        <p:style>
-          <a:lnRef idx="1">
-            <a:schemeClr val="accent1"/>
-          </a:lnRef>
-          <a:fillRef idx="3">
-            <a:schemeClr val="accent1"/>
-          </a:fillRef>
-          <a:effectRef idx="2">
-            <a:schemeClr val="accent1"/>
-          </a:effectRef>
-          <a:fontRef idx="minor">
-            <a:schemeClr val="lt1"/>
-          </a:fontRef>
-        </p:style>
-        <p:txBody>
-          <a:bodyPr rtlCol="0" anchor="ctr"/>
-          <a:lstStyle/>
-          <a:p>
-            <a:pPr algn="ctr"/>
-          </a:p>
-        </p:txBody>
-      </p:sp>
-      <p:sp>
-        <p:nvSpPr>
-          <p:cNvPr id="18" name="TextBox 17"/>
+          <p:cNvPr id="22" name="TextBox 21"/>
           <p:cNvSpPr txBox="1"/>
           <p:nvPr/>
         </p:nvSpPr>
         <p:spPr>
           <a:xfrm>
-            <a:off x="1143000" y="4745736"/>
-            <a:ext cx="3063240" cy="228600"/>
+            <a:off x="9116568" y="4700016"/>
+            <a:ext cx="329184" cy="201168"/>
           </a:xfrm>
           <a:prstGeom prst="rect">
             <a:avLst/>
@@ -3805,27 +3923,27 @@
           <a:p>
             <a:pPr algn="ctr"/>
             <a:r>
-              <a:rPr sz="1000" b="0">
-                <a:solidFill>
-                  <a:srgbClr val="475569"/>
+              <a:rPr sz="1300" b="1">
+                <a:solidFill>
+                  <a:srgbClr val="D90000"/>
                 </a:solidFill>
                 <a:latin typeface="Arial"/>
               </a:rPr>
-              <a:t>English</a:t>
-            </a:r>
-          </a:p>
-        </p:txBody>
-      </p:sp>
-      <p:sp>
-        <p:nvSpPr>
-          <p:cNvPr id="19" name="TextBox 18"/>
+              <a:t>3</a:t>
+            </a:r>
+          </a:p>
+        </p:txBody>
+      </p:sp>
+      <p:sp>
+        <p:nvSpPr>
+          <p:cNvPr id="23" name="TextBox 22"/>
           <p:cNvSpPr txBox="1"/>
           <p:nvPr/>
         </p:nvSpPr>
         <p:spPr>
           <a:xfrm>
-            <a:off x="960120" y="5504688"/>
-            <a:ext cx="3429000" cy="274320"/>
+            <a:off x="8439912" y="5349240"/>
+            <a:ext cx="1691640" cy="658368"/>
           </a:xfrm>
           <a:prstGeom prst="rect">
             <a:avLst/>
@@ -3840,163 +3958,13 @@
           <a:p>
             <a:pPr algn="ctr"/>
             <a:r>
-              <a:rPr sz="1200" b="0">
-                <a:solidFill>
-                  <a:srgbClr val="475569"/>
+              <a:rPr sz="1100" b="1">
+                <a:solidFill>
+                  <a:srgbClr val="111827"/>
                 </a:solidFill>
                 <a:latin typeface="Arial"/>
               </a:rPr>
-              <a:t>Look • wonder • predict</a:t>
-            </a:r>
-          </a:p>
-        </p:txBody>
-      </p:sp>
-      <p:sp>
-        <p:nvSpPr>
-          <p:cNvPr id="20" name="Rounded Rectangle 19"/>
-          <p:cNvSpPr/>
-          <p:nvPr/>
-        </p:nvSpPr>
-        <p:spPr>
-          <a:xfrm>
-            <a:off x="4892040" y="1965960"/>
-            <a:ext cx="6355080" cy="3520440"/>
-          </a:xfrm>
-          <a:prstGeom prst="roundRect">
-            <a:avLst/>
-          </a:prstGeom>
-          <a:solidFill>
-            <a:srgbClr val="FFF7E0"/>
-          </a:solidFill>
-          <a:ln w="20320">
-            <a:solidFill>
-              <a:srgbClr val="1D4ED8"/>
-            </a:solidFill>
-          </a:ln>
-        </p:spPr>
-        <p:style>
-          <a:lnRef idx="1">
-            <a:schemeClr val="accent1"/>
-          </a:lnRef>
-          <a:fillRef idx="3">
-            <a:schemeClr val="accent1"/>
-          </a:fillRef>
-          <a:effectRef idx="2">
-            <a:schemeClr val="accent1"/>
-          </a:effectRef>
-          <a:fontRef idx="minor">
-            <a:schemeClr val="lt1"/>
-          </a:fontRef>
-        </p:style>
-        <p:txBody>
-          <a:bodyPr rtlCol="0" anchor="ctr"/>
-          <a:lstStyle/>
-          <a:p>
-            <a:pPr algn="ctr"/>
-          </a:p>
-        </p:txBody>
-      </p:sp>
-      <p:sp>
-        <p:nvSpPr>
-          <p:cNvPr id="21" name="TextBox 20"/>
-          <p:cNvSpPr txBox="1"/>
-          <p:nvPr/>
-        </p:nvSpPr>
-        <p:spPr>
-          <a:xfrm>
-            <a:off x="5257800" y="2267712"/>
-            <a:ext cx="5623560" cy="256032"/>
-          </a:xfrm>
-          <a:prstGeom prst="rect">
-            <a:avLst/>
-          </a:prstGeom>
-          <a:noFill/>
-        </p:spPr>
-        <p:txBody>
-          <a:bodyPr wrap="square" lIns="0" rIns="0" tIns="0" bIns="0">
-            <a:spAutoFit/>
-          </a:bodyPr>
-          <a:lstStyle/>
-          <a:p>
-            <a:pPr algn="ctr"/>
-            <a:r>
-              <a:rPr sz="1200" b="1">
-                <a:solidFill>
-                  <a:srgbClr val="1D4ED8"/>
-                </a:solidFill>
-                <a:latin typeface="Arial"/>
-              </a:rPr>
-              <a:t>OPENING QUESTION</a:t>
-            </a:r>
-          </a:p>
-        </p:txBody>
-      </p:sp>
-      <p:sp>
-        <p:nvSpPr>
-          <p:cNvPr id="22" name="TextBox 21"/>
-          <p:cNvSpPr txBox="1"/>
-          <p:nvPr/>
-        </p:nvSpPr>
-        <p:spPr>
-          <a:xfrm>
-            <a:off x="5285232" y="2788920"/>
-            <a:ext cx="5577840" cy="987552"/>
-          </a:xfrm>
-          <a:prstGeom prst="rect">
-            <a:avLst/>
-          </a:prstGeom>
-          <a:noFill/>
-        </p:spPr>
-        <p:txBody>
-          <a:bodyPr wrap="square" lIns="0" rIns="0" tIns="0" bIns="0">
-            <a:spAutoFit/>
-          </a:bodyPr>
-          <a:lstStyle/>
-          <a:p>
-            <a:pPr algn="ctr"/>
-            <a:r>
-              <a:rPr sz="2600" b="1">
-                <a:solidFill>
-                  <a:srgbClr val="111827"/>
-                </a:solidFill>
-                <a:latin typeface="Arial"/>
-              </a:rPr>
-              <a:t>Big question: What are the three main topics we studied this term?</a:t>
-            </a:r>
-          </a:p>
-        </p:txBody>
-      </p:sp>
-      <p:sp>
-        <p:nvSpPr>
-          <p:cNvPr id="23" name="TextBox 22"/>
-          <p:cNvSpPr txBox="1"/>
-          <p:nvPr/>
-        </p:nvSpPr>
-        <p:spPr>
-          <a:xfrm>
-            <a:off x="5285232" y="4315968"/>
-            <a:ext cx="5577840" cy="411480"/>
-          </a:xfrm>
-          <a:prstGeom prst="rect">
-            <a:avLst/>
-          </a:prstGeom>
-          <a:noFill/>
-        </p:spPr>
-        <p:txBody>
-          <a:bodyPr wrap="square" lIns="0" rIns="0" tIns="0" bIns="0">
-            <a:spAutoFit/>
-          </a:bodyPr>
-          <a:lstStyle/>
-          <a:p>
-            <a:pPr algn="ctr"/>
-            <a:r>
-              <a:rPr sz="1400" b="0">
-                <a:solidFill>
-                  <a:srgbClr val="475569"/>
-                </a:solidFill>
-                <a:latin typeface="Arial"/>
-              </a:rPr>
-              <a:t>First think alone. Then tell a partner one possible answer.</a:t>
+              <a:t>Share one idea</a:t>
             </a:r>
           </a:p>
         </p:txBody>
@@ -6794,16 +6762,16 @@
         </p:nvSpPr>
         <p:spPr>
           <a:xfrm>
-            <a:off x="777240" y="1828800"/>
-            <a:ext cx="3337560" cy="4160520"/>
+            <a:off x="777240" y="1755648"/>
+            <a:ext cx="10652760" cy="4480560"/>
           </a:xfrm>
           <a:prstGeom prst="roundRect">
             <a:avLst/>
           </a:prstGeom>
           <a:solidFill>
-            <a:srgbClr val="FFF7E0"/>
-          </a:solidFill>
-          <a:ln w="19050">
+            <a:srgbClr val="FFFFFF"/>
+          </a:solidFill>
+          <a:ln w="17145">
             <a:solidFill>
               <a:srgbClr val="087490"/>
             </a:solidFill>
@@ -6824,33 +6792,147 @@
           </a:fontRef>
         </p:style>
         <p:txBody>
-          <a:bodyPr rtlCol="0" anchor="ctr"/>
-          <a:lstStyle/>
-          <a:p>
-            <a:pPr algn="ctr"/>
-          </a:p>
-        </p:txBody>
-      </p:sp>
-      <p:sp>
-        <p:nvSpPr>
-          <p:cNvPr id="12" name="Rectangle 11"/>
+          <a:bodyPr rtlCol="0" anchor="t" wrap="square" lIns="101600" rIns="101600" tIns="101600" bIns="38100"/>
+          <a:lstStyle/>
+          <a:p>
+            <a:pPr algn="l"/>
+            <a:r>
+              <a:rPr sz="1200" b="1">
+                <a:solidFill>
+                  <a:srgbClr val="087490"/>
+                </a:solidFill>
+                <a:latin typeface="Arial"/>
+              </a:rPr>
+              <a:t>CONTENT MAP</a:t>
+            </a:r>
+          </a:p>
+        </p:txBody>
+      </p:sp>
+      <p:sp>
+        <p:nvSpPr>
+          <p:cNvPr id="12" name="TextBox 11"/>
+          <p:cNvSpPr txBox="1"/>
+          <p:nvPr/>
+        </p:nvSpPr>
+        <p:spPr>
+          <a:xfrm>
+            <a:off x="1371600" y="2414015"/>
+            <a:ext cx="9464040" cy="384048"/>
+          </a:xfrm>
+          <a:prstGeom prst="rect">
+            <a:avLst/>
+          </a:prstGeom>
+          <a:noFill/>
+        </p:spPr>
+        <p:txBody>
+          <a:bodyPr wrap="square" lIns="0" rIns="0" tIns="0" bIns="0">
+            <a:spAutoFit/>
+          </a:bodyPr>
+          <a:lstStyle/>
+          <a:p>
+            <a:pPr algn="ctr"/>
+            <a:r>
+              <a:rPr sz="1800" b="1">
+                <a:solidFill>
+                  <a:srgbClr val="111827"/>
+                </a:solidFill>
+                <a:latin typeface="Arial"/>
+              </a:rPr>
+              <a:t>Oral reflection on the three main topics of</a:t>
+            </a:r>
+          </a:p>
+        </p:txBody>
+      </p:sp>
+      <p:cxnSp>
+        <p:nvCxnSpPr>
+          <p:cNvPr id="13" name="Connector 12"/>
+          <p:cNvCxnSpPr/>
+          <p:nvPr/>
+        </p:nvCxnSpPr>
+        <p:spPr>
+          <a:xfrm flipV="1">
+            <a:off x="2880360" y="4023360"/>
+            <a:ext cx="3200399" cy="822960"/>
+          </a:xfrm>
+          <a:prstGeom prst="line">
+            <a:avLst/>
+          </a:prstGeom>
+          <a:ln w="38100">
+            <a:solidFill>
+              <a:srgbClr val="087490"/>
+            </a:solidFill>
+          </a:ln>
+        </p:spPr>
+        <p:style>
+          <a:lnRef idx="2">
+            <a:schemeClr val="accent1"/>
+          </a:lnRef>
+          <a:fillRef idx="0">
+            <a:schemeClr val="accent1"/>
+          </a:fillRef>
+          <a:effectRef idx="1">
+            <a:schemeClr val="accent1"/>
+          </a:effectRef>
+          <a:fontRef idx="minor">
+            <a:schemeClr val="tx1"/>
+          </a:fontRef>
+        </p:style>
+      </p:cxnSp>
+      <p:cxnSp>
+        <p:nvCxnSpPr>
+          <p:cNvPr id="14" name="Connector 13"/>
+          <p:cNvCxnSpPr/>
+          <p:nvPr/>
+        </p:nvCxnSpPr>
+        <p:spPr>
+          <a:xfrm>
+            <a:off x="6080759" y="4023360"/>
+            <a:ext cx="3200401" cy="822960"/>
+          </a:xfrm>
+          <a:prstGeom prst="line">
+            <a:avLst/>
+          </a:prstGeom>
+          <a:ln w="38100">
+            <a:solidFill>
+              <a:srgbClr val="087490"/>
+            </a:solidFill>
+          </a:ln>
+        </p:spPr>
+        <p:style>
+          <a:lnRef idx="2">
+            <a:schemeClr val="accent1"/>
+          </a:lnRef>
+          <a:fillRef idx="0">
+            <a:schemeClr val="accent1"/>
+          </a:fillRef>
+          <a:effectRef idx="1">
+            <a:schemeClr val="accent1"/>
+          </a:effectRef>
+          <a:fontRef idx="minor">
+            <a:schemeClr val="tx1"/>
+          </a:fontRef>
+        </p:style>
+      </p:cxnSp>
+      <p:sp>
+        <p:nvSpPr>
+          <p:cNvPr id="15" name="Oval 14"/>
           <p:cNvSpPr/>
           <p:nvPr/>
         </p:nvSpPr>
         <p:spPr>
           <a:xfrm>
-            <a:off x="1528876" y="2754630"/>
-            <a:ext cx="809244" cy="946404"/>
-          </a:xfrm>
-          <a:prstGeom prst="rect">
+            <a:off x="2551176" y="4517136"/>
+            <a:ext cx="658368" cy="658368"/>
+          </a:xfrm>
+          <a:prstGeom prst="ellipse">
             <a:avLst/>
           </a:prstGeom>
           <a:solidFill>
             <a:srgbClr val="FFFFFF"/>
           </a:solidFill>
-          <a:ln w="10160">
+          <a:ln w="22860">
             <a:solidFill>
-              <a:srgbClr val="1D4ED8"/>
+              <a:srgbClr val="D90000"/>
             </a:solidFill>
           </a:ln>
         </p:spPr>
@@ -6878,24 +6960,94 @@
       </p:sp>
       <p:sp>
         <p:nvSpPr>
-          <p:cNvPr id="13" name="Rectangle 12"/>
+          <p:cNvPr id="16" name="TextBox 15"/>
+          <p:cNvSpPr txBox="1"/>
+          <p:nvPr/>
+        </p:nvSpPr>
+        <p:spPr>
+          <a:xfrm>
+            <a:off x="2715768" y="4700016"/>
+            <a:ext cx="329184" cy="201168"/>
+          </a:xfrm>
+          <a:prstGeom prst="rect">
+            <a:avLst/>
+          </a:prstGeom>
+          <a:noFill/>
+        </p:spPr>
+        <p:txBody>
+          <a:bodyPr wrap="square" lIns="0" rIns="0" tIns="0" bIns="0">
+            <a:spAutoFit/>
+          </a:bodyPr>
+          <a:lstStyle/>
+          <a:p>
+            <a:pPr algn="ctr"/>
+            <a:r>
+              <a:rPr sz="1300" b="1">
+                <a:solidFill>
+                  <a:srgbClr val="D90000"/>
+                </a:solidFill>
+                <a:latin typeface="Arial"/>
+              </a:rPr>
+              <a:t>1</a:t>
+            </a:r>
+          </a:p>
+        </p:txBody>
+      </p:sp>
+      <p:sp>
+        <p:nvSpPr>
+          <p:cNvPr id="17" name="TextBox 16"/>
+          <p:cNvSpPr txBox="1"/>
+          <p:nvPr/>
+        </p:nvSpPr>
+        <p:spPr>
+          <a:xfrm>
+            <a:off x="2039112" y="5349240"/>
+            <a:ext cx="1691640" cy="658368"/>
+          </a:xfrm>
+          <a:prstGeom prst="rect">
+            <a:avLst/>
+          </a:prstGeom>
+          <a:noFill/>
+        </p:spPr>
+        <p:txBody>
+          <a:bodyPr wrap="square" lIns="0" rIns="0" tIns="0" bIns="0">
+            <a:spAutoFit/>
+          </a:bodyPr>
+          <a:lstStyle/>
+          <a:p>
+            <a:pPr algn="ctr"/>
+            <a:r>
+              <a:rPr sz="1100" b="1">
+                <a:solidFill>
+                  <a:srgbClr val="111827"/>
+                </a:solidFill>
+                <a:latin typeface="Arial"/>
+              </a:rPr>
+              <a:t>Review the topics we covered</a:t>
+            </a:r>
+          </a:p>
+        </p:txBody>
+      </p:sp>
+      <p:sp>
+        <p:nvSpPr>
+          <p:cNvPr id="18" name="Oval 17"/>
           <p:cNvSpPr/>
           <p:nvPr/>
         </p:nvSpPr>
         <p:spPr>
           <a:xfrm>
-            <a:off x="2338120" y="2754630"/>
-            <a:ext cx="809244" cy="946404"/>
-          </a:xfrm>
-          <a:prstGeom prst="rect">
+            <a:off x="5751575" y="3694176"/>
+            <a:ext cx="658368" cy="658368"/>
+          </a:xfrm>
+          <a:prstGeom prst="ellipse">
             <a:avLst/>
           </a:prstGeom>
           <a:solidFill>
             <a:srgbClr val="FFFFFF"/>
           </a:solidFill>
-          <a:ln w="10160">
+          <a:ln w="22860">
             <a:solidFill>
-              <a:srgbClr val="1D4ED8"/>
+              <a:srgbClr val="087490"/>
             </a:solidFill>
           </a:ln>
         </p:spPr>
@@ -6923,23 +7075,95 @@
       </p:sp>
       <p:sp>
         <p:nvSpPr>
-          <p:cNvPr id="14" name="Rectangle 13"/>
+          <p:cNvPr id="19" name="TextBox 18"/>
+          <p:cNvSpPr txBox="1"/>
+          <p:nvPr/>
+        </p:nvSpPr>
+        <p:spPr>
+          <a:xfrm>
+            <a:off x="5916168" y="3877056"/>
+            <a:ext cx="329184" cy="201168"/>
+          </a:xfrm>
+          <a:prstGeom prst="rect">
+            <a:avLst/>
+          </a:prstGeom>
+          <a:noFill/>
+        </p:spPr>
+        <p:txBody>
+          <a:bodyPr wrap="square" lIns="0" rIns="0" tIns="0" bIns="0">
+            <a:spAutoFit/>
+          </a:bodyPr>
+          <a:lstStyle/>
+          <a:p>
+            <a:pPr algn="ctr"/>
+            <a:r>
+              <a:rPr sz="1300" b="1">
+                <a:solidFill>
+                  <a:srgbClr val="087490"/>
+                </a:solidFill>
+                <a:latin typeface="Arial"/>
+              </a:rPr>
+              <a:t>2</a:t>
+            </a:r>
+          </a:p>
+        </p:txBody>
+      </p:sp>
+      <p:sp>
+        <p:nvSpPr>
+          <p:cNvPr id="20" name="TextBox 19"/>
+          <p:cNvSpPr txBox="1"/>
+          <p:nvPr/>
+        </p:nvSpPr>
+        <p:spPr>
+          <a:xfrm>
+            <a:off x="5239512" y="4526280"/>
+            <a:ext cx="1691640" cy="658368"/>
+          </a:xfrm>
+          <a:prstGeom prst="rect">
+            <a:avLst/>
+          </a:prstGeom>
+          <a:noFill/>
+        </p:spPr>
+        <p:txBody>
+          <a:bodyPr wrap="square" lIns="0" rIns="0" tIns="0" bIns="0">
+            <a:spAutoFit/>
+          </a:bodyPr>
+          <a:lstStyle/>
+          <a:p>
+            <a:pPr algn="ctr"/>
+            <a:r>
+              <a:rPr sz="1100" b="1">
+                <a:solidFill>
+                  <a:srgbClr val="111827"/>
+                </a:solidFill>
+                <a:latin typeface="Arial"/>
+              </a:rPr>
+              <a:t>Share our favorite English activities</a:t>
+            </a:r>
+          </a:p>
+        </p:txBody>
+      </p:sp>
+      <p:sp>
+        <p:nvSpPr>
+          <p:cNvPr id="21" name="Oval 20"/>
           <p:cNvSpPr/>
           <p:nvPr/>
         </p:nvSpPr>
         <p:spPr>
           <a:xfrm>
-            <a:off x="1852574" y="2651760"/>
-            <a:ext cx="998067" cy="123444"/>
-          </a:xfrm>
-          <a:prstGeom prst="rect">
-            <a:avLst/>
-          </a:prstGeom>
-          <a:solidFill>
-            <a:srgbClr val="D90000"/>
-          </a:solidFill>
-          <a:ln>
-            <a:noFill/>
+            <a:off x="8951976" y="4517136"/>
+            <a:ext cx="658368" cy="658368"/>
+          </a:xfrm>
+          <a:prstGeom prst="ellipse">
+            <a:avLst/>
+          </a:prstGeom>
+          <a:solidFill>
+            <a:srgbClr val="FFFFFF"/>
+          </a:solidFill>
+          <a:ln w="22860">
+            <a:solidFill>
+              <a:srgbClr val="D90000"/>
+            </a:solidFill>
           </a:ln>
         </p:spPr>
         <p:style>
@@ -6966,143 +7190,14 @@
       </p:sp>
       <p:sp>
         <p:nvSpPr>
-          <p:cNvPr id="15" name="Rectangle 14"/>
-          <p:cNvSpPr/>
-          <p:nvPr/>
-        </p:nvSpPr>
-        <p:spPr>
-          <a:xfrm>
-            <a:off x="1690725" y="3022092"/>
-            <a:ext cx="1294790" cy="51435"/>
-          </a:xfrm>
-          <a:prstGeom prst="rect">
-            <a:avLst/>
-          </a:prstGeom>
-          <a:solidFill>
-            <a:srgbClr val="CBD5E1"/>
-          </a:solidFill>
-          <a:ln>
-            <a:noFill/>
-          </a:ln>
-        </p:spPr>
-        <p:style>
-          <a:lnRef idx="1">
-            <a:schemeClr val="accent1"/>
-          </a:lnRef>
-          <a:fillRef idx="3">
-            <a:schemeClr val="accent1"/>
-          </a:fillRef>
-          <a:effectRef idx="2">
-            <a:schemeClr val="accent1"/>
-          </a:effectRef>
-          <a:fontRef idx="minor">
-            <a:schemeClr val="lt1"/>
-          </a:fontRef>
-        </p:style>
-        <p:txBody>
-          <a:bodyPr rtlCol="0" anchor="ctr"/>
-          <a:lstStyle/>
-          <a:p>
-            <a:pPr algn="ctr"/>
-          </a:p>
-        </p:txBody>
-      </p:sp>
-      <p:sp>
-        <p:nvSpPr>
-          <p:cNvPr id="16" name="Rectangle 15"/>
-          <p:cNvSpPr/>
-          <p:nvPr/>
-        </p:nvSpPr>
-        <p:spPr>
-          <a:xfrm>
-            <a:off x="1690725" y="3268980"/>
-            <a:ext cx="1294790" cy="51435"/>
-          </a:xfrm>
-          <a:prstGeom prst="rect">
-            <a:avLst/>
-          </a:prstGeom>
-          <a:solidFill>
-            <a:srgbClr val="CBD5E1"/>
-          </a:solidFill>
-          <a:ln>
-            <a:noFill/>
-          </a:ln>
-        </p:spPr>
-        <p:style>
-          <a:lnRef idx="1">
-            <a:schemeClr val="accent1"/>
-          </a:lnRef>
-          <a:fillRef idx="3">
-            <a:schemeClr val="accent1"/>
-          </a:fillRef>
-          <a:effectRef idx="2">
-            <a:schemeClr val="accent1"/>
-          </a:effectRef>
-          <a:fontRef idx="minor">
-            <a:schemeClr val="lt1"/>
-          </a:fontRef>
-        </p:style>
-        <p:txBody>
-          <a:bodyPr rtlCol="0" anchor="ctr"/>
-          <a:lstStyle/>
-          <a:p>
-            <a:pPr algn="ctr"/>
-          </a:p>
-        </p:txBody>
-      </p:sp>
-      <p:sp>
-        <p:nvSpPr>
-          <p:cNvPr id="17" name="Rectangle 16"/>
-          <p:cNvSpPr/>
-          <p:nvPr/>
-        </p:nvSpPr>
-        <p:spPr>
-          <a:xfrm>
-            <a:off x="1690725" y="3515868"/>
-            <a:ext cx="1294790" cy="51435"/>
-          </a:xfrm>
-          <a:prstGeom prst="rect">
-            <a:avLst/>
-          </a:prstGeom>
-          <a:solidFill>
-            <a:srgbClr val="CBD5E1"/>
-          </a:solidFill>
-          <a:ln>
-            <a:noFill/>
-          </a:ln>
-        </p:spPr>
-        <p:style>
-          <a:lnRef idx="1">
-            <a:schemeClr val="accent1"/>
-          </a:lnRef>
-          <a:fillRef idx="3">
-            <a:schemeClr val="accent1"/>
-          </a:fillRef>
-          <a:effectRef idx="2">
-            <a:schemeClr val="accent1"/>
-          </a:effectRef>
-          <a:fontRef idx="minor">
-            <a:schemeClr val="lt1"/>
-          </a:fontRef>
-        </p:style>
-        <p:txBody>
-          <a:bodyPr rtlCol="0" anchor="ctr"/>
-          <a:lstStyle/>
-          <a:p>
-            <a:pPr algn="ctr"/>
-          </a:p>
-        </p:txBody>
-      </p:sp>
-      <p:sp>
-        <p:nvSpPr>
-          <p:cNvPr id="18" name="TextBox 17"/>
+          <p:cNvPr id="22" name="TextBox 21"/>
           <p:cNvSpPr txBox="1"/>
           <p:nvPr/>
         </p:nvSpPr>
         <p:spPr>
           <a:xfrm>
-            <a:off x="1097280" y="4041648"/>
-            <a:ext cx="2697480" cy="228600"/>
+            <a:off x="9116568" y="4700016"/>
+            <a:ext cx="329184" cy="201168"/>
           </a:xfrm>
           <a:prstGeom prst="rect">
             <a:avLst/>
@@ -7117,27 +7212,27 @@
           <a:p>
             <a:pPr algn="ctr"/>
             <a:r>
-              <a:rPr sz="1000" b="0">
-                <a:solidFill>
-                  <a:srgbClr val="475569"/>
+              <a:rPr sz="1300" b="1">
+                <a:solidFill>
+                  <a:srgbClr val="D90000"/>
                 </a:solidFill>
                 <a:latin typeface="Arial"/>
               </a:rPr>
-              <a:t>English</a:t>
-            </a:r>
-          </a:p>
-        </p:txBody>
-      </p:sp>
-      <p:sp>
-        <p:nvSpPr>
-          <p:cNvPr id="19" name="TextBox 18"/>
+              <a:t>3</a:t>
+            </a:r>
+          </a:p>
+        </p:txBody>
+      </p:sp>
+      <p:sp>
+        <p:nvSpPr>
+          <p:cNvPr id="23" name="TextBox 22"/>
           <p:cNvSpPr txBox="1"/>
           <p:nvPr/>
         </p:nvSpPr>
         <p:spPr>
           <a:xfrm>
-            <a:off x="987552" y="4617720"/>
-            <a:ext cx="2907792" cy="256032"/>
+            <a:off x="8439912" y="5349240"/>
+            <a:ext cx="1691640" cy="658368"/>
           </a:xfrm>
           <a:prstGeom prst="rect">
             <a:avLst/>
@@ -7152,513 +7247,7 @@
           <a:p>
             <a:pPr algn="ctr"/>
             <a:r>
-              <a:rPr sz="1200" b="1">
-                <a:solidFill>
-                  <a:srgbClr val="087490"/>
-                </a:solidFill>
-                <a:latin typeface="Arial"/>
-              </a:rPr>
-              <a:t>KEY IDEA</a:t>
-            </a:r>
-          </a:p>
-        </p:txBody>
-      </p:sp>
-      <p:sp>
-        <p:nvSpPr>
-          <p:cNvPr id="20" name="TextBox 19"/>
-          <p:cNvSpPr txBox="1"/>
-          <p:nvPr/>
-        </p:nvSpPr>
-        <p:spPr>
-          <a:xfrm>
-            <a:off x="960120" y="4919472"/>
-            <a:ext cx="2971800" cy="685800"/>
-          </a:xfrm>
-          <a:prstGeom prst="rect">
-            <a:avLst/>
-          </a:prstGeom>
-          <a:noFill/>
-        </p:spPr>
-        <p:txBody>
-          <a:bodyPr wrap="square" lIns="0" rIns="0" tIns="0" bIns="0">
-            <a:spAutoFit/>
-          </a:bodyPr>
-          <a:lstStyle/>
-          <a:p>
-            <a:pPr algn="ctr"/>
-            <a:r>
-              <a:rPr sz="1500" b="1">
-                <a:solidFill>
-                  <a:srgbClr val="111827"/>
-                </a:solidFill>
-                <a:latin typeface="Arial"/>
-              </a:rPr>
-              <a:t>Key idea: Oral reflection on the three main topics of Term 1: School Holidays</a:t>
-            </a:r>
-          </a:p>
-        </p:txBody>
-      </p:sp>
-      <p:sp>
-        <p:nvSpPr>
-          <p:cNvPr id="21" name="Rounded Rectangle 20"/>
-          <p:cNvSpPr/>
-          <p:nvPr/>
-        </p:nvSpPr>
-        <p:spPr>
-          <a:xfrm>
-            <a:off x="4572000" y="1874519"/>
-            <a:ext cx="6812280" cy="932688"/>
-          </a:xfrm>
-          <a:prstGeom prst="roundRect">
-            <a:avLst/>
-          </a:prstGeom>
-          <a:solidFill>
-            <a:srgbClr val="FFFFFF"/>
-          </a:solidFill>
-          <a:ln w="11430">
-            <a:solidFill>
-              <a:srgbClr val="CBD5E1"/>
-            </a:solidFill>
-          </a:ln>
-        </p:spPr>
-        <p:style>
-          <a:lnRef idx="1">
-            <a:schemeClr val="accent1"/>
-          </a:lnRef>
-          <a:fillRef idx="3">
-            <a:schemeClr val="accent1"/>
-          </a:fillRef>
-          <a:effectRef idx="2">
-            <a:schemeClr val="accent1"/>
-          </a:effectRef>
-          <a:fontRef idx="minor">
-            <a:schemeClr val="lt1"/>
-          </a:fontRef>
-        </p:style>
-        <p:txBody>
-          <a:bodyPr rtlCol="0" anchor="ctr"/>
-          <a:lstStyle/>
-          <a:p>
-            <a:pPr algn="ctr"/>
-          </a:p>
-        </p:txBody>
-      </p:sp>
-      <p:sp>
-        <p:nvSpPr>
-          <p:cNvPr id="22" name="Rectangle 21"/>
-          <p:cNvSpPr/>
-          <p:nvPr/>
-        </p:nvSpPr>
-        <p:spPr>
-          <a:xfrm>
-            <a:off x="4572000" y="1874519"/>
-            <a:ext cx="566928" cy="932688"/>
-          </a:xfrm>
-          <a:prstGeom prst="rect">
-            <a:avLst/>
-          </a:prstGeom>
-          <a:solidFill>
-            <a:srgbClr val="087490"/>
-          </a:solidFill>
-          <a:ln>
-            <a:noFill/>
-          </a:ln>
-        </p:spPr>
-        <p:style>
-          <a:lnRef idx="1">
-            <a:schemeClr val="accent1"/>
-          </a:lnRef>
-          <a:fillRef idx="3">
-            <a:schemeClr val="accent1"/>
-          </a:fillRef>
-          <a:effectRef idx="2">
-            <a:schemeClr val="accent1"/>
-          </a:effectRef>
-          <a:fontRef idx="minor">
-            <a:schemeClr val="lt1"/>
-          </a:fontRef>
-        </p:style>
-        <p:txBody>
-          <a:bodyPr rtlCol="0" anchor="ctr"/>
-          <a:lstStyle/>
-          <a:p>
-            <a:pPr algn="ctr"/>
-          </a:p>
-        </p:txBody>
-      </p:sp>
-      <p:sp>
-        <p:nvSpPr>
-          <p:cNvPr id="23" name="TextBox 22"/>
-          <p:cNvSpPr txBox="1"/>
-          <p:nvPr/>
-        </p:nvSpPr>
-        <p:spPr>
-          <a:xfrm>
-            <a:off x="4572000" y="2221991"/>
-            <a:ext cx="566928" cy="237744"/>
-          </a:xfrm>
-          <a:prstGeom prst="rect">
-            <a:avLst/>
-          </a:prstGeom>
-          <a:noFill/>
-        </p:spPr>
-        <p:txBody>
-          <a:bodyPr wrap="square" lIns="0" rIns="0" tIns="0" bIns="0">
-            <a:spAutoFit/>
-          </a:bodyPr>
-          <a:lstStyle/>
-          <a:p>
-            <a:pPr algn="ctr"/>
-            <a:r>
-              <a:rPr sz="1400" b="1">
-                <a:solidFill>
-                  <a:srgbClr val="FFFFFF"/>
-                </a:solidFill>
-                <a:latin typeface="Arial"/>
-              </a:rPr>
-              <a:t>1</a:t>
-            </a:r>
-          </a:p>
-        </p:txBody>
-      </p:sp>
-      <p:sp>
-        <p:nvSpPr>
-          <p:cNvPr id="24" name="TextBox 23"/>
-          <p:cNvSpPr txBox="1"/>
-          <p:nvPr/>
-        </p:nvSpPr>
-        <p:spPr>
-          <a:xfrm>
-            <a:off x="5358384" y="2039112"/>
-            <a:ext cx="5788152" cy="694944"/>
-          </a:xfrm>
-          <a:prstGeom prst="rect">
-            <a:avLst/>
-          </a:prstGeom>
-          <a:noFill/>
-        </p:spPr>
-        <p:txBody>
-          <a:bodyPr wrap="square" lIns="0" rIns="0" tIns="0" bIns="0">
-            <a:spAutoFit/>
-          </a:bodyPr>
-          <a:lstStyle/>
-          <a:p>
-            <a:r>
-              <a:rPr sz="1600" b="1">
-                <a:solidFill>
-                  <a:srgbClr val="111827"/>
-                </a:solidFill>
-                <a:latin typeface="Arial"/>
-              </a:rPr>
-              <a:t>Review the topics we covered</a:t>
-            </a:r>
-          </a:p>
-        </p:txBody>
-      </p:sp>
-      <p:sp>
-        <p:nvSpPr>
-          <p:cNvPr id="25" name="Rounded Rectangle 24"/>
-          <p:cNvSpPr/>
-          <p:nvPr/>
-        </p:nvSpPr>
-        <p:spPr>
-          <a:xfrm>
-            <a:off x="4572000" y="3108960"/>
-            <a:ext cx="6812280" cy="932688"/>
-          </a:xfrm>
-          <a:prstGeom prst="roundRect">
-            <a:avLst/>
-          </a:prstGeom>
-          <a:solidFill>
-            <a:srgbClr val="FFFFFF"/>
-          </a:solidFill>
-          <a:ln w="11430">
-            <a:solidFill>
-              <a:srgbClr val="CBD5E1"/>
-            </a:solidFill>
-          </a:ln>
-        </p:spPr>
-        <p:style>
-          <a:lnRef idx="1">
-            <a:schemeClr val="accent1"/>
-          </a:lnRef>
-          <a:fillRef idx="3">
-            <a:schemeClr val="accent1"/>
-          </a:fillRef>
-          <a:effectRef idx="2">
-            <a:schemeClr val="accent1"/>
-          </a:effectRef>
-          <a:fontRef idx="minor">
-            <a:schemeClr val="lt1"/>
-          </a:fontRef>
-        </p:style>
-        <p:txBody>
-          <a:bodyPr rtlCol="0" anchor="ctr"/>
-          <a:lstStyle/>
-          <a:p>
-            <a:pPr algn="ctr"/>
-          </a:p>
-        </p:txBody>
-      </p:sp>
-      <p:sp>
-        <p:nvSpPr>
-          <p:cNvPr id="26" name="Rectangle 25"/>
-          <p:cNvSpPr/>
-          <p:nvPr/>
-        </p:nvSpPr>
-        <p:spPr>
-          <a:xfrm>
-            <a:off x="4572000" y="3108960"/>
-            <a:ext cx="566928" cy="932688"/>
-          </a:xfrm>
-          <a:prstGeom prst="rect">
-            <a:avLst/>
-          </a:prstGeom>
-          <a:solidFill>
-            <a:srgbClr val="087490"/>
-          </a:solidFill>
-          <a:ln>
-            <a:noFill/>
-          </a:ln>
-        </p:spPr>
-        <p:style>
-          <a:lnRef idx="1">
-            <a:schemeClr val="accent1"/>
-          </a:lnRef>
-          <a:fillRef idx="3">
-            <a:schemeClr val="accent1"/>
-          </a:fillRef>
-          <a:effectRef idx="2">
-            <a:schemeClr val="accent1"/>
-          </a:effectRef>
-          <a:fontRef idx="minor">
-            <a:schemeClr val="lt1"/>
-          </a:fontRef>
-        </p:style>
-        <p:txBody>
-          <a:bodyPr rtlCol="0" anchor="ctr"/>
-          <a:lstStyle/>
-          <a:p>
-            <a:pPr algn="ctr"/>
-          </a:p>
-        </p:txBody>
-      </p:sp>
-      <p:sp>
-        <p:nvSpPr>
-          <p:cNvPr id="27" name="TextBox 26"/>
-          <p:cNvSpPr txBox="1"/>
-          <p:nvPr/>
-        </p:nvSpPr>
-        <p:spPr>
-          <a:xfrm>
-            <a:off x="4572000" y="3456432"/>
-            <a:ext cx="566928" cy="237744"/>
-          </a:xfrm>
-          <a:prstGeom prst="rect">
-            <a:avLst/>
-          </a:prstGeom>
-          <a:noFill/>
-        </p:spPr>
-        <p:txBody>
-          <a:bodyPr wrap="square" lIns="0" rIns="0" tIns="0" bIns="0">
-            <a:spAutoFit/>
-          </a:bodyPr>
-          <a:lstStyle/>
-          <a:p>
-            <a:pPr algn="ctr"/>
-            <a:r>
-              <a:rPr sz="1400" b="1">
-                <a:solidFill>
-                  <a:srgbClr val="FFFFFF"/>
-                </a:solidFill>
-                <a:latin typeface="Arial"/>
-              </a:rPr>
-              <a:t>2</a:t>
-            </a:r>
-          </a:p>
-        </p:txBody>
-      </p:sp>
-      <p:sp>
-        <p:nvSpPr>
-          <p:cNvPr id="28" name="TextBox 27"/>
-          <p:cNvSpPr txBox="1"/>
-          <p:nvPr/>
-        </p:nvSpPr>
-        <p:spPr>
-          <a:xfrm>
-            <a:off x="5358384" y="3273552"/>
-            <a:ext cx="5788152" cy="694944"/>
-          </a:xfrm>
-          <a:prstGeom prst="rect">
-            <a:avLst/>
-          </a:prstGeom>
-          <a:noFill/>
-        </p:spPr>
-        <p:txBody>
-          <a:bodyPr wrap="square" lIns="0" rIns="0" tIns="0" bIns="0">
-            <a:spAutoFit/>
-          </a:bodyPr>
-          <a:lstStyle/>
-          <a:p>
-            <a:r>
-              <a:rPr sz="1600" b="1">
-                <a:solidFill>
-                  <a:srgbClr val="111827"/>
-                </a:solidFill>
-                <a:latin typeface="Arial"/>
-              </a:rPr>
-              <a:t>Share our favorite English activities</a:t>
-            </a:r>
-          </a:p>
-        </p:txBody>
-      </p:sp>
-      <p:sp>
-        <p:nvSpPr>
-          <p:cNvPr id="29" name="Rounded Rectangle 28"/>
-          <p:cNvSpPr/>
-          <p:nvPr/>
-        </p:nvSpPr>
-        <p:spPr>
-          <a:xfrm>
-            <a:off x="4572000" y="4343400"/>
-            <a:ext cx="6812280" cy="932688"/>
-          </a:xfrm>
-          <a:prstGeom prst="roundRect">
-            <a:avLst/>
-          </a:prstGeom>
-          <a:solidFill>
-            <a:srgbClr val="FFFFFF"/>
-          </a:solidFill>
-          <a:ln w="11430">
-            <a:solidFill>
-              <a:srgbClr val="CBD5E1"/>
-            </a:solidFill>
-          </a:ln>
-        </p:spPr>
-        <p:style>
-          <a:lnRef idx="1">
-            <a:schemeClr val="accent1"/>
-          </a:lnRef>
-          <a:fillRef idx="3">
-            <a:schemeClr val="accent1"/>
-          </a:fillRef>
-          <a:effectRef idx="2">
-            <a:schemeClr val="accent1"/>
-          </a:effectRef>
-          <a:fontRef idx="minor">
-            <a:schemeClr val="lt1"/>
-          </a:fontRef>
-        </p:style>
-        <p:txBody>
-          <a:bodyPr rtlCol="0" anchor="ctr"/>
-          <a:lstStyle/>
-          <a:p>
-            <a:pPr algn="ctr"/>
-          </a:p>
-        </p:txBody>
-      </p:sp>
-      <p:sp>
-        <p:nvSpPr>
-          <p:cNvPr id="30" name="Rectangle 29"/>
-          <p:cNvSpPr/>
-          <p:nvPr/>
-        </p:nvSpPr>
-        <p:spPr>
-          <a:xfrm>
-            <a:off x="4572000" y="4343400"/>
-            <a:ext cx="566928" cy="932688"/>
-          </a:xfrm>
-          <a:prstGeom prst="rect">
-            <a:avLst/>
-          </a:prstGeom>
-          <a:solidFill>
-            <a:srgbClr val="087490"/>
-          </a:solidFill>
-          <a:ln>
-            <a:noFill/>
-          </a:ln>
-        </p:spPr>
-        <p:style>
-          <a:lnRef idx="1">
-            <a:schemeClr val="accent1"/>
-          </a:lnRef>
-          <a:fillRef idx="3">
-            <a:schemeClr val="accent1"/>
-          </a:fillRef>
-          <a:effectRef idx="2">
-            <a:schemeClr val="accent1"/>
-          </a:effectRef>
-          <a:fontRef idx="minor">
-            <a:schemeClr val="lt1"/>
-          </a:fontRef>
-        </p:style>
-        <p:txBody>
-          <a:bodyPr rtlCol="0" anchor="ctr"/>
-          <a:lstStyle/>
-          <a:p>
-            <a:pPr algn="ctr"/>
-          </a:p>
-        </p:txBody>
-      </p:sp>
-      <p:sp>
-        <p:nvSpPr>
-          <p:cNvPr id="31" name="TextBox 30"/>
-          <p:cNvSpPr txBox="1"/>
-          <p:nvPr/>
-        </p:nvSpPr>
-        <p:spPr>
-          <a:xfrm>
-            <a:off x="4572000" y="4690872"/>
-            <a:ext cx="566928" cy="237744"/>
-          </a:xfrm>
-          <a:prstGeom prst="rect">
-            <a:avLst/>
-          </a:prstGeom>
-          <a:noFill/>
-        </p:spPr>
-        <p:txBody>
-          <a:bodyPr wrap="square" lIns="0" rIns="0" tIns="0" bIns="0">
-            <a:spAutoFit/>
-          </a:bodyPr>
-          <a:lstStyle/>
-          <a:p>
-            <a:pPr algn="ctr"/>
-            <a:r>
-              <a:rPr sz="1400" b="1">
-                <a:solidFill>
-                  <a:srgbClr val="FFFFFF"/>
-                </a:solidFill>
-                <a:latin typeface="Arial"/>
-              </a:rPr>
-              <a:t>3</a:t>
-            </a:r>
-          </a:p>
-        </p:txBody>
-      </p:sp>
-      <p:sp>
-        <p:nvSpPr>
-          <p:cNvPr id="32" name="TextBox 31"/>
-          <p:cNvSpPr txBox="1"/>
-          <p:nvPr/>
-        </p:nvSpPr>
-        <p:spPr>
-          <a:xfrm>
-            <a:off x="5358384" y="4507992"/>
-            <a:ext cx="5788152" cy="694944"/>
-          </a:xfrm>
-          <a:prstGeom prst="rect">
-            <a:avLst/>
-          </a:prstGeom>
-          <a:noFill/>
-        </p:spPr>
-        <p:txBody>
-          <a:bodyPr wrap="square" lIns="0" rIns="0" tIns="0" bIns="0">
-            <a:spAutoFit/>
-          </a:bodyPr>
-          <a:lstStyle/>
-          <a:p>
-            <a:r>
-              <a:rPr sz="1600" b="1">
+              <a:rPr sz="1100" b="1">
                 <a:solidFill>
                   <a:srgbClr val="111827"/>
                 </a:solidFill>
@@ -7671,7 +7260,7 @@
       </p:sp>
       <p:sp>
         <p:nvSpPr>
-          <p:cNvPr id="33" name="TextBox 32"/>
+          <p:cNvPr id="24" name="TextBox 23"/>
           <p:cNvSpPr txBox="1"/>
           <p:nvPr/>
         </p:nvSpPr>
@@ -8099,18 +7688,18 @@
         </p:nvSpPr>
         <p:spPr>
           <a:xfrm>
-            <a:off x="822960" y="1828800"/>
-            <a:ext cx="7360920" cy="4251960"/>
+            <a:off x="777240" y="1755648"/>
+            <a:ext cx="10652760" cy="4480560"/>
           </a:xfrm>
           <a:prstGeom prst="roundRect">
             <a:avLst/>
           </a:prstGeom>
           <a:solidFill>
-            <a:srgbClr val="1F2937"/>
-          </a:solidFill>
-          <a:ln w="19050">
+            <a:srgbClr val="FFFFFF"/>
+          </a:solidFill>
+          <a:ln w="17145">
             <a:solidFill>
-              <a:srgbClr val="FCD116"/>
+              <a:srgbClr val="D97706"/>
             </a:solidFill>
           </a:ln>
         </p:spPr>
@@ -8129,10 +7718,19 @@
           </a:fontRef>
         </p:style>
         <p:txBody>
-          <a:bodyPr rtlCol="0" anchor="ctr"/>
-          <a:lstStyle/>
-          <a:p>
-            <a:pPr algn="ctr"/>
+          <a:bodyPr rtlCol="0" anchor="t" wrap="square" lIns="101600" rIns="101600" tIns="101600" bIns="38100"/>
+          <a:lstStyle/>
+          <a:p>
+            <a:pPr algn="l"/>
+            <a:r>
+              <a:rPr sz="1200" b="1">
+                <a:solidFill>
+                  <a:srgbClr val="D97706"/>
+                </a:solidFill>
+                <a:latin typeface="Arial"/>
+              </a:rPr>
+              <a:t>MODEL MAP</a:t>
+            </a:r>
           </a:p>
         </p:txBody>
       </p:sp>
@@ -8144,8 +7742,8 @@
         </p:nvSpPr>
         <p:spPr>
           <a:xfrm>
-            <a:off x="1097280" y="2084831"/>
-            <a:ext cx="6812280" cy="256032"/>
+            <a:off x="1371600" y="2414015"/>
+            <a:ext cx="9464040" cy="384048"/>
           </a:xfrm>
           <a:prstGeom prst="rect">
             <a:avLst/>
@@ -8158,72 +7756,39 @@
           </a:bodyPr>
           <a:lstStyle/>
           <a:p>
-            <a:r>
-              <a:rPr sz="1200" b="1">
-                <a:solidFill>
-                  <a:srgbClr val="FCD116"/>
+            <a:pPr algn="ctr"/>
+            <a:r>
+              <a:rPr sz="1800" b="1">
+                <a:solidFill>
+                  <a:srgbClr val="111827"/>
                 </a:solidFill>
                 <a:latin typeface="Arial"/>
               </a:rPr>
-              <a:t>BOARD MODEL</a:t>
-            </a:r>
-          </a:p>
-        </p:txBody>
-      </p:sp>
-      <p:sp>
-        <p:nvSpPr>
-          <p:cNvPr id="13" name="TextBox 12"/>
-          <p:cNvSpPr txBox="1"/>
-          <p:nvPr/>
-        </p:nvSpPr>
-        <p:spPr>
-          <a:xfrm>
-            <a:off x="1143000" y="2578608"/>
-            <a:ext cx="6583680" cy="347472"/>
-          </a:xfrm>
-          <a:prstGeom prst="rect">
-            <a:avLst/>
-          </a:prstGeom>
-          <a:noFill/>
-        </p:spPr>
-        <p:txBody>
-          <a:bodyPr wrap="square" lIns="0" rIns="0" tIns="0" bIns="0">
-            <a:spAutoFit/>
-          </a:bodyPr>
-          <a:lstStyle/>
-          <a:p>
-            <a:r>
-              <a:rPr sz="1600" b="0">
-                <a:solidFill>
-                  <a:srgbClr val="FFFFFF"/>
-                </a:solidFill>
-                <a:latin typeface="Arial"/>
-              </a:rPr>
-              <a:t>1. NEW VOCABULARY</a:t>
-            </a:r>
-          </a:p>
-        </p:txBody>
-      </p:sp>
-      <p:sp>
-        <p:nvSpPr>
-          <p:cNvPr id="14" name="Rounded Rectangle 13"/>
+              <a:t>Worked example</a:t>
+            </a:r>
+          </a:p>
+        </p:txBody>
+      </p:sp>
+      <p:sp>
+        <p:nvSpPr>
+          <p:cNvPr id="13" name="Oval 12"/>
           <p:cNvSpPr/>
           <p:nvPr/>
         </p:nvSpPr>
         <p:spPr>
           <a:xfrm>
-            <a:off x="8549640" y="1828800"/>
-            <a:ext cx="2697480" cy="4251960"/>
-          </a:xfrm>
-          <a:prstGeom prst="roundRect">
-            <a:avLst/>
-          </a:prstGeom>
-          <a:solidFill>
-            <a:srgbClr val="FFF7E0"/>
-          </a:solidFill>
-          <a:ln w="16510">
+            <a:off x="5751575" y="4215383"/>
+            <a:ext cx="658368" cy="658368"/>
+          </a:xfrm>
+          <a:prstGeom prst="ellipse">
+            <a:avLst/>
+          </a:prstGeom>
+          <a:solidFill>
+            <a:srgbClr val="FFFFFF"/>
+          </a:solidFill>
+          <a:ln w="22860">
             <a:solidFill>
-              <a:srgbClr val="D97706"/>
+              <a:srgbClr val="D90000"/>
             </a:solidFill>
           </a:ln>
         </p:spPr>
@@ -8251,276 +7816,14 @@
       </p:sp>
       <p:sp>
         <p:nvSpPr>
-          <p:cNvPr id="15" name="Rectangle 14"/>
-          <p:cNvSpPr/>
-          <p:nvPr/>
-        </p:nvSpPr>
-        <p:spPr>
-          <a:xfrm>
-            <a:off x="9261043" y="2754629"/>
-            <a:ext cx="562355" cy="778154"/>
-          </a:xfrm>
-          <a:prstGeom prst="rect">
-            <a:avLst/>
-          </a:prstGeom>
-          <a:solidFill>
-            <a:srgbClr val="FFFFFF"/>
-          </a:solidFill>
-          <a:ln w="10160">
-            <a:solidFill>
-              <a:srgbClr val="1D4ED8"/>
-            </a:solidFill>
-          </a:ln>
-        </p:spPr>
-        <p:style>
-          <a:lnRef idx="1">
-            <a:schemeClr val="accent1"/>
-          </a:lnRef>
-          <a:fillRef idx="3">
-            <a:schemeClr val="accent1"/>
-          </a:fillRef>
-          <a:effectRef idx="2">
-            <a:schemeClr val="accent1"/>
-          </a:effectRef>
-          <a:fontRef idx="minor">
-            <a:schemeClr val="lt1"/>
-          </a:fontRef>
-        </p:style>
-        <p:txBody>
-          <a:bodyPr rtlCol="0" anchor="ctr"/>
-          <a:lstStyle/>
-          <a:p>
-            <a:pPr algn="ctr"/>
-          </a:p>
-        </p:txBody>
-      </p:sp>
-      <p:sp>
-        <p:nvSpPr>
-          <p:cNvPr id="16" name="Rectangle 15"/>
-          <p:cNvSpPr/>
-          <p:nvPr/>
-        </p:nvSpPr>
-        <p:spPr>
-          <a:xfrm>
-            <a:off x="9823399" y="2754629"/>
-            <a:ext cx="562355" cy="778154"/>
-          </a:xfrm>
-          <a:prstGeom prst="rect">
-            <a:avLst/>
-          </a:prstGeom>
-          <a:solidFill>
-            <a:srgbClr val="FFFFFF"/>
-          </a:solidFill>
-          <a:ln w="10160">
-            <a:solidFill>
-              <a:srgbClr val="1D4ED8"/>
-            </a:solidFill>
-          </a:ln>
-        </p:spPr>
-        <p:style>
-          <a:lnRef idx="1">
-            <a:schemeClr val="accent1"/>
-          </a:lnRef>
-          <a:fillRef idx="3">
-            <a:schemeClr val="accent1"/>
-          </a:fillRef>
-          <a:effectRef idx="2">
-            <a:schemeClr val="accent1"/>
-          </a:effectRef>
-          <a:fontRef idx="minor">
-            <a:schemeClr val="lt1"/>
-          </a:fontRef>
-        </p:style>
-        <p:txBody>
-          <a:bodyPr rtlCol="0" anchor="ctr"/>
-          <a:lstStyle/>
-          <a:p>
-            <a:pPr algn="ctr"/>
-          </a:p>
-        </p:txBody>
-      </p:sp>
-      <p:sp>
-        <p:nvSpPr>
-          <p:cNvPr id="17" name="Rectangle 16"/>
-          <p:cNvSpPr/>
-          <p:nvPr/>
-        </p:nvSpPr>
-        <p:spPr>
-          <a:xfrm>
-            <a:off x="9485985" y="2670048"/>
-            <a:ext cx="693572" cy="101498"/>
-          </a:xfrm>
-          <a:prstGeom prst="rect">
-            <a:avLst/>
-          </a:prstGeom>
-          <a:solidFill>
-            <a:srgbClr val="D90000"/>
-          </a:solidFill>
-          <a:ln>
-            <a:noFill/>
-          </a:ln>
-        </p:spPr>
-        <p:style>
-          <a:lnRef idx="1">
-            <a:schemeClr val="accent1"/>
-          </a:lnRef>
-          <a:fillRef idx="3">
-            <a:schemeClr val="accent1"/>
-          </a:fillRef>
-          <a:effectRef idx="2">
-            <a:schemeClr val="accent1"/>
-          </a:effectRef>
-          <a:fontRef idx="minor">
-            <a:schemeClr val="lt1"/>
-          </a:fontRef>
-        </p:style>
-        <p:txBody>
-          <a:bodyPr rtlCol="0" anchor="ctr"/>
-          <a:lstStyle/>
-          <a:p>
-            <a:pPr algn="ctr"/>
-          </a:p>
-        </p:txBody>
-      </p:sp>
-      <p:sp>
-        <p:nvSpPr>
-          <p:cNvPr id="18" name="Rectangle 17"/>
-          <p:cNvSpPr/>
-          <p:nvPr/>
-        </p:nvSpPr>
-        <p:spPr>
-          <a:xfrm>
-            <a:off x="9373514" y="2974543"/>
-            <a:ext cx="899769" cy="42291"/>
-          </a:xfrm>
-          <a:prstGeom prst="rect">
-            <a:avLst/>
-          </a:prstGeom>
-          <a:solidFill>
-            <a:srgbClr val="CBD5E1"/>
-          </a:solidFill>
-          <a:ln>
-            <a:noFill/>
-          </a:ln>
-        </p:spPr>
-        <p:style>
-          <a:lnRef idx="1">
-            <a:schemeClr val="accent1"/>
-          </a:lnRef>
-          <a:fillRef idx="3">
-            <a:schemeClr val="accent1"/>
-          </a:fillRef>
-          <a:effectRef idx="2">
-            <a:schemeClr val="accent1"/>
-          </a:effectRef>
-          <a:fontRef idx="minor">
-            <a:schemeClr val="lt1"/>
-          </a:fontRef>
-        </p:style>
-        <p:txBody>
-          <a:bodyPr rtlCol="0" anchor="ctr"/>
-          <a:lstStyle/>
-          <a:p>
-            <a:pPr algn="ctr"/>
-          </a:p>
-        </p:txBody>
-      </p:sp>
-      <p:sp>
-        <p:nvSpPr>
-          <p:cNvPr id="19" name="Rectangle 18"/>
-          <p:cNvSpPr/>
-          <p:nvPr/>
-        </p:nvSpPr>
-        <p:spPr>
-          <a:xfrm>
-            <a:off x="9373514" y="3177539"/>
-            <a:ext cx="899769" cy="42291"/>
-          </a:xfrm>
-          <a:prstGeom prst="rect">
-            <a:avLst/>
-          </a:prstGeom>
-          <a:solidFill>
-            <a:srgbClr val="CBD5E1"/>
-          </a:solidFill>
-          <a:ln>
-            <a:noFill/>
-          </a:ln>
-        </p:spPr>
-        <p:style>
-          <a:lnRef idx="1">
-            <a:schemeClr val="accent1"/>
-          </a:lnRef>
-          <a:fillRef idx="3">
-            <a:schemeClr val="accent1"/>
-          </a:fillRef>
-          <a:effectRef idx="2">
-            <a:schemeClr val="accent1"/>
-          </a:effectRef>
-          <a:fontRef idx="minor">
-            <a:schemeClr val="lt1"/>
-          </a:fontRef>
-        </p:style>
-        <p:txBody>
-          <a:bodyPr rtlCol="0" anchor="ctr"/>
-          <a:lstStyle/>
-          <a:p>
-            <a:pPr algn="ctr"/>
-          </a:p>
-        </p:txBody>
-      </p:sp>
-      <p:sp>
-        <p:nvSpPr>
-          <p:cNvPr id="20" name="Rectangle 19"/>
-          <p:cNvSpPr/>
-          <p:nvPr/>
-        </p:nvSpPr>
-        <p:spPr>
-          <a:xfrm>
-            <a:off x="9373514" y="3380536"/>
-            <a:ext cx="899769" cy="42291"/>
-          </a:xfrm>
-          <a:prstGeom prst="rect">
-            <a:avLst/>
-          </a:prstGeom>
-          <a:solidFill>
-            <a:srgbClr val="CBD5E1"/>
-          </a:solidFill>
-          <a:ln>
-            <a:noFill/>
-          </a:ln>
-        </p:spPr>
-        <p:style>
-          <a:lnRef idx="1">
-            <a:schemeClr val="accent1"/>
-          </a:lnRef>
-          <a:fillRef idx="3">
-            <a:schemeClr val="accent1"/>
-          </a:fillRef>
-          <a:effectRef idx="2">
-            <a:schemeClr val="accent1"/>
-          </a:effectRef>
-          <a:fontRef idx="minor">
-            <a:schemeClr val="lt1"/>
-          </a:fontRef>
-        </p:style>
-        <p:txBody>
-          <a:bodyPr rtlCol="0" anchor="ctr"/>
-          <a:lstStyle/>
-          <a:p>
-            <a:pPr algn="ctr"/>
-          </a:p>
-        </p:txBody>
-      </p:sp>
-      <p:sp>
-        <p:nvSpPr>
-          <p:cNvPr id="21" name="TextBox 20"/>
+          <p:cNvPr id="14" name="TextBox 13"/>
           <p:cNvSpPr txBox="1"/>
           <p:nvPr/>
         </p:nvSpPr>
         <p:spPr>
           <a:xfrm>
-            <a:off x="8961120" y="3767328"/>
-            <a:ext cx="1874519" cy="228600"/>
+            <a:off x="5916168" y="4398264"/>
+            <a:ext cx="329184" cy="201168"/>
           </a:xfrm>
           <a:prstGeom prst="rect">
             <a:avLst/>
@@ -8535,27 +7838,27 @@
           <a:p>
             <a:pPr algn="ctr"/>
             <a:r>
-              <a:rPr sz="1000" b="0">
-                <a:solidFill>
-                  <a:srgbClr val="475569"/>
+              <a:rPr sz="1300" b="1">
+                <a:solidFill>
+                  <a:srgbClr val="D90000"/>
                 </a:solidFill>
                 <a:latin typeface="Arial"/>
               </a:rPr>
-              <a:t>English</a:t>
-            </a:r>
-          </a:p>
-        </p:txBody>
-      </p:sp>
-      <p:sp>
-        <p:nvSpPr>
-          <p:cNvPr id="22" name="TextBox 21"/>
+              <a:t>1</a:t>
+            </a:r>
+          </a:p>
+        </p:txBody>
+      </p:sp>
+      <p:sp>
+        <p:nvSpPr>
+          <p:cNvPr id="15" name="TextBox 14"/>
           <p:cNvSpPr txBox="1"/>
           <p:nvPr/>
         </p:nvSpPr>
         <p:spPr>
           <a:xfrm>
-            <a:off x="8869680" y="4526280"/>
-            <a:ext cx="2057400" cy="804672"/>
+            <a:off x="5239512" y="5047488"/>
+            <a:ext cx="1691640" cy="658368"/>
           </a:xfrm>
           <a:prstGeom prst="rect">
             <a:avLst/>
@@ -8570,20 +7873,20 @@
           <a:p>
             <a:pPr algn="ctr"/>
             <a:r>
-              <a:rPr sz="1400" b="1">
+              <a:rPr sz="1100" b="1">
                 <a:solidFill>
                   <a:srgbClr val="111827"/>
                 </a:solidFill>
                 <a:latin typeface="Arial"/>
               </a:rPr>
-              <a:t>Teacher models first. Learners copy the pattern, then explain the step.</a:t>
-            </a:r>
-          </a:p>
-        </p:txBody>
-      </p:sp>
-      <p:sp>
-        <p:nvSpPr>
-          <p:cNvPr id="23" name="TextBox 22"/>
+              <a:t>NEW VOCABULARY</a:t>
+            </a:r>
+          </a:p>
+        </p:txBody>
+      </p:sp>
+      <p:sp>
+        <p:nvSpPr>
+          <p:cNvPr id="16" name="TextBox 15"/>
           <p:cNvSpPr txBox="1"/>
           <p:nvPr/>
         </p:nvSpPr>
@@ -9011,14 +8314,14 @@
         </p:nvSpPr>
         <p:spPr>
           <a:xfrm>
-            <a:off x="777240" y="1719072"/>
-            <a:ext cx="10652760" cy="822960"/>
+            <a:off x="777240" y="1755648"/>
+            <a:ext cx="10652760" cy="4480560"/>
           </a:xfrm>
           <a:prstGeom prst="roundRect">
             <a:avLst/>
           </a:prstGeom>
           <a:solidFill>
-            <a:srgbClr val="FFF7E0"/>
+            <a:srgbClr val="FFFFFF"/>
           </a:solidFill>
           <a:ln w="17780">
             <a:solidFill>
@@ -9041,42 +8344,67 @@
           </a:fontRef>
         </p:style>
         <p:txBody>
-          <a:bodyPr rtlCol="0" anchor="ctr" wrap="square" lIns="101600" rIns="101600" tIns="38100" bIns="38100"/>
-          <a:lstStyle/>
-          <a:p>
-            <a:pPr algn="ctr"/>
-            <a:r>
-              <a:rPr sz="1900" b="1">
-                <a:solidFill>
-                  <a:srgbClr val="111827"/>
+          <a:bodyPr rtlCol="0" anchor="ctr"/>
+          <a:lstStyle/>
+          <a:p>
+            <a:pPr algn="ctr"/>
+          </a:p>
+        </p:txBody>
+      </p:sp>
+      <p:sp>
+        <p:nvSpPr>
+          <p:cNvPr id="12" name="TextBox 11"/>
+          <p:cNvSpPr txBox="1"/>
+          <p:nvPr/>
+        </p:nvSpPr>
+        <p:spPr>
+          <a:xfrm>
+            <a:off x="1051560" y="1975104"/>
+            <a:ext cx="1920240" cy="237744"/>
+          </a:xfrm>
+          <a:prstGeom prst="rect">
+            <a:avLst/>
+          </a:prstGeom>
+          <a:noFill/>
+        </p:spPr>
+        <p:txBody>
+          <a:bodyPr wrap="square" lIns="0" rIns="0" tIns="0" bIns="0">
+            <a:spAutoFit/>
+          </a:bodyPr>
+          <a:lstStyle/>
+          <a:p>
+            <a:r>
+              <a:rPr sz="1200" b="1">
+                <a:solidFill>
+                  <a:srgbClr val="BE123C"/>
                 </a:solidFill>
                 <a:latin typeface="Arial"/>
               </a:rPr>
-              <a:t>Answer with evidence:</a:t>
-            </a:r>
-          </a:p>
-        </p:txBody>
-      </p:sp>
-      <p:sp>
-        <p:nvSpPr>
-          <p:cNvPr id="12" name="Rounded Rectangle 11"/>
+              <a:t>PRACTICE FLOW</a:t>
+            </a:r>
+          </a:p>
+        </p:txBody>
+      </p:sp>
+      <p:sp>
+        <p:nvSpPr>
+          <p:cNvPr id="13" name="Rounded Rectangle 12"/>
           <p:cNvSpPr/>
           <p:nvPr/>
         </p:nvSpPr>
         <p:spPr>
           <a:xfrm>
-            <a:off x="868680" y="2743200"/>
-            <a:ext cx="10378440" cy="804672"/>
+            <a:off x="777240" y="2304288"/>
+            <a:ext cx="10652760" cy="822960"/>
           </a:xfrm>
           <a:prstGeom prst="roundRect">
             <a:avLst/>
           </a:prstGeom>
           <a:solidFill>
-            <a:srgbClr val="FFFFFF"/>
-          </a:solidFill>
-          <a:ln w="11430">
+            <a:srgbClr val="FFF7E0"/>
+          </a:solidFill>
+          <a:ln w="17780">
             <a:solidFill>
-              <a:srgbClr val="CBD5E1"/>
+              <a:srgbClr val="BE123C"/>
             </a:solidFill>
           </a:ln>
         </p:spPr>
@@ -9095,32 +8423,43 @@
           </a:fontRef>
         </p:style>
         <p:txBody>
-          <a:bodyPr rtlCol="0" anchor="ctr"/>
-          <a:lstStyle/>
-          <a:p>
-            <a:pPr algn="ctr"/>
-          </a:p>
-        </p:txBody>
-      </p:sp>
-      <p:sp>
-        <p:nvSpPr>
-          <p:cNvPr id="13" name="Oval 12"/>
+          <a:bodyPr rtlCol="0" anchor="ctr" wrap="square" lIns="101600" rIns="101600" tIns="38100" bIns="38100"/>
+          <a:lstStyle/>
+          <a:p>
+            <a:pPr algn="ctr"/>
+            <a:r>
+              <a:rPr sz="1900" b="1">
+                <a:solidFill>
+                  <a:srgbClr val="111827"/>
+                </a:solidFill>
+                <a:latin typeface="Arial"/>
+              </a:rPr>
+              <a:t>Answer with evidence</a:t>
+            </a:r>
+          </a:p>
+        </p:txBody>
+      </p:sp>
+      <p:sp>
+        <p:nvSpPr>
+          <p:cNvPr id="14" name="Rounded Rectangle 13"/>
           <p:cNvSpPr/>
           <p:nvPr/>
         </p:nvSpPr>
         <p:spPr>
           <a:xfrm>
-            <a:off x="1078992" y="2898648"/>
-            <a:ext cx="475488" cy="475488"/>
-          </a:xfrm>
-          <a:prstGeom prst="ellipse">
-            <a:avLst/>
-          </a:prstGeom>
-          <a:solidFill>
-            <a:srgbClr val="BE123C"/>
-          </a:solidFill>
-          <a:ln>
-            <a:noFill/>
+            <a:off x="960120" y="3401568"/>
+            <a:ext cx="3063240" cy="1691640"/>
+          </a:xfrm>
+          <a:prstGeom prst="roundRect">
+            <a:avLst/>
+          </a:prstGeom>
+          <a:solidFill>
+            <a:srgbClr val="FFFFFF"/>
+          </a:solidFill>
+          <a:ln w="12700">
+            <a:solidFill>
+              <a:srgbClr val="BE123C"/>
+            </a:solidFill>
           </a:ln>
         </p:spPr>
         <p:style>
@@ -9138,72 +8477,29 @@
           </a:fontRef>
         </p:style>
         <p:txBody>
-          <a:bodyPr rtlCol="0" anchor="ctr" wrap="square" lIns="101600" rIns="101600" tIns="38100" bIns="38100"/>
-          <a:lstStyle/>
-          <a:p>
-            <a:pPr algn="ctr"/>
-            <a:r>
-              <a:rPr sz="1500" b="1">
-                <a:solidFill>
-                  <a:srgbClr val="FFFFFF"/>
-                </a:solidFill>
-                <a:latin typeface="Arial"/>
-              </a:rPr>
-              <a:t>?</a:t>
-            </a:r>
-          </a:p>
-        </p:txBody>
-      </p:sp>
-      <p:sp>
-        <p:nvSpPr>
-          <p:cNvPr id="14" name="TextBox 13"/>
-          <p:cNvSpPr txBox="1"/>
-          <p:nvPr/>
-        </p:nvSpPr>
-        <p:spPr>
-          <a:xfrm>
-            <a:off x="1719072" y="2889504"/>
-            <a:ext cx="5623560" cy="384048"/>
-          </a:xfrm>
-          <a:prstGeom prst="rect">
-            <a:avLst/>
-          </a:prstGeom>
-          <a:noFill/>
-        </p:spPr>
-        <p:txBody>
-          <a:bodyPr wrap="square" lIns="0" rIns="0" tIns="0" bIns="0">
-            <a:spAutoFit/>
-          </a:bodyPr>
-          <a:lstStyle/>
-          <a:p>
-            <a:r>
-              <a:rPr sz="1600" b="1">
-                <a:solidFill>
-                  <a:srgbClr val="111827"/>
-                </a:solidFill>
-                <a:latin typeface="Arial"/>
-              </a:rPr>
-              <a:t>Which activity helped you improve your English most?</a:t>
-            </a:r>
-          </a:p>
-        </p:txBody>
-      </p:sp>
-      <p:sp>
-        <p:nvSpPr>
-          <p:cNvPr id="15" name="Rectangle 14"/>
+          <a:bodyPr rtlCol="0" anchor="ctr"/>
+          <a:lstStyle/>
+          <a:p>
+            <a:pPr algn="ctr"/>
+          </a:p>
+        </p:txBody>
+      </p:sp>
+      <p:sp>
+        <p:nvSpPr>
+          <p:cNvPr id="15" name="Oval 14"/>
           <p:cNvSpPr/>
           <p:nvPr/>
         </p:nvSpPr>
         <p:spPr>
           <a:xfrm>
-            <a:off x="7635240" y="3264408"/>
-            <a:ext cx="3246120" cy="36576"/>
-          </a:xfrm>
-          <a:prstGeom prst="rect">
-            <a:avLst/>
-          </a:prstGeom>
-          <a:solidFill>
-            <a:srgbClr val="CBD5E1"/>
+            <a:off x="1106424" y="3584448"/>
+            <a:ext cx="420624" cy="420624"/>
+          </a:xfrm>
+          <a:prstGeom prst="ellipse">
+            <a:avLst/>
+          </a:prstGeom>
+          <a:solidFill>
+            <a:srgbClr val="BE123C"/>
           </a:solidFill>
           <a:ln>
             <a:noFill/>
@@ -9224,34 +8520,76 @@
           </a:fontRef>
         </p:style>
         <p:txBody>
-          <a:bodyPr rtlCol="0" anchor="ctr"/>
-          <a:lstStyle/>
-          <a:p>
-            <a:pPr algn="ctr"/>
-          </a:p>
-        </p:txBody>
-      </p:sp>
-      <p:sp>
-        <p:nvSpPr>
-          <p:cNvPr id="16" name="Rounded Rectangle 15"/>
+          <a:bodyPr rtlCol="0" anchor="ctr" wrap="square" lIns="101600" rIns="101600" tIns="38100" bIns="38100"/>
+          <a:lstStyle/>
+          <a:p>
+            <a:pPr algn="ctr"/>
+            <a:r>
+              <a:rPr sz="1500" b="1">
+                <a:solidFill>
+                  <a:srgbClr val="FFFFFF"/>
+                </a:solidFill>
+                <a:latin typeface="Arial"/>
+              </a:rPr>
+              <a:t>?</a:t>
+            </a:r>
+          </a:p>
+        </p:txBody>
+      </p:sp>
+      <p:sp>
+        <p:nvSpPr>
+          <p:cNvPr id="16" name="TextBox 15"/>
+          <p:cNvSpPr txBox="1"/>
+          <p:nvPr/>
+        </p:nvSpPr>
+        <p:spPr>
+          <a:xfrm>
+            <a:off x="1655064" y="3529584"/>
+            <a:ext cx="2148840" cy="502920"/>
+          </a:xfrm>
+          <a:prstGeom prst="rect">
+            <a:avLst/>
+          </a:prstGeom>
+          <a:noFill/>
+        </p:spPr>
+        <p:txBody>
+          <a:bodyPr wrap="square" lIns="0" rIns="0" tIns="0" bIns="0">
+            <a:spAutoFit/>
+          </a:bodyPr>
+          <a:lstStyle/>
+          <a:p>
+            <a:pPr algn="ctr"/>
+            <a:r>
+              <a:rPr sz="1400" b="1">
+                <a:solidFill>
+                  <a:srgbClr val="111827"/>
+                </a:solidFill>
+                <a:latin typeface="Arial"/>
+              </a:rPr>
+              <a:t>Which activity helped you improve your English most?</a:t>
+            </a:r>
+          </a:p>
+        </p:txBody>
+      </p:sp>
+      <p:sp>
+        <p:nvSpPr>
+          <p:cNvPr id="17" name="Rectangle 16"/>
           <p:cNvSpPr/>
           <p:nvPr/>
         </p:nvSpPr>
         <p:spPr>
           <a:xfrm>
-            <a:off x="868680" y="3822191"/>
-            <a:ext cx="10378440" cy="804672"/>
-          </a:xfrm>
-          <a:prstGeom prst="roundRect">
-            <a:avLst/>
-          </a:prstGeom>
-          <a:solidFill>
-            <a:srgbClr val="FFFFFF"/>
-          </a:solidFill>
-          <a:ln w="11430">
-            <a:solidFill>
-              <a:srgbClr val="CBD5E1"/>
-            </a:solidFill>
+            <a:off x="1463040" y="4553712"/>
+            <a:ext cx="2057400" cy="32004"/>
+          </a:xfrm>
+          <a:prstGeom prst="rect">
+            <a:avLst/>
+          </a:prstGeom>
+          <a:solidFill>
+            <a:srgbClr val="CBD5E1"/>
+          </a:solidFill>
+          <a:ln>
+            <a:noFill/>
           </a:ln>
         </p:spPr>
         <p:style>
@@ -9278,23 +8616,95 @@
       </p:sp>
       <p:sp>
         <p:nvSpPr>
-          <p:cNvPr id="17" name="Oval 16"/>
+          <p:cNvPr id="18" name="TextBox 17"/>
+          <p:cNvSpPr txBox="1"/>
+          <p:nvPr/>
+        </p:nvSpPr>
+        <p:spPr>
+          <a:xfrm>
+            <a:off x="1463040" y="4709160"/>
+            <a:ext cx="2057400" cy="201168"/>
+          </a:xfrm>
+          <a:prstGeom prst="rect">
+            <a:avLst/>
+          </a:prstGeom>
+          <a:noFill/>
+        </p:spPr>
+        <p:txBody>
+          <a:bodyPr wrap="square" lIns="0" rIns="0" tIns="0" bIns="0">
+            <a:spAutoFit/>
+          </a:bodyPr>
+          <a:lstStyle/>
+          <a:p>
+            <a:pPr algn="ctr"/>
+            <a:r>
+              <a:rPr sz="1000" b="0">
+                <a:solidFill>
+                  <a:srgbClr val="475569"/>
+                </a:solidFill>
+                <a:latin typeface="Arial"/>
+              </a:rPr>
+              <a:t>answer + reason</a:t>
+            </a:r>
+          </a:p>
+        </p:txBody>
+      </p:sp>
+      <p:cxnSp>
+        <p:nvCxnSpPr>
+          <p:cNvPr id="19" name="Connector 18"/>
+          <p:cNvCxnSpPr/>
+          <p:nvPr/>
+        </p:nvCxnSpPr>
+        <p:spPr>
+          <a:xfrm>
+            <a:off x="4014215" y="4251960"/>
+            <a:ext cx="402337" cy="0"/>
+          </a:xfrm>
+          <a:prstGeom prst="line">
+            <a:avLst/>
+          </a:prstGeom>
+          <a:ln w="25400">
+            <a:solidFill>
+              <a:srgbClr val="BE123C"/>
+            </a:solidFill>
+          </a:ln>
+        </p:spPr>
+        <p:style>
+          <a:lnRef idx="2">
+            <a:schemeClr val="accent1"/>
+          </a:lnRef>
+          <a:fillRef idx="0">
+            <a:schemeClr val="accent1"/>
+          </a:fillRef>
+          <a:effectRef idx="1">
+            <a:schemeClr val="accent1"/>
+          </a:effectRef>
+          <a:fontRef idx="minor">
+            <a:schemeClr val="tx1"/>
+          </a:fontRef>
+        </p:style>
+      </p:cxnSp>
+      <p:sp>
+        <p:nvSpPr>
+          <p:cNvPr id="20" name="Rounded Rectangle 19"/>
           <p:cNvSpPr/>
           <p:nvPr/>
         </p:nvSpPr>
         <p:spPr>
           <a:xfrm>
-            <a:off x="1078992" y="3977639"/>
-            <a:ext cx="475488" cy="475488"/>
-          </a:xfrm>
-          <a:prstGeom prst="ellipse">
-            <a:avLst/>
-          </a:prstGeom>
-          <a:solidFill>
-            <a:srgbClr val="BE123C"/>
-          </a:solidFill>
-          <a:ln>
-            <a:noFill/>
+            <a:off x="4416552" y="3401568"/>
+            <a:ext cx="3063240" cy="1691640"/>
+          </a:xfrm>
+          <a:prstGeom prst="roundRect">
+            <a:avLst/>
+          </a:prstGeom>
+          <a:solidFill>
+            <a:srgbClr val="FFF7E0"/>
+          </a:solidFill>
+          <a:ln w="12700">
+            <a:solidFill>
+              <a:srgbClr val="BE123C"/>
+            </a:solidFill>
           </a:ln>
         </p:spPr>
         <p:style>
@@ -9312,72 +8722,29 @@
           </a:fontRef>
         </p:style>
         <p:txBody>
-          <a:bodyPr rtlCol="0" anchor="ctr" wrap="square" lIns="101600" rIns="101600" tIns="38100" bIns="38100"/>
-          <a:lstStyle/>
-          <a:p>
-            <a:pPr algn="ctr"/>
-            <a:r>
-              <a:rPr sz="1500" b="1">
-                <a:solidFill>
-                  <a:srgbClr val="FFFFFF"/>
-                </a:solidFill>
-                <a:latin typeface="Arial"/>
-              </a:rPr>
-              <a:t>?</a:t>
-            </a:r>
-          </a:p>
-        </p:txBody>
-      </p:sp>
-      <p:sp>
-        <p:nvSpPr>
-          <p:cNvPr id="18" name="TextBox 17"/>
-          <p:cNvSpPr txBox="1"/>
-          <p:nvPr/>
-        </p:nvSpPr>
-        <p:spPr>
-          <a:xfrm>
-            <a:off x="1719072" y="3968496"/>
-            <a:ext cx="5623560" cy="384048"/>
-          </a:xfrm>
-          <a:prstGeom prst="rect">
-            <a:avLst/>
-          </a:prstGeom>
-          <a:noFill/>
-        </p:spPr>
-        <p:txBody>
-          <a:bodyPr wrap="square" lIns="0" rIns="0" tIns="0" bIns="0">
-            <a:spAutoFit/>
-          </a:bodyPr>
-          <a:lstStyle/>
-          <a:p>
-            <a:r>
-              <a:rPr sz="1600" b="1">
-                <a:solidFill>
-                  <a:srgbClr val="111827"/>
-                </a:solidFill>
-                <a:latin typeface="Arial"/>
-              </a:rPr>
-              <a:t>Why is it important to review our work?</a:t>
-            </a:r>
-          </a:p>
-        </p:txBody>
-      </p:sp>
-      <p:sp>
-        <p:nvSpPr>
-          <p:cNvPr id="19" name="Rectangle 18"/>
+          <a:bodyPr rtlCol="0" anchor="ctr"/>
+          <a:lstStyle/>
+          <a:p>
+            <a:pPr algn="ctr"/>
+          </a:p>
+        </p:txBody>
+      </p:sp>
+      <p:sp>
+        <p:nvSpPr>
+          <p:cNvPr id="21" name="Oval 20"/>
           <p:cNvSpPr/>
           <p:nvPr/>
         </p:nvSpPr>
         <p:spPr>
           <a:xfrm>
-            <a:off x="7635240" y="4343400"/>
-            <a:ext cx="3246120" cy="36576"/>
-          </a:xfrm>
-          <a:prstGeom prst="rect">
-            <a:avLst/>
-          </a:prstGeom>
-          <a:solidFill>
-            <a:srgbClr val="CBD5E1"/>
+            <a:off x="4562856" y="3584448"/>
+            <a:ext cx="420624" cy="420624"/>
+          </a:xfrm>
+          <a:prstGeom prst="ellipse">
+            <a:avLst/>
+          </a:prstGeom>
+          <a:solidFill>
+            <a:srgbClr val="BE123C"/>
           </a:solidFill>
           <a:ln>
             <a:noFill/>
@@ -9398,34 +8765,76 @@
           </a:fontRef>
         </p:style>
         <p:txBody>
-          <a:bodyPr rtlCol="0" anchor="ctr"/>
-          <a:lstStyle/>
-          <a:p>
-            <a:pPr algn="ctr"/>
-          </a:p>
-        </p:txBody>
-      </p:sp>
-      <p:sp>
-        <p:nvSpPr>
-          <p:cNvPr id="20" name="Rounded Rectangle 19"/>
+          <a:bodyPr rtlCol="0" anchor="ctr" wrap="square" lIns="101600" rIns="101600" tIns="38100" bIns="38100"/>
+          <a:lstStyle/>
+          <a:p>
+            <a:pPr algn="ctr"/>
+            <a:r>
+              <a:rPr sz="1500" b="1">
+                <a:solidFill>
+                  <a:srgbClr val="FFFFFF"/>
+                </a:solidFill>
+                <a:latin typeface="Arial"/>
+              </a:rPr>
+              <a:t>?</a:t>
+            </a:r>
+          </a:p>
+        </p:txBody>
+      </p:sp>
+      <p:sp>
+        <p:nvSpPr>
+          <p:cNvPr id="22" name="TextBox 21"/>
+          <p:cNvSpPr txBox="1"/>
+          <p:nvPr/>
+        </p:nvSpPr>
+        <p:spPr>
+          <a:xfrm>
+            <a:off x="5111496" y="3529584"/>
+            <a:ext cx="2148840" cy="502920"/>
+          </a:xfrm>
+          <a:prstGeom prst="rect">
+            <a:avLst/>
+          </a:prstGeom>
+          <a:noFill/>
+        </p:spPr>
+        <p:txBody>
+          <a:bodyPr wrap="square" lIns="0" rIns="0" tIns="0" bIns="0">
+            <a:spAutoFit/>
+          </a:bodyPr>
+          <a:lstStyle/>
+          <a:p>
+            <a:pPr algn="ctr"/>
+            <a:r>
+              <a:rPr sz="1400" b="1">
+                <a:solidFill>
+                  <a:srgbClr val="111827"/>
+                </a:solidFill>
+                <a:latin typeface="Arial"/>
+              </a:rPr>
+              <a:t>Why is it important to review our work?</a:t>
+            </a:r>
+          </a:p>
+        </p:txBody>
+      </p:sp>
+      <p:sp>
+        <p:nvSpPr>
+          <p:cNvPr id="23" name="Rectangle 22"/>
           <p:cNvSpPr/>
           <p:nvPr/>
         </p:nvSpPr>
         <p:spPr>
           <a:xfrm>
-            <a:off x="868680" y="4901183"/>
-            <a:ext cx="10378440" cy="804672"/>
-          </a:xfrm>
-          <a:prstGeom prst="roundRect">
-            <a:avLst/>
-          </a:prstGeom>
-          <a:solidFill>
-            <a:srgbClr val="FFFFFF"/>
-          </a:solidFill>
-          <a:ln w="11430">
-            <a:solidFill>
-              <a:srgbClr val="CBD5E1"/>
-            </a:solidFill>
+            <a:off x="4919472" y="4553712"/>
+            <a:ext cx="2057400" cy="32004"/>
+          </a:xfrm>
+          <a:prstGeom prst="rect">
+            <a:avLst/>
+          </a:prstGeom>
+          <a:solidFill>
+            <a:srgbClr val="CBD5E1"/>
+          </a:solidFill>
+          <a:ln>
+            <a:noFill/>
           </a:ln>
         </p:spPr>
         <p:style>
@@ -9452,23 +8861,95 @@
       </p:sp>
       <p:sp>
         <p:nvSpPr>
-          <p:cNvPr id="21" name="Oval 20"/>
+          <p:cNvPr id="24" name="TextBox 23"/>
+          <p:cNvSpPr txBox="1"/>
+          <p:nvPr/>
+        </p:nvSpPr>
+        <p:spPr>
+          <a:xfrm>
+            <a:off x="4919472" y="4709160"/>
+            <a:ext cx="2057400" cy="201168"/>
+          </a:xfrm>
+          <a:prstGeom prst="rect">
+            <a:avLst/>
+          </a:prstGeom>
+          <a:noFill/>
+        </p:spPr>
+        <p:txBody>
+          <a:bodyPr wrap="square" lIns="0" rIns="0" tIns="0" bIns="0">
+            <a:spAutoFit/>
+          </a:bodyPr>
+          <a:lstStyle/>
+          <a:p>
+            <a:pPr algn="ctr"/>
+            <a:r>
+              <a:rPr sz="1000" b="0">
+                <a:solidFill>
+                  <a:srgbClr val="475569"/>
+                </a:solidFill>
+                <a:latin typeface="Arial"/>
+              </a:rPr>
+              <a:t>answer + reason</a:t>
+            </a:r>
+          </a:p>
+        </p:txBody>
+      </p:sp>
+      <p:cxnSp>
+        <p:nvCxnSpPr>
+          <p:cNvPr id="25" name="Connector 24"/>
+          <p:cNvCxnSpPr/>
+          <p:nvPr/>
+        </p:nvCxnSpPr>
+        <p:spPr>
+          <a:xfrm>
+            <a:off x="7470648" y="4251960"/>
+            <a:ext cx="402335" cy="0"/>
+          </a:xfrm>
+          <a:prstGeom prst="line">
+            <a:avLst/>
+          </a:prstGeom>
+          <a:ln w="25400">
+            <a:solidFill>
+              <a:srgbClr val="BE123C"/>
+            </a:solidFill>
+          </a:ln>
+        </p:spPr>
+        <p:style>
+          <a:lnRef idx="2">
+            <a:schemeClr val="accent1"/>
+          </a:lnRef>
+          <a:fillRef idx="0">
+            <a:schemeClr val="accent1"/>
+          </a:fillRef>
+          <a:effectRef idx="1">
+            <a:schemeClr val="accent1"/>
+          </a:effectRef>
+          <a:fontRef idx="minor">
+            <a:schemeClr val="tx1"/>
+          </a:fontRef>
+        </p:style>
+      </p:cxnSp>
+      <p:sp>
+        <p:nvSpPr>
+          <p:cNvPr id="26" name="Rounded Rectangle 25"/>
           <p:cNvSpPr/>
           <p:nvPr/>
         </p:nvSpPr>
         <p:spPr>
           <a:xfrm>
-            <a:off x="1078992" y="5056631"/>
-            <a:ext cx="475488" cy="475488"/>
-          </a:xfrm>
-          <a:prstGeom prst="ellipse">
-            <a:avLst/>
-          </a:prstGeom>
-          <a:solidFill>
-            <a:srgbClr val="BE123C"/>
-          </a:solidFill>
-          <a:ln>
-            <a:noFill/>
+            <a:off x="7872983" y="3401568"/>
+            <a:ext cx="3063240" cy="1691640"/>
+          </a:xfrm>
+          <a:prstGeom prst="roundRect">
+            <a:avLst/>
+          </a:prstGeom>
+          <a:solidFill>
+            <a:srgbClr val="FFFFFF"/>
+          </a:solidFill>
+          <a:ln w="12700">
+            <a:solidFill>
+              <a:srgbClr val="BE123C"/>
+            </a:solidFill>
           </a:ln>
         </p:spPr>
         <p:style>
@@ -9486,72 +8967,29 @@
           </a:fontRef>
         </p:style>
         <p:txBody>
-          <a:bodyPr rtlCol="0" anchor="ctr" wrap="square" lIns="101600" rIns="101600" tIns="38100" bIns="38100"/>
-          <a:lstStyle/>
-          <a:p>
-            <a:pPr algn="ctr"/>
-            <a:r>
-              <a:rPr sz="1500" b="1">
-                <a:solidFill>
-                  <a:srgbClr val="FFFFFF"/>
-                </a:solidFill>
-                <a:latin typeface="Arial"/>
-              </a:rPr>
-              <a:t>?</a:t>
-            </a:r>
-          </a:p>
-        </p:txBody>
-      </p:sp>
-      <p:sp>
-        <p:nvSpPr>
-          <p:cNvPr id="22" name="TextBox 21"/>
-          <p:cNvSpPr txBox="1"/>
-          <p:nvPr/>
-        </p:nvSpPr>
-        <p:spPr>
-          <a:xfrm>
-            <a:off x="1719072" y="5047488"/>
-            <a:ext cx="5623560" cy="384048"/>
-          </a:xfrm>
-          <a:prstGeom prst="rect">
-            <a:avLst/>
-          </a:prstGeom>
-          <a:noFill/>
-        </p:spPr>
-        <p:txBody>
-          <a:bodyPr wrap="square" lIns="0" rIns="0" tIns="0" bIns="0">
-            <a:spAutoFit/>
-          </a:bodyPr>
-          <a:lstStyle/>
-          <a:p>
-            <a:r>
-              <a:rPr sz="1600" b="1">
-                <a:solidFill>
-                  <a:srgbClr val="111827"/>
-                </a:solidFill>
-                <a:latin typeface="Arial"/>
-              </a:rPr>
-              <a:t>What is a portfolio?</a:t>
-            </a:r>
-          </a:p>
-        </p:txBody>
-      </p:sp>
-      <p:sp>
-        <p:nvSpPr>
-          <p:cNvPr id="23" name="Rectangle 22"/>
+          <a:bodyPr rtlCol="0" anchor="ctr"/>
+          <a:lstStyle/>
+          <a:p>
+            <a:pPr algn="ctr"/>
+          </a:p>
+        </p:txBody>
+      </p:sp>
+      <p:sp>
+        <p:nvSpPr>
+          <p:cNvPr id="27" name="Oval 26"/>
           <p:cNvSpPr/>
           <p:nvPr/>
         </p:nvSpPr>
         <p:spPr>
           <a:xfrm>
-            <a:off x="7635240" y="5422392"/>
-            <a:ext cx="3246120" cy="36576"/>
-          </a:xfrm>
-          <a:prstGeom prst="rect">
-            <a:avLst/>
-          </a:prstGeom>
-          <a:solidFill>
-            <a:srgbClr val="CBD5E1"/>
+            <a:off x="8019288" y="3584448"/>
+            <a:ext cx="420624" cy="420624"/>
+          </a:xfrm>
+          <a:prstGeom prst="ellipse">
+            <a:avLst/>
+          </a:prstGeom>
+          <a:solidFill>
+            <a:srgbClr val="BE123C"/>
           </a:solidFill>
           <a:ln>
             <a:noFill/>
@@ -9572,23 +9010,32 @@
           </a:fontRef>
         </p:style>
         <p:txBody>
-          <a:bodyPr rtlCol="0" anchor="ctr"/>
-          <a:lstStyle/>
-          <a:p>
-            <a:pPr algn="ctr"/>
-          </a:p>
-        </p:txBody>
-      </p:sp>
-      <p:sp>
-        <p:nvSpPr>
-          <p:cNvPr id="24" name="TextBox 23"/>
+          <a:bodyPr rtlCol="0" anchor="ctr" wrap="square" lIns="101600" rIns="101600" tIns="38100" bIns="38100"/>
+          <a:lstStyle/>
+          <a:p>
+            <a:pPr algn="ctr"/>
+            <a:r>
+              <a:rPr sz="1500" b="1">
+                <a:solidFill>
+                  <a:srgbClr val="FFFFFF"/>
+                </a:solidFill>
+                <a:latin typeface="Arial"/>
+              </a:rPr>
+              <a:t>?</a:t>
+            </a:r>
+          </a:p>
+        </p:txBody>
+      </p:sp>
+      <p:sp>
+        <p:nvSpPr>
+          <p:cNvPr id="28" name="TextBox 27"/>
           <p:cNvSpPr txBox="1"/>
           <p:nvPr/>
         </p:nvSpPr>
         <p:spPr>
           <a:xfrm>
-            <a:off x="896112" y="5989320"/>
-            <a:ext cx="10287000" cy="274320"/>
+            <a:off x="8567928" y="3529584"/>
+            <a:ext cx="2148840" cy="502920"/>
           </a:xfrm>
           <a:prstGeom prst="rect">
             <a:avLst/>
@@ -9603,20 +9050,133 @@
           <a:p>
             <a:pPr algn="ctr"/>
             <a:r>
-              <a:rPr sz="1200" b="0">
-                <a:solidFill>
-                  <a:srgbClr val="475569"/>
+              <a:rPr sz="1400" b="1">
+                <a:solidFill>
+                  <a:srgbClr val="111827"/>
                 </a:solidFill>
                 <a:latin typeface="Arial"/>
               </a:rPr>
-              <a:t>Use the source idea, not guessing.</a:t>
-            </a:r>
-          </a:p>
-        </p:txBody>
-      </p:sp>
-      <p:sp>
-        <p:nvSpPr>
-          <p:cNvPr id="25" name="TextBox 24"/>
+              <a:t>What is a portfolio?</a:t>
+            </a:r>
+          </a:p>
+        </p:txBody>
+      </p:sp>
+      <p:sp>
+        <p:nvSpPr>
+          <p:cNvPr id="29" name="Rectangle 28"/>
+          <p:cNvSpPr/>
+          <p:nvPr/>
+        </p:nvSpPr>
+        <p:spPr>
+          <a:xfrm>
+            <a:off x="8375904" y="4553712"/>
+            <a:ext cx="2057400" cy="32004"/>
+          </a:xfrm>
+          <a:prstGeom prst="rect">
+            <a:avLst/>
+          </a:prstGeom>
+          <a:solidFill>
+            <a:srgbClr val="CBD5E1"/>
+          </a:solidFill>
+          <a:ln>
+            <a:noFill/>
+          </a:ln>
+        </p:spPr>
+        <p:style>
+          <a:lnRef idx="1">
+            <a:schemeClr val="accent1"/>
+          </a:lnRef>
+          <a:fillRef idx="3">
+            <a:schemeClr val="accent1"/>
+          </a:fillRef>
+          <a:effectRef idx="2">
+            <a:schemeClr val="accent1"/>
+          </a:effectRef>
+          <a:fontRef idx="minor">
+            <a:schemeClr val="lt1"/>
+          </a:fontRef>
+        </p:style>
+        <p:txBody>
+          <a:bodyPr rtlCol="0" anchor="ctr"/>
+          <a:lstStyle/>
+          <a:p>
+            <a:pPr algn="ctr"/>
+          </a:p>
+        </p:txBody>
+      </p:sp>
+      <p:sp>
+        <p:nvSpPr>
+          <p:cNvPr id="30" name="TextBox 29"/>
+          <p:cNvSpPr txBox="1"/>
+          <p:nvPr/>
+        </p:nvSpPr>
+        <p:spPr>
+          <a:xfrm>
+            <a:off x="8375904" y="4709160"/>
+            <a:ext cx="2057400" cy="201168"/>
+          </a:xfrm>
+          <a:prstGeom prst="rect">
+            <a:avLst/>
+          </a:prstGeom>
+          <a:noFill/>
+        </p:spPr>
+        <p:txBody>
+          <a:bodyPr wrap="square" lIns="0" rIns="0" tIns="0" bIns="0">
+            <a:spAutoFit/>
+          </a:bodyPr>
+          <a:lstStyle/>
+          <a:p>
+            <a:pPr algn="ctr"/>
+            <a:r>
+              <a:rPr sz="1000" b="0">
+                <a:solidFill>
+                  <a:srgbClr val="475569"/>
+                </a:solidFill>
+                <a:latin typeface="Arial"/>
+              </a:rPr>
+              <a:t>answer + reason</a:t>
+            </a:r>
+          </a:p>
+        </p:txBody>
+      </p:sp>
+      <p:sp>
+        <p:nvSpPr>
+          <p:cNvPr id="31" name="TextBox 30"/>
+          <p:cNvSpPr txBox="1"/>
+          <p:nvPr/>
+        </p:nvSpPr>
+        <p:spPr>
+          <a:xfrm>
+            <a:off x="914400" y="5907024"/>
+            <a:ext cx="10287000" cy="274320"/>
+          </a:xfrm>
+          <a:prstGeom prst="rect">
+            <a:avLst/>
+          </a:prstGeom>
+          <a:noFill/>
+        </p:spPr>
+        <p:txBody>
+          <a:bodyPr wrap="square" lIns="0" rIns="0" tIns="0" bIns="0">
+            <a:spAutoFit/>
+          </a:bodyPr>
+          <a:lstStyle/>
+          <a:p>
+            <a:pPr algn="ctr"/>
+            <a:r>
+              <a:rPr sz="1200" b="0">
+                <a:solidFill>
+                  <a:srgbClr val="475569"/>
+                </a:solidFill>
+                <a:latin typeface="Arial"/>
+              </a:rPr>
+              <a:t>Use evidence from the lesson, not guessing.</a:t>
+            </a:r>
+          </a:p>
+        </p:txBody>
+      </p:sp>
+      <p:sp>
+        <p:nvSpPr>
+          <p:cNvPr id="32" name="TextBox 31"/>
           <p:cNvSpPr txBox="1"/>
           <p:nvPr/>
         </p:nvSpPr>
@@ -10044,16 +9604,16 @@
         </p:nvSpPr>
         <p:spPr>
           <a:xfrm>
-            <a:off x="777240" y="1783080"/>
-            <a:ext cx="3063240" cy="4343400"/>
+            <a:off x="777240" y="1755648"/>
+            <a:ext cx="10652760" cy="4480560"/>
           </a:xfrm>
           <a:prstGeom prst="roundRect">
             <a:avLst/>
           </a:prstGeom>
           <a:solidFill>
-            <a:srgbClr val="FFF7E0"/>
-          </a:solidFill>
-          <a:ln w="17780">
+            <a:srgbClr val="FFFFFF"/>
+          </a:solidFill>
+          <a:ln w="17145">
             <a:solidFill>
               <a:srgbClr val="1B7F3A"/>
             </a:solidFill>
@@ -10074,33 +9634,147 @@
           </a:fontRef>
         </p:style>
         <p:txBody>
-          <a:bodyPr rtlCol="0" anchor="ctr"/>
-          <a:lstStyle/>
-          <a:p>
-            <a:pPr algn="ctr"/>
-          </a:p>
-        </p:txBody>
-      </p:sp>
-      <p:sp>
-        <p:nvSpPr>
-          <p:cNvPr id="12" name="Rectangle 11"/>
+          <a:bodyPr rtlCol="0" anchor="t" wrap="square" lIns="101600" rIns="101600" tIns="101600" bIns="38100"/>
+          <a:lstStyle/>
+          <a:p>
+            <a:pPr algn="l"/>
+            <a:r>
+              <a:rPr sz="1200" b="1">
+                <a:solidFill>
+                  <a:srgbClr val="1B7F3A"/>
+                </a:solidFill>
+                <a:latin typeface="Arial"/>
+              </a:rPr>
+              <a:t>GROUP INFOGRAPHIC</a:t>
+            </a:r>
+          </a:p>
+        </p:txBody>
+      </p:sp>
+      <p:sp>
+        <p:nvSpPr>
+          <p:cNvPr id="12" name="TextBox 11"/>
+          <p:cNvSpPr txBox="1"/>
+          <p:nvPr/>
+        </p:nvSpPr>
+        <p:spPr>
+          <a:xfrm>
+            <a:off x="1371600" y="2414015"/>
+            <a:ext cx="9464040" cy="384048"/>
+          </a:xfrm>
+          <a:prstGeom prst="rect">
+            <a:avLst/>
+          </a:prstGeom>
+          <a:noFill/>
+        </p:spPr>
+        <p:txBody>
+          <a:bodyPr wrap="square" lIns="0" rIns="0" tIns="0" bIns="0">
+            <a:spAutoFit/>
+          </a:bodyPr>
+          <a:lstStyle/>
+          <a:p>
+            <a:pPr algn="ctr"/>
+            <a:r>
+              <a:rPr sz="1800" b="1">
+                <a:solidFill>
+                  <a:srgbClr val="111827"/>
+                </a:solidFill>
+                <a:latin typeface="Arial"/>
+              </a:rPr>
+              <a:t>Challenge</a:t>
+            </a:r>
+          </a:p>
+        </p:txBody>
+      </p:sp>
+      <p:cxnSp>
+        <p:nvCxnSpPr>
+          <p:cNvPr id="13" name="Connector 12"/>
+          <p:cNvCxnSpPr/>
+          <p:nvPr/>
+        </p:nvCxnSpPr>
+        <p:spPr>
+          <a:xfrm flipV="1">
+            <a:off x="2880360" y="4023360"/>
+            <a:ext cx="3200399" cy="822960"/>
+          </a:xfrm>
+          <a:prstGeom prst="line">
+            <a:avLst/>
+          </a:prstGeom>
+          <a:ln w="38100">
+            <a:solidFill>
+              <a:srgbClr val="1B7F3A"/>
+            </a:solidFill>
+          </a:ln>
+        </p:spPr>
+        <p:style>
+          <a:lnRef idx="2">
+            <a:schemeClr val="accent1"/>
+          </a:lnRef>
+          <a:fillRef idx="0">
+            <a:schemeClr val="accent1"/>
+          </a:fillRef>
+          <a:effectRef idx="1">
+            <a:schemeClr val="accent1"/>
+          </a:effectRef>
+          <a:fontRef idx="minor">
+            <a:schemeClr val="tx1"/>
+          </a:fontRef>
+        </p:style>
+      </p:cxnSp>
+      <p:cxnSp>
+        <p:nvCxnSpPr>
+          <p:cNvPr id="14" name="Connector 13"/>
+          <p:cNvCxnSpPr/>
+          <p:nvPr/>
+        </p:nvCxnSpPr>
+        <p:spPr>
+          <a:xfrm>
+            <a:off x="6080759" y="4023360"/>
+            <a:ext cx="3200401" cy="822960"/>
+          </a:xfrm>
+          <a:prstGeom prst="line">
+            <a:avLst/>
+          </a:prstGeom>
+          <a:ln w="38100">
+            <a:solidFill>
+              <a:srgbClr val="1B7F3A"/>
+            </a:solidFill>
+          </a:ln>
+        </p:spPr>
+        <p:style>
+          <a:lnRef idx="2">
+            <a:schemeClr val="accent1"/>
+          </a:lnRef>
+          <a:fillRef idx="0">
+            <a:schemeClr val="accent1"/>
+          </a:fillRef>
+          <a:effectRef idx="1">
+            <a:schemeClr val="accent1"/>
+          </a:effectRef>
+          <a:fontRef idx="minor">
+            <a:schemeClr val="tx1"/>
+          </a:fontRef>
+        </p:style>
+      </p:cxnSp>
+      <p:sp>
+        <p:nvSpPr>
+          <p:cNvPr id="15" name="Oval 14"/>
           <p:cNvSpPr/>
           <p:nvPr/>
         </p:nvSpPr>
         <p:spPr>
           <a:xfrm>
-            <a:off x="1516075" y="2583180"/>
-            <a:ext cx="699515" cy="799185"/>
-          </a:xfrm>
-          <a:prstGeom prst="rect">
+            <a:off x="2551176" y="4517136"/>
+            <a:ext cx="658368" cy="658368"/>
+          </a:xfrm>
+          <a:prstGeom prst="ellipse">
             <a:avLst/>
           </a:prstGeom>
           <a:solidFill>
             <a:srgbClr val="FFFFFF"/>
           </a:solidFill>
-          <a:ln w="10160">
+          <a:ln w="22860">
             <a:solidFill>
-              <a:srgbClr val="1D4ED8"/>
+              <a:srgbClr val="D90000"/>
             </a:solidFill>
           </a:ln>
         </p:spPr>
@@ -10128,24 +9802,94 @@
       </p:sp>
       <p:sp>
         <p:nvSpPr>
-          <p:cNvPr id="13" name="Rectangle 12"/>
+          <p:cNvPr id="16" name="TextBox 15"/>
+          <p:cNvSpPr txBox="1"/>
+          <p:nvPr/>
+        </p:nvSpPr>
+        <p:spPr>
+          <a:xfrm>
+            <a:off x="2715768" y="4700016"/>
+            <a:ext cx="329184" cy="201168"/>
+          </a:xfrm>
+          <a:prstGeom prst="rect">
+            <a:avLst/>
+          </a:prstGeom>
+          <a:noFill/>
+        </p:spPr>
+        <p:txBody>
+          <a:bodyPr wrap="square" lIns="0" rIns="0" tIns="0" bIns="0">
+            <a:spAutoFit/>
+          </a:bodyPr>
+          <a:lstStyle/>
+          <a:p>
+            <a:pPr algn="ctr"/>
+            <a:r>
+              <a:rPr sz="1300" b="1">
+                <a:solidFill>
+                  <a:srgbClr val="D90000"/>
+                </a:solidFill>
+                <a:latin typeface="Arial"/>
+              </a:rPr>
+              <a:t>1</a:t>
+            </a:r>
+          </a:p>
+        </p:txBody>
+      </p:sp>
+      <p:sp>
+        <p:nvSpPr>
+          <p:cNvPr id="17" name="TextBox 16"/>
+          <p:cNvSpPr txBox="1"/>
+          <p:nvPr/>
+        </p:nvSpPr>
+        <p:spPr>
+          <a:xfrm>
+            <a:off x="2039112" y="5349240"/>
+            <a:ext cx="1691640" cy="658368"/>
+          </a:xfrm>
+          <a:prstGeom prst="rect">
+            <a:avLst/>
+          </a:prstGeom>
+          <a:noFill/>
+        </p:spPr>
+        <p:txBody>
+          <a:bodyPr wrap="square" lIns="0" rIns="0" tIns="0" bIns="0">
+            <a:spAutoFit/>
+          </a:bodyPr>
+          <a:lstStyle/>
+          <a:p>
+            <a:pPr algn="ctr"/>
+            <a:r>
+              <a:rPr sz="1100" b="1">
+                <a:solidFill>
+                  <a:srgbClr val="111827"/>
+                </a:solidFill>
+                <a:latin typeface="Arial"/>
+              </a:rPr>
+              <a:t>Sit in a circle and participate in a "Turn and</a:t>
+            </a:r>
+          </a:p>
+        </p:txBody>
+      </p:sp>
+      <p:sp>
+        <p:nvSpPr>
+          <p:cNvPr id="18" name="Oval 17"/>
           <p:cNvSpPr/>
           <p:nvPr/>
         </p:nvSpPr>
         <p:spPr>
           <a:xfrm>
-            <a:off x="2215591" y="2583180"/>
-            <a:ext cx="699515" cy="799185"/>
-          </a:xfrm>
-          <a:prstGeom prst="rect">
+            <a:off x="5751575" y="3694176"/>
+            <a:ext cx="658368" cy="658368"/>
+          </a:xfrm>
+          <a:prstGeom prst="ellipse">
             <a:avLst/>
           </a:prstGeom>
           <a:solidFill>
             <a:srgbClr val="FFFFFF"/>
           </a:solidFill>
-          <a:ln w="10160">
+          <a:ln w="22860">
             <a:solidFill>
-              <a:srgbClr val="1D4ED8"/>
+              <a:srgbClr val="1B7F3A"/>
             </a:solidFill>
           </a:ln>
         </p:spPr>
@@ -10173,23 +9917,95 @@
       </p:sp>
       <p:sp>
         <p:nvSpPr>
-          <p:cNvPr id="14" name="Rectangle 13"/>
+          <p:cNvPr id="19" name="TextBox 18"/>
+          <p:cNvSpPr txBox="1"/>
+          <p:nvPr/>
+        </p:nvSpPr>
+        <p:spPr>
+          <a:xfrm>
+            <a:off x="5916168" y="3877056"/>
+            <a:ext cx="329184" cy="201168"/>
+          </a:xfrm>
+          <a:prstGeom prst="rect">
+            <a:avLst/>
+          </a:prstGeom>
+          <a:noFill/>
+        </p:spPr>
+        <p:txBody>
+          <a:bodyPr wrap="square" lIns="0" rIns="0" tIns="0" bIns="0">
+            <a:spAutoFit/>
+          </a:bodyPr>
+          <a:lstStyle/>
+          <a:p>
+            <a:pPr algn="ctr"/>
+            <a:r>
+              <a:rPr sz="1300" b="1">
+                <a:solidFill>
+                  <a:srgbClr val="1B7F3A"/>
+                </a:solidFill>
+                <a:latin typeface="Arial"/>
+              </a:rPr>
+              <a:t>2</a:t>
+            </a:r>
+          </a:p>
+        </p:txBody>
+      </p:sp>
+      <p:sp>
+        <p:nvSpPr>
+          <p:cNvPr id="20" name="TextBox 19"/>
+          <p:cNvSpPr txBox="1"/>
+          <p:nvPr/>
+        </p:nvSpPr>
+        <p:spPr>
+          <a:xfrm>
+            <a:off x="5239512" y="4526280"/>
+            <a:ext cx="1691640" cy="658368"/>
+          </a:xfrm>
+          <a:prstGeom prst="rect">
+            <a:avLst/>
+          </a:prstGeom>
+          <a:noFill/>
+        </p:spPr>
+        <p:txBody>
+          <a:bodyPr wrap="square" lIns="0" rIns="0" tIns="0" bIns="0">
+            <a:spAutoFit/>
+          </a:bodyPr>
+          <a:lstStyle/>
+          <a:p>
+            <a:pPr algn="ctr"/>
+            <a:r>
+              <a:rPr sz="1100" b="1">
+                <a:solidFill>
+                  <a:srgbClr val="111827"/>
+                </a:solidFill>
+                <a:latin typeface="Arial"/>
+              </a:rPr>
+              <a:t>Write the new vocabulary in their exercise</a:t>
+            </a:r>
+          </a:p>
+        </p:txBody>
+      </p:sp>
+      <p:sp>
+        <p:nvSpPr>
+          <p:cNvPr id="21" name="Oval 20"/>
           <p:cNvSpPr/>
           <p:nvPr/>
         </p:nvSpPr>
         <p:spPr>
           <a:xfrm>
-            <a:off x="1795881" y="2496312"/>
-            <a:ext cx="862736" cy="104241"/>
-          </a:xfrm>
-          <a:prstGeom prst="rect">
-            <a:avLst/>
-          </a:prstGeom>
-          <a:solidFill>
-            <a:srgbClr val="D90000"/>
-          </a:solidFill>
-          <a:ln>
-            <a:noFill/>
+            <a:off x="8951976" y="4517136"/>
+            <a:ext cx="658368" cy="658368"/>
+          </a:xfrm>
+          <a:prstGeom prst="ellipse">
+            <a:avLst/>
+          </a:prstGeom>
+          <a:solidFill>
+            <a:srgbClr val="FFFFFF"/>
+          </a:solidFill>
+          <a:ln w="22860">
+            <a:solidFill>
+              <a:srgbClr val="D90000"/>
+            </a:solidFill>
           </a:ln>
         </p:spPr>
         <p:style>
@@ -10216,23 +10032,95 @@
       </p:sp>
       <p:sp>
         <p:nvSpPr>
-          <p:cNvPr id="15" name="Rectangle 14"/>
+          <p:cNvPr id="22" name="TextBox 21"/>
+          <p:cNvSpPr txBox="1"/>
+          <p:nvPr/>
+        </p:nvSpPr>
+        <p:spPr>
+          <a:xfrm>
+            <a:off x="9116568" y="4700016"/>
+            <a:ext cx="329184" cy="201168"/>
+          </a:xfrm>
+          <a:prstGeom prst="rect">
+            <a:avLst/>
+          </a:prstGeom>
+          <a:noFill/>
+        </p:spPr>
+        <p:txBody>
+          <a:bodyPr wrap="square" lIns="0" rIns="0" tIns="0" bIns="0">
+            <a:spAutoFit/>
+          </a:bodyPr>
+          <a:lstStyle/>
+          <a:p>
+            <a:pPr algn="ctr"/>
+            <a:r>
+              <a:rPr sz="1300" b="1">
+                <a:solidFill>
+                  <a:srgbClr val="D90000"/>
+                </a:solidFill>
+                <a:latin typeface="Arial"/>
+              </a:rPr>
+              <a:t>3</a:t>
+            </a:r>
+          </a:p>
+        </p:txBody>
+      </p:sp>
+      <p:sp>
+        <p:nvSpPr>
+          <p:cNvPr id="23" name="TextBox 22"/>
+          <p:cNvSpPr txBox="1"/>
+          <p:nvPr/>
+        </p:nvSpPr>
+        <p:spPr>
+          <a:xfrm>
+            <a:off x="8439912" y="5349240"/>
+            <a:ext cx="1691640" cy="658368"/>
+          </a:xfrm>
+          <a:prstGeom prst="rect">
+            <a:avLst/>
+          </a:prstGeom>
+          <a:noFill/>
+        </p:spPr>
+        <p:txBody>
+          <a:bodyPr wrap="square" lIns="0" rIns="0" tIns="0" bIns="0">
+            <a:spAutoFit/>
+          </a:bodyPr>
+          <a:lstStyle/>
+          <a:p>
+            <a:pPr algn="ctr"/>
+            <a:r>
+              <a:rPr sz="1100" b="1">
+                <a:solidFill>
+                  <a:srgbClr val="111827"/>
+                </a:solidFill>
+                <a:latin typeface="Arial"/>
+              </a:rPr>
+              <a:t>Individual activity: Learners silently read</a:t>
+            </a:r>
+          </a:p>
+        </p:txBody>
+      </p:sp>
+      <p:sp>
+        <p:nvSpPr>
+          <p:cNvPr id="24" name="Rounded Rectangle 23"/>
           <p:cNvSpPr/>
           <p:nvPr/>
         </p:nvSpPr>
         <p:spPr>
           <a:xfrm>
-            <a:off x="1655978" y="2809036"/>
-            <a:ext cx="1119225" cy="43434"/>
-          </a:xfrm>
-          <a:prstGeom prst="rect">
-            <a:avLst/>
-          </a:prstGeom>
-          <a:solidFill>
-            <a:srgbClr val="CBD5E1"/>
-          </a:solidFill>
-          <a:ln>
-            <a:noFill/>
+            <a:off x="3703320" y="5650992"/>
+            <a:ext cx="5440680" cy="457200"/>
+          </a:xfrm>
+          <a:prstGeom prst="roundRect">
+            <a:avLst/>
+          </a:prstGeom>
+          <a:solidFill>
+            <a:srgbClr val="FFFFFF"/>
+          </a:solidFill>
+          <a:ln w="12700">
+            <a:solidFill>
+              <a:srgbClr val="D90000"/>
+            </a:solidFill>
           </a:ln>
         </p:spPr>
         <p:style>
@@ -10259,100 +10147,14 @@
       </p:sp>
       <p:sp>
         <p:nvSpPr>
-          <p:cNvPr id="16" name="Rectangle 15"/>
-          <p:cNvSpPr/>
-          <p:nvPr/>
-        </p:nvSpPr>
-        <p:spPr>
-          <a:xfrm>
-            <a:off x="1655978" y="3017520"/>
-            <a:ext cx="1119225" cy="43434"/>
-          </a:xfrm>
-          <a:prstGeom prst="rect">
-            <a:avLst/>
-          </a:prstGeom>
-          <a:solidFill>
-            <a:srgbClr val="CBD5E1"/>
-          </a:solidFill>
-          <a:ln>
-            <a:noFill/>
-          </a:ln>
-        </p:spPr>
-        <p:style>
-          <a:lnRef idx="1">
-            <a:schemeClr val="accent1"/>
-          </a:lnRef>
-          <a:fillRef idx="3">
-            <a:schemeClr val="accent1"/>
-          </a:fillRef>
-          <a:effectRef idx="2">
-            <a:schemeClr val="accent1"/>
-          </a:effectRef>
-          <a:fontRef idx="minor">
-            <a:schemeClr val="lt1"/>
-          </a:fontRef>
-        </p:style>
-        <p:txBody>
-          <a:bodyPr rtlCol="0" anchor="ctr"/>
-          <a:lstStyle/>
-          <a:p>
-            <a:pPr algn="ctr"/>
-          </a:p>
-        </p:txBody>
-      </p:sp>
-      <p:sp>
-        <p:nvSpPr>
-          <p:cNvPr id="17" name="Rectangle 16"/>
-          <p:cNvSpPr/>
-          <p:nvPr/>
-        </p:nvSpPr>
-        <p:spPr>
-          <a:xfrm>
-            <a:off x="1655978" y="3226003"/>
-            <a:ext cx="1119225" cy="43434"/>
-          </a:xfrm>
-          <a:prstGeom prst="rect">
-            <a:avLst/>
-          </a:prstGeom>
-          <a:solidFill>
-            <a:srgbClr val="CBD5E1"/>
-          </a:solidFill>
-          <a:ln>
-            <a:noFill/>
-          </a:ln>
-        </p:spPr>
-        <p:style>
-          <a:lnRef idx="1">
-            <a:schemeClr val="accent1"/>
-          </a:lnRef>
-          <a:fillRef idx="3">
-            <a:schemeClr val="accent1"/>
-          </a:fillRef>
-          <a:effectRef idx="2">
-            <a:schemeClr val="accent1"/>
-          </a:effectRef>
-          <a:fontRef idx="minor">
-            <a:schemeClr val="lt1"/>
-          </a:fontRef>
-        </p:style>
-        <p:txBody>
-          <a:bodyPr rtlCol="0" anchor="ctr"/>
-          <a:lstStyle/>
-          <a:p>
-            <a:pPr algn="ctr"/>
-          </a:p>
-        </p:txBody>
-      </p:sp>
-      <p:sp>
-        <p:nvSpPr>
-          <p:cNvPr id="18" name="TextBox 17"/>
+          <p:cNvPr id="25" name="TextBox 24"/>
           <p:cNvSpPr txBox="1"/>
           <p:nvPr/>
         </p:nvSpPr>
         <p:spPr>
           <a:xfrm>
-            <a:off x="1143000" y="3630168"/>
-            <a:ext cx="2331720" cy="228600"/>
+            <a:off x="3886200" y="5769864"/>
+            <a:ext cx="5074920" cy="164592"/>
           </a:xfrm>
           <a:prstGeom prst="rect">
             <a:avLst/>
@@ -10367,641 +10169,20 @@
           <a:p>
             <a:pPr algn="ctr"/>
             <a:r>
-              <a:rPr sz="1000" b="0">
-                <a:solidFill>
-                  <a:srgbClr val="475569"/>
+              <a:rPr sz="1100" b="1">
+                <a:solidFill>
+                  <a:srgbClr val="D90000"/>
                 </a:solidFill>
                 <a:latin typeface="Arial"/>
               </a:rPr>
-              <a:t>English</a:t>
-            </a:r>
-          </a:p>
-        </p:txBody>
-      </p:sp>
-      <p:sp>
-        <p:nvSpPr>
-          <p:cNvPr id="19" name="TextBox 18"/>
-          <p:cNvSpPr txBox="1"/>
-          <p:nvPr/>
-        </p:nvSpPr>
-        <p:spPr>
-          <a:xfrm>
-            <a:off x="960120" y="4315968"/>
-            <a:ext cx="2697480" cy="310896"/>
-          </a:xfrm>
-          <a:prstGeom prst="rect">
-            <a:avLst/>
-          </a:prstGeom>
-          <a:noFill/>
-        </p:spPr>
-        <p:txBody>
-          <a:bodyPr wrap="square" lIns="0" rIns="0" tIns="0" bIns="0">
-            <a:spAutoFit/>
-          </a:bodyPr>
-          <a:lstStyle/>
-          <a:p>
-            <a:pPr algn="ctr"/>
-            <a:r>
-              <a:rPr sz="1300" b="1">
-                <a:solidFill>
-                  <a:srgbClr val="1B7F3A"/>
-                </a:solidFill>
-                <a:latin typeface="Arial"/>
-              </a:rPr>
-              <a:t>GROUP CHALLENGE</a:t>
-            </a:r>
-          </a:p>
-        </p:txBody>
-      </p:sp>
-      <p:sp>
-        <p:nvSpPr>
-          <p:cNvPr id="20" name="TextBox 19"/>
-          <p:cNvSpPr txBox="1"/>
-          <p:nvPr/>
-        </p:nvSpPr>
-        <p:spPr>
-          <a:xfrm>
-            <a:off x="1005840" y="4754880"/>
-            <a:ext cx="2606040" cy="640080"/>
-          </a:xfrm>
-          <a:prstGeom prst="rect">
-            <a:avLst/>
-          </a:prstGeom>
-          <a:noFill/>
-        </p:spPr>
-        <p:txBody>
-          <a:bodyPr wrap="square" lIns="0" rIns="0" tIns="0" bIns="0">
-            <a:spAutoFit/>
-          </a:bodyPr>
-          <a:lstStyle/>
-          <a:p>
-            <a:pPr algn="ctr"/>
-            <a:r>
-              <a:rPr sz="1500" b="1">
-                <a:solidFill>
-                  <a:srgbClr val="111827"/>
-                </a:solidFill>
-                <a:latin typeface="Arial"/>
-              </a:rPr>
-              <a:t>Produce one answer the class can check.</a:t>
-            </a:r>
-          </a:p>
-        </p:txBody>
-      </p:sp>
-      <p:sp>
-        <p:nvSpPr>
-          <p:cNvPr id="21" name="Rounded Rectangle 20"/>
-          <p:cNvSpPr/>
-          <p:nvPr/>
-        </p:nvSpPr>
-        <p:spPr>
-          <a:xfrm>
-            <a:off x="4343400" y="1828800"/>
-            <a:ext cx="6903720" cy="868680"/>
-          </a:xfrm>
-          <a:prstGeom prst="roundRect">
-            <a:avLst/>
-          </a:prstGeom>
-          <a:solidFill>
-            <a:srgbClr val="FFFFFF"/>
-          </a:solidFill>
-          <a:ln w="11430">
-            <a:solidFill>
-              <a:srgbClr val="CBD5E1"/>
-            </a:solidFill>
-          </a:ln>
-        </p:spPr>
-        <p:style>
-          <a:lnRef idx="1">
-            <a:schemeClr val="accent1"/>
-          </a:lnRef>
-          <a:fillRef idx="3">
-            <a:schemeClr val="accent1"/>
-          </a:fillRef>
-          <a:effectRef idx="2">
-            <a:schemeClr val="accent1"/>
-          </a:effectRef>
-          <a:fontRef idx="minor">
-            <a:schemeClr val="lt1"/>
-          </a:fontRef>
-        </p:style>
-        <p:txBody>
-          <a:bodyPr rtlCol="0" anchor="ctr"/>
-          <a:lstStyle/>
-          <a:p>
-            <a:pPr algn="ctr"/>
-          </a:p>
-        </p:txBody>
-      </p:sp>
-      <p:sp>
-        <p:nvSpPr>
-          <p:cNvPr id="22" name="Rectangle 21"/>
-          <p:cNvSpPr/>
-          <p:nvPr/>
-        </p:nvSpPr>
-        <p:spPr>
-          <a:xfrm>
-            <a:off x="4343400" y="1828800"/>
-            <a:ext cx="566928" cy="868680"/>
-          </a:xfrm>
-          <a:prstGeom prst="rect">
-            <a:avLst/>
-          </a:prstGeom>
-          <a:solidFill>
-            <a:srgbClr val="1B7F3A"/>
-          </a:solidFill>
-          <a:ln>
-            <a:noFill/>
-          </a:ln>
-        </p:spPr>
-        <p:style>
-          <a:lnRef idx="1">
-            <a:schemeClr val="accent1"/>
-          </a:lnRef>
-          <a:fillRef idx="3">
-            <a:schemeClr val="accent1"/>
-          </a:fillRef>
-          <a:effectRef idx="2">
-            <a:schemeClr val="accent1"/>
-          </a:effectRef>
-          <a:fontRef idx="minor">
-            <a:schemeClr val="lt1"/>
-          </a:fontRef>
-        </p:style>
-        <p:txBody>
-          <a:bodyPr rtlCol="0" anchor="ctr"/>
-          <a:lstStyle/>
-          <a:p>
-            <a:pPr algn="ctr"/>
-          </a:p>
-        </p:txBody>
-      </p:sp>
-      <p:sp>
-        <p:nvSpPr>
-          <p:cNvPr id="23" name="TextBox 22"/>
-          <p:cNvSpPr txBox="1"/>
-          <p:nvPr/>
-        </p:nvSpPr>
-        <p:spPr>
-          <a:xfrm>
-            <a:off x="4343400" y="2144268"/>
-            <a:ext cx="566928" cy="237744"/>
-          </a:xfrm>
-          <a:prstGeom prst="rect">
-            <a:avLst/>
-          </a:prstGeom>
-          <a:noFill/>
-        </p:spPr>
-        <p:txBody>
-          <a:bodyPr wrap="square" lIns="0" rIns="0" tIns="0" bIns="0">
-            <a:spAutoFit/>
-          </a:bodyPr>
-          <a:lstStyle/>
-          <a:p>
-            <a:pPr algn="ctr"/>
-            <a:r>
-              <a:rPr sz="1400" b="1">
-                <a:solidFill>
-                  <a:srgbClr val="FFFFFF"/>
-                </a:solidFill>
-                <a:latin typeface="Arial"/>
-              </a:rPr>
-              <a:t>1</a:t>
-            </a:r>
-          </a:p>
-        </p:txBody>
-      </p:sp>
-      <p:sp>
-        <p:nvSpPr>
-          <p:cNvPr id="24" name="TextBox 23"/>
-          <p:cNvSpPr txBox="1"/>
-          <p:nvPr/>
-        </p:nvSpPr>
-        <p:spPr>
-          <a:xfrm>
-            <a:off x="5129784" y="1993392"/>
-            <a:ext cx="5879592" cy="630936"/>
-          </a:xfrm>
-          <a:prstGeom prst="rect">
-            <a:avLst/>
-          </a:prstGeom>
-          <a:noFill/>
-        </p:spPr>
-        <p:txBody>
-          <a:bodyPr wrap="square" lIns="0" rIns="0" tIns="0" bIns="0">
-            <a:spAutoFit/>
-          </a:bodyPr>
-          <a:lstStyle/>
-          <a:p>
-            <a:r>
-              <a:rPr sz="1200" b="1">
-                <a:solidFill>
-                  <a:srgbClr val="111827"/>
-                </a:solidFill>
-                <a:latin typeface="Arial"/>
-              </a:rPr>
-              <a:t>Sit in a circle and participate in a "Turn and Talk" session to share</a:t>
-            </a:r>
-          </a:p>
-        </p:txBody>
-      </p:sp>
-      <p:sp>
-        <p:nvSpPr>
-          <p:cNvPr id="25" name="Rounded Rectangle 24"/>
-          <p:cNvSpPr/>
-          <p:nvPr/>
-        </p:nvSpPr>
-        <p:spPr>
-          <a:xfrm>
-            <a:off x="4343400" y="2999232"/>
-            <a:ext cx="6903720" cy="868680"/>
-          </a:xfrm>
-          <a:prstGeom prst="roundRect">
-            <a:avLst/>
-          </a:prstGeom>
-          <a:solidFill>
-            <a:srgbClr val="FFFFFF"/>
-          </a:solidFill>
-          <a:ln w="11430">
-            <a:solidFill>
-              <a:srgbClr val="CBD5E1"/>
-            </a:solidFill>
-          </a:ln>
-        </p:spPr>
-        <p:style>
-          <a:lnRef idx="1">
-            <a:schemeClr val="accent1"/>
-          </a:lnRef>
-          <a:fillRef idx="3">
-            <a:schemeClr val="accent1"/>
-          </a:fillRef>
-          <a:effectRef idx="2">
-            <a:schemeClr val="accent1"/>
-          </a:effectRef>
-          <a:fontRef idx="minor">
-            <a:schemeClr val="lt1"/>
-          </a:fontRef>
-        </p:style>
-        <p:txBody>
-          <a:bodyPr rtlCol="0" anchor="ctr"/>
-          <a:lstStyle/>
-          <a:p>
-            <a:pPr algn="ctr"/>
-          </a:p>
-        </p:txBody>
-      </p:sp>
-      <p:sp>
-        <p:nvSpPr>
-          <p:cNvPr id="26" name="Rectangle 25"/>
-          <p:cNvSpPr/>
-          <p:nvPr/>
-        </p:nvSpPr>
-        <p:spPr>
-          <a:xfrm>
-            <a:off x="4343400" y="2999232"/>
-            <a:ext cx="566928" cy="868680"/>
-          </a:xfrm>
-          <a:prstGeom prst="rect">
-            <a:avLst/>
-          </a:prstGeom>
-          <a:solidFill>
-            <a:srgbClr val="1B7F3A"/>
-          </a:solidFill>
-          <a:ln>
-            <a:noFill/>
-          </a:ln>
-        </p:spPr>
-        <p:style>
-          <a:lnRef idx="1">
-            <a:schemeClr val="accent1"/>
-          </a:lnRef>
-          <a:fillRef idx="3">
-            <a:schemeClr val="accent1"/>
-          </a:fillRef>
-          <a:effectRef idx="2">
-            <a:schemeClr val="accent1"/>
-          </a:effectRef>
-          <a:fontRef idx="minor">
-            <a:schemeClr val="lt1"/>
-          </a:fontRef>
-        </p:style>
-        <p:txBody>
-          <a:bodyPr rtlCol="0" anchor="ctr"/>
-          <a:lstStyle/>
-          <a:p>
-            <a:pPr algn="ctr"/>
-          </a:p>
-        </p:txBody>
-      </p:sp>
-      <p:sp>
-        <p:nvSpPr>
-          <p:cNvPr id="27" name="TextBox 26"/>
-          <p:cNvSpPr txBox="1"/>
-          <p:nvPr/>
-        </p:nvSpPr>
-        <p:spPr>
-          <a:xfrm>
-            <a:off x="4343400" y="3314700"/>
-            <a:ext cx="566928" cy="237744"/>
-          </a:xfrm>
-          <a:prstGeom prst="rect">
-            <a:avLst/>
-          </a:prstGeom>
-          <a:noFill/>
-        </p:spPr>
-        <p:txBody>
-          <a:bodyPr wrap="square" lIns="0" rIns="0" tIns="0" bIns="0">
-            <a:spAutoFit/>
-          </a:bodyPr>
-          <a:lstStyle/>
-          <a:p>
-            <a:pPr algn="ctr"/>
-            <a:r>
-              <a:rPr sz="1400" b="1">
-                <a:solidFill>
-                  <a:srgbClr val="FFFFFF"/>
-                </a:solidFill>
-                <a:latin typeface="Arial"/>
-              </a:rPr>
-              <a:t>2</a:t>
-            </a:r>
-          </a:p>
-        </p:txBody>
-      </p:sp>
-      <p:sp>
-        <p:nvSpPr>
-          <p:cNvPr id="28" name="TextBox 27"/>
-          <p:cNvSpPr txBox="1"/>
-          <p:nvPr/>
-        </p:nvSpPr>
-        <p:spPr>
-          <a:xfrm>
-            <a:off x="5129784" y="3163824"/>
-            <a:ext cx="5879592" cy="630936"/>
-          </a:xfrm>
-          <a:prstGeom prst="rect">
-            <a:avLst/>
-          </a:prstGeom>
-          <a:noFill/>
-        </p:spPr>
-        <p:txBody>
-          <a:bodyPr wrap="square" lIns="0" rIns="0" tIns="0" bIns="0">
-            <a:spAutoFit/>
-          </a:bodyPr>
-          <a:lstStyle/>
-          <a:p>
-            <a:r>
-              <a:rPr sz="1200" b="1">
-                <a:solidFill>
-                  <a:srgbClr val="111827"/>
-                </a:solidFill>
-                <a:latin typeface="Arial"/>
-              </a:rPr>
-              <a:t>Write the new vocabulary in their exercise books and work in pairs to list three</a:t>
-            </a:r>
-          </a:p>
-        </p:txBody>
-      </p:sp>
-      <p:sp>
-        <p:nvSpPr>
-          <p:cNvPr id="29" name="Rounded Rectangle 28"/>
-          <p:cNvSpPr/>
-          <p:nvPr/>
-        </p:nvSpPr>
-        <p:spPr>
-          <a:xfrm>
-            <a:off x="4343400" y="4169664"/>
-            <a:ext cx="6903720" cy="868680"/>
-          </a:xfrm>
-          <a:prstGeom prst="roundRect">
-            <a:avLst/>
-          </a:prstGeom>
-          <a:solidFill>
-            <a:srgbClr val="FFFFFF"/>
-          </a:solidFill>
-          <a:ln w="11430">
-            <a:solidFill>
-              <a:srgbClr val="CBD5E1"/>
-            </a:solidFill>
-          </a:ln>
-        </p:spPr>
-        <p:style>
-          <a:lnRef idx="1">
-            <a:schemeClr val="accent1"/>
-          </a:lnRef>
-          <a:fillRef idx="3">
-            <a:schemeClr val="accent1"/>
-          </a:fillRef>
-          <a:effectRef idx="2">
-            <a:schemeClr val="accent1"/>
-          </a:effectRef>
-          <a:fontRef idx="minor">
-            <a:schemeClr val="lt1"/>
-          </a:fontRef>
-        </p:style>
-        <p:txBody>
-          <a:bodyPr rtlCol="0" anchor="ctr"/>
-          <a:lstStyle/>
-          <a:p>
-            <a:pPr algn="ctr"/>
-          </a:p>
-        </p:txBody>
-      </p:sp>
-      <p:sp>
-        <p:nvSpPr>
-          <p:cNvPr id="30" name="Rectangle 29"/>
-          <p:cNvSpPr/>
-          <p:nvPr/>
-        </p:nvSpPr>
-        <p:spPr>
-          <a:xfrm>
-            <a:off x="4343400" y="4169664"/>
-            <a:ext cx="566928" cy="868680"/>
-          </a:xfrm>
-          <a:prstGeom prst="rect">
-            <a:avLst/>
-          </a:prstGeom>
-          <a:solidFill>
-            <a:srgbClr val="1B7F3A"/>
-          </a:solidFill>
-          <a:ln>
-            <a:noFill/>
-          </a:ln>
-        </p:spPr>
-        <p:style>
-          <a:lnRef idx="1">
-            <a:schemeClr val="accent1"/>
-          </a:lnRef>
-          <a:fillRef idx="3">
-            <a:schemeClr val="accent1"/>
-          </a:fillRef>
-          <a:effectRef idx="2">
-            <a:schemeClr val="accent1"/>
-          </a:effectRef>
-          <a:fontRef idx="minor">
-            <a:schemeClr val="lt1"/>
-          </a:fontRef>
-        </p:style>
-        <p:txBody>
-          <a:bodyPr rtlCol="0" anchor="ctr"/>
-          <a:lstStyle/>
-          <a:p>
-            <a:pPr algn="ctr"/>
-          </a:p>
-        </p:txBody>
-      </p:sp>
-      <p:sp>
-        <p:nvSpPr>
-          <p:cNvPr id="31" name="TextBox 30"/>
-          <p:cNvSpPr txBox="1"/>
-          <p:nvPr/>
-        </p:nvSpPr>
-        <p:spPr>
-          <a:xfrm>
-            <a:off x="4343400" y="4485132"/>
-            <a:ext cx="566928" cy="237744"/>
-          </a:xfrm>
-          <a:prstGeom prst="rect">
-            <a:avLst/>
-          </a:prstGeom>
-          <a:noFill/>
-        </p:spPr>
-        <p:txBody>
-          <a:bodyPr wrap="square" lIns="0" rIns="0" tIns="0" bIns="0">
-            <a:spAutoFit/>
-          </a:bodyPr>
-          <a:lstStyle/>
-          <a:p>
-            <a:pPr algn="ctr"/>
-            <a:r>
-              <a:rPr sz="1400" b="1">
-                <a:solidFill>
-                  <a:srgbClr val="FFFFFF"/>
-                </a:solidFill>
-                <a:latin typeface="Arial"/>
-              </a:rPr>
-              <a:t>3</a:t>
-            </a:r>
-          </a:p>
-        </p:txBody>
-      </p:sp>
-      <p:sp>
-        <p:nvSpPr>
-          <p:cNvPr id="32" name="TextBox 31"/>
-          <p:cNvSpPr txBox="1"/>
-          <p:nvPr/>
-        </p:nvSpPr>
-        <p:spPr>
-          <a:xfrm>
-            <a:off x="5129784" y="4334256"/>
-            <a:ext cx="5879592" cy="630936"/>
-          </a:xfrm>
-          <a:prstGeom prst="rect">
-            <a:avLst/>
-          </a:prstGeom>
-          <a:noFill/>
-        </p:spPr>
-        <p:txBody>
-          <a:bodyPr wrap="square" lIns="0" rIns="0" tIns="0" bIns="0">
-            <a:spAutoFit/>
-          </a:bodyPr>
-          <a:lstStyle/>
-          <a:p>
-            <a:r>
-              <a:rPr sz="1200" b="1">
-                <a:solidFill>
-                  <a:srgbClr val="111827"/>
-                </a:solidFill>
-                <a:latin typeface="Arial"/>
-              </a:rPr>
-              <a:t>Individual activity: Learners silently read through their term's work and use</a:t>
-            </a:r>
-          </a:p>
-        </p:txBody>
-      </p:sp>
-      <p:sp>
-        <p:nvSpPr>
-          <p:cNvPr id="33" name="Rounded Rectangle 32"/>
-          <p:cNvSpPr/>
-          <p:nvPr/>
-        </p:nvSpPr>
-        <p:spPr>
-          <a:xfrm>
-            <a:off x="4343400" y="5413248"/>
-            <a:ext cx="6903720" cy="658368"/>
-          </a:xfrm>
-          <a:prstGeom prst="roundRect">
-            <a:avLst/>
-          </a:prstGeom>
-          <a:solidFill>
-            <a:srgbClr val="FFFFFF"/>
-          </a:solidFill>
-          <a:ln w="13970">
-            <a:solidFill>
-              <a:srgbClr val="D90000"/>
-            </a:solidFill>
-          </a:ln>
-        </p:spPr>
-        <p:style>
-          <a:lnRef idx="1">
-            <a:schemeClr val="accent1"/>
-          </a:lnRef>
-          <a:fillRef idx="3">
-            <a:schemeClr val="accent1"/>
-          </a:fillRef>
-          <a:effectRef idx="2">
-            <a:schemeClr val="accent1"/>
-          </a:effectRef>
-          <a:fontRef idx="minor">
-            <a:schemeClr val="lt1"/>
-          </a:fontRef>
-        </p:style>
-        <p:txBody>
-          <a:bodyPr rtlCol="0" anchor="ctr"/>
-          <a:lstStyle/>
-          <a:p>
-            <a:pPr algn="ctr"/>
-          </a:p>
-        </p:txBody>
-      </p:sp>
-      <p:sp>
-        <p:nvSpPr>
-          <p:cNvPr id="34" name="TextBox 33"/>
-          <p:cNvSpPr txBox="1"/>
-          <p:nvPr/>
-        </p:nvSpPr>
-        <p:spPr>
-          <a:xfrm>
-            <a:off x="4572000" y="5577840"/>
-            <a:ext cx="6446520" cy="274320"/>
-          </a:xfrm>
-          <a:prstGeom prst="rect">
-            <a:avLst/>
-          </a:prstGeom>
-          <a:noFill/>
-        </p:spPr>
-        <p:txBody>
-          <a:bodyPr wrap="square" lIns="0" rIns="0" tIns="0" bIns="0">
-            <a:spAutoFit/>
-          </a:bodyPr>
-          <a:lstStyle/>
-          <a:p>
-            <a:pPr algn="ctr"/>
-            <a:r>
-              <a:rPr sz="1400" b="1">
-                <a:solidFill>
-                  <a:srgbClr val="D90000"/>
-                </a:solidFill>
-                <a:latin typeface="Arial"/>
-              </a:rPr>
-              <a:t>Class share-out: one group explains, one group improves it.</a:t>
-            </a:r>
-          </a:p>
-        </p:txBody>
-      </p:sp>
-      <p:sp>
-        <p:nvSpPr>
-          <p:cNvPr id="35" name="TextBox 34"/>
+              <a:t>Share-out: explain one result, then improve it.</a:t>
+            </a:r>
+          </a:p>
+        </p:txBody>
+      </p:sp>
+      <p:sp>
+        <p:nvSpPr>
+          <p:cNvPr id="26" name="TextBox 25"/>
           <p:cNvSpPr txBox="1"/>
           <p:nvPr/>
         </p:nvSpPr>

--- a/uganda-p7-mvp/p7_t1_english_1205/p7_t1_english_1205.pptx
+++ b/uganda-p7-mvp/p7_t1_english_1205/p7_t1_english_1205.pptx
@@ -3527,8 +3527,8 @@
         </p:nvSpPr>
         <p:spPr>
           <a:xfrm>
-            <a:off x="1371600" y="2414015"/>
-            <a:ext cx="9464040" cy="384048"/>
+            <a:off x="1417319" y="2304288"/>
+            <a:ext cx="9372600" cy="310896"/>
           </a:xfrm>
           <a:prstGeom prst="rect">
             <a:avLst/>
@@ -3543,7 +3543,7 @@
           <a:p>
             <a:pPr algn="ctr"/>
             <a:r>
-              <a:rPr sz="1800" b="1">
+              <a:rPr sz="1700" b="1">
                 <a:solidFill>
                   <a:srgbClr val="111827"/>
                 </a:solidFill>
@@ -3554,97 +3554,115 @@
           </a:p>
         </p:txBody>
       </p:sp>
-      <p:cxnSp>
-        <p:nvCxnSpPr>
-          <p:cNvPr id="13" name="Connector 12"/>
-          <p:cNvCxnSpPr/>
-          <p:nvPr/>
-        </p:nvCxnSpPr>
-        <p:spPr>
-          <a:xfrm flipV="1">
-            <a:off x="2880360" y="4023360"/>
-            <a:ext cx="3200399" cy="822960"/>
-          </a:xfrm>
-          <a:prstGeom prst="line">
-            <a:avLst/>
-          </a:prstGeom>
-          <a:ln w="38100">
+      <p:sp>
+        <p:nvSpPr>
+          <p:cNvPr id="13" name="Rectangle 12"/>
+          <p:cNvSpPr/>
+          <p:nvPr/>
+        </p:nvSpPr>
+        <p:spPr>
+          <a:xfrm>
+            <a:off x="1931212" y="3054096"/>
+            <a:ext cx="872337" cy="331927"/>
+          </a:xfrm>
+          <a:prstGeom prst="rect">
+            <a:avLst/>
+          </a:prstGeom>
+          <a:solidFill>
+            <a:srgbClr val="FCD116"/>
+          </a:solidFill>
+          <a:ln w="6350">
             <a:solidFill>
-              <a:srgbClr val="1D4ED8"/>
+              <a:srgbClr val="111827"/>
             </a:solidFill>
           </a:ln>
         </p:spPr>
         <p:style>
-          <a:lnRef idx="2">
-            <a:schemeClr val="accent1"/>
-          </a:lnRef>
-          <a:fillRef idx="0">
-            <a:schemeClr val="accent1"/>
-          </a:fillRef>
-          <a:effectRef idx="1">
-            <a:schemeClr val="accent1"/>
-          </a:effectRef>
-          <a:fontRef idx="minor">
-            <a:schemeClr val="tx1"/>
-          </a:fontRef>
-        </p:style>
-      </p:cxnSp>
-      <p:cxnSp>
-        <p:nvCxnSpPr>
-          <p:cNvPr id="14" name="Connector 13"/>
-          <p:cNvCxnSpPr/>
-          <p:nvPr/>
-        </p:nvCxnSpPr>
-        <p:spPr>
-          <a:xfrm>
-            <a:off x="6080759" y="4023360"/>
-            <a:ext cx="3200401" cy="822960"/>
-          </a:xfrm>
-          <a:prstGeom prst="line">
-            <a:avLst/>
-          </a:prstGeom>
-          <a:ln w="38100">
+          <a:lnRef idx="1">
+            <a:schemeClr val="accent1"/>
+          </a:lnRef>
+          <a:fillRef idx="3">
+            <a:schemeClr val="accent1"/>
+          </a:fillRef>
+          <a:effectRef idx="2">
+            <a:schemeClr val="accent1"/>
+          </a:effectRef>
+          <a:fontRef idx="minor">
+            <a:schemeClr val="lt1"/>
+          </a:fontRef>
+        </p:style>
+        <p:txBody>
+          <a:bodyPr rtlCol="0" anchor="ctr"/>
+          <a:lstStyle/>
+          <a:p>
+            <a:pPr algn="ctr"/>
+          </a:p>
+        </p:txBody>
+      </p:sp>
+      <p:sp>
+        <p:nvSpPr>
+          <p:cNvPr id="14" name="Rounded Rectangle 13"/>
+          <p:cNvSpPr/>
+          <p:nvPr/>
+        </p:nvSpPr>
+        <p:spPr>
+          <a:xfrm>
+            <a:off x="1737360" y="3265322"/>
+            <a:ext cx="2423160" cy="1176832"/>
+          </a:xfrm>
+          <a:prstGeom prst="roundRect">
+            <a:avLst/>
+          </a:prstGeom>
+          <a:solidFill>
+            <a:srgbClr val="FFF7E0"/>
+          </a:solidFill>
+          <a:ln w="12700">
             <a:solidFill>
-              <a:srgbClr val="1D4ED8"/>
+              <a:srgbClr val="FCD116"/>
             </a:solidFill>
           </a:ln>
         </p:spPr>
         <p:style>
-          <a:lnRef idx="2">
-            <a:schemeClr val="accent1"/>
-          </a:lnRef>
-          <a:fillRef idx="0">
-            <a:schemeClr val="accent1"/>
-          </a:fillRef>
-          <a:effectRef idx="1">
-            <a:schemeClr val="accent1"/>
-          </a:effectRef>
-          <a:fontRef idx="minor">
-            <a:schemeClr val="tx1"/>
-          </a:fontRef>
-        </p:style>
-      </p:cxnSp>
-      <p:sp>
-        <p:nvSpPr>
-          <p:cNvPr id="15" name="Oval 14"/>
-          <p:cNvSpPr/>
-          <p:nvPr/>
-        </p:nvSpPr>
-        <p:spPr>
-          <a:xfrm>
-            <a:off x="2551176" y="4517136"/>
-            <a:ext cx="658368" cy="658368"/>
-          </a:xfrm>
-          <a:prstGeom prst="ellipse">
-            <a:avLst/>
-          </a:prstGeom>
-          <a:solidFill>
-            <a:srgbClr val="FFFFFF"/>
-          </a:solidFill>
-          <a:ln w="22860">
-            <a:solidFill>
-              <a:srgbClr val="D90000"/>
-            </a:solidFill>
+          <a:lnRef idx="1">
+            <a:schemeClr val="accent1"/>
+          </a:lnRef>
+          <a:fillRef idx="3">
+            <a:schemeClr val="accent1"/>
+          </a:fillRef>
+          <a:effectRef idx="2">
+            <a:schemeClr val="accent1"/>
+          </a:effectRef>
+          <a:fontRef idx="minor">
+            <a:schemeClr val="lt1"/>
+          </a:fontRef>
+        </p:style>
+        <p:txBody>
+          <a:bodyPr rtlCol="0" anchor="ctr"/>
+          <a:lstStyle/>
+          <a:p>
+            <a:pPr algn="ctr"/>
+          </a:p>
+        </p:txBody>
+      </p:sp>
+      <p:sp>
+        <p:nvSpPr>
+          <p:cNvPr id="15" name="Rectangle 14"/>
+          <p:cNvSpPr/>
+          <p:nvPr/>
+        </p:nvSpPr>
+        <p:spPr>
+          <a:xfrm>
+            <a:off x="2028139" y="3838651"/>
+            <a:ext cx="1841601" cy="60350"/>
+          </a:xfrm>
+          <a:prstGeom prst="rect">
+            <a:avLst/>
+          </a:prstGeom>
+          <a:solidFill>
+            <a:srgbClr val="CBD5E1"/>
+          </a:solidFill>
+          <a:ln>
+            <a:noFill/>
           </a:ln>
         </p:spPr>
         <p:style>
@@ -3677,43 +3695,8 @@
         </p:nvSpPr>
         <p:spPr>
           <a:xfrm>
-            <a:off x="2715768" y="4700016"/>
-            <a:ext cx="329184" cy="201168"/>
-          </a:xfrm>
-          <a:prstGeom prst="rect">
-            <a:avLst/>
-          </a:prstGeom>
-          <a:noFill/>
-        </p:spPr>
-        <p:txBody>
-          <a:bodyPr wrap="square" lIns="0" rIns="0" tIns="0" bIns="0">
-            <a:spAutoFit/>
-          </a:bodyPr>
-          <a:lstStyle/>
-          <a:p>
-            <a:pPr algn="ctr"/>
-            <a:r>
-              <a:rPr sz="1300" b="1">
-                <a:solidFill>
-                  <a:srgbClr val="D90000"/>
-                </a:solidFill>
-                <a:latin typeface="Arial"/>
-              </a:rPr>
-              <a:t>1</a:t>
-            </a:r>
-          </a:p>
-        </p:txBody>
-      </p:sp>
-      <p:sp>
-        <p:nvSpPr>
-          <p:cNvPr id="17" name="TextBox 16"/>
-          <p:cNvSpPr txBox="1"/>
-          <p:nvPr/>
-        </p:nvSpPr>
-        <p:spPr>
-          <a:xfrm>
-            <a:off x="2039112" y="5349240"/>
-            <a:ext cx="1691640" cy="658368"/>
+            <a:off x="1956815" y="3602736"/>
+            <a:ext cx="1984248" cy="347472"/>
           </a:xfrm>
           <a:prstGeom prst="rect">
             <a:avLst/>
@@ -3741,24 +3724,24 @@
       </p:sp>
       <p:sp>
         <p:nvSpPr>
-          <p:cNvPr id="18" name="Oval 17"/>
-          <p:cNvSpPr/>
-          <p:nvPr/>
-        </p:nvSpPr>
-        <p:spPr>
-          <a:xfrm>
-            <a:off x="5751575" y="3694176"/>
-            <a:ext cx="658368" cy="658368"/>
-          </a:xfrm>
-          <a:prstGeom prst="ellipse">
+          <p:cNvPr id="17" name="Rounded Rectangle 16"/>
+          <p:cNvSpPr/>
+          <p:nvPr/>
+        </p:nvSpPr>
+        <p:spPr>
+          <a:xfrm>
+            <a:off x="1965960" y="4818888"/>
+            <a:ext cx="1965960" cy="621792"/>
+          </a:xfrm>
+          <a:prstGeom prst="roundRect">
             <a:avLst/>
           </a:prstGeom>
           <a:solidFill>
             <a:srgbClr val="FFFFFF"/>
           </a:solidFill>
-          <a:ln w="22860">
+          <a:ln w="10160">
             <a:solidFill>
-              <a:srgbClr val="1D4ED8"/>
+              <a:srgbClr val="CBD5E1"/>
             </a:solidFill>
           </a:ln>
         </p:spPr>
@@ -3786,14 +3769,14 @@
       </p:sp>
       <p:sp>
         <p:nvSpPr>
-          <p:cNvPr id="19" name="TextBox 18"/>
+          <p:cNvPr id="18" name="TextBox 17"/>
           <p:cNvSpPr txBox="1"/>
           <p:nvPr/>
         </p:nvSpPr>
         <p:spPr>
           <a:xfrm>
-            <a:off x="5916168" y="3877056"/>
-            <a:ext cx="329184" cy="201168"/>
+            <a:off x="2103120" y="5001768"/>
+            <a:ext cx="1691640" cy="201168"/>
           </a:xfrm>
           <a:prstGeom prst="rect">
             <a:avLst/>
@@ -3808,27 +3791,160 @@
           <a:p>
             <a:pPr algn="ctr"/>
             <a:r>
-              <a:rPr sz="1300" b="1">
+              <a:rPr sz="1000" b="1">
                 <a:solidFill>
                   <a:srgbClr val="1D4ED8"/>
                 </a:solidFill>
                 <a:latin typeface="Arial"/>
               </a:rPr>
-              <a:t>2</a:t>
-            </a:r>
-          </a:p>
-        </p:txBody>
-      </p:sp>
-      <p:sp>
-        <p:nvSpPr>
-          <p:cNvPr id="20" name="TextBox 19"/>
+              <a:t>choose</a:t>
+            </a:r>
+          </a:p>
+        </p:txBody>
+      </p:sp>
+      <p:sp>
+        <p:nvSpPr>
+          <p:cNvPr id="19" name="Rectangle 18"/>
+          <p:cNvSpPr/>
+          <p:nvPr/>
+        </p:nvSpPr>
+        <p:spPr>
+          <a:xfrm>
+            <a:off x="5085892" y="3054096"/>
+            <a:ext cx="872337" cy="331927"/>
+          </a:xfrm>
+          <a:prstGeom prst="rect">
+            <a:avLst/>
+          </a:prstGeom>
+          <a:solidFill>
+            <a:srgbClr val="1D4ED8"/>
+          </a:solidFill>
+          <a:ln w="6350">
+            <a:solidFill>
+              <a:srgbClr val="111827"/>
+            </a:solidFill>
+          </a:ln>
+        </p:spPr>
+        <p:style>
+          <a:lnRef idx="1">
+            <a:schemeClr val="accent1"/>
+          </a:lnRef>
+          <a:fillRef idx="3">
+            <a:schemeClr val="accent1"/>
+          </a:fillRef>
+          <a:effectRef idx="2">
+            <a:schemeClr val="accent1"/>
+          </a:effectRef>
+          <a:fontRef idx="minor">
+            <a:schemeClr val="lt1"/>
+          </a:fontRef>
+        </p:style>
+        <p:txBody>
+          <a:bodyPr rtlCol="0" anchor="ctr"/>
+          <a:lstStyle/>
+          <a:p>
+            <a:pPr algn="ctr"/>
+          </a:p>
+        </p:txBody>
+      </p:sp>
+      <p:sp>
+        <p:nvSpPr>
+          <p:cNvPr id="20" name="Rounded Rectangle 19"/>
+          <p:cNvSpPr/>
+          <p:nvPr/>
+        </p:nvSpPr>
+        <p:spPr>
+          <a:xfrm>
+            <a:off x="4892040" y="3265322"/>
+            <a:ext cx="2423160" cy="1176832"/>
+          </a:xfrm>
+          <a:prstGeom prst="roundRect">
+            <a:avLst/>
+          </a:prstGeom>
+          <a:solidFill>
+            <a:srgbClr val="FFF7E0"/>
+          </a:solidFill>
+          <a:ln w="12700">
+            <a:solidFill>
+              <a:srgbClr val="1D4ED8"/>
+            </a:solidFill>
+          </a:ln>
+        </p:spPr>
+        <p:style>
+          <a:lnRef idx="1">
+            <a:schemeClr val="accent1"/>
+          </a:lnRef>
+          <a:fillRef idx="3">
+            <a:schemeClr val="accent1"/>
+          </a:fillRef>
+          <a:effectRef idx="2">
+            <a:schemeClr val="accent1"/>
+          </a:effectRef>
+          <a:fontRef idx="minor">
+            <a:schemeClr val="lt1"/>
+          </a:fontRef>
+        </p:style>
+        <p:txBody>
+          <a:bodyPr rtlCol="0" anchor="ctr"/>
+          <a:lstStyle/>
+          <a:p>
+            <a:pPr algn="ctr"/>
+          </a:p>
+        </p:txBody>
+      </p:sp>
+      <p:sp>
+        <p:nvSpPr>
+          <p:cNvPr id="21" name="Rectangle 20"/>
+          <p:cNvSpPr/>
+          <p:nvPr/>
+        </p:nvSpPr>
+        <p:spPr>
+          <a:xfrm>
+            <a:off x="5182819" y="3838651"/>
+            <a:ext cx="1841601" cy="60350"/>
+          </a:xfrm>
+          <a:prstGeom prst="rect">
+            <a:avLst/>
+          </a:prstGeom>
+          <a:solidFill>
+            <a:srgbClr val="CBD5E1"/>
+          </a:solidFill>
+          <a:ln>
+            <a:noFill/>
+          </a:ln>
+        </p:spPr>
+        <p:style>
+          <a:lnRef idx="1">
+            <a:schemeClr val="accent1"/>
+          </a:lnRef>
+          <a:fillRef idx="3">
+            <a:schemeClr val="accent1"/>
+          </a:fillRef>
+          <a:effectRef idx="2">
+            <a:schemeClr val="accent1"/>
+          </a:effectRef>
+          <a:fontRef idx="minor">
+            <a:schemeClr val="lt1"/>
+          </a:fontRef>
+        </p:style>
+        <p:txBody>
+          <a:bodyPr rtlCol="0" anchor="ctr"/>
+          <a:lstStyle/>
+          <a:p>
+            <a:pPr algn="ctr"/>
+          </a:p>
+        </p:txBody>
+      </p:sp>
+      <p:sp>
+        <p:nvSpPr>
+          <p:cNvPr id="22" name="TextBox 21"/>
           <p:cNvSpPr txBox="1"/>
           <p:nvPr/>
         </p:nvSpPr>
         <p:spPr>
           <a:xfrm>
-            <a:off x="5239512" y="4526280"/>
-            <a:ext cx="1691640" cy="658368"/>
+            <a:off x="5111496" y="3602736"/>
+            <a:ext cx="1984248" cy="347472"/>
           </a:xfrm>
           <a:prstGeom prst="rect">
             <a:avLst/>
@@ -3856,24 +3972,24 @@
       </p:sp>
       <p:sp>
         <p:nvSpPr>
-          <p:cNvPr id="21" name="Oval 20"/>
-          <p:cNvSpPr/>
-          <p:nvPr/>
-        </p:nvSpPr>
-        <p:spPr>
-          <a:xfrm>
-            <a:off x="8951976" y="4517136"/>
-            <a:ext cx="658368" cy="658368"/>
-          </a:xfrm>
-          <a:prstGeom prst="ellipse">
+          <p:cNvPr id="23" name="Rounded Rectangle 22"/>
+          <p:cNvSpPr/>
+          <p:nvPr/>
+        </p:nvSpPr>
+        <p:spPr>
+          <a:xfrm>
+            <a:off x="5120640" y="4818888"/>
+            <a:ext cx="1965960" cy="621792"/>
+          </a:xfrm>
+          <a:prstGeom prst="roundRect">
             <a:avLst/>
           </a:prstGeom>
           <a:solidFill>
             <a:srgbClr val="FFFFFF"/>
           </a:solidFill>
-          <a:ln w="22860">
+          <a:ln w="10160">
             <a:solidFill>
-              <a:srgbClr val="D90000"/>
+              <a:srgbClr val="CBD5E1"/>
             </a:solidFill>
           </a:ln>
         </p:spPr>
@@ -3901,14 +4017,14 @@
       </p:sp>
       <p:sp>
         <p:nvSpPr>
-          <p:cNvPr id="22" name="TextBox 21"/>
+          <p:cNvPr id="24" name="TextBox 23"/>
           <p:cNvSpPr txBox="1"/>
           <p:nvPr/>
         </p:nvSpPr>
         <p:spPr>
           <a:xfrm>
-            <a:off x="9116568" y="4700016"/>
-            <a:ext cx="329184" cy="201168"/>
+            <a:off x="5257800" y="5001768"/>
+            <a:ext cx="1691640" cy="201168"/>
           </a:xfrm>
           <a:prstGeom prst="rect">
             <a:avLst/>
@@ -3923,27 +4039,160 @@
           <a:p>
             <a:pPr algn="ctr"/>
             <a:r>
-              <a:rPr sz="1300" b="1">
+              <a:rPr sz="1000" b="1">
                 <a:solidFill>
-                  <a:srgbClr val="D90000"/>
+                  <a:srgbClr val="1D4ED8"/>
                 </a:solidFill>
                 <a:latin typeface="Arial"/>
               </a:rPr>
-              <a:t>3</a:t>
-            </a:r>
-          </a:p>
-        </p:txBody>
-      </p:sp>
-      <p:sp>
-        <p:nvSpPr>
-          <p:cNvPr id="23" name="TextBox 22"/>
+              <a:t>check</a:t>
+            </a:r>
+          </a:p>
+        </p:txBody>
+      </p:sp>
+      <p:sp>
+        <p:nvSpPr>
+          <p:cNvPr id="25" name="Rectangle 24"/>
+          <p:cNvSpPr/>
+          <p:nvPr/>
+        </p:nvSpPr>
+        <p:spPr>
+          <a:xfrm>
+            <a:off x="8240572" y="3054096"/>
+            <a:ext cx="872337" cy="331927"/>
+          </a:xfrm>
+          <a:prstGeom prst="rect">
+            <a:avLst/>
+          </a:prstGeom>
+          <a:solidFill>
+            <a:srgbClr val="1B7F3A"/>
+          </a:solidFill>
+          <a:ln w="6350">
+            <a:solidFill>
+              <a:srgbClr val="111827"/>
+            </a:solidFill>
+          </a:ln>
+        </p:spPr>
+        <p:style>
+          <a:lnRef idx="1">
+            <a:schemeClr val="accent1"/>
+          </a:lnRef>
+          <a:fillRef idx="3">
+            <a:schemeClr val="accent1"/>
+          </a:fillRef>
+          <a:effectRef idx="2">
+            <a:schemeClr val="accent1"/>
+          </a:effectRef>
+          <a:fontRef idx="minor">
+            <a:schemeClr val="lt1"/>
+          </a:fontRef>
+        </p:style>
+        <p:txBody>
+          <a:bodyPr rtlCol="0" anchor="ctr"/>
+          <a:lstStyle/>
+          <a:p>
+            <a:pPr algn="ctr"/>
+          </a:p>
+        </p:txBody>
+      </p:sp>
+      <p:sp>
+        <p:nvSpPr>
+          <p:cNvPr id="26" name="Rounded Rectangle 25"/>
+          <p:cNvSpPr/>
+          <p:nvPr/>
+        </p:nvSpPr>
+        <p:spPr>
+          <a:xfrm>
+            <a:off x="8046720" y="3265322"/>
+            <a:ext cx="2423160" cy="1176832"/>
+          </a:xfrm>
+          <a:prstGeom prst="roundRect">
+            <a:avLst/>
+          </a:prstGeom>
+          <a:solidFill>
+            <a:srgbClr val="FFF7E0"/>
+          </a:solidFill>
+          <a:ln w="12700">
+            <a:solidFill>
+              <a:srgbClr val="1B7F3A"/>
+            </a:solidFill>
+          </a:ln>
+        </p:spPr>
+        <p:style>
+          <a:lnRef idx="1">
+            <a:schemeClr val="accent1"/>
+          </a:lnRef>
+          <a:fillRef idx="3">
+            <a:schemeClr val="accent1"/>
+          </a:fillRef>
+          <a:effectRef idx="2">
+            <a:schemeClr val="accent1"/>
+          </a:effectRef>
+          <a:fontRef idx="minor">
+            <a:schemeClr val="lt1"/>
+          </a:fontRef>
+        </p:style>
+        <p:txBody>
+          <a:bodyPr rtlCol="0" anchor="ctr"/>
+          <a:lstStyle/>
+          <a:p>
+            <a:pPr algn="ctr"/>
+          </a:p>
+        </p:txBody>
+      </p:sp>
+      <p:sp>
+        <p:nvSpPr>
+          <p:cNvPr id="27" name="Rectangle 26"/>
+          <p:cNvSpPr/>
+          <p:nvPr/>
+        </p:nvSpPr>
+        <p:spPr>
+          <a:xfrm>
+            <a:off x="8337499" y="3838651"/>
+            <a:ext cx="1841601" cy="60350"/>
+          </a:xfrm>
+          <a:prstGeom prst="rect">
+            <a:avLst/>
+          </a:prstGeom>
+          <a:solidFill>
+            <a:srgbClr val="CBD5E1"/>
+          </a:solidFill>
+          <a:ln>
+            <a:noFill/>
+          </a:ln>
+        </p:spPr>
+        <p:style>
+          <a:lnRef idx="1">
+            <a:schemeClr val="accent1"/>
+          </a:lnRef>
+          <a:fillRef idx="3">
+            <a:schemeClr val="accent1"/>
+          </a:fillRef>
+          <a:effectRef idx="2">
+            <a:schemeClr val="accent1"/>
+          </a:effectRef>
+          <a:fontRef idx="minor">
+            <a:schemeClr val="lt1"/>
+          </a:fontRef>
+        </p:style>
+        <p:txBody>
+          <a:bodyPr rtlCol="0" anchor="ctr"/>
+          <a:lstStyle/>
+          <a:p>
+            <a:pPr algn="ctr"/>
+          </a:p>
+        </p:txBody>
+      </p:sp>
+      <p:sp>
+        <p:nvSpPr>
+          <p:cNvPr id="28" name="TextBox 27"/>
           <p:cNvSpPr txBox="1"/>
           <p:nvPr/>
         </p:nvSpPr>
         <p:spPr>
           <a:xfrm>
-            <a:off x="8439912" y="5349240"/>
-            <a:ext cx="1691640" cy="658368"/>
+            <a:off x="8266176" y="3602736"/>
+            <a:ext cx="1984248" cy="347472"/>
           </a:xfrm>
           <a:prstGeom prst="rect">
             <a:avLst/>
@@ -3969,6 +4218,121 @@
           </a:p>
         </p:txBody>
       </p:sp>
+      <p:sp>
+        <p:nvSpPr>
+          <p:cNvPr id="29" name="Rounded Rectangle 28"/>
+          <p:cNvSpPr/>
+          <p:nvPr/>
+        </p:nvSpPr>
+        <p:spPr>
+          <a:xfrm>
+            <a:off x="8275320" y="4818888"/>
+            <a:ext cx="1965960" cy="621792"/>
+          </a:xfrm>
+          <a:prstGeom prst="roundRect">
+            <a:avLst/>
+          </a:prstGeom>
+          <a:solidFill>
+            <a:srgbClr val="FFFFFF"/>
+          </a:solidFill>
+          <a:ln w="10160">
+            <a:solidFill>
+              <a:srgbClr val="CBD5E1"/>
+            </a:solidFill>
+          </a:ln>
+        </p:spPr>
+        <p:style>
+          <a:lnRef idx="1">
+            <a:schemeClr val="accent1"/>
+          </a:lnRef>
+          <a:fillRef idx="3">
+            <a:schemeClr val="accent1"/>
+          </a:fillRef>
+          <a:effectRef idx="2">
+            <a:schemeClr val="accent1"/>
+          </a:effectRef>
+          <a:fontRef idx="minor">
+            <a:schemeClr val="lt1"/>
+          </a:fontRef>
+        </p:style>
+        <p:txBody>
+          <a:bodyPr rtlCol="0" anchor="ctr"/>
+          <a:lstStyle/>
+          <a:p>
+            <a:pPr algn="ctr"/>
+          </a:p>
+        </p:txBody>
+      </p:sp>
+      <p:sp>
+        <p:nvSpPr>
+          <p:cNvPr id="30" name="TextBox 29"/>
+          <p:cNvSpPr txBox="1"/>
+          <p:nvPr/>
+        </p:nvSpPr>
+        <p:spPr>
+          <a:xfrm>
+            <a:off x="8412480" y="5001768"/>
+            <a:ext cx="1691640" cy="201168"/>
+          </a:xfrm>
+          <a:prstGeom prst="rect">
+            <a:avLst/>
+          </a:prstGeom>
+          <a:noFill/>
+        </p:spPr>
+        <p:txBody>
+          <a:bodyPr wrap="square" lIns="0" rIns="0" tIns="0" bIns="0">
+            <a:spAutoFit/>
+          </a:bodyPr>
+          <a:lstStyle/>
+          <a:p>
+            <a:pPr algn="ctr"/>
+            <a:r>
+              <a:rPr sz="1000" b="1">
+                <a:solidFill>
+                  <a:srgbClr val="1D4ED8"/>
+                </a:solidFill>
+                <a:latin typeface="Arial"/>
+              </a:rPr>
+              <a:t>present</a:t>
+            </a:r>
+          </a:p>
+        </p:txBody>
+      </p:sp>
+      <p:cxnSp>
+        <p:nvCxnSpPr>
+          <p:cNvPr id="31" name="Connector 30"/>
+          <p:cNvCxnSpPr/>
+          <p:nvPr/>
+        </p:nvCxnSpPr>
+        <p:spPr>
+          <a:xfrm>
+            <a:off x="2926080" y="5742432"/>
+            <a:ext cx="6355080" cy="0"/>
+          </a:xfrm>
+          <a:prstGeom prst="line">
+            <a:avLst/>
+          </a:prstGeom>
+          <a:ln w="27940">
+            <a:solidFill>
+              <a:srgbClr val="D90000"/>
+            </a:solidFill>
+          </a:ln>
+        </p:spPr>
+        <p:style>
+          <a:lnRef idx="2">
+            <a:schemeClr val="accent1"/>
+          </a:lnRef>
+          <a:fillRef idx="0">
+            <a:schemeClr val="accent1"/>
+          </a:fillRef>
+          <a:effectRef idx="1">
+            <a:schemeClr val="accent1"/>
+          </a:effectRef>
+          <a:fontRef idx="minor">
+            <a:schemeClr val="tx1"/>
+          </a:fontRef>
+        </p:style>
+      </p:cxnSp>
     </p:spTree>
   </p:cSld>
   <p:clrMapOvr>
@@ -6816,8 +7180,8 @@
         </p:nvSpPr>
         <p:spPr>
           <a:xfrm>
-            <a:off x="1371600" y="2414015"/>
-            <a:ext cx="9464040" cy="384048"/>
+            <a:off x="1417319" y="2304288"/>
+            <a:ext cx="9372600" cy="310896"/>
           </a:xfrm>
           <a:prstGeom prst="rect">
             <a:avLst/>
@@ -6832,7 +7196,7 @@
           <a:p>
             <a:pPr algn="ctr"/>
             <a:r>
-              <a:rPr sz="1800" b="1">
+              <a:rPr sz="1700" b="1">
                 <a:solidFill>
                   <a:srgbClr val="111827"/>
                 </a:solidFill>
@@ -6843,97 +7207,115 @@
           </a:p>
         </p:txBody>
       </p:sp>
-      <p:cxnSp>
-        <p:nvCxnSpPr>
-          <p:cNvPr id="13" name="Connector 12"/>
-          <p:cNvCxnSpPr/>
-          <p:nvPr/>
-        </p:nvCxnSpPr>
-        <p:spPr>
-          <a:xfrm flipV="1">
-            <a:off x="2880360" y="4023360"/>
-            <a:ext cx="3200399" cy="822960"/>
-          </a:xfrm>
-          <a:prstGeom prst="line">
-            <a:avLst/>
-          </a:prstGeom>
-          <a:ln w="38100">
+      <p:sp>
+        <p:nvSpPr>
+          <p:cNvPr id="13" name="Rectangle 12"/>
+          <p:cNvSpPr/>
+          <p:nvPr/>
+        </p:nvSpPr>
+        <p:spPr>
+          <a:xfrm>
+            <a:off x="1931212" y="3054096"/>
+            <a:ext cx="872337" cy="331927"/>
+          </a:xfrm>
+          <a:prstGeom prst="rect">
+            <a:avLst/>
+          </a:prstGeom>
+          <a:solidFill>
+            <a:srgbClr val="FCD116"/>
+          </a:solidFill>
+          <a:ln w="6350">
             <a:solidFill>
-              <a:srgbClr val="087490"/>
+              <a:srgbClr val="111827"/>
             </a:solidFill>
           </a:ln>
         </p:spPr>
         <p:style>
-          <a:lnRef idx="2">
-            <a:schemeClr val="accent1"/>
-          </a:lnRef>
-          <a:fillRef idx="0">
-            <a:schemeClr val="accent1"/>
-          </a:fillRef>
-          <a:effectRef idx="1">
-            <a:schemeClr val="accent1"/>
-          </a:effectRef>
-          <a:fontRef idx="minor">
-            <a:schemeClr val="tx1"/>
-          </a:fontRef>
-        </p:style>
-      </p:cxnSp>
-      <p:cxnSp>
-        <p:nvCxnSpPr>
-          <p:cNvPr id="14" name="Connector 13"/>
-          <p:cNvCxnSpPr/>
-          <p:nvPr/>
-        </p:nvCxnSpPr>
-        <p:spPr>
-          <a:xfrm>
-            <a:off x="6080759" y="4023360"/>
-            <a:ext cx="3200401" cy="822960"/>
-          </a:xfrm>
-          <a:prstGeom prst="line">
-            <a:avLst/>
-          </a:prstGeom>
-          <a:ln w="38100">
+          <a:lnRef idx="1">
+            <a:schemeClr val="accent1"/>
+          </a:lnRef>
+          <a:fillRef idx="3">
+            <a:schemeClr val="accent1"/>
+          </a:fillRef>
+          <a:effectRef idx="2">
+            <a:schemeClr val="accent1"/>
+          </a:effectRef>
+          <a:fontRef idx="minor">
+            <a:schemeClr val="lt1"/>
+          </a:fontRef>
+        </p:style>
+        <p:txBody>
+          <a:bodyPr rtlCol="0" anchor="ctr"/>
+          <a:lstStyle/>
+          <a:p>
+            <a:pPr algn="ctr"/>
+          </a:p>
+        </p:txBody>
+      </p:sp>
+      <p:sp>
+        <p:nvSpPr>
+          <p:cNvPr id="14" name="Rounded Rectangle 13"/>
+          <p:cNvSpPr/>
+          <p:nvPr/>
+        </p:nvSpPr>
+        <p:spPr>
+          <a:xfrm>
+            <a:off x="1737360" y="3265322"/>
+            <a:ext cx="2423160" cy="1176832"/>
+          </a:xfrm>
+          <a:prstGeom prst="roundRect">
+            <a:avLst/>
+          </a:prstGeom>
+          <a:solidFill>
+            <a:srgbClr val="FFF7E0"/>
+          </a:solidFill>
+          <a:ln w="12700">
             <a:solidFill>
-              <a:srgbClr val="087490"/>
+              <a:srgbClr val="FCD116"/>
             </a:solidFill>
           </a:ln>
         </p:spPr>
         <p:style>
-          <a:lnRef idx="2">
-            <a:schemeClr val="accent1"/>
-          </a:lnRef>
-          <a:fillRef idx="0">
-            <a:schemeClr val="accent1"/>
-          </a:fillRef>
-          <a:effectRef idx="1">
-            <a:schemeClr val="accent1"/>
-          </a:effectRef>
-          <a:fontRef idx="minor">
-            <a:schemeClr val="tx1"/>
-          </a:fontRef>
-        </p:style>
-      </p:cxnSp>
-      <p:sp>
-        <p:nvSpPr>
-          <p:cNvPr id="15" name="Oval 14"/>
-          <p:cNvSpPr/>
-          <p:nvPr/>
-        </p:nvSpPr>
-        <p:spPr>
-          <a:xfrm>
-            <a:off x="2551176" y="4517136"/>
-            <a:ext cx="658368" cy="658368"/>
-          </a:xfrm>
-          <a:prstGeom prst="ellipse">
-            <a:avLst/>
-          </a:prstGeom>
-          <a:solidFill>
-            <a:srgbClr val="FFFFFF"/>
-          </a:solidFill>
-          <a:ln w="22860">
-            <a:solidFill>
-              <a:srgbClr val="D90000"/>
-            </a:solidFill>
+          <a:lnRef idx="1">
+            <a:schemeClr val="accent1"/>
+          </a:lnRef>
+          <a:fillRef idx="3">
+            <a:schemeClr val="accent1"/>
+          </a:fillRef>
+          <a:effectRef idx="2">
+            <a:schemeClr val="accent1"/>
+          </a:effectRef>
+          <a:fontRef idx="minor">
+            <a:schemeClr val="lt1"/>
+          </a:fontRef>
+        </p:style>
+        <p:txBody>
+          <a:bodyPr rtlCol="0" anchor="ctr"/>
+          <a:lstStyle/>
+          <a:p>
+            <a:pPr algn="ctr"/>
+          </a:p>
+        </p:txBody>
+      </p:sp>
+      <p:sp>
+        <p:nvSpPr>
+          <p:cNvPr id="15" name="Rectangle 14"/>
+          <p:cNvSpPr/>
+          <p:nvPr/>
+        </p:nvSpPr>
+        <p:spPr>
+          <a:xfrm>
+            <a:off x="2028139" y="3838651"/>
+            <a:ext cx="1841601" cy="60350"/>
+          </a:xfrm>
+          <a:prstGeom prst="rect">
+            <a:avLst/>
+          </a:prstGeom>
+          <a:solidFill>
+            <a:srgbClr val="CBD5E1"/>
+          </a:solidFill>
+          <a:ln>
+            <a:noFill/>
           </a:ln>
         </p:spPr>
         <p:style>
@@ -6966,43 +7348,8 @@
         </p:nvSpPr>
         <p:spPr>
           <a:xfrm>
-            <a:off x="2715768" y="4700016"/>
-            <a:ext cx="329184" cy="201168"/>
-          </a:xfrm>
-          <a:prstGeom prst="rect">
-            <a:avLst/>
-          </a:prstGeom>
-          <a:noFill/>
-        </p:spPr>
-        <p:txBody>
-          <a:bodyPr wrap="square" lIns="0" rIns="0" tIns="0" bIns="0">
-            <a:spAutoFit/>
-          </a:bodyPr>
-          <a:lstStyle/>
-          <a:p>
-            <a:pPr algn="ctr"/>
-            <a:r>
-              <a:rPr sz="1300" b="1">
-                <a:solidFill>
-                  <a:srgbClr val="D90000"/>
-                </a:solidFill>
-                <a:latin typeface="Arial"/>
-              </a:rPr>
-              <a:t>1</a:t>
-            </a:r>
-          </a:p>
-        </p:txBody>
-      </p:sp>
-      <p:sp>
-        <p:nvSpPr>
-          <p:cNvPr id="17" name="TextBox 16"/>
-          <p:cNvSpPr txBox="1"/>
-          <p:nvPr/>
-        </p:nvSpPr>
-        <p:spPr>
-          <a:xfrm>
-            <a:off x="2039112" y="5349240"/>
-            <a:ext cx="1691640" cy="658368"/>
+            <a:off x="1956815" y="3602736"/>
+            <a:ext cx="1984248" cy="347472"/>
           </a:xfrm>
           <a:prstGeom prst="rect">
             <a:avLst/>
@@ -7030,24 +7377,24 @@
       </p:sp>
       <p:sp>
         <p:nvSpPr>
-          <p:cNvPr id="18" name="Oval 17"/>
-          <p:cNvSpPr/>
-          <p:nvPr/>
-        </p:nvSpPr>
-        <p:spPr>
-          <a:xfrm>
-            <a:off x="5751575" y="3694176"/>
-            <a:ext cx="658368" cy="658368"/>
-          </a:xfrm>
-          <a:prstGeom prst="ellipse">
+          <p:cNvPr id="17" name="Rounded Rectangle 16"/>
+          <p:cNvSpPr/>
+          <p:nvPr/>
+        </p:nvSpPr>
+        <p:spPr>
+          <a:xfrm>
+            <a:off x="1965960" y="4818888"/>
+            <a:ext cx="1965960" cy="621792"/>
+          </a:xfrm>
+          <a:prstGeom prst="roundRect">
             <a:avLst/>
           </a:prstGeom>
           <a:solidFill>
             <a:srgbClr val="FFFFFF"/>
           </a:solidFill>
-          <a:ln w="22860">
+          <a:ln w="10160">
             <a:solidFill>
-              <a:srgbClr val="087490"/>
+              <a:srgbClr val="CBD5E1"/>
             </a:solidFill>
           </a:ln>
         </p:spPr>
@@ -7075,14 +7422,14 @@
       </p:sp>
       <p:sp>
         <p:nvSpPr>
-          <p:cNvPr id="19" name="TextBox 18"/>
+          <p:cNvPr id="18" name="TextBox 17"/>
           <p:cNvSpPr txBox="1"/>
           <p:nvPr/>
         </p:nvSpPr>
         <p:spPr>
           <a:xfrm>
-            <a:off x="5916168" y="3877056"/>
-            <a:ext cx="329184" cy="201168"/>
+            <a:off x="2103120" y="5001768"/>
+            <a:ext cx="1691640" cy="201168"/>
           </a:xfrm>
           <a:prstGeom prst="rect">
             <a:avLst/>
@@ -7097,27 +7444,160 @@
           <a:p>
             <a:pPr algn="ctr"/>
             <a:r>
-              <a:rPr sz="1300" b="1">
+              <a:rPr sz="1000" b="1">
                 <a:solidFill>
                   <a:srgbClr val="087490"/>
                 </a:solidFill>
                 <a:latin typeface="Arial"/>
               </a:rPr>
-              <a:t>2</a:t>
-            </a:r>
-          </a:p>
-        </p:txBody>
-      </p:sp>
-      <p:sp>
-        <p:nvSpPr>
-          <p:cNvPr id="20" name="TextBox 19"/>
+              <a:t>choose</a:t>
+            </a:r>
+          </a:p>
+        </p:txBody>
+      </p:sp>
+      <p:sp>
+        <p:nvSpPr>
+          <p:cNvPr id="19" name="Rectangle 18"/>
+          <p:cNvSpPr/>
+          <p:nvPr/>
+        </p:nvSpPr>
+        <p:spPr>
+          <a:xfrm>
+            <a:off x="5085892" y="3054096"/>
+            <a:ext cx="872337" cy="331927"/>
+          </a:xfrm>
+          <a:prstGeom prst="rect">
+            <a:avLst/>
+          </a:prstGeom>
+          <a:solidFill>
+            <a:srgbClr val="1D4ED8"/>
+          </a:solidFill>
+          <a:ln w="6350">
+            <a:solidFill>
+              <a:srgbClr val="111827"/>
+            </a:solidFill>
+          </a:ln>
+        </p:spPr>
+        <p:style>
+          <a:lnRef idx="1">
+            <a:schemeClr val="accent1"/>
+          </a:lnRef>
+          <a:fillRef idx="3">
+            <a:schemeClr val="accent1"/>
+          </a:fillRef>
+          <a:effectRef idx="2">
+            <a:schemeClr val="accent1"/>
+          </a:effectRef>
+          <a:fontRef idx="minor">
+            <a:schemeClr val="lt1"/>
+          </a:fontRef>
+        </p:style>
+        <p:txBody>
+          <a:bodyPr rtlCol="0" anchor="ctr"/>
+          <a:lstStyle/>
+          <a:p>
+            <a:pPr algn="ctr"/>
+          </a:p>
+        </p:txBody>
+      </p:sp>
+      <p:sp>
+        <p:nvSpPr>
+          <p:cNvPr id="20" name="Rounded Rectangle 19"/>
+          <p:cNvSpPr/>
+          <p:nvPr/>
+        </p:nvSpPr>
+        <p:spPr>
+          <a:xfrm>
+            <a:off x="4892040" y="3265322"/>
+            <a:ext cx="2423160" cy="1176832"/>
+          </a:xfrm>
+          <a:prstGeom prst="roundRect">
+            <a:avLst/>
+          </a:prstGeom>
+          <a:solidFill>
+            <a:srgbClr val="FFF7E0"/>
+          </a:solidFill>
+          <a:ln w="12700">
+            <a:solidFill>
+              <a:srgbClr val="1D4ED8"/>
+            </a:solidFill>
+          </a:ln>
+        </p:spPr>
+        <p:style>
+          <a:lnRef idx="1">
+            <a:schemeClr val="accent1"/>
+          </a:lnRef>
+          <a:fillRef idx="3">
+            <a:schemeClr val="accent1"/>
+          </a:fillRef>
+          <a:effectRef idx="2">
+            <a:schemeClr val="accent1"/>
+          </a:effectRef>
+          <a:fontRef idx="minor">
+            <a:schemeClr val="lt1"/>
+          </a:fontRef>
+        </p:style>
+        <p:txBody>
+          <a:bodyPr rtlCol="0" anchor="ctr"/>
+          <a:lstStyle/>
+          <a:p>
+            <a:pPr algn="ctr"/>
+          </a:p>
+        </p:txBody>
+      </p:sp>
+      <p:sp>
+        <p:nvSpPr>
+          <p:cNvPr id="21" name="Rectangle 20"/>
+          <p:cNvSpPr/>
+          <p:nvPr/>
+        </p:nvSpPr>
+        <p:spPr>
+          <a:xfrm>
+            <a:off x="5182819" y="3838651"/>
+            <a:ext cx="1841601" cy="60350"/>
+          </a:xfrm>
+          <a:prstGeom prst="rect">
+            <a:avLst/>
+          </a:prstGeom>
+          <a:solidFill>
+            <a:srgbClr val="CBD5E1"/>
+          </a:solidFill>
+          <a:ln>
+            <a:noFill/>
+          </a:ln>
+        </p:spPr>
+        <p:style>
+          <a:lnRef idx="1">
+            <a:schemeClr val="accent1"/>
+          </a:lnRef>
+          <a:fillRef idx="3">
+            <a:schemeClr val="accent1"/>
+          </a:fillRef>
+          <a:effectRef idx="2">
+            <a:schemeClr val="accent1"/>
+          </a:effectRef>
+          <a:fontRef idx="minor">
+            <a:schemeClr val="lt1"/>
+          </a:fontRef>
+        </p:style>
+        <p:txBody>
+          <a:bodyPr rtlCol="0" anchor="ctr"/>
+          <a:lstStyle/>
+          <a:p>
+            <a:pPr algn="ctr"/>
+          </a:p>
+        </p:txBody>
+      </p:sp>
+      <p:sp>
+        <p:nvSpPr>
+          <p:cNvPr id="22" name="TextBox 21"/>
           <p:cNvSpPr txBox="1"/>
           <p:nvPr/>
         </p:nvSpPr>
         <p:spPr>
           <a:xfrm>
-            <a:off x="5239512" y="4526280"/>
-            <a:ext cx="1691640" cy="658368"/>
+            <a:off x="5111496" y="3602736"/>
+            <a:ext cx="1984248" cy="347472"/>
           </a:xfrm>
           <a:prstGeom prst="rect">
             <a:avLst/>
@@ -7145,24 +7625,24 @@
       </p:sp>
       <p:sp>
         <p:nvSpPr>
-          <p:cNvPr id="21" name="Oval 20"/>
-          <p:cNvSpPr/>
-          <p:nvPr/>
-        </p:nvSpPr>
-        <p:spPr>
-          <a:xfrm>
-            <a:off x="8951976" y="4517136"/>
-            <a:ext cx="658368" cy="658368"/>
-          </a:xfrm>
-          <a:prstGeom prst="ellipse">
+          <p:cNvPr id="23" name="Rounded Rectangle 22"/>
+          <p:cNvSpPr/>
+          <p:nvPr/>
+        </p:nvSpPr>
+        <p:spPr>
+          <a:xfrm>
+            <a:off x="5120640" y="4818888"/>
+            <a:ext cx="1965960" cy="621792"/>
+          </a:xfrm>
+          <a:prstGeom prst="roundRect">
             <a:avLst/>
           </a:prstGeom>
           <a:solidFill>
             <a:srgbClr val="FFFFFF"/>
           </a:solidFill>
-          <a:ln w="22860">
+          <a:ln w="10160">
             <a:solidFill>
-              <a:srgbClr val="D90000"/>
+              <a:srgbClr val="CBD5E1"/>
             </a:solidFill>
           </a:ln>
         </p:spPr>
@@ -7190,14 +7670,14 @@
       </p:sp>
       <p:sp>
         <p:nvSpPr>
-          <p:cNvPr id="22" name="TextBox 21"/>
+          <p:cNvPr id="24" name="TextBox 23"/>
           <p:cNvSpPr txBox="1"/>
           <p:nvPr/>
         </p:nvSpPr>
         <p:spPr>
           <a:xfrm>
-            <a:off x="9116568" y="4700016"/>
-            <a:ext cx="329184" cy="201168"/>
+            <a:off x="5257800" y="5001768"/>
+            <a:ext cx="1691640" cy="201168"/>
           </a:xfrm>
           <a:prstGeom prst="rect">
             <a:avLst/>
@@ -7212,27 +7692,160 @@
           <a:p>
             <a:pPr algn="ctr"/>
             <a:r>
-              <a:rPr sz="1300" b="1">
+              <a:rPr sz="1000" b="1">
                 <a:solidFill>
-                  <a:srgbClr val="D90000"/>
+                  <a:srgbClr val="087490"/>
                 </a:solidFill>
                 <a:latin typeface="Arial"/>
               </a:rPr>
-              <a:t>3</a:t>
-            </a:r>
-          </a:p>
-        </p:txBody>
-      </p:sp>
-      <p:sp>
-        <p:nvSpPr>
-          <p:cNvPr id="23" name="TextBox 22"/>
+              <a:t>check</a:t>
+            </a:r>
+          </a:p>
+        </p:txBody>
+      </p:sp>
+      <p:sp>
+        <p:nvSpPr>
+          <p:cNvPr id="25" name="Rectangle 24"/>
+          <p:cNvSpPr/>
+          <p:nvPr/>
+        </p:nvSpPr>
+        <p:spPr>
+          <a:xfrm>
+            <a:off x="8240572" y="3054096"/>
+            <a:ext cx="872337" cy="331927"/>
+          </a:xfrm>
+          <a:prstGeom prst="rect">
+            <a:avLst/>
+          </a:prstGeom>
+          <a:solidFill>
+            <a:srgbClr val="1B7F3A"/>
+          </a:solidFill>
+          <a:ln w="6350">
+            <a:solidFill>
+              <a:srgbClr val="111827"/>
+            </a:solidFill>
+          </a:ln>
+        </p:spPr>
+        <p:style>
+          <a:lnRef idx="1">
+            <a:schemeClr val="accent1"/>
+          </a:lnRef>
+          <a:fillRef idx="3">
+            <a:schemeClr val="accent1"/>
+          </a:fillRef>
+          <a:effectRef idx="2">
+            <a:schemeClr val="accent1"/>
+          </a:effectRef>
+          <a:fontRef idx="minor">
+            <a:schemeClr val="lt1"/>
+          </a:fontRef>
+        </p:style>
+        <p:txBody>
+          <a:bodyPr rtlCol="0" anchor="ctr"/>
+          <a:lstStyle/>
+          <a:p>
+            <a:pPr algn="ctr"/>
+          </a:p>
+        </p:txBody>
+      </p:sp>
+      <p:sp>
+        <p:nvSpPr>
+          <p:cNvPr id="26" name="Rounded Rectangle 25"/>
+          <p:cNvSpPr/>
+          <p:nvPr/>
+        </p:nvSpPr>
+        <p:spPr>
+          <a:xfrm>
+            <a:off x="8046720" y="3265322"/>
+            <a:ext cx="2423160" cy="1176832"/>
+          </a:xfrm>
+          <a:prstGeom prst="roundRect">
+            <a:avLst/>
+          </a:prstGeom>
+          <a:solidFill>
+            <a:srgbClr val="FFF7E0"/>
+          </a:solidFill>
+          <a:ln w="12700">
+            <a:solidFill>
+              <a:srgbClr val="1B7F3A"/>
+            </a:solidFill>
+          </a:ln>
+        </p:spPr>
+        <p:style>
+          <a:lnRef idx="1">
+            <a:schemeClr val="accent1"/>
+          </a:lnRef>
+          <a:fillRef idx="3">
+            <a:schemeClr val="accent1"/>
+          </a:fillRef>
+          <a:effectRef idx="2">
+            <a:schemeClr val="accent1"/>
+          </a:effectRef>
+          <a:fontRef idx="minor">
+            <a:schemeClr val="lt1"/>
+          </a:fontRef>
+        </p:style>
+        <p:txBody>
+          <a:bodyPr rtlCol="0" anchor="ctr"/>
+          <a:lstStyle/>
+          <a:p>
+            <a:pPr algn="ctr"/>
+          </a:p>
+        </p:txBody>
+      </p:sp>
+      <p:sp>
+        <p:nvSpPr>
+          <p:cNvPr id="27" name="Rectangle 26"/>
+          <p:cNvSpPr/>
+          <p:nvPr/>
+        </p:nvSpPr>
+        <p:spPr>
+          <a:xfrm>
+            <a:off x="8337499" y="3838651"/>
+            <a:ext cx="1841601" cy="60350"/>
+          </a:xfrm>
+          <a:prstGeom prst="rect">
+            <a:avLst/>
+          </a:prstGeom>
+          <a:solidFill>
+            <a:srgbClr val="CBD5E1"/>
+          </a:solidFill>
+          <a:ln>
+            <a:noFill/>
+          </a:ln>
+        </p:spPr>
+        <p:style>
+          <a:lnRef idx="1">
+            <a:schemeClr val="accent1"/>
+          </a:lnRef>
+          <a:fillRef idx="3">
+            <a:schemeClr val="accent1"/>
+          </a:fillRef>
+          <a:effectRef idx="2">
+            <a:schemeClr val="accent1"/>
+          </a:effectRef>
+          <a:fontRef idx="minor">
+            <a:schemeClr val="lt1"/>
+          </a:fontRef>
+        </p:style>
+        <p:txBody>
+          <a:bodyPr rtlCol="0" anchor="ctr"/>
+          <a:lstStyle/>
+          <a:p>
+            <a:pPr algn="ctr"/>
+          </a:p>
+        </p:txBody>
+      </p:sp>
+      <p:sp>
+        <p:nvSpPr>
+          <p:cNvPr id="28" name="TextBox 27"/>
           <p:cNvSpPr txBox="1"/>
           <p:nvPr/>
         </p:nvSpPr>
         <p:spPr>
           <a:xfrm>
-            <a:off x="8439912" y="5349240"/>
-            <a:ext cx="1691640" cy="658368"/>
+            <a:off x="8266176" y="3602736"/>
+            <a:ext cx="1984248" cy="347472"/>
           </a:xfrm>
           <a:prstGeom prst="rect">
             <a:avLst/>
@@ -7260,7 +7873,122 @@
       </p:sp>
       <p:sp>
         <p:nvSpPr>
-          <p:cNvPr id="24" name="TextBox 23"/>
+          <p:cNvPr id="29" name="Rounded Rectangle 28"/>
+          <p:cNvSpPr/>
+          <p:nvPr/>
+        </p:nvSpPr>
+        <p:spPr>
+          <a:xfrm>
+            <a:off x="8275320" y="4818888"/>
+            <a:ext cx="1965960" cy="621792"/>
+          </a:xfrm>
+          <a:prstGeom prst="roundRect">
+            <a:avLst/>
+          </a:prstGeom>
+          <a:solidFill>
+            <a:srgbClr val="FFFFFF"/>
+          </a:solidFill>
+          <a:ln w="10160">
+            <a:solidFill>
+              <a:srgbClr val="CBD5E1"/>
+            </a:solidFill>
+          </a:ln>
+        </p:spPr>
+        <p:style>
+          <a:lnRef idx="1">
+            <a:schemeClr val="accent1"/>
+          </a:lnRef>
+          <a:fillRef idx="3">
+            <a:schemeClr val="accent1"/>
+          </a:fillRef>
+          <a:effectRef idx="2">
+            <a:schemeClr val="accent1"/>
+          </a:effectRef>
+          <a:fontRef idx="minor">
+            <a:schemeClr val="lt1"/>
+          </a:fontRef>
+        </p:style>
+        <p:txBody>
+          <a:bodyPr rtlCol="0" anchor="ctr"/>
+          <a:lstStyle/>
+          <a:p>
+            <a:pPr algn="ctr"/>
+          </a:p>
+        </p:txBody>
+      </p:sp>
+      <p:sp>
+        <p:nvSpPr>
+          <p:cNvPr id="30" name="TextBox 29"/>
+          <p:cNvSpPr txBox="1"/>
+          <p:nvPr/>
+        </p:nvSpPr>
+        <p:spPr>
+          <a:xfrm>
+            <a:off x="8412480" y="5001768"/>
+            <a:ext cx="1691640" cy="201168"/>
+          </a:xfrm>
+          <a:prstGeom prst="rect">
+            <a:avLst/>
+          </a:prstGeom>
+          <a:noFill/>
+        </p:spPr>
+        <p:txBody>
+          <a:bodyPr wrap="square" lIns="0" rIns="0" tIns="0" bIns="0">
+            <a:spAutoFit/>
+          </a:bodyPr>
+          <a:lstStyle/>
+          <a:p>
+            <a:pPr algn="ctr"/>
+            <a:r>
+              <a:rPr sz="1000" b="1">
+                <a:solidFill>
+                  <a:srgbClr val="087490"/>
+                </a:solidFill>
+                <a:latin typeface="Arial"/>
+              </a:rPr>
+              <a:t>present</a:t>
+            </a:r>
+          </a:p>
+        </p:txBody>
+      </p:sp>
+      <p:cxnSp>
+        <p:nvCxnSpPr>
+          <p:cNvPr id="31" name="Connector 30"/>
+          <p:cNvCxnSpPr/>
+          <p:nvPr/>
+        </p:nvCxnSpPr>
+        <p:spPr>
+          <a:xfrm>
+            <a:off x="2926080" y="5742432"/>
+            <a:ext cx="6355080" cy="0"/>
+          </a:xfrm>
+          <a:prstGeom prst="line">
+            <a:avLst/>
+          </a:prstGeom>
+          <a:ln w="27940">
+            <a:solidFill>
+              <a:srgbClr val="D90000"/>
+            </a:solidFill>
+          </a:ln>
+        </p:spPr>
+        <p:style>
+          <a:lnRef idx="2">
+            <a:schemeClr val="accent1"/>
+          </a:lnRef>
+          <a:fillRef idx="0">
+            <a:schemeClr val="accent1"/>
+          </a:fillRef>
+          <a:effectRef idx="1">
+            <a:schemeClr val="accent1"/>
+          </a:effectRef>
+          <a:fontRef idx="minor">
+            <a:schemeClr val="tx1"/>
+          </a:fontRef>
+        </p:style>
+      </p:cxnSp>
+      <p:sp>
+        <p:nvSpPr>
+          <p:cNvPr id="32" name="TextBox 31"/>
           <p:cNvSpPr txBox="1"/>
           <p:nvPr/>
         </p:nvSpPr>
@@ -7742,8 +8470,8 @@
         </p:nvSpPr>
         <p:spPr>
           <a:xfrm>
-            <a:off x="1371600" y="2414015"/>
-            <a:ext cx="9464040" cy="384048"/>
+            <a:off x="1417319" y="2304288"/>
+            <a:ext cx="9372600" cy="310896"/>
           </a:xfrm>
           <a:prstGeom prst="rect">
             <a:avLst/>
@@ -7758,7 +8486,7 @@
           <a:p>
             <a:pPr algn="ctr"/>
             <a:r>
-              <a:rPr sz="1800" b="1">
+              <a:rPr sz="1700" b="1">
                 <a:solidFill>
                   <a:srgbClr val="111827"/>
                 </a:solidFill>
@@ -7771,24 +8499,24 @@
       </p:sp>
       <p:sp>
         <p:nvSpPr>
-          <p:cNvPr id="13" name="Oval 12"/>
-          <p:cNvSpPr/>
-          <p:nvPr/>
-        </p:nvSpPr>
-        <p:spPr>
-          <a:xfrm>
-            <a:off x="5751575" y="4215383"/>
-            <a:ext cx="658368" cy="658368"/>
-          </a:xfrm>
-          <a:prstGeom prst="ellipse">
-            <a:avLst/>
-          </a:prstGeom>
-          <a:solidFill>
-            <a:srgbClr val="FFFFFF"/>
-          </a:solidFill>
-          <a:ln w="22860">
+          <p:cNvPr id="13" name="Rectangle 12"/>
+          <p:cNvSpPr/>
+          <p:nvPr/>
+        </p:nvSpPr>
+        <p:spPr>
+          <a:xfrm>
+            <a:off x="1931212" y="3054096"/>
+            <a:ext cx="872337" cy="331927"/>
+          </a:xfrm>
+          <a:prstGeom prst="rect">
+            <a:avLst/>
+          </a:prstGeom>
+          <a:solidFill>
+            <a:srgbClr val="FCD116"/>
+          </a:solidFill>
+          <a:ln w="6350">
             <a:solidFill>
-              <a:srgbClr val="D90000"/>
+              <a:srgbClr val="111827"/>
             </a:solidFill>
           </a:ln>
         </p:spPr>
@@ -7816,49 +8544,102 @@
       </p:sp>
       <p:sp>
         <p:nvSpPr>
-          <p:cNvPr id="14" name="TextBox 13"/>
+          <p:cNvPr id="14" name="Rounded Rectangle 13"/>
+          <p:cNvSpPr/>
+          <p:nvPr/>
+        </p:nvSpPr>
+        <p:spPr>
+          <a:xfrm>
+            <a:off x="1737360" y="3265322"/>
+            <a:ext cx="2423160" cy="1176832"/>
+          </a:xfrm>
+          <a:prstGeom prst="roundRect">
+            <a:avLst/>
+          </a:prstGeom>
+          <a:solidFill>
+            <a:srgbClr val="FFF7E0"/>
+          </a:solidFill>
+          <a:ln w="12700">
+            <a:solidFill>
+              <a:srgbClr val="FCD116"/>
+            </a:solidFill>
+          </a:ln>
+        </p:spPr>
+        <p:style>
+          <a:lnRef idx="1">
+            <a:schemeClr val="accent1"/>
+          </a:lnRef>
+          <a:fillRef idx="3">
+            <a:schemeClr val="accent1"/>
+          </a:fillRef>
+          <a:effectRef idx="2">
+            <a:schemeClr val="accent1"/>
+          </a:effectRef>
+          <a:fontRef idx="minor">
+            <a:schemeClr val="lt1"/>
+          </a:fontRef>
+        </p:style>
+        <p:txBody>
+          <a:bodyPr rtlCol="0" anchor="ctr"/>
+          <a:lstStyle/>
+          <a:p>
+            <a:pPr algn="ctr"/>
+          </a:p>
+        </p:txBody>
+      </p:sp>
+      <p:sp>
+        <p:nvSpPr>
+          <p:cNvPr id="15" name="Rectangle 14"/>
+          <p:cNvSpPr/>
+          <p:nvPr/>
+        </p:nvSpPr>
+        <p:spPr>
+          <a:xfrm>
+            <a:off x="2028139" y="3838651"/>
+            <a:ext cx="1841601" cy="60350"/>
+          </a:xfrm>
+          <a:prstGeom prst="rect">
+            <a:avLst/>
+          </a:prstGeom>
+          <a:solidFill>
+            <a:srgbClr val="CBD5E1"/>
+          </a:solidFill>
+          <a:ln>
+            <a:noFill/>
+          </a:ln>
+        </p:spPr>
+        <p:style>
+          <a:lnRef idx="1">
+            <a:schemeClr val="accent1"/>
+          </a:lnRef>
+          <a:fillRef idx="3">
+            <a:schemeClr val="accent1"/>
+          </a:fillRef>
+          <a:effectRef idx="2">
+            <a:schemeClr val="accent1"/>
+          </a:effectRef>
+          <a:fontRef idx="minor">
+            <a:schemeClr val="lt1"/>
+          </a:fontRef>
+        </p:style>
+        <p:txBody>
+          <a:bodyPr rtlCol="0" anchor="ctr"/>
+          <a:lstStyle/>
+          <a:p>
+            <a:pPr algn="ctr"/>
+          </a:p>
+        </p:txBody>
+      </p:sp>
+      <p:sp>
+        <p:nvSpPr>
+          <p:cNvPr id="16" name="TextBox 15"/>
           <p:cNvSpPr txBox="1"/>
           <p:nvPr/>
         </p:nvSpPr>
         <p:spPr>
           <a:xfrm>
-            <a:off x="5916168" y="4398264"/>
-            <a:ext cx="329184" cy="201168"/>
-          </a:xfrm>
-          <a:prstGeom prst="rect">
-            <a:avLst/>
-          </a:prstGeom>
-          <a:noFill/>
-        </p:spPr>
-        <p:txBody>
-          <a:bodyPr wrap="square" lIns="0" rIns="0" tIns="0" bIns="0">
-            <a:spAutoFit/>
-          </a:bodyPr>
-          <a:lstStyle/>
-          <a:p>
-            <a:pPr algn="ctr"/>
-            <a:r>
-              <a:rPr sz="1300" b="1">
-                <a:solidFill>
-                  <a:srgbClr val="D90000"/>
-                </a:solidFill>
-                <a:latin typeface="Arial"/>
-              </a:rPr>
-              <a:t>1</a:t>
-            </a:r>
-          </a:p>
-        </p:txBody>
-      </p:sp>
-      <p:sp>
-        <p:nvSpPr>
-          <p:cNvPr id="15" name="TextBox 14"/>
-          <p:cNvSpPr txBox="1"/>
-          <p:nvPr/>
-        </p:nvSpPr>
-        <p:spPr>
-          <a:xfrm>
-            <a:off x="5239512" y="5047488"/>
-            <a:ext cx="1691640" cy="658368"/>
+            <a:off x="1956815" y="3602736"/>
+            <a:ext cx="1984248" cy="347472"/>
           </a:xfrm>
           <a:prstGeom prst="rect">
             <a:avLst/>
@@ -7886,7 +8667,122 @@
       </p:sp>
       <p:sp>
         <p:nvSpPr>
-          <p:cNvPr id="16" name="TextBox 15"/>
+          <p:cNvPr id="17" name="Rounded Rectangle 16"/>
+          <p:cNvSpPr/>
+          <p:nvPr/>
+        </p:nvSpPr>
+        <p:spPr>
+          <a:xfrm>
+            <a:off x="1965960" y="4818888"/>
+            <a:ext cx="1965960" cy="621792"/>
+          </a:xfrm>
+          <a:prstGeom prst="roundRect">
+            <a:avLst/>
+          </a:prstGeom>
+          <a:solidFill>
+            <a:srgbClr val="FFFFFF"/>
+          </a:solidFill>
+          <a:ln w="10160">
+            <a:solidFill>
+              <a:srgbClr val="CBD5E1"/>
+            </a:solidFill>
+          </a:ln>
+        </p:spPr>
+        <p:style>
+          <a:lnRef idx="1">
+            <a:schemeClr val="accent1"/>
+          </a:lnRef>
+          <a:fillRef idx="3">
+            <a:schemeClr val="accent1"/>
+          </a:fillRef>
+          <a:effectRef idx="2">
+            <a:schemeClr val="accent1"/>
+          </a:effectRef>
+          <a:fontRef idx="minor">
+            <a:schemeClr val="lt1"/>
+          </a:fontRef>
+        </p:style>
+        <p:txBody>
+          <a:bodyPr rtlCol="0" anchor="ctr"/>
+          <a:lstStyle/>
+          <a:p>
+            <a:pPr algn="ctr"/>
+          </a:p>
+        </p:txBody>
+      </p:sp>
+      <p:sp>
+        <p:nvSpPr>
+          <p:cNvPr id="18" name="TextBox 17"/>
+          <p:cNvSpPr txBox="1"/>
+          <p:nvPr/>
+        </p:nvSpPr>
+        <p:spPr>
+          <a:xfrm>
+            <a:off x="2103120" y="5001768"/>
+            <a:ext cx="1691640" cy="201168"/>
+          </a:xfrm>
+          <a:prstGeom prst="rect">
+            <a:avLst/>
+          </a:prstGeom>
+          <a:noFill/>
+        </p:spPr>
+        <p:txBody>
+          <a:bodyPr wrap="square" lIns="0" rIns="0" tIns="0" bIns="0">
+            <a:spAutoFit/>
+          </a:bodyPr>
+          <a:lstStyle/>
+          <a:p>
+            <a:pPr algn="ctr"/>
+            <a:r>
+              <a:rPr sz="1000" b="1">
+                <a:solidFill>
+                  <a:srgbClr val="D97706"/>
+                </a:solidFill>
+                <a:latin typeface="Arial"/>
+              </a:rPr>
+              <a:t>choose</a:t>
+            </a:r>
+          </a:p>
+        </p:txBody>
+      </p:sp>
+      <p:cxnSp>
+        <p:nvCxnSpPr>
+          <p:cNvPr id="19" name="Connector 18"/>
+          <p:cNvCxnSpPr/>
+          <p:nvPr/>
+        </p:nvCxnSpPr>
+        <p:spPr>
+          <a:xfrm>
+            <a:off x="2926080" y="5742432"/>
+            <a:ext cx="6355080" cy="0"/>
+          </a:xfrm>
+          <a:prstGeom prst="line">
+            <a:avLst/>
+          </a:prstGeom>
+          <a:ln w="27940">
+            <a:solidFill>
+              <a:srgbClr val="D90000"/>
+            </a:solidFill>
+          </a:ln>
+        </p:spPr>
+        <p:style>
+          <a:lnRef idx="2">
+            <a:schemeClr val="accent1"/>
+          </a:lnRef>
+          <a:fillRef idx="0">
+            <a:schemeClr val="accent1"/>
+          </a:fillRef>
+          <a:effectRef idx="1">
+            <a:schemeClr val="accent1"/>
+          </a:effectRef>
+          <a:fontRef idx="minor">
+            <a:schemeClr val="tx1"/>
+          </a:fontRef>
+        </p:style>
+      </p:cxnSp>
+      <p:sp>
+        <p:nvSpPr>
+          <p:cNvPr id="20" name="TextBox 19"/>
           <p:cNvSpPr txBox="1"/>
           <p:nvPr/>
         </p:nvSpPr>
@@ -9658,8 +10554,8 @@
         </p:nvSpPr>
         <p:spPr>
           <a:xfrm>
-            <a:off x="1371600" y="2414015"/>
-            <a:ext cx="9464040" cy="384048"/>
+            <a:off x="1417319" y="2304288"/>
+            <a:ext cx="9372600" cy="310896"/>
           </a:xfrm>
           <a:prstGeom prst="rect">
             <a:avLst/>
@@ -9674,7 +10570,7 @@
           <a:p>
             <a:pPr algn="ctr"/>
             <a:r>
-              <a:rPr sz="1800" b="1">
+              <a:rPr sz="1700" b="1">
                 <a:solidFill>
                   <a:srgbClr val="111827"/>
                 </a:solidFill>
@@ -9685,97 +10581,115 @@
           </a:p>
         </p:txBody>
       </p:sp>
-      <p:cxnSp>
-        <p:nvCxnSpPr>
-          <p:cNvPr id="13" name="Connector 12"/>
-          <p:cNvCxnSpPr/>
-          <p:nvPr/>
-        </p:nvCxnSpPr>
-        <p:spPr>
-          <a:xfrm flipV="1">
-            <a:off x="2880360" y="4023360"/>
-            <a:ext cx="3200399" cy="822960"/>
-          </a:xfrm>
-          <a:prstGeom prst="line">
-            <a:avLst/>
-          </a:prstGeom>
-          <a:ln w="38100">
+      <p:sp>
+        <p:nvSpPr>
+          <p:cNvPr id="13" name="Rectangle 12"/>
+          <p:cNvSpPr/>
+          <p:nvPr/>
+        </p:nvSpPr>
+        <p:spPr>
+          <a:xfrm>
+            <a:off x="1931212" y="3054096"/>
+            <a:ext cx="872337" cy="331927"/>
+          </a:xfrm>
+          <a:prstGeom prst="rect">
+            <a:avLst/>
+          </a:prstGeom>
+          <a:solidFill>
+            <a:srgbClr val="FCD116"/>
+          </a:solidFill>
+          <a:ln w="6350">
             <a:solidFill>
-              <a:srgbClr val="1B7F3A"/>
+              <a:srgbClr val="111827"/>
             </a:solidFill>
           </a:ln>
         </p:spPr>
         <p:style>
-          <a:lnRef idx="2">
-            <a:schemeClr val="accent1"/>
-          </a:lnRef>
-          <a:fillRef idx="0">
-            <a:schemeClr val="accent1"/>
-          </a:fillRef>
-          <a:effectRef idx="1">
-            <a:schemeClr val="accent1"/>
-          </a:effectRef>
-          <a:fontRef idx="minor">
-            <a:schemeClr val="tx1"/>
-          </a:fontRef>
-        </p:style>
-      </p:cxnSp>
-      <p:cxnSp>
-        <p:nvCxnSpPr>
-          <p:cNvPr id="14" name="Connector 13"/>
-          <p:cNvCxnSpPr/>
-          <p:nvPr/>
-        </p:nvCxnSpPr>
-        <p:spPr>
-          <a:xfrm>
-            <a:off x="6080759" y="4023360"/>
-            <a:ext cx="3200401" cy="822960"/>
-          </a:xfrm>
-          <a:prstGeom prst="line">
-            <a:avLst/>
-          </a:prstGeom>
-          <a:ln w="38100">
+          <a:lnRef idx="1">
+            <a:schemeClr val="accent1"/>
+          </a:lnRef>
+          <a:fillRef idx="3">
+            <a:schemeClr val="accent1"/>
+          </a:fillRef>
+          <a:effectRef idx="2">
+            <a:schemeClr val="accent1"/>
+          </a:effectRef>
+          <a:fontRef idx="minor">
+            <a:schemeClr val="lt1"/>
+          </a:fontRef>
+        </p:style>
+        <p:txBody>
+          <a:bodyPr rtlCol="0" anchor="ctr"/>
+          <a:lstStyle/>
+          <a:p>
+            <a:pPr algn="ctr"/>
+          </a:p>
+        </p:txBody>
+      </p:sp>
+      <p:sp>
+        <p:nvSpPr>
+          <p:cNvPr id="14" name="Rounded Rectangle 13"/>
+          <p:cNvSpPr/>
+          <p:nvPr/>
+        </p:nvSpPr>
+        <p:spPr>
+          <a:xfrm>
+            <a:off x="1737360" y="3265322"/>
+            <a:ext cx="2423160" cy="1176832"/>
+          </a:xfrm>
+          <a:prstGeom prst="roundRect">
+            <a:avLst/>
+          </a:prstGeom>
+          <a:solidFill>
+            <a:srgbClr val="FFF7E0"/>
+          </a:solidFill>
+          <a:ln w="12700">
             <a:solidFill>
-              <a:srgbClr val="1B7F3A"/>
+              <a:srgbClr val="FCD116"/>
             </a:solidFill>
           </a:ln>
         </p:spPr>
         <p:style>
-          <a:lnRef idx="2">
-            <a:schemeClr val="accent1"/>
-          </a:lnRef>
-          <a:fillRef idx="0">
-            <a:schemeClr val="accent1"/>
-          </a:fillRef>
-          <a:effectRef idx="1">
-            <a:schemeClr val="accent1"/>
-          </a:effectRef>
-          <a:fontRef idx="minor">
-            <a:schemeClr val="tx1"/>
-          </a:fontRef>
-        </p:style>
-      </p:cxnSp>
-      <p:sp>
-        <p:nvSpPr>
-          <p:cNvPr id="15" name="Oval 14"/>
-          <p:cNvSpPr/>
-          <p:nvPr/>
-        </p:nvSpPr>
-        <p:spPr>
-          <a:xfrm>
-            <a:off x="2551176" y="4517136"/>
-            <a:ext cx="658368" cy="658368"/>
-          </a:xfrm>
-          <a:prstGeom prst="ellipse">
-            <a:avLst/>
-          </a:prstGeom>
-          <a:solidFill>
-            <a:srgbClr val="FFFFFF"/>
-          </a:solidFill>
-          <a:ln w="22860">
-            <a:solidFill>
-              <a:srgbClr val="D90000"/>
-            </a:solidFill>
+          <a:lnRef idx="1">
+            <a:schemeClr val="accent1"/>
+          </a:lnRef>
+          <a:fillRef idx="3">
+            <a:schemeClr val="accent1"/>
+          </a:fillRef>
+          <a:effectRef idx="2">
+            <a:schemeClr val="accent1"/>
+          </a:effectRef>
+          <a:fontRef idx="minor">
+            <a:schemeClr val="lt1"/>
+          </a:fontRef>
+        </p:style>
+        <p:txBody>
+          <a:bodyPr rtlCol="0" anchor="ctr"/>
+          <a:lstStyle/>
+          <a:p>
+            <a:pPr algn="ctr"/>
+          </a:p>
+        </p:txBody>
+      </p:sp>
+      <p:sp>
+        <p:nvSpPr>
+          <p:cNvPr id="15" name="Rectangle 14"/>
+          <p:cNvSpPr/>
+          <p:nvPr/>
+        </p:nvSpPr>
+        <p:spPr>
+          <a:xfrm>
+            <a:off x="2028139" y="3838651"/>
+            <a:ext cx="1841601" cy="60350"/>
+          </a:xfrm>
+          <a:prstGeom prst="rect">
+            <a:avLst/>
+          </a:prstGeom>
+          <a:solidFill>
+            <a:srgbClr val="CBD5E1"/>
+          </a:solidFill>
+          <a:ln>
+            <a:noFill/>
           </a:ln>
         </p:spPr>
         <p:style>
@@ -9808,43 +10722,8 @@
         </p:nvSpPr>
         <p:spPr>
           <a:xfrm>
-            <a:off x="2715768" y="4700016"/>
-            <a:ext cx="329184" cy="201168"/>
-          </a:xfrm>
-          <a:prstGeom prst="rect">
-            <a:avLst/>
-          </a:prstGeom>
-          <a:noFill/>
-        </p:spPr>
-        <p:txBody>
-          <a:bodyPr wrap="square" lIns="0" rIns="0" tIns="0" bIns="0">
-            <a:spAutoFit/>
-          </a:bodyPr>
-          <a:lstStyle/>
-          <a:p>
-            <a:pPr algn="ctr"/>
-            <a:r>
-              <a:rPr sz="1300" b="1">
-                <a:solidFill>
-                  <a:srgbClr val="D90000"/>
-                </a:solidFill>
-                <a:latin typeface="Arial"/>
-              </a:rPr>
-              <a:t>1</a:t>
-            </a:r>
-          </a:p>
-        </p:txBody>
-      </p:sp>
-      <p:sp>
-        <p:nvSpPr>
-          <p:cNvPr id="17" name="TextBox 16"/>
-          <p:cNvSpPr txBox="1"/>
-          <p:nvPr/>
-        </p:nvSpPr>
-        <p:spPr>
-          <a:xfrm>
-            <a:off x="2039112" y="5349240"/>
-            <a:ext cx="1691640" cy="658368"/>
+            <a:off x="1956815" y="3602736"/>
+            <a:ext cx="1984248" cy="347472"/>
           </a:xfrm>
           <a:prstGeom prst="rect">
             <a:avLst/>
@@ -9872,24 +10751,24 @@
       </p:sp>
       <p:sp>
         <p:nvSpPr>
-          <p:cNvPr id="18" name="Oval 17"/>
-          <p:cNvSpPr/>
-          <p:nvPr/>
-        </p:nvSpPr>
-        <p:spPr>
-          <a:xfrm>
-            <a:off x="5751575" y="3694176"/>
-            <a:ext cx="658368" cy="658368"/>
-          </a:xfrm>
-          <a:prstGeom prst="ellipse">
+          <p:cNvPr id="17" name="Rounded Rectangle 16"/>
+          <p:cNvSpPr/>
+          <p:nvPr/>
+        </p:nvSpPr>
+        <p:spPr>
+          <a:xfrm>
+            <a:off x="1965960" y="4818888"/>
+            <a:ext cx="1965960" cy="621792"/>
+          </a:xfrm>
+          <a:prstGeom prst="roundRect">
             <a:avLst/>
           </a:prstGeom>
           <a:solidFill>
             <a:srgbClr val="FFFFFF"/>
           </a:solidFill>
-          <a:ln w="22860">
+          <a:ln w="10160">
             <a:solidFill>
-              <a:srgbClr val="1B7F3A"/>
+              <a:srgbClr val="CBD5E1"/>
             </a:solidFill>
           </a:ln>
         </p:spPr>
@@ -9917,14 +10796,14 @@
       </p:sp>
       <p:sp>
         <p:nvSpPr>
-          <p:cNvPr id="19" name="TextBox 18"/>
+          <p:cNvPr id="18" name="TextBox 17"/>
           <p:cNvSpPr txBox="1"/>
           <p:nvPr/>
         </p:nvSpPr>
         <p:spPr>
           <a:xfrm>
-            <a:off x="5916168" y="3877056"/>
-            <a:ext cx="329184" cy="201168"/>
+            <a:off x="2103120" y="5001768"/>
+            <a:ext cx="1691640" cy="201168"/>
           </a:xfrm>
           <a:prstGeom prst="rect">
             <a:avLst/>
@@ -9939,27 +10818,160 @@
           <a:p>
             <a:pPr algn="ctr"/>
             <a:r>
-              <a:rPr sz="1300" b="1">
+              <a:rPr sz="1000" b="1">
                 <a:solidFill>
                   <a:srgbClr val="1B7F3A"/>
                 </a:solidFill>
                 <a:latin typeface="Arial"/>
               </a:rPr>
-              <a:t>2</a:t>
-            </a:r>
-          </a:p>
-        </p:txBody>
-      </p:sp>
-      <p:sp>
-        <p:nvSpPr>
-          <p:cNvPr id="20" name="TextBox 19"/>
+              <a:t>choose</a:t>
+            </a:r>
+          </a:p>
+        </p:txBody>
+      </p:sp>
+      <p:sp>
+        <p:nvSpPr>
+          <p:cNvPr id="19" name="Rectangle 18"/>
+          <p:cNvSpPr/>
+          <p:nvPr/>
+        </p:nvSpPr>
+        <p:spPr>
+          <a:xfrm>
+            <a:off x="5085892" y="3054096"/>
+            <a:ext cx="872337" cy="331927"/>
+          </a:xfrm>
+          <a:prstGeom prst="rect">
+            <a:avLst/>
+          </a:prstGeom>
+          <a:solidFill>
+            <a:srgbClr val="1D4ED8"/>
+          </a:solidFill>
+          <a:ln w="6350">
+            <a:solidFill>
+              <a:srgbClr val="111827"/>
+            </a:solidFill>
+          </a:ln>
+        </p:spPr>
+        <p:style>
+          <a:lnRef idx="1">
+            <a:schemeClr val="accent1"/>
+          </a:lnRef>
+          <a:fillRef idx="3">
+            <a:schemeClr val="accent1"/>
+          </a:fillRef>
+          <a:effectRef idx="2">
+            <a:schemeClr val="accent1"/>
+          </a:effectRef>
+          <a:fontRef idx="minor">
+            <a:schemeClr val="lt1"/>
+          </a:fontRef>
+        </p:style>
+        <p:txBody>
+          <a:bodyPr rtlCol="0" anchor="ctr"/>
+          <a:lstStyle/>
+          <a:p>
+            <a:pPr algn="ctr"/>
+          </a:p>
+        </p:txBody>
+      </p:sp>
+      <p:sp>
+        <p:nvSpPr>
+          <p:cNvPr id="20" name="Rounded Rectangle 19"/>
+          <p:cNvSpPr/>
+          <p:nvPr/>
+        </p:nvSpPr>
+        <p:spPr>
+          <a:xfrm>
+            <a:off x="4892040" y="3265322"/>
+            <a:ext cx="2423160" cy="1176832"/>
+          </a:xfrm>
+          <a:prstGeom prst="roundRect">
+            <a:avLst/>
+          </a:prstGeom>
+          <a:solidFill>
+            <a:srgbClr val="FFF7E0"/>
+          </a:solidFill>
+          <a:ln w="12700">
+            <a:solidFill>
+              <a:srgbClr val="1D4ED8"/>
+            </a:solidFill>
+          </a:ln>
+        </p:spPr>
+        <p:style>
+          <a:lnRef idx="1">
+            <a:schemeClr val="accent1"/>
+          </a:lnRef>
+          <a:fillRef idx="3">
+            <a:schemeClr val="accent1"/>
+          </a:fillRef>
+          <a:effectRef idx="2">
+            <a:schemeClr val="accent1"/>
+          </a:effectRef>
+          <a:fontRef idx="minor">
+            <a:schemeClr val="lt1"/>
+          </a:fontRef>
+        </p:style>
+        <p:txBody>
+          <a:bodyPr rtlCol="0" anchor="ctr"/>
+          <a:lstStyle/>
+          <a:p>
+            <a:pPr algn="ctr"/>
+          </a:p>
+        </p:txBody>
+      </p:sp>
+      <p:sp>
+        <p:nvSpPr>
+          <p:cNvPr id="21" name="Rectangle 20"/>
+          <p:cNvSpPr/>
+          <p:nvPr/>
+        </p:nvSpPr>
+        <p:spPr>
+          <a:xfrm>
+            <a:off x="5182819" y="3838651"/>
+            <a:ext cx="1841601" cy="60350"/>
+          </a:xfrm>
+          <a:prstGeom prst="rect">
+            <a:avLst/>
+          </a:prstGeom>
+          <a:solidFill>
+            <a:srgbClr val="CBD5E1"/>
+          </a:solidFill>
+          <a:ln>
+            <a:noFill/>
+          </a:ln>
+        </p:spPr>
+        <p:style>
+          <a:lnRef idx="1">
+            <a:schemeClr val="accent1"/>
+          </a:lnRef>
+          <a:fillRef idx="3">
+            <a:schemeClr val="accent1"/>
+          </a:fillRef>
+          <a:effectRef idx="2">
+            <a:schemeClr val="accent1"/>
+          </a:effectRef>
+          <a:fontRef idx="minor">
+            <a:schemeClr val="lt1"/>
+          </a:fontRef>
+        </p:style>
+        <p:txBody>
+          <a:bodyPr rtlCol="0" anchor="ctr"/>
+          <a:lstStyle/>
+          <a:p>
+            <a:pPr algn="ctr"/>
+          </a:p>
+        </p:txBody>
+      </p:sp>
+      <p:sp>
+        <p:nvSpPr>
+          <p:cNvPr id="22" name="TextBox 21"/>
           <p:cNvSpPr txBox="1"/>
           <p:nvPr/>
         </p:nvSpPr>
         <p:spPr>
           <a:xfrm>
-            <a:off x="5239512" y="4526280"/>
-            <a:ext cx="1691640" cy="658368"/>
+            <a:off x="5111496" y="3602736"/>
+            <a:ext cx="1984248" cy="347472"/>
           </a:xfrm>
           <a:prstGeom prst="rect">
             <a:avLst/>
@@ -9987,24 +10999,24 @@
       </p:sp>
       <p:sp>
         <p:nvSpPr>
-          <p:cNvPr id="21" name="Oval 20"/>
-          <p:cNvSpPr/>
-          <p:nvPr/>
-        </p:nvSpPr>
-        <p:spPr>
-          <a:xfrm>
-            <a:off x="8951976" y="4517136"/>
-            <a:ext cx="658368" cy="658368"/>
-          </a:xfrm>
-          <a:prstGeom prst="ellipse">
+          <p:cNvPr id="23" name="Rounded Rectangle 22"/>
+          <p:cNvSpPr/>
+          <p:nvPr/>
+        </p:nvSpPr>
+        <p:spPr>
+          <a:xfrm>
+            <a:off x="5120640" y="4818888"/>
+            <a:ext cx="1965960" cy="621792"/>
+          </a:xfrm>
+          <a:prstGeom prst="roundRect">
             <a:avLst/>
           </a:prstGeom>
           <a:solidFill>
             <a:srgbClr val="FFFFFF"/>
           </a:solidFill>
-          <a:ln w="22860">
+          <a:ln w="10160">
             <a:solidFill>
-              <a:srgbClr val="D90000"/>
+              <a:srgbClr val="CBD5E1"/>
             </a:solidFill>
           </a:ln>
         </p:spPr>
@@ -10032,14 +11044,14 @@
       </p:sp>
       <p:sp>
         <p:nvSpPr>
-          <p:cNvPr id="22" name="TextBox 21"/>
+          <p:cNvPr id="24" name="TextBox 23"/>
           <p:cNvSpPr txBox="1"/>
           <p:nvPr/>
         </p:nvSpPr>
         <p:spPr>
           <a:xfrm>
-            <a:off x="9116568" y="4700016"/>
-            <a:ext cx="329184" cy="201168"/>
+            <a:off x="5257800" y="5001768"/>
+            <a:ext cx="1691640" cy="201168"/>
           </a:xfrm>
           <a:prstGeom prst="rect">
             <a:avLst/>
@@ -10054,27 +11066,160 @@
           <a:p>
             <a:pPr algn="ctr"/>
             <a:r>
-              <a:rPr sz="1300" b="1">
+              <a:rPr sz="1000" b="1">
                 <a:solidFill>
-                  <a:srgbClr val="D90000"/>
+                  <a:srgbClr val="1B7F3A"/>
                 </a:solidFill>
                 <a:latin typeface="Arial"/>
               </a:rPr>
-              <a:t>3</a:t>
-            </a:r>
-          </a:p>
-        </p:txBody>
-      </p:sp>
-      <p:sp>
-        <p:nvSpPr>
-          <p:cNvPr id="23" name="TextBox 22"/>
+              <a:t>check</a:t>
+            </a:r>
+          </a:p>
+        </p:txBody>
+      </p:sp>
+      <p:sp>
+        <p:nvSpPr>
+          <p:cNvPr id="25" name="Rectangle 24"/>
+          <p:cNvSpPr/>
+          <p:nvPr/>
+        </p:nvSpPr>
+        <p:spPr>
+          <a:xfrm>
+            <a:off x="8240572" y="3054096"/>
+            <a:ext cx="872337" cy="331927"/>
+          </a:xfrm>
+          <a:prstGeom prst="rect">
+            <a:avLst/>
+          </a:prstGeom>
+          <a:solidFill>
+            <a:srgbClr val="1B7F3A"/>
+          </a:solidFill>
+          <a:ln w="6350">
+            <a:solidFill>
+              <a:srgbClr val="111827"/>
+            </a:solidFill>
+          </a:ln>
+        </p:spPr>
+        <p:style>
+          <a:lnRef idx="1">
+            <a:schemeClr val="accent1"/>
+          </a:lnRef>
+          <a:fillRef idx="3">
+            <a:schemeClr val="accent1"/>
+          </a:fillRef>
+          <a:effectRef idx="2">
+            <a:schemeClr val="accent1"/>
+          </a:effectRef>
+          <a:fontRef idx="minor">
+            <a:schemeClr val="lt1"/>
+          </a:fontRef>
+        </p:style>
+        <p:txBody>
+          <a:bodyPr rtlCol="0" anchor="ctr"/>
+          <a:lstStyle/>
+          <a:p>
+            <a:pPr algn="ctr"/>
+          </a:p>
+        </p:txBody>
+      </p:sp>
+      <p:sp>
+        <p:nvSpPr>
+          <p:cNvPr id="26" name="Rounded Rectangle 25"/>
+          <p:cNvSpPr/>
+          <p:nvPr/>
+        </p:nvSpPr>
+        <p:spPr>
+          <a:xfrm>
+            <a:off x="8046720" y="3265322"/>
+            <a:ext cx="2423160" cy="1176832"/>
+          </a:xfrm>
+          <a:prstGeom prst="roundRect">
+            <a:avLst/>
+          </a:prstGeom>
+          <a:solidFill>
+            <a:srgbClr val="FFF7E0"/>
+          </a:solidFill>
+          <a:ln w="12700">
+            <a:solidFill>
+              <a:srgbClr val="1B7F3A"/>
+            </a:solidFill>
+          </a:ln>
+        </p:spPr>
+        <p:style>
+          <a:lnRef idx="1">
+            <a:schemeClr val="accent1"/>
+          </a:lnRef>
+          <a:fillRef idx="3">
+            <a:schemeClr val="accent1"/>
+          </a:fillRef>
+          <a:effectRef idx="2">
+            <a:schemeClr val="accent1"/>
+          </a:effectRef>
+          <a:fontRef idx="minor">
+            <a:schemeClr val="lt1"/>
+          </a:fontRef>
+        </p:style>
+        <p:txBody>
+          <a:bodyPr rtlCol="0" anchor="ctr"/>
+          <a:lstStyle/>
+          <a:p>
+            <a:pPr algn="ctr"/>
+          </a:p>
+        </p:txBody>
+      </p:sp>
+      <p:sp>
+        <p:nvSpPr>
+          <p:cNvPr id="27" name="Rectangle 26"/>
+          <p:cNvSpPr/>
+          <p:nvPr/>
+        </p:nvSpPr>
+        <p:spPr>
+          <a:xfrm>
+            <a:off x="8337499" y="3838651"/>
+            <a:ext cx="1841601" cy="60350"/>
+          </a:xfrm>
+          <a:prstGeom prst="rect">
+            <a:avLst/>
+          </a:prstGeom>
+          <a:solidFill>
+            <a:srgbClr val="CBD5E1"/>
+          </a:solidFill>
+          <a:ln>
+            <a:noFill/>
+          </a:ln>
+        </p:spPr>
+        <p:style>
+          <a:lnRef idx="1">
+            <a:schemeClr val="accent1"/>
+          </a:lnRef>
+          <a:fillRef idx="3">
+            <a:schemeClr val="accent1"/>
+          </a:fillRef>
+          <a:effectRef idx="2">
+            <a:schemeClr val="accent1"/>
+          </a:effectRef>
+          <a:fontRef idx="minor">
+            <a:schemeClr val="lt1"/>
+          </a:fontRef>
+        </p:style>
+        <p:txBody>
+          <a:bodyPr rtlCol="0" anchor="ctr"/>
+          <a:lstStyle/>
+          <a:p>
+            <a:pPr algn="ctr"/>
+          </a:p>
+        </p:txBody>
+      </p:sp>
+      <p:sp>
+        <p:nvSpPr>
+          <p:cNvPr id="28" name="TextBox 27"/>
           <p:cNvSpPr txBox="1"/>
           <p:nvPr/>
         </p:nvSpPr>
         <p:spPr>
           <a:xfrm>
-            <a:off x="8439912" y="5349240"/>
-            <a:ext cx="1691640" cy="658368"/>
+            <a:off x="8266176" y="3602736"/>
+            <a:ext cx="1984248" cy="347472"/>
           </a:xfrm>
           <a:prstGeom prst="rect">
             <a:avLst/>
@@ -10102,7 +11247,122 @@
       </p:sp>
       <p:sp>
         <p:nvSpPr>
-          <p:cNvPr id="24" name="Rounded Rectangle 23"/>
+          <p:cNvPr id="29" name="Rounded Rectangle 28"/>
+          <p:cNvSpPr/>
+          <p:nvPr/>
+        </p:nvSpPr>
+        <p:spPr>
+          <a:xfrm>
+            <a:off x="8275320" y="4818888"/>
+            <a:ext cx="1965960" cy="621792"/>
+          </a:xfrm>
+          <a:prstGeom prst="roundRect">
+            <a:avLst/>
+          </a:prstGeom>
+          <a:solidFill>
+            <a:srgbClr val="FFFFFF"/>
+          </a:solidFill>
+          <a:ln w="10160">
+            <a:solidFill>
+              <a:srgbClr val="CBD5E1"/>
+            </a:solidFill>
+          </a:ln>
+        </p:spPr>
+        <p:style>
+          <a:lnRef idx="1">
+            <a:schemeClr val="accent1"/>
+          </a:lnRef>
+          <a:fillRef idx="3">
+            <a:schemeClr val="accent1"/>
+          </a:fillRef>
+          <a:effectRef idx="2">
+            <a:schemeClr val="accent1"/>
+          </a:effectRef>
+          <a:fontRef idx="minor">
+            <a:schemeClr val="lt1"/>
+          </a:fontRef>
+        </p:style>
+        <p:txBody>
+          <a:bodyPr rtlCol="0" anchor="ctr"/>
+          <a:lstStyle/>
+          <a:p>
+            <a:pPr algn="ctr"/>
+          </a:p>
+        </p:txBody>
+      </p:sp>
+      <p:sp>
+        <p:nvSpPr>
+          <p:cNvPr id="30" name="TextBox 29"/>
+          <p:cNvSpPr txBox="1"/>
+          <p:nvPr/>
+        </p:nvSpPr>
+        <p:spPr>
+          <a:xfrm>
+            <a:off x="8412480" y="5001768"/>
+            <a:ext cx="1691640" cy="201168"/>
+          </a:xfrm>
+          <a:prstGeom prst="rect">
+            <a:avLst/>
+          </a:prstGeom>
+          <a:noFill/>
+        </p:spPr>
+        <p:txBody>
+          <a:bodyPr wrap="square" lIns="0" rIns="0" tIns="0" bIns="0">
+            <a:spAutoFit/>
+          </a:bodyPr>
+          <a:lstStyle/>
+          <a:p>
+            <a:pPr algn="ctr"/>
+            <a:r>
+              <a:rPr sz="1000" b="1">
+                <a:solidFill>
+                  <a:srgbClr val="1B7F3A"/>
+                </a:solidFill>
+                <a:latin typeface="Arial"/>
+              </a:rPr>
+              <a:t>present</a:t>
+            </a:r>
+          </a:p>
+        </p:txBody>
+      </p:sp>
+      <p:cxnSp>
+        <p:nvCxnSpPr>
+          <p:cNvPr id="31" name="Connector 30"/>
+          <p:cNvCxnSpPr/>
+          <p:nvPr/>
+        </p:nvCxnSpPr>
+        <p:spPr>
+          <a:xfrm>
+            <a:off x="2926080" y="5742432"/>
+            <a:ext cx="6355080" cy="0"/>
+          </a:xfrm>
+          <a:prstGeom prst="line">
+            <a:avLst/>
+          </a:prstGeom>
+          <a:ln w="27940">
+            <a:solidFill>
+              <a:srgbClr val="D90000"/>
+            </a:solidFill>
+          </a:ln>
+        </p:spPr>
+        <p:style>
+          <a:lnRef idx="2">
+            <a:schemeClr val="accent1"/>
+          </a:lnRef>
+          <a:fillRef idx="0">
+            <a:schemeClr val="accent1"/>
+          </a:fillRef>
+          <a:effectRef idx="1">
+            <a:schemeClr val="accent1"/>
+          </a:effectRef>
+          <a:fontRef idx="minor">
+            <a:schemeClr val="tx1"/>
+          </a:fontRef>
+        </p:style>
+      </p:cxnSp>
+      <p:sp>
+        <p:nvSpPr>
+          <p:cNvPr id="32" name="Rounded Rectangle 31"/>
           <p:cNvSpPr/>
           <p:nvPr/>
         </p:nvSpPr>
@@ -10147,7 +11407,7 @@
       </p:sp>
       <p:sp>
         <p:nvSpPr>
-          <p:cNvPr id="25" name="TextBox 24"/>
+          <p:cNvPr id="33" name="TextBox 32"/>
           <p:cNvSpPr txBox="1"/>
           <p:nvPr/>
         </p:nvSpPr>
@@ -10182,7 +11442,7 @@
       </p:sp>
       <p:sp>
         <p:nvSpPr>
-          <p:cNvPr id="26" name="TextBox 25"/>
+          <p:cNvPr id="34" name="TextBox 33"/>
           <p:cNvSpPr txBox="1"/>
           <p:nvPr/>
         </p:nvSpPr>
